--- a/day2-deck/decks/Labor Mix - House Style.pptx
+++ b/day2-deck/decks/Labor Mix - House Style.pptx
@@ -193,9 +193,9 @@
           </c:marker>
           <c:cat>
             <c:multiLvlStrRef>
-              <c:f>Sheet1!$A$2:$A$10</c:f>
+              <c:f>Sheet1!$A$2:$A$13</c:f>
               <c:multiLvlStrCache>
-                <c:ptCount val="9"/>
+                <c:ptCount val="12"/>
                 <c:lvl>
                   <c:pt idx="0">
                     <c:v>Jan</c:v>
@@ -224,16 +224,25 @@
                   <c:pt idx="8">
                     <c:v>Sep</c:v>
                   </c:pt>
+                  <c:pt idx="9">
+                    <c:v>Oct</c:v>
+                  </c:pt>
+                  <c:pt idx="10">
+                    <c:v>Nov</c:v>
+                  </c:pt>
+                  <c:pt idx="11">
+                    <c:v>Dec</c:v>
+                  </c:pt>
                 </c:lvl>
               </c:multiLvlStrCache>
             </c:multiLvlStrRef>
           </c:cat>
           <c:val>
             <c:numRef>
-              <c:f>Sheet1!$B$2:$B$10</c:f>
+              <c:f>Sheet1!$B$2:$B$13</c:f>
               <c:numCache>
                 <c:formatCode>General</c:formatCode>
-                <c:ptCount val="9"/>
+                <c:ptCount val="12"/>
                 <c:pt idx="0">
                   <c:v>52.3</c:v>
                 </c:pt>
@@ -260,6 +269,15 @@
                 </c:pt>
                 <c:pt idx="8">
                   <c:v>50.7</c:v>
+                </c:pt>
+                <c:pt idx="9">
+                  <c:v/>
+                </c:pt>
+                <c:pt idx="10">
+                  <c:v/>
+                </c:pt>
+                <c:pt idx="11">
+                  <c:v/>
                 </c:pt>
               </c:numCache>
             </c:numRef>
@@ -476,9 +494,9 @@
           </c:marker>
           <c:cat>
             <c:multiLvlStrRef>
-              <c:f>Sheet1!$A$2:$A$10</c:f>
+              <c:f>Sheet1!$A$2:$A$13</c:f>
               <c:multiLvlStrCache>
-                <c:ptCount val="9"/>
+                <c:ptCount val="12"/>
                 <c:lvl>
                   <c:pt idx="0">
                     <c:v>Jan</c:v>
@@ -507,16 +525,25 @@
                   <c:pt idx="8">
                     <c:v>Sep</c:v>
                   </c:pt>
+                  <c:pt idx="9">
+                    <c:v>Oct</c:v>
+                  </c:pt>
+                  <c:pt idx="10">
+                    <c:v>Nov</c:v>
+                  </c:pt>
+                  <c:pt idx="11">
+                    <c:v>Dec</c:v>
+                  </c:pt>
                 </c:lvl>
               </c:multiLvlStrCache>
             </c:multiLvlStrRef>
           </c:cat>
           <c:val>
             <c:numRef>
-              <c:f>Sheet1!$B$2:$B$10</c:f>
+              <c:f>Sheet1!$B$2:$B$13</c:f>
               <c:numCache>
                 <c:formatCode>General</c:formatCode>
-                <c:ptCount val="9"/>
+                <c:ptCount val="12"/>
                 <c:pt idx="0">
                   <c:v>52.3</c:v>
                 </c:pt>
@@ -542,6 +569,15 @@
                   <c:v/>
                 </c:pt>
                 <c:pt idx="8">
+                  <c:v/>
+                </c:pt>
+                <c:pt idx="9">
+                  <c:v/>
+                </c:pt>
+                <c:pt idx="10">
+                  <c:v/>
+                </c:pt>
+                <c:pt idx="11">
                   <c:v/>
                 </c:pt>
               </c:numCache>
@@ -768,9 +804,9 @@
           </c:marker>
           <c:cat>
             <c:multiLvlStrRef>
-              <c:f>Sheet1!$A$2:$A$10</c:f>
+              <c:f>Sheet1!$A$2:$A$13</c:f>
               <c:multiLvlStrCache>
-                <c:ptCount val="9"/>
+                <c:ptCount val="12"/>
                 <c:lvl>
                   <c:pt idx="0">
                     <c:v>Jan</c:v>
@@ -799,16 +835,25 @@
                   <c:pt idx="8">
                     <c:v>Sep</c:v>
                   </c:pt>
+                  <c:pt idx="9">
+                    <c:v>Oct</c:v>
+                  </c:pt>
+                  <c:pt idx="10">
+                    <c:v>Nov</c:v>
+                  </c:pt>
+                  <c:pt idx="11">
+                    <c:v>Dec</c:v>
+                  </c:pt>
                 </c:lvl>
               </c:multiLvlStrCache>
             </c:multiLvlStrRef>
           </c:cat>
           <c:val>
             <c:numRef>
-              <c:f>Sheet1!$B$2:$B$10</c:f>
+              <c:f>Sheet1!$B$2:$B$13</c:f>
               <c:numCache>
                 <c:formatCode>General</c:formatCode>
-                <c:ptCount val="9"/>
+                <c:ptCount val="12"/>
                 <c:pt idx="0">
                   <c:v/>
                 </c:pt>
@@ -835,6 +880,15 @@
                 </c:pt>
                 <c:pt idx="8">
                   <c:v>50.7</c:v>
+                </c:pt>
+                <c:pt idx="9">
+                  <c:v/>
+                </c:pt>
+                <c:pt idx="10">
+                  <c:v/>
+                </c:pt>
+                <c:pt idx="11">
+                  <c:v/>
                 </c:pt>
               </c:numCache>
             </c:numRef>
@@ -1060,9 +1114,9 @@
           </c:marker>
           <c:cat>
             <c:multiLvlStrRef>
-              <c:f>Sheet1!$A$2:$A$10</c:f>
+              <c:f>Sheet1!$A$2:$A$13</c:f>
               <c:multiLvlStrCache>
-                <c:ptCount val="9"/>
+                <c:ptCount val="12"/>
                 <c:lvl>
                   <c:pt idx="0">
                     <c:v>Jan</c:v>
@@ -1091,16 +1145,25 @@
                   <c:pt idx="8">
                     <c:v>Sep</c:v>
                   </c:pt>
+                  <c:pt idx="9">
+                    <c:v>Oct</c:v>
+                  </c:pt>
+                  <c:pt idx="10">
+                    <c:v>Nov</c:v>
+                  </c:pt>
+                  <c:pt idx="11">
+                    <c:v>Dec</c:v>
+                  </c:pt>
                 </c:lvl>
               </c:multiLvlStrCache>
             </c:multiLvlStrRef>
           </c:cat>
           <c:val>
             <c:numRef>
-              <c:f>Sheet1!$B$2:$B$10</c:f>
+              <c:f>Sheet1!$B$2:$B$13</c:f>
               <c:numCache>
                 <c:formatCode>General</c:formatCode>
-                <c:ptCount val="9"/>
+                <c:ptCount val="12"/>
                 <c:pt idx="0">
                   <c:v/>
                 </c:pt>
@@ -1127,6 +1190,15 @@
                 </c:pt>
                 <c:pt idx="8">
                   <c:v>53.4</c:v>
+                </c:pt>
+                <c:pt idx="9">
+                  <c:v>52.6</c:v>
+                </c:pt>
+                <c:pt idx="10">
+                  <c:v>54.1</c:v>
+                </c:pt>
+                <c:pt idx="11">
+                  <c:v>52</c:v>
                 </c:pt>
               </c:numCache>
             </c:numRef>
@@ -1352,9 +1424,9 @@
           </c:marker>
           <c:cat>
             <c:multiLvlStrRef>
-              <c:f>Sheet1!$A$2:$A$10</c:f>
+              <c:f>Sheet1!$A$2:$A$13</c:f>
               <c:multiLvlStrCache>
-                <c:ptCount val="9"/>
+                <c:ptCount val="12"/>
                 <c:lvl>
                   <c:pt idx="0">
                     <c:v>Jan</c:v>
@@ -1383,16 +1455,25 @@
                   <c:pt idx="8">
                     <c:v>Sep</c:v>
                   </c:pt>
+                  <c:pt idx="9">
+                    <c:v>Oct</c:v>
+                  </c:pt>
+                  <c:pt idx="10">
+                    <c:v>Nov</c:v>
+                  </c:pt>
+                  <c:pt idx="11">
+                    <c:v>Dec</c:v>
+                  </c:pt>
                 </c:lvl>
               </c:multiLvlStrCache>
             </c:multiLvlStrRef>
           </c:cat>
           <c:val>
             <c:numRef>
-              <c:f>Sheet1!$B$2:$B$10</c:f>
+              <c:f>Sheet1!$B$2:$B$13</c:f>
               <c:numCache>
                 <c:formatCode>General</c:formatCode>
-                <c:ptCount val="9"/>
+                <c:ptCount val="12"/>
                 <c:pt idx="0">
                   <c:v>51.3</c:v>
                 </c:pt>
@@ -1418,6 +1499,15 @@
                   <c:v/>
                 </c:pt>
                 <c:pt idx="8">
+                  <c:v/>
+                </c:pt>
+                <c:pt idx="9">
+                  <c:v/>
+                </c:pt>
+                <c:pt idx="10">
+                  <c:v/>
+                </c:pt>
+                <c:pt idx="11">
                   <c:v/>
                 </c:pt>
               </c:numCache>
@@ -1647,9 +1737,9 @@
           </c:marker>
           <c:cat>
             <c:multiLvlStrRef>
-              <c:f>Sheet1!$A$2:$A$10</c:f>
+              <c:f>Sheet1!$A$2:$A$13</c:f>
               <c:multiLvlStrCache>
-                <c:ptCount val="9"/>
+                <c:ptCount val="12"/>
                 <c:lvl>
                   <c:pt idx="0">
                     <c:v>Jan</c:v>
@@ -1678,16 +1768,25 @@
                   <c:pt idx="8">
                     <c:v>Sep</c:v>
                   </c:pt>
+                  <c:pt idx="9">
+                    <c:v>Oct</c:v>
+                  </c:pt>
+                  <c:pt idx="10">
+                    <c:v>Nov</c:v>
+                  </c:pt>
+                  <c:pt idx="11">
+                    <c:v>Dec</c:v>
+                  </c:pt>
                 </c:lvl>
               </c:multiLvlStrCache>
             </c:multiLvlStrRef>
           </c:cat>
           <c:val>
             <c:numRef>
-              <c:f>Sheet1!$B$2:$B$10</c:f>
+              <c:f>Sheet1!$B$2:$B$13</c:f>
               <c:numCache>
                 <c:formatCode>General</c:formatCode>
-                <c:ptCount val="9"/>
+                <c:ptCount val="12"/>
                 <c:pt idx="0">
                   <c:v>51.3</c:v>
                 </c:pt>
@@ -1714,6 +1813,15 @@
                 </c:pt>
                 <c:pt idx="8">
                   <c:v>53.4</c:v>
+                </c:pt>
+                <c:pt idx="9">
+                  <c:v>52.6</c:v>
+                </c:pt>
+                <c:pt idx="10">
+                  <c:v>54.1</c:v>
+                </c:pt>
+                <c:pt idx="11">
+                  <c:v>52</c:v>
                 </c:pt>
               </c:numCache>
             </c:numRef>
@@ -2477,7 +2585,7 @@
           <a:p>
             <a:r>
               <a:rPr lang="en-US" dirty="0"/>
-              <a:t>Source: Qlik - Closed Repair Orders. Labor sale by pay type, Jan-Sep by close month. Same-store, INEOS excluded. GMC Prescott body shop labor types excluded. Customer-pay labor sale / total labor sale (customer pay + warranty + internal). YTD from YTD totals, not the mean of months. Store rows reconcile to the group on every input, both years.</a:t>
+              <a:t>Source: Qlik - Closed Repair Orders. Labor sale by pay type, Jan-Sep by close month. Same-store, INEOS excluded. GMC Prescott body shop labor types excluded. Customer-pay labor sale / total labor sale (customer pay + warranty + internal). YTD from YTD totals, not the mean of months. Store rows reconcile to the group on every input, both years. 2025 shown January-December; October-December pulled Oct 22 on the same basis (chart only).</a:t>
             </a:r>
             <a:endParaRPr lang="en-US" dirty="0"/>
           </a:p>

--- a/day2-deck/decks/Labor Mix - House Style.pptx
+++ b/day2-deck/decks/Labor Mix - House Style.pptx
@@ -2762,7 +2762,7 @@
           <a:p>
             <a:r>
               <a:rPr lang="en-US" dirty="0"/>
-              <a:t>Source: Qlik - Closed Repair Orders. Labor sale by pay type, Jan-Sep by close month. Same-store, INEOS excluded. GMC Prescott body shop labor types excluded. Customer-pay labor sale / total labor sale (customer pay + warranty + internal). Top and bottom five stores by change in Customer Pay Share of Labor Sale, Jan-Sep 2026 vs 2025.Conversation starter: each top store says one thing they started doing; each bottom store says what got in the way and what they would try. The room trades ideas.</a:t>
+              <a:t>Source: Qlik - Closed Repair Orders. Labor sale by pay type, Jan-Sep by close month. Same-store, INEOS excluded. GMC Prescott body shop labor types excluded. Customer-pay labor sale / total labor sale (customer pay + warranty + internal). Top and bottom five stores by change in Customer Pay Share of Labor Sale, Jan-Sep 2026 vs 2025. Moving now: Jul-Sep 2026 vs Jan-Mar 2026, each store against itself; the group moved −0.3 pts on the same basis, so part of every store's change is seasonal.Conversation starter: each top store says one thing they started doing; each bottom store says what got in the way and what they would try. The room trades ideas. Moving now: ask the top three what they started this year.</a:t>
             </a:r>
             <a:endParaRPr lang="en-US" dirty="0"/>
           </a:p>
@@ -17674,14 +17674,34 @@
       </p:sp>
       <p:sp>
         <p:nvSpPr>
-          <p:cNvPr id="6" name="Text 4"/>
-          <p:cNvSpPr txBox="1"/>
-          <p:nvPr/>
-        </p:nvSpPr>
-        <p:spPr>
-          <a:xfrm>
-            <a:off x="713232" y="1298448"/>
-            <a:ext cx="10762488" cy="310896"/>
+          <p:cNvPr id="6" name="Shape 4"/>
+          <p:cNvSpPr/>
+          <p:nvPr/>
+        </p:nvSpPr>
+        <p:spPr>
+          <a:xfrm>
+            <a:off x="658368" y="1371600"/>
+            <a:ext cx="3489960" cy="45720"/>
+          </a:xfrm>
+          <a:prstGeom prst="rect">
+            <a:avLst/>
+          </a:prstGeom>
+          <a:solidFill>
+            <a:srgbClr val="12A566"/>
+          </a:solidFill>
+          <a:ln/>
+        </p:spPr>
+      </p:sp>
+      <p:sp>
+        <p:nvSpPr>
+          <p:cNvPr id="7" name="Text 5"/>
+          <p:cNvSpPr txBox="1"/>
+          <p:nvPr/>
+        </p:nvSpPr>
+        <p:spPr>
+          <a:xfrm>
+            <a:off x="749808" y="1444752"/>
+            <a:ext cx="3307080" cy="274320"/>
           </a:xfrm>
           <a:prstGeom prst="rect">
             <a:avLst/>
@@ -17697,7 +17717,46 @@
               <a:buNone/>
             </a:pPr>
             <a:r>
-              <a:rPr lang="en-US" sz="1400" dirty="0">
+              <a:rPr lang="en-US" sz="1500" b="1" spc="100" kern="0" dirty="0">
+                <a:solidFill>
+                  <a:srgbClr val="0B7A4A"/>
+                </a:solidFill>
+                <a:latin typeface="Inter" pitchFamily="34" charset="0"/>
+                <a:ea typeface="Inter" pitchFamily="34" charset="-122"/>
+                <a:cs typeface="Inter" pitchFamily="34" charset="-120"/>
+              </a:rPr>
+              <a:t>TOP 5 VS LAST YEAR</a:t>
+            </a:r>
+            <a:endParaRPr lang="en-US" sz="1500" dirty="0"/>
+          </a:p>
+        </p:txBody>
+      </p:sp>
+      <p:sp>
+        <p:nvSpPr>
+          <p:cNvPr id="8" name="Text 6"/>
+          <p:cNvSpPr txBox="1"/>
+          <p:nvPr/>
+        </p:nvSpPr>
+        <p:spPr>
+          <a:xfrm>
+            <a:off x="749808" y="1737360"/>
+            <a:ext cx="3307080" cy="274320"/>
+          </a:xfrm>
+          <a:prstGeom prst="rect">
+            <a:avLst/>
+          </a:prstGeom>
+          <a:noFill/>
+          <a:ln/>
+        </p:spPr>
+        <p:txBody>
+          <a:bodyPr wrap="square" lIns="0" tIns="0" rIns="0" bIns="0" rtlCol="0" anchor="ctr"/>
+          <a:lstStyle/>
+          <a:p>
+            <a:pPr indent="0" marL="0">
+              <a:buNone/>
+            </a:pPr>
+            <a:r>
+              <a:rPr lang="en-US" sz="1200" dirty="0">
                 <a:solidFill>
                   <a:srgbClr val="595959"/>
                 </a:solidFill>
@@ -17705,42 +17764,376 @@
                 <a:ea typeface="Inter" pitchFamily="34" charset="-122"/>
                 <a:cs typeface="Inter" pitchFamily="34" charset="-120"/>
               </a:rPr>
-              <a:t>Jan–Sep 2026 against Jan–Sep 2025. Group 52.8% → 52.5% (−0.3 pts). Ranked by change.</a:t>
+              <a:t>Jan–Sep 2026 vs Jan–Sep 2025</a:t>
+            </a:r>
+            <a:endParaRPr lang="en-US" sz="1200" dirty="0"/>
+          </a:p>
+        </p:txBody>
+      </p:sp>
+      <p:sp>
+        <p:nvSpPr>
+          <p:cNvPr id="9" name="Shape 7"/>
+          <p:cNvSpPr/>
+          <p:nvPr/>
+        </p:nvSpPr>
+        <p:spPr>
+          <a:xfrm>
+            <a:off x="658368" y="2103120"/>
+            <a:ext cx="3489960" cy="755294"/>
+          </a:xfrm>
+          <a:prstGeom prst="rect">
+            <a:avLst/>
+          </a:prstGeom>
+          <a:solidFill>
+            <a:srgbClr val="F7F7F7"/>
+          </a:solidFill>
+          <a:ln/>
+        </p:spPr>
+      </p:sp>
+      <p:sp>
+        <p:nvSpPr>
+          <p:cNvPr id="10" name="Text 8"/>
+          <p:cNvSpPr txBox="1"/>
+          <p:nvPr/>
+        </p:nvSpPr>
+        <p:spPr>
+          <a:xfrm>
+            <a:off x="749808" y="2103120"/>
+            <a:ext cx="365760" cy="755294"/>
+          </a:xfrm>
+          <a:prstGeom prst="rect">
+            <a:avLst/>
+          </a:prstGeom>
+          <a:noFill/>
+          <a:ln/>
+        </p:spPr>
+        <p:txBody>
+          <a:bodyPr wrap="square" lIns="0" tIns="0" rIns="0" bIns="0" rtlCol="0" anchor="ctr"/>
+          <a:lstStyle/>
+          <a:p>
+            <a:pPr indent="0" marL="0">
+              <a:buNone/>
+            </a:pPr>
+            <a:r>
+              <a:rPr lang="en-US" sz="1500" b="1" dirty="0">
+                <a:solidFill>
+                  <a:srgbClr val="0B2C4A"/>
+                </a:solidFill>
+                <a:latin typeface="Inter" pitchFamily="34" charset="0"/>
+                <a:ea typeface="Inter" pitchFamily="34" charset="-122"/>
+                <a:cs typeface="Inter" pitchFamily="34" charset="-120"/>
+              </a:rPr>
+              <a:t>1</a:t>
+            </a:r>
+            <a:endParaRPr lang="en-US" sz="1500" dirty="0"/>
+          </a:p>
+        </p:txBody>
+      </p:sp>
+      <p:sp>
+        <p:nvSpPr>
+          <p:cNvPr id="11" name="Text 9"/>
+          <p:cNvSpPr txBox="1"/>
+          <p:nvPr/>
+        </p:nvSpPr>
+        <p:spPr>
+          <a:xfrm>
+            <a:off x="1097280" y="2103120"/>
+            <a:ext cx="1825752" cy="755294"/>
+          </a:xfrm>
+          <a:prstGeom prst="rect">
+            <a:avLst/>
+          </a:prstGeom>
+          <a:noFill/>
+          <a:ln/>
+        </p:spPr>
+        <p:txBody>
+          <a:bodyPr wrap="square" lIns="0" tIns="0" rIns="0" bIns="0" rtlCol="0" anchor="ctr"/>
+          <a:lstStyle/>
+          <a:p>
+            <a:pPr indent="0" marL="0">
+              <a:spcAft>
+                <a:spcPts val="200"/>
+              </a:spcAft>
+              <a:buNone/>
+            </a:pPr>
+            <a:r>
+              <a:rPr lang="en-US" sz="1400" b="1" dirty="0">
+                <a:solidFill>
+                  <a:srgbClr val="1A1A1A"/>
+                </a:solidFill>
+                <a:latin typeface="Inter" pitchFamily="34" charset="0"/>
+                <a:ea typeface="Inter" pitchFamily="34" charset="-122"/>
+                <a:cs typeface="Inter" pitchFamily="34" charset="-120"/>
+              </a:rPr>
+              <a:t>Mazda</a:t>
             </a:r>
             <a:endParaRPr lang="en-US" sz="1400" dirty="0"/>
           </a:p>
-        </p:txBody>
-      </p:sp>
-      <p:sp>
-        <p:nvSpPr>
-          <p:cNvPr id="7" name="Shape 5"/>
+          <a:p>
+            <a:pPr indent="0" marL="0">
+              <a:spcAft>
+                <a:spcPts val="200"/>
+              </a:spcAft>
+              <a:buNone/>
+            </a:pPr>
+            <a:r>
+              <a:rPr lang="en-US" sz="1200" dirty="0">
+                <a:solidFill>
+                  <a:srgbClr val="595959"/>
+                </a:solidFill>
+                <a:latin typeface="Inter" pitchFamily="34" charset="0"/>
+                <a:ea typeface="Inter" pitchFamily="34" charset="-122"/>
+                <a:cs typeface="Inter" pitchFamily="34" charset="-120"/>
+              </a:rPr>
+              <a:t>45.8%  →  </a:t>
+            </a:r>
+            <a:pPr indent="0" marL="0">
+              <a:spcAft>
+                <a:spcPts val="200"/>
+              </a:spcAft>
+              <a:buNone/>
+            </a:pPr>
+            <a:r>
+              <a:rPr lang="en-US" sz="1200" b="1" dirty="0">
+                <a:solidFill>
+                  <a:srgbClr val="0B7A4A"/>
+                </a:solidFill>
+                <a:latin typeface="Inter" pitchFamily="34" charset="0"/>
+                <a:ea typeface="Inter" pitchFamily="34" charset="-122"/>
+                <a:cs typeface="Inter" pitchFamily="34" charset="-120"/>
+              </a:rPr>
+              <a:t>56.6%</a:t>
+            </a:r>
+            <a:endParaRPr lang="en-US" sz="1400" dirty="0"/>
+          </a:p>
+        </p:txBody>
+      </p:sp>
+      <p:sp>
+        <p:nvSpPr>
+          <p:cNvPr id="12" name="Text 10"/>
+          <p:cNvSpPr txBox="1"/>
+          <p:nvPr/>
+        </p:nvSpPr>
+        <p:spPr>
+          <a:xfrm>
+            <a:off x="2941320" y="2103120"/>
+            <a:ext cx="1115568" cy="755294"/>
+          </a:xfrm>
+          <a:prstGeom prst="rect">
+            <a:avLst/>
+          </a:prstGeom>
+          <a:noFill/>
+          <a:ln/>
+        </p:spPr>
+        <p:txBody>
+          <a:bodyPr wrap="square" lIns="0" tIns="0" rIns="0" bIns="0" rtlCol="0" anchor="ctr"/>
+          <a:lstStyle/>
+          <a:p>
+            <a:pPr algn="r" indent="0" marL="0">
+              <a:buNone/>
+            </a:pPr>
+            <a:r>
+              <a:rPr lang="en-US" sz="1600" b="1" dirty="0">
+                <a:solidFill>
+                  <a:srgbClr val="0B7A4A"/>
+                </a:solidFill>
+                <a:latin typeface="Inter" pitchFamily="34" charset="0"/>
+                <a:ea typeface="Inter" pitchFamily="34" charset="-122"/>
+                <a:cs typeface="Inter" pitchFamily="34" charset="-120"/>
+              </a:rPr>
+              <a:t>+10.8 pts</a:t>
+            </a:r>
+            <a:endParaRPr lang="en-US" sz="1600" dirty="0"/>
+          </a:p>
+        </p:txBody>
+      </p:sp>
+      <p:sp>
+        <p:nvSpPr>
+          <p:cNvPr id="13" name="Text 11"/>
+          <p:cNvSpPr txBox="1"/>
+          <p:nvPr/>
+        </p:nvSpPr>
+        <p:spPr>
+          <a:xfrm>
+            <a:off x="749808" y="2858414"/>
+            <a:ext cx="365760" cy="755294"/>
+          </a:xfrm>
+          <a:prstGeom prst="rect">
+            <a:avLst/>
+          </a:prstGeom>
+          <a:noFill/>
+          <a:ln/>
+        </p:spPr>
+        <p:txBody>
+          <a:bodyPr wrap="square" lIns="0" tIns="0" rIns="0" bIns="0" rtlCol="0" anchor="ctr"/>
+          <a:lstStyle/>
+          <a:p>
+            <a:pPr indent="0" marL="0">
+              <a:buNone/>
+            </a:pPr>
+            <a:r>
+              <a:rPr lang="en-US" sz="1500" b="1" dirty="0">
+                <a:solidFill>
+                  <a:srgbClr val="0B2C4A"/>
+                </a:solidFill>
+                <a:latin typeface="Inter" pitchFamily="34" charset="0"/>
+                <a:ea typeface="Inter" pitchFamily="34" charset="-122"/>
+                <a:cs typeface="Inter" pitchFamily="34" charset="-120"/>
+              </a:rPr>
+              <a:t>2</a:t>
+            </a:r>
+            <a:endParaRPr lang="en-US" sz="1500" dirty="0"/>
+          </a:p>
+        </p:txBody>
+      </p:sp>
+      <p:sp>
+        <p:nvSpPr>
+          <p:cNvPr id="14" name="Text 12"/>
+          <p:cNvSpPr txBox="1"/>
+          <p:nvPr/>
+        </p:nvSpPr>
+        <p:spPr>
+          <a:xfrm>
+            <a:off x="1097280" y="2858414"/>
+            <a:ext cx="1825752" cy="755294"/>
+          </a:xfrm>
+          <a:prstGeom prst="rect">
+            <a:avLst/>
+          </a:prstGeom>
+          <a:noFill/>
+          <a:ln/>
+        </p:spPr>
+        <p:txBody>
+          <a:bodyPr wrap="square" lIns="0" tIns="0" rIns="0" bIns="0" rtlCol="0" anchor="ctr"/>
+          <a:lstStyle/>
+          <a:p>
+            <a:pPr indent="0" marL="0">
+              <a:spcAft>
+                <a:spcPts val="200"/>
+              </a:spcAft>
+              <a:buNone/>
+            </a:pPr>
+            <a:r>
+              <a:rPr lang="en-US" sz="1400" b="1" dirty="0">
+                <a:solidFill>
+                  <a:srgbClr val="1A1A1A"/>
+                </a:solidFill>
+                <a:latin typeface="Inter" pitchFamily="34" charset="0"/>
+                <a:ea typeface="Inter" pitchFamily="34" charset="-122"/>
+                <a:cs typeface="Inter" pitchFamily="34" charset="-120"/>
+              </a:rPr>
+              <a:t>VW Henderson</a:t>
+            </a:r>
+            <a:endParaRPr lang="en-US" sz="1400" dirty="0"/>
+          </a:p>
+          <a:p>
+            <a:pPr indent="0" marL="0">
+              <a:spcAft>
+                <a:spcPts val="200"/>
+              </a:spcAft>
+              <a:buNone/>
+            </a:pPr>
+            <a:r>
+              <a:rPr lang="en-US" sz="1200" dirty="0">
+                <a:solidFill>
+                  <a:srgbClr val="595959"/>
+                </a:solidFill>
+                <a:latin typeface="Inter" pitchFamily="34" charset="0"/>
+                <a:ea typeface="Inter" pitchFamily="34" charset="-122"/>
+                <a:cs typeface="Inter" pitchFamily="34" charset="-120"/>
+              </a:rPr>
+              <a:t>37.4%  →  </a:t>
+            </a:r>
+            <a:pPr indent="0" marL="0">
+              <a:spcAft>
+                <a:spcPts val="200"/>
+              </a:spcAft>
+              <a:buNone/>
+            </a:pPr>
+            <a:r>
+              <a:rPr lang="en-US" sz="1200" b="1" dirty="0">
+                <a:solidFill>
+                  <a:srgbClr val="0B7A4A"/>
+                </a:solidFill>
+                <a:latin typeface="Inter" pitchFamily="34" charset="0"/>
+                <a:ea typeface="Inter" pitchFamily="34" charset="-122"/>
+                <a:cs typeface="Inter" pitchFamily="34" charset="-120"/>
+              </a:rPr>
+              <a:t>47.2%</a:t>
+            </a:r>
+            <a:endParaRPr lang="en-US" sz="1400" dirty="0"/>
+          </a:p>
+        </p:txBody>
+      </p:sp>
+      <p:sp>
+        <p:nvSpPr>
+          <p:cNvPr id="15" name="Text 13"/>
+          <p:cNvSpPr txBox="1"/>
+          <p:nvPr/>
+        </p:nvSpPr>
+        <p:spPr>
+          <a:xfrm>
+            <a:off x="2941320" y="2858414"/>
+            <a:ext cx="1115568" cy="755294"/>
+          </a:xfrm>
+          <a:prstGeom prst="rect">
+            <a:avLst/>
+          </a:prstGeom>
+          <a:noFill/>
+          <a:ln/>
+        </p:spPr>
+        <p:txBody>
+          <a:bodyPr wrap="square" lIns="0" tIns="0" rIns="0" bIns="0" rtlCol="0" anchor="ctr"/>
+          <a:lstStyle/>
+          <a:p>
+            <a:pPr algn="r" indent="0" marL="0">
+              <a:buNone/>
+            </a:pPr>
+            <a:r>
+              <a:rPr lang="en-US" sz="1600" b="1" dirty="0">
+                <a:solidFill>
+                  <a:srgbClr val="0B7A4A"/>
+                </a:solidFill>
+                <a:latin typeface="Inter" pitchFamily="34" charset="0"/>
+                <a:ea typeface="Inter" pitchFamily="34" charset="-122"/>
+                <a:cs typeface="Inter" pitchFamily="34" charset="-120"/>
+              </a:rPr>
+              <a:t>+9.7 pts</a:t>
+            </a:r>
+            <a:endParaRPr lang="en-US" sz="1600" dirty="0"/>
+          </a:p>
+        </p:txBody>
+      </p:sp>
+      <p:sp>
+        <p:nvSpPr>
+          <p:cNvPr id="16" name="Shape 14"/>
           <p:cNvSpPr/>
           <p:nvPr/>
         </p:nvSpPr>
         <p:spPr>
           <a:xfrm>
-            <a:off x="658368" y="1737360"/>
-            <a:ext cx="5321808" cy="45720"/>
-          </a:xfrm>
-          <a:prstGeom prst="rect">
-            <a:avLst/>
-          </a:prstGeom>
-          <a:solidFill>
-            <a:srgbClr val="12A566"/>
-          </a:solidFill>
-          <a:ln/>
-        </p:spPr>
-      </p:sp>
-      <p:sp>
-        <p:nvSpPr>
-          <p:cNvPr id="8" name="Text 6"/>
-          <p:cNvSpPr txBox="1"/>
-          <p:nvPr/>
-        </p:nvSpPr>
-        <p:spPr>
-          <a:xfrm>
-            <a:off x="749808" y="1810512"/>
-            <a:ext cx="1828800" cy="274320"/>
+            <a:off x="658368" y="3613709"/>
+            <a:ext cx="3489960" cy="755294"/>
+          </a:xfrm>
+          <a:prstGeom prst="rect">
+            <a:avLst/>
+          </a:prstGeom>
+          <a:solidFill>
+            <a:srgbClr val="F7F7F7"/>
+          </a:solidFill>
+          <a:ln/>
+        </p:spPr>
+      </p:sp>
+      <p:sp>
+        <p:nvSpPr>
+          <p:cNvPr id="17" name="Text 15"/>
+          <p:cNvSpPr txBox="1"/>
+          <p:nvPr/>
+        </p:nvSpPr>
+        <p:spPr>
+          <a:xfrm>
+            <a:off x="749808" y="3613709"/>
+            <a:ext cx="365760" cy="755294"/>
           </a:xfrm>
           <a:prstGeom prst="rect">
             <a:avLst/>
@@ -17756,7 +18149,86 @@
               <a:buNone/>
             </a:pPr>
             <a:r>
-              <a:rPr lang="en-US" sz="1400" b="1" spc="100" kern="0" dirty="0">
+              <a:rPr lang="en-US" sz="1500" b="1" dirty="0">
+                <a:solidFill>
+                  <a:srgbClr val="0B2C4A"/>
+                </a:solidFill>
+                <a:latin typeface="Inter" pitchFamily="34" charset="0"/>
+                <a:ea typeface="Inter" pitchFamily="34" charset="-122"/>
+                <a:cs typeface="Inter" pitchFamily="34" charset="-120"/>
+              </a:rPr>
+              <a:t>3</a:t>
+            </a:r>
+            <a:endParaRPr lang="en-US" sz="1500" dirty="0"/>
+          </a:p>
+        </p:txBody>
+      </p:sp>
+      <p:sp>
+        <p:nvSpPr>
+          <p:cNvPr id="18" name="Text 16"/>
+          <p:cNvSpPr txBox="1"/>
+          <p:nvPr/>
+        </p:nvSpPr>
+        <p:spPr>
+          <a:xfrm>
+            <a:off x="1097280" y="3613709"/>
+            <a:ext cx="1825752" cy="755294"/>
+          </a:xfrm>
+          <a:prstGeom prst="rect">
+            <a:avLst/>
+          </a:prstGeom>
+          <a:noFill/>
+          <a:ln/>
+        </p:spPr>
+        <p:txBody>
+          <a:bodyPr wrap="square" lIns="0" tIns="0" rIns="0" bIns="0" rtlCol="0" anchor="ctr"/>
+          <a:lstStyle/>
+          <a:p>
+            <a:pPr indent="0" marL="0">
+              <a:spcAft>
+                <a:spcPts val="200"/>
+              </a:spcAft>
+              <a:buNone/>
+            </a:pPr>
+            <a:r>
+              <a:rPr lang="en-US" sz="1400" b="1" dirty="0">
+                <a:solidFill>
+                  <a:srgbClr val="1A1A1A"/>
+                </a:solidFill>
+                <a:latin typeface="Inter" pitchFamily="34" charset="0"/>
+                <a:ea typeface="Inter" pitchFamily="34" charset="-122"/>
+                <a:cs typeface="Inter" pitchFamily="34" charset="-120"/>
+              </a:rPr>
+              <a:t>Acura</a:t>
+            </a:r>
+            <a:endParaRPr lang="en-US" sz="1400" dirty="0"/>
+          </a:p>
+          <a:p>
+            <a:pPr indent="0" marL="0">
+              <a:spcAft>
+                <a:spcPts val="200"/>
+              </a:spcAft>
+              <a:buNone/>
+            </a:pPr>
+            <a:r>
+              <a:rPr lang="en-US" sz="1200" dirty="0">
+                <a:solidFill>
+                  <a:srgbClr val="595959"/>
+                </a:solidFill>
+                <a:latin typeface="Inter" pitchFamily="34" charset="0"/>
+                <a:ea typeface="Inter" pitchFamily="34" charset="-122"/>
+                <a:cs typeface="Inter" pitchFamily="34" charset="-120"/>
+              </a:rPr>
+              <a:t>39.2%  →  </a:t>
+            </a:r>
+            <a:pPr indent="0" marL="0">
+              <a:spcAft>
+                <a:spcPts val="200"/>
+              </a:spcAft>
+              <a:buNone/>
+            </a:pPr>
+            <a:r>
+              <a:rPr lang="en-US" sz="1200" b="1" dirty="0">
                 <a:solidFill>
                   <a:srgbClr val="0B7A4A"/>
                 </a:solidFill>
@@ -17764,7 +18236,7 @@
                 <a:ea typeface="Inter" pitchFamily="34" charset="-122"/>
                 <a:cs typeface="Inter" pitchFamily="34" charset="-120"/>
               </a:rPr>
-              <a:t>TOP 5</a:t>
+              <a:t>48.7%</a:t>
             </a:r>
             <a:endParaRPr lang="en-US" sz="1400" dirty="0"/>
           </a:p>
@@ -17772,14 +18244,53 @@
       </p:sp>
       <p:sp>
         <p:nvSpPr>
-          <p:cNvPr id="9" name="Text 7"/>
-          <p:cNvSpPr txBox="1"/>
-          <p:nvPr/>
-        </p:nvSpPr>
-        <p:spPr>
-          <a:xfrm>
-            <a:off x="2898648" y="1810512"/>
-            <a:ext cx="1828800" cy="274320"/>
+          <p:cNvPr id="19" name="Text 17"/>
+          <p:cNvSpPr txBox="1"/>
+          <p:nvPr/>
+        </p:nvSpPr>
+        <p:spPr>
+          <a:xfrm>
+            <a:off x="2941320" y="3613709"/>
+            <a:ext cx="1115568" cy="755294"/>
+          </a:xfrm>
+          <a:prstGeom prst="rect">
+            <a:avLst/>
+          </a:prstGeom>
+          <a:noFill/>
+          <a:ln/>
+        </p:spPr>
+        <p:txBody>
+          <a:bodyPr wrap="square" lIns="0" tIns="0" rIns="0" bIns="0" rtlCol="0" anchor="ctr"/>
+          <a:lstStyle/>
+          <a:p>
+            <a:pPr algn="r" indent="0" marL="0">
+              <a:buNone/>
+            </a:pPr>
+            <a:r>
+              <a:rPr lang="en-US" sz="1600" b="1" dirty="0">
+                <a:solidFill>
+                  <a:srgbClr val="0B7A4A"/>
+                </a:solidFill>
+                <a:latin typeface="Inter" pitchFamily="34" charset="0"/>
+                <a:ea typeface="Inter" pitchFamily="34" charset="-122"/>
+                <a:cs typeface="Inter" pitchFamily="34" charset="-120"/>
+              </a:rPr>
+              <a:t>+9.5 pts</a:t>
+            </a:r>
+            <a:endParaRPr lang="en-US" sz="1600" dirty="0"/>
+          </a:p>
+        </p:txBody>
+      </p:sp>
+      <p:sp>
+        <p:nvSpPr>
+          <p:cNvPr id="20" name="Text 18"/>
+          <p:cNvSpPr txBox="1"/>
+          <p:nvPr/>
+        </p:nvSpPr>
+        <p:spPr>
+          <a:xfrm>
+            <a:off x="749808" y="4369003"/>
+            <a:ext cx="365760" cy="755294"/>
           </a:xfrm>
           <a:prstGeom prst="rect">
             <a:avLst/>
@@ -17795,15 +18306,94 @@
               <a:buNone/>
             </a:pPr>
             <a:r>
+              <a:rPr lang="en-US" sz="1500" b="1" dirty="0">
+                <a:solidFill>
+                  <a:srgbClr val="0B2C4A"/>
+                </a:solidFill>
+                <a:latin typeface="Inter" pitchFamily="34" charset="0"/>
+                <a:ea typeface="Inter" pitchFamily="34" charset="-122"/>
+                <a:cs typeface="Inter" pitchFamily="34" charset="-120"/>
+              </a:rPr>
+              <a:t>4</a:t>
+            </a:r>
+            <a:endParaRPr lang="en-US" sz="1500" dirty="0"/>
+          </a:p>
+        </p:txBody>
+      </p:sp>
+      <p:sp>
+        <p:nvSpPr>
+          <p:cNvPr id="21" name="Text 19"/>
+          <p:cNvSpPr txBox="1"/>
+          <p:nvPr/>
+        </p:nvSpPr>
+        <p:spPr>
+          <a:xfrm>
+            <a:off x="1097280" y="4369003"/>
+            <a:ext cx="1825752" cy="755294"/>
+          </a:xfrm>
+          <a:prstGeom prst="rect">
+            <a:avLst/>
+          </a:prstGeom>
+          <a:noFill/>
+          <a:ln/>
+        </p:spPr>
+        <p:txBody>
+          <a:bodyPr wrap="square" lIns="0" tIns="0" rIns="0" bIns="0" rtlCol="0" anchor="ctr"/>
+          <a:lstStyle/>
+          <a:p>
+            <a:pPr indent="0" marL="0">
+              <a:spcAft>
+                <a:spcPts val="200"/>
+              </a:spcAft>
+              <a:buNone/>
+            </a:pPr>
+            <a:r>
               <a:rPr lang="en-US" sz="1400" b="1" dirty="0">
                 <a:solidFill>
+                  <a:srgbClr val="1A1A1A"/>
+                </a:solidFill>
+                <a:latin typeface="Inter" pitchFamily="34" charset="0"/>
+                <a:ea typeface="Inter" pitchFamily="34" charset="-122"/>
+                <a:cs typeface="Inter" pitchFamily="34" charset="-120"/>
+              </a:rPr>
+              <a:t>Subaru St George</a:t>
+            </a:r>
+            <a:endParaRPr lang="en-US" sz="1400" dirty="0"/>
+          </a:p>
+          <a:p>
+            <a:pPr indent="0" marL="0">
+              <a:spcAft>
+                <a:spcPts val="200"/>
+              </a:spcAft>
+              <a:buNone/>
+            </a:pPr>
+            <a:r>
+              <a:rPr lang="en-US" sz="1200" dirty="0">
+                <a:solidFill>
                   <a:srgbClr val="595959"/>
                 </a:solidFill>
                 <a:latin typeface="Inter" pitchFamily="34" charset="0"/>
                 <a:ea typeface="Inter" pitchFamily="34" charset="-122"/>
                 <a:cs typeface="Inter" pitchFamily="34" charset="-120"/>
               </a:rPr>
-              <a:t>2025 → 2026</a:t>
+              <a:t>49.8%  →  </a:t>
+            </a:r>
+            <a:pPr indent="0" marL="0">
+              <a:spcAft>
+                <a:spcPts val="200"/>
+              </a:spcAft>
+              <a:buNone/>
+            </a:pPr>
+            <a:r>
+              <a:rPr lang="en-US" sz="1200" b="1" dirty="0">
+                <a:solidFill>
+                  <a:srgbClr val="0B7A4A"/>
+                </a:solidFill>
+                <a:latin typeface="Inter" pitchFamily="34" charset="0"/>
+                <a:ea typeface="Inter" pitchFamily="34" charset="-122"/>
+                <a:cs typeface="Inter" pitchFamily="34" charset="-120"/>
+              </a:rPr>
+              <a:t>59.0%</a:t>
             </a:r>
             <a:endParaRPr lang="en-US" sz="1400" dirty="0"/>
           </a:p>
@@ -17811,14 +18401,14 @@
       </p:sp>
       <p:sp>
         <p:nvSpPr>
-          <p:cNvPr id="10" name="Text 8"/>
-          <p:cNvSpPr txBox="1"/>
-          <p:nvPr/>
-        </p:nvSpPr>
-        <p:spPr>
-          <a:xfrm>
-            <a:off x="4864608" y="1810512"/>
-            <a:ext cx="1051560" cy="274320"/>
+          <p:cNvPr id="22" name="Text 20"/>
+          <p:cNvSpPr txBox="1"/>
+          <p:nvPr/>
+        </p:nvSpPr>
+        <p:spPr>
+          <a:xfrm>
+            <a:off x="2941320" y="4369003"/>
+            <a:ext cx="1115568" cy="755294"/>
           </a:xfrm>
           <a:prstGeom prst="rect">
             <a:avLst/>
@@ -17834,15 +18424,153 @@
               <a:buNone/>
             </a:pPr>
             <a:r>
+              <a:rPr lang="en-US" sz="1600" b="1" dirty="0">
+                <a:solidFill>
+                  <a:srgbClr val="0B7A4A"/>
+                </a:solidFill>
+                <a:latin typeface="Inter" pitchFamily="34" charset="0"/>
+                <a:ea typeface="Inter" pitchFamily="34" charset="-122"/>
+                <a:cs typeface="Inter" pitchFamily="34" charset="-120"/>
+              </a:rPr>
+              <a:t>+9.3 pts</a:t>
+            </a:r>
+            <a:endParaRPr lang="en-US" sz="1600" dirty="0"/>
+          </a:p>
+        </p:txBody>
+      </p:sp>
+      <p:sp>
+        <p:nvSpPr>
+          <p:cNvPr id="23" name="Shape 21"/>
+          <p:cNvSpPr/>
+          <p:nvPr/>
+        </p:nvSpPr>
+        <p:spPr>
+          <a:xfrm>
+            <a:off x="658368" y="5124298"/>
+            <a:ext cx="3489960" cy="755294"/>
+          </a:xfrm>
+          <a:prstGeom prst="rect">
+            <a:avLst/>
+          </a:prstGeom>
+          <a:solidFill>
+            <a:srgbClr val="F7F7F7"/>
+          </a:solidFill>
+          <a:ln/>
+        </p:spPr>
+      </p:sp>
+      <p:sp>
+        <p:nvSpPr>
+          <p:cNvPr id="24" name="Text 22"/>
+          <p:cNvSpPr txBox="1"/>
+          <p:nvPr/>
+        </p:nvSpPr>
+        <p:spPr>
+          <a:xfrm>
+            <a:off x="749808" y="5124298"/>
+            <a:ext cx="365760" cy="755294"/>
+          </a:xfrm>
+          <a:prstGeom prst="rect">
+            <a:avLst/>
+          </a:prstGeom>
+          <a:noFill/>
+          <a:ln/>
+        </p:spPr>
+        <p:txBody>
+          <a:bodyPr wrap="square" lIns="0" tIns="0" rIns="0" bIns="0" rtlCol="0" anchor="ctr"/>
+          <a:lstStyle/>
+          <a:p>
+            <a:pPr indent="0" marL="0">
+              <a:buNone/>
+            </a:pPr>
+            <a:r>
+              <a:rPr lang="en-US" sz="1500" b="1" dirty="0">
+                <a:solidFill>
+                  <a:srgbClr val="0B2C4A"/>
+                </a:solidFill>
+                <a:latin typeface="Inter" pitchFamily="34" charset="0"/>
+                <a:ea typeface="Inter" pitchFamily="34" charset="-122"/>
+                <a:cs typeface="Inter" pitchFamily="34" charset="-120"/>
+              </a:rPr>
+              <a:t>5</a:t>
+            </a:r>
+            <a:endParaRPr lang="en-US" sz="1500" dirty="0"/>
+          </a:p>
+        </p:txBody>
+      </p:sp>
+      <p:sp>
+        <p:nvSpPr>
+          <p:cNvPr id="25" name="Text 23"/>
+          <p:cNvSpPr txBox="1"/>
+          <p:nvPr/>
+        </p:nvSpPr>
+        <p:spPr>
+          <a:xfrm>
+            <a:off x="1097280" y="5124298"/>
+            <a:ext cx="1825752" cy="755294"/>
+          </a:xfrm>
+          <a:prstGeom prst="rect">
+            <a:avLst/>
+          </a:prstGeom>
+          <a:noFill/>
+          <a:ln/>
+        </p:spPr>
+        <p:txBody>
+          <a:bodyPr wrap="square" lIns="0" tIns="0" rIns="0" bIns="0" rtlCol="0" anchor="ctr"/>
+          <a:lstStyle/>
+          <a:p>
+            <a:pPr indent="0" marL="0">
+              <a:spcAft>
+                <a:spcPts val="200"/>
+              </a:spcAft>
+              <a:buNone/>
+            </a:pPr>
+            <a:r>
               <a:rPr lang="en-US" sz="1400" b="1" dirty="0">
                 <a:solidFill>
+                  <a:srgbClr val="1A1A1A"/>
+                </a:solidFill>
+                <a:latin typeface="Inter" pitchFamily="34" charset="0"/>
+                <a:ea typeface="Inter" pitchFamily="34" charset="-122"/>
+                <a:cs typeface="Inter" pitchFamily="34" charset="-120"/>
+              </a:rPr>
+              <a:t>Subaru Prescott</a:t>
+            </a:r>
+            <a:endParaRPr lang="en-US" sz="1400" dirty="0"/>
+          </a:p>
+          <a:p>
+            <a:pPr indent="0" marL="0">
+              <a:spcAft>
+                <a:spcPts val="200"/>
+              </a:spcAft>
+              <a:buNone/>
+            </a:pPr>
+            <a:r>
+              <a:rPr lang="en-US" sz="1200" dirty="0">
+                <a:solidFill>
                   <a:srgbClr val="595959"/>
                 </a:solidFill>
                 <a:latin typeface="Inter" pitchFamily="34" charset="0"/>
                 <a:ea typeface="Inter" pitchFamily="34" charset="-122"/>
                 <a:cs typeface="Inter" pitchFamily="34" charset="-120"/>
               </a:rPr>
-              <a:t>Change</a:t>
+              <a:t>41.8%  →  </a:t>
+            </a:r>
+            <a:pPr indent="0" marL="0">
+              <a:spcAft>
+                <a:spcPts val="200"/>
+              </a:spcAft>
+              <a:buNone/>
+            </a:pPr>
+            <a:r>
+              <a:rPr lang="en-US" sz="1200" b="1" dirty="0">
+                <a:solidFill>
+                  <a:srgbClr val="0B7A4A"/>
+                </a:solidFill>
+                <a:latin typeface="Inter" pitchFamily="34" charset="0"/>
+                <a:ea typeface="Inter" pitchFamily="34" charset="-122"/>
+                <a:cs typeface="Inter" pitchFamily="34" charset="-120"/>
+              </a:rPr>
+              <a:t>50.8%</a:t>
             </a:r>
             <a:endParaRPr lang="en-US" sz="1400" dirty="0"/>
           </a:p>
@@ -17850,14 +18578,151 @@
       </p:sp>
       <p:sp>
         <p:nvSpPr>
-          <p:cNvPr id="11" name="Shape 9"/>
+          <p:cNvPr id="26" name="Text 24"/>
+          <p:cNvSpPr txBox="1"/>
+          <p:nvPr/>
+        </p:nvSpPr>
+        <p:spPr>
+          <a:xfrm>
+            <a:off x="2941320" y="5124298"/>
+            <a:ext cx="1115568" cy="755294"/>
+          </a:xfrm>
+          <a:prstGeom prst="rect">
+            <a:avLst/>
+          </a:prstGeom>
+          <a:noFill/>
+          <a:ln/>
+        </p:spPr>
+        <p:txBody>
+          <a:bodyPr wrap="square" lIns="0" tIns="0" rIns="0" bIns="0" rtlCol="0" anchor="ctr"/>
+          <a:lstStyle/>
+          <a:p>
+            <a:pPr algn="r" indent="0" marL="0">
+              <a:buNone/>
+            </a:pPr>
+            <a:r>
+              <a:rPr lang="en-US" sz="1600" b="1" dirty="0">
+                <a:solidFill>
+                  <a:srgbClr val="0B7A4A"/>
+                </a:solidFill>
+                <a:latin typeface="Inter" pitchFamily="34" charset="0"/>
+                <a:ea typeface="Inter" pitchFamily="34" charset="-122"/>
+                <a:cs typeface="Inter" pitchFamily="34" charset="-120"/>
+              </a:rPr>
+              <a:t>+8.9 pts</a:t>
+            </a:r>
+            <a:endParaRPr lang="en-US" sz="1600" dirty="0"/>
+          </a:p>
+        </p:txBody>
+      </p:sp>
+      <p:sp>
+        <p:nvSpPr>
+          <p:cNvPr id="27" name="Shape 25"/>
           <p:cNvSpPr/>
           <p:nvPr/>
         </p:nvSpPr>
         <p:spPr>
           <a:xfrm>
-            <a:off x="658368" y="2121408"/>
-            <a:ext cx="5321808" cy="751637"/>
+            <a:off x="4349496" y="1371600"/>
+            <a:ext cx="3489960" cy="45720"/>
+          </a:xfrm>
+          <a:prstGeom prst="rect">
+            <a:avLst/>
+          </a:prstGeom>
+          <a:solidFill>
+            <a:srgbClr val="C2352F"/>
+          </a:solidFill>
+          <a:ln/>
+        </p:spPr>
+      </p:sp>
+      <p:sp>
+        <p:nvSpPr>
+          <p:cNvPr id="28" name="Text 26"/>
+          <p:cNvSpPr txBox="1"/>
+          <p:nvPr/>
+        </p:nvSpPr>
+        <p:spPr>
+          <a:xfrm>
+            <a:off x="4440936" y="1444752"/>
+            <a:ext cx="3307080" cy="274320"/>
+          </a:xfrm>
+          <a:prstGeom prst="rect">
+            <a:avLst/>
+          </a:prstGeom>
+          <a:noFill/>
+          <a:ln/>
+        </p:spPr>
+        <p:txBody>
+          <a:bodyPr wrap="square" lIns="0" tIns="0" rIns="0" bIns="0" rtlCol="0" anchor="ctr"/>
+          <a:lstStyle/>
+          <a:p>
+            <a:pPr indent="0" marL="0">
+              <a:buNone/>
+            </a:pPr>
+            <a:r>
+              <a:rPr lang="en-US" sz="1500" b="1" spc="100" kern="0" dirty="0">
+                <a:solidFill>
+                  <a:srgbClr val="A82B26"/>
+                </a:solidFill>
+                <a:latin typeface="Inter" pitchFamily="34" charset="0"/>
+                <a:ea typeface="Inter" pitchFamily="34" charset="-122"/>
+                <a:cs typeface="Inter" pitchFamily="34" charset="-120"/>
+              </a:rPr>
+              <a:t>BOTTOM 5 VS LAST YEAR</a:t>
+            </a:r>
+            <a:endParaRPr lang="en-US" sz="1500" dirty="0"/>
+          </a:p>
+        </p:txBody>
+      </p:sp>
+      <p:sp>
+        <p:nvSpPr>
+          <p:cNvPr id="29" name="Text 27"/>
+          <p:cNvSpPr txBox="1"/>
+          <p:nvPr/>
+        </p:nvSpPr>
+        <p:spPr>
+          <a:xfrm>
+            <a:off x="4440936" y="1737360"/>
+            <a:ext cx="3307080" cy="274320"/>
+          </a:xfrm>
+          <a:prstGeom prst="rect">
+            <a:avLst/>
+          </a:prstGeom>
+          <a:noFill/>
+          <a:ln/>
+        </p:spPr>
+        <p:txBody>
+          <a:bodyPr wrap="square" lIns="0" tIns="0" rIns="0" bIns="0" rtlCol="0" anchor="ctr"/>
+          <a:lstStyle/>
+          <a:p>
+            <a:pPr indent="0" marL="0">
+              <a:buNone/>
+            </a:pPr>
+            <a:r>
+              <a:rPr lang="en-US" sz="1200" dirty="0">
+                <a:solidFill>
+                  <a:srgbClr val="595959"/>
+                </a:solidFill>
+                <a:latin typeface="Inter" pitchFamily="34" charset="0"/>
+                <a:ea typeface="Inter" pitchFamily="34" charset="-122"/>
+                <a:cs typeface="Inter" pitchFamily="34" charset="-120"/>
+              </a:rPr>
+              <a:t>Jan–Sep 2026 vs Jan–Sep 2025</a:t>
+            </a:r>
+            <a:endParaRPr lang="en-US" sz="1200" dirty="0"/>
+          </a:p>
+        </p:txBody>
+      </p:sp>
+      <p:sp>
+        <p:nvSpPr>
+          <p:cNvPr id="30" name="Shape 28"/>
+          <p:cNvSpPr/>
+          <p:nvPr/>
+        </p:nvSpPr>
+        <p:spPr>
+          <a:xfrm>
+            <a:off x="4349496" y="2103120"/>
+            <a:ext cx="3489960" cy="755294"/>
           </a:xfrm>
           <a:prstGeom prst="rect">
             <a:avLst/>
@@ -17870,14 +18735,14 @@
       </p:sp>
       <p:sp>
         <p:nvSpPr>
-          <p:cNvPr id="12" name="Text 10"/>
-          <p:cNvSpPr txBox="1"/>
-          <p:nvPr/>
-        </p:nvSpPr>
-        <p:spPr>
-          <a:xfrm>
-            <a:off x="749808" y="2121408"/>
-            <a:ext cx="320040" cy="751637"/>
+          <p:cNvPr id="31" name="Text 29"/>
+          <p:cNvSpPr txBox="1"/>
+          <p:nvPr/>
+        </p:nvSpPr>
+        <p:spPr>
+          <a:xfrm>
+            <a:off x="4440936" y="2103120"/>
+            <a:ext cx="365760" cy="755294"/>
           </a:xfrm>
           <a:prstGeom prst="rect">
             <a:avLst/>
@@ -17901,6 +18766,949 @@
                 <a:ea typeface="Inter" pitchFamily="34" charset="-122"/>
                 <a:cs typeface="Inter" pitchFamily="34" charset="-120"/>
               </a:rPr>
+              <a:t>33</a:t>
+            </a:r>
+            <a:endParaRPr lang="en-US" sz="1500" dirty="0"/>
+          </a:p>
+        </p:txBody>
+      </p:sp>
+      <p:sp>
+        <p:nvSpPr>
+          <p:cNvPr id="32" name="Text 30"/>
+          <p:cNvSpPr txBox="1"/>
+          <p:nvPr/>
+        </p:nvSpPr>
+        <p:spPr>
+          <a:xfrm>
+            <a:off x="4788408" y="2103120"/>
+            <a:ext cx="1825752" cy="755294"/>
+          </a:xfrm>
+          <a:prstGeom prst="rect">
+            <a:avLst/>
+          </a:prstGeom>
+          <a:noFill/>
+          <a:ln/>
+        </p:spPr>
+        <p:txBody>
+          <a:bodyPr wrap="square" lIns="0" tIns="0" rIns="0" bIns="0" rtlCol="0" anchor="ctr"/>
+          <a:lstStyle/>
+          <a:p>
+            <a:pPr indent="0" marL="0">
+              <a:spcAft>
+                <a:spcPts val="200"/>
+              </a:spcAft>
+              <a:buNone/>
+            </a:pPr>
+            <a:r>
+              <a:rPr lang="en-US" sz="1400" b="1" dirty="0">
+                <a:solidFill>
+                  <a:srgbClr val="1A1A1A"/>
+                </a:solidFill>
+                <a:latin typeface="Inter" pitchFamily="34" charset="0"/>
+                <a:ea typeface="Inter" pitchFamily="34" charset="-122"/>
+                <a:cs typeface="Inter" pitchFamily="34" charset="-120"/>
+              </a:rPr>
+              <a:t>LR Reno</a:t>
+            </a:r>
+            <a:endParaRPr lang="en-US" sz="1400" dirty="0"/>
+          </a:p>
+          <a:p>
+            <a:pPr indent="0" marL="0">
+              <a:spcAft>
+                <a:spcPts val="200"/>
+              </a:spcAft>
+              <a:buNone/>
+            </a:pPr>
+            <a:r>
+              <a:rPr lang="en-US" sz="1200" dirty="0">
+                <a:solidFill>
+                  <a:srgbClr val="595959"/>
+                </a:solidFill>
+                <a:latin typeface="Inter" pitchFamily="34" charset="0"/>
+                <a:ea typeface="Inter" pitchFamily="34" charset="-122"/>
+                <a:cs typeface="Inter" pitchFamily="34" charset="-120"/>
+              </a:rPr>
+              <a:t>69.6%  →  </a:t>
+            </a:r>
+            <a:pPr indent="0" marL="0">
+              <a:spcAft>
+                <a:spcPts val="200"/>
+              </a:spcAft>
+              <a:buNone/>
+            </a:pPr>
+            <a:r>
+              <a:rPr lang="en-US" sz="1200" b="1" dirty="0">
+                <a:solidFill>
+                  <a:srgbClr val="A82B26"/>
+                </a:solidFill>
+                <a:latin typeface="Inter" pitchFamily="34" charset="0"/>
+                <a:ea typeface="Inter" pitchFamily="34" charset="-122"/>
+                <a:cs typeface="Inter" pitchFamily="34" charset="-120"/>
+              </a:rPr>
+              <a:t>61.5%</a:t>
+            </a:r>
+            <a:endParaRPr lang="en-US" sz="1400" dirty="0"/>
+          </a:p>
+        </p:txBody>
+      </p:sp>
+      <p:sp>
+        <p:nvSpPr>
+          <p:cNvPr id="33" name="Text 31"/>
+          <p:cNvSpPr txBox="1"/>
+          <p:nvPr/>
+        </p:nvSpPr>
+        <p:spPr>
+          <a:xfrm>
+            <a:off x="6632448" y="2103120"/>
+            <a:ext cx="1115568" cy="755294"/>
+          </a:xfrm>
+          <a:prstGeom prst="rect">
+            <a:avLst/>
+          </a:prstGeom>
+          <a:noFill/>
+          <a:ln/>
+        </p:spPr>
+        <p:txBody>
+          <a:bodyPr wrap="square" lIns="0" tIns="0" rIns="0" bIns="0" rtlCol="0" anchor="ctr"/>
+          <a:lstStyle/>
+          <a:p>
+            <a:pPr algn="r" indent="0" marL="0">
+              <a:buNone/>
+            </a:pPr>
+            <a:r>
+              <a:rPr lang="en-US" sz="1600" b="1" dirty="0">
+                <a:solidFill>
+                  <a:srgbClr val="A82B26"/>
+                </a:solidFill>
+                <a:latin typeface="Inter" pitchFamily="34" charset="0"/>
+                <a:ea typeface="Inter" pitchFamily="34" charset="-122"/>
+                <a:cs typeface="Inter" pitchFamily="34" charset="-120"/>
+              </a:rPr>
+              <a:t>−8.1 pts</a:t>
+            </a:r>
+            <a:endParaRPr lang="en-US" sz="1600" dirty="0"/>
+          </a:p>
+        </p:txBody>
+      </p:sp>
+      <p:sp>
+        <p:nvSpPr>
+          <p:cNvPr id="34" name="Text 32"/>
+          <p:cNvSpPr txBox="1"/>
+          <p:nvPr/>
+        </p:nvSpPr>
+        <p:spPr>
+          <a:xfrm>
+            <a:off x="4440936" y="2858414"/>
+            <a:ext cx="365760" cy="755294"/>
+          </a:xfrm>
+          <a:prstGeom prst="rect">
+            <a:avLst/>
+          </a:prstGeom>
+          <a:noFill/>
+          <a:ln/>
+        </p:spPr>
+        <p:txBody>
+          <a:bodyPr wrap="square" lIns="0" tIns="0" rIns="0" bIns="0" rtlCol="0" anchor="ctr"/>
+          <a:lstStyle/>
+          <a:p>
+            <a:pPr indent="0" marL="0">
+              <a:buNone/>
+            </a:pPr>
+            <a:r>
+              <a:rPr lang="en-US" sz="1500" b="1" dirty="0">
+                <a:solidFill>
+                  <a:srgbClr val="0B2C4A"/>
+                </a:solidFill>
+                <a:latin typeface="Inter" pitchFamily="34" charset="0"/>
+                <a:ea typeface="Inter" pitchFamily="34" charset="-122"/>
+                <a:cs typeface="Inter" pitchFamily="34" charset="-120"/>
+              </a:rPr>
+              <a:t>32</a:t>
+            </a:r>
+            <a:endParaRPr lang="en-US" sz="1500" dirty="0"/>
+          </a:p>
+        </p:txBody>
+      </p:sp>
+      <p:sp>
+        <p:nvSpPr>
+          <p:cNvPr id="35" name="Text 33"/>
+          <p:cNvSpPr txBox="1"/>
+          <p:nvPr/>
+        </p:nvSpPr>
+        <p:spPr>
+          <a:xfrm>
+            <a:off x="4788408" y="2858414"/>
+            <a:ext cx="1825752" cy="755294"/>
+          </a:xfrm>
+          <a:prstGeom prst="rect">
+            <a:avLst/>
+          </a:prstGeom>
+          <a:noFill/>
+          <a:ln/>
+        </p:spPr>
+        <p:txBody>
+          <a:bodyPr wrap="square" lIns="0" tIns="0" rIns="0" bIns="0" rtlCol="0" anchor="ctr"/>
+          <a:lstStyle/>
+          <a:p>
+            <a:pPr indent="0" marL="0">
+              <a:spcAft>
+                <a:spcPts val="200"/>
+              </a:spcAft>
+              <a:buNone/>
+            </a:pPr>
+            <a:r>
+              <a:rPr lang="en-US" sz="1400" b="1" dirty="0">
+                <a:solidFill>
+                  <a:srgbClr val="1A1A1A"/>
+                </a:solidFill>
+                <a:latin typeface="Inter" pitchFamily="34" charset="0"/>
+                <a:ea typeface="Inter" pitchFamily="34" charset="-122"/>
+                <a:cs typeface="Inter" pitchFamily="34" charset="-120"/>
+              </a:rPr>
+              <a:t>Hyundai Prescott</a:t>
+            </a:r>
+            <a:endParaRPr lang="en-US" sz="1400" dirty="0"/>
+          </a:p>
+          <a:p>
+            <a:pPr indent="0" marL="0">
+              <a:spcAft>
+                <a:spcPts val="200"/>
+              </a:spcAft>
+              <a:buNone/>
+            </a:pPr>
+            <a:r>
+              <a:rPr lang="en-US" sz="1200" dirty="0">
+                <a:solidFill>
+                  <a:srgbClr val="595959"/>
+                </a:solidFill>
+                <a:latin typeface="Inter" pitchFamily="34" charset="0"/>
+                <a:ea typeface="Inter" pitchFamily="34" charset="-122"/>
+                <a:cs typeface="Inter" pitchFamily="34" charset="-120"/>
+              </a:rPr>
+              <a:t>35.3%  →  </a:t>
+            </a:r>
+            <a:pPr indent="0" marL="0">
+              <a:spcAft>
+                <a:spcPts val="200"/>
+              </a:spcAft>
+              <a:buNone/>
+            </a:pPr>
+            <a:r>
+              <a:rPr lang="en-US" sz="1200" b="1" dirty="0">
+                <a:solidFill>
+                  <a:srgbClr val="A82B26"/>
+                </a:solidFill>
+                <a:latin typeface="Inter" pitchFamily="34" charset="0"/>
+                <a:ea typeface="Inter" pitchFamily="34" charset="-122"/>
+                <a:cs typeface="Inter" pitchFamily="34" charset="-120"/>
+              </a:rPr>
+              <a:t>28.5%</a:t>
+            </a:r>
+            <a:endParaRPr lang="en-US" sz="1400" dirty="0"/>
+          </a:p>
+        </p:txBody>
+      </p:sp>
+      <p:sp>
+        <p:nvSpPr>
+          <p:cNvPr id="36" name="Text 34"/>
+          <p:cNvSpPr txBox="1"/>
+          <p:nvPr/>
+        </p:nvSpPr>
+        <p:spPr>
+          <a:xfrm>
+            <a:off x="6632448" y="2858414"/>
+            <a:ext cx="1115568" cy="755294"/>
+          </a:xfrm>
+          <a:prstGeom prst="rect">
+            <a:avLst/>
+          </a:prstGeom>
+          <a:noFill/>
+          <a:ln/>
+        </p:spPr>
+        <p:txBody>
+          <a:bodyPr wrap="square" lIns="0" tIns="0" rIns="0" bIns="0" rtlCol="0" anchor="ctr"/>
+          <a:lstStyle/>
+          <a:p>
+            <a:pPr algn="r" indent="0" marL="0">
+              <a:buNone/>
+            </a:pPr>
+            <a:r>
+              <a:rPr lang="en-US" sz="1600" b="1" dirty="0">
+                <a:solidFill>
+                  <a:srgbClr val="A82B26"/>
+                </a:solidFill>
+                <a:latin typeface="Inter" pitchFamily="34" charset="0"/>
+                <a:ea typeface="Inter" pitchFamily="34" charset="-122"/>
+                <a:cs typeface="Inter" pitchFamily="34" charset="-120"/>
+              </a:rPr>
+              <a:t>−6.8 pts</a:t>
+            </a:r>
+            <a:endParaRPr lang="en-US" sz="1600" dirty="0"/>
+          </a:p>
+        </p:txBody>
+      </p:sp>
+      <p:sp>
+        <p:nvSpPr>
+          <p:cNvPr id="37" name="Shape 35"/>
+          <p:cNvSpPr/>
+          <p:nvPr/>
+        </p:nvSpPr>
+        <p:spPr>
+          <a:xfrm>
+            <a:off x="4349496" y="3613709"/>
+            <a:ext cx="3489960" cy="755294"/>
+          </a:xfrm>
+          <a:prstGeom prst="rect">
+            <a:avLst/>
+          </a:prstGeom>
+          <a:solidFill>
+            <a:srgbClr val="F7F7F7"/>
+          </a:solidFill>
+          <a:ln/>
+        </p:spPr>
+      </p:sp>
+      <p:sp>
+        <p:nvSpPr>
+          <p:cNvPr id="38" name="Text 36"/>
+          <p:cNvSpPr txBox="1"/>
+          <p:nvPr/>
+        </p:nvSpPr>
+        <p:spPr>
+          <a:xfrm>
+            <a:off x="4440936" y="3613709"/>
+            <a:ext cx="365760" cy="755294"/>
+          </a:xfrm>
+          <a:prstGeom prst="rect">
+            <a:avLst/>
+          </a:prstGeom>
+          <a:noFill/>
+          <a:ln/>
+        </p:spPr>
+        <p:txBody>
+          <a:bodyPr wrap="square" lIns="0" tIns="0" rIns="0" bIns="0" rtlCol="0" anchor="ctr"/>
+          <a:lstStyle/>
+          <a:p>
+            <a:pPr indent="0" marL="0">
+              <a:buNone/>
+            </a:pPr>
+            <a:r>
+              <a:rPr lang="en-US" sz="1500" b="1" dirty="0">
+                <a:solidFill>
+                  <a:srgbClr val="0B2C4A"/>
+                </a:solidFill>
+                <a:latin typeface="Inter" pitchFamily="34" charset="0"/>
+                <a:ea typeface="Inter" pitchFamily="34" charset="-122"/>
+                <a:cs typeface="Inter" pitchFamily="34" charset="-120"/>
+              </a:rPr>
+              <a:t>31</a:t>
+            </a:r>
+            <a:endParaRPr lang="en-US" sz="1500" dirty="0"/>
+          </a:p>
+        </p:txBody>
+      </p:sp>
+      <p:sp>
+        <p:nvSpPr>
+          <p:cNvPr id="39" name="Text 37"/>
+          <p:cNvSpPr txBox="1"/>
+          <p:nvPr/>
+        </p:nvSpPr>
+        <p:spPr>
+          <a:xfrm>
+            <a:off x="4788408" y="3613709"/>
+            <a:ext cx="1825752" cy="755294"/>
+          </a:xfrm>
+          <a:prstGeom prst="rect">
+            <a:avLst/>
+          </a:prstGeom>
+          <a:noFill/>
+          <a:ln/>
+        </p:spPr>
+        <p:txBody>
+          <a:bodyPr wrap="square" lIns="0" tIns="0" rIns="0" bIns="0" rtlCol="0" anchor="ctr"/>
+          <a:lstStyle/>
+          <a:p>
+            <a:pPr indent="0" marL="0">
+              <a:spcAft>
+                <a:spcPts val="200"/>
+              </a:spcAft>
+              <a:buNone/>
+            </a:pPr>
+            <a:r>
+              <a:rPr lang="en-US" sz="1400" b="1" dirty="0">
+                <a:solidFill>
+                  <a:srgbClr val="1A1A1A"/>
+                </a:solidFill>
+                <a:latin typeface="Inter" pitchFamily="34" charset="0"/>
+                <a:ea typeface="Inter" pitchFamily="34" charset="-122"/>
+                <a:cs typeface="Inter" pitchFamily="34" charset="-120"/>
+              </a:rPr>
+              <a:t>Toyota Henderson</a:t>
+            </a:r>
+            <a:endParaRPr lang="en-US" sz="1400" dirty="0"/>
+          </a:p>
+          <a:p>
+            <a:pPr indent="0" marL="0">
+              <a:spcAft>
+                <a:spcPts val="200"/>
+              </a:spcAft>
+              <a:buNone/>
+            </a:pPr>
+            <a:r>
+              <a:rPr lang="en-US" sz="1200" dirty="0">
+                <a:solidFill>
+                  <a:srgbClr val="595959"/>
+                </a:solidFill>
+                <a:latin typeface="Inter" pitchFamily="34" charset="0"/>
+                <a:ea typeface="Inter" pitchFamily="34" charset="-122"/>
+                <a:cs typeface="Inter" pitchFamily="34" charset="-120"/>
+              </a:rPr>
+              <a:t>63.8%  →  </a:t>
+            </a:r>
+            <a:pPr indent="0" marL="0">
+              <a:spcAft>
+                <a:spcPts val="200"/>
+              </a:spcAft>
+              <a:buNone/>
+            </a:pPr>
+            <a:r>
+              <a:rPr lang="en-US" sz="1200" b="1" dirty="0">
+                <a:solidFill>
+                  <a:srgbClr val="A82B26"/>
+                </a:solidFill>
+                <a:latin typeface="Inter" pitchFamily="34" charset="0"/>
+                <a:ea typeface="Inter" pitchFamily="34" charset="-122"/>
+                <a:cs typeface="Inter" pitchFamily="34" charset="-120"/>
+              </a:rPr>
+              <a:t>57.3%</a:t>
+            </a:r>
+            <a:endParaRPr lang="en-US" sz="1400" dirty="0"/>
+          </a:p>
+        </p:txBody>
+      </p:sp>
+      <p:sp>
+        <p:nvSpPr>
+          <p:cNvPr id="40" name="Text 38"/>
+          <p:cNvSpPr txBox="1"/>
+          <p:nvPr/>
+        </p:nvSpPr>
+        <p:spPr>
+          <a:xfrm>
+            <a:off x="6632448" y="3613709"/>
+            <a:ext cx="1115568" cy="755294"/>
+          </a:xfrm>
+          <a:prstGeom prst="rect">
+            <a:avLst/>
+          </a:prstGeom>
+          <a:noFill/>
+          <a:ln/>
+        </p:spPr>
+        <p:txBody>
+          <a:bodyPr wrap="square" lIns="0" tIns="0" rIns="0" bIns="0" rtlCol="0" anchor="ctr"/>
+          <a:lstStyle/>
+          <a:p>
+            <a:pPr algn="r" indent="0" marL="0">
+              <a:buNone/>
+            </a:pPr>
+            <a:r>
+              <a:rPr lang="en-US" sz="1600" b="1" dirty="0">
+                <a:solidFill>
+                  <a:srgbClr val="A82B26"/>
+                </a:solidFill>
+                <a:latin typeface="Inter" pitchFamily="34" charset="0"/>
+                <a:ea typeface="Inter" pitchFamily="34" charset="-122"/>
+                <a:cs typeface="Inter" pitchFamily="34" charset="-120"/>
+              </a:rPr>
+              <a:t>−6.5 pts</a:t>
+            </a:r>
+            <a:endParaRPr lang="en-US" sz="1600" dirty="0"/>
+          </a:p>
+        </p:txBody>
+      </p:sp>
+      <p:sp>
+        <p:nvSpPr>
+          <p:cNvPr id="41" name="Text 39"/>
+          <p:cNvSpPr txBox="1"/>
+          <p:nvPr/>
+        </p:nvSpPr>
+        <p:spPr>
+          <a:xfrm>
+            <a:off x="4440936" y="4369003"/>
+            <a:ext cx="365760" cy="755294"/>
+          </a:xfrm>
+          <a:prstGeom prst="rect">
+            <a:avLst/>
+          </a:prstGeom>
+          <a:noFill/>
+          <a:ln/>
+        </p:spPr>
+        <p:txBody>
+          <a:bodyPr wrap="square" lIns="0" tIns="0" rIns="0" bIns="0" rtlCol="0" anchor="ctr"/>
+          <a:lstStyle/>
+          <a:p>
+            <a:pPr indent="0" marL="0">
+              <a:buNone/>
+            </a:pPr>
+            <a:r>
+              <a:rPr lang="en-US" sz="1500" b="1" dirty="0">
+                <a:solidFill>
+                  <a:srgbClr val="0B2C4A"/>
+                </a:solidFill>
+                <a:latin typeface="Inter" pitchFamily="34" charset="0"/>
+                <a:ea typeface="Inter" pitchFamily="34" charset="-122"/>
+                <a:cs typeface="Inter" pitchFamily="34" charset="-120"/>
+              </a:rPr>
+              <a:t>30</a:t>
+            </a:r>
+            <a:endParaRPr lang="en-US" sz="1500" dirty="0"/>
+          </a:p>
+        </p:txBody>
+      </p:sp>
+      <p:sp>
+        <p:nvSpPr>
+          <p:cNvPr id="42" name="Text 40"/>
+          <p:cNvSpPr txBox="1"/>
+          <p:nvPr/>
+        </p:nvSpPr>
+        <p:spPr>
+          <a:xfrm>
+            <a:off x="4788408" y="4369003"/>
+            <a:ext cx="1825752" cy="755294"/>
+          </a:xfrm>
+          <a:prstGeom prst="rect">
+            <a:avLst/>
+          </a:prstGeom>
+          <a:noFill/>
+          <a:ln/>
+        </p:spPr>
+        <p:txBody>
+          <a:bodyPr wrap="square" lIns="0" tIns="0" rIns="0" bIns="0" rtlCol="0" anchor="ctr"/>
+          <a:lstStyle/>
+          <a:p>
+            <a:pPr indent="0" marL="0">
+              <a:spcAft>
+                <a:spcPts val="200"/>
+              </a:spcAft>
+              <a:buNone/>
+            </a:pPr>
+            <a:r>
+              <a:rPr lang="en-US" sz="1400" b="1" dirty="0">
+                <a:solidFill>
+                  <a:srgbClr val="1A1A1A"/>
+                </a:solidFill>
+                <a:latin typeface="Inter" pitchFamily="34" charset="0"/>
+                <a:ea typeface="Inter" pitchFamily="34" charset="-122"/>
+                <a:cs typeface="Inter" pitchFamily="34" charset="-120"/>
+              </a:rPr>
+              <a:t>Audi Henderson</a:t>
+            </a:r>
+            <a:endParaRPr lang="en-US" sz="1400" dirty="0"/>
+          </a:p>
+          <a:p>
+            <a:pPr indent="0" marL="0">
+              <a:spcAft>
+                <a:spcPts val="200"/>
+              </a:spcAft>
+              <a:buNone/>
+            </a:pPr>
+            <a:r>
+              <a:rPr lang="en-US" sz="1200" dirty="0">
+                <a:solidFill>
+                  <a:srgbClr val="595959"/>
+                </a:solidFill>
+                <a:latin typeface="Inter" pitchFamily="34" charset="0"/>
+                <a:ea typeface="Inter" pitchFamily="34" charset="-122"/>
+                <a:cs typeface="Inter" pitchFamily="34" charset="-120"/>
+              </a:rPr>
+              <a:t>39.8%  →  </a:t>
+            </a:r>
+            <a:pPr indent="0" marL="0">
+              <a:spcAft>
+                <a:spcPts val="200"/>
+              </a:spcAft>
+              <a:buNone/>
+            </a:pPr>
+            <a:r>
+              <a:rPr lang="en-US" sz="1200" b="1" dirty="0">
+                <a:solidFill>
+                  <a:srgbClr val="A82B26"/>
+                </a:solidFill>
+                <a:latin typeface="Inter" pitchFamily="34" charset="0"/>
+                <a:ea typeface="Inter" pitchFamily="34" charset="-122"/>
+                <a:cs typeface="Inter" pitchFamily="34" charset="-120"/>
+              </a:rPr>
+              <a:t>34.1%</a:t>
+            </a:r>
+            <a:endParaRPr lang="en-US" sz="1400" dirty="0"/>
+          </a:p>
+        </p:txBody>
+      </p:sp>
+      <p:sp>
+        <p:nvSpPr>
+          <p:cNvPr id="43" name="Text 41"/>
+          <p:cNvSpPr txBox="1"/>
+          <p:nvPr/>
+        </p:nvSpPr>
+        <p:spPr>
+          <a:xfrm>
+            <a:off x="6632448" y="4369003"/>
+            <a:ext cx="1115568" cy="755294"/>
+          </a:xfrm>
+          <a:prstGeom prst="rect">
+            <a:avLst/>
+          </a:prstGeom>
+          <a:noFill/>
+          <a:ln/>
+        </p:spPr>
+        <p:txBody>
+          <a:bodyPr wrap="square" lIns="0" tIns="0" rIns="0" bIns="0" rtlCol="0" anchor="ctr"/>
+          <a:lstStyle/>
+          <a:p>
+            <a:pPr algn="r" indent="0" marL="0">
+              <a:buNone/>
+            </a:pPr>
+            <a:r>
+              <a:rPr lang="en-US" sz="1600" b="1" dirty="0">
+                <a:solidFill>
+                  <a:srgbClr val="A82B26"/>
+                </a:solidFill>
+                <a:latin typeface="Inter" pitchFamily="34" charset="0"/>
+                <a:ea typeface="Inter" pitchFamily="34" charset="-122"/>
+                <a:cs typeface="Inter" pitchFamily="34" charset="-120"/>
+              </a:rPr>
+              <a:t>−5.7 pts</a:t>
+            </a:r>
+            <a:endParaRPr lang="en-US" sz="1600" dirty="0"/>
+          </a:p>
+        </p:txBody>
+      </p:sp>
+      <p:sp>
+        <p:nvSpPr>
+          <p:cNvPr id="44" name="Shape 42"/>
+          <p:cNvSpPr/>
+          <p:nvPr/>
+        </p:nvSpPr>
+        <p:spPr>
+          <a:xfrm>
+            <a:off x="4349496" y="5124298"/>
+            <a:ext cx="3489960" cy="755294"/>
+          </a:xfrm>
+          <a:prstGeom prst="rect">
+            <a:avLst/>
+          </a:prstGeom>
+          <a:solidFill>
+            <a:srgbClr val="F7F7F7"/>
+          </a:solidFill>
+          <a:ln/>
+        </p:spPr>
+      </p:sp>
+      <p:sp>
+        <p:nvSpPr>
+          <p:cNvPr id="45" name="Text 43"/>
+          <p:cNvSpPr txBox="1"/>
+          <p:nvPr/>
+        </p:nvSpPr>
+        <p:spPr>
+          <a:xfrm>
+            <a:off x="4440936" y="5124298"/>
+            <a:ext cx="365760" cy="755294"/>
+          </a:xfrm>
+          <a:prstGeom prst="rect">
+            <a:avLst/>
+          </a:prstGeom>
+          <a:noFill/>
+          <a:ln/>
+        </p:spPr>
+        <p:txBody>
+          <a:bodyPr wrap="square" lIns="0" tIns="0" rIns="0" bIns="0" rtlCol="0" anchor="ctr"/>
+          <a:lstStyle/>
+          <a:p>
+            <a:pPr indent="0" marL="0">
+              <a:buNone/>
+            </a:pPr>
+            <a:r>
+              <a:rPr lang="en-US" sz="1500" b="1" dirty="0">
+                <a:solidFill>
+                  <a:srgbClr val="0B2C4A"/>
+                </a:solidFill>
+                <a:latin typeface="Inter" pitchFamily="34" charset="0"/>
+                <a:ea typeface="Inter" pitchFamily="34" charset="-122"/>
+                <a:cs typeface="Inter" pitchFamily="34" charset="-120"/>
+              </a:rPr>
+              <a:t>29</a:t>
+            </a:r>
+            <a:endParaRPr lang="en-US" sz="1500" dirty="0"/>
+          </a:p>
+        </p:txBody>
+      </p:sp>
+      <p:sp>
+        <p:nvSpPr>
+          <p:cNvPr id="46" name="Text 44"/>
+          <p:cNvSpPr txBox="1"/>
+          <p:nvPr/>
+        </p:nvSpPr>
+        <p:spPr>
+          <a:xfrm>
+            <a:off x="4788408" y="5124298"/>
+            <a:ext cx="1825752" cy="755294"/>
+          </a:xfrm>
+          <a:prstGeom prst="rect">
+            <a:avLst/>
+          </a:prstGeom>
+          <a:noFill/>
+          <a:ln/>
+        </p:spPr>
+        <p:txBody>
+          <a:bodyPr wrap="square" lIns="0" tIns="0" rIns="0" bIns="0" rtlCol="0" anchor="ctr"/>
+          <a:lstStyle/>
+          <a:p>
+            <a:pPr indent="0" marL="0">
+              <a:spcAft>
+                <a:spcPts val="200"/>
+              </a:spcAft>
+              <a:buNone/>
+            </a:pPr>
+            <a:r>
+              <a:rPr lang="en-US" sz="1400" b="1" dirty="0">
+                <a:solidFill>
+                  <a:srgbClr val="1A1A1A"/>
+                </a:solidFill>
+                <a:latin typeface="Inter" pitchFamily="34" charset="0"/>
+                <a:ea typeface="Inter" pitchFamily="34" charset="-122"/>
+                <a:cs typeface="Inter" pitchFamily="34" charset="-120"/>
+              </a:rPr>
+              <a:t>Cadillac</a:t>
+            </a:r>
+            <a:endParaRPr lang="en-US" sz="1400" dirty="0"/>
+          </a:p>
+          <a:p>
+            <a:pPr indent="0" marL="0">
+              <a:spcAft>
+                <a:spcPts val="200"/>
+              </a:spcAft>
+              <a:buNone/>
+            </a:pPr>
+            <a:r>
+              <a:rPr lang="en-US" sz="1200" dirty="0">
+                <a:solidFill>
+                  <a:srgbClr val="595959"/>
+                </a:solidFill>
+                <a:latin typeface="Inter" pitchFamily="34" charset="0"/>
+                <a:ea typeface="Inter" pitchFamily="34" charset="-122"/>
+                <a:cs typeface="Inter" pitchFamily="34" charset="-120"/>
+              </a:rPr>
+              <a:t>32.0%  →  </a:t>
+            </a:r>
+            <a:pPr indent="0" marL="0">
+              <a:spcAft>
+                <a:spcPts val="200"/>
+              </a:spcAft>
+              <a:buNone/>
+            </a:pPr>
+            <a:r>
+              <a:rPr lang="en-US" sz="1200" b="1" dirty="0">
+                <a:solidFill>
+                  <a:srgbClr val="A82B26"/>
+                </a:solidFill>
+                <a:latin typeface="Inter" pitchFamily="34" charset="0"/>
+                <a:ea typeface="Inter" pitchFamily="34" charset="-122"/>
+                <a:cs typeface="Inter" pitchFamily="34" charset="-120"/>
+              </a:rPr>
+              <a:t>27.9%</a:t>
+            </a:r>
+            <a:endParaRPr lang="en-US" sz="1400" dirty="0"/>
+          </a:p>
+        </p:txBody>
+      </p:sp>
+      <p:sp>
+        <p:nvSpPr>
+          <p:cNvPr id="47" name="Text 45"/>
+          <p:cNvSpPr txBox="1"/>
+          <p:nvPr/>
+        </p:nvSpPr>
+        <p:spPr>
+          <a:xfrm>
+            <a:off x="6632448" y="5124298"/>
+            <a:ext cx="1115568" cy="755294"/>
+          </a:xfrm>
+          <a:prstGeom prst="rect">
+            <a:avLst/>
+          </a:prstGeom>
+          <a:noFill/>
+          <a:ln/>
+        </p:spPr>
+        <p:txBody>
+          <a:bodyPr wrap="square" lIns="0" tIns="0" rIns="0" bIns="0" rtlCol="0" anchor="ctr"/>
+          <a:lstStyle/>
+          <a:p>
+            <a:pPr algn="r" indent="0" marL="0">
+              <a:buNone/>
+            </a:pPr>
+            <a:r>
+              <a:rPr lang="en-US" sz="1600" b="1" dirty="0">
+                <a:solidFill>
+                  <a:srgbClr val="A82B26"/>
+                </a:solidFill>
+                <a:latin typeface="Inter" pitchFamily="34" charset="0"/>
+                <a:ea typeface="Inter" pitchFamily="34" charset="-122"/>
+                <a:cs typeface="Inter" pitchFamily="34" charset="-120"/>
+              </a:rPr>
+              <a:t>−4.1 pts</a:t>
+            </a:r>
+            <a:endParaRPr lang="en-US" sz="1600" dirty="0"/>
+          </a:p>
+        </p:txBody>
+      </p:sp>
+      <p:sp>
+        <p:nvSpPr>
+          <p:cNvPr id="48" name="Shape 46"/>
+          <p:cNvSpPr/>
+          <p:nvPr/>
+        </p:nvSpPr>
+        <p:spPr>
+          <a:xfrm>
+            <a:off x="8040624" y="1371600"/>
+            <a:ext cx="3489960" cy="45720"/>
+          </a:xfrm>
+          <a:prstGeom prst="rect">
+            <a:avLst/>
+          </a:prstGeom>
+          <a:solidFill>
+            <a:srgbClr val="2587C5"/>
+          </a:solidFill>
+          <a:ln/>
+        </p:spPr>
+      </p:sp>
+      <p:sp>
+        <p:nvSpPr>
+          <p:cNvPr id="49" name="Text 47"/>
+          <p:cNvSpPr txBox="1"/>
+          <p:nvPr/>
+        </p:nvSpPr>
+        <p:spPr>
+          <a:xfrm>
+            <a:off x="8132064" y="1444752"/>
+            <a:ext cx="3307080" cy="274320"/>
+          </a:xfrm>
+          <a:prstGeom prst="rect">
+            <a:avLst/>
+          </a:prstGeom>
+          <a:noFill/>
+          <a:ln/>
+        </p:spPr>
+        <p:txBody>
+          <a:bodyPr wrap="square" lIns="0" tIns="0" rIns="0" bIns="0" rtlCol="0" anchor="ctr"/>
+          <a:lstStyle/>
+          <a:p>
+            <a:pPr indent="0" marL="0">
+              <a:buNone/>
+            </a:pPr>
+            <a:r>
+              <a:rPr lang="en-US" sz="1500" b="1" spc="100" kern="0" dirty="0">
+                <a:solidFill>
+                  <a:srgbClr val="0B2C4A"/>
+                </a:solidFill>
+                <a:latin typeface="Inter" pitchFamily="34" charset="0"/>
+                <a:ea typeface="Inter" pitchFamily="34" charset="-122"/>
+                <a:cs typeface="Inter" pitchFamily="34" charset="-120"/>
+              </a:rPr>
+              <a:t>TOP 5 MOVING NOW</a:t>
+            </a:r>
+            <a:endParaRPr lang="en-US" sz="1500" dirty="0"/>
+          </a:p>
+        </p:txBody>
+      </p:sp>
+      <p:sp>
+        <p:nvSpPr>
+          <p:cNvPr id="50" name="Text 48"/>
+          <p:cNvSpPr txBox="1"/>
+          <p:nvPr/>
+        </p:nvSpPr>
+        <p:spPr>
+          <a:xfrm>
+            <a:off x="8132064" y="1737360"/>
+            <a:ext cx="3307080" cy="274320"/>
+          </a:xfrm>
+          <a:prstGeom prst="rect">
+            <a:avLst/>
+          </a:prstGeom>
+          <a:noFill/>
+          <a:ln/>
+        </p:spPr>
+        <p:txBody>
+          <a:bodyPr wrap="square" lIns="0" tIns="0" rIns="0" bIns="0" rtlCol="0" anchor="ctr"/>
+          <a:lstStyle/>
+          <a:p>
+            <a:pPr indent="0" marL="0">
+              <a:buNone/>
+            </a:pPr>
+            <a:r>
+              <a:rPr lang="en-US" sz="1200" dirty="0">
+                <a:solidFill>
+                  <a:srgbClr val="595959"/>
+                </a:solidFill>
+                <a:latin typeface="Inter" pitchFamily="34" charset="0"/>
+                <a:ea typeface="Inter" pitchFamily="34" charset="-122"/>
+                <a:cs typeface="Inter" pitchFamily="34" charset="-120"/>
+              </a:rPr>
+              <a:t>Jul–Sep vs Jan–Mar 2026</a:t>
+            </a:r>
+            <a:endParaRPr lang="en-US" sz="1200" dirty="0"/>
+          </a:p>
+        </p:txBody>
+      </p:sp>
+      <p:sp>
+        <p:nvSpPr>
+          <p:cNvPr id="51" name="Shape 49"/>
+          <p:cNvSpPr/>
+          <p:nvPr/>
+        </p:nvSpPr>
+        <p:spPr>
+          <a:xfrm>
+            <a:off x="8040624" y="2103120"/>
+            <a:ext cx="3489960" cy="755294"/>
+          </a:xfrm>
+          <a:prstGeom prst="rect">
+            <a:avLst/>
+          </a:prstGeom>
+          <a:solidFill>
+            <a:srgbClr val="F7F7F7"/>
+          </a:solidFill>
+          <a:ln/>
+        </p:spPr>
+      </p:sp>
+      <p:sp>
+        <p:nvSpPr>
+          <p:cNvPr id="52" name="Text 50"/>
+          <p:cNvSpPr txBox="1"/>
+          <p:nvPr/>
+        </p:nvSpPr>
+        <p:spPr>
+          <a:xfrm>
+            <a:off x="8132064" y="2103120"/>
+            <a:ext cx="365760" cy="755294"/>
+          </a:xfrm>
+          <a:prstGeom prst="rect">
+            <a:avLst/>
+          </a:prstGeom>
+          <a:noFill/>
+          <a:ln/>
+        </p:spPr>
+        <p:txBody>
+          <a:bodyPr wrap="square" lIns="0" tIns="0" rIns="0" bIns="0" rtlCol="0" anchor="ctr"/>
+          <a:lstStyle/>
+          <a:p>
+            <a:pPr indent="0" marL="0">
+              <a:buNone/>
+            </a:pPr>
+            <a:r>
+              <a:rPr lang="en-US" sz="1500" b="1" dirty="0">
+                <a:solidFill>
+                  <a:srgbClr val="0B2C4A"/>
+                </a:solidFill>
+                <a:latin typeface="Inter" pitchFamily="34" charset="0"/>
+                <a:ea typeface="Inter" pitchFamily="34" charset="-122"/>
+                <a:cs typeface="Inter" pitchFamily="34" charset="-120"/>
+              </a:rPr>
               <a:t>1</a:t>
             </a:r>
             <a:endParaRPr lang="en-US" sz="1500" dirty="0"/>
@@ -17909,14 +19717,14 @@
       </p:sp>
       <p:sp>
         <p:nvSpPr>
-          <p:cNvPr id="13" name="Text 11"/>
-          <p:cNvSpPr txBox="1"/>
-          <p:nvPr/>
-        </p:nvSpPr>
-        <p:spPr>
-          <a:xfrm>
-            <a:off x="1115568" y="2121408"/>
-            <a:ext cx="1737360" cy="751637"/>
+          <p:cNvPr id="53" name="Text 51"/>
+          <p:cNvSpPr txBox="1"/>
+          <p:nvPr/>
+        </p:nvSpPr>
+        <p:spPr>
+          <a:xfrm>
+            <a:off x="8479536" y="2103120"/>
+            <a:ext cx="1825752" cy="755294"/>
           </a:xfrm>
           <a:prstGeom prst="rect">
             <a:avLst/>
@@ -17929,6 +19737,9 @@
           <a:lstStyle/>
           <a:p>
             <a:pPr indent="0" marL="0">
+              <a:spcAft>
+                <a:spcPts val="200"/>
+              </a:spcAft>
               <a:buNone/>
             </a:pPr>
             <a:r>
@@ -17940,38 +19751,19 @@
                 <a:ea typeface="Inter" pitchFamily="34" charset="-122"/>
                 <a:cs typeface="Inter" pitchFamily="34" charset="-120"/>
               </a:rPr>
-              <a:t>Mazda</a:t>
+              <a:t>Lexus</a:t>
             </a:r>
             <a:endParaRPr lang="en-US" sz="1400" dirty="0"/>
           </a:p>
-        </p:txBody>
-      </p:sp>
-      <p:sp>
-        <p:nvSpPr>
-          <p:cNvPr id="14" name="Text 12"/>
-          <p:cNvSpPr txBox="1"/>
-          <p:nvPr/>
-        </p:nvSpPr>
-        <p:spPr>
-          <a:xfrm>
-            <a:off x="2898648" y="2121408"/>
-            <a:ext cx="1920240" cy="751637"/>
-          </a:xfrm>
-          <a:prstGeom prst="rect">
-            <a:avLst/>
-          </a:prstGeom>
-          <a:noFill/>
-          <a:ln/>
-        </p:spPr>
-        <p:txBody>
-          <a:bodyPr wrap="square" lIns="0" tIns="0" rIns="0" bIns="0" rtlCol="0" anchor="ctr"/>
-          <a:lstStyle/>
           <a:p>
             <a:pPr indent="0" marL="0">
-              <a:buNone/>
-            </a:pPr>
-            <a:r>
-              <a:rPr lang="en-US" sz="1400" dirty="0">
+              <a:spcAft>
+                <a:spcPts val="200"/>
+              </a:spcAft>
+              <a:buNone/>
+            </a:pPr>
+            <a:r>
+              <a:rPr lang="en-US" sz="1200" dirty="0">
                 <a:solidFill>
                   <a:srgbClr val="595959"/>
                 </a:solidFill>
@@ -17979,35 +19771,358 @@
                 <a:ea typeface="Inter" pitchFamily="34" charset="-122"/>
                 <a:cs typeface="Inter" pitchFamily="34" charset="-120"/>
               </a:rPr>
-              <a:t>45.8%  </a:t>
+              <a:t>48.9%  →  </a:t>
             </a:r>
             <a:pPr indent="0" marL="0">
+              <a:spcAft>
+                <a:spcPts val="200"/>
+              </a:spcAft>
+              <a:buNone/>
+            </a:pPr>
+            <a:r>
+              <a:rPr lang="en-US" sz="1200" b="1" dirty="0">
+                <a:solidFill>
+                  <a:srgbClr val="0B7A4A"/>
+                </a:solidFill>
+                <a:latin typeface="Inter" pitchFamily="34" charset="0"/>
+                <a:ea typeface="Inter" pitchFamily="34" charset="-122"/>
+                <a:cs typeface="Inter" pitchFamily="34" charset="-120"/>
+              </a:rPr>
+              <a:t>57.7%</a:t>
+            </a:r>
+            <a:endParaRPr lang="en-US" sz="1400" dirty="0"/>
+          </a:p>
+        </p:txBody>
+      </p:sp>
+      <p:sp>
+        <p:nvSpPr>
+          <p:cNvPr id="54" name="Text 52"/>
+          <p:cNvSpPr txBox="1"/>
+          <p:nvPr/>
+        </p:nvSpPr>
+        <p:spPr>
+          <a:xfrm>
+            <a:off x="10323576" y="2103120"/>
+            <a:ext cx="1115568" cy="755294"/>
+          </a:xfrm>
+          <a:prstGeom prst="rect">
+            <a:avLst/>
+          </a:prstGeom>
+          <a:noFill/>
+          <a:ln/>
+        </p:spPr>
+        <p:txBody>
+          <a:bodyPr wrap="square" lIns="0" tIns="0" rIns="0" bIns="0" rtlCol="0" anchor="ctr"/>
+          <a:lstStyle/>
+          <a:p>
+            <a:pPr algn="r" indent="0" marL="0">
+              <a:buNone/>
+            </a:pPr>
+            <a:r>
+              <a:rPr lang="en-US" sz="1600" b="1" dirty="0">
+                <a:solidFill>
+                  <a:srgbClr val="0B7A4A"/>
+                </a:solidFill>
+                <a:latin typeface="Inter" pitchFamily="34" charset="0"/>
+                <a:ea typeface="Inter" pitchFamily="34" charset="-122"/>
+                <a:cs typeface="Inter" pitchFamily="34" charset="-120"/>
+              </a:rPr>
+              <a:t>+8.9 pts</a:t>
+            </a:r>
+            <a:endParaRPr lang="en-US" sz="1600" dirty="0"/>
+          </a:p>
+        </p:txBody>
+      </p:sp>
+      <p:sp>
+        <p:nvSpPr>
+          <p:cNvPr id="55" name="Text 53"/>
+          <p:cNvSpPr txBox="1"/>
+          <p:nvPr/>
+        </p:nvSpPr>
+        <p:spPr>
+          <a:xfrm>
+            <a:off x="8132064" y="2858414"/>
+            <a:ext cx="365760" cy="755294"/>
+          </a:xfrm>
+          <a:prstGeom prst="rect">
+            <a:avLst/>
+          </a:prstGeom>
+          <a:noFill/>
+          <a:ln/>
+        </p:spPr>
+        <p:txBody>
+          <a:bodyPr wrap="square" lIns="0" tIns="0" rIns="0" bIns="0" rtlCol="0" anchor="ctr"/>
+          <a:lstStyle/>
+          <a:p>
+            <a:pPr indent="0" marL="0">
+              <a:buNone/>
+            </a:pPr>
+            <a:r>
+              <a:rPr lang="en-US" sz="1500" b="1" dirty="0">
+                <a:solidFill>
+                  <a:srgbClr val="0B2C4A"/>
+                </a:solidFill>
+                <a:latin typeface="Inter" pitchFamily="34" charset="0"/>
+                <a:ea typeface="Inter" pitchFamily="34" charset="-122"/>
+                <a:cs typeface="Inter" pitchFamily="34" charset="-120"/>
+              </a:rPr>
+              <a:t>2</a:t>
+            </a:r>
+            <a:endParaRPr lang="en-US" sz="1500" dirty="0"/>
+          </a:p>
+        </p:txBody>
+      </p:sp>
+      <p:sp>
+        <p:nvSpPr>
+          <p:cNvPr id="56" name="Text 54"/>
+          <p:cNvSpPr txBox="1"/>
+          <p:nvPr/>
+        </p:nvSpPr>
+        <p:spPr>
+          <a:xfrm>
+            <a:off x="8479536" y="2858414"/>
+            <a:ext cx="1825752" cy="755294"/>
+          </a:xfrm>
+          <a:prstGeom prst="rect">
+            <a:avLst/>
+          </a:prstGeom>
+          <a:noFill/>
+          <a:ln/>
+        </p:spPr>
+        <p:txBody>
+          <a:bodyPr wrap="square" lIns="0" tIns="0" rIns="0" bIns="0" rtlCol="0" anchor="ctr"/>
+          <a:lstStyle/>
+          <a:p>
+            <a:pPr indent="0" marL="0">
+              <a:spcAft>
+                <a:spcPts val="200"/>
+              </a:spcAft>
               <a:buNone/>
             </a:pPr>
             <a:r>
               <a:rPr lang="en-US" sz="1400" b="1" dirty="0">
                 <a:solidFill>
+                  <a:srgbClr val="1A1A1A"/>
+                </a:solidFill>
+                <a:latin typeface="Inter" pitchFamily="34" charset="0"/>
+                <a:ea typeface="Inter" pitchFamily="34" charset="-122"/>
+                <a:cs typeface="Inter" pitchFamily="34" charset="-120"/>
+              </a:rPr>
+              <a:t>Acura</a:t>
+            </a:r>
+            <a:endParaRPr lang="en-US" sz="1400" dirty="0"/>
+          </a:p>
+          <a:p>
+            <a:pPr indent="0" marL="0">
+              <a:spcAft>
+                <a:spcPts val="200"/>
+              </a:spcAft>
+              <a:buNone/>
+            </a:pPr>
+            <a:r>
+              <a:rPr lang="en-US" sz="1200" dirty="0">
+                <a:solidFill>
+                  <a:srgbClr val="595959"/>
+                </a:solidFill>
+                <a:latin typeface="Inter" pitchFamily="34" charset="0"/>
+                <a:ea typeface="Inter" pitchFamily="34" charset="-122"/>
+                <a:cs typeface="Inter" pitchFamily="34" charset="-120"/>
+              </a:rPr>
+              <a:t>45.7%  →  </a:t>
+            </a:r>
+            <a:pPr indent="0" marL="0">
+              <a:spcAft>
+                <a:spcPts val="200"/>
+              </a:spcAft>
+              <a:buNone/>
+            </a:pPr>
+            <a:r>
+              <a:rPr lang="en-US" sz="1200" b="1" dirty="0">
+                <a:solidFill>
                   <a:srgbClr val="0B7A4A"/>
                 </a:solidFill>
                 <a:latin typeface="Inter" pitchFamily="34" charset="0"/>
                 <a:ea typeface="Inter" pitchFamily="34" charset="-122"/>
                 <a:cs typeface="Inter" pitchFamily="34" charset="-120"/>
               </a:rPr>
-              <a:t>→  </a:t>
-            </a:r>
+              <a:t>52.5%</a:t>
+            </a:r>
+            <a:endParaRPr lang="en-US" sz="1400" dirty="0"/>
+          </a:p>
+        </p:txBody>
+      </p:sp>
+      <p:sp>
+        <p:nvSpPr>
+          <p:cNvPr id="57" name="Text 55"/>
+          <p:cNvSpPr txBox="1"/>
+          <p:nvPr/>
+        </p:nvSpPr>
+        <p:spPr>
+          <a:xfrm>
+            <a:off x="10323576" y="2858414"/>
+            <a:ext cx="1115568" cy="755294"/>
+          </a:xfrm>
+          <a:prstGeom prst="rect">
+            <a:avLst/>
+          </a:prstGeom>
+          <a:noFill/>
+          <a:ln/>
+        </p:spPr>
+        <p:txBody>
+          <a:bodyPr wrap="square" lIns="0" tIns="0" rIns="0" bIns="0" rtlCol="0" anchor="ctr"/>
+          <a:lstStyle/>
+          <a:p>
+            <a:pPr algn="r" indent="0" marL="0">
+              <a:buNone/>
+            </a:pPr>
+            <a:r>
+              <a:rPr lang="en-US" sz="1600" b="1" dirty="0">
+                <a:solidFill>
+                  <a:srgbClr val="0B7A4A"/>
+                </a:solidFill>
+                <a:latin typeface="Inter" pitchFamily="34" charset="0"/>
+                <a:ea typeface="Inter" pitchFamily="34" charset="-122"/>
+                <a:cs typeface="Inter" pitchFamily="34" charset="-120"/>
+              </a:rPr>
+              <a:t>+6.8 pts</a:t>
+            </a:r>
+            <a:endParaRPr lang="en-US" sz="1600" dirty="0"/>
+          </a:p>
+        </p:txBody>
+      </p:sp>
+      <p:sp>
+        <p:nvSpPr>
+          <p:cNvPr id="58" name="Shape 56"/>
+          <p:cNvSpPr/>
+          <p:nvPr/>
+        </p:nvSpPr>
+        <p:spPr>
+          <a:xfrm>
+            <a:off x="8040624" y="3613709"/>
+            <a:ext cx="3489960" cy="755294"/>
+          </a:xfrm>
+          <a:prstGeom prst="rect">
+            <a:avLst/>
+          </a:prstGeom>
+          <a:solidFill>
+            <a:srgbClr val="F7F7F7"/>
+          </a:solidFill>
+          <a:ln/>
+        </p:spPr>
+      </p:sp>
+      <p:sp>
+        <p:nvSpPr>
+          <p:cNvPr id="59" name="Text 57"/>
+          <p:cNvSpPr txBox="1"/>
+          <p:nvPr/>
+        </p:nvSpPr>
+        <p:spPr>
+          <a:xfrm>
+            <a:off x="8132064" y="3613709"/>
+            <a:ext cx="365760" cy="755294"/>
+          </a:xfrm>
+          <a:prstGeom prst="rect">
+            <a:avLst/>
+          </a:prstGeom>
+          <a:noFill/>
+          <a:ln/>
+        </p:spPr>
+        <p:txBody>
+          <a:bodyPr wrap="square" lIns="0" tIns="0" rIns="0" bIns="0" rtlCol="0" anchor="ctr"/>
+          <a:lstStyle/>
+          <a:p>
             <a:pPr indent="0" marL="0">
               <a:buNone/>
             </a:pPr>
             <a:r>
+              <a:rPr lang="en-US" sz="1500" b="1" dirty="0">
+                <a:solidFill>
+                  <a:srgbClr val="0B2C4A"/>
+                </a:solidFill>
+                <a:latin typeface="Inter" pitchFamily="34" charset="0"/>
+                <a:ea typeface="Inter" pitchFamily="34" charset="-122"/>
+                <a:cs typeface="Inter" pitchFamily="34" charset="-120"/>
+              </a:rPr>
+              <a:t>3</a:t>
+            </a:r>
+            <a:endParaRPr lang="en-US" sz="1500" dirty="0"/>
+          </a:p>
+        </p:txBody>
+      </p:sp>
+      <p:sp>
+        <p:nvSpPr>
+          <p:cNvPr id="60" name="Text 58"/>
+          <p:cNvSpPr txBox="1"/>
+          <p:nvPr/>
+        </p:nvSpPr>
+        <p:spPr>
+          <a:xfrm>
+            <a:off x="8479536" y="3613709"/>
+            <a:ext cx="1825752" cy="755294"/>
+          </a:xfrm>
+          <a:prstGeom prst="rect">
+            <a:avLst/>
+          </a:prstGeom>
+          <a:noFill/>
+          <a:ln/>
+        </p:spPr>
+        <p:txBody>
+          <a:bodyPr wrap="square" lIns="0" tIns="0" rIns="0" bIns="0" rtlCol="0" anchor="ctr"/>
+          <a:lstStyle/>
+          <a:p>
+            <a:pPr indent="0" marL="0">
+              <a:spcAft>
+                <a:spcPts val="200"/>
+              </a:spcAft>
+              <a:buNone/>
+            </a:pPr>
+            <a:r>
               <a:rPr lang="en-US" sz="1400" b="1" dirty="0">
                 <a:solidFill>
+                  <a:srgbClr val="1A1A1A"/>
+                </a:solidFill>
+                <a:latin typeface="Inter" pitchFamily="34" charset="0"/>
+                <a:ea typeface="Inter" pitchFamily="34" charset="-122"/>
+                <a:cs typeface="Inter" pitchFamily="34" charset="-120"/>
+              </a:rPr>
+              <a:t>Chevy GMC Bullhead</a:t>
+            </a:r>
+            <a:endParaRPr lang="en-US" sz="1400" dirty="0"/>
+          </a:p>
+          <a:p>
+            <a:pPr indent="0" marL="0">
+              <a:spcAft>
+                <a:spcPts val="200"/>
+              </a:spcAft>
+              <a:buNone/>
+            </a:pPr>
+            <a:r>
+              <a:rPr lang="en-US" sz="1200" dirty="0">
+                <a:solidFill>
+                  <a:srgbClr val="595959"/>
+                </a:solidFill>
+                <a:latin typeface="Inter" pitchFamily="34" charset="0"/>
+                <a:ea typeface="Inter" pitchFamily="34" charset="-122"/>
+                <a:cs typeface="Inter" pitchFamily="34" charset="-120"/>
+              </a:rPr>
+              <a:t>42.2%  →  </a:t>
+            </a:r>
+            <a:pPr indent="0" marL="0">
+              <a:spcAft>
+                <a:spcPts val="200"/>
+              </a:spcAft>
+              <a:buNone/>
+            </a:pPr>
+            <a:r>
+              <a:rPr lang="en-US" sz="1200" b="1" dirty="0">
+                <a:solidFill>
                   <a:srgbClr val="0B7A4A"/>
                 </a:solidFill>
                 <a:latin typeface="Inter" pitchFamily="34" charset="0"/>
                 <a:ea typeface="Inter" pitchFamily="34" charset="-122"/>
                 <a:cs typeface="Inter" pitchFamily="34" charset="-120"/>
               </a:rPr>
-              <a:t>56.6%</a:t>
+              <a:t>48.3%</a:t>
             </a:r>
             <a:endParaRPr lang="en-US" sz="1400" dirty="0"/>
           </a:p>
@@ -18015,14 +20130,14 @@
       </p:sp>
       <p:sp>
         <p:nvSpPr>
-          <p:cNvPr id="15" name="Text 13"/>
-          <p:cNvSpPr txBox="1"/>
-          <p:nvPr/>
-        </p:nvSpPr>
-        <p:spPr>
-          <a:xfrm>
-            <a:off x="4864608" y="2121408"/>
-            <a:ext cx="1051560" cy="751637"/>
+          <p:cNvPr id="61" name="Text 59"/>
+          <p:cNvSpPr txBox="1"/>
+          <p:nvPr/>
+        </p:nvSpPr>
+        <p:spPr>
+          <a:xfrm>
+            <a:off x="10323576" y="3613709"/>
+            <a:ext cx="1115568" cy="755294"/>
           </a:xfrm>
           <a:prstGeom prst="rect">
             <a:avLst/>
@@ -18046,7 +20161,7 @@
                 <a:ea typeface="Inter" pitchFamily="34" charset="-122"/>
                 <a:cs typeface="Inter" pitchFamily="34" charset="-120"/>
               </a:rPr>
-              <a:t>+10.8 pts</a:t>
+              <a:t>+6.1 pts</a:t>
             </a:r>
             <a:endParaRPr lang="en-US" sz="1600" dirty="0"/>
           </a:p>
@@ -18054,14 +20169,14 @@
       </p:sp>
       <p:sp>
         <p:nvSpPr>
-          <p:cNvPr id="16" name="Text 14"/>
-          <p:cNvSpPr txBox="1"/>
-          <p:nvPr/>
-        </p:nvSpPr>
-        <p:spPr>
-          <a:xfrm>
-            <a:off x="749808" y="2873045"/>
-            <a:ext cx="320040" cy="751637"/>
+          <p:cNvPr id="62" name="Text 60"/>
+          <p:cNvSpPr txBox="1"/>
+          <p:nvPr/>
+        </p:nvSpPr>
+        <p:spPr>
+          <a:xfrm>
+            <a:off x="8132064" y="4369003"/>
+            <a:ext cx="365760" cy="755294"/>
           </a:xfrm>
           <a:prstGeom prst="rect">
             <a:avLst/>
@@ -18085,7 +20200,7 @@
                 <a:ea typeface="Inter" pitchFamily="34" charset="-122"/>
                 <a:cs typeface="Inter" pitchFamily="34" charset="-120"/>
               </a:rPr>
-              <a:t>2</a:t>
+              <a:t>4</a:t>
             </a:r>
             <a:endParaRPr lang="en-US" sz="1500" dirty="0"/>
           </a:p>
@@ -18093,14 +20208,14 @@
       </p:sp>
       <p:sp>
         <p:nvSpPr>
-          <p:cNvPr id="17" name="Text 15"/>
-          <p:cNvSpPr txBox="1"/>
-          <p:nvPr/>
-        </p:nvSpPr>
-        <p:spPr>
-          <a:xfrm>
-            <a:off x="1115568" y="2873045"/>
-            <a:ext cx="1737360" cy="751637"/>
+          <p:cNvPr id="63" name="Text 61"/>
+          <p:cNvSpPr txBox="1"/>
+          <p:nvPr/>
+        </p:nvSpPr>
+        <p:spPr>
+          <a:xfrm>
+            <a:off x="8479536" y="4369003"/>
+            <a:ext cx="1825752" cy="755294"/>
           </a:xfrm>
           <a:prstGeom prst="rect">
             <a:avLst/>
@@ -18113,6 +20228,9 @@
           <a:lstStyle/>
           <a:p>
             <a:pPr indent="0" marL="0">
+              <a:spcAft>
+                <a:spcPts val="200"/>
+              </a:spcAft>
               <a:buNone/>
             </a:pPr>
             <a:r>
@@ -18124,38 +20242,19 @@
                 <a:ea typeface="Inter" pitchFamily="34" charset="-122"/>
                 <a:cs typeface="Inter" pitchFamily="34" charset="-120"/>
               </a:rPr>
-              <a:t>VW Henderson</a:t>
+              <a:t>GMC Prescott</a:t>
             </a:r>
             <a:endParaRPr lang="en-US" sz="1400" dirty="0"/>
           </a:p>
-        </p:txBody>
-      </p:sp>
-      <p:sp>
-        <p:nvSpPr>
-          <p:cNvPr id="18" name="Text 16"/>
-          <p:cNvSpPr txBox="1"/>
-          <p:nvPr/>
-        </p:nvSpPr>
-        <p:spPr>
-          <a:xfrm>
-            <a:off x="2898648" y="2873045"/>
-            <a:ext cx="1920240" cy="751637"/>
-          </a:xfrm>
-          <a:prstGeom prst="rect">
-            <a:avLst/>
-          </a:prstGeom>
-          <a:noFill/>
-          <a:ln/>
-        </p:spPr>
-        <p:txBody>
-          <a:bodyPr wrap="square" lIns="0" tIns="0" rIns="0" bIns="0" rtlCol="0" anchor="ctr"/>
-          <a:lstStyle/>
           <a:p>
             <a:pPr indent="0" marL="0">
-              <a:buNone/>
-            </a:pPr>
-            <a:r>
-              <a:rPr lang="en-US" sz="1400" dirty="0">
+              <a:spcAft>
+                <a:spcPts val="200"/>
+              </a:spcAft>
+              <a:buNone/>
+            </a:pPr>
+            <a:r>
+              <a:rPr lang="en-US" sz="1200" dirty="0">
                 <a:solidFill>
                   <a:srgbClr val="595959"/>
                 </a:solidFill>
@@ -18163,27 +20262,232 @@
                 <a:ea typeface="Inter" pitchFamily="34" charset="-122"/>
                 <a:cs typeface="Inter" pitchFamily="34" charset="-120"/>
               </a:rPr>
-              <a:t>37.4%  </a:t>
+              <a:t>45.7%  →  </a:t>
             </a:r>
             <a:pPr indent="0" marL="0">
+              <a:spcAft>
+                <a:spcPts val="200"/>
+              </a:spcAft>
+              <a:buNone/>
+            </a:pPr>
+            <a:r>
+              <a:rPr lang="en-US" sz="1200" b="1" dirty="0">
+                <a:solidFill>
+                  <a:srgbClr val="0B7A4A"/>
+                </a:solidFill>
+                <a:latin typeface="Inter" pitchFamily="34" charset="0"/>
+                <a:ea typeface="Inter" pitchFamily="34" charset="-122"/>
+                <a:cs typeface="Inter" pitchFamily="34" charset="-120"/>
+              </a:rPr>
+              <a:t>51.5%</a:t>
+            </a:r>
+            <a:endParaRPr lang="en-US" sz="1400" dirty="0"/>
+          </a:p>
+        </p:txBody>
+      </p:sp>
+      <p:sp>
+        <p:nvSpPr>
+          <p:cNvPr id="64" name="Text 62"/>
+          <p:cNvSpPr txBox="1"/>
+          <p:nvPr/>
+        </p:nvSpPr>
+        <p:spPr>
+          <a:xfrm>
+            <a:off x="10323576" y="4369003"/>
+            <a:ext cx="1115568" cy="755294"/>
+          </a:xfrm>
+          <a:prstGeom prst="rect">
+            <a:avLst/>
+          </a:prstGeom>
+          <a:noFill/>
+          <a:ln/>
+        </p:spPr>
+        <p:txBody>
+          <a:bodyPr wrap="square" lIns="0" tIns="0" rIns="0" bIns="0" rtlCol="0" anchor="ctr"/>
+          <a:lstStyle/>
+          <a:p>
+            <a:pPr algn="r" indent="0" marL="0">
+              <a:buNone/>
+            </a:pPr>
+            <a:r>
+              <a:rPr lang="en-US" sz="1600" b="1" dirty="0">
+                <a:solidFill>
+                  <a:srgbClr val="0B7A4A"/>
+                </a:solidFill>
+                <a:latin typeface="Inter" pitchFamily="34" charset="0"/>
+                <a:ea typeface="Inter" pitchFamily="34" charset="-122"/>
+                <a:cs typeface="Inter" pitchFamily="34" charset="-120"/>
+              </a:rPr>
+              <a:t>+5.8 pts</a:t>
+            </a:r>
+            <a:endParaRPr lang="en-US" sz="1600" dirty="0"/>
+          </a:p>
+        </p:txBody>
+      </p:sp>
+      <p:sp>
+        <p:nvSpPr>
+          <p:cNvPr id="65" name="Shape 63"/>
+          <p:cNvSpPr/>
+          <p:nvPr/>
+        </p:nvSpPr>
+        <p:spPr>
+          <a:xfrm>
+            <a:off x="8040624" y="5124298"/>
+            <a:ext cx="3489960" cy="755294"/>
+          </a:xfrm>
+          <a:prstGeom prst="rect">
+            <a:avLst/>
+          </a:prstGeom>
+          <a:solidFill>
+            <a:srgbClr val="F7F7F7"/>
+          </a:solidFill>
+          <a:ln/>
+        </p:spPr>
+      </p:sp>
+      <p:sp>
+        <p:nvSpPr>
+          <p:cNvPr id="66" name="Text 64"/>
+          <p:cNvSpPr txBox="1"/>
+          <p:nvPr/>
+        </p:nvSpPr>
+        <p:spPr>
+          <a:xfrm>
+            <a:off x="8132064" y="5124298"/>
+            <a:ext cx="365760" cy="755294"/>
+          </a:xfrm>
+          <a:prstGeom prst="rect">
+            <a:avLst/>
+          </a:prstGeom>
+          <a:noFill/>
+          <a:ln/>
+        </p:spPr>
+        <p:txBody>
+          <a:bodyPr wrap="square" lIns="0" tIns="0" rIns="0" bIns="0" rtlCol="0" anchor="ctr"/>
+          <a:lstStyle/>
+          <a:p>
+            <a:pPr indent="0" marL="0">
+              <a:buNone/>
+            </a:pPr>
+            <a:r>
+              <a:rPr lang="en-US" sz="1500" b="1" dirty="0">
+                <a:solidFill>
+                  <a:srgbClr val="0B2C4A"/>
+                </a:solidFill>
+                <a:latin typeface="Inter" pitchFamily="34" charset="0"/>
+                <a:ea typeface="Inter" pitchFamily="34" charset="-122"/>
+                <a:cs typeface="Inter" pitchFamily="34" charset="-120"/>
+              </a:rPr>
+              <a:t>5</a:t>
+            </a:r>
+            <a:endParaRPr lang="en-US" sz="1500" dirty="0"/>
+          </a:p>
+        </p:txBody>
+      </p:sp>
+      <p:sp>
+        <p:nvSpPr>
+          <p:cNvPr id="67" name="Text 65"/>
+          <p:cNvSpPr txBox="1"/>
+          <p:nvPr/>
+        </p:nvSpPr>
+        <p:spPr>
+          <a:xfrm>
+            <a:off x="8479536" y="5124298"/>
+            <a:ext cx="1825752" cy="755294"/>
+          </a:xfrm>
+          <a:prstGeom prst="rect">
+            <a:avLst/>
+          </a:prstGeom>
+          <a:noFill/>
+          <a:ln/>
+        </p:spPr>
+        <p:txBody>
+          <a:bodyPr wrap="square" lIns="0" tIns="0" rIns="0" bIns="0" rtlCol="0" anchor="ctr"/>
+          <a:lstStyle/>
+          <a:p>
+            <a:pPr indent="0" marL="0">
+              <a:spcAft>
+                <a:spcPts val="200"/>
+              </a:spcAft>
               <a:buNone/>
             </a:pPr>
             <a:r>
               <a:rPr lang="en-US" sz="1400" b="1" dirty="0">
                 <a:solidFill>
+                  <a:srgbClr val="1A1A1A"/>
+                </a:solidFill>
+                <a:latin typeface="Inter" pitchFamily="34" charset="0"/>
+                <a:ea typeface="Inter" pitchFamily="34" charset="-122"/>
+                <a:cs typeface="Inter" pitchFamily="34" charset="-120"/>
+              </a:rPr>
+              <a:t>Audi Henderson</a:t>
+            </a:r>
+            <a:endParaRPr lang="en-US" sz="1400" dirty="0"/>
+          </a:p>
+          <a:p>
+            <a:pPr indent="0" marL="0">
+              <a:spcAft>
+                <a:spcPts val="200"/>
+              </a:spcAft>
+              <a:buNone/>
+            </a:pPr>
+            <a:r>
+              <a:rPr lang="en-US" sz="1200" dirty="0">
+                <a:solidFill>
+                  <a:srgbClr val="595959"/>
+                </a:solidFill>
+                <a:latin typeface="Inter" pitchFamily="34" charset="0"/>
+                <a:ea typeface="Inter" pitchFamily="34" charset="-122"/>
+                <a:cs typeface="Inter" pitchFamily="34" charset="-120"/>
+              </a:rPr>
+              <a:t>31.3%  →  </a:t>
+            </a:r>
+            <a:pPr indent="0" marL="0">
+              <a:spcAft>
+                <a:spcPts val="200"/>
+              </a:spcAft>
+              <a:buNone/>
+            </a:pPr>
+            <a:r>
+              <a:rPr lang="en-US" sz="1200" b="1" dirty="0">
+                <a:solidFill>
                   <a:srgbClr val="0B7A4A"/>
                 </a:solidFill>
                 <a:latin typeface="Inter" pitchFamily="34" charset="0"/>
                 <a:ea typeface="Inter" pitchFamily="34" charset="-122"/>
                 <a:cs typeface="Inter" pitchFamily="34" charset="-120"/>
               </a:rPr>
-              <a:t>→  </a:t>
-            </a:r>
-            <a:pPr indent="0" marL="0">
-              <a:buNone/>
-            </a:pPr>
-            <a:r>
-              <a:rPr lang="en-US" sz="1400" b="1" dirty="0">
+              <a:t>36.9%</a:t>
+            </a:r>
+            <a:endParaRPr lang="en-US" sz="1400" dirty="0"/>
+          </a:p>
+        </p:txBody>
+      </p:sp>
+      <p:sp>
+        <p:nvSpPr>
+          <p:cNvPr id="68" name="Text 66"/>
+          <p:cNvSpPr txBox="1"/>
+          <p:nvPr/>
+        </p:nvSpPr>
+        <p:spPr>
+          <a:xfrm>
+            <a:off x="10323576" y="5124298"/>
+            <a:ext cx="1115568" cy="755294"/>
+          </a:xfrm>
+          <a:prstGeom prst="rect">
+            <a:avLst/>
+          </a:prstGeom>
+          <a:noFill/>
+          <a:ln/>
+        </p:spPr>
+        <p:txBody>
+          <a:bodyPr wrap="square" lIns="0" tIns="0" rIns="0" bIns="0" rtlCol="0" anchor="ctr"/>
+          <a:lstStyle/>
+          <a:p>
+            <a:pPr algn="r" indent="0" marL="0">
+              <a:buNone/>
+            </a:pPr>
+            <a:r>
+              <a:rPr lang="en-US" sz="1600" b="1" dirty="0">
                 <a:solidFill>
                   <a:srgbClr val="0B7A4A"/>
                 </a:solidFill>
@@ -18191,46 +20495,7 @@
                 <a:ea typeface="Inter" pitchFamily="34" charset="-122"/>
                 <a:cs typeface="Inter" pitchFamily="34" charset="-120"/>
               </a:rPr>
-              <a:t>47.2%</a:t>
-            </a:r>
-            <a:endParaRPr lang="en-US" sz="1400" dirty="0"/>
-          </a:p>
-        </p:txBody>
-      </p:sp>
-      <p:sp>
-        <p:nvSpPr>
-          <p:cNvPr id="19" name="Text 17"/>
-          <p:cNvSpPr txBox="1"/>
-          <p:nvPr/>
-        </p:nvSpPr>
-        <p:spPr>
-          <a:xfrm>
-            <a:off x="4864608" y="2873045"/>
-            <a:ext cx="1051560" cy="751637"/>
-          </a:xfrm>
-          <a:prstGeom prst="rect">
-            <a:avLst/>
-          </a:prstGeom>
-          <a:noFill/>
-          <a:ln/>
-        </p:spPr>
-        <p:txBody>
-          <a:bodyPr wrap="square" lIns="0" tIns="0" rIns="0" bIns="0" rtlCol="0" anchor="ctr"/>
-          <a:lstStyle/>
-          <a:p>
-            <a:pPr algn="r" indent="0" marL="0">
-              <a:buNone/>
-            </a:pPr>
-            <a:r>
-              <a:rPr lang="en-US" sz="1600" b="1" dirty="0">
-                <a:solidFill>
-                  <a:srgbClr val="0B7A4A"/>
-                </a:solidFill>
-                <a:latin typeface="Inter" pitchFamily="34" charset="0"/>
-                <a:ea typeface="Inter" pitchFamily="34" charset="-122"/>
-                <a:cs typeface="Inter" pitchFamily="34" charset="-120"/>
-              </a:rPr>
-              <a:t>+9.7 pts</a:t>
+              <a:t>+5.6 pts</a:t>
             </a:r>
             <a:endParaRPr lang="en-US" sz="1600" dirty="0"/>
           </a:p>
@@ -18238,1716 +20503,7 @@
       </p:sp>
       <p:sp>
         <p:nvSpPr>
-          <p:cNvPr id="20" name="Shape 18"/>
-          <p:cNvSpPr/>
-          <p:nvPr/>
-        </p:nvSpPr>
-        <p:spPr>
-          <a:xfrm>
-            <a:off x="658368" y="3624682"/>
-            <a:ext cx="5321808" cy="751637"/>
-          </a:xfrm>
-          <a:prstGeom prst="rect">
-            <a:avLst/>
-          </a:prstGeom>
-          <a:solidFill>
-            <a:srgbClr val="F7F7F7"/>
-          </a:solidFill>
-          <a:ln/>
-        </p:spPr>
-      </p:sp>
-      <p:sp>
-        <p:nvSpPr>
-          <p:cNvPr id="21" name="Text 19"/>
-          <p:cNvSpPr txBox="1"/>
-          <p:nvPr/>
-        </p:nvSpPr>
-        <p:spPr>
-          <a:xfrm>
-            <a:off x="749808" y="3624682"/>
-            <a:ext cx="320040" cy="751637"/>
-          </a:xfrm>
-          <a:prstGeom prst="rect">
-            <a:avLst/>
-          </a:prstGeom>
-          <a:noFill/>
-          <a:ln/>
-        </p:spPr>
-        <p:txBody>
-          <a:bodyPr wrap="square" lIns="0" tIns="0" rIns="0" bIns="0" rtlCol="0" anchor="ctr"/>
-          <a:lstStyle/>
-          <a:p>
-            <a:pPr indent="0" marL="0">
-              <a:buNone/>
-            </a:pPr>
-            <a:r>
-              <a:rPr lang="en-US" sz="1500" b="1" dirty="0">
-                <a:solidFill>
-                  <a:srgbClr val="0B2C4A"/>
-                </a:solidFill>
-                <a:latin typeface="Inter" pitchFamily="34" charset="0"/>
-                <a:ea typeface="Inter" pitchFamily="34" charset="-122"/>
-                <a:cs typeface="Inter" pitchFamily="34" charset="-120"/>
-              </a:rPr>
-              <a:t>3</a:t>
-            </a:r>
-            <a:endParaRPr lang="en-US" sz="1500" dirty="0"/>
-          </a:p>
-        </p:txBody>
-      </p:sp>
-      <p:sp>
-        <p:nvSpPr>
-          <p:cNvPr id="22" name="Text 20"/>
-          <p:cNvSpPr txBox="1"/>
-          <p:nvPr/>
-        </p:nvSpPr>
-        <p:spPr>
-          <a:xfrm>
-            <a:off x="1115568" y="3624682"/>
-            <a:ext cx="1737360" cy="751637"/>
-          </a:xfrm>
-          <a:prstGeom prst="rect">
-            <a:avLst/>
-          </a:prstGeom>
-          <a:noFill/>
-          <a:ln/>
-        </p:spPr>
-        <p:txBody>
-          <a:bodyPr wrap="square" lIns="0" tIns="0" rIns="0" bIns="0" rtlCol="0" anchor="ctr"/>
-          <a:lstStyle/>
-          <a:p>
-            <a:pPr indent="0" marL="0">
-              <a:buNone/>
-            </a:pPr>
-            <a:r>
-              <a:rPr lang="en-US" sz="1400" b="1" dirty="0">
-                <a:solidFill>
-                  <a:srgbClr val="1A1A1A"/>
-                </a:solidFill>
-                <a:latin typeface="Inter" pitchFamily="34" charset="0"/>
-                <a:ea typeface="Inter" pitchFamily="34" charset="-122"/>
-                <a:cs typeface="Inter" pitchFamily="34" charset="-120"/>
-              </a:rPr>
-              <a:t>Acura</a:t>
-            </a:r>
-            <a:endParaRPr lang="en-US" sz="1400" dirty="0"/>
-          </a:p>
-        </p:txBody>
-      </p:sp>
-      <p:sp>
-        <p:nvSpPr>
-          <p:cNvPr id="23" name="Text 21"/>
-          <p:cNvSpPr txBox="1"/>
-          <p:nvPr/>
-        </p:nvSpPr>
-        <p:spPr>
-          <a:xfrm>
-            <a:off x="2898648" y="3624682"/>
-            <a:ext cx="1920240" cy="751637"/>
-          </a:xfrm>
-          <a:prstGeom prst="rect">
-            <a:avLst/>
-          </a:prstGeom>
-          <a:noFill/>
-          <a:ln/>
-        </p:spPr>
-        <p:txBody>
-          <a:bodyPr wrap="square" lIns="0" tIns="0" rIns="0" bIns="0" rtlCol="0" anchor="ctr"/>
-          <a:lstStyle/>
-          <a:p>
-            <a:pPr indent="0" marL="0">
-              <a:buNone/>
-            </a:pPr>
-            <a:r>
-              <a:rPr lang="en-US" sz="1400" dirty="0">
-                <a:solidFill>
-                  <a:srgbClr val="595959"/>
-                </a:solidFill>
-                <a:latin typeface="Inter" pitchFamily="34" charset="0"/>
-                <a:ea typeface="Inter" pitchFamily="34" charset="-122"/>
-                <a:cs typeface="Inter" pitchFamily="34" charset="-120"/>
-              </a:rPr>
-              <a:t>39.2%  </a:t>
-            </a:r>
-            <a:pPr indent="0" marL="0">
-              <a:buNone/>
-            </a:pPr>
-            <a:r>
-              <a:rPr lang="en-US" sz="1400" b="1" dirty="0">
-                <a:solidFill>
-                  <a:srgbClr val="0B7A4A"/>
-                </a:solidFill>
-                <a:latin typeface="Inter" pitchFamily="34" charset="0"/>
-                <a:ea typeface="Inter" pitchFamily="34" charset="-122"/>
-                <a:cs typeface="Inter" pitchFamily="34" charset="-120"/>
-              </a:rPr>
-              <a:t>→  </a:t>
-            </a:r>
-            <a:pPr indent="0" marL="0">
-              <a:buNone/>
-            </a:pPr>
-            <a:r>
-              <a:rPr lang="en-US" sz="1400" b="1" dirty="0">
-                <a:solidFill>
-                  <a:srgbClr val="0B7A4A"/>
-                </a:solidFill>
-                <a:latin typeface="Inter" pitchFamily="34" charset="0"/>
-                <a:ea typeface="Inter" pitchFamily="34" charset="-122"/>
-                <a:cs typeface="Inter" pitchFamily="34" charset="-120"/>
-              </a:rPr>
-              <a:t>48.7%</a:t>
-            </a:r>
-            <a:endParaRPr lang="en-US" sz="1400" dirty="0"/>
-          </a:p>
-        </p:txBody>
-      </p:sp>
-      <p:sp>
-        <p:nvSpPr>
-          <p:cNvPr id="24" name="Text 22"/>
-          <p:cNvSpPr txBox="1"/>
-          <p:nvPr/>
-        </p:nvSpPr>
-        <p:spPr>
-          <a:xfrm>
-            <a:off x="4864608" y="3624682"/>
-            <a:ext cx="1051560" cy="751637"/>
-          </a:xfrm>
-          <a:prstGeom prst="rect">
-            <a:avLst/>
-          </a:prstGeom>
-          <a:noFill/>
-          <a:ln/>
-        </p:spPr>
-        <p:txBody>
-          <a:bodyPr wrap="square" lIns="0" tIns="0" rIns="0" bIns="0" rtlCol="0" anchor="ctr"/>
-          <a:lstStyle/>
-          <a:p>
-            <a:pPr algn="r" indent="0" marL="0">
-              <a:buNone/>
-            </a:pPr>
-            <a:r>
-              <a:rPr lang="en-US" sz="1600" b="1" dirty="0">
-                <a:solidFill>
-                  <a:srgbClr val="0B7A4A"/>
-                </a:solidFill>
-                <a:latin typeface="Inter" pitchFamily="34" charset="0"/>
-                <a:ea typeface="Inter" pitchFamily="34" charset="-122"/>
-                <a:cs typeface="Inter" pitchFamily="34" charset="-120"/>
-              </a:rPr>
-              <a:t>+9.5 pts</a:t>
-            </a:r>
-            <a:endParaRPr lang="en-US" sz="1600" dirty="0"/>
-          </a:p>
-        </p:txBody>
-      </p:sp>
-      <p:sp>
-        <p:nvSpPr>
-          <p:cNvPr id="25" name="Text 23"/>
-          <p:cNvSpPr txBox="1"/>
-          <p:nvPr/>
-        </p:nvSpPr>
-        <p:spPr>
-          <a:xfrm>
-            <a:off x="749808" y="4376318"/>
-            <a:ext cx="320040" cy="751637"/>
-          </a:xfrm>
-          <a:prstGeom prst="rect">
-            <a:avLst/>
-          </a:prstGeom>
-          <a:noFill/>
-          <a:ln/>
-        </p:spPr>
-        <p:txBody>
-          <a:bodyPr wrap="square" lIns="0" tIns="0" rIns="0" bIns="0" rtlCol="0" anchor="ctr"/>
-          <a:lstStyle/>
-          <a:p>
-            <a:pPr indent="0" marL="0">
-              <a:buNone/>
-            </a:pPr>
-            <a:r>
-              <a:rPr lang="en-US" sz="1500" b="1" dirty="0">
-                <a:solidFill>
-                  <a:srgbClr val="0B2C4A"/>
-                </a:solidFill>
-                <a:latin typeface="Inter" pitchFamily="34" charset="0"/>
-                <a:ea typeface="Inter" pitchFamily="34" charset="-122"/>
-                <a:cs typeface="Inter" pitchFamily="34" charset="-120"/>
-              </a:rPr>
-              <a:t>4</a:t>
-            </a:r>
-            <a:endParaRPr lang="en-US" sz="1500" dirty="0"/>
-          </a:p>
-        </p:txBody>
-      </p:sp>
-      <p:sp>
-        <p:nvSpPr>
-          <p:cNvPr id="26" name="Text 24"/>
-          <p:cNvSpPr txBox="1"/>
-          <p:nvPr/>
-        </p:nvSpPr>
-        <p:spPr>
-          <a:xfrm>
-            <a:off x="1115568" y="4376318"/>
-            <a:ext cx="1737360" cy="751637"/>
-          </a:xfrm>
-          <a:prstGeom prst="rect">
-            <a:avLst/>
-          </a:prstGeom>
-          <a:noFill/>
-          <a:ln/>
-        </p:spPr>
-        <p:txBody>
-          <a:bodyPr wrap="square" lIns="0" tIns="0" rIns="0" bIns="0" rtlCol="0" anchor="ctr"/>
-          <a:lstStyle/>
-          <a:p>
-            <a:pPr indent="0" marL="0">
-              <a:buNone/>
-            </a:pPr>
-            <a:r>
-              <a:rPr lang="en-US" sz="1400" b="1" dirty="0">
-                <a:solidFill>
-                  <a:srgbClr val="1A1A1A"/>
-                </a:solidFill>
-                <a:latin typeface="Inter" pitchFamily="34" charset="0"/>
-                <a:ea typeface="Inter" pitchFamily="34" charset="-122"/>
-                <a:cs typeface="Inter" pitchFamily="34" charset="-120"/>
-              </a:rPr>
-              <a:t>Subaru St George</a:t>
-            </a:r>
-            <a:endParaRPr lang="en-US" sz="1400" dirty="0"/>
-          </a:p>
-        </p:txBody>
-      </p:sp>
-      <p:sp>
-        <p:nvSpPr>
-          <p:cNvPr id="27" name="Text 25"/>
-          <p:cNvSpPr txBox="1"/>
-          <p:nvPr/>
-        </p:nvSpPr>
-        <p:spPr>
-          <a:xfrm>
-            <a:off x="2898648" y="4376318"/>
-            <a:ext cx="1920240" cy="751637"/>
-          </a:xfrm>
-          <a:prstGeom prst="rect">
-            <a:avLst/>
-          </a:prstGeom>
-          <a:noFill/>
-          <a:ln/>
-        </p:spPr>
-        <p:txBody>
-          <a:bodyPr wrap="square" lIns="0" tIns="0" rIns="0" bIns="0" rtlCol="0" anchor="ctr"/>
-          <a:lstStyle/>
-          <a:p>
-            <a:pPr indent="0" marL="0">
-              <a:buNone/>
-            </a:pPr>
-            <a:r>
-              <a:rPr lang="en-US" sz="1400" dirty="0">
-                <a:solidFill>
-                  <a:srgbClr val="595959"/>
-                </a:solidFill>
-                <a:latin typeface="Inter" pitchFamily="34" charset="0"/>
-                <a:ea typeface="Inter" pitchFamily="34" charset="-122"/>
-                <a:cs typeface="Inter" pitchFamily="34" charset="-120"/>
-              </a:rPr>
-              <a:t>49.8%  </a:t>
-            </a:r>
-            <a:pPr indent="0" marL="0">
-              <a:buNone/>
-            </a:pPr>
-            <a:r>
-              <a:rPr lang="en-US" sz="1400" b="1" dirty="0">
-                <a:solidFill>
-                  <a:srgbClr val="0B7A4A"/>
-                </a:solidFill>
-                <a:latin typeface="Inter" pitchFamily="34" charset="0"/>
-                <a:ea typeface="Inter" pitchFamily="34" charset="-122"/>
-                <a:cs typeface="Inter" pitchFamily="34" charset="-120"/>
-              </a:rPr>
-              <a:t>→  </a:t>
-            </a:r>
-            <a:pPr indent="0" marL="0">
-              <a:buNone/>
-            </a:pPr>
-            <a:r>
-              <a:rPr lang="en-US" sz="1400" b="1" dirty="0">
-                <a:solidFill>
-                  <a:srgbClr val="0B7A4A"/>
-                </a:solidFill>
-                <a:latin typeface="Inter" pitchFamily="34" charset="0"/>
-                <a:ea typeface="Inter" pitchFamily="34" charset="-122"/>
-                <a:cs typeface="Inter" pitchFamily="34" charset="-120"/>
-              </a:rPr>
-              <a:t>59.0%</a:t>
-            </a:r>
-            <a:endParaRPr lang="en-US" sz="1400" dirty="0"/>
-          </a:p>
-        </p:txBody>
-      </p:sp>
-      <p:sp>
-        <p:nvSpPr>
-          <p:cNvPr id="28" name="Text 26"/>
-          <p:cNvSpPr txBox="1"/>
-          <p:nvPr/>
-        </p:nvSpPr>
-        <p:spPr>
-          <a:xfrm>
-            <a:off x="4864608" y="4376318"/>
-            <a:ext cx="1051560" cy="751637"/>
-          </a:xfrm>
-          <a:prstGeom prst="rect">
-            <a:avLst/>
-          </a:prstGeom>
-          <a:noFill/>
-          <a:ln/>
-        </p:spPr>
-        <p:txBody>
-          <a:bodyPr wrap="square" lIns="0" tIns="0" rIns="0" bIns="0" rtlCol="0" anchor="ctr"/>
-          <a:lstStyle/>
-          <a:p>
-            <a:pPr algn="r" indent="0" marL="0">
-              <a:buNone/>
-            </a:pPr>
-            <a:r>
-              <a:rPr lang="en-US" sz="1600" b="1" dirty="0">
-                <a:solidFill>
-                  <a:srgbClr val="0B7A4A"/>
-                </a:solidFill>
-                <a:latin typeface="Inter" pitchFamily="34" charset="0"/>
-                <a:ea typeface="Inter" pitchFamily="34" charset="-122"/>
-                <a:cs typeface="Inter" pitchFamily="34" charset="-120"/>
-              </a:rPr>
-              <a:t>+9.3 pts</a:t>
-            </a:r>
-            <a:endParaRPr lang="en-US" sz="1600" dirty="0"/>
-          </a:p>
-        </p:txBody>
-      </p:sp>
-      <p:sp>
-        <p:nvSpPr>
-          <p:cNvPr id="29" name="Shape 27"/>
-          <p:cNvSpPr/>
-          <p:nvPr/>
-        </p:nvSpPr>
-        <p:spPr>
-          <a:xfrm>
-            <a:off x="658368" y="5127955"/>
-            <a:ext cx="5321808" cy="751637"/>
-          </a:xfrm>
-          <a:prstGeom prst="rect">
-            <a:avLst/>
-          </a:prstGeom>
-          <a:solidFill>
-            <a:srgbClr val="F7F7F7"/>
-          </a:solidFill>
-          <a:ln/>
-        </p:spPr>
-      </p:sp>
-      <p:sp>
-        <p:nvSpPr>
-          <p:cNvPr id="30" name="Text 28"/>
-          <p:cNvSpPr txBox="1"/>
-          <p:nvPr/>
-        </p:nvSpPr>
-        <p:spPr>
-          <a:xfrm>
-            <a:off x="749808" y="5127955"/>
-            <a:ext cx="320040" cy="751637"/>
-          </a:xfrm>
-          <a:prstGeom prst="rect">
-            <a:avLst/>
-          </a:prstGeom>
-          <a:noFill/>
-          <a:ln/>
-        </p:spPr>
-        <p:txBody>
-          <a:bodyPr wrap="square" lIns="0" tIns="0" rIns="0" bIns="0" rtlCol="0" anchor="ctr"/>
-          <a:lstStyle/>
-          <a:p>
-            <a:pPr indent="0" marL="0">
-              <a:buNone/>
-            </a:pPr>
-            <a:r>
-              <a:rPr lang="en-US" sz="1500" b="1" dirty="0">
-                <a:solidFill>
-                  <a:srgbClr val="0B2C4A"/>
-                </a:solidFill>
-                <a:latin typeface="Inter" pitchFamily="34" charset="0"/>
-                <a:ea typeface="Inter" pitchFamily="34" charset="-122"/>
-                <a:cs typeface="Inter" pitchFamily="34" charset="-120"/>
-              </a:rPr>
-              <a:t>5</a:t>
-            </a:r>
-            <a:endParaRPr lang="en-US" sz="1500" dirty="0"/>
-          </a:p>
-        </p:txBody>
-      </p:sp>
-      <p:sp>
-        <p:nvSpPr>
-          <p:cNvPr id="31" name="Text 29"/>
-          <p:cNvSpPr txBox="1"/>
-          <p:nvPr/>
-        </p:nvSpPr>
-        <p:spPr>
-          <a:xfrm>
-            <a:off x="1115568" y="5127955"/>
-            <a:ext cx="1737360" cy="751637"/>
-          </a:xfrm>
-          <a:prstGeom prst="rect">
-            <a:avLst/>
-          </a:prstGeom>
-          <a:noFill/>
-          <a:ln/>
-        </p:spPr>
-        <p:txBody>
-          <a:bodyPr wrap="square" lIns="0" tIns="0" rIns="0" bIns="0" rtlCol="0" anchor="ctr"/>
-          <a:lstStyle/>
-          <a:p>
-            <a:pPr indent="0" marL="0">
-              <a:buNone/>
-            </a:pPr>
-            <a:r>
-              <a:rPr lang="en-US" sz="1400" b="1" dirty="0">
-                <a:solidFill>
-                  <a:srgbClr val="1A1A1A"/>
-                </a:solidFill>
-                <a:latin typeface="Inter" pitchFamily="34" charset="0"/>
-                <a:ea typeface="Inter" pitchFamily="34" charset="-122"/>
-                <a:cs typeface="Inter" pitchFamily="34" charset="-120"/>
-              </a:rPr>
-              <a:t>Subaru Prescott</a:t>
-            </a:r>
-            <a:endParaRPr lang="en-US" sz="1400" dirty="0"/>
-          </a:p>
-        </p:txBody>
-      </p:sp>
-      <p:sp>
-        <p:nvSpPr>
-          <p:cNvPr id="32" name="Text 30"/>
-          <p:cNvSpPr txBox="1"/>
-          <p:nvPr/>
-        </p:nvSpPr>
-        <p:spPr>
-          <a:xfrm>
-            <a:off x="2898648" y="5127955"/>
-            <a:ext cx="1920240" cy="751637"/>
-          </a:xfrm>
-          <a:prstGeom prst="rect">
-            <a:avLst/>
-          </a:prstGeom>
-          <a:noFill/>
-          <a:ln/>
-        </p:spPr>
-        <p:txBody>
-          <a:bodyPr wrap="square" lIns="0" tIns="0" rIns="0" bIns="0" rtlCol="0" anchor="ctr"/>
-          <a:lstStyle/>
-          <a:p>
-            <a:pPr indent="0" marL="0">
-              <a:buNone/>
-            </a:pPr>
-            <a:r>
-              <a:rPr lang="en-US" sz="1400" dirty="0">
-                <a:solidFill>
-                  <a:srgbClr val="595959"/>
-                </a:solidFill>
-                <a:latin typeface="Inter" pitchFamily="34" charset="0"/>
-                <a:ea typeface="Inter" pitchFamily="34" charset="-122"/>
-                <a:cs typeface="Inter" pitchFamily="34" charset="-120"/>
-              </a:rPr>
-              <a:t>41.8%  </a:t>
-            </a:r>
-            <a:pPr indent="0" marL="0">
-              <a:buNone/>
-            </a:pPr>
-            <a:r>
-              <a:rPr lang="en-US" sz="1400" b="1" dirty="0">
-                <a:solidFill>
-                  <a:srgbClr val="0B7A4A"/>
-                </a:solidFill>
-                <a:latin typeface="Inter" pitchFamily="34" charset="0"/>
-                <a:ea typeface="Inter" pitchFamily="34" charset="-122"/>
-                <a:cs typeface="Inter" pitchFamily="34" charset="-120"/>
-              </a:rPr>
-              <a:t>→  </a:t>
-            </a:r>
-            <a:pPr indent="0" marL="0">
-              <a:buNone/>
-            </a:pPr>
-            <a:r>
-              <a:rPr lang="en-US" sz="1400" b="1" dirty="0">
-                <a:solidFill>
-                  <a:srgbClr val="0B7A4A"/>
-                </a:solidFill>
-                <a:latin typeface="Inter" pitchFamily="34" charset="0"/>
-                <a:ea typeface="Inter" pitchFamily="34" charset="-122"/>
-                <a:cs typeface="Inter" pitchFamily="34" charset="-120"/>
-              </a:rPr>
-              <a:t>50.8%</a:t>
-            </a:r>
-            <a:endParaRPr lang="en-US" sz="1400" dirty="0"/>
-          </a:p>
-        </p:txBody>
-      </p:sp>
-      <p:sp>
-        <p:nvSpPr>
-          <p:cNvPr id="33" name="Text 31"/>
-          <p:cNvSpPr txBox="1"/>
-          <p:nvPr/>
-        </p:nvSpPr>
-        <p:spPr>
-          <a:xfrm>
-            <a:off x="4864608" y="5127955"/>
-            <a:ext cx="1051560" cy="751637"/>
-          </a:xfrm>
-          <a:prstGeom prst="rect">
-            <a:avLst/>
-          </a:prstGeom>
-          <a:noFill/>
-          <a:ln/>
-        </p:spPr>
-        <p:txBody>
-          <a:bodyPr wrap="square" lIns="0" tIns="0" rIns="0" bIns="0" rtlCol="0" anchor="ctr"/>
-          <a:lstStyle/>
-          <a:p>
-            <a:pPr algn="r" indent="0" marL="0">
-              <a:buNone/>
-            </a:pPr>
-            <a:r>
-              <a:rPr lang="en-US" sz="1600" b="1" dirty="0">
-                <a:solidFill>
-                  <a:srgbClr val="0B7A4A"/>
-                </a:solidFill>
-                <a:latin typeface="Inter" pitchFamily="34" charset="0"/>
-                <a:ea typeface="Inter" pitchFamily="34" charset="-122"/>
-                <a:cs typeface="Inter" pitchFamily="34" charset="-120"/>
-              </a:rPr>
-              <a:t>+8.9 pts</a:t>
-            </a:r>
-            <a:endParaRPr lang="en-US" sz="1600" dirty="0"/>
-          </a:p>
-        </p:txBody>
-      </p:sp>
-      <p:sp>
-        <p:nvSpPr>
-          <p:cNvPr id="34" name="Shape 32"/>
-          <p:cNvSpPr/>
-          <p:nvPr/>
-        </p:nvSpPr>
-        <p:spPr>
-          <a:xfrm>
-            <a:off x="6208776" y="1737360"/>
-            <a:ext cx="5321808" cy="45720"/>
-          </a:xfrm>
-          <a:prstGeom prst="rect">
-            <a:avLst/>
-          </a:prstGeom>
-          <a:solidFill>
-            <a:srgbClr val="C2352F"/>
-          </a:solidFill>
-          <a:ln/>
-        </p:spPr>
-      </p:sp>
-      <p:sp>
-        <p:nvSpPr>
-          <p:cNvPr id="35" name="Text 33"/>
-          <p:cNvSpPr txBox="1"/>
-          <p:nvPr/>
-        </p:nvSpPr>
-        <p:spPr>
-          <a:xfrm>
-            <a:off x="6300216" y="1810512"/>
-            <a:ext cx="1828800" cy="274320"/>
-          </a:xfrm>
-          <a:prstGeom prst="rect">
-            <a:avLst/>
-          </a:prstGeom>
-          <a:noFill/>
-          <a:ln/>
-        </p:spPr>
-        <p:txBody>
-          <a:bodyPr wrap="square" lIns="0" tIns="0" rIns="0" bIns="0" rtlCol="0" anchor="ctr"/>
-          <a:lstStyle/>
-          <a:p>
-            <a:pPr indent="0" marL="0">
-              <a:buNone/>
-            </a:pPr>
-            <a:r>
-              <a:rPr lang="en-US" sz="1400" b="1" spc="100" kern="0" dirty="0">
-                <a:solidFill>
-                  <a:srgbClr val="A82B26"/>
-                </a:solidFill>
-                <a:latin typeface="Inter" pitchFamily="34" charset="0"/>
-                <a:ea typeface="Inter" pitchFamily="34" charset="-122"/>
-                <a:cs typeface="Inter" pitchFamily="34" charset="-120"/>
-              </a:rPr>
-              <a:t>BOTTOM 5</a:t>
-            </a:r>
-            <a:endParaRPr lang="en-US" sz="1400" dirty="0"/>
-          </a:p>
-        </p:txBody>
-      </p:sp>
-      <p:sp>
-        <p:nvSpPr>
-          <p:cNvPr id="36" name="Text 34"/>
-          <p:cNvSpPr txBox="1"/>
-          <p:nvPr/>
-        </p:nvSpPr>
-        <p:spPr>
-          <a:xfrm>
-            <a:off x="8449056" y="1810512"/>
-            <a:ext cx="1828800" cy="274320"/>
-          </a:xfrm>
-          <a:prstGeom prst="rect">
-            <a:avLst/>
-          </a:prstGeom>
-          <a:noFill/>
-          <a:ln/>
-        </p:spPr>
-        <p:txBody>
-          <a:bodyPr wrap="square" lIns="0" tIns="0" rIns="0" bIns="0" rtlCol="0" anchor="ctr"/>
-          <a:lstStyle/>
-          <a:p>
-            <a:pPr indent="0" marL="0">
-              <a:buNone/>
-            </a:pPr>
-            <a:r>
-              <a:rPr lang="en-US" sz="1400" b="1" dirty="0">
-                <a:solidFill>
-                  <a:srgbClr val="595959"/>
-                </a:solidFill>
-                <a:latin typeface="Inter" pitchFamily="34" charset="0"/>
-                <a:ea typeface="Inter" pitchFamily="34" charset="-122"/>
-                <a:cs typeface="Inter" pitchFamily="34" charset="-120"/>
-              </a:rPr>
-              <a:t>2025 → 2026</a:t>
-            </a:r>
-            <a:endParaRPr lang="en-US" sz="1400" dirty="0"/>
-          </a:p>
-        </p:txBody>
-      </p:sp>
-      <p:sp>
-        <p:nvSpPr>
-          <p:cNvPr id="37" name="Text 35"/>
-          <p:cNvSpPr txBox="1"/>
-          <p:nvPr/>
-        </p:nvSpPr>
-        <p:spPr>
-          <a:xfrm>
-            <a:off x="10415016" y="1810512"/>
-            <a:ext cx="1051560" cy="274320"/>
-          </a:xfrm>
-          <a:prstGeom prst="rect">
-            <a:avLst/>
-          </a:prstGeom>
-          <a:noFill/>
-          <a:ln/>
-        </p:spPr>
-        <p:txBody>
-          <a:bodyPr wrap="square" lIns="0" tIns="0" rIns="0" bIns="0" rtlCol="0" anchor="ctr"/>
-          <a:lstStyle/>
-          <a:p>
-            <a:pPr algn="r" indent="0" marL="0">
-              <a:buNone/>
-            </a:pPr>
-            <a:r>
-              <a:rPr lang="en-US" sz="1400" b="1" dirty="0">
-                <a:solidFill>
-                  <a:srgbClr val="595959"/>
-                </a:solidFill>
-                <a:latin typeface="Inter" pitchFamily="34" charset="0"/>
-                <a:ea typeface="Inter" pitchFamily="34" charset="-122"/>
-                <a:cs typeface="Inter" pitchFamily="34" charset="-120"/>
-              </a:rPr>
-              <a:t>Change</a:t>
-            </a:r>
-            <a:endParaRPr lang="en-US" sz="1400" dirty="0"/>
-          </a:p>
-        </p:txBody>
-      </p:sp>
-      <p:sp>
-        <p:nvSpPr>
-          <p:cNvPr id="38" name="Shape 36"/>
-          <p:cNvSpPr/>
-          <p:nvPr/>
-        </p:nvSpPr>
-        <p:spPr>
-          <a:xfrm>
-            <a:off x="6208776" y="2121408"/>
-            <a:ext cx="5321808" cy="751637"/>
-          </a:xfrm>
-          <a:prstGeom prst="rect">
-            <a:avLst/>
-          </a:prstGeom>
-          <a:solidFill>
-            <a:srgbClr val="F7F7F7"/>
-          </a:solidFill>
-          <a:ln/>
-        </p:spPr>
-      </p:sp>
-      <p:sp>
-        <p:nvSpPr>
-          <p:cNvPr id="39" name="Text 37"/>
-          <p:cNvSpPr txBox="1"/>
-          <p:nvPr/>
-        </p:nvSpPr>
-        <p:spPr>
-          <a:xfrm>
-            <a:off x="6300216" y="2121408"/>
-            <a:ext cx="320040" cy="751637"/>
-          </a:xfrm>
-          <a:prstGeom prst="rect">
-            <a:avLst/>
-          </a:prstGeom>
-          <a:noFill/>
-          <a:ln/>
-        </p:spPr>
-        <p:txBody>
-          <a:bodyPr wrap="square" lIns="0" tIns="0" rIns="0" bIns="0" rtlCol="0" anchor="ctr"/>
-          <a:lstStyle/>
-          <a:p>
-            <a:pPr indent="0" marL="0">
-              <a:buNone/>
-            </a:pPr>
-            <a:r>
-              <a:rPr lang="en-US" sz="1500" b="1" dirty="0">
-                <a:solidFill>
-                  <a:srgbClr val="0B2C4A"/>
-                </a:solidFill>
-                <a:latin typeface="Inter" pitchFamily="34" charset="0"/>
-                <a:ea typeface="Inter" pitchFamily="34" charset="-122"/>
-                <a:cs typeface="Inter" pitchFamily="34" charset="-120"/>
-              </a:rPr>
-              <a:t>33</a:t>
-            </a:r>
-            <a:endParaRPr lang="en-US" sz="1500" dirty="0"/>
-          </a:p>
-        </p:txBody>
-      </p:sp>
-      <p:sp>
-        <p:nvSpPr>
-          <p:cNvPr id="40" name="Text 38"/>
-          <p:cNvSpPr txBox="1"/>
-          <p:nvPr/>
-        </p:nvSpPr>
-        <p:spPr>
-          <a:xfrm>
-            <a:off x="6665976" y="2121408"/>
-            <a:ext cx="1737360" cy="751637"/>
-          </a:xfrm>
-          <a:prstGeom prst="rect">
-            <a:avLst/>
-          </a:prstGeom>
-          <a:noFill/>
-          <a:ln/>
-        </p:spPr>
-        <p:txBody>
-          <a:bodyPr wrap="square" lIns="0" tIns="0" rIns="0" bIns="0" rtlCol="0" anchor="ctr"/>
-          <a:lstStyle/>
-          <a:p>
-            <a:pPr indent="0" marL="0">
-              <a:buNone/>
-            </a:pPr>
-            <a:r>
-              <a:rPr lang="en-US" sz="1400" b="1" dirty="0">
-                <a:solidFill>
-                  <a:srgbClr val="1A1A1A"/>
-                </a:solidFill>
-                <a:latin typeface="Inter" pitchFamily="34" charset="0"/>
-                <a:ea typeface="Inter" pitchFamily="34" charset="-122"/>
-                <a:cs typeface="Inter" pitchFamily="34" charset="-120"/>
-              </a:rPr>
-              <a:t>LR Reno</a:t>
-            </a:r>
-            <a:endParaRPr lang="en-US" sz="1400" dirty="0"/>
-          </a:p>
-        </p:txBody>
-      </p:sp>
-      <p:sp>
-        <p:nvSpPr>
-          <p:cNvPr id="41" name="Text 39"/>
-          <p:cNvSpPr txBox="1"/>
-          <p:nvPr/>
-        </p:nvSpPr>
-        <p:spPr>
-          <a:xfrm>
-            <a:off x="8449056" y="2121408"/>
-            <a:ext cx="1920240" cy="751637"/>
-          </a:xfrm>
-          <a:prstGeom prst="rect">
-            <a:avLst/>
-          </a:prstGeom>
-          <a:noFill/>
-          <a:ln/>
-        </p:spPr>
-        <p:txBody>
-          <a:bodyPr wrap="square" lIns="0" tIns="0" rIns="0" bIns="0" rtlCol="0" anchor="ctr"/>
-          <a:lstStyle/>
-          <a:p>
-            <a:pPr indent="0" marL="0">
-              <a:buNone/>
-            </a:pPr>
-            <a:r>
-              <a:rPr lang="en-US" sz="1400" dirty="0">
-                <a:solidFill>
-                  <a:srgbClr val="595959"/>
-                </a:solidFill>
-                <a:latin typeface="Inter" pitchFamily="34" charset="0"/>
-                <a:ea typeface="Inter" pitchFamily="34" charset="-122"/>
-                <a:cs typeface="Inter" pitchFamily="34" charset="-120"/>
-              </a:rPr>
-              <a:t>69.6%  </a:t>
-            </a:r>
-            <a:pPr indent="0" marL="0">
-              <a:buNone/>
-            </a:pPr>
-            <a:r>
-              <a:rPr lang="en-US" sz="1400" b="1" dirty="0">
-                <a:solidFill>
-                  <a:srgbClr val="A82B26"/>
-                </a:solidFill>
-                <a:latin typeface="Inter" pitchFamily="34" charset="0"/>
-                <a:ea typeface="Inter" pitchFamily="34" charset="-122"/>
-                <a:cs typeface="Inter" pitchFamily="34" charset="-120"/>
-              </a:rPr>
-              <a:t>→  </a:t>
-            </a:r>
-            <a:pPr indent="0" marL="0">
-              <a:buNone/>
-            </a:pPr>
-            <a:r>
-              <a:rPr lang="en-US" sz="1400" b="1" dirty="0">
-                <a:solidFill>
-                  <a:srgbClr val="A82B26"/>
-                </a:solidFill>
-                <a:latin typeface="Inter" pitchFamily="34" charset="0"/>
-                <a:ea typeface="Inter" pitchFamily="34" charset="-122"/>
-                <a:cs typeface="Inter" pitchFamily="34" charset="-120"/>
-              </a:rPr>
-              <a:t>61.5%</a:t>
-            </a:r>
-            <a:endParaRPr lang="en-US" sz="1400" dirty="0"/>
-          </a:p>
-        </p:txBody>
-      </p:sp>
-      <p:sp>
-        <p:nvSpPr>
-          <p:cNvPr id="42" name="Text 40"/>
-          <p:cNvSpPr txBox="1"/>
-          <p:nvPr/>
-        </p:nvSpPr>
-        <p:spPr>
-          <a:xfrm>
-            <a:off x="10415016" y="2121408"/>
-            <a:ext cx="1051560" cy="751637"/>
-          </a:xfrm>
-          <a:prstGeom prst="rect">
-            <a:avLst/>
-          </a:prstGeom>
-          <a:noFill/>
-          <a:ln/>
-        </p:spPr>
-        <p:txBody>
-          <a:bodyPr wrap="square" lIns="0" tIns="0" rIns="0" bIns="0" rtlCol="0" anchor="ctr"/>
-          <a:lstStyle/>
-          <a:p>
-            <a:pPr algn="r" indent="0" marL="0">
-              <a:buNone/>
-            </a:pPr>
-            <a:r>
-              <a:rPr lang="en-US" sz="1600" b="1" dirty="0">
-                <a:solidFill>
-                  <a:srgbClr val="A82B26"/>
-                </a:solidFill>
-                <a:latin typeface="Inter" pitchFamily="34" charset="0"/>
-                <a:ea typeface="Inter" pitchFamily="34" charset="-122"/>
-                <a:cs typeface="Inter" pitchFamily="34" charset="-120"/>
-              </a:rPr>
-              <a:t>−8.1 pts</a:t>
-            </a:r>
-            <a:endParaRPr lang="en-US" sz="1600" dirty="0"/>
-          </a:p>
-        </p:txBody>
-      </p:sp>
-      <p:sp>
-        <p:nvSpPr>
-          <p:cNvPr id="43" name="Text 41"/>
-          <p:cNvSpPr txBox="1"/>
-          <p:nvPr/>
-        </p:nvSpPr>
-        <p:spPr>
-          <a:xfrm>
-            <a:off x="6300216" y="2873045"/>
-            <a:ext cx="320040" cy="751637"/>
-          </a:xfrm>
-          <a:prstGeom prst="rect">
-            <a:avLst/>
-          </a:prstGeom>
-          <a:noFill/>
-          <a:ln/>
-        </p:spPr>
-        <p:txBody>
-          <a:bodyPr wrap="square" lIns="0" tIns="0" rIns="0" bIns="0" rtlCol="0" anchor="ctr"/>
-          <a:lstStyle/>
-          <a:p>
-            <a:pPr indent="0" marL="0">
-              <a:buNone/>
-            </a:pPr>
-            <a:r>
-              <a:rPr lang="en-US" sz="1500" b="1" dirty="0">
-                <a:solidFill>
-                  <a:srgbClr val="0B2C4A"/>
-                </a:solidFill>
-                <a:latin typeface="Inter" pitchFamily="34" charset="0"/>
-                <a:ea typeface="Inter" pitchFamily="34" charset="-122"/>
-                <a:cs typeface="Inter" pitchFamily="34" charset="-120"/>
-              </a:rPr>
-              <a:t>32</a:t>
-            </a:r>
-            <a:endParaRPr lang="en-US" sz="1500" dirty="0"/>
-          </a:p>
-        </p:txBody>
-      </p:sp>
-      <p:sp>
-        <p:nvSpPr>
-          <p:cNvPr id="44" name="Text 42"/>
-          <p:cNvSpPr txBox="1"/>
-          <p:nvPr/>
-        </p:nvSpPr>
-        <p:spPr>
-          <a:xfrm>
-            <a:off x="6665976" y="2873045"/>
-            <a:ext cx="1737360" cy="751637"/>
-          </a:xfrm>
-          <a:prstGeom prst="rect">
-            <a:avLst/>
-          </a:prstGeom>
-          <a:noFill/>
-          <a:ln/>
-        </p:spPr>
-        <p:txBody>
-          <a:bodyPr wrap="square" lIns="0" tIns="0" rIns="0" bIns="0" rtlCol="0" anchor="ctr"/>
-          <a:lstStyle/>
-          <a:p>
-            <a:pPr indent="0" marL="0">
-              <a:buNone/>
-            </a:pPr>
-            <a:r>
-              <a:rPr lang="en-US" sz="1400" b="1" dirty="0">
-                <a:solidFill>
-                  <a:srgbClr val="1A1A1A"/>
-                </a:solidFill>
-                <a:latin typeface="Inter" pitchFamily="34" charset="0"/>
-                <a:ea typeface="Inter" pitchFamily="34" charset="-122"/>
-                <a:cs typeface="Inter" pitchFamily="34" charset="-120"/>
-              </a:rPr>
-              <a:t>Hyundai Prescott</a:t>
-            </a:r>
-            <a:endParaRPr lang="en-US" sz="1400" dirty="0"/>
-          </a:p>
-        </p:txBody>
-      </p:sp>
-      <p:sp>
-        <p:nvSpPr>
-          <p:cNvPr id="45" name="Text 43"/>
-          <p:cNvSpPr txBox="1"/>
-          <p:nvPr/>
-        </p:nvSpPr>
-        <p:spPr>
-          <a:xfrm>
-            <a:off x="8449056" y="2873045"/>
-            <a:ext cx="1920240" cy="751637"/>
-          </a:xfrm>
-          <a:prstGeom prst="rect">
-            <a:avLst/>
-          </a:prstGeom>
-          <a:noFill/>
-          <a:ln/>
-        </p:spPr>
-        <p:txBody>
-          <a:bodyPr wrap="square" lIns="0" tIns="0" rIns="0" bIns="0" rtlCol="0" anchor="ctr"/>
-          <a:lstStyle/>
-          <a:p>
-            <a:pPr indent="0" marL="0">
-              <a:buNone/>
-            </a:pPr>
-            <a:r>
-              <a:rPr lang="en-US" sz="1400" dirty="0">
-                <a:solidFill>
-                  <a:srgbClr val="595959"/>
-                </a:solidFill>
-                <a:latin typeface="Inter" pitchFamily="34" charset="0"/>
-                <a:ea typeface="Inter" pitchFamily="34" charset="-122"/>
-                <a:cs typeface="Inter" pitchFamily="34" charset="-120"/>
-              </a:rPr>
-              <a:t>35.3%  </a:t>
-            </a:r>
-            <a:pPr indent="0" marL="0">
-              <a:buNone/>
-            </a:pPr>
-            <a:r>
-              <a:rPr lang="en-US" sz="1400" b="1" dirty="0">
-                <a:solidFill>
-                  <a:srgbClr val="A82B26"/>
-                </a:solidFill>
-                <a:latin typeface="Inter" pitchFamily="34" charset="0"/>
-                <a:ea typeface="Inter" pitchFamily="34" charset="-122"/>
-                <a:cs typeface="Inter" pitchFamily="34" charset="-120"/>
-              </a:rPr>
-              <a:t>→  </a:t>
-            </a:r>
-            <a:pPr indent="0" marL="0">
-              <a:buNone/>
-            </a:pPr>
-            <a:r>
-              <a:rPr lang="en-US" sz="1400" b="1" dirty="0">
-                <a:solidFill>
-                  <a:srgbClr val="A82B26"/>
-                </a:solidFill>
-                <a:latin typeface="Inter" pitchFamily="34" charset="0"/>
-                <a:ea typeface="Inter" pitchFamily="34" charset="-122"/>
-                <a:cs typeface="Inter" pitchFamily="34" charset="-120"/>
-              </a:rPr>
-              <a:t>28.5%</a:t>
-            </a:r>
-            <a:endParaRPr lang="en-US" sz="1400" dirty="0"/>
-          </a:p>
-        </p:txBody>
-      </p:sp>
-      <p:sp>
-        <p:nvSpPr>
-          <p:cNvPr id="46" name="Text 44"/>
-          <p:cNvSpPr txBox="1"/>
-          <p:nvPr/>
-        </p:nvSpPr>
-        <p:spPr>
-          <a:xfrm>
-            <a:off x="10415016" y="2873045"/>
-            <a:ext cx="1051560" cy="751637"/>
-          </a:xfrm>
-          <a:prstGeom prst="rect">
-            <a:avLst/>
-          </a:prstGeom>
-          <a:noFill/>
-          <a:ln/>
-        </p:spPr>
-        <p:txBody>
-          <a:bodyPr wrap="square" lIns="0" tIns="0" rIns="0" bIns="0" rtlCol="0" anchor="ctr"/>
-          <a:lstStyle/>
-          <a:p>
-            <a:pPr algn="r" indent="0" marL="0">
-              <a:buNone/>
-            </a:pPr>
-            <a:r>
-              <a:rPr lang="en-US" sz="1600" b="1" dirty="0">
-                <a:solidFill>
-                  <a:srgbClr val="A82B26"/>
-                </a:solidFill>
-                <a:latin typeface="Inter" pitchFamily="34" charset="0"/>
-                <a:ea typeface="Inter" pitchFamily="34" charset="-122"/>
-                <a:cs typeface="Inter" pitchFamily="34" charset="-120"/>
-              </a:rPr>
-              <a:t>−6.8 pts</a:t>
-            </a:r>
-            <a:endParaRPr lang="en-US" sz="1600" dirty="0"/>
-          </a:p>
-        </p:txBody>
-      </p:sp>
-      <p:sp>
-        <p:nvSpPr>
-          <p:cNvPr id="47" name="Shape 45"/>
-          <p:cNvSpPr/>
-          <p:nvPr/>
-        </p:nvSpPr>
-        <p:spPr>
-          <a:xfrm>
-            <a:off x="6208776" y="3624682"/>
-            <a:ext cx="5321808" cy="751637"/>
-          </a:xfrm>
-          <a:prstGeom prst="rect">
-            <a:avLst/>
-          </a:prstGeom>
-          <a:solidFill>
-            <a:srgbClr val="F7F7F7"/>
-          </a:solidFill>
-          <a:ln/>
-        </p:spPr>
-      </p:sp>
-      <p:sp>
-        <p:nvSpPr>
-          <p:cNvPr id="48" name="Text 46"/>
-          <p:cNvSpPr txBox="1"/>
-          <p:nvPr/>
-        </p:nvSpPr>
-        <p:spPr>
-          <a:xfrm>
-            <a:off x="6300216" y="3624682"/>
-            <a:ext cx="320040" cy="751637"/>
-          </a:xfrm>
-          <a:prstGeom prst="rect">
-            <a:avLst/>
-          </a:prstGeom>
-          <a:noFill/>
-          <a:ln/>
-        </p:spPr>
-        <p:txBody>
-          <a:bodyPr wrap="square" lIns="0" tIns="0" rIns="0" bIns="0" rtlCol="0" anchor="ctr"/>
-          <a:lstStyle/>
-          <a:p>
-            <a:pPr indent="0" marL="0">
-              <a:buNone/>
-            </a:pPr>
-            <a:r>
-              <a:rPr lang="en-US" sz="1500" b="1" dirty="0">
-                <a:solidFill>
-                  <a:srgbClr val="0B2C4A"/>
-                </a:solidFill>
-                <a:latin typeface="Inter" pitchFamily="34" charset="0"/>
-                <a:ea typeface="Inter" pitchFamily="34" charset="-122"/>
-                <a:cs typeface="Inter" pitchFamily="34" charset="-120"/>
-              </a:rPr>
-              <a:t>31</a:t>
-            </a:r>
-            <a:endParaRPr lang="en-US" sz="1500" dirty="0"/>
-          </a:p>
-        </p:txBody>
-      </p:sp>
-      <p:sp>
-        <p:nvSpPr>
-          <p:cNvPr id="49" name="Text 47"/>
-          <p:cNvSpPr txBox="1"/>
-          <p:nvPr/>
-        </p:nvSpPr>
-        <p:spPr>
-          <a:xfrm>
-            <a:off x="6665976" y="3624682"/>
-            <a:ext cx="1737360" cy="751637"/>
-          </a:xfrm>
-          <a:prstGeom prst="rect">
-            <a:avLst/>
-          </a:prstGeom>
-          <a:noFill/>
-          <a:ln/>
-        </p:spPr>
-        <p:txBody>
-          <a:bodyPr wrap="square" lIns="0" tIns="0" rIns="0" bIns="0" rtlCol="0" anchor="ctr"/>
-          <a:lstStyle/>
-          <a:p>
-            <a:pPr indent="0" marL="0">
-              <a:buNone/>
-            </a:pPr>
-            <a:r>
-              <a:rPr lang="en-US" sz="1400" b="1" dirty="0">
-                <a:solidFill>
-                  <a:srgbClr val="1A1A1A"/>
-                </a:solidFill>
-                <a:latin typeface="Inter" pitchFamily="34" charset="0"/>
-                <a:ea typeface="Inter" pitchFamily="34" charset="-122"/>
-                <a:cs typeface="Inter" pitchFamily="34" charset="-120"/>
-              </a:rPr>
-              <a:t>Toyota Henderson</a:t>
-            </a:r>
-            <a:endParaRPr lang="en-US" sz="1400" dirty="0"/>
-          </a:p>
-        </p:txBody>
-      </p:sp>
-      <p:sp>
-        <p:nvSpPr>
-          <p:cNvPr id="50" name="Text 48"/>
-          <p:cNvSpPr txBox="1"/>
-          <p:nvPr/>
-        </p:nvSpPr>
-        <p:spPr>
-          <a:xfrm>
-            <a:off x="8449056" y="3624682"/>
-            <a:ext cx="1920240" cy="751637"/>
-          </a:xfrm>
-          <a:prstGeom prst="rect">
-            <a:avLst/>
-          </a:prstGeom>
-          <a:noFill/>
-          <a:ln/>
-        </p:spPr>
-        <p:txBody>
-          <a:bodyPr wrap="square" lIns="0" tIns="0" rIns="0" bIns="0" rtlCol="0" anchor="ctr"/>
-          <a:lstStyle/>
-          <a:p>
-            <a:pPr indent="0" marL="0">
-              <a:buNone/>
-            </a:pPr>
-            <a:r>
-              <a:rPr lang="en-US" sz="1400" dirty="0">
-                <a:solidFill>
-                  <a:srgbClr val="595959"/>
-                </a:solidFill>
-                <a:latin typeface="Inter" pitchFamily="34" charset="0"/>
-                <a:ea typeface="Inter" pitchFamily="34" charset="-122"/>
-                <a:cs typeface="Inter" pitchFamily="34" charset="-120"/>
-              </a:rPr>
-              <a:t>63.8%  </a:t>
-            </a:r>
-            <a:pPr indent="0" marL="0">
-              <a:buNone/>
-            </a:pPr>
-            <a:r>
-              <a:rPr lang="en-US" sz="1400" b="1" dirty="0">
-                <a:solidFill>
-                  <a:srgbClr val="A82B26"/>
-                </a:solidFill>
-                <a:latin typeface="Inter" pitchFamily="34" charset="0"/>
-                <a:ea typeface="Inter" pitchFamily="34" charset="-122"/>
-                <a:cs typeface="Inter" pitchFamily="34" charset="-120"/>
-              </a:rPr>
-              <a:t>→  </a:t>
-            </a:r>
-            <a:pPr indent="0" marL="0">
-              <a:buNone/>
-            </a:pPr>
-            <a:r>
-              <a:rPr lang="en-US" sz="1400" b="1" dirty="0">
-                <a:solidFill>
-                  <a:srgbClr val="A82B26"/>
-                </a:solidFill>
-                <a:latin typeface="Inter" pitchFamily="34" charset="0"/>
-                <a:ea typeface="Inter" pitchFamily="34" charset="-122"/>
-                <a:cs typeface="Inter" pitchFamily="34" charset="-120"/>
-              </a:rPr>
-              <a:t>57.3%</a:t>
-            </a:r>
-            <a:endParaRPr lang="en-US" sz="1400" dirty="0"/>
-          </a:p>
-        </p:txBody>
-      </p:sp>
-      <p:sp>
-        <p:nvSpPr>
-          <p:cNvPr id="51" name="Text 49"/>
-          <p:cNvSpPr txBox="1"/>
-          <p:nvPr/>
-        </p:nvSpPr>
-        <p:spPr>
-          <a:xfrm>
-            <a:off x="10415016" y="3624682"/>
-            <a:ext cx="1051560" cy="751637"/>
-          </a:xfrm>
-          <a:prstGeom prst="rect">
-            <a:avLst/>
-          </a:prstGeom>
-          <a:noFill/>
-          <a:ln/>
-        </p:spPr>
-        <p:txBody>
-          <a:bodyPr wrap="square" lIns="0" tIns="0" rIns="0" bIns="0" rtlCol="0" anchor="ctr"/>
-          <a:lstStyle/>
-          <a:p>
-            <a:pPr algn="r" indent="0" marL="0">
-              <a:buNone/>
-            </a:pPr>
-            <a:r>
-              <a:rPr lang="en-US" sz="1600" b="1" dirty="0">
-                <a:solidFill>
-                  <a:srgbClr val="A82B26"/>
-                </a:solidFill>
-                <a:latin typeface="Inter" pitchFamily="34" charset="0"/>
-                <a:ea typeface="Inter" pitchFamily="34" charset="-122"/>
-                <a:cs typeface="Inter" pitchFamily="34" charset="-120"/>
-              </a:rPr>
-              <a:t>−6.5 pts</a:t>
-            </a:r>
-            <a:endParaRPr lang="en-US" sz="1600" dirty="0"/>
-          </a:p>
-        </p:txBody>
-      </p:sp>
-      <p:sp>
-        <p:nvSpPr>
-          <p:cNvPr id="52" name="Text 50"/>
-          <p:cNvSpPr txBox="1"/>
-          <p:nvPr/>
-        </p:nvSpPr>
-        <p:spPr>
-          <a:xfrm>
-            <a:off x="6300216" y="4376318"/>
-            <a:ext cx="320040" cy="751637"/>
-          </a:xfrm>
-          <a:prstGeom prst="rect">
-            <a:avLst/>
-          </a:prstGeom>
-          <a:noFill/>
-          <a:ln/>
-        </p:spPr>
-        <p:txBody>
-          <a:bodyPr wrap="square" lIns="0" tIns="0" rIns="0" bIns="0" rtlCol="0" anchor="ctr"/>
-          <a:lstStyle/>
-          <a:p>
-            <a:pPr indent="0" marL="0">
-              <a:buNone/>
-            </a:pPr>
-            <a:r>
-              <a:rPr lang="en-US" sz="1500" b="1" dirty="0">
-                <a:solidFill>
-                  <a:srgbClr val="0B2C4A"/>
-                </a:solidFill>
-                <a:latin typeface="Inter" pitchFamily="34" charset="0"/>
-                <a:ea typeface="Inter" pitchFamily="34" charset="-122"/>
-                <a:cs typeface="Inter" pitchFamily="34" charset="-120"/>
-              </a:rPr>
-              <a:t>30</a:t>
-            </a:r>
-            <a:endParaRPr lang="en-US" sz="1500" dirty="0"/>
-          </a:p>
-        </p:txBody>
-      </p:sp>
-      <p:sp>
-        <p:nvSpPr>
-          <p:cNvPr id="53" name="Text 51"/>
-          <p:cNvSpPr txBox="1"/>
-          <p:nvPr/>
-        </p:nvSpPr>
-        <p:spPr>
-          <a:xfrm>
-            <a:off x="6665976" y="4376318"/>
-            <a:ext cx="1737360" cy="751637"/>
-          </a:xfrm>
-          <a:prstGeom prst="rect">
-            <a:avLst/>
-          </a:prstGeom>
-          <a:noFill/>
-          <a:ln/>
-        </p:spPr>
-        <p:txBody>
-          <a:bodyPr wrap="square" lIns="0" tIns="0" rIns="0" bIns="0" rtlCol="0" anchor="ctr"/>
-          <a:lstStyle/>
-          <a:p>
-            <a:pPr indent="0" marL="0">
-              <a:buNone/>
-            </a:pPr>
-            <a:r>
-              <a:rPr lang="en-US" sz="1400" b="1" dirty="0">
-                <a:solidFill>
-                  <a:srgbClr val="1A1A1A"/>
-                </a:solidFill>
-                <a:latin typeface="Inter" pitchFamily="34" charset="0"/>
-                <a:ea typeface="Inter" pitchFamily="34" charset="-122"/>
-                <a:cs typeface="Inter" pitchFamily="34" charset="-120"/>
-              </a:rPr>
-              <a:t>Audi Henderson</a:t>
-            </a:r>
-            <a:endParaRPr lang="en-US" sz="1400" dirty="0"/>
-          </a:p>
-        </p:txBody>
-      </p:sp>
-      <p:sp>
-        <p:nvSpPr>
-          <p:cNvPr id="54" name="Text 52"/>
-          <p:cNvSpPr txBox="1"/>
-          <p:nvPr/>
-        </p:nvSpPr>
-        <p:spPr>
-          <a:xfrm>
-            <a:off x="8449056" y="4376318"/>
-            <a:ext cx="1920240" cy="751637"/>
-          </a:xfrm>
-          <a:prstGeom prst="rect">
-            <a:avLst/>
-          </a:prstGeom>
-          <a:noFill/>
-          <a:ln/>
-        </p:spPr>
-        <p:txBody>
-          <a:bodyPr wrap="square" lIns="0" tIns="0" rIns="0" bIns="0" rtlCol="0" anchor="ctr"/>
-          <a:lstStyle/>
-          <a:p>
-            <a:pPr indent="0" marL="0">
-              <a:buNone/>
-            </a:pPr>
-            <a:r>
-              <a:rPr lang="en-US" sz="1400" dirty="0">
-                <a:solidFill>
-                  <a:srgbClr val="595959"/>
-                </a:solidFill>
-                <a:latin typeface="Inter" pitchFamily="34" charset="0"/>
-                <a:ea typeface="Inter" pitchFamily="34" charset="-122"/>
-                <a:cs typeface="Inter" pitchFamily="34" charset="-120"/>
-              </a:rPr>
-              <a:t>39.8%  </a:t>
-            </a:r>
-            <a:pPr indent="0" marL="0">
-              <a:buNone/>
-            </a:pPr>
-            <a:r>
-              <a:rPr lang="en-US" sz="1400" b="1" dirty="0">
-                <a:solidFill>
-                  <a:srgbClr val="A82B26"/>
-                </a:solidFill>
-                <a:latin typeface="Inter" pitchFamily="34" charset="0"/>
-                <a:ea typeface="Inter" pitchFamily="34" charset="-122"/>
-                <a:cs typeface="Inter" pitchFamily="34" charset="-120"/>
-              </a:rPr>
-              <a:t>→  </a:t>
-            </a:r>
-            <a:pPr indent="0" marL="0">
-              <a:buNone/>
-            </a:pPr>
-            <a:r>
-              <a:rPr lang="en-US" sz="1400" b="1" dirty="0">
-                <a:solidFill>
-                  <a:srgbClr val="A82B26"/>
-                </a:solidFill>
-                <a:latin typeface="Inter" pitchFamily="34" charset="0"/>
-                <a:ea typeface="Inter" pitchFamily="34" charset="-122"/>
-                <a:cs typeface="Inter" pitchFamily="34" charset="-120"/>
-              </a:rPr>
-              <a:t>34.1%</a:t>
-            </a:r>
-            <a:endParaRPr lang="en-US" sz="1400" dirty="0"/>
-          </a:p>
-        </p:txBody>
-      </p:sp>
-      <p:sp>
-        <p:nvSpPr>
-          <p:cNvPr id="55" name="Text 53"/>
-          <p:cNvSpPr txBox="1"/>
-          <p:nvPr/>
-        </p:nvSpPr>
-        <p:spPr>
-          <a:xfrm>
-            <a:off x="10415016" y="4376318"/>
-            <a:ext cx="1051560" cy="751637"/>
-          </a:xfrm>
-          <a:prstGeom prst="rect">
-            <a:avLst/>
-          </a:prstGeom>
-          <a:noFill/>
-          <a:ln/>
-        </p:spPr>
-        <p:txBody>
-          <a:bodyPr wrap="square" lIns="0" tIns="0" rIns="0" bIns="0" rtlCol="0" anchor="ctr"/>
-          <a:lstStyle/>
-          <a:p>
-            <a:pPr algn="r" indent="0" marL="0">
-              <a:buNone/>
-            </a:pPr>
-            <a:r>
-              <a:rPr lang="en-US" sz="1600" b="1" dirty="0">
-                <a:solidFill>
-                  <a:srgbClr val="A82B26"/>
-                </a:solidFill>
-                <a:latin typeface="Inter" pitchFamily="34" charset="0"/>
-                <a:ea typeface="Inter" pitchFamily="34" charset="-122"/>
-                <a:cs typeface="Inter" pitchFamily="34" charset="-120"/>
-              </a:rPr>
-              <a:t>−5.7 pts</a:t>
-            </a:r>
-            <a:endParaRPr lang="en-US" sz="1600" dirty="0"/>
-          </a:p>
-        </p:txBody>
-      </p:sp>
-      <p:sp>
-        <p:nvSpPr>
-          <p:cNvPr id="56" name="Shape 54"/>
-          <p:cNvSpPr/>
-          <p:nvPr/>
-        </p:nvSpPr>
-        <p:spPr>
-          <a:xfrm>
-            <a:off x="6208776" y="5127955"/>
-            <a:ext cx="5321808" cy="751637"/>
-          </a:xfrm>
-          <a:prstGeom prst="rect">
-            <a:avLst/>
-          </a:prstGeom>
-          <a:solidFill>
-            <a:srgbClr val="F7F7F7"/>
-          </a:solidFill>
-          <a:ln/>
-        </p:spPr>
-      </p:sp>
-      <p:sp>
-        <p:nvSpPr>
-          <p:cNvPr id="57" name="Text 55"/>
-          <p:cNvSpPr txBox="1"/>
-          <p:nvPr/>
-        </p:nvSpPr>
-        <p:spPr>
-          <a:xfrm>
-            <a:off x="6300216" y="5127955"/>
-            <a:ext cx="320040" cy="751637"/>
-          </a:xfrm>
-          <a:prstGeom prst="rect">
-            <a:avLst/>
-          </a:prstGeom>
-          <a:noFill/>
-          <a:ln/>
-        </p:spPr>
-        <p:txBody>
-          <a:bodyPr wrap="square" lIns="0" tIns="0" rIns="0" bIns="0" rtlCol="0" anchor="ctr"/>
-          <a:lstStyle/>
-          <a:p>
-            <a:pPr indent="0" marL="0">
-              <a:buNone/>
-            </a:pPr>
-            <a:r>
-              <a:rPr lang="en-US" sz="1500" b="1" dirty="0">
-                <a:solidFill>
-                  <a:srgbClr val="0B2C4A"/>
-                </a:solidFill>
-                <a:latin typeface="Inter" pitchFamily="34" charset="0"/>
-                <a:ea typeface="Inter" pitchFamily="34" charset="-122"/>
-                <a:cs typeface="Inter" pitchFamily="34" charset="-120"/>
-              </a:rPr>
-              <a:t>29</a:t>
-            </a:r>
-            <a:endParaRPr lang="en-US" sz="1500" dirty="0"/>
-          </a:p>
-        </p:txBody>
-      </p:sp>
-      <p:sp>
-        <p:nvSpPr>
-          <p:cNvPr id="58" name="Text 56"/>
-          <p:cNvSpPr txBox="1"/>
-          <p:nvPr/>
-        </p:nvSpPr>
-        <p:spPr>
-          <a:xfrm>
-            <a:off x="6665976" y="5127955"/>
-            <a:ext cx="1737360" cy="751637"/>
-          </a:xfrm>
-          <a:prstGeom prst="rect">
-            <a:avLst/>
-          </a:prstGeom>
-          <a:noFill/>
-          <a:ln/>
-        </p:spPr>
-        <p:txBody>
-          <a:bodyPr wrap="square" lIns="0" tIns="0" rIns="0" bIns="0" rtlCol="0" anchor="ctr"/>
-          <a:lstStyle/>
-          <a:p>
-            <a:pPr indent="0" marL="0">
-              <a:buNone/>
-            </a:pPr>
-            <a:r>
-              <a:rPr lang="en-US" sz="1400" b="1" dirty="0">
-                <a:solidFill>
-                  <a:srgbClr val="1A1A1A"/>
-                </a:solidFill>
-                <a:latin typeface="Inter" pitchFamily="34" charset="0"/>
-                <a:ea typeface="Inter" pitchFamily="34" charset="-122"/>
-                <a:cs typeface="Inter" pitchFamily="34" charset="-120"/>
-              </a:rPr>
-              <a:t>Cadillac</a:t>
-            </a:r>
-            <a:endParaRPr lang="en-US" sz="1400" dirty="0"/>
-          </a:p>
-        </p:txBody>
-      </p:sp>
-      <p:sp>
-        <p:nvSpPr>
-          <p:cNvPr id="59" name="Text 57"/>
-          <p:cNvSpPr txBox="1"/>
-          <p:nvPr/>
-        </p:nvSpPr>
-        <p:spPr>
-          <a:xfrm>
-            <a:off x="8449056" y="5127955"/>
-            <a:ext cx="1920240" cy="751637"/>
-          </a:xfrm>
-          <a:prstGeom prst="rect">
-            <a:avLst/>
-          </a:prstGeom>
-          <a:noFill/>
-          <a:ln/>
-        </p:spPr>
-        <p:txBody>
-          <a:bodyPr wrap="square" lIns="0" tIns="0" rIns="0" bIns="0" rtlCol="0" anchor="ctr"/>
-          <a:lstStyle/>
-          <a:p>
-            <a:pPr indent="0" marL="0">
-              <a:buNone/>
-            </a:pPr>
-            <a:r>
-              <a:rPr lang="en-US" sz="1400" dirty="0">
-                <a:solidFill>
-                  <a:srgbClr val="595959"/>
-                </a:solidFill>
-                <a:latin typeface="Inter" pitchFamily="34" charset="0"/>
-                <a:ea typeface="Inter" pitchFamily="34" charset="-122"/>
-                <a:cs typeface="Inter" pitchFamily="34" charset="-120"/>
-              </a:rPr>
-              <a:t>32.0%  </a:t>
-            </a:r>
-            <a:pPr indent="0" marL="0">
-              <a:buNone/>
-            </a:pPr>
-            <a:r>
-              <a:rPr lang="en-US" sz="1400" b="1" dirty="0">
-                <a:solidFill>
-                  <a:srgbClr val="A82B26"/>
-                </a:solidFill>
-                <a:latin typeface="Inter" pitchFamily="34" charset="0"/>
-                <a:ea typeface="Inter" pitchFamily="34" charset="-122"/>
-                <a:cs typeface="Inter" pitchFamily="34" charset="-120"/>
-              </a:rPr>
-              <a:t>→  </a:t>
-            </a:r>
-            <a:pPr indent="0" marL="0">
-              <a:buNone/>
-            </a:pPr>
-            <a:r>
-              <a:rPr lang="en-US" sz="1400" b="1" dirty="0">
-                <a:solidFill>
-                  <a:srgbClr val="A82B26"/>
-                </a:solidFill>
-                <a:latin typeface="Inter" pitchFamily="34" charset="0"/>
-                <a:ea typeface="Inter" pitchFamily="34" charset="-122"/>
-                <a:cs typeface="Inter" pitchFamily="34" charset="-120"/>
-              </a:rPr>
-              <a:t>27.9%</a:t>
-            </a:r>
-            <a:endParaRPr lang="en-US" sz="1400" dirty="0"/>
-          </a:p>
-        </p:txBody>
-      </p:sp>
-      <p:sp>
-        <p:nvSpPr>
-          <p:cNvPr id="60" name="Text 58"/>
-          <p:cNvSpPr txBox="1"/>
-          <p:nvPr/>
-        </p:nvSpPr>
-        <p:spPr>
-          <a:xfrm>
-            <a:off x="10415016" y="5127955"/>
-            <a:ext cx="1051560" cy="751637"/>
-          </a:xfrm>
-          <a:prstGeom prst="rect">
-            <a:avLst/>
-          </a:prstGeom>
-          <a:noFill/>
-          <a:ln/>
-        </p:spPr>
-        <p:txBody>
-          <a:bodyPr wrap="square" lIns="0" tIns="0" rIns="0" bIns="0" rtlCol="0" anchor="ctr"/>
-          <a:lstStyle/>
-          <a:p>
-            <a:pPr algn="r" indent="0" marL="0">
-              <a:buNone/>
-            </a:pPr>
-            <a:r>
-              <a:rPr lang="en-US" sz="1600" b="1" dirty="0">
-                <a:solidFill>
-                  <a:srgbClr val="A82B26"/>
-                </a:solidFill>
-                <a:latin typeface="Inter" pitchFamily="34" charset="0"/>
-                <a:ea typeface="Inter" pitchFamily="34" charset="-122"/>
-                <a:cs typeface="Inter" pitchFamily="34" charset="-120"/>
-              </a:rPr>
-              <a:t>−4.1 pts</a:t>
-            </a:r>
-            <a:endParaRPr lang="en-US" sz="1600" dirty="0"/>
-          </a:p>
-        </p:txBody>
-      </p:sp>
-      <p:sp>
-        <p:nvSpPr>
-          <p:cNvPr id="61" name="Shape 59"/>
+          <p:cNvPr id="69" name="Shape 67"/>
           <p:cNvSpPr/>
           <p:nvPr/>
         </p:nvSpPr>
@@ -19967,7 +20523,7 @@
       </p:sp>
       <p:sp>
         <p:nvSpPr>
-          <p:cNvPr id="62" name="Text 60"/>
+          <p:cNvPr id="70" name="Text 68"/>
           <p:cNvSpPr txBox="1"/>
           <p:nvPr/>
         </p:nvSpPr>
@@ -19998,7 +20554,7 @@
                 <a:ea typeface="Inter" pitchFamily="34" charset="-122"/>
                 <a:cs typeface="Inter" pitchFamily="34" charset="-120"/>
               </a:rPr>
-              <a:t>Ask Mazda, VW Henderson and Acura what changed. Ask LR Reno, Hyundai Prescott and Toyota Henderson what got in the way.</a:t>
+              <a:t>Ask Mazda, VW Henderson and Acura what changed. Ask LR Reno, Hyundai Prescott and Toyota Henderson what got in the way. Ask Lexus, Acura and Chevy GMC Bullhead what they started this year.</a:t>
             </a:r>
             <a:endParaRPr lang="en-US" sz="1600" dirty="0"/>
           </a:p>

--- a/day2-deck/decks/Labor Mix - House Style.pptx
+++ b/day2-deck/decks/Labor Mix - House Style.pptx
@@ -3546,7 +3546,7 @@
                 <a:ea typeface="Inter" pitchFamily="34" charset="-122"/>
                 <a:cs typeface="Inter" pitchFamily="34" charset="-120"/>
               </a:rPr>
-              <a:t>LABOR MIX</a:t>
+              <a:t>CUSTOMER PAY</a:t>
             </a:r>
             <a:endParaRPr lang="en-US" sz="1400" dirty="0"/>
           </a:p>
@@ -11806,7 +11806,7 @@
                 <a:ea typeface="Inter" pitchFamily="34" charset="-122"/>
                 <a:cs typeface="Inter" pitchFamily="34" charset="-120"/>
               </a:rPr>
-              <a:t>LABOR MIX</a:t>
+              <a:t>CUSTOMER PAY</a:t>
             </a:r>
             <a:endParaRPr lang="en-US" sz="1400" dirty="0"/>
           </a:p>
@@ -12660,7 +12660,7 @@
                 <a:ea typeface="Inter" pitchFamily="34" charset="-122"/>
                 <a:cs typeface="Inter" pitchFamily="34" charset="-120"/>
               </a:rPr>
-              <a:t>LABOR MIX</a:t>
+              <a:t>CUSTOMER PAY</a:t>
             </a:r>
             <a:endParaRPr lang="en-US" sz="1400" dirty="0"/>
           </a:p>
@@ -17607,7 +17607,7 @@
                 <a:ea typeface="Inter" pitchFamily="34" charset="-122"/>
                 <a:cs typeface="Inter" pitchFamily="34" charset="-120"/>
               </a:rPr>
-              <a:t>LABOR MIX</a:t>
+              <a:t>CUSTOMER PAY</a:t>
             </a:r>
             <a:endParaRPr lang="en-US" sz="1400" dirty="0"/>
           </a:p>
@@ -20645,7 +20645,7 @@
                 <a:ea typeface="Inter" pitchFamily="34" charset="-122"/>
                 <a:cs typeface="Inter" pitchFamily="34" charset="-120"/>
               </a:rPr>
-              <a:t>LABOR MIX</a:t>
+              <a:t>CUSTOMER PAY</a:t>
             </a:r>
             <a:endParaRPr lang="en-US" sz="1400" dirty="0"/>
           </a:p>
@@ -28749,7 +28749,7 @@
                 <a:ea typeface="Inter" pitchFamily="34" charset="-122"/>
                 <a:cs typeface="Inter" pitchFamily="34" charset="-120"/>
               </a:rPr>
-              <a:t>LABOR MIX</a:t>
+              <a:t>CUSTOMER PAY</a:t>
             </a:r>
             <a:endParaRPr lang="en-US" sz="1400" dirty="0"/>
           </a:p>

--- a/day2-deck/decks/Labor Mix - House Style.pptx
+++ b/day2-deck/decks/Labor Mix - House Style.pptx
@@ -362,6 +362,17 @@
         </c:scaling>
         <c:delete val="0"/>
         <c:axPos val="l"/>
+        <c:majorGridlines>
+          <c:spPr>
+            <a:ln w="9525" cap="flat">
+              <a:solidFill>
+                <a:srgbClr val="D9D9D9"/>
+              </a:solidFill>
+              <a:prstDash val="solid"/>
+              <a:round/>
+            </a:ln>
+          </c:spPr>
+        </c:majorGridlines>
         <c:numFmt formatCode="0&quot;%&quot;" sourceLinked="0"/>
         <c:majorTickMark val="out"/>
         <c:minorTickMark val="none"/>
@@ -1193,13 +1204,13 @@
                   <c:v>53.4</c:v>
                 </c:pt>
                 <c:pt idx="9">
-                  <c:v>52.6</c:v>
+                  <c:v/>
                 </c:pt>
                 <c:pt idx="10">
                   <c:v>54.1</c:v>
                 </c:pt>
                 <c:pt idx="11">
-                  <c:v>52</c:v>
+                  <c:v/>
                 </c:pt>
               </c:numCache>
             </c:numRef>
@@ -1503,13 +1514,13 @@
                   <c:v/>
                 </c:pt>
                 <c:pt idx="9">
-                  <c:v/>
+                  <c:v>52.6</c:v>
                 </c:pt>
                 <c:pt idx="10">
                   <c:v/>
                 </c:pt>
                 <c:pt idx="11">
-                  <c:v/>
+                  <c:v>52</c:v>
                 </c:pt>
               </c:numCache>
             </c:numRef>
@@ -1908,17 +1919,6 @@
         </c:scaling>
         <c:delete val="0"/>
         <c:axPos val="l"/>
-        <c:majorGridlines>
-          <c:spPr>
-            <a:ln w="9525" cap="flat">
-              <a:solidFill>
-                <a:srgbClr val="D9D9D9"/>
-              </a:solidFill>
-              <a:prstDash val="solid"/>
-              <a:round/>
-            </a:ln>
-          </c:spPr>
-        </c:majorGridlines>
         <c:numFmt formatCode="0&quot;%&quot;" sourceLinked="0"/>
         <c:majorTickMark val="out"/>
         <c:minorTickMark val="none"/>

--- a/day2-deck/decks/Labor Mix - House Style.pptx
+++ b/day2-deck/decks/Labor Mix - House Style.pptx
@@ -2762,7 +2762,7 @@
           <a:p>
             <a:r>
               <a:rPr lang="en-US" dirty="0"/>
-              <a:t>Source: Qlik - Closed Repair Orders. Labor sale by pay type, Jan-Sep by close month. Same-store, INEOS excluded. GMC Prescott body shop labor types excluded. Customer-pay labor sale / total labor sale (customer pay + warranty + internal). Top and bottom five stores by change in Customer Pay Share of Labor Sale, Jan-Sep 2026 vs 2025. Moving now: Jul-Sep 2026 vs Jan-Mar 2026, each store against itself; the group moved −0.3 pts on the same basis, so part of every store's change is seasonal.Conversation starter: each top store says one thing they started doing; each bottom store says what got in the way and what they would try. The room trades ideas. Moving now: ask the top three what they started this year.</a:t>
+              <a:t>Source: Qlik - Closed Repair Orders. Labor sale by pay type, Jan-Sep by close month. Same-store, INEOS excluded. GMC Prescott body shop labor types excluded. Customer-pay labor sale / total labor sale (customer pay + warranty + internal). Top and bottom five stores by change in Customer Pay Share of Labor Sale, Jan-Sep 2026 vs 2025. Moving now: Jul-Sep 2026 vs Jan-Mar 2026, each store against itself; the group moved −0.3 pts on the same basis, so part of every store's change is seasonal. Green bar at the right of a row: the store is on both the top five vs last year and the top five moving now.Conversation starter: each top store says one thing they started doing; each bottom store says what got in the way and what they would try. The room trades ideas. Moving now: ask the top three what they started this year.</a:t>
             </a:r>
             <a:endParaRPr lang="en-US" dirty="0"/>
           </a:p>
@@ -13005,7 +13005,7 @@
               <a:buNone/>
             </a:pPr>
             <a:r>
-              <a:rPr lang="en-US" sz="1200" dirty="0">
+              <a:rPr lang="en-US" sz="1200" b="1" dirty="0">
                 <a:solidFill>
                   <a:srgbClr val="0B7A4A"/>
                 </a:solidFill>
@@ -13142,7 +13142,7 @@
               <a:buNone/>
             </a:pPr>
             <a:r>
-              <a:rPr lang="en-US" sz="1200" dirty="0">
+              <a:rPr lang="en-US" sz="1200" b="1" dirty="0">
                 <a:solidFill>
                   <a:srgbClr val="0B7A4A"/>
                 </a:solidFill>
@@ -13279,7 +13279,7 @@
               <a:buNone/>
             </a:pPr>
             <a:r>
-              <a:rPr lang="en-US" sz="1200" dirty="0">
+              <a:rPr lang="en-US" sz="1200" b="1" dirty="0">
                 <a:solidFill>
                   <a:srgbClr val="0B7A4A"/>
                 </a:solidFill>
@@ -13416,7 +13416,7 @@
               <a:buNone/>
             </a:pPr>
             <a:r>
-              <a:rPr lang="en-US" sz="1200" dirty="0">
+              <a:rPr lang="en-US" sz="1200" b="1" dirty="0">
                 <a:solidFill>
                   <a:srgbClr val="0B7A4A"/>
                 </a:solidFill>
@@ -13553,7 +13553,7 @@
               <a:buNone/>
             </a:pPr>
             <a:r>
-              <a:rPr lang="en-US" sz="1200" dirty="0">
+              <a:rPr lang="en-US" sz="1200" b="1" dirty="0">
                 <a:solidFill>
                   <a:srgbClr val="0B7A4A"/>
                 </a:solidFill>
@@ -13690,7 +13690,7 @@
               <a:buNone/>
             </a:pPr>
             <a:r>
-              <a:rPr lang="en-US" sz="1200" dirty="0">
+              <a:rPr lang="en-US" sz="1200" b="1" dirty="0">
                 <a:solidFill>
                   <a:srgbClr val="0B7A4A"/>
                 </a:solidFill>
@@ -13827,7 +13827,7 @@
               <a:buNone/>
             </a:pPr>
             <a:r>
-              <a:rPr lang="en-US" sz="1200" dirty="0">
+              <a:rPr lang="en-US" sz="1200" b="1" dirty="0">
                 <a:solidFill>
                   <a:srgbClr val="0B7A4A"/>
                 </a:solidFill>
@@ -13964,7 +13964,7 @@
               <a:buNone/>
             </a:pPr>
             <a:r>
-              <a:rPr lang="en-US" sz="1200" dirty="0">
+              <a:rPr lang="en-US" sz="1200" b="1" dirty="0">
                 <a:solidFill>
                   <a:srgbClr val="0B7A4A"/>
                 </a:solidFill>
@@ -14101,7 +14101,7 @@
               <a:buNone/>
             </a:pPr>
             <a:r>
-              <a:rPr lang="en-US" sz="1200" dirty="0">
+              <a:rPr lang="en-US" sz="1200" b="1" dirty="0">
                 <a:solidFill>
                   <a:srgbClr val="0B7A4A"/>
                 </a:solidFill>
@@ -14238,7 +14238,7 @@
               <a:buNone/>
             </a:pPr>
             <a:r>
-              <a:rPr lang="en-US" sz="1200" dirty="0">
+              <a:rPr lang="en-US" sz="1200" b="1" dirty="0">
                 <a:solidFill>
                   <a:srgbClr val="0B7A4A"/>
                 </a:solidFill>
@@ -14375,7 +14375,7 @@
               <a:buNone/>
             </a:pPr>
             <a:r>
-              <a:rPr lang="en-US" sz="1200" dirty="0">
+              <a:rPr lang="en-US" sz="1200" b="1" dirty="0">
                 <a:solidFill>
                   <a:srgbClr val="0B7A4A"/>
                 </a:solidFill>
@@ -14512,7 +14512,7 @@
               <a:buNone/>
             </a:pPr>
             <a:r>
-              <a:rPr lang="en-US" sz="1200" dirty="0">
+              <a:rPr lang="en-US" sz="1200" b="1" dirty="0">
                 <a:solidFill>
                   <a:srgbClr val="0B7A4A"/>
                 </a:solidFill>
@@ -14649,7 +14649,7 @@
               <a:buNone/>
             </a:pPr>
             <a:r>
-              <a:rPr lang="en-US" sz="1200" dirty="0">
+              <a:rPr lang="en-US" sz="1200" b="1" dirty="0">
                 <a:solidFill>
                   <a:srgbClr val="0B7A4A"/>
                 </a:solidFill>
@@ -14786,7 +14786,7 @@
               <a:buNone/>
             </a:pPr>
             <a:r>
-              <a:rPr lang="en-US" sz="1200" dirty="0">
+              <a:rPr lang="en-US" sz="1200" b="1" dirty="0">
                 <a:solidFill>
                   <a:srgbClr val="0B7A4A"/>
                 </a:solidFill>
@@ -14923,7 +14923,7 @@
               <a:buNone/>
             </a:pPr>
             <a:r>
-              <a:rPr lang="en-US" sz="1200" dirty="0">
+              <a:rPr lang="en-US" sz="1200" b="1" dirty="0">
                 <a:solidFill>
                   <a:srgbClr val="0B7A4A"/>
                 </a:solidFill>
@@ -15060,7 +15060,7 @@
               <a:buNone/>
             </a:pPr>
             <a:r>
-              <a:rPr lang="en-US" sz="1200" dirty="0">
+              <a:rPr lang="en-US" sz="1200" b="1" dirty="0">
                 <a:solidFill>
                   <a:srgbClr val="0B7A4A"/>
                 </a:solidFill>
@@ -15197,7 +15197,7 @@
               <a:buNone/>
             </a:pPr>
             <a:r>
-              <a:rPr lang="en-US" sz="1200" dirty="0">
+              <a:rPr lang="en-US" sz="1200" b="1" dirty="0">
                 <a:solidFill>
                   <a:srgbClr val="0B7A4A"/>
                 </a:solidFill>
@@ -15334,7 +15334,7 @@
               <a:buNone/>
             </a:pPr>
             <a:r>
-              <a:rPr lang="en-US" sz="1200" dirty="0">
+              <a:rPr lang="en-US" sz="1200" b="1" dirty="0">
                 <a:solidFill>
                   <a:srgbClr val="0B7A4A"/>
                 </a:solidFill>
@@ -15471,7 +15471,7 @@
               <a:buNone/>
             </a:pPr>
             <a:r>
-              <a:rPr lang="en-US" sz="1200" dirty="0">
+              <a:rPr lang="en-US" sz="1200" b="1" dirty="0">
                 <a:solidFill>
                   <a:srgbClr val="0B7A4A"/>
                 </a:solidFill>
@@ -15608,7 +15608,7 @@
               <a:buNone/>
             </a:pPr>
             <a:r>
-              <a:rPr lang="en-US" sz="1200" dirty="0">
+              <a:rPr lang="en-US" sz="1200" b="1" dirty="0">
                 <a:solidFill>
                   <a:srgbClr val="A82B26"/>
                 </a:solidFill>
@@ -15745,7 +15745,7 @@
               <a:buNone/>
             </a:pPr>
             <a:r>
-              <a:rPr lang="en-US" sz="1200" dirty="0">
+              <a:rPr lang="en-US" sz="1200" b="1" dirty="0">
                 <a:solidFill>
                   <a:srgbClr val="A82B26"/>
                 </a:solidFill>
@@ -15882,7 +15882,7 @@
               <a:buNone/>
             </a:pPr>
             <a:r>
-              <a:rPr lang="en-US" sz="1200" dirty="0">
+              <a:rPr lang="en-US" sz="1200" b="1" dirty="0">
                 <a:solidFill>
                   <a:srgbClr val="A82B26"/>
                 </a:solidFill>
@@ -16019,7 +16019,7 @@
               <a:buNone/>
             </a:pPr>
             <a:r>
-              <a:rPr lang="en-US" sz="1200" dirty="0">
+              <a:rPr lang="en-US" sz="1200" b="1" dirty="0">
                 <a:solidFill>
                   <a:srgbClr val="A82B26"/>
                 </a:solidFill>
@@ -16156,7 +16156,7 @@
               <a:buNone/>
             </a:pPr>
             <a:r>
-              <a:rPr lang="en-US" sz="1200" dirty="0">
+              <a:rPr lang="en-US" sz="1200" b="1" dirty="0">
                 <a:solidFill>
                   <a:srgbClr val="A82B26"/>
                 </a:solidFill>
@@ -16293,7 +16293,7 @@
               <a:buNone/>
             </a:pPr>
             <a:r>
-              <a:rPr lang="en-US" sz="1200" dirty="0">
+              <a:rPr lang="en-US" sz="1200" b="1" dirty="0">
                 <a:solidFill>
                   <a:srgbClr val="A82B26"/>
                 </a:solidFill>
@@ -16430,7 +16430,7 @@
               <a:buNone/>
             </a:pPr>
             <a:r>
-              <a:rPr lang="en-US" sz="1200" dirty="0">
+              <a:rPr lang="en-US" sz="1200" b="1" dirty="0">
                 <a:solidFill>
                   <a:srgbClr val="A82B26"/>
                 </a:solidFill>
@@ -16567,7 +16567,7 @@
               <a:buNone/>
             </a:pPr>
             <a:r>
-              <a:rPr lang="en-US" sz="1200" dirty="0">
+              <a:rPr lang="en-US" sz="1200" b="1" dirty="0">
                 <a:solidFill>
                   <a:srgbClr val="A82B26"/>
                 </a:solidFill>
@@ -16704,7 +16704,7 @@
               <a:buNone/>
             </a:pPr>
             <a:r>
-              <a:rPr lang="en-US" sz="1200" dirty="0">
+              <a:rPr lang="en-US" sz="1200" b="1" dirty="0">
                 <a:solidFill>
                   <a:srgbClr val="A82B26"/>
                 </a:solidFill>
@@ -16841,7 +16841,7 @@
               <a:buNone/>
             </a:pPr>
             <a:r>
-              <a:rPr lang="en-US" sz="1200" dirty="0">
+              <a:rPr lang="en-US" sz="1200" b="1" dirty="0">
                 <a:solidFill>
                   <a:srgbClr val="A82B26"/>
                 </a:solidFill>
@@ -16978,7 +16978,7 @@
               <a:buNone/>
             </a:pPr>
             <a:r>
-              <a:rPr lang="en-US" sz="1200" dirty="0">
+              <a:rPr lang="en-US" sz="1200" b="1" dirty="0">
                 <a:solidFill>
                   <a:srgbClr val="A82B26"/>
                 </a:solidFill>
@@ -17115,7 +17115,7 @@
               <a:buNone/>
             </a:pPr>
             <a:r>
-              <a:rPr lang="en-US" sz="1200" dirty="0">
+              <a:rPr lang="en-US" sz="1200" b="1" dirty="0">
                 <a:solidFill>
                   <a:srgbClr val="A82B26"/>
                 </a:solidFill>
@@ -17252,7 +17252,7 @@
               <a:buNone/>
             </a:pPr>
             <a:r>
-              <a:rPr lang="en-US" sz="1200" dirty="0">
+              <a:rPr lang="en-US" sz="1200" b="1" dirty="0">
                 <a:solidFill>
                   <a:srgbClr val="A82B26"/>
                 </a:solidFill>
@@ -17389,7 +17389,7 @@
               <a:buNone/>
             </a:pPr>
             <a:r>
-              <a:rPr lang="en-US" sz="1200" dirty="0">
+              <a:rPr lang="en-US" sz="1200" b="1" dirty="0">
                 <a:solidFill>
                   <a:srgbClr val="A82B26"/>
                 </a:solidFill>
@@ -18126,7 +18126,27 @@
       </p:sp>
       <p:sp>
         <p:nvSpPr>
-          <p:cNvPr id="17" name="Text 15"/>
+          <p:cNvPr id="17" name="Shape 15"/>
+          <p:cNvSpPr/>
+          <p:nvPr/>
+        </p:nvSpPr>
+        <p:spPr>
+          <a:xfrm>
+            <a:off x="4084320" y="3650285"/>
+            <a:ext cx="64008" cy="682142"/>
+          </a:xfrm>
+          <a:prstGeom prst="rect">
+            <a:avLst/>
+          </a:prstGeom>
+          <a:solidFill>
+            <a:srgbClr val="12A566"/>
+          </a:solidFill>
+          <a:ln/>
+        </p:spPr>
+      </p:sp>
+      <p:sp>
+        <p:nvSpPr>
+          <p:cNvPr id="18" name="Text 16"/>
           <p:cNvSpPr txBox="1"/>
           <p:nvPr/>
         </p:nvSpPr>
@@ -18165,7 +18185,7 @@
       </p:sp>
       <p:sp>
         <p:nvSpPr>
-          <p:cNvPr id="18" name="Text 16"/>
+          <p:cNvPr id="19" name="Text 17"/>
           <p:cNvSpPr txBox="1"/>
           <p:nvPr/>
         </p:nvSpPr>
@@ -18244,7 +18264,7 @@
       </p:sp>
       <p:sp>
         <p:nvSpPr>
-          <p:cNvPr id="19" name="Text 17"/>
+          <p:cNvPr id="20" name="Text 18"/>
           <p:cNvSpPr txBox="1"/>
           <p:nvPr/>
         </p:nvSpPr>
@@ -18283,7 +18303,7 @@
       </p:sp>
       <p:sp>
         <p:nvSpPr>
-          <p:cNvPr id="20" name="Text 18"/>
+          <p:cNvPr id="21" name="Text 19"/>
           <p:cNvSpPr txBox="1"/>
           <p:nvPr/>
         </p:nvSpPr>
@@ -18322,7 +18342,7 @@
       </p:sp>
       <p:sp>
         <p:nvSpPr>
-          <p:cNvPr id="21" name="Text 19"/>
+          <p:cNvPr id="22" name="Text 20"/>
           <p:cNvSpPr txBox="1"/>
           <p:nvPr/>
         </p:nvSpPr>
@@ -18401,7 +18421,7 @@
       </p:sp>
       <p:sp>
         <p:nvSpPr>
-          <p:cNvPr id="22" name="Text 20"/>
+          <p:cNvPr id="23" name="Text 21"/>
           <p:cNvSpPr txBox="1"/>
           <p:nvPr/>
         </p:nvSpPr>
@@ -18440,7 +18460,7 @@
       </p:sp>
       <p:sp>
         <p:nvSpPr>
-          <p:cNvPr id="23" name="Shape 21"/>
+          <p:cNvPr id="24" name="Shape 22"/>
           <p:cNvSpPr/>
           <p:nvPr/>
         </p:nvSpPr>
@@ -18460,7 +18480,7 @@
       </p:sp>
       <p:sp>
         <p:nvSpPr>
-          <p:cNvPr id="24" name="Text 22"/>
+          <p:cNvPr id="25" name="Text 23"/>
           <p:cNvSpPr txBox="1"/>
           <p:nvPr/>
         </p:nvSpPr>
@@ -18499,7 +18519,7 @@
       </p:sp>
       <p:sp>
         <p:nvSpPr>
-          <p:cNvPr id="25" name="Text 23"/>
+          <p:cNvPr id="26" name="Text 24"/>
           <p:cNvSpPr txBox="1"/>
           <p:nvPr/>
         </p:nvSpPr>
@@ -18578,7 +18598,7 @@
       </p:sp>
       <p:sp>
         <p:nvSpPr>
-          <p:cNvPr id="26" name="Text 24"/>
+          <p:cNvPr id="27" name="Text 25"/>
           <p:cNvSpPr txBox="1"/>
           <p:nvPr/>
         </p:nvSpPr>
@@ -18617,7 +18637,7 @@
       </p:sp>
       <p:sp>
         <p:nvSpPr>
-          <p:cNvPr id="27" name="Shape 25"/>
+          <p:cNvPr id="28" name="Shape 26"/>
           <p:cNvSpPr/>
           <p:nvPr/>
         </p:nvSpPr>
@@ -18637,7 +18657,7 @@
       </p:sp>
       <p:sp>
         <p:nvSpPr>
-          <p:cNvPr id="28" name="Text 26"/>
+          <p:cNvPr id="29" name="Text 27"/>
           <p:cNvSpPr txBox="1"/>
           <p:nvPr/>
         </p:nvSpPr>
@@ -18676,7 +18696,7 @@
       </p:sp>
       <p:sp>
         <p:nvSpPr>
-          <p:cNvPr id="29" name="Text 27"/>
+          <p:cNvPr id="30" name="Text 28"/>
           <p:cNvSpPr txBox="1"/>
           <p:nvPr/>
         </p:nvSpPr>
@@ -18715,7 +18735,7 @@
       </p:sp>
       <p:sp>
         <p:nvSpPr>
-          <p:cNvPr id="30" name="Shape 28"/>
+          <p:cNvPr id="31" name="Shape 29"/>
           <p:cNvSpPr/>
           <p:nvPr/>
         </p:nvSpPr>
@@ -18735,7 +18755,7 @@
       </p:sp>
       <p:sp>
         <p:nvSpPr>
-          <p:cNvPr id="31" name="Text 29"/>
+          <p:cNvPr id="32" name="Text 30"/>
           <p:cNvSpPr txBox="1"/>
           <p:nvPr/>
         </p:nvSpPr>
@@ -18774,7 +18794,7 @@
       </p:sp>
       <p:sp>
         <p:nvSpPr>
-          <p:cNvPr id="32" name="Text 30"/>
+          <p:cNvPr id="33" name="Text 31"/>
           <p:cNvSpPr txBox="1"/>
           <p:nvPr/>
         </p:nvSpPr>
@@ -18853,7 +18873,7 @@
       </p:sp>
       <p:sp>
         <p:nvSpPr>
-          <p:cNvPr id="33" name="Text 31"/>
+          <p:cNvPr id="34" name="Text 32"/>
           <p:cNvSpPr txBox="1"/>
           <p:nvPr/>
         </p:nvSpPr>
@@ -18892,7 +18912,7 @@
       </p:sp>
       <p:sp>
         <p:nvSpPr>
-          <p:cNvPr id="34" name="Text 32"/>
+          <p:cNvPr id="35" name="Text 33"/>
           <p:cNvSpPr txBox="1"/>
           <p:nvPr/>
         </p:nvSpPr>
@@ -18931,7 +18951,7 @@
       </p:sp>
       <p:sp>
         <p:nvSpPr>
-          <p:cNvPr id="35" name="Text 33"/>
+          <p:cNvPr id="36" name="Text 34"/>
           <p:cNvSpPr txBox="1"/>
           <p:nvPr/>
         </p:nvSpPr>
@@ -19010,7 +19030,7 @@
       </p:sp>
       <p:sp>
         <p:nvSpPr>
-          <p:cNvPr id="36" name="Text 34"/>
+          <p:cNvPr id="37" name="Text 35"/>
           <p:cNvSpPr txBox="1"/>
           <p:nvPr/>
         </p:nvSpPr>
@@ -19049,7 +19069,7 @@
       </p:sp>
       <p:sp>
         <p:nvSpPr>
-          <p:cNvPr id="37" name="Shape 35"/>
+          <p:cNvPr id="38" name="Shape 36"/>
           <p:cNvSpPr/>
           <p:nvPr/>
         </p:nvSpPr>
@@ -19069,7 +19089,7 @@
       </p:sp>
       <p:sp>
         <p:nvSpPr>
-          <p:cNvPr id="38" name="Text 36"/>
+          <p:cNvPr id="39" name="Text 37"/>
           <p:cNvSpPr txBox="1"/>
           <p:nvPr/>
         </p:nvSpPr>
@@ -19108,7 +19128,7 @@
       </p:sp>
       <p:sp>
         <p:nvSpPr>
-          <p:cNvPr id="39" name="Text 37"/>
+          <p:cNvPr id="40" name="Text 38"/>
           <p:cNvSpPr txBox="1"/>
           <p:nvPr/>
         </p:nvSpPr>
@@ -19187,7 +19207,7 @@
       </p:sp>
       <p:sp>
         <p:nvSpPr>
-          <p:cNvPr id="40" name="Text 38"/>
+          <p:cNvPr id="41" name="Text 39"/>
           <p:cNvSpPr txBox="1"/>
           <p:nvPr/>
         </p:nvSpPr>
@@ -19226,7 +19246,7 @@
       </p:sp>
       <p:sp>
         <p:nvSpPr>
-          <p:cNvPr id="41" name="Text 39"/>
+          <p:cNvPr id="42" name="Text 40"/>
           <p:cNvSpPr txBox="1"/>
           <p:nvPr/>
         </p:nvSpPr>
@@ -19265,7 +19285,7 @@
       </p:sp>
       <p:sp>
         <p:nvSpPr>
-          <p:cNvPr id="42" name="Text 40"/>
+          <p:cNvPr id="43" name="Text 41"/>
           <p:cNvSpPr txBox="1"/>
           <p:nvPr/>
         </p:nvSpPr>
@@ -19344,7 +19364,7 @@
       </p:sp>
       <p:sp>
         <p:nvSpPr>
-          <p:cNvPr id="43" name="Text 41"/>
+          <p:cNvPr id="44" name="Text 42"/>
           <p:cNvSpPr txBox="1"/>
           <p:nvPr/>
         </p:nvSpPr>
@@ -19383,7 +19403,7 @@
       </p:sp>
       <p:sp>
         <p:nvSpPr>
-          <p:cNvPr id="44" name="Shape 42"/>
+          <p:cNvPr id="45" name="Shape 43"/>
           <p:cNvSpPr/>
           <p:nvPr/>
         </p:nvSpPr>
@@ -19403,7 +19423,7 @@
       </p:sp>
       <p:sp>
         <p:nvSpPr>
-          <p:cNvPr id="45" name="Text 43"/>
+          <p:cNvPr id="46" name="Text 44"/>
           <p:cNvSpPr txBox="1"/>
           <p:nvPr/>
         </p:nvSpPr>
@@ -19442,7 +19462,7 @@
       </p:sp>
       <p:sp>
         <p:nvSpPr>
-          <p:cNvPr id="46" name="Text 44"/>
+          <p:cNvPr id="47" name="Text 45"/>
           <p:cNvSpPr txBox="1"/>
           <p:nvPr/>
         </p:nvSpPr>
@@ -19521,7 +19541,7 @@
       </p:sp>
       <p:sp>
         <p:nvSpPr>
-          <p:cNvPr id="47" name="Text 45"/>
+          <p:cNvPr id="48" name="Text 46"/>
           <p:cNvSpPr txBox="1"/>
           <p:nvPr/>
         </p:nvSpPr>
@@ -19560,7 +19580,7 @@
       </p:sp>
       <p:sp>
         <p:nvSpPr>
-          <p:cNvPr id="48" name="Shape 46"/>
+          <p:cNvPr id="49" name="Shape 47"/>
           <p:cNvSpPr/>
           <p:nvPr/>
         </p:nvSpPr>
@@ -19580,7 +19600,7 @@
       </p:sp>
       <p:sp>
         <p:nvSpPr>
-          <p:cNvPr id="49" name="Text 47"/>
+          <p:cNvPr id="50" name="Text 48"/>
           <p:cNvSpPr txBox="1"/>
           <p:nvPr/>
         </p:nvSpPr>
@@ -19619,7 +19639,7 @@
       </p:sp>
       <p:sp>
         <p:nvSpPr>
-          <p:cNvPr id="50" name="Text 48"/>
+          <p:cNvPr id="51" name="Text 49"/>
           <p:cNvSpPr txBox="1"/>
           <p:nvPr/>
         </p:nvSpPr>
@@ -19658,7 +19678,7 @@
       </p:sp>
       <p:sp>
         <p:nvSpPr>
-          <p:cNvPr id="51" name="Shape 49"/>
+          <p:cNvPr id="52" name="Shape 50"/>
           <p:cNvSpPr/>
           <p:nvPr/>
         </p:nvSpPr>
@@ -19678,7 +19698,7 @@
       </p:sp>
       <p:sp>
         <p:nvSpPr>
-          <p:cNvPr id="52" name="Text 50"/>
+          <p:cNvPr id="53" name="Text 51"/>
           <p:cNvSpPr txBox="1"/>
           <p:nvPr/>
         </p:nvSpPr>
@@ -19717,7 +19737,7 @@
       </p:sp>
       <p:sp>
         <p:nvSpPr>
-          <p:cNvPr id="53" name="Text 51"/>
+          <p:cNvPr id="54" name="Text 52"/>
           <p:cNvSpPr txBox="1"/>
           <p:nvPr/>
         </p:nvSpPr>
@@ -19796,7 +19816,7 @@
       </p:sp>
       <p:sp>
         <p:nvSpPr>
-          <p:cNvPr id="54" name="Text 52"/>
+          <p:cNvPr id="55" name="Text 53"/>
           <p:cNvSpPr txBox="1"/>
           <p:nvPr/>
         </p:nvSpPr>
@@ -19835,7 +19855,27 @@
       </p:sp>
       <p:sp>
         <p:nvSpPr>
-          <p:cNvPr id="55" name="Text 53"/>
+          <p:cNvPr id="56" name="Shape 54"/>
+          <p:cNvSpPr/>
+          <p:nvPr/>
+        </p:nvSpPr>
+        <p:spPr>
+          <a:xfrm>
+            <a:off x="11466576" y="2894990"/>
+            <a:ext cx="64008" cy="682142"/>
+          </a:xfrm>
+          <a:prstGeom prst="rect">
+            <a:avLst/>
+          </a:prstGeom>
+          <a:solidFill>
+            <a:srgbClr val="12A566"/>
+          </a:solidFill>
+          <a:ln/>
+        </p:spPr>
+      </p:sp>
+      <p:sp>
+        <p:nvSpPr>
+          <p:cNvPr id="57" name="Text 55"/>
           <p:cNvSpPr txBox="1"/>
           <p:nvPr/>
         </p:nvSpPr>
@@ -19874,7 +19914,7 @@
       </p:sp>
       <p:sp>
         <p:nvSpPr>
-          <p:cNvPr id="56" name="Text 54"/>
+          <p:cNvPr id="58" name="Text 56"/>
           <p:cNvSpPr txBox="1"/>
           <p:nvPr/>
         </p:nvSpPr>
@@ -19953,7 +19993,7 @@
       </p:sp>
       <p:sp>
         <p:nvSpPr>
-          <p:cNvPr id="57" name="Text 55"/>
+          <p:cNvPr id="59" name="Text 57"/>
           <p:cNvSpPr txBox="1"/>
           <p:nvPr/>
         </p:nvSpPr>
@@ -19992,7 +20032,7 @@
       </p:sp>
       <p:sp>
         <p:nvSpPr>
-          <p:cNvPr id="58" name="Shape 56"/>
+          <p:cNvPr id="60" name="Shape 58"/>
           <p:cNvSpPr/>
           <p:nvPr/>
         </p:nvSpPr>
@@ -20012,7 +20052,7 @@
       </p:sp>
       <p:sp>
         <p:nvSpPr>
-          <p:cNvPr id="59" name="Text 57"/>
+          <p:cNvPr id="61" name="Text 59"/>
           <p:cNvSpPr txBox="1"/>
           <p:nvPr/>
         </p:nvSpPr>
@@ -20051,7 +20091,7 @@
       </p:sp>
       <p:sp>
         <p:nvSpPr>
-          <p:cNvPr id="60" name="Text 58"/>
+          <p:cNvPr id="62" name="Text 60"/>
           <p:cNvSpPr txBox="1"/>
           <p:nvPr/>
         </p:nvSpPr>
@@ -20130,7 +20170,7 @@
       </p:sp>
       <p:sp>
         <p:nvSpPr>
-          <p:cNvPr id="61" name="Text 59"/>
+          <p:cNvPr id="63" name="Text 61"/>
           <p:cNvSpPr txBox="1"/>
           <p:nvPr/>
         </p:nvSpPr>
@@ -20169,7 +20209,7 @@
       </p:sp>
       <p:sp>
         <p:nvSpPr>
-          <p:cNvPr id="62" name="Text 60"/>
+          <p:cNvPr id="64" name="Text 62"/>
           <p:cNvSpPr txBox="1"/>
           <p:nvPr/>
         </p:nvSpPr>
@@ -20208,7 +20248,7 @@
       </p:sp>
       <p:sp>
         <p:nvSpPr>
-          <p:cNvPr id="63" name="Text 61"/>
+          <p:cNvPr id="65" name="Text 63"/>
           <p:cNvSpPr txBox="1"/>
           <p:nvPr/>
         </p:nvSpPr>
@@ -20287,7 +20327,7 @@
       </p:sp>
       <p:sp>
         <p:nvSpPr>
-          <p:cNvPr id="64" name="Text 62"/>
+          <p:cNvPr id="66" name="Text 64"/>
           <p:cNvSpPr txBox="1"/>
           <p:nvPr/>
         </p:nvSpPr>
@@ -20326,7 +20366,7 @@
       </p:sp>
       <p:sp>
         <p:nvSpPr>
-          <p:cNvPr id="65" name="Shape 63"/>
+          <p:cNvPr id="67" name="Shape 65"/>
           <p:cNvSpPr/>
           <p:nvPr/>
         </p:nvSpPr>
@@ -20346,7 +20386,7 @@
       </p:sp>
       <p:sp>
         <p:nvSpPr>
-          <p:cNvPr id="66" name="Text 64"/>
+          <p:cNvPr id="68" name="Text 66"/>
           <p:cNvSpPr txBox="1"/>
           <p:nvPr/>
         </p:nvSpPr>
@@ -20385,7 +20425,7 @@
       </p:sp>
       <p:sp>
         <p:nvSpPr>
-          <p:cNvPr id="67" name="Text 65"/>
+          <p:cNvPr id="69" name="Text 67"/>
           <p:cNvSpPr txBox="1"/>
           <p:nvPr/>
         </p:nvSpPr>
@@ -20464,7 +20504,7 @@
       </p:sp>
       <p:sp>
         <p:nvSpPr>
-          <p:cNvPr id="68" name="Text 66"/>
+          <p:cNvPr id="70" name="Text 68"/>
           <p:cNvSpPr txBox="1"/>
           <p:nvPr/>
         </p:nvSpPr>
@@ -20503,7 +20543,7 @@
       </p:sp>
       <p:sp>
         <p:nvSpPr>
-          <p:cNvPr id="69" name="Shape 67"/>
+          <p:cNvPr id="71" name="Shape 69"/>
           <p:cNvSpPr/>
           <p:nvPr/>
         </p:nvSpPr>
@@ -20523,7 +20563,7 @@
       </p:sp>
       <p:sp>
         <p:nvSpPr>
-          <p:cNvPr id="70" name="Text 68"/>
+          <p:cNvPr id="72" name="Text 70"/>
           <p:cNvSpPr txBox="1"/>
           <p:nvPr/>
         </p:nvSpPr>

--- a/day2-deck/decks/Labor Mix - House Style.pptx
+++ b/day2-deck/decks/Labor Mix - House Style.pptx
@@ -17764,7 +17764,7 @@
                 <a:ea typeface="Inter" pitchFamily="34" charset="-122"/>
                 <a:cs typeface="Inter" pitchFamily="34" charset="-120"/>
               </a:rPr>
-              <a:t>Jan–Sep 2026 vs Jan–Sep 2025</a:t>
+              <a:t>Jan–Sep, this year vs last</a:t>
             </a:r>
             <a:endParaRPr lang="en-US" sz="1200" dirty="0"/>
           </a:p>
@@ -18727,7 +18727,7 @@
                 <a:ea typeface="Inter" pitchFamily="34" charset="-122"/>
                 <a:cs typeface="Inter" pitchFamily="34" charset="-120"/>
               </a:rPr>
-              <a:t>Jan–Sep 2026 vs Jan–Sep 2025</a:t>
+              <a:t>Jan–Sep, this year vs last</a:t>
             </a:r>
             <a:endParaRPr lang="en-US" sz="1200" dirty="0"/>
           </a:p>
@@ -19670,7 +19670,7 @@
                 <a:ea typeface="Inter" pitchFamily="34" charset="-122"/>
                 <a:cs typeface="Inter" pitchFamily="34" charset="-120"/>
               </a:rPr>
-              <a:t>Jul–Sep vs Jan–Mar 2026</a:t>
+              <a:t>Jul–Sep vs Jan–Mar this year</a:t>
             </a:r>
             <a:endParaRPr lang="en-US" sz="1200" dirty="0"/>
           </a:p>

--- a/day2-deck/decks/Labor Mix - House Style.pptx
+++ b/day2-deck/decks/Labor Mix - House Style.pptx
@@ -2465,7 +2465,7 @@
           <a:p>
             <a:r>
               <a:rPr lang="en-US" dirty="0"/>
-              <a:t>Source: Qlik - Closed Repair Orders. Labor sale by pay type, Jan-Sep by close month. Same-store, INEOS excluded. GMC Prescott body shop labor types excluded. Jan-Sep 2026 shares of labor sale; sorted by customer-pay share. Bar labels are percent of labor sale; every value is also listed here.
+              <a:t>Takeaway (off the slide): Customer pay is 52.5% of labor sale (52.8% in 2025), warranty 23.8%, internal 23.7%. Honda Spokane is most customer-pay at 70.3%.Source: Qlik - Closed Repair Orders. Labor sale by pay type, Jan-Sep by close month. Same-store, INEOS excluded. GMC Prescott body shop labor types excluded. Jan-Sep 2026 shares of labor sale; sorted by customer-pay share. Bar labels are percent of labor sale; every value is also listed here.
 HONDA SPOKANE: CP 70.3%, W 8.0%, I 21.6%
 TOYOTA SPOKANE: CP 65.3%, W 15.5%, I 19.2%
 TOYOTA FLAGSTAFF: CP 65.1%, W 11.2%, I 23.7%
@@ -2674,7 +2674,7 @@
           <a:p>
             <a:r>
               <a:rPr lang="en-US" dirty="0"/>
-              <a:t>Source: Qlik - Closed Repair Orders. Labor sale by pay type, Jan-Sep by close month. Same-store, INEOS excluded. GMC Prescott body shop labor types excluded. Change in Customer Pay Share of Labor Sale, Jan-Sep 2026 vs 2025, best first.</a:t>
+              <a:t>Takeaway (off the slide): 19 of 33 stores raised customer-pay share, led by Mazda at +10.8 pts to 56.6%. 14 declined; LR Reno fell most at −8.1 pts.Source: Qlik - Closed Repair Orders. Labor sale by pay type, Jan-Sep by close month. Same-store, INEOS excluded. GMC Prescott body shop labor types excluded. Change in Customer Pay Share of Labor Sale, Jan-Sep 2026 vs 2025, best first.</a:t>
             </a:r>
             <a:endParaRPr lang="en-US" dirty="0"/>
           </a:p>
@@ -2762,7 +2762,7 @@
           <a:p>
             <a:r>
               <a:rPr lang="en-US" dirty="0"/>
-              <a:t>Source: Qlik - Closed Repair Orders. Labor sale by pay type, Jan-Sep by close month. Same-store, INEOS excluded. GMC Prescott body shop labor types excluded. Customer-pay labor sale / total labor sale (customer pay + warranty + internal). Top and bottom five stores by change in Customer Pay Share of Labor Sale, Jan-Sep 2026 vs 2025. Moving now: Jul-Sep 2026 vs Jan-Mar 2026, each store against itself; the group moved −0.3 pts on the same basis, so part of every store's change is seasonal. Green bar at the right of a row: the store is on both the top five vs last year and the top five moving now.Conversation starter: each top store says one thing they started doing; each bottom store says what got in the way and what they would try. The room trades ideas. Moving now: ask the top three what they started this year.</a:t>
+              <a:t>Takeaway (off the slide): Ask Mazda, VW Henderson and Acura what changed. Ask LR Reno, Hyundai Prescott and Toyota Henderson what got in the way. Ask Lexus, Acura and Chevy GMC Bullhead what they started this year.Source: Qlik - Closed Repair Orders. Labor sale by pay type, Jan-Sep by close month. Same-store, INEOS excluded. GMC Prescott body shop labor types excluded. Customer-pay labor sale / total labor sale (customer pay + warranty + internal). Top and bottom five stores by change in Customer Pay Share of Labor Sale, Jan-Sep 2026 vs 2025. Moving now: Jul-Sep 2026 vs Jan-Mar 2026, each store against itself; the group moved −0.3 pts on the same basis, so part of every store's change is seasonal. Green bar at the right of a row: the store is on both the top five vs last year and the top five moving now.Conversation starter: each top store says one thing they started doing; each bottom store says what got in the way and what they would try. The room trades ideas. Moving now: ask the top three what they started this year.</a:t>
             </a:r>
             <a:endParaRPr lang="en-US" dirty="0"/>
           </a:p>
@@ -2971,7 +2971,7 @@
           <a:p>
             <a:r>
               <a:rPr lang="en-US" dirty="0"/>
-              <a:t>Source: Qlik - Closed Repair Orders. Customer-pay labor sale by op code description, Jan-Sep. Same-store, INEOS excluded. GMC Prescott body shop labor types excluded. Share of CP labor sale whose op code description matches neither the maintenance nor the repair rules, Jan-Sep 2026. Lower is better: green at or below the group, red above. Maintenance = descriptions naming oil and filter, rotation, brake pads, rotors and brake service, scheduled/interval/mileage service, OEM care plans, alignment, balance, fluid exchanges and flushes, fuel induction, transmission/differential/transfer case/coolant service, spark plugs, filters, wipers, multi-point inspection, timing belt, BG and refresh services, smog/emissions inspection, fluid services, tune-ups, tire promotions (buy 3 get 1), CVT, EGR, 4x4, AWD, intermediate and transmission services, and any coolant replacement or change. Repair = repair, replace, R&amp;R, diagnosis, leak, noise, inoperative, check engine, warning light, struts, shocks, alternator, starter, water pump, reseal, gasket, calibration, overhaul, engine light, drive belt, belt and hose kit. Descriptions that are only a placeholder (exactly MISC, DEFAULT, STANDARD, GENERAL, GENERAL REPAIR, CUSTOMER STATES, GENERAL CONCERN, ADD DESCRIPTION, TELL US MORE and similar) are left unclassified; a placeholder followed by real detail is classified by that detail.</a:t>
+              <a:t>Takeaway (off the slide): GMC Prescott can't classify 63.5% of its customer-pay labor from the description; Honda Henderson only 4.2%. Vague op code descriptions hide what the shop sells.Source: Qlik - Closed Repair Orders. Customer-pay labor sale by op code description, Jan-Sep. Same-store, INEOS excluded. GMC Prescott body shop labor types excluded. Share of CP labor sale whose op code description matches neither the maintenance nor the repair rules, Jan-Sep 2026. Lower is better: green at or below the group, red above. Maintenance = descriptions naming oil and filter, rotation, brake pads, rotors and brake service, scheduled/interval/mileage service, OEM care plans, alignment, balance, fluid exchanges and flushes, fuel induction, transmission/differential/transfer case/coolant service, spark plugs, filters, wipers, multi-point inspection, timing belt, BG and refresh services, smog/emissions inspection, fluid services, tune-ups, tire promotions (buy 3 get 1), CVT, EGR, 4x4, AWD, intermediate and transmission services, and any coolant replacement or change. Repair = repair, replace, R&amp;R, diagnosis, leak, noise, inoperative, check engine, warning light, struts, shocks, alternator, starter, water pump, reseal, gasket, calibration, overhaul, engine light, drive belt, belt and hose kit. Descriptions that are only a placeholder (exactly MISC, DEFAULT, STANDARD, GENERAL, GENERAL REPAIR, CUSTOMER STATES, GENERAL CONCERN, ADD DESCRIPTION, TELL US MORE and similar) are left unclassified; a placeholder followed by real detail is classified by that detail.</a:t>
             </a:r>
             <a:endParaRPr lang="en-US" dirty="0"/>
           </a:p>
@@ -3600,7 +3600,7 @@
         <p:spPr>
           <a:xfrm>
             <a:off x="457200" y="1207008"/>
-            <a:ext cx="11274552" cy="4782312"/>
+            <a:ext cx="11274552" cy="5148072"/>
           </a:xfrm>
           <a:prstGeom prst="rect">
             <a:avLst/>
@@ -4048,7 +4048,7 @@
         <p:spPr>
           <a:xfrm>
             <a:off x="658368" y="1828800"/>
-            <a:ext cx="2103120" cy="240971"/>
+            <a:ext cx="2103120" cy="262487"/>
           </a:xfrm>
           <a:prstGeom prst="rect">
             <a:avLst/>
@@ -4086,8 +4086,8 @@
         </p:nvSpPr>
         <p:spPr>
           <a:xfrm>
-            <a:off x="2807208" y="1857717"/>
-            <a:ext cx="2219218" cy="183138"/>
+            <a:off x="2807208" y="1860298"/>
+            <a:ext cx="2219218" cy="199490"/>
           </a:xfrm>
           <a:prstGeom prst="rect">
             <a:avLst/>
@@ -4111,8 +4111,8 @@
         </p:nvSpPr>
         <p:spPr>
           <a:xfrm>
-            <a:off x="2807208" y="1857717"/>
-            <a:ext cx="2219218" cy="183138"/>
+            <a:off x="2807208" y="1860298"/>
+            <a:ext cx="2219218" cy="199490"/>
           </a:xfrm>
           <a:prstGeom prst="rect">
             <a:avLst/>
@@ -4150,8 +4150,8 @@
         </p:nvSpPr>
         <p:spPr>
           <a:xfrm>
-            <a:off x="5026426" y="1857717"/>
-            <a:ext cx="252542" cy="183138"/>
+            <a:off x="5026426" y="1860298"/>
+            <a:ext cx="252542" cy="199490"/>
           </a:xfrm>
           <a:prstGeom prst="rect">
             <a:avLst/>
@@ -4175,8 +4175,8 @@
         </p:nvSpPr>
         <p:spPr>
           <a:xfrm>
-            <a:off x="5026426" y="1857717"/>
-            <a:ext cx="252542" cy="183138"/>
+            <a:off x="5026426" y="1860298"/>
+            <a:ext cx="252542" cy="199490"/>
           </a:xfrm>
           <a:prstGeom prst="rect">
             <a:avLst/>
@@ -4214,8 +4214,8 @@
         </p:nvSpPr>
         <p:spPr>
           <a:xfrm>
-            <a:off x="5278968" y="1857717"/>
-            <a:ext cx="682920" cy="183138"/>
+            <a:off x="5278968" y="1860298"/>
+            <a:ext cx="682920" cy="199490"/>
           </a:xfrm>
           <a:prstGeom prst="rect">
             <a:avLst/>
@@ -4239,8 +4239,8 @@
         </p:nvSpPr>
         <p:spPr>
           <a:xfrm>
-            <a:off x="5278968" y="1857717"/>
-            <a:ext cx="682920" cy="183138"/>
+            <a:off x="5278968" y="1860298"/>
+            <a:ext cx="682920" cy="199490"/>
           </a:xfrm>
           <a:prstGeom prst="rect">
             <a:avLst/>
@@ -4278,8 +4278,8 @@
         </p:nvSpPr>
         <p:spPr>
           <a:xfrm>
-            <a:off x="658368" y="2069771"/>
-            <a:ext cx="2103120" cy="240971"/>
+            <a:off x="658368" y="2091287"/>
+            <a:ext cx="2103120" cy="262487"/>
           </a:xfrm>
           <a:prstGeom prst="rect">
             <a:avLst/>
@@ -4317,8 +4317,8 @@
         </p:nvSpPr>
         <p:spPr>
           <a:xfrm>
-            <a:off x="2807208" y="2098688"/>
-            <a:ext cx="2060840" cy="183138"/>
+            <a:off x="2807208" y="2122785"/>
+            <a:ext cx="2060840" cy="199490"/>
           </a:xfrm>
           <a:prstGeom prst="rect">
             <a:avLst/>
@@ -4342,8 +4342,8 @@
         </p:nvSpPr>
         <p:spPr>
           <a:xfrm>
-            <a:off x="2807208" y="2098688"/>
-            <a:ext cx="2060840" cy="183138"/>
+            <a:off x="2807208" y="2122785"/>
+            <a:ext cx="2060840" cy="199490"/>
           </a:xfrm>
           <a:prstGeom prst="rect">
             <a:avLst/>
@@ -4381,8 +4381,8 @@
         </p:nvSpPr>
         <p:spPr>
           <a:xfrm>
-            <a:off x="4868048" y="2098688"/>
-            <a:ext cx="489573" cy="183138"/>
+            <a:off x="4868048" y="2122785"/>
+            <a:ext cx="489573" cy="199490"/>
           </a:xfrm>
           <a:prstGeom prst="rect">
             <a:avLst/>
@@ -4406,8 +4406,8 @@
         </p:nvSpPr>
         <p:spPr>
           <a:xfrm>
-            <a:off x="4868048" y="2098688"/>
-            <a:ext cx="489573" cy="183138"/>
+            <a:off x="4868048" y="2122785"/>
+            <a:ext cx="489573" cy="199490"/>
           </a:xfrm>
           <a:prstGeom prst="rect">
             <a:avLst/>
@@ -4445,8 +4445,8 @@
         </p:nvSpPr>
         <p:spPr>
           <a:xfrm>
-            <a:off x="5357621" y="2098688"/>
-            <a:ext cx="604267" cy="183138"/>
+            <a:off x="5357621" y="2122785"/>
+            <a:ext cx="604267" cy="199490"/>
           </a:xfrm>
           <a:prstGeom prst="rect">
             <a:avLst/>
@@ -4470,8 +4470,8 @@
         </p:nvSpPr>
         <p:spPr>
           <a:xfrm>
-            <a:off x="5357621" y="2098688"/>
-            <a:ext cx="604267" cy="183138"/>
+            <a:off x="5357621" y="2122785"/>
+            <a:ext cx="604267" cy="199490"/>
           </a:xfrm>
           <a:prstGeom prst="rect">
             <a:avLst/>
@@ -4509,8 +4509,8 @@
         </p:nvSpPr>
         <p:spPr>
           <a:xfrm>
-            <a:off x="658368" y="2310743"/>
-            <a:ext cx="2103120" cy="240971"/>
+            <a:off x="658368" y="2353773"/>
+            <a:ext cx="2103120" cy="262487"/>
           </a:xfrm>
           <a:prstGeom prst="rect">
             <a:avLst/>
@@ -4548,8 +4548,8 @@
         </p:nvSpPr>
         <p:spPr>
           <a:xfrm>
-            <a:off x="2807208" y="2339659"/>
-            <a:ext cx="2054762" cy="183138"/>
+            <a:off x="2807208" y="2385272"/>
+            <a:ext cx="2054762" cy="199490"/>
           </a:xfrm>
           <a:prstGeom prst="rect">
             <a:avLst/>
@@ -4573,8 +4573,8 @@
         </p:nvSpPr>
         <p:spPr>
           <a:xfrm>
-            <a:off x="2807208" y="2339659"/>
-            <a:ext cx="2054762" cy="183138"/>
+            <a:off x="2807208" y="2385272"/>
+            <a:ext cx="2054762" cy="199490"/>
           </a:xfrm>
           <a:prstGeom prst="rect">
             <a:avLst/>
@@ -4612,8 +4612,8 @@
         </p:nvSpPr>
         <p:spPr>
           <a:xfrm>
-            <a:off x="4861970" y="2339659"/>
-            <a:ext cx="352121" cy="183138"/>
+            <a:off x="4861970" y="2385272"/>
+            <a:ext cx="352121" cy="199490"/>
           </a:xfrm>
           <a:prstGeom prst="rect">
             <a:avLst/>
@@ -4637,8 +4637,8 @@
         </p:nvSpPr>
         <p:spPr>
           <a:xfrm>
-            <a:off x="4861970" y="2339659"/>
-            <a:ext cx="352121" cy="183138"/>
+            <a:off x="4861970" y="2385272"/>
+            <a:ext cx="352121" cy="199490"/>
           </a:xfrm>
           <a:prstGeom prst="rect">
             <a:avLst/>
@@ -4676,8 +4676,8 @@
         </p:nvSpPr>
         <p:spPr>
           <a:xfrm>
-            <a:off x="5214091" y="2339659"/>
-            <a:ext cx="747797" cy="183138"/>
+            <a:off x="5214091" y="2385272"/>
+            <a:ext cx="747797" cy="199490"/>
           </a:xfrm>
           <a:prstGeom prst="rect">
             <a:avLst/>
@@ -4701,8 +4701,8 @@
         </p:nvSpPr>
         <p:spPr>
           <a:xfrm>
-            <a:off x="5214091" y="2339659"/>
-            <a:ext cx="747797" cy="183138"/>
+            <a:off x="5214091" y="2385272"/>
+            <a:ext cx="747797" cy="199490"/>
           </a:xfrm>
           <a:prstGeom prst="rect">
             <a:avLst/>
@@ -4740,8 +4740,8 @@
         </p:nvSpPr>
         <p:spPr>
           <a:xfrm>
-            <a:off x="658368" y="2551714"/>
-            <a:ext cx="2103120" cy="240971"/>
+            <a:off x="658368" y="2616260"/>
+            <a:ext cx="2103120" cy="262487"/>
           </a:xfrm>
           <a:prstGeom prst="rect">
             <a:avLst/>
@@ -4779,8 +4779,8 @@
         </p:nvSpPr>
         <p:spPr>
           <a:xfrm>
-            <a:off x="2807208" y="2580630"/>
-            <a:ext cx="2053161" cy="183138"/>
+            <a:off x="2807208" y="2647758"/>
+            <a:ext cx="2053161" cy="199490"/>
           </a:xfrm>
           <a:prstGeom prst="rect">
             <a:avLst/>
@@ -4804,8 +4804,8 @@
         </p:nvSpPr>
         <p:spPr>
           <a:xfrm>
-            <a:off x="2807208" y="2580630"/>
-            <a:ext cx="2053161" cy="183138"/>
+            <a:off x="2807208" y="2647758"/>
+            <a:ext cx="2053161" cy="199490"/>
           </a:xfrm>
           <a:prstGeom prst="rect">
             <a:avLst/>
@@ -4843,8 +4843,8 @@
         </p:nvSpPr>
         <p:spPr>
           <a:xfrm>
-            <a:off x="4860369" y="2580630"/>
-            <a:ext cx="375876" cy="183138"/>
+            <a:off x="4860369" y="2647758"/>
+            <a:ext cx="375876" cy="199490"/>
           </a:xfrm>
           <a:prstGeom prst="rect">
             <a:avLst/>
@@ -4868,8 +4868,8 @@
         </p:nvSpPr>
         <p:spPr>
           <a:xfrm>
-            <a:off x="4860369" y="2580630"/>
-            <a:ext cx="375876" cy="183138"/>
+            <a:off x="4860369" y="2647758"/>
+            <a:ext cx="375876" cy="199490"/>
           </a:xfrm>
           <a:prstGeom prst="rect">
             <a:avLst/>
@@ -4907,8 +4907,8 @@
         </p:nvSpPr>
         <p:spPr>
           <a:xfrm>
-            <a:off x="5236245" y="2580630"/>
-            <a:ext cx="725643" cy="183138"/>
+            <a:off x="5236245" y="2647758"/>
+            <a:ext cx="725643" cy="199490"/>
           </a:xfrm>
           <a:prstGeom prst="rect">
             <a:avLst/>
@@ -4932,8 +4932,8 @@
         </p:nvSpPr>
         <p:spPr>
           <a:xfrm>
-            <a:off x="5236245" y="2580630"/>
-            <a:ext cx="725643" cy="183138"/>
+            <a:off x="5236245" y="2647758"/>
+            <a:ext cx="725643" cy="199490"/>
           </a:xfrm>
           <a:prstGeom prst="rect">
             <a:avLst/>
@@ -4971,8 +4971,8 @@
         </p:nvSpPr>
         <p:spPr>
           <a:xfrm>
-            <a:off x="658368" y="2792685"/>
-            <a:ext cx="2103120" cy="240971"/>
+            <a:off x="658368" y="2878746"/>
+            <a:ext cx="2103120" cy="262487"/>
           </a:xfrm>
           <a:prstGeom prst="rect">
             <a:avLst/>
@@ -5010,8 +5010,8 @@
         </p:nvSpPr>
         <p:spPr>
           <a:xfrm>
-            <a:off x="2807208" y="2821602"/>
-            <a:ext cx="2046848" cy="183138"/>
+            <a:off x="2807208" y="2910245"/>
+            <a:ext cx="2046848" cy="199490"/>
           </a:xfrm>
           <a:prstGeom prst="rect">
             <a:avLst/>
@@ -5035,8 +5035,8 @@
         </p:nvSpPr>
         <p:spPr>
           <a:xfrm>
-            <a:off x="2807208" y="2821602"/>
-            <a:ext cx="2046848" cy="183138"/>
+            <a:off x="2807208" y="2910245"/>
+            <a:ext cx="2046848" cy="199490"/>
           </a:xfrm>
           <a:prstGeom prst="rect">
             <a:avLst/>
@@ -5074,8 +5074,8 @@
         </p:nvSpPr>
         <p:spPr>
           <a:xfrm>
-            <a:off x="4854056" y="2821602"/>
-            <a:ext cx="793865" cy="183138"/>
+            <a:off x="4854056" y="2910245"/>
+            <a:ext cx="793865" cy="199490"/>
           </a:xfrm>
           <a:prstGeom prst="rect">
             <a:avLst/>
@@ -5099,8 +5099,8 @@
         </p:nvSpPr>
         <p:spPr>
           <a:xfrm>
-            <a:off x="4854056" y="2821602"/>
-            <a:ext cx="793865" cy="183138"/>
+            <a:off x="4854056" y="2910245"/>
+            <a:ext cx="793865" cy="199490"/>
           </a:xfrm>
           <a:prstGeom prst="rect">
             <a:avLst/>
@@ -5138,8 +5138,8 @@
         </p:nvSpPr>
         <p:spPr>
           <a:xfrm>
-            <a:off x="5647921" y="2821602"/>
-            <a:ext cx="313967" cy="183138"/>
+            <a:off x="5647921" y="2910245"/>
+            <a:ext cx="313967" cy="199490"/>
           </a:xfrm>
           <a:prstGeom prst="rect">
             <a:avLst/>
@@ -5163,8 +5163,8 @@
         </p:nvSpPr>
         <p:spPr>
           <a:xfrm>
-            <a:off x="5647921" y="2821602"/>
-            <a:ext cx="313967" cy="183138"/>
+            <a:off x="5647921" y="2910245"/>
+            <a:ext cx="313967" cy="199490"/>
           </a:xfrm>
           <a:prstGeom prst="rect">
             <a:avLst/>
@@ -5202,8 +5202,8 @@
         </p:nvSpPr>
         <p:spPr>
           <a:xfrm>
-            <a:off x="658368" y="3033656"/>
-            <a:ext cx="2103120" cy="240971"/>
+            <a:off x="658368" y="3141233"/>
+            <a:ext cx="2103120" cy="262487"/>
           </a:xfrm>
           <a:prstGeom prst="rect">
             <a:avLst/>
@@ -5241,8 +5241,8 @@
         </p:nvSpPr>
         <p:spPr>
           <a:xfrm>
-            <a:off x="2807208" y="3062573"/>
-            <a:ext cx="1985155" cy="183138"/>
+            <a:off x="2807208" y="3172731"/>
+            <a:ext cx="1985155" cy="199490"/>
           </a:xfrm>
           <a:prstGeom prst="rect">
             <a:avLst/>
@@ -5266,8 +5266,8 @@
         </p:nvSpPr>
         <p:spPr>
           <a:xfrm>
-            <a:off x="2807208" y="3062573"/>
-            <a:ext cx="1985155" cy="183138"/>
+            <a:off x="2807208" y="3172731"/>
+            <a:ext cx="1985155" cy="199490"/>
           </a:xfrm>
           <a:prstGeom prst="rect">
             <a:avLst/>
@@ -5305,8 +5305,8 @@
         </p:nvSpPr>
         <p:spPr>
           <a:xfrm>
-            <a:off x="4792363" y="3062573"/>
-            <a:ext cx="729180" cy="183138"/>
+            <a:off x="4792363" y="3172731"/>
+            <a:ext cx="729180" cy="199490"/>
           </a:xfrm>
           <a:prstGeom prst="rect">
             <a:avLst/>
@@ -5330,8 +5330,8 @@
         </p:nvSpPr>
         <p:spPr>
           <a:xfrm>
-            <a:off x="4792363" y="3062573"/>
-            <a:ext cx="729180" cy="183138"/>
+            <a:off x="4792363" y="3172731"/>
+            <a:ext cx="729180" cy="199490"/>
           </a:xfrm>
           <a:prstGeom prst="rect">
             <a:avLst/>
@@ -5369,8 +5369,8 @@
         </p:nvSpPr>
         <p:spPr>
           <a:xfrm>
-            <a:off x="5521542" y="3062573"/>
-            <a:ext cx="440346" cy="183138"/>
+            <a:off x="5521542" y="3172731"/>
+            <a:ext cx="440346" cy="199490"/>
           </a:xfrm>
           <a:prstGeom prst="rect">
             <a:avLst/>
@@ -5394,8 +5394,8 @@
         </p:nvSpPr>
         <p:spPr>
           <a:xfrm>
-            <a:off x="5521542" y="3062573"/>
-            <a:ext cx="440346" cy="183138"/>
+            <a:off x="5521542" y="3172731"/>
+            <a:ext cx="440346" cy="199490"/>
           </a:xfrm>
           <a:prstGeom prst="rect">
             <a:avLst/>
@@ -5433,8 +5433,8 @@
         </p:nvSpPr>
         <p:spPr>
           <a:xfrm>
-            <a:off x="658368" y="3274628"/>
-            <a:ext cx="2103120" cy="240971"/>
+            <a:off x="658368" y="3403720"/>
+            <a:ext cx="2103120" cy="262487"/>
           </a:xfrm>
           <a:prstGeom prst="rect">
             <a:avLst/>
@@ -5472,8 +5472,8 @@
         </p:nvSpPr>
         <p:spPr>
           <a:xfrm>
-            <a:off x="2807208" y="3303544"/>
-            <a:ext cx="1940199" cy="183138"/>
+            <a:off x="2807208" y="3435218"/>
+            <a:ext cx="1940199" cy="199490"/>
           </a:xfrm>
           <a:prstGeom prst="rect">
             <a:avLst/>
@@ -5497,8 +5497,8 @@
         </p:nvSpPr>
         <p:spPr>
           <a:xfrm>
-            <a:off x="2807208" y="3303544"/>
-            <a:ext cx="1940199" cy="183138"/>
+            <a:off x="2807208" y="3435218"/>
+            <a:ext cx="1940199" cy="199490"/>
           </a:xfrm>
           <a:prstGeom prst="rect">
             <a:avLst/>
@@ -5536,8 +5536,8 @@
         </p:nvSpPr>
         <p:spPr>
           <a:xfrm>
-            <a:off x="4747407" y="3303544"/>
-            <a:ext cx="542990" cy="183138"/>
+            <a:off x="4747407" y="3435218"/>
+            <a:ext cx="542990" cy="199490"/>
           </a:xfrm>
           <a:prstGeom prst="rect">
             <a:avLst/>
@@ -5561,8 +5561,8 @@
         </p:nvSpPr>
         <p:spPr>
           <a:xfrm>
-            <a:off x="4747407" y="3303544"/>
-            <a:ext cx="542990" cy="183138"/>
+            <a:off x="4747407" y="3435218"/>
+            <a:ext cx="542990" cy="199490"/>
           </a:xfrm>
           <a:prstGeom prst="rect">
             <a:avLst/>
@@ -5600,8 +5600,8 @@
         </p:nvSpPr>
         <p:spPr>
           <a:xfrm>
-            <a:off x="5290397" y="3303544"/>
-            <a:ext cx="671491" cy="183138"/>
+            <a:off x="5290397" y="3435218"/>
+            <a:ext cx="671491" cy="199490"/>
           </a:xfrm>
           <a:prstGeom prst="rect">
             <a:avLst/>
@@ -5625,8 +5625,8 @@
         </p:nvSpPr>
         <p:spPr>
           <a:xfrm>
-            <a:off x="5290397" y="3303544"/>
-            <a:ext cx="671491" cy="183138"/>
+            <a:off x="5290397" y="3435218"/>
+            <a:ext cx="671491" cy="199490"/>
           </a:xfrm>
           <a:prstGeom prst="rect">
             <a:avLst/>
@@ -5664,8 +5664,8 @@
         </p:nvSpPr>
         <p:spPr>
           <a:xfrm>
-            <a:off x="658368" y="3515599"/>
-            <a:ext cx="2103120" cy="240971"/>
+            <a:off x="658368" y="3666206"/>
+            <a:ext cx="2103120" cy="262487"/>
           </a:xfrm>
           <a:prstGeom prst="rect">
             <a:avLst/>
@@ -5703,8 +5703,8 @@
         </p:nvSpPr>
         <p:spPr>
           <a:xfrm>
-            <a:off x="2807208" y="3544516"/>
-            <a:ext cx="1907392" cy="183138"/>
+            <a:off x="2807208" y="3697705"/>
+            <a:ext cx="1907392" cy="199490"/>
           </a:xfrm>
           <a:prstGeom prst="rect">
             <a:avLst/>
@@ -5728,8 +5728,8 @@
         </p:nvSpPr>
         <p:spPr>
           <a:xfrm>
-            <a:off x="2807208" y="3544516"/>
-            <a:ext cx="1907392" cy="183138"/>
+            <a:off x="2807208" y="3697705"/>
+            <a:ext cx="1907392" cy="199490"/>
           </a:xfrm>
           <a:prstGeom prst="rect">
             <a:avLst/>
@@ -5767,8 +5767,8 @@
         </p:nvSpPr>
         <p:spPr>
           <a:xfrm>
-            <a:off x="4714600" y="3544516"/>
-            <a:ext cx="434501" cy="183138"/>
+            <a:off x="4714600" y="3697705"/>
+            <a:ext cx="434501" cy="199490"/>
           </a:xfrm>
           <a:prstGeom prst="rect">
             <a:avLst/>
@@ -5792,8 +5792,8 @@
         </p:nvSpPr>
         <p:spPr>
           <a:xfrm>
-            <a:off x="4714600" y="3544516"/>
-            <a:ext cx="434501" cy="183138"/>
+            <a:off x="4714600" y="3697705"/>
+            <a:ext cx="434501" cy="199490"/>
           </a:xfrm>
           <a:prstGeom prst="rect">
             <a:avLst/>
@@ -5831,8 +5831,8 @@
         </p:nvSpPr>
         <p:spPr>
           <a:xfrm>
-            <a:off x="5149102" y="3544516"/>
-            <a:ext cx="812786" cy="183138"/>
+            <a:off x="5149102" y="3697705"/>
+            <a:ext cx="812786" cy="199490"/>
           </a:xfrm>
           <a:prstGeom prst="rect">
             <a:avLst/>
@@ -5856,8 +5856,8 @@
         </p:nvSpPr>
         <p:spPr>
           <a:xfrm>
-            <a:off x="5149102" y="3544516"/>
-            <a:ext cx="812786" cy="183138"/>
+            <a:off x="5149102" y="3697705"/>
+            <a:ext cx="812786" cy="199490"/>
           </a:xfrm>
           <a:prstGeom prst="rect">
             <a:avLst/>
@@ -5895,8 +5895,8 @@
         </p:nvSpPr>
         <p:spPr>
           <a:xfrm>
-            <a:off x="658368" y="3756570"/>
-            <a:ext cx="2103120" cy="240971"/>
+            <a:off x="658368" y="3928693"/>
+            <a:ext cx="2103120" cy="262487"/>
           </a:xfrm>
           <a:prstGeom prst="rect">
             <a:avLst/>
@@ -5934,8 +5934,8 @@
         </p:nvSpPr>
         <p:spPr>
           <a:xfrm>
-            <a:off x="2807208" y="3785487"/>
-            <a:ext cx="1883011" cy="183138"/>
+            <a:off x="2807208" y="3960191"/>
+            <a:ext cx="1883011" cy="199490"/>
           </a:xfrm>
           <a:prstGeom prst="rect">
             <a:avLst/>
@@ -5959,8 +5959,8 @@
         </p:nvSpPr>
         <p:spPr>
           <a:xfrm>
-            <a:off x="2807208" y="3785487"/>
-            <a:ext cx="1883011" cy="183138"/>
+            <a:off x="2807208" y="3960191"/>
+            <a:ext cx="1883011" cy="199490"/>
           </a:xfrm>
           <a:prstGeom prst="rect">
             <a:avLst/>
@@ -5998,8 +5998,8 @@
         </p:nvSpPr>
         <p:spPr>
           <a:xfrm>
-            <a:off x="4690219" y="3785487"/>
-            <a:ext cx="918142" cy="183138"/>
+            <a:off x="4690219" y="3960191"/>
+            <a:ext cx="918142" cy="199490"/>
           </a:xfrm>
           <a:prstGeom prst="rect">
             <a:avLst/>
@@ -6023,8 +6023,8 @@
         </p:nvSpPr>
         <p:spPr>
           <a:xfrm>
-            <a:off x="4690219" y="3785487"/>
-            <a:ext cx="918142" cy="183138"/>
+            <a:off x="4690219" y="3960191"/>
+            <a:ext cx="918142" cy="199490"/>
           </a:xfrm>
           <a:prstGeom prst="rect">
             <a:avLst/>
@@ -6062,8 +6062,8 @@
         </p:nvSpPr>
         <p:spPr>
           <a:xfrm>
-            <a:off x="5608361" y="3785487"/>
-            <a:ext cx="353527" cy="183138"/>
+            <a:off x="5608361" y="3960191"/>
+            <a:ext cx="353527" cy="199490"/>
           </a:xfrm>
           <a:prstGeom prst="rect">
             <a:avLst/>
@@ -6087,8 +6087,8 @@
         </p:nvSpPr>
         <p:spPr>
           <a:xfrm>
-            <a:off x="5608361" y="3785487"/>
-            <a:ext cx="353527" cy="183138"/>
+            <a:off x="5608361" y="3960191"/>
+            <a:ext cx="353527" cy="199490"/>
           </a:xfrm>
           <a:prstGeom prst="rect">
             <a:avLst/>
@@ -6126,8 +6126,8 @@
         </p:nvSpPr>
         <p:spPr>
           <a:xfrm>
-            <a:off x="658368" y="3997542"/>
-            <a:ext cx="2103120" cy="240971"/>
+            <a:off x="658368" y="4191179"/>
+            <a:ext cx="2103120" cy="262487"/>
           </a:xfrm>
           <a:prstGeom prst="rect">
             <a:avLst/>
@@ -6165,8 +6165,8 @@
         </p:nvSpPr>
         <p:spPr>
           <a:xfrm>
-            <a:off x="2807208" y="4026458"/>
-            <a:ext cx="1876032" cy="183138"/>
+            <a:off x="2807208" y="4222678"/>
+            <a:ext cx="1876032" cy="199490"/>
           </a:xfrm>
           <a:prstGeom prst="rect">
             <a:avLst/>
@@ -6190,8 +6190,8 @@
         </p:nvSpPr>
         <p:spPr>
           <a:xfrm>
-            <a:off x="2807208" y="4026458"/>
-            <a:ext cx="1876032" cy="183138"/>
+            <a:off x="2807208" y="4222678"/>
+            <a:ext cx="1876032" cy="199490"/>
           </a:xfrm>
           <a:prstGeom prst="rect">
             <a:avLst/>
@@ -6229,8 +6229,8 @@
         </p:nvSpPr>
         <p:spPr>
           <a:xfrm>
-            <a:off x="4683240" y="4026458"/>
-            <a:ext cx="744656" cy="183138"/>
+            <a:off x="4683240" y="4222678"/>
+            <a:ext cx="744656" cy="199490"/>
           </a:xfrm>
           <a:prstGeom prst="rect">
             <a:avLst/>
@@ -6254,8 +6254,8 @@
         </p:nvSpPr>
         <p:spPr>
           <a:xfrm>
-            <a:off x="4683240" y="4026458"/>
-            <a:ext cx="744656" cy="183138"/>
+            <a:off x="4683240" y="4222678"/>
+            <a:ext cx="744656" cy="199490"/>
           </a:xfrm>
           <a:prstGeom prst="rect">
             <a:avLst/>
@@ -6293,8 +6293,8 @@
         </p:nvSpPr>
         <p:spPr>
           <a:xfrm>
-            <a:off x="5427896" y="4026458"/>
-            <a:ext cx="533992" cy="183138"/>
+            <a:off x="5427896" y="4222678"/>
+            <a:ext cx="533992" cy="199490"/>
           </a:xfrm>
           <a:prstGeom prst="rect">
             <a:avLst/>
@@ -6318,8 +6318,8 @@
         </p:nvSpPr>
         <p:spPr>
           <a:xfrm>
-            <a:off x="5427896" y="4026458"/>
-            <a:ext cx="533992" cy="183138"/>
+            <a:off x="5427896" y="4222678"/>
+            <a:ext cx="533992" cy="199490"/>
           </a:xfrm>
           <a:prstGeom prst="rect">
             <a:avLst/>
@@ -6357,8 +6357,8 @@
         </p:nvSpPr>
         <p:spPr>
           <a:xfrm>
-            <a:off x="658368" y="4238513"/>
-            <a:ext cx="2103120" cy="240971"/>
+            <a:off x="658368" y="4453666"/>
+            <a:ext cx="2103120" cy="262487"/>
           </a:xfrm>
           <a:prstGeom prst="rect">
             <a:avLst/>
@@ -6396,8 +6396,8 @@
         </p:nvSpPr>
         <p:spPr>
           <a:xfrm>
-            <a:off x="2807208" y="4267429"/>
-            <a:ext cx="1874405" cy="183138"/>
+            <a:off x="2807208" y="4485164"/>
+            <a:ext cx="1874405" cy="199490"/>
           </a:xfrm>
           <a:prstGeom prst="rect">
             <a:avLst/>
@@ -6421,8 +6421,8 @@
         </p:nvSpPr>
         <p:spPr>
           <a:xfrm>
-            <a:off x="2807208" y="4267429"/>
-            <a:ext cx="1874405" cy="183138"/>
+            <a:off x="2807208" y="4485164"/>
+            <a:ext cx="1874405" cy="199490"/>
           </a:xfrm>
           <a:prstGeom prst="rect">
             <a:avLst/>
@@ -6460,8 +6460,8 @@
         </p:nvSpPr>
         <p:spPr>
           <a:xfrm>
-            <a:off x="4681613" y="4267429"/>
-            <a:ext cx="558160" cy="183138"/>
+            <a:off x="4681613" y="4485164"/>
+            <a:ext cx="558160" cy="199490"/>
           </a:xfrm>
           <a:prstGeom prst="rect">
             <a:avLst/>
@@ -6485,8 +6485,8 @@
         </p:nvSpPr>
         <p:spPr>
           <a:xfrm>
-            <a:off x="4681613" y="4267429"/>
-            <a:ext cx="558160" cy="183138"/>
+            <a:off x="4681613" y="4485164"/>
+            <a:ext cx="558160" cy="199490"/>
           </a:xfrm>
           <a:prstGeom prst="rect">
             <a:avLst/>
@@ -6524,8 +6524,8 @@
         </p:nvSpPr>
         <p:spPr>
           <a:xfrm>
-            <a:off x="5239773" y="4267429"/>
-            <a:ext cx="722115" cy="183138"/>
+            <a:off x="5239773" y="4485164"/>
+            <a:ext cx="722115" cy="199490"/>
           </a:xfrm>
           <a:prstGeom prst="rect">
             <a:avLst/>
@@ -6549,8 +6549,8 @@
         </p:nvSpPr>
         <p:spPr>
           <a:xfrm>
-            <a:off x="5239773" y="4267429"/>
-            <a:ext cx="722115" cy="183138"/>
+            <a:off x="5239773" y="4485164"/>
+            <a:ext cx="722115" cy="199490"/>
           </a:xfrm>
           <a:prstGeom prst="rect">
             <a:avLst/>
@@ -6588,8 +6588,8 @@
         </p:nvSpPr>
         <p:spPr>
           <a:xfrm>
-            <a:off x="658368" y="4479484"/>
-            <a:ext cx="2103120" cy="240971"/>
+            <a:off x="658368" y="4716152"/>
+            <a:ext cx="2103120" cy="262487"/>
           </a:xfrm>
           <a:prstGeom prst="rect">
             <a:avLst/>
@@ -6627,8 +6627,8 @@
         </p:nvSpPr>
         <p:spPr>
           <a:xfrm>
-            <a:off x="2807208" y="4508401"/>
-            <a:ext cx="1862814" cy="183138"/>
+            <a:off x="2807208" y="4747651"/>
+            <a:ext cx="1862814" cy="199490"/>
           </a:xfrm>
           <a:prstGeom prst="rect">
             <a:avLst/>
@@ -6652,8 +6652,8 @@
         </p:nvSpPr>
         <p:spPr>
           <a:xfrm>
-            <a:off x="2807208" y="4508401"/>
-            <a:ext cx="1862814" cy="183138"/>
+            <a:off x="2807208" y="4747651"/>
+            <a:ext cx="1862814" cy="199490"/>
           </a:xfrm>
           <a:prstGeom prst="rect">
             <a:avLst/>
@@ -6691,8 +6691,8 @@
         </p:nvSpPr>
         <p:spPr>
           <a:xfrm>
-            <a:off x="4670022" y="4508401"/>
-            <a:ext cx="740644" cy="183138"/>
+            <a:off x="4670022" y="4747651"/>
+            <a:ext cx="740644" cy="199490"/>
           </a:xfrm>
           <a:prstGeom prst="rect">
             <a:avLst/>
@@ -6716,8 +6716,8 @@
         </p:nvSpPr>
         <p:spPr>
           <a:xfrm>
-            <a:off x="4670022" y="4508401"/>
-            <a:ext cx="740644" cy="183138"/>
+            <a:off x="4670022" y="4747651"/>
+            <a:ext cx="740644" cy="199490"/>
           </a:xfrm>
           <a:prstGeom prst="rect">
             <a:avLst/>
@@ -6755,8 +6755,8 @@
         </p:nvSpPr>
         <p:spPr>
           <a:xfrm>
-            <a:off x="5410666" y="4508401"/>
-            <a:ext cx="551222" cy="183138"/>
+            <a:off x="5410666" y="4747651"/>
+            <a:ext cx="551222" cy="199490"/>
           </a:xfrm>
           <a:prstGeom prst="rect">
             <a:avLst/>
@@ -6780,8 +6780,8 @@
         </p:nvSpPr>
         <p:spPr>
           <a:xfrm>
-            <a:off x="5410666" y="4508401"/>
-            <a:ext cx="551222" cy="183138"/>
+            <a:off x="5410666" y="4747651"/>
+            <a:ext cx="551222" cy="199490"/>
           </a:xfrm>
           <a:prstGeom prst="rect">
             <a:avLst/>
@@ -6819,8 +6819,8 @@
         </p:nvSpPr>
         <p:spPr>
           <a:xfrm>
-            <a:off x="658368" y="4720456"/>
-            <a:ext cx="2103120" cy="240971"/>
+            <a:off x="658368" y="4978639"/>
+            <a:ext cx="2103120" cy="262487"/>
           </a:xfrm>
           <a:prstGeom prst="rect">
             <a:avLst/>
@@ -6858,8 +6858,8 @@
         </p:nvSpPr>
         <p:spPr>
           <a:xfrm>
-            <a:off x="2807208" y="4749372"/>
-            <a:ext cx="1831119" cy="183138"/>
+            <a:off x="2807208" y="5010137"/>
+            <a:ext cx="1831119" cy="199490"/>
           </a:xfrm>
           <a:prstGeom prst="rect">
             <a:avLst/>
@@ -6883,8 +6883,8 @@
         </p:nvSpPr>
         <p:spPr>
           <a:xfrm>
-            <a:off x="2807208" y="4749372"/>
-            <a:ext cx="1831119" cy="183138"/>
+            <a:off x="2807208" y="5010137"/>
+            <a:ext cx="1831119" cy="199490"/>
           </a:xfrm>
           <a:prstGeom prst="rect">
             <a:avLst/>
@@ -6922,8 +6922,8 @@
         </p:nvSpPr>
         <p:spPr>
           <a:xfrm>
-            <a:off x="4638327" y="4749372"/>
-            <a:ext cx="764127" cy="183138"/>
+            <a:off x="4638327" y="5010137"/>
+            <a:ext cx="764127" cy="199490"/>
           </a:xfrm>
           <a:prstGeom prst="rect">
             <a:avLst/>
@@ -6947,8 +6947,8 @@
         </p:nvSpPr>
         <p:spPr>
           <a:xfrm>
-            <a:off x="4638327" y="4749372"/>
-            <a:ext cx="764127" cy="183138"/>
+            <a:off x="4638327" y="5010137"/>
+            <a:ext cx="764127" cy="199490"/>
           </a:xfrm>
           <a:prstGeom prst="rect">
             <a:avLst/>
@@ -6986,8 +6986,8 @@
         </p:nvSpPr>
         <p:spPr>
           <a:xfrm>
-            <a:off x="5402455" y="4749372"/>
-            <a:ext cx="559433" cy="183138"/>
+            <a:off x="5402455" y="5010137"/>
+            <a:ext cx="559433" cy="199490"/>
           </a:xfrm>
           <a:prstGeom prst="rect">
             <a:avLst/>
@@ -7011,8 +7011,8 @@
         </p:nvSpPr>
         <p:spPr>
           <a:xfrm>
-            <a:off x="5402455" y="4749372"/>
-            <a:ext cx="559433" cy="183138"/>
+            <a:off x="5402455" y="5010137"/>
+            <a:ext cx="559433" cy="199490"/>
           </a:xfrm>
           <a:prstGeom prst="rect">
             <a:avLst/>
@@ -7050,8 +7050,8 @@
         </p:nvSpPr>
         <p:spPr>
           <a:xfrm>
-            <a:off x="658368" y="4961427"/>
-            <a:ext cx="2103120" cy="240971"/>
+            <a:off x="658368" y="5241126"/>
+            <a:ext cx="2103120" cy="262487"/>
           </a:xfrm>
           <a:prstGeom prst="rect">
             <a:avLst/>
@@ -7089,8 +7089,8 @@
         </p:nvSpPr>
         <p:spPr>
           <a:xfrm>
-            <a:off x="2807208" y="4990343"/>
-            <a:ext cx="1825486" cy="183138"/>
+            <a:off x="2807208" y="5272624"/>
+            <a:ext cx="1825486" cy="199490"/>
           </a:xfrm>
           <a:prstGeom prst="rect">
             <a:avLst/>
@@ -7114,8 +7114,8 @@
         </p:nvSpPr>
         <p:spPr>
           <a:xfrm>
-            <a:off x="2807208" y="4990343"/>
-            <a:ext cx="1825486" cy="183138"/>
+            <a:off x="2807208" y="5272624"/>
+            <a:ext cx="1825486" cy="199490"/>
           </a:xfrm>
           <a:prstGeom prst="rect">
             <a:avLst/>
@@ -7153,8 +7153,8 @@
         </p:nvSpPr>
         <p:spPr>
           <a:xfrm>
-            <a:off x="4632694" y="4990343"/>
-            <a:ext cx="426634" cy="183138"/>
+            <a:off x="4632694" y="5272624"/>
+            <a:ext cx="426634" cy="199490"/>
           </a:xfrm>
           <a:prstGeom prst="rect">
             <a:avLst/>
@@ -7178,8 +7178,8 @@
         </p:nvSpPr>
         <p:spPr>
           <a:xfrm>
-            <a:off x="4632694" y="4990343"/>
-            <a:ext cx="426634" cy="183138"/>
+            <a:off x="4632694" y="5272624"/>
+            <a:ext cx="426634" cy="199490"/>
           </a:xfrm>
           <a:prstGeom prst="rect">
             <a:avLst/>
@@ -7217,8 +7217,8 @@
         </p:nvSpPr>
         <p:spPr>
           <a:xfrm>
-            <a:off x="5059328" y="4990343"/>
-            <a:ext cx="902560" cy="183138"/>
+            <a:off x="5059328" y="5272624"/>
+            <a:ext cx="902560" cy="199490"/>
           </a:xfrm>
           <a:prstGeom prst="rect">
             <a:avLst/>
@@ -7242,8 +7242,8 @@
         </p:nvSpPr>
         <p:spPr>
           <a:xfrm>
-            <a:off x="5059328" y="4990343"/>
-            <a:ext cx="902560" cy="183138"/>
+            <a:off x="5059328" y="5272624"/>
+            <a:ext cx="902560" cy="199490"/>
           </a:xfrm>
           <a:prstGeom prst="rect">
             <a:avLst/>
@@ -7281,8 +7281,8 @@
         </p:nvSpPr>
         <p:spPr>
           <a:xfrm>
-            <a:off x="658368" y="5202398"/>
-            <a:ext cx="2103120" cy="240971"/>
+            <a:off x="658368" y="5503612"/>
+            <a:ext cx="2103120" cy="262487"/>
           </a:xfrm>
           <a:prstGeom prst="rect">
             <a:avLst/>
@@ -7320,8 +7320,8 @@
         </p:nvSpPr>
         <p:spPr>
           <a:xfrm>
-            <a:off x="2807208" y="5231315"/>
-            <a:ext cx="1807555" cy="183138"/>
+            <a:off x="2807208" y="5535111"/>
+            <a:ext cx="1807555" cy="199490"/>
           </a:xfrm>
           <a:prstGeom prst="rect">
             <a:avLst/>
@@ -7345,8 +7345,8 @@
         </p:nvSpPr>
         <p:spPr>
           <a:xfrm>
-            <a:off x="2807208" y="5231315"/>
-            <a:ext cx="1807555" cy="183138"/>
+            <a:off x="2807208" y="5535111"/>
+            <a:ext cx="1807555" cy="199490"/>
           </a:xfrm>
           <a:prstGeom prst="rect">
             <a:avLst/>
@@ -7384,8 +7384,8 @@
         </p:nvSpPr>
         <p:spPr>
           <a:xfrm>
-            <a:off x="4614763" y="5231315"/>
-            <a:ext cx="466810" cy="183138"/>
+            <a:off x="4614763" y="5535111"/>
+            <a:ext cx="466810" cy="199490"/>
           </a:xfrm>
           <a:prstGeom prst="rect">
             <a:avLst/>
@@ -7409,8 +7409,8 @@
         </p:nvSpPr>
         <p:spPr>
           <a:xfrm>
-            <a:off x="4614763" y="5231315"/>
-            <a:ext cx="466810" cy="183138"/>
+            <a:off x="4614763" y="5535111"/>
+            <a:ext cx="466810" cy="199490"/>
           </a:xfrm>
           <a:prstGeom prst="rect">
             <a:avLst/>
@@ -7448,8 +7448,8 @@
         </p:nvSpPr>
         <p:spPr>
           <a:xfrm>
-            <a:off x="5081573" y="5231315"/>
-            <a:ext cx="880315" cy="183138"/>
+            <a:off x="5081573" y="5535111"/>
+            <a:ext cx="880315" cy="199490"/>
           </a:xfrm>
           <a:prstGeom prst="rect">
             <a:avLst/>
@@ -7473,8 +7473,8 @@
         </p:nvSpPr>
         <p:spPr>
           <a:xfrm>
-            <a:off x="5081573" y="5231315"/>
-            <a:ext cx="880315" cy="183138"/>
+            <a:off x="5081573" y="5535111"/>
+            <a:ext cx="880315" cy="199490"/>
           </a:xfrm>
           <a:prstGeom prst="rect">
             <a:avLst/>
@@ -7512,8 +7512,8 @@
         </p:nvSpPr>
         <p:spPr>
           <a:xfrm>
-            <a:off x="658368" y="5443369"/>
-            <a:ext cx="2103120" cy="240971"/>
+            <a:off x="658368" y="5766099"/>
+            <a:ext cx="2103120" cy="262487"/>
           </a:xfrm>
           <a:prstGeom prst="rect">
             <a:avLst/>
@@ -7551,8 +7551,8 @@
         </p:nvSpPr>
         <p:spPr>
           <a:xfrm>
-            <a:off x="2807208" y="5472286"/>
-            <a:ext cx="1784948" cy="183138"/>
+            <a:off x="2807208" y="5797597"/>
+            <a:ext cx="1784948" cy="199490"/>
           </a:xfrm>
           <a:prstGeom prst="rect">
             <a:avLst/>
@@ -7576,8 +7576,8 @@
         </p:nvSpPr>
         <p:spPr>
           <a:xfrm>
-            <a:off x="2807208" y="5472286"/>
-            <a:ext cx="1784948" cy="183138"/>
+            <a:off x="2807208" y="5797597"/>
+            <a:ext cx="1784948" cy="199490"/>
           </a:xfrm>
           <a:prstGeom prst="rect">
             <a:avLst/>
@@ -7615,8 +7615,8 @@
         </p:nvSpPr>
         <p:spPr>
           <a:xfrm>
-            <a:off x="4592156" y="5472286"/>
-            <a:ext cx="390376" cy="183138"/>
+            <a:off x="4592156" y="5797597"/>
+            <a:ext cx="390376" cy="199490"/>
           </a:xfrm>
           <a:prstGeom prst="rect">
             <a:avLst/>
@@ -7640,8 +7640,8 @@
         </p:nvSpPr>
         <p:spPr>
           <a:xfrm>
-            <a:off x="4592156" y="5472286"/>
-            <a:ext cx="390376" cy="183138"/>
+            <a:off x="4592156" y="5797597"/>
+            <a:ext cx="390376" cy="199490"/>
           </a:xfrm>
           <a:prstGeom prst="rect">
             <a:avLst/>
@@ -7679,8 +7679,8 @@
         </p:nvSpPr>
         <p:spPr>
           <a:xfrm>
-            <a:off x="4982532" y="5472286"/>
-            <a:ext cx="979356" cy="183138"/>
+            <a:off x="4982532" y="5797597"/>
+            <a:ext cx="979356" cy="199490"/>
           </a:xfrm>
           <a:prstGeom prst="rect">
             <a:avLst/>
@@ -7704,8 +7704,8 @@
         </p:nvSpPr>
         <p:spPr>
           <a:xfrm>
-            <a:off x="4982532" y="5472286"/>
-            <a:ext cx="979356" cy="183138"/>
+            <a:off x="4982532" y="5797597"/>
+            <a:ext cx="979356" cy="199490"/>
           </a:xfrm>
           <a:prstGeom prst="rect">
             <a:avLst/>
@@ -7743,8 +7743,8 @@
         </p:nvSpPr>
         <p:spPr>
           <a:xfrm>
-            <a:off x="658368" y="5684341"/>
-            <a:ext cx="2103120" cy="240971"/>
+            <a:off x="658368" y="6028585"/>
+            <a:ext cx="2103120" cy="262487"/>
           </a:xfrm>
           <a:prstGeom prst="rect">
             <a:avLst/>
@@ -7782,8 +7782,8 @@
         </p:nvSpPr>
         <p:spPr>
           <a:xfrm>
-            <a:off x="2807208" y="5713257"/>
-            <a:ext cx="1784687" cy="183138"/>
+            <a:off x="2807208" y="6060084"/>
+            <a:ext cx="1784687" cy="199490"/>
           </a:xfrm>
           <a:prstGeom prst="rect">
             <a:avLst/>
@@ -7807,8 +7807,8 @@
         </p:nvSpPr>
         <p:spPr>
           <a:xfrm>
-            <a:off x="2807208" y="5713257"/>
-            <a:ext cx="1784687" cy="183138"/>
+            <a:off x="2807208" y="6060084"/>
+            <a:ext cx="1784687" cy="199490"/>
           </a:xfrm>
           <a:prstGeom prst="rect">
             <a:avLst/>
@@ -7846,8 +7846,8 @@
         </p:nvSpPr>
         <p:spPr>
           <a:xfrm>
-            <a:off x="4591895" y="5713257"/>
-            <a:ext cx="320373" cy="183138"/>
+            <a:off x="4591895" y="6060084"/>
+            <a:ext cx="320373" cy="199490"/>
           </a:xfrm>
           <a:prstGeom prst="rect">
             <a:avLst/>
@@ -7871,8 +7871,8 @@
         </p:nvSpPr>
         <p:spPr>
           <a:xfrm>
-            <a:off x="4591895" y="5713257"/>
-            <a:ext cx="320373" cy="183138"/>
+            <a:off x="4591895" y="6060084"/>
+            <a:ext cx="320373" cy="199490"/>
           </a:xfrm>
           <a:prstGeom prst="rect">
             <a:avLst/>
@@ -7910,8 +7910,8 @@
         </p:nvSpPr>
         <p:spPr>
           <a:xfrm>
-            <a:off x="4912268" y="5713257"/>
-            <a:ext cx="1049620" cy="183138"/>
+            <a:off x="4912268" y="6060084"/>
+            <a:ext cx="1049620" cy="199490"/>
           </a:xfrm>
           <a:prstGeom prst="rect">
             <a:avLst/>
@@ -7935,8 +7935,8 @@
         </p:nvSpPr>
         <p:spPr>
           <a:xfrm>
-            <a:off x="4912268" y="5713257"/>
-            <a:ext cx="1049620" cy="183138"/>
+            <a:off x="4912268" y="6060084"/>
+            <a:ext cx="1049620" cy="199490"/>
           </a:xfrm>
           <a:prstGeom prst="rect">
             <a:avLst/>
@@ -7975,7 +7975,7 @@
         <p:spPr>
           <a:xfrm>
             <a:off x="6208776" y="1828800"/>
-            <a:ext cx="2103120" cy="240971"/>
+            <a:ext cx="2103120" cy="262487"/>
           </a:xfrm>
           <a:prstGeom prst="rect">
             <a:avLst/>
@@ -8013,8 +8013,8 @@
         </p:nvSpPr>
         <p:spPr>
           <a:xfrm>
-            <a:off x="8357616" y="1857717"/>
-            <a:ext cx="1759183" cy="183138"/>
+            <a:off x="8357616" y="1860298"/>
+            <a:ext cx="1759183" cy="199490"/>
           </a:xfrm>
           <a:prstGeom prst="rect">
             <a:avLst/>
@@ -8038,8 +8038,8 @@
         </p:nvSpPr>
         <p:spPr>
           <a:xfrm>
-            <a:off x="8357616" y="1857717"/>
-            <a:ext cx="1759183" cy="183138"/>
+            <a:off x="8357616" y="1860298"/>
+            <a:ext cx="1759183" cy="199490"/>
           </a:xfrm>
           <a:prstGeom prst="rect">
             <a:avLst/>
@@ -8077,8 +8077,8 @@
         </p:nvSpPr>
         <p:spPr>
           <a:xfrm>
-            <a:off x="10116799" y="1857717"/>
-            <a:ext cx="978643" cy="183138"/>
+            <a:off x="10116799" y="1860298"/>
+            <a:ext cx="978643" cy="199490"/>
           </a:xfrm>
           <a:prstGeom prst="rect">
             <a:avLst/>
@@ -8102,8 +8102,8 @@
         </p:nvSpPr>
         <p:spPr>
           <a:xfrm>
-            <a:off x="10116799" y="1857717"/>
-            <a:ext cx="978643" cy="183138"/>
+            <a:off x="10116799" y="1860298"/>
+            <a:ext cx="978643" cy="199490"/>
           </a:xfrm>
           <a:prstGeom prst="rect">
             <a:avLst/>
@@ -8141,8 +8141,8 @@
         </p:nvSpPr>
         <p:spPr>
           <a:xfrm>
-            <a:off x="11095442" y="1857717"/>
-            <a:ext cx="416854" cy="183138"/>
+            <a:off x="11095442" y="1860298"/>
+            <a:ext cx="416854" cy="199490"/>
           </a:xfrm>
           <a:prstGeom prst="rect">
             <a:avLst/>
@@ -8166,8 +8166,8 @@
         </p:nvSpPr>
         <p:spPr>
           <a:xfrm>
-            <a:off x="11095442" y="1857717"/>
-            <a:ext cx="416854" cy="183138"/>
+            <a:off x="11095442" y="1860298"/>
+            <a:ext cx="416854" cy="199490"/>
           </a:xfrm>
           <a:prstGeom prst="rect">
             <a:avLst/>
@@ -8205,8 +8205,8 @@
         </p:nvSpPr>
         <p:spPr>
           <a:xfrm>
-            <a:off x="6208776" y="2069771"/>
-            <a:ext cx="2103120" cy="240971"/>
+            <a:off x="6208776" y="2091287"/>
+            <a:ext cx="2103120" cy="262487"/>
           </a:xfrm>
           <a:prstGeom prst="rect">
             <a:avLst/>
@@ -8244,8 +8244,8 @@
         </p:nvSpPr>
         <p:spPr>
           <a:xfrm>
-            <a:off x="8357616" y="2098688"/>
-            <a:ext cx="1743709" cy="183138"/>
+            <a:off x="8357616" y="2122785"/>
+            <a:ext cx="1743709" cy="199490"/>
           </a:xfrm>
           <a:prstGeom prst="rect">
             <a:avLst/>
@@ -8269,8 +8269,8 @@
         </p:nvSpPr>
         <p:spPr>
           <a:xfrm>
-            <a:off x="8357616" y="2098688"/>
-            <a:ext cx="1743709" cy="183138"/>
+            <a:off x="8357616" y="2122785"/>
+            <a:ext cx="1743709" cy="199490"/>
           </a:xfrm>
           <a:prstGeom prst="rect">
             <a:avLst/>
@@ -8308,8 +8308,8 @@
         </p:nvSpPr>
         <p:spPr>
           <a:xfrm>
-            <a:off x="10101325" y="2098688"/>
-            <a:ext cx="638330" cy="183138"/>
+            <a:off x="10101325" y="2122785"/>
+            <a:ext cx="638330" cy="199490"/>
           </a:xfrm>
           <a:prstGeom prst="rect">
             <a:avLst/>
@@ -8333,8 +8333,8 @@
         </p:nvSpPr>
         <p:spPr>
           <a:xfrm>
-            <a:off x="10101325" y="2098688"/>
-            <a:ext cx="638330" cy="183138"/>
+            <a:off x="10101325" y="2122785"/>
+            <a:ext cx="638330" cy="199490"/>
           </a:xfrm>
           <a:prstGeom prst="rect">
             <a:avLst/>
@@ -8372,8 +8372,8 @@
         </p:nvSpPr>
         <p:spPr>
           <a:xfrm>
-            <a:off x="10739655" y="2098688"/>
-            <a:ext cx="772641" cy="183138"/>
+            <a:off x="10739655" y="2122785"/>
+            <a:ext cx="772641" cy="199490"/>
           </a:xfrm>
           <a:prstGeom prst="rect">
             <a:avLst/>
@@ -8397,8 +8397,8 @@
         </p:nvSpPr>
         <p:spPr>
           <a:xfrm>
-            <a:off x="10739655" y="2098688"/>
-            <a:ext cx="772641" cy="183138"/>
+            <a:off x="10739655" y="2122785"/>
+            <a:ext cx="772641" cy="199490"/>
           </a:xfrm>
           <a:prstGeom prst="rect">
             <a:avLst/>
@@ -8436,8 +8436,8 @@
         </p:nvSpPr>
         <p:spPr>
           <a:xfrm>
-            <a:off x="6208776" y="2310743"/>
-            <a:ext cx="2103120" cy="240971"/>
+            <a:off x="6208776" y="2353773"/>
+            <a:ext cx="2103120" cy="262487"/>
           </a:xfrm>
           <a:prstGeom prst="rect">
             <a:avLst/>
@@ -8475,8 +8475,8 @@
         </p:nvSpPr>
         <p:spPr>
           <a:xfrm>
-            <a:off x="8357616" y="2339659"/>
-            <a:ext cx="1719908" cy="183138"/>
+            <a:off x="8357616" y="2385272"/>
+            <a:ext cx="1719908" cy="199490"/>
           </a:xfrm>
           <a:prstGeom prst="rect">
             <a:avLst/>
@@ -8500,8 +8500,8 @@
         </p:nvSpPr>
         <p:spPr>
           <a:xfrm>
-            <a:off x="8357616" y="2339659"/>
-            <a:ext cx="1719908" cy="183138"/>
+            <a:off x="8357616" y="2385272"/>
+            <a:ext cx="1719908" cy="199490"/>
           </a:xfrm>
           <a:prstGeom prst="rect">
             <a:avLst/>
@@ -8539,8 +8539,8 @@
         </p:nvSpPr>
         <p:spPr>
           <a:xfrm>
-            <a:off x="10077524" y="2339659"/>
-            <a:ext cx="412555" cy="183138"/>
+            <a:off x="10077524" y="2385272"/>
+            <a:ext cx="412555" cy="199490"/>
           </a:xfrm>
           <a:prstGeom prst="rect">
             <a:avLst/>
@@ -8564,8 +8564,8 @@
         </p:nvSpPr>
         <p:spPr>
           <a:xfrm>
-            <a:off x="10077524" y="2339659"/>
-            <a:ext cx="412555" cy="183138"/>
+            <a:off x="10077524" y="2385272"/>
+            <a:ext cx="412555" cy="199490"/>
           </a:xfrm>
           <a:prstGeom prst="rect">
             <a:avLst/>
@@ -8603,8 +8603,8 @@
         </p:nvSpPr>
         <p:spPr>
           <a:xfrm>
-            <a:off x="10490079" y="2339659"/>
-            <a:ext cx="1022217" cy="183138"/>
+            <a:off x="10490079" y="2385272"/>
+            <a:ext cx="1022217" cy="199490"/>
           </a:xfrm>
           <a:prstGeom prst="rect">
             <a:avLst/>
@@ -8628,8 +8628,8 @@
         </p:nvSpPr>
         <p:spPr>
           <a:xfrm>
-            <a:off x="10490079" y="2339659"/>
-            <a:ext cx="1022217" cy="183138"/>
+            <a:off x="10490079" y="2385272"/>
+            <a:ext cx="1022217" cy="199490"/>
           </a:xfrm>
           <a:prstGeom prst="rect">
             <a:avLst/>
@@ -8667,8 +8667,8 @@
         </p:nvSpPr>
         <p:spPr>
           <a:xfrm>
-            <a:off x="6208776" y="2551714"/>
-            <a:ext cx="2103120" cy="240971"/>
+            <a:off x="6208776" y="2616260"/>
+            <a:ext cx="2103120" cy="262487"/>
           </a:xfrm>
           <a:prstGeom prst="rect">
             <a:avLst/>
@@ -8706,8 +8706,8 @@
         </p:nvSpPr>
         <p:spPr>
           <a:xfrm>
-            <a:off x="8357616" y="2580630"/>
-            <a:ext cx="1601041" cy="183138"/>
+            <a:off x="8357616" y="2647758"/>
+            <a:ext cx="1601041" cy="199490"/>
           </a:xfrm>
           <a:prstGeom prst="rect">
             <a:avLst/>
@@ -8731,8 +8731,8 @@
         </p:nvSpPr>
         <p:spPr>
           <a:xfrm>
-            <a:off x="8357616" y="2580630"/>
-            <a:ext cx="1601041" cy="183138"/>
+            <a:off x="8357616" y="2647758"/>
+            <a:ext cx="1601041" cy="199490"/>
           </a:xfrm>
           <a:prstGeom prst="rect">
             <a:avLst/>
@@ -8770,8 +8770,8 @@
         </p:nvSpPr>
         <p:spPr>
           <a:xfrm>
-            <a:off x="9958657" y="2580630"/>
-            <a:ext cx="606875" cy="183138"/>
+            <a:off x="9958657" y="2647758"/>
+            <a:ext cx="606875" cy="199490"/>
           </a:xfrm>
           <a:prstGeom prst="rect">
             <a:avLst/>
@@ -8795,8 +8795,8 @@
         </p:nvSpPr>
         <p:spPr>
           <a:xfrm>
-            <a:off x="9958657" y="2580630"/>
-            <a:ext cx="606875" cy="183138"/>
+            <a:off x="9958657" y="2647758"/>
+            <a:ext cx="606875" cy="199490"/>
           </a:xfrm>
           <a:prstGeom prst="rect">
             <a:avLst/>
@@ -8834,8 +8834,8 @@
         </p:nvSpPr>
         <p:spPr>
           <a:xfrm>
-            <a:off x="10565532" y="2580630"/>
-            <a:ext cx="946764" cy="183138"/>
+            <a:off x="10565532" y="2647758"/>
+            <a:ext cx="946764" cy="199490"/>
           </a:xfrm>
           <a:prstGeom prst="rect">
             <a:avLst/>
@@ -8859,8 +8859,8 @@
         </p:nvSpPr>
         <p:spPr>
           <a:xfrm>
-            <a:off x="10565532" y="2580630"/>
-            <a:ext cx="946764" cy="183138"/>
+            <a:off x="10565532" y="2647758"/>
+            <a:ext cx="946764" cy="199490"/>
           </a:xfrm>
           <a:prstGeom prst="rect">
             <a:avLst/>
@@ -8898,8 +8898,8 @@
         </p:nvSpPr>
         <p:spPr>
           <a:xfrm>
-            <a:off x="6208776" y="2792685"/>
-            <a:ext cx="2103120" cy="240971"/>
+            <a:off x="6208776" y="2878746"/>
+            <a:ext cx="2103120" cy="262487"/>
           </a:xfrm>
           <a:prstGeom prst="rect">
             <a:avLst/>
@@ -8937,8 +8937,8 @@
         </p:nvSpPr>
         <p:spPr>
           <a:xfrm>
-            <a:off x="8357616" y="2821602"/>
-            <a:ext cx="1536222" cy="183138"/>
+            <a:off x="8357616" y="2910245"/>
+            <a:ext cx="1536222" cy="199490"/>
           </a:xfrm>
           <a:prstGeom prst="rect">
             <a:avLst/>
@@ -8962,8 +8962,8 @@
         </p:nvSpPr>
         <p:spPr>
           <a:xfrm>
-            <a:off x="8357616" y="2821602"/>
-            <a:ext cx="1536222" cy="183138"/>
+            <a:off x="8357616" y="2910245"/>
+            <a:ext cx="1536222" cy="199490"/>
           </a:xfrm>
           <a:prstGeom prst="rect">
             <a:avLst/>
@@ -9001,8 +9001,8 @@
         </p:nvSpPr>
         <p:spPr>
           <a:xfrm>
-            <a:off x="9893838" y="2821602"/>
-            <a:ext cx="488153" cy="183138"/>
+            <a:off x="9893838" y="2910245"/>
+            <a:ext cx="488153" cy="199490"/>
           </a:xfrm>
           <a:prstGeom prst="rect">
             <a:avLst/>
@@ -9026,8 +9026,8 @@
         </p:nvSpPr>
         <p:spPr>
           <a:xfrm>
-            <a:off x="9893838" y="2821602"/>
-            <a:ext cx="488153" cy="183138"/>
+            <a:off x="9893838" y="2910245"/>
+            <a:ext cx="488153" cy="199490"/>
           </a:xfrm>
           <a:prstGeom prst="rect">
             <a:avLst/>
@@ -9065,8 +9065,8 @@
         </p:nvSpPr>
         <p:spPr>
           <a:xfrm>
-            <a:off x="10381990" y="2821602"/>
-            <a:ext cx="1130306" cy="183138"/>
+            <a:off x="10381990" y="2910245"/>
+            <a:ext cx="1130306" cy="199490"/>
           </a:xfrm>
           <a:prstGeom prst="rect">
             <a:avLst/>
@@ -9090,8 +9090,8 @@
         </p:nvSpPr>
         <p:spPr>
           <a:xfrm>
-            <a:off x="10381990" y="2821602"/>
-            <a:ext cx="1130306" cy="183138"/>
+            <a:off x="10381990" y="2910245"/>
+            <a:ext cx="1130306" cy="199490"/>
           </a:xfrm>
           <a:prstGeom prst="rect">
             <a:avLst/>
@@ -9129,8 +9129,8 @@
         </p:nvSpPr>
         <p:spPr>
           <a:xfrm>
-            <a:off x="6208776" y="3033656"/>
-            <a:ext cx="2103120" cy="240971"/>
+            <a:off x="6208776" y="3141233"/>
+            <a:ext cx="2103120" cy="262487"/>
           </a:xfrm>
           <a:prstGeom prst="rect">
             <a:avLst/>
@@ -9168,8 +9168,8 @@
         </p:nvSpPr>
         <p:spPr>
           <a:xfrm>
-            <a:off x="8357616" y="3062573"/>
-            <a:ext cx="1513638" cy="183138"/>
+            <a:off x="8357616" y="3172731"/>
+            <a:ext cx="1513638" cy="199490"/>
           </a:xfrm>
           <a:prstGeom prst="rect">
             <a:avLst/>
@@ -9193,8 +9193,8 @@
         </p:nvSpPr>
         <p:spPr>
           <a:xfrm>
-            <a:off x="8357616" y="3062573"/>
-            <a:ext cx="1513638" cy="183138"/>
+            <a:off x="8357616" y="3172731"/>
+            <a:ext cx="1513638" cy="199490"/>
           </a:xfrm>
           <a:prstGeom prst="rect">
             <a:avLst/>
@@ -9232,8 +9232,8 @@
         </p:nvSpPr>
         <p:spPr>
           <a:xfrm>
-            <a:off x="9871254" y="3062573"/>
-            <a:ext cx="727538" cy="183138"/>
+            <a:off x="9871254" y="3172731"/>
+            <a:ext cx="727538" cy="199490"/>
           </a:xfrm>
           <a:prstGeom prst="rect">
             <a:avLst/>
@@ -9257,8 +9257,8 @@
         </p:nvSpPr>
         <p:spPr>
           <a:xfrm>
-            <a:off x="9871254" y="3062573"/>
-            <a:ext cx="727538" cy="183138"/>
+            <a:off x="9871254" y="3172731"/>
+            <a:ext cx="727538" cy="199490"/>
           </a:xfrm>
           <a:prstGeom prst="rect">
             <a:avLst/>
@@ -9296,8 +9296,8 @@
         </p:nvSpPr>
         <p:spPr>
           <a:xfrm>
-            <a:off x="10598793" y="3062573"/>
-            <a:ext cx="913503" cy="183138"/>
+            <a:off x="10598793" y="3172731"/>
+            <a:ext cx="913503" cy="199490"/>
           </a:xfrm>
           <a:prstGeom prst="rect">
             <a:avLst/>
@@ -9321,8 +9321,8 @@
         </p:nvSpPr>
         <p:spPr>
           <a:xfrm>
-            <a:off x="10598793" y="3062573"/>
-            <a:ext cx="913503" cy="183138"/>
+            <a:off x="10598793" y="3172731"/>
+            <a:ext cx="913503" cy="199490"/>
           </a:xfrm>
           <a:prstGeom prst="rect">
             <a:avLst/>
@@ -9360,8 +9360,8 @@
         </p:nvSpPr>
         <p:spPr>
           <a:xfrm>
-            <a:off x="6208776" y="3274628"/>
-            <a:ext cx="2103120" cy="240971"/>
+            <a:off x="6208776" y="3403720"/>
+            <a:ext cx="2103120" cy="262487"/>
           </a:xfrm>
           <a:prstGeom prst="rect">
             <a:avLst/>
@@ -9399,8 +9399,8 @@
         </p:nvSpPr>
         <p:spPr>
           <a:xfrm>
-            <a:off x="8357616" y="3303544"/>
-            <a:ext cx="1487709" cy="183138"/>
+            <a:off x="8357616" y="3435218"/>
+            <a:ext cx="1487709" cy="199490"/>
           </a:xfrm>
           <a:prstGeom prst="rect">
             <a:avLst/>
@@ -9424,8 +9424,8 @@
         </p:nvSpPr>
         <p:spPr>
           <a:xfrm>
-            <a:off x="8357616" y="3303544"/>
-            <a:ext cx="1487709" cy="183138"/>
+            <a:off x="8357616" y="3435218"/>
+            <a:ext cx="1487709" cy="199490"/>
           </a:xfrm>
           <a:prstGeom prst="rect">
             <a:avLst/>
@@ -9463,8 +9463,8 @@
         </p:nvSpPr>
         <p:spPr>
           <a:xfrm>
-            <a:off x="9845325" y="3303544"/>
-            <a:ext cx="1263575" cy="183138"/>
+            <a:off x="9845325" y="3435218"/>
+            <a:ext cx="1263575" cy="199490"/>
           </a:xfrm>
           <a:prstGeom prst="rect">
             <a:avLst/>
@@ -9488,8 +9488,8 @@
         </p:nvSpPr>
         <p:spPr>
           <a:xfrm>
-            <a:off x="9845325" y="3303544"/>
-            <a:ext cx="1263575" cy="183138"/>
+            <a:off x="9845325" y="3435218"/>
+            <a:ext cx="1263575" cy="199490"/>
           </a:xfrm>
           <a:prstGeom prst="rect">
             <a:avLst/>
@@ -9527,8 +9527,8 @@
         </p:nvSpPr>
         <p:spPr>
           <a:xfrm>
-            <a:off x="11108900" y="3303544"/>
-            <a:ext cx="403396" cy="183138"/>
+            <a:off x="11108900" y="3435218"/>
+            <a:ext cx="403396" cy="199490"/>
           </a:xfrm>
           <a:prstGeom prst="rect">
             <a:avLst/>
@@ -9552,8 +9552,8 @@
         </p:nvSpPr>
         <p:spPr>
           <a:xfrm>
-            <a:off x="11108900" y="3303544"/>
-            <a:ext cx="403396" cy="183138"/>
+            <a:off x="11108900" y="3435218"/>
+            <a:ext cx="403396" cy="199490"/>
           </a:xfrm>
           <a:prstGeom prst="rect">
             <a:avLst/>
@@ -9591,8 +9591,8 @@
         </p:nvSpPr>
         <p:spPr>
           <a:xfrm>
-            <a:off x="6208776" y="3515599"/>
-            <a:ext cx="2103120" cy="240971"/>
+            <a:off x="6208776" y="3666206"/>
+            <a:ext cx="2103120" cy="262487"/>
           </a:xfrm>
           <a:prstGeom prst="rect">
             <a:avLst/>
@@ -9630,8 +9630,8 @@
         </p:nvSpPr>
         <p:spPr>
           <a:xfrm>
-            <a:off x="8357616" y="3544516"/>
-            <a:ext cx="1483116" cy="183138"/>
+            <a:off x="8357616" y="3697705"/>
+            <a:ext cx="1483116" cy="199490"/>
           </a:xfrm>
           <a:prstGeom prst="rect">
             <a:avLst/>
@@ -9655,8 +9655,8 @@
         </p:nvSpPr>
         <p:spPr>
           <a:xfrm>
-            <a:off x="8357616" y="3544516"/>
-            <a:ext cx="1483116" cy="183138"/>
+            <a:off x="8357616" y="3697705"/>
+            <a:ext cx="1483116" cy="199490"/>
           </a:xfrm>
           <a:prstGeom prst="rect">
             <a:avLst/>
@@ -9694,8 +9694,8 @@
         </p:nvSpPr>
         <p:spPr>
           <a:xfrm>
-            <a:off x="9840732" y="3544516"/>
-            <a:ext cx="885736" cy="183138"/>
+            <a:off x="9840732" y="3697705"/>
+            <a:ext cx="885736" cy="199490"/>
           </a:xfrm>
           <a:prstGeom prst="rect">
             <a:avLst/>
@@ -9719,8 +9719,8 @@
         </p:nvSpPr>
         <p:spPr>
           <a:xfrm>
-            <a:off x="9840732" y="3544516"/>
-            <a:ext cx="885736" cy="183138"/>
+            <a:off x="9840732" y="3697705"/>
+            <a:ext cx="885736" cy="199490"/>
           </a:xfrm>
           <a:prstGeom prst="rect">
             <a:avLst/>
@@ -9758,8 +9758,8 @@
         </p:nvSpPr>
         <p:spPr>
           <a:xfrm>
-            <a:off x="10726468" y="3544516"/>
-            <a:ext cx="785828" cy="183138"/>
+            <a:off x="10726468" y="3697705"/>
+            <a:ext cx="785828" cy="199490"/>
           </a:xfrm>
           <a:prstGeom prst="rect">
             <a:avLst/>
@@ -9783,8 +9783,8 @@
         </p:nvSpPr>
         <p:spPr>
           <a:xfrm>
-            <a:off x="10726468" y="3544516"/>
-            <a:ext cx="785828" cy="183138"/>
+            <a:off x="10726468" y="3697705"/>
+            <a:ext cx="785828" cy="199490"/>
           </a:xfrm>
           <a:prstGeom prst="rect">
             <a:avLst/>
@@ -9822,8 +9822,8 @@
         </p:nvSpPr>
         <p:spPr>
           <a:xfrm>
-            <a:off x="6208776" y="3756570"/>
-            <a:ext cx="2103120" cy="240971"/>
+            <a:off x="6208776" y="3928693"/>
+            <a:ext cx="2103120" cy="262487"/>
           </a:xfrm>
           <a:prstGeom prst="rect">
             <a:avLst/>
@@ -9861,8 +9861,8 @@
         </p:nvSpPr>
         <p:spPr>
           <a:xfrm>
-            <a:off x="8357616" y="3785487"/>
-            <a:ext cx="1429900" cy="183138"/>
+            <a:off x="8357616" y="3960191"/>
+            <a:ext cx="1429900" cy="199490"/>
           </a:xfrm>
           <a:prstGeom prst="rect">
             <a:avLst/>
@@ -9886,8 +9886,8 @@
         </p:nvSpPr>
         <p:spPr>
           <a:xfrm>
-            <a:off x="8357616" y="3785487"/>
-            <a:ext cx="1429900" cy="183138"/>
+            <a:off x="8357616" y="3960191"/>
+            <a:ext cx="1429900" cy="199490"/>
           </a:xfrm>
           <a:prstGeom prst="rect">
             <a:avLst/>
@@ -9925,8 +9925,8 @@
         </p:nvSpPr>
         <p:spPr>
           <a:xfrm>
-            <a:off x="9787516" y="3785487"/>
-            <a:ext cx="450296" cy="183138"/>
+            <a:off x="9787516" y="3960191"/>
+            <a:ext cx="450296" cy="199490"/>
           </a:xfrm>
           <a:prstGeom prst="rect">
             <a:avLst/>
@@ -9950,8 +9950,8 @@
         </p:nvSpPr>
         <p:spPr>
           <a:xfrm>
-            <a:off x="9787516" y="3785487"/>
-            <a:ext cx="450296" cy="183138"/>
+            <a:off x="9787516" y="3960191"/>
+            <a:ext cx="450296" cy="199490"/>
           </a:xfrm>
           <a:prstGeom prst="rect">
             <a:avLst/>
@@ -9989,8 +9989,8 @@
         </p:nvSpPr>
         <p:spPr>
           <a:xfrm>
-            <a:off x="10237812" y="3785487"/>
-            <a:ext cx="1274484" cy="183138"/>
+            <a:off x="10237812" y="3960191"/>
+            <a:ext cx="1274484" cy="199490"/>
           </a:xfrm>
           <a:prstGeom prst="rect">
             <a:avLst/>
@@ -10014,8 +10014,8 @@
         </p:nvSpPr>
         <p:spPr>
           <a:xfrm>
-            <a:off x="10237812" y="3785487"/>
-            <a:ext cx="1274484" cy="183138"/>
+            <a:off x="10237812" y="3960191"/>
+            <a:ext cx="1274484" cy="199490"/>
           </a:xfrm>
           <a:prstGeom prst="rect">
             <a:avLst/>
@@ -10053,8 +10053,8 @@
         </p:nvSpPr>
         <p:spPr>
           <a:xfrm>
-            <a:off x="6208776" y="3997542"/>
-            <a:ext cx="2103120" cy="240971"/>
+            <a:off x="6208776" y="4191179"/>
+            <a:ext cx="2103120" cy="262487"/>
           </a:xfrm>
           <a:prstGeom prst="rect">
             <a:avLst/>
@@ -10092,8 +10092,8 @@
         </p:nvSpPr>
         <p:spPr>
           <a:xfrm>
-            <a:off x="8357616" y="4026458"/>
-            <a:ext cx="1407663" cy="183138"/>
+            <a:off x="8357616" y="4222678"/>
+            <a:ext cx="1407663" cy="199490"/>
           </a:xfrm>
           <a:prstGeom prst="rect">
             <a:avLst/>
@@ -10117,8 +10117,8 @@
         </p:nvSpPr>
         <p:spPr>
           <a:xfrm>
-            <a:off x="8357616" y="4026458"/>
-            <a:ext cx="1407663" cy="183138"/>
+            <a:off x="8357616" y="4222678"/>
+            <a:ext cx="1407663" cy="199490"/>
           </a:xfrm>
           <a:prstGeom prst="rect">
             <a:avLst/>
@@ -10156,8 +10156,8 @@
         </p:nvSpPr>
         <p:spPr>
           <a:xfrm>
-            <a:off x="9765279" y="4026458"/>
-            <a:ext cx="1184133" cy="183138"/>
+            <a:off x="9765279" y="4222678"/>
+            <a:ext cx="1184133" cy="199490"/>
           </a:xfrm>
           <a:prstGeom prst="rect">
             <a:avLst/>
@@ -10181,8 +10181,8 @@
         </p:nvSpPr>
         <p:spPr>
           <a:xfrm>
-            <a:off x="9765279" y="4026458"/>
-            <a:ext cx="1184133" cy="183138"/>
+            <a:off x="9765279" y="4222678"/>
+            <a:ext cx="1184133" cy="199490"/>
           </a:xfrm>
           <a:prstGeom prst="rect">
             <a:avLst/>
@@ -10220,8 +10220,8 @@
         </p:nvSpPr>
         <p:spPr>
           <a:xfrm>
-            <a:off x="10949412" y="4026458"/>
-            <a:ext cx="562884" cy="183138"/>
+            <a:off x="10949412" y="4222678"/>
+            <a:ext cx="562884" cy="199490"/>
           </a:xfrm>
           <a:prstGeom prst="rect">
             <a:avLst/>
@@ -10245,8 +10245,8 @@
         </p:nvSpPr>
         <p:spPr>
           <a:xfrm>
-            <a:off x="10949412" y="4026458"/>
-            <a:ext cx="562884" cy="183138"/>
+            <a:off x="10949412" y="4222678"/>
+            <a:ext cx="562884" cy="199490"/>
           </a:xfrm>
           <a:prstGeom prst="rect">
             <a:avLst/>
@@ -10284,8 +10284,8 @@
         </p:nvSpPr>
         <p:spPr>
           <a:xfrm>
-            <a:off x="6208776" y="4238513"/>
-            <a:ext cx="2103120" cy="240971"/>
+            <a:off x="6208776" y="4453666"/>
+            <a:ext cx="2103120" cy="262487"/>
           </a:xfrm>
           <a:prstGeom prst="rect">
             <a:avLst/>
@@ -10323,8 +10323,8 @@
         </p:nvSpPr>
         <p:spPr>
           <a:xfrm>
-            <a:off x="8357616" y="4267429"/>
-            <a:ext cx="1272315" cy="183138"/>
+            <a:off x="8357616" y="4485164"/>
+            <a:ext cx="1272315" cy="199490"/>
           </a:xfrm>
           <a:prstGeom prst="rect">
             <a:avLst/>
@@ -10348,8 +10348,8 @@
         </p:nvSpPr>
         <p:spPr>
           <a:xfrm>
-            <a:off x="8357616" y="4267429"/>
-            <a:ext cx="1272315" cy="183138"/>
+            <a:off x="8357616" y="4485164"/>
+            <a:ext cx="1272315" cy="199490"/>
           </a:xfrm>
           <a:prstGeom prst="rect">
             <a:avLst/>
@@ -10387,8 +10387,8 @@
         </p:nvSpPr>
         <p:spPr>
           <a:xfrm>
-            <a:off x="9629931" y="4267429"/>
-            <a:ext cx="1101342" cy="183138"/>
+            <a:off x="9629931" y="4485164"/>
+            <a:ext cx="1101342" cy="199490"/>
           </a:xfrm>
           <a:prstGeom prst="rect">
             <a:avLst/>
@@ -10412,8 +10412,8 @@
         </p:nvSpPr>
         <p:spPr>
           <a:xfrm>
-            <a:off x="9629931" y="4267429"/>
-            <a:ext cx="1101342" cy="183138"/>
+            <a:off x="9629931" y="4485164"/>
+            <a:ext cx="1101342" cy="199490"/>
           </a:xfrm>
           <a:prstGeom prst="rect">
             <a:avLst/>
@@ -10451,8 +10451,8 @@
         </p:nvSpPr>
         <p:spPr>
           <a:xfrm>
-            <a:off x="10731273" y="4267429"/>
-            <a:ext cx="781023" cy="183138"/>
+            <a:off x="10731273" y="4485164"/>
+            <a:ext cx="781023" cy="199490"/>
           </a:xfrm>
           <a:prstGeom prst="rect">
             <a:avLst/>
@@ -10476,8 +10476,8 @@
         </p:nvSpPr>
         <p:spPr>
           <a:xfrm>
-            <a:off x="10731273" y="4267429"/>
-            <a:ext cx="781023" cy="183138"/>
+            <a:off x="10731273" y="4485164"/>
+            <a:ext cx="781023" cy="199490"/>
           </a:xfrm>
           <a:prstGeom prst="rect">
             <a:avLst/>
@@ -10515,8 +10515,8 @@
         </p:nvSpPr>
         <p:spPr>
           <a:xfrm>
-            <a:off x="6208776" y="4479484"/>
-            <a:ext cx="2103120" cy="240971"/>
+            <a:off x="6208776" y="4716152"/>
+            <a:ext cx="2103120" cy="262487"/>
           </a:xfrm>
           <a:prstGeom prst="rect">
             <a:avLst/>
@@ -10554,8 +10554,8 @@
         </p:nvSpPr>
         <p:spPr>
           <a:xfrm>
-            <a:off x="8357616" y="4508401"/>
-            <a:ext cx="1260841" cy="183138"/>
+            <a:off x="8357616" y="4747651"/>
+            <a:ext cx="1260841" cy="199490"/>
           </a:xfrm>
           <a:prstGeom prst="rect">
             <a:avLst/>
@@ -10579,8 +10579,8 @@
         </p:nvSpPr>
         <p:spPr>
           <a:xfrm>
-            <a:off x="8357616" y="4508401"/>
-            <a:ext cx="1260841" cy="183138"/>
+            <a:off x="8357616" y="4747651"/>
+            <a:ext cx="1260841" cy="199490"/>
           </a:xfrm>
           <a:prstGeom prst="rect">
             <a:avLst/>
@@ -10618,8 +10618,8 @@
         </p:nvSpPr>
         <p:spPr>
           <a:xfrm>
-            <a:off x="9618457" y="4508401"/>
-            <a:ext cx="1210006" cy="183138"/>
+            <a:off x="9618457" y="4747651"/>
+            <a:ext cx="1210006" cy="199490"/>
           </a:xfrm>
           <a:prstGeom prst="rect">
             <a:avLst/>
@@ -10643,8 +10643,8 @@
         </p:nvSpPr>
         <p:spPr>
           <a:xfrm>
-            <a:off x="9618457" y="4508401"/>
-            <a:ext cx="1210006" cy="183138"/>
+            <a:off x="9618457" y="4747651"/>
+            <a:ext cx="1210006" cy="199490"/>
           </a:xfrm>
           <a:prstGeom prst="rect">
             <a:avLst/>
@@ -10682,8 +10682,8 @@
         </p:nvSpPr>
         <p:spPr>
           <a:xfrm>
-            <a:off x="10828463" y="4508401"/>
-            <a:ext cx="683833" cy="183138"/>
+            <a:off x="10828463" y="4747651"/>
+            <a:ext cx="683833" cy="199490"/>
           </a:xfrm>
           <a:prstGeom prst="rect">
             <a:avLst/>
@@ -10707,8 +10707,8 @@
         </p:nvSpPr>
         <p:spPr>
           <a:xfrm>
-            <a:off x="10828463" y="4508401"/>
-            <a:ext cx="683833" cy="183138"/>
+            <a:off x="10828463" y="4747651"/>
+            <a:ext cx="683833" cy="199490"/>
           </a:xfrm>
           <a:prstGeom prst="rect">
             <a:avLst/>
@@ -10746,8 +10746,8 @@
         </p:nvSpPr>
         <p:spPr>
           <a:xfrm>
-            <a:off x="6208776" y="4720456"/>
-            <a:ext cx="2103120" cy="240971"/>
+            <a:off x="6208776" y="4978639"/>
+            <a:ext cx="2103120" cy="262487"/>
           </a:xfrm>
           <a:prstGeom prst="rect">
             <a:avLst/>
@@ -10785,8 +10785,8 @@
         </p:nvSpPr>
         <p:spPr>
           <a:xfrm>
-            <a:off x="8357616" y="4749372"/>
-            <a:ext cx="1237324" cy="183138"/>
+            <a:off x="8357616" y="5010137"/>
+            <a:ext cx="1237324" cy="199490"/>
           </a:xfrm>
           <a:prstGeom prst="rect">
             <a:avLst/>
@@ -10810,8 +10810,8 @@
         </p:nvSpPr>
         <p:spPr>
           <a:xfrm>
-            <a:off x="8357616" y="4749372"/>
-            <a:ext cx="1237324" cy="183138"/>
+            <a:off x="8357616" y="5010137"/>
+            <a:ext cx="1237324" cy="199490"/>
           </a:xfrm>
           <a:prstGeom prst="rect">
             <a:avLst/>
@@ -10849,8 +10849,8 @@
         </p:nvSpPr>
         <p:spPr>
           <a:xfrm>
-            <a:off x="9594940" y="4749372"/>
-            <a:ext cx="995080" cy="183138"/>
+            <a:off x="9594940" y="5010137"/>
+            <a:ext cx="995080" cy="199490"/>
           </a:xfrm>
           <a:prstGeom prst="rect">
             <a:avLst/>
@@ -10874,8 +10874,8 @@
         </p:nvSpPr>
         <p:spPr>
           <a:xfrm>
-            <a:off x="9594940" y="4749372"/>
-            <a:ext cx="995080" cy="183138"/>
+            <a:off x="9594940" y="5010137"/>
+            <a:ext cx="995080" cy="199490"/>
           </a:xfrm>
           <a:prstGeom prst="rect">
             <a:avLst/>
@@ -10913,8 +10913,8 @@
         </p:nvSpPr>
         <p:spPr>
           <a:xfrm>
-            <a:off x="10590020" y="4749372"/>
-            <a:ext cx="922276" cy="183138"/>
+            <a:off x="10590020" y="5010137"/>
+            <a:ext cx="922276" cy="199490"/>
           </a:xfrm>
           <a:prstGeom prst="rect">
             <a:avLst/>
@@ -10938,8 +10938,8 @@
         </p:nvSpPr>
         <p:spPr>
           <a:xfrm>
-            <a:off x="10590020" y="4749372"/>
-            <a:ext cx="922276" cy="183138"/>
+            <a:off x="10590020" y="5010137"/>
+            <a:ext cx="922276" cy="199490"/>
           </a:xfrm>
           <a:prstGeom prst="rect">
             <a:avLst/>
@@ -10977,8 +10977,8 @@
         </p:nvSpPr>
         <p:spPr>
           <a:xfrm>
-            <a:off x="6208776" y="4961427"/>
-            <a:ext cx="2103120" cy="240971"/>
+            <a:off x="6208776" y="5241126"/>
+            <a:ext cx="2103120" cy="262487"/>
           </a:xfrm>
           <a:prstGeom prst="rect">
             <a:avLst/>
@@ -11016,8 +11016,8 @@
         </p:nvSpPr>
         <p:spPr>
           <a:xfrm>
-            <a:off x="8357616" y="4990343"/>
-            <a:ext cx="1075368" cy="183138"/>
+            <a:off x="8357616" y="5272624"/>
+            <a:ext cx="1075368" cy="199490"/>
           </a:xfrm>
           <a:prstGeom prst="rect">
             <a:avLst/>
@@ -11041,8 +11041,8 @@
         </p:nvSpPr>
         <p:spPr>
           <a:xfrm>
-            <a:off x="8357616" y="4990343"/>
-            <a:ext cx="1075368" cy="183138"/>
+            <a:off x="8357616" y="5272624"/>
+            <a:ext cx="1075368" cy="199490"/>
           </a:xfrm>
           <a:prstGeom prst="rect">
             <a:avLst/>
@@ -11080,8 +11080,8 @@
         </p:nvSpPr>
         <p:spPr>
           <a:xfrm>
-            <a:off x="9432984" y="4990343"/>
-            <a:ext cx="1647182" cy="183138"/>
+            <a:off x="9432984" y="5272624"/>
+            <a:ext cx="1647182" cy="199490"/>
           </a:xfrm>
           <a:prstGeom prst="rect">
             <a:avLst/>
@@ -11105,8 +11105,8 @@
         </p:nvSpPr>
         <p:spPr>
           <a:xfrm>
-            <a:off x="9432984" y="4990343"/>
-            <a:ext cx="1647182" cy="183138"/>
+            <a:off x="9432984" y="5272624"/>
+            <a:ext cx="1647182" cy="199490"/>
           </a:xfrm>
           <a:prstGeom prst="rect">
             <a:avLst/>
@@ -11144,8 +11144,8 @@
         </p:nvSpPr>
         <p:spPr>
           <a:xfrm>
-            <a:off x="11080165" y="4990343"/>
-            <a:ext cx="432131" cy="183138"/>
+            <a:off x="11080165" y="5272624"/>
+            <a:ext cx="432131" cy="199490"/>
           </a:xfrm>
           <a:prstGeom prst="rect">
             <a:avLst/>
@@ -11169,8 +11169,8 @@
         </p:nvSpPr>
         <p:spPr>
           <a:xfrm>
-            <a:off x="11080165" y="4990343"/>
-            <a:ext cx="432131" cy="183138"/>
+            <a:off x="11080165" y="5272624"/>
+            <a:ext cx="432131" cy="199490"/>
           </a:xfrm>
           <a:prstGeom prst="rect">
             <a:avLst/>
@@ -11208,8 +11208,8 @@
         </p:nvSpPr>
         <p:spPr>
           <a:xfrm>
-            <a:off x="6208776" y="5202398"/>
-            <a:ext cx="2103120" cy="240971"/>
+            <a:off x="6208776" y="5503612"/>
+            <a:ext cx="2103120" cy="262487"/>
           </a:xfrm>
           <a:prstGeom prst="rect">
             <a:avLst/>
@@ -11247,8 +11247,8 @@
         </p:nvSpPr>
         <p:spPr>
           <a:xfrm>
-            <a:off x="8357616" y="5231315"/>
-            <a:ext cx="898846" cy="183138"/>
+            <a:off x="8357616" y="5535111"/>
+            <a:ext cx="898846" cy="199490"/>
           </a:xfrm>
           <a:prstGeom prst="rect">
             <a:avLst/>
@@ -11272,8 +11272,8 @@
         </p:nvSpPr>
         <p:spPr>
           <a:xfrm>
-            <a:off x="8357616" y="5231315"/>
-            <a:ext cx="898846" cy="183138"/>
+            <a:off x="8357616" y="5535111"/>
+            <a:ext cx="898846" cy="199490"/>
           </a:xfrm>
           <a:prstGeom prst="rect">
             <a:avLst/>
@@ -11311,8 +11311,8 @@
         </p:nvSpPr>
         <p:spPr>
           <a:xfrm>
-            <a:off x="9256462" y="5231315"/>
-            <a:ext cx="1126586" cy="183138"/>
+            <a:off x="9256462" y="5535111"/>
+            <a:ext cx="1126586" cy="199490"/>
           </a:xfrm>
           <a:prstGeom prst="rect">
             <a:avLst/>
@@ -11336,8 +11336,8 @@
         </p:nvSpPr>
         <p:spPr>
           <a:xfrm>
-            <a:off x="9256462" y="5231315"/>
-            <a:ext cx="1126586" cy="183138"/>
+            <a:off x="9256462" y="5535111"/>
+            <a:ext cx="1126586" cy="199490"/>
           </a:xfrm>
           <a:prstGeom prst="rect">
             <a:avLst/>
@@ -11375,8 +11375,8 @@
         </p:nvSpPr>
         <p:spPr>
           <a:xfrm>
-            <a:off x="10383048" y="5231315"/>
-            <a:ext cx="1129248" cy="183138"/>
+            <a:off x="10383048" y="5535111"/>
+            <a:ext cx="1129248" cy="199490"/>
           </a:xfrm>
           <a:prstGeom prst="rect">
             <a:avLst/>
@@ -11400,8 +11400,8 @@
         </p:nvSpPr>
         <p:spPr>
           <a:xfrm>
-            <a:off x="10383048" y="5231315"/>
-            <a:ext cx="1129248" cy="183138"/>
+            <a:off x="10383048" y="5535111"/>
+            <a:ext cx="1129248" cy="199490"/>
           </a:xfrm>
           <a:prstGeom prst="rect">
             <a:avLst/>
@@ -11439,8 +11439,8 @@
         </p:nvSpPr>
         <p:spPr>
           <a:xfrm>
-            <a:off x="6208776" y="5443369"/>
-            <a:ext cx="2103120" cy="240971"/>
+            <a:off x="6208776" y="5766099"/>
+            <a:ext cx="2103120" cy="262487"/>
           </a:xfrm>
           <a:prstGeom prst="rect">
             <a:avLst/>
@@ -11478,8 +11478,8 @@
         </p:nvSpPr>
         <p:spPr>
           <a:xfrm>
-            <a:off x="8357616" y="5472286"/>
-            <a:ext cx="880673" cy="183138"/>
+            <a:off x="8357616" y="5797597"/>
+            <a:ext cx="880673" cy="199490"/>
           </a:xfrm>
           <a:prstGeom prst="rect">
             <a:avLst/>
@@ -11503,8 +11503,8 @@
         </p:nvSpPr>
         <p:spPr>
           <a:xfrm>
-            <a:off x="8357616" y="5472286"/>
-            <a:ext cx="880673" cy="183138"/>
+            <a:off x="8357616" y="5797597"/>
+            <a:ext cx="880673" cy="199490"/>
           </a:xfrm>
           <a:prstGeom prst="rect">
             <a:avLst/>
@@ -11542,8 +11542,8 @@
         </p:nvSpPr>
         <p:spPr>
           <a:xfrm>
-            <a:off x="9238289" y="5472286"/>
-            <a:ext cx="1619914" cy="183138"/>
+            <a:off x="9238289" y="5797597"/>
+            <a:ext cx="1619914" cy="199490"/>
           </a:xfrm>
           <a:prstGeom prst="rect">
             <a:avLst/>
@@ -11567,8 +11567,8 @@
         </p:nvSpPr>
         <p:spPr>
           <a:xfrm>
-            <a:off x="9238289" y="5472286"/>
-            <a:ext cx="1619914" cy="183138"/>
+            <a:off x="9238289" y="5797597"/>
+            <a:ext cx="1619914" cy="199490"/>
           </a:xfrm>
           <a:prstGeom prst="rect">
             <a:avLst/>
@@ -11606,8 +11606,8 @@
         </p:nvSpPr>
         <p:spPr>
           <a:xfrm>
-            <a:off x="10858202" y="5472286"/>
-            <a:ext cx="654094" cy="183138"/>
+            <a:off x="10858202" y="5797597"/>
+            <a:ext cx="654094" cy="199490"/>
           </a:xfrm>
           <a:prstGeom prst="rect">
             <a:avLst/>
@@ -11631,8 +11631,8 @@
         </p:nvSpPr>
         <p:spPr>
           <a:xfrm>
-            <a:off x="10858202" y="5472286"/>
-            <a:ext cx="654094" cy="183138"/>
+            <a:off x="10858202" y="5797597"/>
+            <a:ext cx="654094" cy="199490"/>
           </a:xfrm>
           <a:prstGeom prst="rect">
             <a:avLst/>
@@ -11659,65 +11659,6 @@
               <a:t>21</a:t>
             </a:r>
             <a:endParaRPr lang="en-US" sz="1300" dirty="0"/>
-          </a:p>
-        </p:txBody>
-      </p:sp>
-      <p:sp>
-        <p:nvSpPr>
-          <p:cNvPr id="251" name="Shape 249"/>
-          <p:cNvSpPr/>
-          <p:nvPr/>
-        </p:nvSpPr>
-        <p:spPr>
-          <a:xfrm>
-            <a:off x="457200" y="6126480"/>
-            <a:ext cx="11274552" cy="615696"/>
-          </a:xfrm>
-          <a:prstGeom prst="rect">
-            <a:avLst/>
-          </a:prstGeom>
-          <a:solidFill>
-            <a:srgbClr val="EDF4FA"/>
-          </a:solidFill>
-          <a:ln/>
-        </p:spPr>
-      </p:sp>
-      <p:sp>
-        <p:nvSpPr>
-          <p:cNvPr id="252" name="Text 250"/>
-          <p:cNvSpPr txBox="1"/>
-          <p:nvPr/>
-        </p:nvSpPr>
-        <p:spPr>
-          <a:xfrm>
-            <a:off x="658368" y="6144768"/>
-            <a:ext cx="10927080" cy="579120"/>
-          </a:xfrm>
-          <a:prstGeom prst="rect">
-            <a:avLst/>
-          </a:prstGeom>
-          <a:noFill/>
-          <a:ln/>
-        </p:spPr>
-        <p:txBody>
-          <a:bodyPr wrap="square" lIns="0" tIns="0" rIns="0" bIns="0" rtlCol="0" anchor="ctr"/>
-          <a:lstStyle/>
-          <a:p>
-            <a:pPr indent="0" marL="0">
-              <a:buNone/>
-            </a:pPr>
-            <a:r>
-              <a:rPr lang="en-US" sz="1600" b="1" dirty="0">
-                <a:solidFill>
-                  <a:srgbClr val="0B2C4A"/>
-                </a:solidFill>
-                <a:latin typeface="Inter" pitchFamily="34" charset="0"/>
-                <a:ea typeface="Inter" pitchFamily="34" charset="-122"/>
-                <a:cs typeface="Inter" pitchFamily="34" charset="-120"/>
-              </a:rPr>
-              <a:t>Customer pay is 52.5% of labor sale (52.8% in 2025), warranty 23.8%, internal 23.7%. Honda Spokane is most customer-pay at 70.3%.</a:t>
-            </a:r>
-            <a:endParaRPr lang="en-US" sz="1600" dirty="0"/>
           </a:p>
         </p:txBody>
       </p:sp>
@@ -12714,7 +12655,7 @@
         <p:spPr>
           <a:xfrm>
             <a:off x="457200" y="1207008"/>
-            <a:ext cx="11274552" cy="4782312"/>
+            <a:ext cx="11274552" cy="5148072"/>
           </a:xfrm>
           <a:prstGeom prst="rect">
             <a:avLst/>
@@ -12891,7 +12832,7 @@
         <p:spPr>
           <a:xfrm>
             <a:off x="658368" y="1847088"/>
-            <a:ext cx="310896" cy="239896"/>
+            <a:ext cx="310896" cy="261411"/>
           </a:xfrm>
           <a:prstGeom prst="rect">
             <a:avLst/>
@@ -12930,7 +12871,7 @@
         <p:spPr>
           <a:xfrm>
             <a:off x="1014984" y="1847088"/>
-            <a:ext cx="1920240" cy="239896"/>
+            <a:ext cx="1920240" cy="261411"/>
           </a:xfrm>
           <a:prstGeom prst="rect">
             <a:avLst/>
@@ -12968,8 +12909,8 @@
         </p:nvSpPr>
         <p:spPr>
           <a:xfrm>
-            <a:off x="3785616" y="1911860"/>
-            <a:ext cx="777240" cy="110352"/>
+            <a:off x="3785616" y="1917669"/>
+            <a:ext cx="777240" cy="120249"/>
           </a:xfrm>
           <a:prstGeom prst="rect">
             <a:avLst/>
@@ -12989,7 +12930,7 @@
         <p:spPr>
           <a:xfrm>
             <a:off x="4617720" y="1847088"/>
-            <a:ext cx="1234440" cy="239896"/>
+            <a:ext cx="1234440" cy="261411"/>
           </a:xfrm>
           <a:prstGeom prst="rect">
             <a:avLst/>
@@ -13027,8 +12968,8 @@
         </p:nvSpPr>
         <p:spPr>
           <a:xfrm>
-            <a:off x="658368" y="2086984"/>
-            <a:ext cx="310896" cy="239896"/>
+            <a:off x="658368" y="2108499"/>
+            <a:ext cx="310896" cy="261411"/>
           </a:xfrm>
           <a:prstGeom prst="rect">
             <a:avLst/>
@@ -13066,8 +13007,8 @@
         </p:nvSpPr>
         <p:spPr>
           <a:xfrm>
-            <a:off x="1014984" y="2086984"/>
-            <a:ext cx="1920240" cy="239896"/>
+            <a:off x="1014984" y="2108499"/>
+            <a:ext cx="1920240" cy="261411"/>
           </a:xfrm>
           <a:prstGeom prst="rect">
             <a:avLst/>
@@ -13105,8 +13046,8 @@
         </p:nvSpPr>
         <p:spPr>
           <a:xfrm>
-            <a:off x="3785616" y="2151755"/>
-            <a:ext cx="701821" cy="110352"/>
+            <a:off x="3785616" y="2179080"/>
+            <a:ext cx="701821" cy="120249"/>
           </a:xfrm>
           <a:prstGeom prst="rect">
             <a:avLst/>
@@ -13125,8 +13066,8 @@
         </p:nvSpPr>
         <p:spPr>
           <a:xfrm>
-            <a:off x="4617720" y="2086984"/>
-            <a:ext cx="1234440" cy="239896"/>
+            <a:off x="4617720" y="2108499"/>
+            <a:ext cx="1234440" cy="261411"/>
           </a:xfrm>
           <a:prstGeom prst="rect">
             <a:avLst/>
@@ -13164,8 +13105,8 @@
         </p:nvSpPr>
         <p:spPr>
           <a:xfrm>
-            <a:off x="658368" y="2326879"/>
-            <a:ext cx="310896" cy="239896"/>
+            <a:off x="658368" y="2369910"/>
+            <a:ext cx="310896" cy="261411"/>
           </a:xfrm>
           <a:prstGeom prst="rect">
             <a:avLst/>
@@ -13203,8 +13144,8 @@
         </p:nvSpPr>
         <p:spPr>
           <a:xfrm>
-            <a:off x="1014984" y="2326879"/>
-            <a:ext cx="1920240" cy="239896"/>
+            <a:off x="1014984" y="2369910"/>
+            <a:ext cx="1920240" cy="261411"/>
           </a:xfrm>
           <a:prstGeom prst="rect">
             <a:avLst/>
@@ -13242,8 +13183,8 @@
         </p:nvSpPr>
         <p:spPr>
           <a:xfrm>
-            <a:off x="3785616" y="2391651"/>
-            <a:ext cx="687455" cy="110352"/>
+            <a:off x="3785616" y="2440491"/>
+            <a:ext cx="687455" cy="120249"/>
           </a:xfrm>
           <a:prstGeom prst="rect">
             <a:avLst/>
@@ -13262,8 +13203,8 @@
         </p:nvSpPr>
         <p:spPr>
           <a:xfrm>
-            <a:off x="4617720" y="2326879"/>
-            <a:ext cx="1234440" cy="239896"/>
+            <a:off x="4617720" y="2369910"/>
+            <a:ext cx="1234440" cy="261411"/>
           </a:xfrm>
           <a:prstGeom prst="rect">
             <a:avLst/>
@@ -13301,8 +13242,8 @@
         </p:nvSpPr>
         <p:spPr>
           <a:xfrm>
-            <a:off x="658368" y="2566775"/>
-            <a:ext cx="310896" cy="239896"/>
+            <a:off x="658368" y="2631320"/>
+            <a:ext cx="310896" cy="261411"/>
           </a:xfrm>
           <a:prstGeom prst="rect">
             <a:avLst/>
@@ -13340,8 +13281,8 @@
         </p:nvSpPr>
         <p:spPr>
           <a:xfrm>
-            <a:off x="1014984" y="2566775"/>
-            <a:ext cx="1920240" cy="239896"/>
+            <a:off x="1014984" y="2631320"/>
+            <a:ext cx="1920240" cy="261411"/>
           </a:xfrm>
           <a:prstGeom prst="rect">
             <a:avLst/>
@@ -13379,8 +13320,8 @@
         </p:nvSpPr>
         <p:spPr>
           <a:xfrm>
-            <a:off x="3785616" y="2631546"/>
-            <a:ext cx="667785" cy="110352"/>
+            <a:off x="3785616" y="2701901"/>
+            <a:ext cx="667785" cy="120249"/>
           </a:xfrm>
           <a:prstGeom prst="rect">
             <a:avLst/>
@@ -13399,8 +13340,8 @@
         </p:nvSpPr>
         <p:spPr>
           <a:xfrm>
-            <a:off x="4617720" y="2566775"/>
-            <a:ext cx="1234440" cy="239896"/>
+            <a:off x="4617720" y="2631320"/>
+            <a:ext cx="1234440" cy="261411"/>
           </a:xfrm>
           <a:prstGeom prst="rect">
             <a:avLst/>
@@ -13438,8 +13379,8 @@
         </p:nvSpPr>
         <p:spPr>
           <a:xfrm>
-            <a:off x="658368" y="2806670"/>
-            <a:ext cx="310896" cy="239896"/>
+            <a:off x="658368" y="2892731"/>
+            <a:ext cx="310896" cy="261411"/>
           </a:xfrm>
           <a:prstGeom prst="rect">
             <a:avLst/>
@@ -13477,8 +13418,8 @@
         </p:nvSpPr>
         <p:spPr>
           <a:xfrm>
-            <a:off x="1014984" y="2806670"/>
-            <a:ext cx="1920240" cy="239896"/>
+            <a:off x="1014984" y="2892731"/>
+            <a:ext cx="1920240" cy="261411"/>
           </a:xfrm>
           <a:prstGeom prst="rect">
             <a:avLst/>
@@ -13516,8 +13457,8 @@
         </p:nvSpPr>
         <p:spPr>
           <a:xfrm>
-            <a:off x="3785616" y="2871442"/>
-            <a:ext cx="642759" cy="110352"/>
+            <a:off x="3785616" y="2963312"/>
+            <a:ext cx="642759" cy="120249"/>
           </a:xfrm>
           <a:prstGeom prst="rect">
             <a:avLst/>
@@ -13536,8 +13477,8 @@
         </p:nvSpPr>
         <p:spPr>
           <a:xfrm>
-            <a:off x="4617720" y="2806670"/>
-            <a:ext cx="1234440" cy="239896"/>
+            <a:off x="4617720" y="2892731"/>
+            <a:ext cx="1234440" cy="261411"/>
           </a:xfrm>
           <a:prstGeom prst="rect">
             <a:avLst/>
@@ -13575,8 +13516,8 @@
         </p:nvSpPr>
         <p:spPr>
           <a:xfrm>
-            <a:off x="658368" y="3046566"/>
-            <a:ext cx="310896" cy="239896"/>
+            <a:off x="658368" y="3154142"/>
+            <a:ext cx="310896" cy="261411"/>
           </a:xfrm>
           <a:prstGeom prst="rect">
             <a:avLst/>
@@ -13614,8 +13555,8 @@
         </p:nvSpPr>
         <p:spPr>
           <a:xfrm>
-            <a:off x="1014984" y="3046566"/>
-            <a:ext cx="1920240" cy="239896"/>
+            <a:off x="1014984" y="3154142"/>
+            <a:ext cx="1920240" cy="261411"/>
           </a:xfrm>
           <a:prstGeom prst="rect">
             <a:avLst/>
@@ -13653,8 +13594,8 @@
         </p:nvSpPr>
         <p:spPr>
           <a:xfrm>
-            <a:off x="3785616" y="3111337"/>
-            <a:ext cx="457956" cy="110352"/>
+            <a:off x="3785616" y="3224723"/>
+            <a:ext cx="457956" cy="120249"/>
           </a:xfrm>
           <a:prstGeom prst="rect">
             <a:avLst/>
@@ -13673,8 +13614,8 @@
         </p:nvSpPr>
         <p:spPr>
           <a:xfrm>
-            <a:off x="4617720" y="3046566"/>
-            <a:ext cx="1234440" cy="239896"/>
+            <a:off x="4617720" y="3154142"/>
+            <a:ext cx="1234440" cy="261411"/>
           </a:xfrm>
           <a:prstGeom prst="rect">
             <a:avLst/>
@@ -13712,8 +13653,8 @@
         </p:nvSpPr>
         <p:spPr>
           <a:xfrm>
-            <a:off x="658368" y="3286461"/>
-            <a:ext cx="310896" cy="239896"/>
+            <a:off x="658368" y="3415553"/>
+            <a:ext cx="310896" cy="261411"/>
           </a:xfrm>
           <a:prstGeom prst="rect">
             <a:avLst/>
@@ -13751,8 +13692,8 @@
         </p:nvSpPr>
         <p:spPr>
           <a:xfrm>
-            <a:off x="1014984" y="3286461"/>
-            <a:ext cx="1920240" cy="239896"/>
+            <a:off x="1014984" y="3415553"/>
+            <a:ext cx="1920240" cy="261411"/>
           </a:xfrm>
           <a:prstGeom prst="rect">
             <a:avLst/>
@@ -13790,8 +13731,8 @@
         </p:nvSpPr>
         <p:spPr>
           <a:xfrm>
-            <a:off x="3785616" y="3351233"/>
-            <a:ext cx="385898" cy="110352"/>
+            <a:off x="3785616" y="3486134"/>
+            <a:ext cx="385898" cy="120249"/>
           </a:xfrm>
           <a:prstGeom prst="rect">
             <a:avLst/>
@@ -13810,8 +13751,8 @@
         </p:nvSpPr>
         <p:spPr>
           <a:xfrm>
-            <a:off x="4617720" y="3286461"/>
-            <a:ext cx="1234440" cy="239896"/>
+            <a:off x="4617720" y="3415553"/>
+            <a:ext cx="1234440" cy="261411"/>
           </a:xfrm>
           <a:prstGeom prst="rect">
             <a:avLst/>
@@ -13849,8 +13790,8 @@
         </p:nvSpPr>
         <p:spPr>
           <a:xfrm>
-            <a:off x="658368" y="3526357"/>
-            <a:ext cx="310896" cy="239896"/>
+            <a:off x="658368" y="3676964"/>
+            <a:ext cx="310896" cy="261411"/>
           </a:xfrm>
           <a:prstGeom prst="rect">
             <a:avLst/>
@@ -13888,8 +13829,8 @@
         </p:nvSpPr>
         <p:spPr>
           <a:xfrm>
-            <a:off x="1014984" y="3526357"/>
-            <a:ext cx="1920240" cy="239896"/>
+            <a:off x="1014984" y="3676964"/>
+            <a:ext cx="1920240" cy="261411"/>
           </a:xfrm>
           <a:prstGeom prst="rect">
             <a:avLst/>
@@ -13927,8 +13868,8 @@
         </p:nvSpPr>
         <p:spPr>
           <a:xfrm>
-            <a:off x="3785616" y="3591128"/>
-            <a:ext cx="311681" cy="110352"/>
+            <a:off x="3785616" y="3747545"/>
+            <a:ext cx="311681" cy="120249"/>
           </a:xfrm>
           <a:prstGeom prst="rect">
             <a:avLst/>
@@ -13947,8 +13888,8 @@
         </p:nvSpPr>
         <p:spPr>
           <a:xfrm>
-            <a:off x="4617720" y="3526357"/>
-            <a:ext cx="1234440" cy="239896"/>
+            <a:off x="4617720" y="3676964"/>
+            <a:ext cx="1234440" cy="261411"/>
           </a:xfrm>
           <a:prstGeom prst="rect">
             <a:avLst/>
@@ -13986,8 +13927,8 @@
         </p:nvSpPr>
         <p:spPr>
           <a:xfrm>
-            <a:off x="658368" y="3766252"/>
-            <a:ext cx="310896" cy="239896"/>
+            <a:off x="658368" y="3938375"/>
+            <a:ext cx="310896" cy="261411"/>
           </a:xfrm>
           <a:prstGeom prst="rect">
             <a:avLst/>
@@ -14025,8 +13966,8 @@
         </p:nvSpPr>
         <p:spPr>
           <a:xfrm>
-            <a:off x="1014984" y="3766252"/>
-            <a:ext cx="1920240" cy="239896"/>
+            <a:off x="1014984" y="3938375"/>
+            <a:ext cx="1920240" cy="261411"/>
           </a:xfrm>
           <a:prstGeom prst="rect">
             <a:avLst/>
@@ -14064,8 +14005,8 @@
         </p:nvSpPr>
         <p:spPr>
           <a:xfrm>
-            <a:off x="3785616" y="3831024"/>
-            <a:ext cx="305606" cy="110352"/>
+            <a:off x="3785616" y="4008956"/>
+            <a:ext cx="305606" cy="120249"/>
           </a:xfrm>
           <a:prstGeom prst="rect">
             <a:avLst/>
@@ -14084,8 +14025,8 @@
         </p:nvSpPr>
         <p:spPr>
           <a:xfrm>
-            <a:off x="4617720" y="3766252"/>
-            <a:ext cx="1234440" cy="239896"/>
+            <a:off x="4617720" y="3938375"/>
+            <a:ext cx="1234440" cy="261411"/>
           </a:xfrm>
           <a:prstGeom prst="rect">
             <a:avLst/>
@@ -14123,8 +14064,8 @@
         </p:nvSpPr>
         <p:spPr>
           <a:xfrm>
-            <a:off x="658368" y="4006148"/>
-            <a:ext cx="310896" cy="239896"/>
+            <a:off x="658368" y="4199785"/>
+            <a:ext cx="310896" cy="261411"/>
           </a:xfrm>
           <a:prstGeom prst="rect">
             <a:avLst/>
@@ -14162,8 +14103,8 @@
         </p:nvSpPr>
         <p:spPr>
           <a:xfrm>
-            <a:off x="1014984" y="4006148"/>
-            <a:ext cx="1920240" cy="239896"/>
+            <a:off x="1014984" y="4199785"/>
+            <a:ext cx="1920240" cy="261411"/>
           </a:xfrm>
           <a:prstGeom prst="rect">
             <a:avLst/>
@@ -14201,8 +14142,8 @@
         </p:nvSpPr>
         <p:spPr>
           <a:xfrm>
-            <a:off x="3785616" y="4070920"/>
-            <a:ext cx="284145" cy="110352"/>
+            <a:off x="3785616" y="4270366"/>
+            <a:ext cx="284145" cy="120249"/>
           </a:xfrm>
           <a:prstGeom prst="rect">
             <a:avLst/>
@@ -14221,8 +14162,8 @@
         </p:nvSpPr>
         <p:spPr>
           <a:xfrm>
-            <a:off x="4617720" y="4006148"/>
-            <a:ext cx="1234440" cy="239896"/>
+            <a:off x="4617720" y="4199785"/>
+            <a:ext cx="1234440" cy="261411"/>
           </a:xfrm>
           <a:prstGeom prst="rect">
             <a:avLst/>
@@ -14260,8 +14201,8 @@
         </p:nvSpPr>
         <p:spPr>
           <a:xfrm>
-            <a:off x="658368" y="4246043"/>
-            <a:ext cx="310896" cy="239896"/>
+            <a:off x="658368" y="4461196"/>
+            <a:ext cx="310896" cy="261411"/>
           </a:xfrm>
           <a:prstGeom prst="rect">
             <a:avLst/>
@@ -14299,8 +14240,8 @@
         </p:nvSpPr>
         <p:spPr>
           <a:xfrm>
-            <a:off x="1014984" y="4246043"/>
-            <a:ext cx="1920240" cy="239896"/>
+            <a:off x="1014984" y="4461196"/>
+            <a:ext cx="1920240" cy="261411"/>
           </a:xfrm>
           <a:prstGeom prst="rect">
             <a:avLst/>
@@ -14338,8 +14279,8 @@
         </p:nvSpPr>
         <p:spPr>
           <a:xfrm>
-            <a:off x="3785616" y="4310815"/>
-            <a:ext cx="231565" cy="110352"/>
+            <a:off x="3785616" y="4531777"/>
+            <a:ext cx="231565" cy="120249"/>
           </a:xfrm>
           <a:prstGeom prst="rect">
             <a:avLst/>
@@ -14358,8 +14299,8 @@
         </p:nvSpPr>
         <p:spPr>
           <a:xfrm>
-            <a:off x="4617720" y="4246043"/>
-            <a:ext cx="1234440" cy="239896"/>
+            <a:off x="4617720" y="4461196"/>
+            <a:ext cx="1234440" cy="261411"/>
           </a:xfrm>
           <a:prstGeom prst="rect">
             <a:avLst/>
@@ -14397,8 +14338,8 @@
         </p:nvSpPr>
         <p:spPr>
           <a:xfrm>
-            <a:off x="658368" y="4485939"/>
-            <a:ext cx="310896" cy="239896"/>
+            <a:off x="658368" y="4722607"/>
+            <a:ext cx="310896" cy="261411"/>
           </a:xfrm>
           <a:prstGeom prst="rect">
             <a:avLst/>
@@ -14436,8 +14377,8 @@
         </p:nvSpPr>
         <p:spPr>
           <a:xfrm>
-            <a:off x="1014984" y="4485939"/>
-            <a:ext cx="1920240" cy="239896"/>
+            <a:off x="1014984" y="4722607"/>
+            <a:ext cx="1920240" cy="261411"/>
           </a:xfrm>
           <a:prstGeom prst="rect">
             <a:avLst/>
@@ -14475,8 +14416,8 @@
         </p:nvSpPr>
         <p:spPr>
           <a:xfrm>
-            <a:off x="3785616" y="4550711"/>
-            <a:ext cx="181969" cy="110352"/>
+            <a:off x="3785616" y="4793188"/>
+            <a:ext cx="181969" cy="120249"/>
           </a:xfrm>
           <a:prstGeom prst="rect">
             <a:avLst/>
@@ -14495,8 +14436,8 @@
         </p:nvSpPr>
         <p:spPr>
           <a:xfrm>
-            <a:off x="4617720" y="4485939"/>
-            <a:ext cx="1234440" cy="239896"/>
+            <a:off x="4617720" y="4722607"/>
+            <a:ext cx="1234440" cy="261411"/>
           </a:xfrm>
           <a:prstGeom prst="rect">
             <a:avLst/>
@@ -14534,8 +14475,8 @@
         </p:nvSpPr>
         <p:spPr>
           <a:xfrm>
-            <a:off x="658368" y="4725834"/>
-            <a:ext cx="310896" cy="239896"/>
+            <a:off x="658368" y="4984018"/>
+            <a:ext cx="310896" cy="261411"/>
           </a:xfrm>
           <a:prstGeom prst="rect">
             <a:avLst/>
@@ -14573,8 +14514,8 @@
         </p:nvSpPr>
         <p:spPr>
           <a:xfrm>
-            <a:off x="1014984" y="4725834"/>
-            <a:ext cx="1920240" cy="239896"/>
+            <a:off x="1014984" y="4984018"/>
+            <a:ext cx="1920240" cy="261411"/>
           </a:xfrm>
           <a:prstGeom prst="rect">
             <a:avLst/>
@@ -14612,8 +14553,8 @@
         </p:nvSpPr>
         <p:spPr>
           <a:xfrm>
-            <a:off x="3785616" y="4790606"/>
-            <a:ext cx="175356" cy="110352"/>
+            <a:off x="3785616" y="5054599"/>
+            <a:ext cx="175356" cy="120249"/>
           </a:xfrm>
           <a:prstGeom prst="rect">
             <a:avLst/>
@@ -14632,8 +14573,8 @@
         </p:nvSpPr>
         <p:spPr>
           <a:xfrm>
-            <a:off x="4617720" y="4725834"/>
-            <a:ext cx="1234440" cy="239896"/>
+            <a:off x="4617720" y="4984018"/>
+            <a:ext cx="1234440" cy="261411"/>
           </a:xfrm>
           <a:prstGeom prst="rect">
             <a:avLst/>
@@ -14671,8 +14612,8 @@
         </p:nvSpPr>
         <p:spPr>
           <a:xfrm>
-            <a:off x="658368" y="4965730"/>
-            <a:ext cx="310896" cy="239896"/>
+            <a:off x="658368" y="5245429"/>
+            <a:ext cx="310896" cy="261411"/>
           </a:xfrm>
           <a:prstGeom prst="rect">
             <a:avLst/>
@@ -14710,8 +14651,8 @@
         </p:nvSpPr>
         <p:spPr>
           <a:xfrm>
-            <a:off x="1014984" y="4965730"/>
-            <a:ext cx="1920240" cy="239896"/>
+            <a:off x="1014984" y="5245429"/>
+            <a:ext cx="1920240" cy="261411"/>
           </a:xfrm>
           <a:prstGeom prst="rect">
             <a:avLst/>
@@ -14749,8 +14690,8 @@
         </p:nvSpPr>
         <p:spPr>
           <a:xfrm>
-            <a:off x="3785616" y="5030502"/>
-            <a:ext cx="92081" cy="110352"/>
+            <a:off x="3785616" y="5316010"/>
+            <a:ext cx="92081" cy="120249"/>
           </a:xfrm>
           <a:prstGeom prst="rect">
             <a:avLst/>
@@ -14769,8 +14710,8 @@
         </p:nvSpPr>
         <p:spPr>
           <a:xfrm>
-            <a:off x="4617720" y="4965730"/>
-            <a:ext cx="1234440" cy="239896"/>
+            <a:off x="4617720" y="5245429"/>
+            <a:ext cx="1234440" cy="261411"/>
           </a:xfrm>
           <a:prstGeom prst="rect">
             <a:avLst/>
@@ -14808,8 +14749,8 @@
         </p:nvSpPr>
         <p:spPr>
           <a:xfrm>
-            <a:off x="658368" y="5205625"/>
-            <a:ext cx="310896" cy="239896"/>
+            <a:off x="658368" y="5506840"/>
+            <a:ext cx="310896" cy="261411"/>
           </a:xfrm>
           <a:prstGeom prst="rect">
             <a:avLst/>
@@ -14847,8 +14788,8 @@
         </p:nvSpPr>
         <p:spPr>
           <a:xfrm>
-            <a:off x="1014984" y="5205625"/>
-            <a:ext cx="1920240" cy="239896"/>
+            <a:off x="1014984" y="5506840"/>
+            <a:ext cx="1920240" cy="261411"/>
           </a:xfrm>
           <a:prstGeom prst="rect">
             <a:avLst/>
@@ -14886,8 +14827,8 @@
         </p:nvSpPr>
         <p:spPr>
           <a:xfrm>
-            <a:off x="3785616" y="5270397"/>
-            <a:ext cx="74077" cy="110352"/>
+            <a:off x="3785616" y="5577420"/>
+            <a:ext cx="74077" cy="120249"/>
           </a:xfrm>
           <a:prstGeom prst="rect">
             <a:avLst/>
@@ -14906,8 +14847,8 @@
         </p:nvSpPr>
         <p:spPr>
           <a:xfrm>
-            <a:off x="4617720" y="5205625"/>
-            <a:ext cx="1234440" cy="239896"/>
+            <a:off x="4617720" y="5506840"/>
+            <a:ext cx="1234440" cy="261411"/>
           </a:xfrm>
           <a:prstGeom prst="rect">
             <a:avLst/>
@@ -14945,8 +14886,8 @@
         </p:nvSpPr>
         <p:spPr>
           <a:xfrm>
-            <a:off x="658368" y="5445521"/>
-            <a:ext cx="310896" cy="239896"/>
+            <a:off x="658368" y="5768250"/>
+            <a:ext cx="310896" cy="261411"/>
           </a:xfrm>
           <a:prstGeom prst="rect">
             <a:avLst/>
@@ -14984,8 +14925,8 @@
         </p:nvSpPr>
         <p:spPr>
           <a:xfrm>
-            <a:off x="1014984" y="5445521"/>
-            <a:ext cx="1920240" cy="239896"/>
+            <a:off x="1014984" y="5768250"/>
+            <a:ext cx="1920240" cy="261411"/>
           </a:xfrm>
           <a:prstGeom prst="rect">
             <a:avLst/>
@@ -15023,8 +14964,8 @@
         </p:nvSpPr>
         <p:spPr>
           <a:xfrm>
-            <a:off x="3785616" y="5510293"/>
-            <a:ext cx="54365" cy="110352"/>
+            <a:off x="3785616" y="5838831"/>
+            <a:ext cx="54365" cy="120249"/>
           </a:xfrm>
           <a:prstGeom prst="rect">
             <a:avLst/>
@@ -15043,8 +14984,8 @@
         </p:nvSpPr>
         <p:spPr>
           <a:xfrm>
-            <a:off x="4617720" y="5445521"/>
-            <a:ext cx="1234440" cy="239896"/>
+            <a:off x="4617720" y="5768250"/>
+            <a:ext cx="1234440" cy="261411"/>
           </a:xfrm>
           <a:prstGeom prst="rect">
             <a:avLst/>
@@ -15082,8 +15023,8 @@
         </p:nvSpPr>
         <p:spPr>
           <a:xfrm>
-            <a:off x="658368" y="5685416"/>
-            <a:ext cx="310896" cy="239896"/>
+            <a:off x="658368" y="6029661"/>
+            <a:ext cx="310896" cy="261411"/>
           </a:xfrm>
           <a:prstGeom prst="rect">
             <a:avLst/>
@@ -15121,8 +15062,8 @@
         </p:nvSpPr>
         <p:spPr>
           <a:xfrm>
-            <a:off x="1014984" y="5685416"/>
-            <a:ext cx="1920240" cy="239896"/>
+            <a:off x="1014984" y="6029661"/>
+            <a:ext cx="1920240" cy="261411"/>
           </a:xfrm>
           <a:prstGeom prst="rect">
             <a:avLst/>
@@ -15160,8 +15101,8 @@
         </p:nvSpPr>
         <p:spPr>
           <a:xfrm>
-            <a:off x="3785616" y="5750188"/>
-            <a:ext cx="16625" cy="110352"/>
+            <a:off x="3785616" y="6100242"/>
+            <a:ext cx="16625" cy="120249"/>
           </a:xfrm>
           <a:prstGeom prst="rect">
             <a:avLst/>
@@ -15180,8 +15121,8 @@
         </p:nvSpPr>
         <p:spPr>
           <a:xfrm>
-            <a:off x="4617720" y="5685416"/>
-            <a:ext cx="1234440" cy="239896"/>
+            <a:off x="4617720" y="6029661"/>
+            <a:ext cx="1234440" cy="261411"/>
           </a:xfrm>
           <a:prstGeom prst="rect">
             <a:avLst/>
@@ -15220,7 +15161,7 @@
         <p:spPr>
           <a:xfrm>
             <a:off x="6208776" y="1847088"/>
-            <a:ext cx="310896" cy="239896"/>
+            <a:ext cx="310896" cy="261411"/>
           </a:xfrm>
           <a:prstGeom prst="rect">
             <a:avLst/>
@@ -15259,7 +15200,7 @@
         <p:spPr>
           <a:xfrm>
             <a:off x="6565392" y="1847088"/>
-            <a:ext cx="1920240" cy="239896"/>
+            <a:ext cx="1920240" cy="261411"/>
           </a:xfrm>
           <a:prstGeom prst="rect">
             <a:avLst/>
@@ -15297,8 +15238,8 @@
         </p:nvSpPr>
         <p:spPr>
           <a:xfrm>
-            <a:off x="9336024" y="1911860"/>
-            <a:ext cx="12802" cy="110352"/>
+            <a:off x="9336024" y="1917669"/>
+            <a:ext cx="12802" cy="120249"/>
           </a:xfrm>
           <a:prstGeom prst="rect">
             <a:avLst/>
@@ -15318,7 +15259,7 @@
         <p:spPr>
           <a:xfrm>
             <a:off x="10168128" y="1847088"/>
-            <a:ext cx="1234440" cy="239896"/>
+            <a:ext cx="1234440" cy="261411"/>
           </a:xfrm>
           <a:prstGeom prst="rect">
             <a:avLst/>
@@ -15356,8 +15297,8 @@
         </p:nvSpPr>
         <p:spPr>
           <a:xfrm>
-            <a:off x="6208776" y="2086984"/>
-            <a:ext cx="310896" cy="239896"/>
+            <a:off x="6208776" y="2108499"/>
+            <a:ext cx="310896" cy="261411"/>
           </a:xfrm>
           <a:prstGeom prst="rect">
             <a:avLst/>
@@ -15395,8 +15336,8 @@
         </p:nvSpPr>
         <p:spPr>
           <a:xfrm>
-            <a:off x="6565392" y="2086984"/>
-            <a:ext cx="1920240" cy="239896"/>
+            <a:off x="6565392" y="2108499"/>
+            <a:ext cx="1920240" cy="261411"/>
           </a:xfrm>
           <a:prstGeom prst="rect">
             <a:avLst/>
@@ -15434,8 +15375,8 @@
         </p:nvSpPr>
         <p:spPr>
           <a:xfrm>
-            <a:off x="9336024" y="2151755"/>
-            <a:ext cx="12802" cy="110352"/>
+            <a:off x="9336024" y="2179080"/>
+            <a:ext cx="12802" cy="120249"/>
           </a:xfrm>
           <a:prstGeom prst="rect">
             <a:avLst/>
@@ -15454,8 +15395,8 @@
         </p:nvSpPr>
         <p:spPr>
           <a:xfrm>
-            <a:off x="10168128" y="2086984"/>
-            <a:ext cx="1234440" cy="239896"/>
+            <a:off x="10168128" y="2108499"/>
+            <a:ext cx="1234440" cy="261411"/>
           </a:xfrm>
           <a:prstGeom prst="rect">
             <a:avLst/>
@@ -15493,8 +15434,8 @@
         </p:nvSpPr>
         <p:spPr>
           <a:xfrm>
-            <a:off x="6208776" y="2326879"/>
-            <a:ext cx="310896" cy="239896"/>
+            <a:off x="6208776" y="2369910"/>
+            <a:ext cx="310896" cy="261411"/>
           </a:xfrm>
           <a:prstGeom prst="rect">
             <a:avLst/>
@@ -15532,8 +15473,8 @@
         </p:nvSpPr>
         <p:spPr>
           <a:xfrm>
-            <a:off x="6565392" y="2326879"/>
-            <a:ext cx="1920240" cy="239896"/>
+            <a:off x="6565392" y="2369910"/>
+            <a:ext cx="1920240" cy="261411"/>
           </a:xfrm>
           <a:prstGeom prst="rect">
             <a:avLst/>
@@ -15571,8 +15512,8 @@
         </p:nvSpPr>
         <p:spPr>
           <a:xfrm>
-            <a:off x="9331272" y="2391651"/>
-            <a:ext cx="12802" cy="110352"/>
+            <a:off x="9331272" y="2440491"/>
+            <a:ext cx="12802" cy="120249"/>
           </a:xfrm>
           <a:prstGeom prst="rect">
             <a:avLst/>
@@ -15591,8 +15532,8 @@
         </p:nvSpPr>
         <p:spPr>
           <a:xfrm>
-            <a:off x="10168128" y="2326879"/>
-            <a:ext cx="1234440" cy="239896"/>
+            <a:off x="10168128" y="2369910"/>
+            <a:ext cx="1234440" cy="261411"/>
           </a:xfrm>
           <a:prstGeom prst="rect">
             <a:avLst/>
@@ -15630,8 +15571,8 @@
         </p:nvSpPr>
         <p:spPr>
           <a:xfrm>
-            <a:off x="6208776" y="2566775"/>
-            <a:ext cx="310896" cy="239896"/>
+            <a:off x="6208776" y="2631320"/>
+            <a:ext cx="310896" cy="261411"/>
           </a:xfrm>
           <a:prstGeom prst="rect">
             <a:avLst/>
@@ -15669,8 +15610,8 @@
         </p:nvSpPr>
         <p:spPr>
           <a:xfrm>
-            <a:off x="6565392" y="2566775"/>
-            <a:ext cx="1920240" cy="239896"/>
+            <a:off x="6565392" y="2631320"/>
+            <a:ext cx="1920240" cy="261411"/>
           </a:xfrm>
           <a:prstGeom prst="rect">
             <a:avLst/>
@@ -15708,8 +15649,8 @@
         </p:nvSpPr>
         <p:spPr>
           <a:xfrm>
-            <a:off x="9318561" y="2631546"/>
-            <a:ext cx="17463" cy="110352"/>
+            <a:off x="9318561" y="2701901"/>
+            <a:ext cx="17463" cy="120249"/>
           </a:xfrm>
           <a:prstGeom prst="rect">
             <a:avLst/>
@@ -15728,8 +15669,8 @@
         </p:nvSpPr>
         <p:spPr>
           <a:xfrm>
-            <a:off x="10168128" y="2566775"/>
-            <a:ext cx="1234440" cy="239896"/>
+            <a:off x="10168128" y="2631320"/>
+            <a:ext cx="1234440" cy="261411"/>
           </a:xfrm>
           <a:prstGeom prst="rect">
             <a:avLst/>
@@ -15767,8 +15708,8 @@
         </p:nvSpPr>
         <p:spPr>
           <a:xfrm>
-            <a:off x="6208776" y="2806670"/>
-            <a:ext cx="310896" cy="239896"/>
+            <a:off x="6208776" y="2892731"/>
+            <a:ext cx="310896" cy="261411"/>
           </a:xfrm>
           <a:prstGeom prst="rect">
             <a:avLst/>
@@ -15806,8 +15747,8 @@
         </p:nvSpPr>
         <p:spPr>
           <a:xfrm>
-            <a:off x="6565392" y="2806670"/>
-            <a:ext cx="1920240" cy="239896"/>
+            <a:off x="6565392" y="2892731"/>
+            <a:ext cx="1920240" cy="261411"/>
           </a:xfrm>
           <a:prstGeom prst="rect">
             <a:avLst/>
@@ -15845,8 +15786,8 @@
         </p:nvSpPr>
         <p:spPr>
           <a:xfrm>
-            <a:off x="9312447" y="2871442"/>
-            <a:ext cx="23577" cy="110352"/>
+            <a:off x="9312447" y="2963312"/>
+            <a:ext cx="23577" cy="120249"/>
           </a:xfrm>
           <a:prstGeom prst="rect">
             <a:avLst/>
@@ -15865,8 +15806,8 @@
         </p:nvSpPr>
         <p:spPr>
           <a:xfrm>
-            <a:off x="10168128" y="2806670"/>
-            <a:ext cx="1234440" cy="239896"/>
+            <a:off x="10168128" y="2892731"/>
+            <a:ext cx="1234440" cy="261411"/>
           </a:xfrm>
           <a:prstGeom prst="rect">
             <a:avLst/>
@@ -15904,8 +15845,8 @@
         </p:nvSpPr>
         <p:spPr>
           <a:xfrm>
-            <a:off x="6208776" y="3046566"/>
-            <a:ext cx="310896" cy="239896"/>
+            <a:off x="6208776" y="3154142"/>
+            <a:ext cx="310896" cy="261411"/>
           </a:xfrm>
           <a:prstGeom prst="rect">
             <a:avLst/>
@@ -15943,8 +15884,8 @@
         </p:nvSpPr>
         <p:spPr>
           <a:xfrm>
-            <a:off x="6565392" y="3046566"/>
-            <a:ext cx="1920240" cy="239896"/>
+            <a:off x="6565392" y="3154142"/>
+            <a:ext cx="1920240" cy="261411"/>
           </a:xfrm>
           <a:prstGeom prst="rect">
             <a:avLst/>
@@ -15982,8 +15923,8 @@
         </p:nvSpPr>
         <p:spPr>
           <a:xfrm>
-            <a:off x="9255154" y="3111337"/>
-            <a:ext cx="80870" cy="110352"/>
+            <a:off x="9255154" y="3224723"/>
+            <a:ext cx="80870" cy="120249"/>
           </a:xfrm>
           <a:prstGeom prst="rect">
             <a:avLst/>
@@ -16002,8 +15943,8 @@
         </p:nvSpPr>
         <p:spPr>
           <a:xfrm>
-            <a:off x="10168128" y="3046566"/>
-            <a:ext cx="1234440" cy="239896"/>
+            <a:off x="10168128" y="3154142"/>
+            <a:ext cx="1234440" cy="261411"/>
           </a:xfrm>
           <a:prstGeom prst="rect">
             <a:avLst/>
@@ -16041,8 +15982,8 @@
         </p:nvSpPr>
         <p:spPr>
           <a:xfrm>
-            <a:off x="6208776" y="3286461"/>
-            <a:ext cx="310896" cy="239896"/>
+            <a:off x="6208776" y="3415553"/>
+            <a:ext cx="310896" cy="261411"/>
           </a:xfrm>
           <a:prstGeom prst="rect">
             <a:avLst/>
@@ -16080,8 +16021,8 @@
         </p:nvSpPr>
         <p:spPr>
           <a:xfrm>
-            <a:off x="6565392" y="3286461"/>
-            <a:ext cx="1920240" cy="239896"/>
+            <a:off x="6565392" y="3415553"/>
+            <a:ext cx="1920240" cy="261411"/>
           </a:xfrm>
           <a:prstGeom prst="rect">
             <a:avLst/>
@@ -16119,8 +16060,8 @@
         </p:nvSpPr>
         <p:spPr>
           <a:xfrm>
-            <a:off x="9239288" y="3351233"/>
-            <a:ext cx="96736" cy="110352"/>
+            <a:off x="9239288" y="3486134"/>
+            <a:ext cx="96736" cy="120249"/>
           </a:xfrm>
           <a:prstGeom prst="rect">
             <a:avLst/>
@@ -16139,8 +16080,8 @@
         </p:nvSpPr>
         <p:spPr>
           <a:xfrm>
-            <a:off x="10168128" y="3286461"/>
-            <a:ext cx="1234440" cy="239896"/>
+            <a:off x="10168128" y="3415553"/>
+            <a:ext cx="1234440" cy="261411"/>
           </a:xfrm>
           <a:prstGeom prst="rect">
             <a:avLst/>
@@ -16178,8 +16119,8 @@
         </p:nvSpPr>
         <p:spPr>
           <a:xfrm>
-            <a:off x="6208776" y="3526357"/>
-            <a:ext cx="310896" cy="239896"/>
+            <a:off x="6208776" y="3676964"/>
+            <a:ext cx="310896" cy="261411"/>
           </a:xfrm>
           <a:prstGeom prst="rect">
             <a:avLst/>
@@ -16217,8 +16158,8 @@
         </p:nvSpPr>
         <p:spPr>
           <a:xfrm>
-            <a:off x="6565392" y="3526357"/>
-            <a:ext cx="1920240" cy="239896"/>
+            <a:off x="6565392" y="3676964"/>
+            <a:ext cx="1920240" cy="261411"/>
           </a:xfrm>
           <a:prstGeom prst="rect">
             <a:avLst/>
@@ -16256,8 +16197,8 @@
         </p:nvSpPr>
         <p:spPr>
           <a:xfrm>
-            <a:off x="9234185" y="3591128"/>
-            <a:ext cx="101839" cy="110352"/>
+            <a:off x="9234185" y="3747545"/>
+            <a:ext cx="101839" cy="120249"/>
           </a:xfrm>
           <a:prstGeom prst="rect">
             <a:avLst/>
@@ -16276,8 +16217,8 @@
         </p:nvSpPr>
         <p:spPr>
           <a:xfrm>
-            <a:off x="10168128" y="3526357"/>
-            <a:ext cx="1234440" cy="239896"/>
+            <a:off x="10168128" y="3676964"/>
+            <a:ext cx="1234440" cy="261411"/>
           </a:xfrm>
           <a:prstGeom prst="rect">
             <a:avLst/>
@@ -16315,8 +16256,8 @@
         </p:nvSpPr>
         <p:spPr>
           <a:xfrm>
-            <a:off x="6208776" y="3766252"/>
-            <a:ext cx="310896" cy="239896"/>
+            <a:off x="6208776" y="3938375"/>
+            <a:ext cx="310896" cy="261411"/>
           </a:xfrm>
           <a:prstGeom prst="rect">
             <a:avLst/>
@@ -16354,8 +16295,8 @@
         </p:nvSpPr>
         <p:spPr>
           <a:xfrm>
-            <a:off x="6565392" y="3766252"/>
-            <a:ext cx="1920240" cy="239896"/>
+            <a:off x="6565392" y="3938375"/>
+            <a:ext cx="1920240" cy="261411"/>
           </a:xfrm>
           <a:prstGeom prst="rect">
             <a:avLst/>
@@ -16393,8 +16334,8 @@
         </p:nvSpPr>
         <p:spPr>
           <a:xfrm>
-            <a:off x="9169807" y="3831024"/>
-            <a:ext cx="166217" cy="110352"/>
+            <a:off x="9169807" y="4008956"/>
+            <a:ext cx="166217" cy="120249"/>
           </a:xfrm>
           <a:prstGeom prst="rect">
             <a:avLst/>
@@ -16413,8 +16354,8 @@
         </p:nvSpPr>
         <p:spPr>
           <a:xfrm>
-            <a:off x="10168128" y="3766252"/>
-            <a:ext cx="1234440" cy="239896"/>
+            <a:off x="10168128" y="3938375"/>
+            <a:ext cx="1234440" cy="261411"/>
           </a:xfrm>
           <a:prstGeom prst="rect">
             <a:avLst/>
@@ -16452,8 +16393,8 @@
         </p:nvSpPr>
         <p:spPr>
           <a:xfrm>
-            <a:off x="6208776" y="4006148"/>
-            <a:ext cx="310896" cy="239896"/>
+            <a:off x="6208776" y="4199785"/>
+            <a:ext cx="310896" cy="261411"/>
           </a:xfrm>
           <a:prstGeom prst="rect">
             <a:avLst/>
@@ -16491,8 +16432,8 @@
         </p:nvSpPr>
         <p:spPr>
           <a:xfrm>
-            <a:off x="6565392" y="4006148"/>
-            <a:ext cx="1920240" cy="239896"/>
+            <a:off x="6565392" y="4199785"/>
+            <a:ext cx="1920240" cy="261411"/>
           </a:xfrm>
           <a:prstGeom prst="rect">
             <a:avLst/>
@@ -16530,8 +16471,8 @@
         </p:nvSpPr>
         <p:spPr>
           <a:xfrm>
-            <a:off x="9092399" y="4070920"/>
-            <a:ext cx="243625" cy="110352"/>
+            <a:off x="9092399" y="4270366"/>
+            <a:ext cx="243625" cy="120249"/>
           </a:xfrm>
           <a:prstGeom prst="rect">
             <a:avLst/>
@@ -16550,8 +16491,8 @@
         </p:nvSpPr>
         <p:spPr>
           <a:xfrm>
-            <a:off x="10168128" y="4006148"/>
-            <a:ext cx="1234440" cy="239896"/>
+            <a:off x="10168128" y="4199785"/>
+            <a:ext cx="1234440" cy="261411"/>
           </a:xfrm>
           <a:prstGeom prst="rect">
             <a:avLst/>
@@ -16589,8 +16530,8 @@
         </p:nvSpPr>
         <p:spPr>
           <a:xfrm>
-            <a:off x="6208776" y="4246043"/>
-            <a:ext cx="310896" cy="239896"/>
+            <a:off x="6208776" y="4461196"/>
+            <a:ext cx="310896" cy="261411"/>
           </a:xfrm>
           <a:prstGeom prst="rect">
             <a:avLst/>
@@ -16628,8 +16569,8 @@
         </p:nvSpPr>
         <p:spPr>
           <a:xfrm>
-            <a:off x="6565392" y="4246043"/>
-            <a:ext cx="1920240" cy="239896"/>
+            <a:off x="6565392" y="4461196"/>
+            <a:ext cx="1920240" cy="261411"/>
           </a:xfrm>
           <a:prstGeom prst="rect">
             <a:avLst/>
@@ -16667,8 +16608,8 @@
         </p:nvSpPr>
         <p:spPr>
           <a:xfrm>
-            <a:off x="9057340" y="4310815"/>
-            <a:ext cx="278684" cy="110352"/>
+            <a:off x="9057340" y="4531777"/>
+            <a:ext cx="278684" cy="120249"/>
           </a:xfrm>
           <a:prstGeom prst="rect">
             <a:avLst/>
@@ -16687,8 +16628,8 @@
         </p:nvSpPr>
         <p:spPr>
           <a:xfrm>
-            <a:off x="10168128" y="4246043"/>
-            <a:ext cx="1234440" cy="239896"/>
+            <a:off x="10168128" y="4461196"/>
+            <a:ext cx="1234440" cy="261411"/>
           </a:xfrm>
           <a:prstGeom prst="rect">
             <a:avLst/>
@@ -16726,8 +16667,8 @@
         </p:nvSpPr>
         <p:spPr>
           <a:xfrm>
-            <a:off x="6208776" y="4485939"/>
-            <a:ext cx="310896" cy="239896"/>
+            <a:off x="6208776" y="4722607"/>
+            <a:ext cx="310896" cy="261411"/>
           </a:xfrm>
           <a:prstGeom prst="rect">
             <a:avLst/>
@@ -16765,8 +16706,8 @@
         </p:nvSpPr>
         <p:spPr>
           <a:xfrm>
-            <a:off x="6565392" y="4485939"/>
-            <a:ext cx="1920240" cy="239896"/>
+            <a:off x="6565392" y="4722607"/>
+            <a:ext cx="1920240" cy="261411"/>
           </a:xfrm>
           <a:prstGeom prst="rect">
             <a:avLst/>
@@ -16804,8 +16745,8 @@
         </p:nvSpPr>
         <p:spPr>
           <a:xfrm>
-            <a:off x="9043690" y="4550711"/>
-            <a:ext cx="292334" cy="110352"/>
+            <a:off x="9043690" y="4793188"/>
+            <a:ext cx="292334" cy="120249"/>
           </a:xfrm>
           <a:prstGeom prst="rect">
             <a:avLst/>
@@ -16824,8 +16765,8 @@
         </p:nvSpPr>
         <p:spPr>
           <a:xfrm>
-            <a:off x="10168128" y="4485939"/>
-            <a:ext cx="1234440" cy="239896"/>
+            <a:off x="10168128" y="4722607"/>
+            <a:ext cx="1234440" cy="261411"/>
           </a:xfrm>
           <a:prstGeom prst="rect">
             <a:avLst/>
@@ -16863,8 +16804,8 @@
         </p:nvSpPr>
         <p:spPr>
           <a:xfrm>
-            <a:off x="6208776" y="4725834"/>
-            <a:ext cx="310896" cy="239896"/>
+            <a:off x="6208776" y="4984018"/>
+            <a:ext cx="310896" cy="261411"/>
           </a:xfrm>
           <a:prstGeom prst="rect">
             <a:avLst/>
@@ -16902,8 +16843,8 @@
         </p:nvSpPr>
         <p:spPr>
           <a:xfrm>
-            <a:off x="6565392" y="4725834"/>
-            <a:ext cx="1920240" cy="239896"/>
+            <a:off x="6565392" y="4984018"/>
+            <a:ext cx="1920240" cy="261411"/>
           </a:xfrm>
           <a:prstGeom prst="rect">
             <a:avLst/>
@@ -16941,8 +16882,8 @@
         </p:nvSpPr>
         <p:spPr>
           <a:xfrm>
-            <a:off x="8923753" y="4790606"/>
-            <a:ext cx="412271" cy="110352"/>
+            <a:off x="8923753" y="5054599"/>
+            <a:ext cx="412271" cy="120249"/>
           </a:xfrm>
           <a:prstGeom prst="rect">
             <a:avLst/>
@@ -16961,8 +16902,8 @@
         </p:nvSpPr>
         <p:spPr>
           <a:xfrm>
-            <a:off x="10168128" y="4725834"/>
-            <a:ext cx="1234440" cy="239896"/>
+            <a:off x="10168128" y="4984018"/>
+            <a:ext cx="1234440" cy="261411"/>
           </a:xfrm>
           <a:prstGeom prst="rect">
             <a:avLst/>
@@ -17000,8 +16941,8 @@
         </p:nvSpPr>
         <p:spPr>
           <a:xfrm>
-            <a:off x="6208776" y="4965730"/>
-            <a:ext cx="310896" cy="239896"/>
+            <a:off x="6208776" y="5245429"/>
+            <a:ext cx="310896" cy="261411"/>
           </a:xfrm>
           <a:prstGeom prst="rect">
             <a:avLst/>
@@ -17039,8 +16980,8 @@
         </p:nvSpPr>
         <p:spPr>
           <a:xfrm>
-            <a:off x="6565392" y="4965730"/>
-            <a:ext cx="1920240" cy="239896"/>
+            <a:off x="6565392" y="5245429"/>
+            <a:ext cx="1920240" cy="261411"/>
           </a:xfrm>
           <a:prstGeom prst="rect">
             <a:avLst/>
@@ -17078,8 +17019,8 @@
         </p:nvSpPr>
         <p:spPr>
           <a:xfrm>
-            <a:off x="8868856" y="5030502"/>
-            <a:ext cx="467168" cy="110352"/>
+            <a:off x="8868856" y="5316010"/>
+            <a:ext cx="467168" cy="120249"/>
           </a:xfrm>
           <a:prstGeom prst="rect">
             <a:avLst/>
@@ -17098,8 +17039,8 @@
         </p:nvSpPr>
         <p:spPr>
           <a:xfrm>
-            <a:off x="10168128" y="4965730"/>
-            <a:ext cx="1234440" cy="239896"/>
+            <a:off x="10168128" y="5245429"/>
+            <a:ext cx="1234440" cy="261411"/>
           </a:xfrm>
           <a:prstGeom prst="rect">
             <a:avLst/>
@@ -17137,8 +17078,8 @@
         </p:nvSpPr>
         <p:spPr>
           <a:xfrm>
-            <a:off x="6208776" y="5205625"/>
-            <a:ext cx="310896" cy="239896"/>
+            <a:off x="6208776" y="5506840"/>
+            <a:ext cx="310896" cy="261411"/>
           </a:xfrm>
           <a:prstGeom prst="rect">
             <a:avLst/>
@@ -17176,8 +17117,8 @@
         </p:nvSpPr>
         <p:spPr>
           <a:xfrm>
-            <a:off x="6565392" y="5205625"/>
-            <a:ext cx="1920240" cy="239896"/>
+            <a:off x="6565392" y="5506840"/>
+            <a:ext cx="1920240" cy="261411"/>
           </a:xfrm>
           <a:prstGeom prst="rect">
             <a:avLst/>
@@ -17215,8 +17156,8 @@
         </p:nvSpPr>
         <p:spPr>
           <a:xfrm>
-            <a:off x="8843092" y="5270397"/>
-            <a:ext cx="492932" cy="110352"/>
+            <a:off x="8843092" y="5577420"/>
+            <a:ext cx="492932" cy="120249"/>
           </a:xfrm>
           <a:prstGeom prst="rect">
             <a:avLst/>
@@ -17235,8 +17176,8 @@
         </p:nvSpPr>
         <p:spPr>
           <a:xfrm>
-            <a:off x="10168128" y="5205625"/>
-            <a:ext cx="1234440" cy="239896"/>
+            <a:off x="10168128" y="5506840"/>
+            <a:ext cx="1234440" cy="261411"/>
           </a:xfrm>
           <a:prstGeom prst="rect">
             <a:avLst/>
@@ -17274,8 +17215,8 @@
         </p:nvSpPr>
         <p:spPr>
           <a:xfrm>
-            <a:off x="6208776" y="5445521"/>
-            <a:ext cx="310896" cy="239896"/>
+            <a:off x="6208776" y="5768250"/>
+            <a:ext cx="310896" cy="261411"/>
           </a:xfrm>
           <a:prstGeom prst="rect">
             <a:avLst/>
@@ -17313,8 +17254,8 @@
         </p:nvSpPr>
         <p:spPr>
           <a:xfrm>
-            <a:off x="6565392" y="5445521"/>
-            <a:ext cx="1920240" cy="239896"/>
+            <a:off x="6565392" y="5768250"/>
+            <a:ext cx="1920240" cy="261411"/>
           </a:xfrm>
           <a:prstGeom prst="rect">
             <a:avLst/>
@@ -17352,8 +17293,8 @@
         </p:nvSpPr>
         <p:spPr>
           <a:xfrm>
-            <a:off x="8752645" y="5510293"/>
-            <a:ext cx="583379" cy="110352"/>
+            <a:off x="8752645" y="5838831"/>
+            <a:ext cx="583379" cy="120249"/>
           </a:xfrm>
           <a:prstGeom prst="rect">
             <a:avLst/>
@@ -17372,8 +17313,8 @@
         </p:nvSpPr>
         <p:spPr>
           <a:xfrm>
-            <a:off x="10168128" y="5445521"/>
-            <a:ext cx="1234440" cy="239896"/>
+            <a:off x="10168128" y="5768250"/>
+            <a:ext cx="1234440" cy="261411"/>
           </a:xfrm>
           <a:prstGeom prst="rect">
             <a:avLst/>
@@ -17412,7 +17353,7 @@
         <p:spPr>
           <a:xfrm>
             <a:off x="3780130" y="1847088"/>
-            <a:ext cx="10973" cy="4078224"/>
+            <a:ext cx="10973" cy="4443984"/>
           </a:xfrm>
           <a:prstGeom prst="rect">
             <a:avLst/>
@@ -17432,7 +17373,7 @@
         <p:spPr>
           <a:xfrm>
             <a:off x="9330538" y="1847088"/>
-            <a:ext cx="10973" cy="4078224"/>
+            <a:ext cx="10973" cy="4443984"/>
           </a:xfrm>
           <a:prstGeom prst="rect">
             <a:avLst/>
@@ -17452,7 +17393,7 @@
         <p:spPr>
           <a:xfrm>
             <a:off x="6085332" y="1847088"/>
-            <a:ext cx="10973" cy="4078224"/>
+            <a:ext cx="10973" cy="4443984"/>
           </a:xfrm>
           <a:prstGeom prst="rect">
             <a:avLst/>
@@ -17462,65 +17403,6 @@
           </a:solidFill>
           <a:ln/>
         </p:spPr>
-      </p:sp>
-      <p:sp>
-        <p:nvSpPr>
-          <p:cNvPr id="146" name="Shape 144"/>
-          <p:cNvSpPr/>
-          <p:nvPr/>
-        </p:nvSpPr>
-        <p:spPr>
-          <a:xfrm>
-            <a:off x="457200" y="6126480"/>
-            <a:ext cx="11274552" cy="615696"/>
-          </a:xfrm>
-          <a:prstGeom prst="rect">
-            <a:avLst/>
-          </a:prstGeom>
-          <a:solidFill>
-            <a:srgbClr val="FBEBEA"/>
-          </a:solidFill>
-          <a:ln/>
-        </p:spPr>
-      </p:sp>
-      <p:sp>
-        <p:nvSpPr>
-          <p:cNvPr id="147" name="Text 145"/>
-          <p:cNvSpPr txBox="1"/>
-          <p:nvPr/>
-        </p:nvSpPr>
-        <p:spPr>
-          <a:xfrm>
-            <a:off x="658368" y="6144768"/>
-            <a:ext cx="10927080" cy="579120"/>
-          </a:xfrm>
-          <a:prstGeom prst="rect">
-            <a:avLst/>
-          </a:prstGeom>
-          <a:noFill/>
-          <a:ln/>
-        </p:spPr>
-        <p:txBody>
-          <a:bodyPr wrap="square" lIns="0" tIns="0" rIns="0" bIns="0" rtlCol="0" anchor="ctr"/>
-          <a:lstStyle/>
-          <a:p>
-            <a:pPr indent="0" marL="0">
-              <a:buNone/>
-            </a:pPr>
-            <a:r>
-              <a:rPr lang="en-US" sz="1600" b="1" dirty="0">
-                <a:solidFill>
-                  <a:srgbClr val="A82B26"/>
-                </a:solidFill>
-                <a:latin typeface="Inter" pitchFamily="34" charset="0"/>
-                <a:ea typeface="Inter" pitchFamily="34" charset="-122"/>
-                <a:cs typeface="Inter" pitchFamily="34" charset="-120"/>
-              </a:rPr>
-              <a:t>19 of 33 stores raised customer-pay share, led by Mazda at +10.8 pts to 56.6%. 14 declined; LR Reno fell most at −8.1 pts.</a:t>
-            </a:r>
-            <a:endParaRPr lang="en-US" sz="1600" dirty="0"/>
-          </a:p>
-        </p:txBody>
       </p:sp>
     </p:spTree>
   </p:cSld>
@@ -17661,7 +17543,7 @@
         <p:spPr>
           <a:xfrm>
             <a:off x="457200" y="1207008"/>
-            <a:ext cx="11274552" cy="4782312"/>
+            <a:ext cx="11274552" cy="5148072"/>
           </a:xfrm>
           <a:prstGeom prst="rect">
             <a:avLst/>
@@ -17779,7 +17661,7 @@
         <p:spPr>
           <a:xfrm>
             <a:off x="658368" y="2103120"/>
-            <a:ext cx="3489960" cy="755294"/>
+            <a:ext cx="3489960" cy="828446"/>
           </a:xfrm>
           <a:prstGeom prst="rect">
             <a:avLst/>
@@ -17799,7 +17681,7 @@
         <p:spPr>
           <a:xfrm>
             <a:off x="749808" y="2103120"/>
-            <a:ext cx="365760" cy="755294"/>
+            <a:ext cx="365760" cy="828446"/>
           </a:xfrm>
           <a:prstGeom prst="rect">
             <a:avLst/>
@@ -17838,7 +17720,7 @@
         <p:spPr>
           <a:xfrm>
             <a:off x="1097280" y="2103120"/>
-            <a:ext cx="1825752" cy="755294"/>
+            <a:ext cx="1825752" cy="828446"/>
           </a:xfrm>
           <a:prstGeom prst="rect">
             <a:avLst/>
@@ -17917,7 +17799,7 @@
         <p:spPr>
           <a:xfrm>
             <a:off x="2941320" y="2103120"/>
-            <a:ext cx="1115568" cy="755294"/>
+            <a:ext cx="1115568" cy="828446"/>
           </a:xfrm>
           <a:prstGeom prst="rect">
             <a:avLst/>
@@ -17955,8 +17837,8 @@
         </p:nvSpPr>
         <p:spPr>
           <a:xfrm>
-            <a:off x="749808" y="2858414"/>
-            <a:ext cx="365760" cy="755294"/>
+            <a:off x="749808" y="2931566"/>
+            <a:ext cx="365760" cy="828446"/>
           </a:xfrm>
           <a:prstGeom prst="rect">
             <a:avLst/>
@@ -17994,8 +17876,8 @@
         </p:nvSpPr>
         <p:spPr>
           <a:xfrm>
-            <a:off x="1097280" y="2858414"/>
-            <a:ext cx="1825752" cy="755294"/>
+            <a:off x="1097280" y="2931566"/>
+            <a:ext cx="1825752" cy="828446"/>
           </a:xfrm>
           <a:prstGeom prst="rect">
             <a:avLst/>
@@ -18073,8 +17955,8 @@
         </p:nvSpPr>
         <p:spPr>
           <a:xfrm>
-            <a:off x="2941320" y="2858414"/>
-            <a:ext cx="1115568" cy="755294"/>
+            <a:off x="2941320" y="2931566"/>
+            <a:ext cx="1115568" cy="828446"/>
           </a:xfrm>
           <a:prstGeom prst="rect">
             <a:avLst/>
@@ -18112,8 +17994,8 @@
         </p:nvSpPr>
         <p:spPr>
           <a:xfrm>
-            <a:off x="658368" y="3613709"/>
-            <a:ext cx="3489960" cy="755294"/>
+            <a:off x="658368" y="3760013"/>
+            <a:ext cx="3489960" cy="828446"/>
           </a:xfrm>
           <a:prstGeom prst="rect">
             <a:avLst/>
@@ -18132,8 +18014,8 @@
         </p:nvSpPr>
         <p:spPr>
           <a:xfrm>
-            <a:off x="4084320" y="3650285"/>
-            <a:ext cx="64008" cy="682142"/>
+            <a:off x="4084320" y="3796589"/>
+            <a:ext cx="64008" cy="755294"/>
           </a:xfrm>
           <a:prstGeom prst="rect">
             <a:avLst/>
@@ -18152,8 +18034,8 @@
         </p:nvSpPr>
         <p:spPr>
           <a:xfrm>
-            <a:off x="749808" y="3613709"/>
-            <a:ext cx="365760" cy="755294"/>
+            <a:off x="749808" y="3760013"/>
+            <a:ext cx="365760" cy="828446"/>
           </a:xfrm>
           <a:prstGeom prst="rect">
             <a:avLst/>
@@ -18191,8 +18073,8 @@
         </p:nvSpPr>
         <p:spPr>
           <a:xfrm>
-            <a:off x="1097280" y="3613709"/>
-            <a:ext cx="1825752" cy="755294"/>
+            <a:off x="1097280" y="3760013"/>
+            <a:ext cx="1825752" cy="828446"/>
           </a:xfrm>
           <a:prstGeom prst="rect">
             <a:avLst/>
@@ -18270,8 +18152,8 @@
         </p:nvSpPr>
         <p:spPr>
           <a:xfrm>
-            <a:off x="2941320" y="3613709"/>
-            <a:ext cx="1115568" cy="755294"/>
+            <a:off x="2941320" y="3760013"/>
+            <a:ext cx="1115568" cy="828446"/>
           </a:xfrm>
           <a:prstGeom prst="rect">
             <a:avLst/>
@@ -18309,8 +18191,8 @@
         </p:nvSpPr>
         <p:spPr>
           <a:xfrm>
-            <a:off x="749808" y="4369003"/>
-            <a:ext cx="365760" cy="755294"/>
+            <a:off x="749808" y="4588459"/>
+            <a:ext cx="365760" cy="828446"/>
           </a:xfrm>
           <a:prstGeom prst="rect">
             <a:avLst/>
@@ -18348,8 +18230,8 @@
         </p:nvSpPr>
         <p:spPr>
           <a:xfrm>
-            <a:off x="1097280" y="4369003"/>
-            <a:ext cx="1825752" cy="755294"/>
+            <a:off x="1097280" y="4588459"/>
+            <a:ext cx="1825752" cy="828446"/>
           </a:xfrm>
           <a:prstGeom prst="rect">
             <a:avLst/>
@@ -18427,8 +18309,8 @@
         </p:nvSpPr>
         <p:spPr>
           <a:xfrm>
-            <a:off x="2941320" y="4369003"/>
-            <a:ext cx="1115568" cy="755294"/>
+            <a:off x="2941320" y="4588459"/>
+            <a:ext cx="1115568" cy="828446"/>
           </a:xfrm>
           <a:prstGeom prst="rect">
             <a:avLst/>
@@ -18466,8 +18348,8 @@
         </p:nvSpPr>
         <p:spPr>
           <a:xfrm>
-            <a:off x="658368" y="5124298"/>
-            <a:ext cx="3489960" cy="755294"/>
+            <a:off x="658368" y="5416906"/>
+            <a:ext cx="3489960" cy="828446"/>
           </a:xfrm>
           <a:prstGeom prst="rect">
             <a:avLst/>
@@ -18486,8 +18368,8 @@
         </p:nvSpPr>
         <p:spPr>
           <a:xfrm>
-            <a:off x="749808" y="5124298"/>
-            <a:ext cx="365760" cy="755294"/>
+            <a:off x="749808" y="5416906"/>
+            <a:ext cx="365760" cy="828446"/>
           </a:xfrm>
           <a:prstGeom prst="rect">
             <a:avLst/>
@@ -18525,8 +18407,8 @@
         </p:nvSpPr>
         <p:spPr>
           <a:xfrm>
-            <a:off x="1097280" y="5124298"/>
-            <a:ext cx="1825752" cy="755294"/>
+            <a:off x="1097280" y="5416906"/>
+            <a:ext cx="1825752" cy="828446"/>
           </a:xfrm>
           <a:prstGeom prst="rect">
             <a:avLst/>
@@ -18604,8 +18486,8 @@
         </p:nvSpPr>
         <p:spPr>
           <a:xfrm>
-            <a:off x="2941320" y="5124298"/>
-            <a:ext cx="1115568" cy="755294"/>
+            <a:off x="2941320" y="5416906"/>
+            <a:ext cx="1115568" cy="828446"/>
           </a:xfrm>
           <a:prstGeom prst="rect">
             <a:avLst/>
@@ -18742,7 +18624,7 @@
         <p:spPr>
           <a:xfrm>
             <a:off x="4349496" y="2103120"/>
-            <a:ext cx="3489960" cy="755294"/>
+            <a:ext cx="3489960" cy="828446"/>
           </a:xfrm>
           <a:prstGeom prst="rect">
             <a:avLst/>
@@ -18762,7 +18644,7 @@
         <p:spPr>
           <a:xfrm>
             <a:off x="4440936" y="2103120"/>
-            <a:ext cx="365760" cy="755294"/>
+            <a:ext cx="365760" cy="828446"/>
           </a:xfrm>
           <a:prstGeom prst="rect">
             <a:avLst/>
@@ -18801,7 +18683,7 @@
         <p:spPr>
           <a:xfrm>
             <a:off x="4788408" y="2103120"/>
-            <a:ext cx="1825752" cy="755294"/>
+            <a:ext cx="1825752" cy="828446"/>
           </a:xfrm>
           <a:prstGeom prst="rect">
             <a:avLst/>
@@ -18880,7 +18762,7 @@
         <p:spPr>
           <a:xfrm>
             <a:off x="6632448" y="2103120"/>
-            <a:ext cx="1115568" cy="755294"/>
+            <a:ext cx="1115568" cy="828446"/>
           </a:xfrm>
           <a:prstGeom prst="rect">
             <a:avLst/>
@@ -18918,8 +18800,8 @@
         </p:nvSpPr>
         <p:spPr>
           <a:xfrm>
-            <a:off x="4440936" y="2858414"/>
-            <a:ext cx="365760" cy="755294"/>
+            <a:off x="4440936" y="2931566"/>
+            <a:ext cx="365760" cy="828446"/>
           </a:xfrm>
           <a:prstGeom prst="rect">
             <a:avLst/>
@@ -18957,8 +18839,8 @@
         </p:nvSpPr>
         <p:spPr>
           <a:xfrm>
-            <a:off x="4788408" y="2858414"/>
-            <a:ext cx="1825752" cy="755294"/>
+            <a:off x="4788408" y="2931566"/>
+            <a:ext cx="1825752" cy="828446"/>
           </a:xfrm>
           <a:prstGeom prst="rect">
             <a:avLst/>
@@ -19036,8 +18918,8 @@
         </p:nvSpPr>
         <p:spPr>
           <a:xfrm>
-            <a:off x="6632448" y="2858414"/>
-            <a:ext cx="1115568" cy="755294"/>
+            <a:off x="6632448" y="2931566"/>
+            <a:ext cx="1115568" cy="828446"/>
           </a:xfrm>
           <a:prstGeom prst="rect">
             <a:avLst/>
@@ -19075,8 +18957,8 @@
         </p:nvSpPr>
         <p:spPr>
           <a:xfrm>
-            <a:off x="4349496" y="3613709"/>
-            <a:ext cx="3489960" cy="755294"/>
+            <a:off x="4349496" y="3760013"/>
+            <a:ext cx="3489960" cy="828446"/>
           </a:xfrm>
           <a:prstGeom prst="rect">
             <a:avLst/>
@@ -19095,8 +18977,8 @@
         </p:nvSpPr>
         <p:spPr>
           <a:xfrm>
-            <a:off x="4440936" y="3613709"/>
-            <a:ext cx="365760" cy="755294"/>
+            <a:off x="4440936" y="3760013"/>
+            <a:ext cx="365760" cy="828446"/>
           </a:xfrm>
           <a:prstGeom prst="rect">
             <a:avLst/>
@@ -19134,8 +19016,8 @@
         </p:nvSpPr>
         <p:spPr>
           <a:xfrm>
-            <a:off x="4788408" y="3613709"/>
-            <a:ext cx="1825752" cy="755294"/>
+            <a:off x="4788408" y="3760013"/>
+            <a:ext cx="1825752" cy="828446"/>
           </a:xfrm>
           <a:prstGeom prst="rect">
             <a:avLst/>
@@ -19213,8 +19095,8 @@
         </p:nvSpPr>
         <p:spPr>
           <a:xfrm>
-            <a:off x="6632448" y="3613709"/>
-            <a:ext cx="1115568" cy="755294"/>
+            <a:off x="6632448" y="3760013"/>
+            <a:ext cx="1115568" cy="828446"/>
           </a:xfrm>
           <a:prstGeom prst="rect">
             <a:avLst/>
@@ -19252,8 +19134,8 @@
         </p:nvSpPr>
         <p:spPr>
           <a:xfrm>
-            <a:off x="4440936" y="4369003"/>
-            <a:ext cx="365760" cy="755294"/>
+            <a:off x="4440936" y="4588459"/>
+            <a:ext cx="365760" cy="828446"/>
           </a:xfrm>
           <a:prstGeom prst="rect">
             <a:avLst/>
@@ -19291,8 +19173,8 @@
         </p:nvSpPr>
         <p:spPr>
           <a:xfrm>
-            <a:off x="4788408" y="4369003"/>
-            <a:ext cx="1825752" cy="755294"/>
+            <a:off x="4788408" y="4588459"/>
+            <a:ext cx="1825752" cy="828446"/>
           </a:xfrm>
           <a:prstGeom prst="rect">
             <a:avLst/>
@@ -19370,8 +19252,8 @@
         </p:nvSpPr>
         <p:spPr>
           <a:xfrm>
-            <a:off x="6632448" y="4369003"/>
-            <a:ext cx="1115568" cy="755294"/>
+            <a:off x="6632448" y="4588459"/>
+            <a:ext cx="1115568" cy="828446"/>
           </a:xfrm>
           <a:prstGeom prst="rect">
             <a:avLst/>
@@ -19409,8 +19291,8 @@
         </p:nvSpPr>
         <p:spPr>
           <a:xfrm>
-            <a:off x="4349496" y="5124298"/>
-            <a:ext cx="3489960" cy="755294"/>
+            <a:off x="4349496" y="5416906"/>
+            <a:ext cx="3489960" cy="828446"/>
           </a:xfrm>
           <a:prstGeom prst="rect">
             <a:avLst/>
@@ -19429,8 +19311,8 @@
         </p:nvSpPr>
         <p:spPr>
           <a:xfrm>
-            <a:off x="4440936" y="5124298"/>
-            <a:ext cx="365760" cy="755294"/>
+            <a:off x="4440936" y="5416906"/>
+            <a:ext cx="365760" cy="828446"/>
           </a:xfrm>
           <a:prstGeom prst="rect">
             <a:avLst/>
@@ -19468,8 +19350,8 @@
         </p:nvSpPr>
         <p:spPr>
           <a:xfrm>
-            <a:off x="4788408" y="5124298"/>
-            <a:ext cx="1825752" cy="755294"/>
+            <a:off x="4788408" y="5416906"/>
+            <a:ext cx="1825752" cy="828446"/>
           </a:xfrm>
           <a:prstGeom prst="rect">
             <a:avLst/>
@@ -19547,8 +19429,8 @@
         </p:nvSpPr>
         <p:spPr>
           <a:xfrm>
-            <a:off x="6632448" y="5124298"/>
-            <a:ext cx="1115568" cy="755294"/>
+            <a:off x="6632448" y="5416906"/>
+            <a:ext cx="1115568" cy="828446"/>
           </a:xfrm>
           <a:prstGeom prst="rect">
             <a:avLst/>
@@ -19685,7 +19567,7 @@
         <p:spPr>
           <a:xfrm>
             <a:off x="8040624" y="2103120"/>
-            <a:ext cx="3489960" cy="755294"/>
+            <a:ext cx="3489960" cy="828446"/>
           </a:xfrm>
           <a:prstGeom prst="rect">
             <a:avLst/>
@@ -19705,7 +19587,7 @@
         <p:spPr>
           <a:xfrm>
             <a:off x="8132064" y="2103120"/>
-            <a:ext cx="365760" cy="755294"/>
+            <a:ext cx="365760" cy="828446"/>
           </a:xfrm>
           <a:prstGeom prst="rect">
             <a:avLst/>
@@ -19744,7 +19626,7 @@
         <p:spPr>
           <a:xfrm>
             <a:off x="8479536" y="2103120"/>
-            <a:ext cx="1825752" cy="755294"/>
+            <a:ext cx="1825752" cy="828446"/>
           </a:xfrm>
           <a:prstGeom prst="rect">
             <a:avLst/>
@@ -19823,7 +19705,7 @@
         <p:spPr>
           <a:xfrm>
             <a:off x="10323576" y="2103120"/>
-            <a:ext cx="1115568" cy="755294"/>
+            <a:ext cx="1115568" cy="828446"/>
           </a:xfrm>
           <a:prstGeom prst="rect">
             <a:avLst/>
@@ -19861,8 +19743,8 @@
         </p:nvSpPr>
         <p:spPr>
           <a:xfrm>
-            <a:off x="11466576" y="2894990"/>
-            <a:ext cx="64008" cy="682142"/>
+            <a:off x="11466576" y="2968142"/>
+            <a:ext cx="64008" cy="755294"/>
           </a:xfrm>
           <a:prstGeom prst="rect">
             <a:avLst/>
@@ -19881,8 +19763,8 @@
         </p:nvSpPr>
         <p:spPr>
           <a:xfrm>
-            <a:off x="8132064" y="2858414"/>
-            <a:ext cx="365760" cy="755294"/>
+            <a:off x="8132064" y="2931566"/>
+            <a:ext cx="365760" cy="828446"/>
           </a:xfrm>
           <a:prstGeom prst="rect">
             <a:avLst/>
@@ -19920,8 +19802,8 @@
         </p:nvSpPr>
         <p:spPr>
           <a:xfrm>
-            <a:off x="8479536" y="2858414"/>
-            <a:ext cx="1825752" cy="755294"/>
+            <a:off x="8479536" y="2931566"/>
+            <a:ext cx="1825752" cy="828446"/>
           </a:xfrm>
           <a:prstGeom prst="rect">
             <a:avLst/>
@@ -19999,8 +19881,8 @@
         </p:nvSpPr>
         <p:spPr>
           <a:xfrm>
-            <a:off x="10323576" y="2858414"/>
-            <a:ext cx="1115568" cy="755294"/>
+            <a:off x="10323576" y="2931566"/>
+            <a:ext cx="1115568" cy="828446"/>
           </a:xfrm>
           <a:prstGeom prst="rect">
             <a:avLst/>
@@ -20038,8 +19920,8 @@
         </p:nvSpPr>
         <p:spPr>
           <a:xfrm>
-            <a:off x="8040624" y="3613709"/>
-            <a:ext cx="3489960" cy="755294"/>
+            <a:off x="8040624" y="3760013"/>
+            <a:ext cx="3489960" cy="828446"/>
           </a:xfrm>
           <a:prstGeom prst="rect">
             <a:avLst/>
@@ -20058,8 +19940,8 @@
         </p:nvSpPr>
         <p:spPr>
           <a:xfrm>
-            <a:off x="8132064" y="3613709"/>
-            <a:ext cx="365760" cy="755294"/>
+            <a:off x="8132064" y="3760013"/>
+            <a:ext cx="365760" cy="828446"/>
           </a:xfrm>
           <a:prstGeom prst="rect">
             <a:avLst/>
@@ -20097,8 +19979,8 @@
         </p:nvSpPr>
         <p:spPr>
           <a:xfrm>
-            <a:off x="8479536" y="3613709"/>
-            <a:ext cx="1825752" cy="755294"/>
+            <a:off x="8479536" y="3760013"/>
+            <a:ext cx="1825752" cy="828446"/>
           </a:xfrm>
           <a:prstGeom prst="rect">
             <a:avLst/>
@@ -20176,8 +20058,8 @@
         </p:nvSpPr>
         <p:spPr>
           <a:xfrm>
-            <a:off x="10323576" y="3613709"/>
-            <a:ext cx="1115568" cy="755294"/>
+            <a:off x="10323576" y="3760013"/>
+            <a:ext cx="1115568" cy="828446"/>
           </a:xfrm>
           <a:prstGeom prst="rect">
             <a:avLst/>
@@ -20215,8 +20097,8 @@
         </p:nvSpPr>
         <p:spPr>
           <a:xfrm>
-            <a:off x="8132064" y="4369003"/>
-            <a:ext cx="365760" cy="755294"/>
+            <a:off x="8132064" y="4588459"/>
+            <a:ext cx="365760" cy="828446"/>
           </a:xfrm>
           <a:prstGeom prst="rect">
             <a:avLst/>
@@ -20254,8 +20136,8 @@
         </p:nvSpPr>
         <p:spPr>
           <a:xfrm>
-            <a:off x="8479536" y="4369003"/>
-            <a:ext cx="1825752" cy="755294"/>
+            <a:off x="8479536" y="4588459"/>
+            <a:ext cx="1825752" cy="828446"/>
           </a:xfrm>
           <a:prstGeom prst="rect">
             <a:avLst/>
@@ -20333,8 +20215,8 @@
         </p:nvSpPr>
         <p:spPr>
           <a:xfrm>
-            <a:off x="10323576" y="4369003"/>
-            <a:ext cx="1115568" cy="755294"/>
+            <a:off x="10323576" y="4588459"/>
+            <a:ext cx="1115568" cy="828446"/>
           </a:xfrm>
           <a:prstGeom prst="rect">
             <a:avLst/>
@@ -20372,8 +20254,8 @@
         </p:nvSpPr>
         <p:spPr>
           <a:xfrm>
-            <a:off x="8040624" y="5124298"/>
-            <a:ext cx="3489960" cy="755294"/>
+            <a:off x="8040624" y="5416906"/>
+            <a:ext cx="3489960" cy="828446"/>
           </a:xfrm>
           <a:prstGeom prst="rect">
             <a:avLst/>
@@ -20392,8 +20274,8 @@
         </p:nvSpPr>
         <p:spPr>
           <a:xfrm>
-            <a:off x="8132064" y="5124298"/>
-            <a:ext cx="365760" cy="755294"/>
+            <a:off x="8132064" y="5416906"/>
+            <a:ext cx="365760" cy="828446"/>
           </a:xfrm>
           <a:prstGeom prst="rect">
             <a:avLst/>
@@ -20431,8 +20313,8 @@
         </p:nvSpPr>
         <p:spPr>
           <a:xfrm>
-            <a:off x="8479536" y="5124298"/>
-            <a:ext cx="1825752" cy="755294"/>
+            <a:off x="8479536" y="5416906"/>
+            <a:ext cx="1825752" cy="828446"/>
           </a:xfrm>
           <a:prstGeom prst="rect">
             <a:avLst/>
@@ -20510,8 +20392,8 @@
         </p:nvSpPr>
         <p:spPr>
           <a:xfrm>
-            <a:off x="10323576" y="5124298"/>
-            <a:ext cx="1115568" cy="755294"/>
+            <a:off x="10323576" y="5416906"/>
+            <a:ext cx="1115568" cy="828446"/>
           </a:xfrm>
           <a:prstGeom prst="rect">
             <a:avLst/>
@@ -20536,65 +20418,6 @@
                 <a:cs typeface="Inter" pitchFamily="34" charset="-120"/>
               </a:rPr>
               <a:t>+5.6 pts</a:t>
-            </a:r>
-            <a:endParaRPr lang="en-US" sz="1600" dirty="0"/>
-          </a:p>
-        </p:txBody>
-      </p:sp>
-      <p:sp>
-        <p:nvSpPr>
-          <p:cNvPr id="71" name="Shape 69"/>
-          <p:cNvSpPr/>
-          <p:nvPr/>
-        </p:nvSpPr>
-        <p:spPr>
-          <a:xfrm>
-            <a:off x="457200" y="6126480"/>
-            <a:ext cx="11274552" cy="615696"/>
-          </a:xfrm>
-          <a:prstGeom prst="rect">
-            <a:avLst/>
-          </a:prstGeom>
-          <a:solidFill>
-            <a:srgbClr val="EDF4FA"/>
-          </a:solidFill>
-          <a:ln/>
-        </p:spPr>
-      </p:sp>
-      <p:sp>
-        <p:nvSpPr>
-          <p:cNvPr id="72" name="Text 70"/>
-          <p:cNvSpPr txBox="1"/>
-          <p:nvPr/>
-        </p:nvSpPr>
-        <p:spPr>
-          <a:xfrm>
-            <a:off x="658368" y="6144768"/>
-            <a:ext cx="10927080" cy="579120"/>
-          </a:xfrm>
-          <a:prstGeom prst="rect">
-            <a:avLst/>
-          </a:prstGeom>
-          <a:noFill/>
-          <a:ln/>
-        </p:spPr>
-        <p:txBody>
-          <a:bodyPr wrap="square" lIns="0" tIns="0" rIns="0" bIns="0" rtlCol="0" anchor="ctr"/>
-          <a:lstStyle/>
-          <a:p>
-            <a:pPr indent="0" marL="0">
-              <a:buNone/>
-            </a:pPr>
-            <a:r>
-              <a:rPr lang="en-US" sz="1600" b="1" dirty="0">
-                <a:solidFill>
-                  <a:srgbClr val="0B2C4A"/>
-                </a:solidFill>
-                <a:latin typeface="Inter" pitchFamily="34" charset="0"/>
-                <a:ea typeface="Inter" pitchFamily="34" charset="-122"/>
-                <a:cs typeface="Inter" pitchFamily="34" charset="-120"/>
-              </a:rPr>
-              <a:t>Ask Mazda, VW Henderson and Acura what changed. Ask LR Reno, Hyundai Prescott and Toyota Henderson what got in the way. Ask Lexus, Acura and Chevy GMC Bullhead what they started this year.</a:t>
             </a:r>
             <a:endParaRPr lang="en-US" sz="1600" dirty="0"/>
           </a:p>
@@ -28843,7 +28666,7 @@
         <p:spPr>
           <a:xfrm>
             <a:off x="457200" y="1207008"/>
-            <a:ext cx="11274552" cy="4782312"/>
+            <a:ext cx="11274552" cy="5148072"/>
           </a:xfrm>
           <a:prstGeom prst="rect">
             <a:avLst/>
@@ -29020,7 +28843,7 @@
         <p:spPr>
           <a:xfrm>
             <a:off x="658368" y="1847088"/>
-            <a:ext cx="310896" cy="239896"/>
+            <a:ext cx="310896" cy="261411"/>
           </a:xfrm>
           <a:prstGeom prst="rect">
             <a:avLst/>
@@ -29059,7 +28882,7 @@
         <p:spPr>
           <a:xfrm>
             <a:off x="1014984" y="1847088"/>
-            <a:ext cx="1920240" cy="239896"/>
+            <a:ext cx="1920240" cy="261411"/>
           </a:xfrm>
           <a:prstGeom prst="rect">
             <a:avLst/>
@@ -29097,8 +28920,8 @@
         </p:nvSpPr>
         <p:spPr>
           <a:xfrm>
-            <a:off x="3008376" y="1907062"/>
-            <a:ext cx="111888" cy="119948"/>
+            <a:off x="3008376" y="1912441"/>
+            <a:ext cx="111888" cy="130705"/>
           </a:xfrm>
           <a:prstGeom prst="rect">
             <a:avLst/>
@@ -29118,7 +28941,7 @@
         <p:spPr>
           <a:xfrm>
             <a:off x="4754880" y="1847088"/>
-            <a:ext cx="1143000" cy="239896"/>
+            <a:ext cx="1143000" cy="261411"/>
           </a:xfrm>
           <a:prstGeom prst="rect">
             <a:avLst/>
@@ -29156,8 +28979,8 @@
         </p:nvSpPr>
         <p:spPr>
           <a:xfrm>
-            <a:off x="658368" y="2086984"/>
-            <a:ext cx="310896" cy="239896"/>
+            <a:off x="658368" y="2108499"/>
+            <a:ext cx="310896" cy="261411"/>
           </a:xfrm>
           <a:prstGeom prst="rect">
             <a:avLst/>
@@ -29195,8 +29018,8 @@
         </p:nvSpPr>
         <p:spPr>
           <a:xfrm>
-            <a:off x="1014984" y="2086984"/>
-            <a:ext cx="1920240" cy="239896"/>
+            <a:off x="1014984" y="2108499"/>
+            <a:ext cx="1920240" cy="261411"/>
           </a:xfrm>
           <a:prstGeom prst="rect">
             <a:avLst/>
@@ -29234,8 +29057,8 @@
         </p:nvSpPr>
         <p:spPr>
           <a:xfrm>
-            <a:off x="3008376" y="2146957"/>
-            <a:ext cx="122544" cy="119948"/>
+            <a:off x="3008376" y="2173852"/>
+            <a:ext cx="122544" cy="130705"/>
           </a:xfrm>
           <a:prstGeom prst="rect">
             <a:avLst/>
@@ -29254,8 +29077,8 @@
         </p:nvSpPr>
         <p:spPr>
           <a:xfrm>
-            <a:off x="4754880" y="2086984"/>
-            <a:ext cx="1143000" cy="239896"/>
+            <a:off x="4754880" y="2108499"/>
+            <a:ext cx="1143000" cy="261411"/>
           </a:xfrm>
           <a:prstGeom prst="rect">
             <a:avLst/>
@@ -29293,8 +29116,8 @@
         </p:nvSpPr>
         <p:spPr>
           <a:xfrm>
-            <a:off x="658368" y="2326879"/>
-            <a:ext cx="310896" cy="239896"/>
+            <a:off x="658368" y="2369910"/>
+            <a:ext cx="310896" cy="261411"/>
           </a:xfrm>
           <a:prstGeom prst="rect">
             <a:avLst/>
@@ -29332,8 +29155,8 @@
         </p:nvSpPr>
         <p:spPr>
           <a:xfrm>
-            <a:off x="1014984" y="2326879"/>
-            <a:ext cx="1920240" cy="239896"/>
+            <a:off x="1014984" y="2369910"/>
+            <a:ext cx="1920240" cy="261411"/>
           </a:xfrm>
           <a:prstGeom prst="rect">
             <a:avLst/>
@@ -29371,8 +29194,8 @@
         </p:nvSpPr>
         <p:spPr>
           <a:xfrm>
-            <a:off x="3008376" y="2386853"/>
-            <a:ext cx="146520" cy="119948"/>
+            <a:off x="3008376" y="2435262"/>
+            <a:ext cx="146520" cy="130705"/>
           </a:xfrm>
           <a:prstGeom prst="rect">
             <a:avLst/>
@@ -29391,8 +29214,8 @@
         </p:nvSpPr>
         <p:spPr>
           <a:xfrm>
-            <a:off x="4754880" y="2326879"/>
-            <a:ext cx="1143000" cy="239896"/>
+            <a:off x="4754880" y="2369910"/>
+            <a:ext cx="1143000" cy="261411"/>
           </a:xfrm>
           <a:prstGeom prst="rect">
             <a:avLst/>
@@ -29430,8 +29253,8 @@
         </p:nvSpPr>
         <p:spPr>
           <a:xfrm>
-            <a:off x="658368" y="2566775"/>
-            <a:ext cx="310896" cy="239896"/>
+            <a:off x="658368" y="2631320"/>
+            <a:ext cx="310896" cy="261411"/>
           </a:xfrm>
           <a:prstGeom prst="rect">
             <a:avLst/>
@@ -29469,8 +29292,8 @@
         </p:nvSpPr>
         <p:spPr>
           <a:xfrm>
-            <a:off x="1014984" y="2566775"/>
-            <a:ext cx="1920240" cy="239896"/>
+            <a:off x="1014984" y="2631320"/>
+            <a:ext cx="1920240" cy="261411"/>
           </a:xfrm>
           <a:prstGeom prst="rect">
             <a:avLst/>
@@ -29508,8 +29331,8 @@
         </p:nvSpPr>
         <p:spPr>
           <a:xfrm>
-            <a:off x="3008376" y="2626748"/>
-            <a:ext cx="194472" cy="119948"/>
+            <a:off x="3008376" y="2696673"/>
+            <a:ext cx="194472" cy="130705"/>
           </a:xfrm>
           <a:prstGeom prst="rect">
             <a:avLst/>
@@ -29528,8 +29351,8 @@
         </p:nvSpPr>
         <p:spPr>
           <a:xfrm>
-            <a:off x="4754880" y="2566775"/>
-            <a:ext cx="1143000" cy="239896"/>
+            <a:off x="4754880" y="2631320"/>
+            <a:ext cx="1143000" cy="261411"/>
           </a:xfrm>
           <a:prstGeom prst="rect">
             <a:avLst/>
@@ -29567,8 +29390,8 @@
         </p:nvSpPr>
         <p:spPr>
           <a:xfrm>
-            <a:off x="658368" y="2806670"/>
-            <a:ext cx="310896" cy="239896"/>
+            <a:off x="658368" y="2892731"/>
+            <a:ext cx="310896" cy="261411"/>
           </a:xfrm>
           <a:prstGeom prst="rect">
             <a:avLst/>
@@ -29606,8 +29429,8 @@
         </p:nvSpPr>
         <p:spPr>
           <a:xfrm>
-            <a:off x="1014984" y="2806670"/>
-            <a:ext cx="1920240" cy="239896"/>
+            <a:off x="1014984" y="2892731"/>
+            <a:ext cx="1920240" cy="261411"/>
           </a:xfrm>
           <a:prstGeom prst="rect">
             <a:avLst/>
@@ -29645,8 +29468,8 @@
         </p:nvSpPr>
         <p:spPr>
           <a:xfrm>
-            <a:off x="3008376" y="2866644"/>
-            <a:ext cx="205128" cy="119948"/>
+            <a:off x="3008376" y="2958084"/>
+            <a:ext cx="205128" cy="130705"/>
           </a:xfrm>
           <a:prstGeom prst="rect">
             <a:avLst/>
@@ -29665,8 +29488,8 @@
         </p:nvSpPr>
         <p:spPr>
           <a:xfrm>
-            <a:off x="4754880" y="2806670"/>
-            <a:ext cx="1143000" cy="239896"/>
+            <a:off x="4754880" y="2892731"/>
+            <a:ext cx="1143000" cy="261411"/>
           </a:xfrm>
           <a:prstGeom prst="rect">
             <a:avLst/>
@@ -29704,8 +29527,8 @@
         </p:nvSpPr>
         <p:spPr>
           <a:xfrm>
-            <a:off x="658368" y="3046566"/>
-            <a:ext cx="310896" cy="239896"/>
+            <a:off x="658368" y="3154142"/>
+            <a:ext cx="310896" cy="261411"/>
           </a:xfrm>
           <a:prstGeom prst="rect">
             <a:avLst/>
@@ -29743,8 +29566,8 @@
         </p:nvSpPr>
         <p:spPr>
           <a:xfrm>
-            <a:off x="1014984" y="3046566"/>
-            <a:ext cx="1920240" cy="239896"/>
+            <a:off x="1014984" y="3154142"/>
+            <a:ext cx="1920240" cy="261411"/>
           </a:xfrm>
           <a:prstGeom prst="rect">
             <a:avLst/>
@@ -29782,8 +29605,8 @@
         </p:nvSpPr>
         <p:spPr>
           <a:xfrm>
-            <a:off x="3008376" y="3106540"/>
-            <a:ext cx="215784" cy="119948"/>
+            <a:off x="3008376" y="3219495"/>
+            <a:ext cx="215784" cy="130705"/>
           </a:xfrm>
           <a:prstGeom prst="rect">
             <a:avLst/>
@@ -29802,8 +29625,8 @@
         </p:nvSpPr>
         <p:spPr>
           <a:xfrm>
-            <a:off x="4754880" y="3046566"/>
-            <a:ext cx="1143000" cy="239896"/>
+            <a:off x="4754880" y="3154142"/>
+            <a:ext cx="1143000" cy="261411"/>
           </a:xfrm>
           <a:prstGeom prst="rect">
             <a:avLst/>
@@ -29841,8 +29664,8 @@
         </p:nvSpPr>
         <p:spPr>
           <a:xfrm>
-            <a:off x="658368" y="3286461"/>
-            <a:ext cx="310896" cy="239896"/>
+            <a:off x="658368" y="3415553"/>
+            <a:ext cx="310896" cy="261411"/>
           </a:xfrm>
           <a:prstGeom prst="rect">
             <a:avLst/>
@@ -29880,8 +29703,8 @@
         </p:nvSpPr>
         <p:spPr>
           <a:xfrm>
-            <a:off x="1014984" y="3286461"/>
-            <a:ext cx="1920240" cy="239896"/>
+            <a:off x="1014984" y="3415553"/>
+            <a:ext cx="1920240" cy="261411"/>
           </a:xfrm>
           <a:prstGeom prst="rect">
             <a:avLst/>
@@ -29919,8 +29742,8 @@
         </p:nvSpPr>
         <p:spPr>
           <a:xfrm>
-            <a:off x="3008376" y="3346435"/>
-            <a:ext cx="239760" cy="119948"/>
+            <a:off x="3008376" y="3480906"/>
+            <a:ext cx="239760" cy="130705"/>
           </a:xfrm>
           <a:prstGeom prst="rect">
             <a:avLst/>
@@ -29939,8 +29762,8 @@
         </p:nvSpPr>
         <p:spPr>
           <a:xfrm>
-            <a:off x="4754880" y="3286461"/>
-            <a:ext cx="1143000" cy="239896"/>
+            <a:off x="4754880" y="3415553"/>
+            <a:ext cx="1143000" cy="261411"/>
           </a:xfrm>
           <a:prstGeom prst="rect">
             <a:avLst/>
@@ -29978,8 +29801,8 @@
         </p:nvSpPr>
         <p:spPr>
           <a:xfrm>
-            <a:off x="658368" y="3526357"/>
-            <a:ext cx="310896" cy="239896"/>
+            <a:off x="658368" y="3676964"/>
+            <a:ext cx="310896" cy="261411"/>
           </a:xfrm>
           <a:prstGeom prst="rect">
             <a:avLst/>
@@ -30017,8 +29840,8 @@
         </p:nvSpPr>
         <p:spPr>
           <a:xfrm>
-            <a:off x="1014984" y="3526357"/>
-            <a:ext cx="1920240" cy="239896"/>
+            <a:off x="1014984" y="3676964"/>
+            <a:ext cx="1920240" cy="261411"/>
           </a:xfrm>
           <a:prstGeom prst="rect">
             <a:avLst/>
@@ -30056,8 +29879,8 @@
         </p:nvSpPr>
         <p:spPr>
           <a:xfrm>
-            <a:off x="3008376" y="3586331"/>
-            <a:ext cx="245088" cy="119948"/>
+            <a:off x="3008376" y="3742316"/>
+            <a:ext cx="245088" cy="130705"/>
           </a:xfrm>
           <a:prstGeom prst="rect">
             <a:avLst/>
@@ -30076,8 +29899,8 @@
         </p:nvSpPr>
         <p:spPr>
           <a:xfrm>
-            <a:off x="4754880" y="3526357"/>
-            <a:ext cx="1143000" cy="239896"/>
+            <a:off x="4754880" y="3676964"/>
+            <a:ext cx="1143000" cy="261411"/>
           </a:xfrm>
           <a:prstGeom prst="rect">
             <a:avLst/>
@@ -30115,8 +29938,8 @@
         </p:nvSpPr>
         <p:spPr>
           <a:xfrm>
-            <a:off x="658368" y="3766252"/>
-            <a:ext cx="310896" cy="239896"/>
+            <a:off x="658368" y="3938375"/>
+            <a:ext cx="310896" cy="261411"/>
           </a:xfrm>
           <a:prstGeom prst="rect">
             <a:avLst/>
@@ -30154,8 +29977,8 @@
         </p:nvSpPr>
         <p:spPr>
           <a:xfrm>
-            <a:off x="1014984" y="3766252"/>
-            <a:ext cx="1920240" cy="239896"/>
+            <a:off x="1014984" y="3938375"/>
+            <a:ext cx="1920240" cy="261411"/>
           </a:xfrm>
           <a:prstGeom prst="rect">
             <a:avLst/>
@@ -30193,8 +30016,8 @@
         </p:nvSpPr>
         <p:spPr>
           <a:xfrm>
-            <a:off x="3008376" y="3826226"/>
-            <a:ext cx="253080" cy="119948"/>
+            <a:off x="3008376" y="4003727"/>
+            <a:ext cx="253080" cy="130705"/>
           </a:xfrm>
           <a:prstGeom prst="rect">
             <a:avLst/>
@@ -30213,8 +30036,8 @@
         </p:nvSpPr>
         <p:spPr>
           <a:xfrm>
-            <a:off x="4754880" y="3766252"/>
-            <a:ext cx="1143000" cy="239896"/>
+            <a:off x="4754880" y="3938375"/>
+            <a:ext cx="1143000" cy="261411"/>
           </a:xfrm>
           <a:prstGeom prst="rect">
             <a:avLst/>
@@ -30252,8 +30075,8 @@
         </p:nvSpPr>
         <p:spPr>
           <a:xfrm>
-            <a:off x="658368" y="4006148"/>
-            <a:ext cx="310896" cy="239896"/>
+            <a:off x="658368" y="4199785"/>
+            <a:ext cx="310896" cy="261411"/>
           </a:xfrm>
           <a:prstGeom prst="rect">
             <a:avLst/>
@@ -30291,8 +30114,8 @@
         </p:nvSpPr>
         <p:spPr>
           <a:xfrm>
-            <a:off x="1014984" y="4006148"/>
-            <a:ext cx="1920240" cy="239896"/>
+            <a:off x="1014984" y="4199785"/>
+            <a:ext cx="1920240" cy="261411"/>
           </a:xfrm>
           <a:prstGeom prst="rect">
             <a:avLst/>
@@ -30330,8 +30153,8 @@
         </p:nvSpPr>
         <p:spPr>
           <a:xfrm>
-            <a:off x="3008376" y="4066122"/>
-            <a:ext cx="266400" cy="119948"/>
+            <a:off x="3008376" y="4265138"/>
+            <a:ext cx="266400" cy="130705"/>
           </a:xfrm>
           <a:prstGeom prst="rect">
             <a:avLst/>
@@ -30350,8 +30173,8 @@
         </p:nvSpPr>
         <p:spPr>
           <a:xfrm>
-            <a:off x="4754880" y="4006148"/>
-            <a:ext cx="1143000" cy="239896"/>
+            <a:off x="4754880" y="4199785"/>
+            <a:ext cx="1143000" cy="261411"/>
           </a:xfrm>
           <a:prstGeom prst="rect">
             <a:avLst/>
@@ -30389,8 +30212,8 @@
         </p:nvSpPr>
         <p:spPr>
           <a:xfrm>
-            <a:off x="658368" y="4246043"/>
-            <a:ext cx="310896" cy="239896"/>
+            <a:off x="658368" y="4461196"/>
+            <a:ext cx="310896" cy="261411"/>
           </a:xfrm>
           <a:prstGeom prst="rect">
             <a:avLst/>
@@ -30428,8 +30251,8 @@
         </p:nvSpPr>
         <p:spPr>
           <a:xfrm>
-            <a:off x="1014984" y="4246043"/>
-            <a:ext cx="1920240" cy="239896"/>
+            <a:off x="1014984" y="4461196"/>
+            <a:ext cx="1920240" cy="261411"/>
           </a:xfrm>
           <a:prstGeom prst="rect">
             <a:avLst/>
@@ -30467,8 +30290,8 @@
         </p:nvSpPr>
         <p:spPr>
           <a:xfrm>
-            <a:off x="3008376" y="4306017"/>
-            <a:ext cx="290376" cy="119948"/>
+            <a:off x="3008376" y="4526549"/>
+            <a:ext cx="290376" cy="130705"/>
           </a:xfrm>
           <a:prstGeom prst="rect">
             <a:avLst/>
@@ -30487,8 +30310,8 @@
         </p:nvSpPr>
         <p:spPr>
           <a:xfrm>
-            <a:off x="4754880" y="4246043"/>
-            <a:ext cx="1143000" cy="239896"/>
+            <a:off x="4754880" y="4461196"/>
+            <a:ext cx="1143000" cy="261411"/>
           </a:xfrm>
           <a:prstGeom prst="rect">
             <a:avLst/>
@@ -30526,8 +30349,8 @@
         </p:nvSpPr>
         <p:spPr>
           <a:xfrm>
-            <a:off x="658368" y="4485939"/>
-            <a:ext cx="310896" cy="239896"/>
+            <a:off x="658368" y="4722607"/>
+            <a:ext cx="310896" cy="261411"/>
           </a:xfrm>
           <a:prstGeom prst="rect">
             <a:avLst/>
@@ -30565,8 +30388,8 @@
         </p:nvSpPr>
         <p:spPr>
           <a:xfrm>
-            <a:off x="1014984" y="4485939"/>
-            <a:ext cx="1920240" cy="239896"/>
+            <a:off x="1014984" y="4722607"/>
+            <a:ext cx="1920240" cy="261411"/>
           </a:xfrm>
           <a:prstGeom prst="rect">
             <a:avLst/>
@@ -30604,8 +30427,8 @@
         </p:nvSpPr>
         <p:spPr>
           <a:xfrm>
-            <a:off x="3008376" y="4545913"/>
-            <a:ext cx="295704" cy="119948"/>
+            <a:off x="3008376" y="4787960"/>
+            <a:ext cx="295704" cy="130705"/>
           </a:xfrm>
           <a:prstGeom prst="rect">
             <a:avLst/>
@@ -30624,8 +30447,8 @@
         </p:nvSpPr>
         <p:spPr>
           <a:xfrm>
-            <a:off x="4754880" y="4485939"/>
-            <a:ext cx="1143000" cy="239896"/>
+            <a:off x="4754880" y="4722607"/>
+            <a:ext cx="1143000" cy="261411"/>
           </a:xfrm>
           <a:prstGeom prst="rect">
             <a:avLst/>
@@ -30663,8 +30486,8 @@
         </p:nvSpPr>
         <p:spPr>
           <a:xfrm>
-            <a:off x="658368" y="4725834"/>
-            <a:ext cx="310896" cy="239896"/>
+            <a:off x="658368" y="4984018"/>
+            <a:ext cx="310896" cy="261411"/>
           </a:xfrm>
           <a:prstGeom prst="rect">
             <a:avLst/>
@@ -30702,8 +30525,8 @@
         </p:nvSpPr>
         <p:spPr>
           <a:xfrm>
-            <a:off x="1014984" y="4725834"/>
-            <a:ext cx="1920240" cy="239896"/>
+            <a:off x="1014984" y="4984018"/>
+            <a:ext cx="1920240" cy="261411"/>
           </a:xfrm>
           <a:prstGeom prst="rect">
             <a:avLst/>
@@ -30741,8 +30564,8 @@
         </p:nvSpPr>
         <p:spPr>
           <a:xfrm>
-            <a:off x="3008376" y="4785808"/>
-            <a:ext cx="330336" cy="119948"/>
+            <a:off x="3008376" y="5049371"/>
+            <a:ext cx="330336" cy="130705"/>
           </a:xfrm>
           <a:prstGeom prst="rect">
             <a:avLst/>
@@ -30761,8 +30584,8 @@
         </p:nvSpPr>
         <p:spPr>
           <a:xfrm>
-            <a:off x="4754880" y="4725834"/>
-            <a:ext cx="1143000" cy="239896"/>
+            <a:off x="4754880" y="4984018"/>
+            <a:ext cx="1143000" cy="261411"/>
           </a:xfrm>
           <a:prstGeom prst="rect">
             <a:avLst/>
@@ -30800,8 +30623,8 @@
         </p:nvSpPr>
         <p:spPr>
           <a:xfrm>
-            <a:off x="658368" y="4965730"/>
-            <a:ext cx="310896" cy="239896"/>
+            <a:off x="658368" y="5245429"/>
+            <a:ext cx="310896" cy="261411"/>
           </a:xfrm>
           <a:prstGeom prst="rect">
             <a:avLst/>
@@ -30839,8 +30662,8 @@
         </p:nvSpPr>
         <p:spPr>
           <a:xfrm>
-            <a:off x="1014984" y="4965730"/>
-            <a:ext cx="1920240" cy="239896"/>
+            <a:off x="1014984" y="5245429"/>
+            <a:ext cx="1920240" cy="261411"/>
           </a:xfrm>
           <a:prstGeom prst="rect">
             <a:avLst/>
@@ -30878,8 +30701,8 @@
         </p:nvSpPr>
         <p:spPr>
           <a:xfrm>
-            <a:off x="3008376" y="5025704"/>
-            <a:ext cx="335664" cy="119948"/>
+            <a:off x="3008376" y="5310781"/>
+            <a:ext cx="335664" cy="130705"/>
           </a:xfrm>
           <a:prstGeom prst="rect">
             <a:avLst/>
@@ -30898,8 +30721,8 @@
         </p:nvSpPr>
         <p:spPr>
           <a:xfrm>
-            <a:off x="4754880" y="4965730"/>
-            <a:ext cx="1143000" cy="239896"/>
+            <a:off x="4754880" y="5245429"/>
+            <a:ext cx="1143000" cy="261411"/>
           </a:xfrm>
           <a:prstGeom prst="rect">
             <a:avLst/>
@@ -30937,8 +30760,8 @@
         </p:nvSpPr>
         <p:spPr>
           <a:xfrm>
-            <a:off x="658368" y="5205625"/>
-            <a:ext cx="310896" cy="239896"/>
+            <a:off x="658368" y="5506840"/>
+            <a:ext cx="310896" cy="261411"/>
           </a:xfrm>
           <a:prstGeom prst="rect">
             <a:avLst/>
@@ -30976,8 +30799,8 @@
         </p:nvSpPr>
         <p:spPr>
           <a:xfrm>
-            <a:off x="1014984" y="5205625"/>
-            <a:ext cx="1920240" cy="239896"/>
+            <a:off x="1014984" y="5506840"/>
+            <a:ext cx="1920240" cy="261411"/>
           </a:xfrm>
           <a:prstGeom prst="rect">
             <a:avLst/>
@@ -31015,8 +30838,8 @@
         </p:nvSpPr>
         <p:spPr>
           <a:xfrm>
-            <a:off x="3008376" y="5265599"/>
-            <a:ext cx="362304" cy="119948"/>
+            <a:off x="3008376" y="5572192"/>
+            <a:ext cx="362304" cy="130705"/>
           </a:xfrm>
           <a:prstGeom prst="rect">
             <a:avLst/>
@@ -31035,8 +30858,8 @@
         </p:nvSpPr>
         <p:spPr>
           <a:xfrm>
-            <a:off x="4754880" y="5205625"/>
-            <a:ext cx="1143000" cy="239896"/>
+            <a:off x="4754880" y="5506840"/>
+            <a:ext cx="1143000" cy="261411"/>
           </a:xfrm>
           <a:prstGeom prst="rect">
             <a:avLst/>
@@ -31074,8 +30897,8 @@
         </p:nvSpPr>
         <p:spPr>
           <a:xfrm>
-            <a:off x="658368" y="5445521"/>
-            <a:ext cx="310896" cy="239896"/>
+            <a:off x="658368" y="5768250"/>
+            <a:ext cx="310896" cy="261411"/>
           </a:xfrm>
           <a:prstGeom prst="rect">
             <a:avLst/>
@@ -31113,8 +30936,8 @@
         </p:nvSpPr>
         <p:spPr>
           <a:xfrm>
-            <a:off x="1014984" y="5445521"/>
-            <a:ext cx="1920240" cy="239896"/>
+            <a:off x="1014984" y="5768250"/>
+            <a:ext cx="1920240" cy="261411"/>
           </a:xfrm>
           <a:prstGeom prst="rect">
             <a:avLst/>
@@ -31152,8 +30975,8 @@
         </p:nvSpPr>
         <p:spPr>
           <a:xfrm>
-            <a:off x="3008376" y="5505495"/>
-            <a:ext cx="383616" cy="119948"/>
+            <a:off x="3008376" y="5833603"/>
+            <a:ext cx="383616" cy="130705"/>
           </a:xfrm>
           <a:prstGeom prst="rect">
             <a:avLst/>
@@ -31172,8 +30995,8 @@
         </p:nvSpPr>
         <p:spPr>
           <a:xfrm>
-            <a:off x="4754880" y="5445521"/>
-            <a:ext cx="1143000" cy="239896"/>
+            <a:off x="4754880" y="5768250"/>
+            <a:ext cx="1143000" cy="261411"/>
           </a:xfrm>
           <a:prstGeom prst="rect">
             <a:avLst/>
@@ -31211,8 +31034,8 @@
         </p:nvSpPr>
         <p:spPr>
           <a:xfrm>
-            <a:off x="658368" y="5685416"/>
-            <a:ext cx="310896" cy="239896"/>
+            <a:off x="658368" y="6029661"/>
+            <a:ext cx="310896" cy="261411"/>
           </a:xfrm>
           <a:prstGeom prst="rect">
             <a:avLst/>
@@ -31250,8 +31073,8 @@
         </p:nvSpPr>
         <p:spPr>
           <a:xfrm>
-            <a:off x="1014984" y="5685416"/>
-            <a:ext cx="1920240" cy="239896"/>
+            <a:off x="1014984" y="6029661"/>
+            <a:ext cx="1920240" cy="261411"/>
           </a:xfrm>
           <a:prstGeom prst="rect">
             <a:avLst/>
@@ -31289,8 +31112,8 @@
         </p:nvSpPr>
         <p:spPr>
           <a:xfrm>
-            <a:off x="3008376" y="5745390"/>
-            <a:ext cx="383616" cy="119948"/>
+            <a:off x="3008376" y="6095014"/>
+            <a:ext cx="383616" cy="130705"/>
           </a:xfrm>
           <a:prstGeom prst="rect">
             <a:avLst/>
@@ -31309,8 +31132,8 @@
         </p:nvSpPr>
         <p:spPr>
           <a:xfrm>
-            <a:off x="4754880" y="5685416"/>
-            <a:ext cx="1143000" cy="239896"/>
+            <a:off x="4754880" y="6029661"/>
+            <a:ext cx="1143000" cy="261411"/>
           </a:xfrm>
           <a:prstGeom prst="rect">
             <a:avLst/>
@@ -31349,7 +31172,7 @@
         <p:spPr>
           <a:xfrm>
             <a:off x="6208776" y="1847088"/>
-            <a:ext cx="310896" cy="239896"/>
+            <a:ext cx="310896" cy="261411"/>
           </a:xfrm>
           <a:prstGeom prst="rect">
             <a:avLst/>
@@ -31388,7 +31211,7 @@
         <p:spPr>
           <a:xfrm>
             <a:off x="6565392" y="1847088"/>
-            <a:ext cx="1920240" cy="239896"/>
+            <a:ext cx="1920240" cy="261411"/>
           </a:xfrm>
           <a:prstGeom prst="rect">
             <a:avLst/>
@@ -31426,8 +31249,8 @@
         </p:nvSpPr>
         <p:spPr>
           <a:xfrm>
-            <a:off x="8558784" y="1907062"/>
-            <a:ext cx="394272" cy="119948"/>
+            <a:off x="8558784" y="1912441"/>
+            <a:ext cx="394272" cy="130705"/>
           </a:xfrm>
           <a:prstGeom prst="rect">
             <a:avLst/>
@@ -31447,7 +31270,7 @@
         <p:spPr>
           <a:xfrm>
             <a:off x="10305288" y="1847088"/>
-            <a:ext cx="1143000" cy="239896"/>
+            <a:ext cx="1143000" cy="261411"/>
           </a:xfrm>
           <a:prstGeom prst="rect">
             <a:avLst/>
@@ -31485,8 +31308,8 @@
         </p:nvSpPr>
         <p:spPr>
           <a:xfrm>
-            <a:off x="6208776" y="2086984"/>
-            <a:ext cx="310896" cy="239896"/>
+            <a:off x="6208776" y="2108499"/>
+            <a:ext cx="310896" cy="261411"/>
           </a:xfrm>
           <a:prstGeom prst="rect">
             <a:avLst/>
@@ -31524,8 +31347,8 @@
         </p:nvSpPr>
         <p:spPr>
           <a:xfrm>
-            <a:off x="6565392" y="2086984"/>
-            <a:ext cx="1920240" cy="239896"/>
+            <a:off x="6565392" y="2108499"/>
+            <a:ext cx="1920240" cy="261411"/>
           </a:xfrm>
           <a:prstGeom prst="rect">
             <a:avLst/>
@@ -31563,8 +31386,8 @@
         </p:nvSpPr>
         <p:spPr>
           <a:xfrm>
-            <a:off x="8558784" y="2146957"/>
-            <a:ext cx="407592" cy="119948"/>
+            <a:off x="8558784" y="2173852"/>
+            <a:ext cx="407592" cy="130705"/>
           </a:xfrm>
           <a:prstGeom prst="rect">
             <a:avLst/>
@@ -31583,8 +31406,8 @@
         </p:nvSpPr>
         <p:spPr>
           <a:xfrm>
-            <a:off x="10305288" y="2086984"/>
-            <a:ext cx="1143000" cy="239896"/>
+            <a:off x="10305288" y="2108499"/>
+            <a:ext cx="1143000" cy="261411"/>
           </a:xfrm>
           <a:prstGeom prst="rect">
             <a:avLst/>
@@ -31622,8 +31445,8 @@
         </p:nvSpPr>
         <p:spPr>
           <a:xfrm>
-            <a:off x="6208776" y="2326879"/>
-            <a:ext cx="310896" cy="239896"/>
+            <a:off x="6208776" y="2369910"/>
+            <a:ext cx="310896" cy="261411"/>
           </a:xfrm>
           <a:prstGeom prst="rect">
             <a:avLst/>
@@ -31661,8 +31484,8 @@
         </p:nvSpPr>
         <p:spPr>
           <a:xfrm>
-            <a:off x="6565392" y="2326879"/>
-            <a:ext cx="1920240" cy="239896"/>
+            <a:off x="6565392" y="2369910"/>
+            <a:ext cx="1920240" cy="261411"/>
           </a:xfrm>
           <a:prstGeom prst="rect">
             <a:avLst/>
@@ -31700,8 +31523,8 @@
         </p:nvSpPr>
         <p:spPr>
           <a:xfrm>
-            <a:off x="8558784" y="2386853"/>
-            <a:ext cx="476856" cy="119948"/>
+            <a:off x="8558784" y="2435262"/>
+            <a:ext cx="476856" cy="130705"/>
           </a:xfrm>
           <a:prstGeom prst="rect">
             <a:avLst/>
@@ -31720,8 +31543,8 @@
         </p:nvSpPr>
         <p:spPr>
           <a:xfrm>
-            <a:off x="10305288" y="2326879"/>
-            <a:ext cx="1143000" cy="239896"/>
+            <a:off x="10305288" y="2369910"/>
+            <a:ext cx="1143000" cy="261411"/>
           </a:xfrm>
           <a:prstGeom prst="rect">
             <a:avLst/>
@@ -31759,8 +31582,8 @@
         </p:nvSpPr>
         <p:spPr>
           <a:xfrm>
-            <a:off x="6208776" y="2566775"/>
-            <a:ext cx="310896" cy="239896"/>
+            <a:off x="6208776" y="2631320"/>
+            <a:ext cx="310896" cy="261411"/>
           </a:xfrm>
           <a:prstGeom prst="rect">
             <a:avLst/>
@@ -31798,8 +31621,8 @@
         </p:nvSpPr>
         <p:spPr>
           <a:xfrm>
-            <a:off x="6565392" y="2566775"/>
-            <a:ext cx="1920240" cy="239896"/>
+            <a:off x="6565392" y="2631320"/>
+            <a:ext cx="1920240" cy="261411"/>
           </a:xfrm>
           <a:prstGeom prst="rect">
             <a:avLst/>
@@ -31837,8 +31660,8 @@
         </p:nvSpPr>
         <p:spPr>
           <a:xfrm>
-            <a:off x="8558784" y="2626748"/>
-            <a:ext cx="514152" cy="119948"/>
+            <a:off x="8558784" y="2696673"/>
+            <a:ext cx="514152" cy="130705"/>
           </a:xfrm>
           <a:prstGeom prst="rect">
             <a:avLst/>
@@ -31857,8 +31680,8 @@
         </p:nvSpPr>
         <p:spPr>
           <a:xfrm>
-            <a:off x="10305288" y="2566775"/>
-            <a:ext cx="1143000" cy="239896"/>
+            <a:off x="10305288" y="2631320"/>
+            <a:ext cx="1143000" cy="261411"/>
           </a:xfrm>
           <a:prstGeom prst="rect">
             <a:avLst/>
@@ -31896,8 +31719,8 @@
         </p:nvSpPr>
         <p:spPr>
           <a:xfrm>
-            <a:off x="6208776" y="2806670"/>
-            <a:ext cx="310896" cy="239896"/>
+            <a:off x="6208776" y="2892731"/>
+            <a:ext cx="310896" cy="261411"/>
           </a:xfrm>
           <a:prstGeom prst="rect">
             <a:avLst/>
@@ -31935,8 +31758,8 @@
         </p:nvSpPr>
         <p:spPr>
           <a:xfrm>
-            <a:off x="6565392" y="2806670"/>
-            <a:ext cx="1920240" cy="239896"/>
+            <a:off x="6565392" y="2892731"/>
+            <a:ext cx="1920240" cy="261411"/>
           </a:xfrm>
           <a:prstGeom prst="rect">
             <a:avLst/>
@@ -31974,8 +31797,8 @@
         </p:nvSpPr>
         <p:spPr>
           <a:xfrm>
-            <a:off x="8558784" y="2866644"/>
-            <a:ext cx="514152" cy="119948"/>
+            <a:off x="8558784" y="2958084"/>
+            <a:ext cx="514152" cy="130705"/>
           </a:xfrm>
           <a:prstGeom prst="rect">
             <a:avLst/>
@@ -31994,8 +31817,8 @@
         </p:nvSpPr>
         <p:spPr>
           <a:xfrm>
-            <a:off x="10305288" y="2806670"/>
-            <a:ext cx="1143000" cy="239896"/>
+            <a:off x="10305288" y="2892731"/>
+            <a:ext cx="1143000" cy="261411"/>
           </a:xfrm>
           <a:prstGeom prst="rect">
             <a:avLst/>
@@ -32033,8 +31856,8 @@
         </p:nvSpPr>
         <p:spPr>
           <a:xfrm>
-            <a:off x="6208776" y="3046566"/>
-            <a:ext cx="310896" cy="239896"/>
+            <a:off x="6208776" y="3154142"/>
+            <a:ext cx="310896" cy="261411"/>
           </a:xfrm>
           <a:prstGeom prst="rect">
             <a:avLst/>
@@ -32072,8 +31895,8 @@
         </p:nvSpPr>
         <p:spPr>
           <a:xfrm>
-            <a:off x="6565392" y="3046566"/>
-            <a:ext cx="1920240" cy="239896"/>
+            <a:off x="6565392" y="3154142"/>
+            <a:ext cx="1920240" cy="261411"/>
           </a:xfrm>
           <a:prstGeom prst="rect">
             <a:avLst/>
@@ -32111,8 +31934,8 @@
         </p:nvSpPr>
         <p:spPr>
           <a:xfrm>
-            <a:off x="8558784" y="3106540"/>
-            <a:ext cx="626040" cy="119948"/>
+            <a:off x="8558784" y="3219495"/>
+            <a:ext cx="626040" cy="130705"/>
           </a:xfrm>
           <a:prstGeom prst="rect">
             <a:avLst/>
@@ -32131,8 +31954,8 @@
         </p:nvSpPr>
         <p:spPr>
           <a:xfrm>
-            <a:off x="10305288" y="3046566"/>
-            <a:ext cx="1143000" cy="239896"/>
+            <a:off x="10305288" y="3154142"/>
+            <a:ext cx="1143000" cy="261411"/>
           </a:xfrm>
           <a:prstGeom prst="rect">
             <a:avLst/>
@@ -32170,8 +31993,8 @@
         </p:nvSpPr>
         <p:spPr>
           <a:xfrm>
-            <a:off x="6208776" y="3286461"/>
-            <a:ext cx="310896" cy="239896"/>
+            <a:off x="6208776" y="3415553"/>
+            <a:ext cx="310896" cy="261411"/>
           </a:xfrm>
           <a:prstGeom prst="rect">
             <a:avLst/>
@@ -32209,8 +32032,8 @@
         </p:nvSpPr>
         <p:spPr>
           <a:xfrm>
-            <a:off x="6565392" y="3286461"/>
-            <a:ext cx="1920240" cy="239896"/>
+            <a:off x="6565392" y="3415553"/>
+            <a:ext cx="1920240" cy="261411"/>
           </a:xfrm>
           <a:prstGeom prst="rect">
             <a:avLst/>
@@ -32248,8 +32071,8 @@
         </p:nvSpPr>
         <p:spPr>
           <a:xfrm>
-            <a:off x="8558784" y="3346435"/>
-            <a:ext cx="673992" cy="119948"/>
+            <a:off x="8558784" y="3480906"/>
+            <a:ext cx="673992" cy="130705"/>
           </a:xfrm>
           <a:prstGeom prst="rect">
             <a:avLst/>
@@ -32268,8 +32091,8 @@
         </p:nvSpPr>
         <p:spPr>
           <a:xfrm>
-            <a:off x="10305288" y="3286461"/>
-            <a:ext cx="1143000" cy="239896"/>
+            <a:off x="10305288" y="3415553"/>
+            <a:ext cx="1143000" cy="261411"/>
           </a:xfrm>
           <a:prstGeom prst="rect">
             <a:avLst/>
@@ -32307,8 +32130,8 @@
         </p:nvSpPr>
         <p:spPr>
           <a:xfrm>
-            <a:off x="6208776" y="3526357"/>
-            <a:ext cx="310896" cy="239896"/>
+            <a:off x="6208776" y="3676964"/>
+            <a:ext cx="310896" cy="261411"/>
           </a:xfrm>
           <a:prstGeom prst="rect">
             <a:avLst/>
@@ -32346,8 +32169,8 @@
         </p:nvSpPr>
         <p:spPr>
           <a:xfrm>
-            <a:off x="6565392" y="3526357"/>
-            <a:ext cx="1920240" cy="239896"/>
+            <a:off x="6565392" y="3676964"/>
+            <a:ext cx="1920240" cy="261411"/>
           </a:xfrm>
           <a:prstGeom prst="rect">
             <a:avLst/>
@@ -32385,8 +32208,8 @@
         </p:nvSpPr>
         <p:spPr>
           <a:xfrm>
-            <a:off x="8558784" y="3586331"/>
-            <a:ext cx="719280" cy="119948"/>
+            <a:off x="8558784" y="3742316"/>
+            <a:ext cx="719280" cy="130705"/>
           </a:xfrm>
           <a:prstGeom prst="rect">
             <a:avLst/>
@@ -32405,8 +32228,8 @@
         </p:nvSpPr>
         <p:spPr>
           <a:xfrm>
-            <a:off x="10305288" y="3526357"/>
-            <a:ext cx="1143000" cy="239896"/>
+            <a:off x="10305288" y="3676964"/>
+            <a:ext cx="1143000" cy="261411"/>
           </a:xfrm>
           <a:prstGeom prst="rect">
             <a:avLst/>
@@ -32444,8 +32267,8 @@
         </p:nvSpPr>
         <p:spPr>
           <a:xfrm>
-            <a:off x="6208776" y="3766252"/>
-            <a:ext cx="310896" cy="239896"/>
+            <a:off x="6208776" y="3938375"/>
+            <a:ext cx="310896" cy="261411"/>
           </a:xfrm>
           <a:prstGeom prst="rect">
             <a:avLst/>
@@ -32483,8 +32306,8 @@
         </p:nvSpPr>
         <p:spPr>
           <a:xfrm>
-            <a:off x="6565392" y="3766252"/>
-            <a:ext cx="1920240" cy="239896"/>
+            <a:off x="6565392" y="3938375"/>
+            <a:ext cx="1920240" cy="261411"/>
           </a:xfrm>
           <a:prstGeom prst="rect">
             <a:avLst/>
@@ -32522,8 +32345,8 @@
         </p:nvSpPr>
         <p:spPr>
           <a:xfrm>
-            <a:off x="8558784" y="3826226"/>
-            <a:ext cx="721944" cy="119948"/>
+            <a:off x="8558784" y="4003727"/>
+            <a:ext cx="721944" cy="130705"/>
           </a:xfrm>
           <a:prstGeom prst="rect">
             <a:avLst/>
@@ -32542,8 +32365,8 @@
         </p:nvSpPr>
         <p:spPr>
           <a:xfrm>
-            <a:off x="10305288" y="3766252"/>
-            <a:ext cx="1143000" cy="239896"/>
+            <a:off x="10305288" y="3938375"/>
+            <a:ext cx="1143000" cy="261411"/>
           </a:xfrm>
           <a:prstGeom prst="rect">
             <a:avLst/>
@@ -32581,8 +32404,8 @@
         </p:nvSpPr>
         <p:spPr>
           <a:xfrm>
-            <a:off x="6208776" y="4006148"/>
-            <a:ext cx="310896" cy="239896"/>
+            <a:off x="6208776" y="4199785"/>
+            <a:ext cx="310896" cy="261411"/>
           </a:xfrm>
           <a:prstGeom prst="rect">
             <a:avLst/>
@@ -32620,8 +32443,8 @@
         </p:nvSpPr>
         <p:spPr>
           <a:xfrm>
-            <a:off x="6565392" y="4006148"/>
-            <a:ext cx="1920240" cy="239896"/>
+            <a:off x="6565392" y="4199785"/>
+            <a:ext cx="1920240" cy="261411"/>
           </a:xfrm>
           <a:prstGeom prst="rect">
             <a:avLst/>
@@ -32659,8 +32482,8 @@
         </p:nvSpPr>
         <p:spPr>
           <a:xfrm>
-            <a:off x="8558784" y="4066122"/>
-            <a:ext cx="753912" cy="119948"/>
+            <a:off x="8558784" y="4265138"/>
+            <a:ext cx="753912" cy="130705"/>
           </a:xfrm>
           <a:prstGeom prst="rect">
             <a:avLst/>
@@ -32679,8 +32502,8 @@
         </p:nvSpPr>
         <p:spPr>
           <a:xfrm>
-            <a:off x="10305288" y="4006148"/>
-            <a:ext cx="1143000" cy="239896"/>
+            <a:off x="10305288" y="4199785"/>
+            <a:ext cx="1143000" cy="261411"/>
           </a:xfrm>
           <a:prstGeom prst="rect">
             <a:avLst/>
@@ -32718,8 +32541,8 @@
         </p:nvSpPr>
         <p:spPr>
           <a:xfrm>
-            <a:off x="6208776" y="4246043"/>
-            <a:ext cx="310896" cy="239896"/>
+            <a:off x="6208776" y="4461196"/>
+            <a:ext cx="310896" cy="261411"/>
           </a:xfrm>
           <a:prstGeom prst="rect">
             <a:avLst/>
@@ -32757,8 +32580,8 @@
         </p:nvSpPr>
         <p:spPr>
           <a:xfrm>
-            <a:off x="6565392" y="4246043"/>
-            <a:ext cx="1920240" cy="239896"/>
+            <a:off x="6565392" y="4461196"/>
+            <a:ext cx="1920240" cy="261411"/>
           </a:xfrm>
           <a:prstGeom prst="rect">
             <a:avLst/>
@@ -32796,8 +32619,8 @@
         </p:nvSpPr>
         <p:spPr>
           <a:xfrm>
-            <a:off x="8558784" y="4306017"/>
-            <a:ext cx="772560" cy="119948"/>
+            <a:off x="8558784" y="4526549"/>
+            <a:ext cx="772560" cy="130705"/>
           </a:xfrm>
           <a:prstGeom prst="rect">
             <a:avLst/>
@@ -32816,8 +32639,8 @@
         </p:nvSpPr>
         <p:spPr>
           <a:xfrm>
-            <a:off x="10305288" y="4246043"/>
-            <a:ext cx="1143000" cy="239896"/>
+            <a:off x="10305288" y="4461196"/>
+            <a:ext cx="1143000" cy="261411"/>
           </a:xfrm>
           <a:prstGeom prst="rect">
             <a:avLst/>
@@ -32855,8 +32678,8 @@
         </p:nvSpPr>
         <p:spPr>
           <a:xfrm>
-            <a:off x="6208776" y="4485939"/>
-            <a:ext cx="310896" cy="239896"/>
+            <a:off x="6208776" y="4722607"/>
+            <a:ext cx="310896" cy="261411"/>
           </a:xfrm>
           <a:prstGeom prst="rect">
             <a:avLst/>
@@ -32894,8 +32717,8 @@
         </p:nvSpPr>
         <p:spPr>
           <a:xfrm>
-            <a:off x="6565392" y="4485939"/>
-            <a:ext cx="1920240" cy="239896"/>
+            <a:off x="6565392" y="4722607"/>
+            <a:ext cx="1920240" cy="261411"/>
           </a:xfrm>
           <a:prstGeom prst="rect">
             <a:avLst/>
@@ -32933,8 +32756,8 @@
         </p:nvSpPr>
         <p:spPr>
           <a:xfrm>
-            <a:off x="8558784" y="4545913"/>
-            <a:ext cx="1014984" cy="119948"/>
+            <a:off x="8558784" y="4787960"/>
+            <a:ext cx="1014984" cy="130705"/>
           </a:xfrm>
           <a:prstGeom prst="rect">
             <a:avLst/>
@@ -32953,8 +32776,8 @@
         </p:nvSpPr>
         <p:spPr>
           <a:xfrm>
-            <a:off x="10305288" y="4485939"/>
-            <a:ext cx="1143000" cy="239896"/>
+            <a:off x="10305288" y="4722607"/>
+            <a:ext cx="1143000" cy="261411"/>
           </a:xfrm>
           <a:prstGeom prst="rect">
             <a:avLst/>
@@ -32992,8 +32815,8 @@
         </p:nvSpPr>
         <p:spPr>
           <a:xfrm>
-            <a:off x="6208776" y="4725834"/>
-            <a:ext cx="310896" cy="239896"/>
+            <a:off x="6208776" y="4984018"/>
+            <a:ext cx="310896" cy="261411"/>
           </a:xfrm>
           <a:prstGeom prst="rect">
             <a:avLst/>
@@ -33031,8 +32854,8 @@
         </p:nvSpPr>
         <p:spPr>
           <a:xfrm>
-            <a:off x="6565392" y="4725834"/>
-            <a:ext cx="1920240" cy="239896"/>
+            <a:off x="6565392" y="4984018"/>
+            <a:ext cx="1920240" cy="261411"/>
           </a:xfrm>
           <a:prstGeom prst="rect">
             <a:avLst/>
@@ -33070,8 +32893,8 @@
         </p:nvSpPr>
         <p:spPr>
           <a:xfrm>
-            <a:off x="8558784" y="4785808"/>
-            <a:ext cx="1046952" cy="119948"/>
+            <a:off x="8558784" y="5049371"/>
+            <a:ext cx="1046952" cy="130705"/>
           </a:xfrm>
           <a:prstGeom prst="rect">
             <a:avLst/>
@@ -33090,8 +32913,8 @@
         </p:nvSpPr>
         <p:spPr>
           <a:xfrm>
-            <a:off x="10305288" y="4725834"/>
-            <a:ext cx="1143000" cy="239896"/>
+            <a:off x="10305288" y="4984018"/>
+            <a:ext cx="1143000" cy="261411"/>
           </a:xfrm>
           <a:prstGeom prst="rect">
             <a:avLst/>
@@ -33129,8 +32952,8 @@
         </p:nvSpPr>
         <p:spPr>
           <a:xfrm>
-            <a:off x="6208776" y="4965730"/>
-            <a:ext cx="310896" cy="239896"/>
+            <a:off x="6208776" y="5245429"/>
+            <a:ext cx="310896" cy="261411"/>
           </a:xfrm>
           <a:prstGeom prst="rect">
             <a:avLst/>
@@ -33168,8 +32991,8 @@
         </p:nvSpPr>
         <p:spPr>
           <a:xfrm>
-            <a:off x="6565392" y="4965730"/>
-            <a:ext cx="1920240" cy="239896"/>
+            <a:off x="6565392" y="5245429"/>
+            <a:ext cx="1920240" cy="261411"/>
           </a:xfrm>
           <a:prstGeom prst="rect">
             <a:avLst/>
@@ -33207,8 +33030,8 @@
         </p:nvSpPr>
         <p:spPr>
           <a:xfrm>
-            <a:off x="8558784" y="5025704"/>
-            <a:ext cx="1201464" cy="119948"/>
+            <a:off x="8558784" y="5310781"/>
+            <a:ext cx="1201464" cy="130705"/>
           </a:xfrm>
           <a:prstGeom prst="rect">
             <a:avLst/>
@@ -33227,8 +33050,8 @@
         </p:nvSpPr>
         <p:spPr>
           <a:xfrm>
-            <a:off x="10305288" y="4965730"/>
-            <a:ext cx="1143000" cy="239896"/>
+            <a:off x="10305288" y="5245429"/>
+            <a:ext cx="1143000" cy="261411"/>
           </a:xfrm>
           <a:prstGeom prst="rect">
             <a:avLst/>
@@ -33266,8 +33089,8 @@
         </p:nvSpPr>
         <p:spPr>
           <a:xfrm>
-            <a:off x="6208776" y="5205625"/>
-            <a:ext cx="310896" cy="239896"/>
+            <a:off x="6208776" y="5506840"/>
+            <a:ext cx="310896" cy="261411"/>
           </a:xfrm>
           <a:prstGeom prst="rect">
             <a:avLst/>
@@ -33305,8 +33128,8 @@
         </p:nvSpPr>
         <p:spPr>
           <a:xfrm>
-            <a:off x="6565392" y="5205625"/>
-            <a:ext cx="1920240" cy="239896"/>
+            <a:off x="6565392" y="5506840"/>
+            <a:ext cx="1920240" cy="261411"/>
           </a:xfrm>
           <a:prstGeom prst="rect">
             <a:avLst/>
@@ -33344,8 +33167,8 @@
         </p:nvSpPr>
         <p:spPr>
           <a:xfrm>
-            <a:off x="8558784" y="5265599"/>
-            <a:ext cx="1379952" cy="119948"/>
+            <a:off x="8558784" y="5572192"/>
+            <a:ext cx="1379952" cy="130705"/>
           </a:xfrm>
           <a:prstGeom prst="rect">
             <a:avLst/>
@@ -33364,8 +33187,8 @@
         </p:nvSpPr>
         <p:spPr>
           <a:xfrm>
-            <a:off x="10305288" y="5205625"/>
-            <a:ext cx="1143000" cy="239896"/>
+            <a:off x="10305288" y="5506840"/>
+            <a:ext cx="1143000" cy="261411"/>
           </a:xfrm>
           <a:prstGeom prst="rect">
             <a:avLst/>
@@ -33403,8 +33226,8 @@
         </p:nvSpPr>
         <p:spPr>
           <a:xfrm>
-            <a:off x="6208776" y="5445521"/>
-            <a:ext cx="310896" cy="239896"/>
+            <a:off x="6208776" y="5768250"/>
+            <a:ext cx="310896" cy="261411"/>
           </a:xfrm>
           <a:prstGeom prst="rect">
             <a:avLst/>
@@ -33442,8 +33265,8 @@
         </p:nvSpPr>
         <p:spPr>
           <a:xfrm>
-            <a:off x="6565392" y="5445521"/>
-            <a:ext cx="1920240" cy="239896"/>
+            <a:off x="6565392" y="5768250"/>
+            <a:ext cx="1920240" cy="261411"/>
           </a:xfrm>
           <a:prstGeom prst="rect">
             <a:avLst/>
@@ -33481,8 +33304,8 @@
         </p:nvSpPr>
         <p:spPr>
           <a:xfrm>
-            <a:off x="8558784" y="5505495"/>
-            <a:ext cx="1691640" cy="119948"/>
+            <a:off x="8558784" y="5833603"/>
+            <a:ext cx="1691640" cy="130705"/>
           </a:xfrm>
           <a:prstGeom prst="rect">
             <a:avLst/>
@@ -33501,8 +33324,8 @@
         </p:nvSpPr>
         <p:spPr>
           <a:xfrm>
-            <a:off x="10305288" y="5445521"/>
-            <a:ext cx="1143000" cy="239896"/>
+            <a:off x="10305288" y="5768250"/>
+            <a:ext cx="1143000" cy="261411"/>
           </a:xfrm>
           <a:prstGeom prst="rect">
             <a:avLst/>
@@ -33541,7 +33364,7 @@
         <p:spPr>
           <a:xfrm>
             <a:off x="3405989" y="1847088"/>
-            <a:ext cx="14630" cy="4078224"/>
+            <a:ext cx="14630" cy="4443984"/>
           </a:xfrm>
           <a:prstGeom prst="rect">
             <a:avLst/>
@@ -33561,7 +33384,7 @@
         <p:spPr>
           <a:xfrm>
             <a:off x="8956397" y="1847088"/>
-            <a:ext cx="14630" cy="4078224"/>
+            <a:ext cx="14630" cy="4443984"/>
           </a:xfrm>
           <a:prstGeom prst="rect">
             <a:avLst/>
@@ -33581,7 +33404,7 @@
         <p:spPr>
           <a:xfrm>
             <a:off x="6085332" y="1847088"/>
-            <a:ext cx="10973" cy="4078224"/>
+            <a:ext cx="10973" cy="4443984"/>
           </a:xfrm>
           <a:prstGeom prst="rect">
             <a:avLst/>
@@ -33591,65 +33414,6 @@
           </a:solidFill>
           <a:ln/>
         </p:spPr>
-      </p:sp>
-      <p:sp>
-        <p:nvSpPr>
-          <p:cNvPr id="146" name="Shape 144"/>
-          <p:cNvSpPr/>
-          <p:nvPr/>
-        </p:nvSpPr>
-        <p:spPr>
-          <a:xfrm>
-            <a:off x="457200" y="6126480"/>
-            <a:ext cx="11274552" cy="615696"/>
-          </a:xfrm>
-          <a:prstGeom prst="rect">
-            <a:avLst/>
-          </a:prstGeom>
-          <a:solidFill>
-            <a:srgbClr val="EDF4FA"/>
-          </a:solidFill>
-          <a:ln/>
-        </p:spPr>
-      </p:sp>
-      <p:sp>
-        <p:nvSpPr>
-          <p:cNvPr id="147" name="Text 145"/>
-          <p:cNvSpPr txBox="1"/>
-          <p:nvPr/>
-        </p:nvSpPr>
-        <p:spPr>
-          <a:xfrm>
-            <a:off x="658368" y="6144768"/>
-            <a:ext cx="10927080" cy="579120"/>
-          </a:xfrm>
-          <a:prstGeom prst="rect">
-            <a:avLst/>
-          </a:prstGeom>
-          <a:noFill/>
-          <a:ln/>
-        </p:spPr>
-        <p:txBody>
-          <a:bodyPr wrap="square" lIns="0" tIns="0" rIns="0" bIns="0" rtlCol="0" anchor="ctr"/>
-          <a:lstStyle/>
-          <a:p>
-            <a:pPr indent="0" marL="0">
-              <a:buNone/>
-            </a:pPr>
-            <a:r>
-              <a:rPr lang="en-US" sz="1600" b="1" dirty="0">
-                <a:solidFill>
-                  <a:srgbClr val="0B2C4A"/>
-                </a:solidFill>
-                <a:latin typeface="Inter" pitchFamily="34" charset="0"/>
-                <a:ea typeface="Inter" pitchFamily="34" charset="-122"/>
-                <a:cs typeface="Inter" pitchFamily="34" charset="-120"/>
-              </a:rPr>
-              <a:t>GMC Prescott can't classify 63.5% of its customer-pay labor from the description; Honda Henderson only 4.2%. Vague op code descriptions hide what the shop sells.</a:t>
-            </a:r>
-            <a:endParaRPr lang="en-US" sz="1600" dirty="0"/>
-          </a:p>
-        </p:txBody>
       </p:sp>
     </p:spTree>
   </p:cSld>

--- a/day2-deck/decks/Labor Mix - House Style.pptx
+++ b/day2-deck/decks/Labor Mix - House Style.pptx
@@ -2465,7 +2465,7 @@
           <a:p>
             <a:r>
               <a:rPr lang="en-US" dirty="0"/>
-              <a:t>Takeaway (off the slide): Customer pay is 52.5% of labor sale (52.8% in 2025), warranty 23.8%, internal 23.7%. Honda Spokane is most customer-pay at 70.3%.Source: Qlik - Closed Repair Orders. Labor sale by pay type, Jan-Sep by close month. Same-store, INEOS excluded. GMC Prescott body shop labor types excluded. Jan-Sep 2026 shares of labor sale; sorted by customer-pay share. Bar labels are percent of labor sale; every value is also listed here.
+              <a:t>Takeaway with the store call-outs (off the slide): Customer pay is 52.5% of labor sale (52.8% in 2025), warranty 23.8%, internal 23.7%. Honda Spokane is most customer-pay at 70.3%.Source: Qlik - Closed Repair Orders. Labor sale by pay type, Jan-Sep by close month. Same-store, INEOS excluded. GMC Prescott body shop labor types excluded. Jan-Sep 2026 shares of labor sale; sorted by customer-pay share. Bar labels are percent of labor sale; every value is also listed here.
 HONDA SPOKANE: CP 70.3%, W 8.0%, I 21.6%
 TOYOTA SPOKANE: CP 65.3%, W 15.5%, I 19.2%
 TOYOTA FLAGSTAFF: CP 65.1%, W 11.2%, I 23.7%
@@ -2674,7 +2674,7 @@
           <a:p>
             <a:r>
               <a:rPr lang="en-US" dirty="0"/>
-              <a:t>Takeaway (off the slide): 19 of 33 stores raised customer-pay share, led by Mazda at +10.8 pts to 56.6%. 14 declined; LR Reno fell most at −8.1 pts.Source: Qlik - Closed Repair Orders. Labor sale by pay type, Jan-Sep by close month. Same-store, INEOS excluded. GMC Prescott body shop labor types excluded. Change in Customer Pay Share of Labor Sale, Jan-Sep 2026 vs 2025, best first.</a:t>
+              <a:t>Takeaway with the store call-outs (off the slide): 19 of 33 stores raised customer-pay share, led by Mazda at +10.8 pts to 56.6%. 14 declined; LR Reno fell most at −8.1 pts.Source: Qlik - Closed Repair Orders. Labor sale by pay type, Jan-Sep by close month. Same-store, INEOS excluded. GMC Prescott body shop labor types excluded. Change in Customer Pay Share of Labor Sale, Jan-Sep 2026 vs 2025, best first.</a:t>
             </a:r>
             <a:endParaRPr lang="en-US" dirty="0"/>
           </a:p>
@@ -2762,7 +2762,7 @@
           <a:p>
             <a:r>
               <a:rPr lang="en-US" dirty="0"/>
-              <a:t>Takeaway (off the slide): Ask Mazda, VW Henderson and Acura what changed. Ask LR Reno, Hyundai Prescott and Toyota Henderson what got in the way. Ask Lexus, Acura and Chevy GMC Bullhead what they started this year.Source: Qlik - Closed Repair Orders. Labor sale by pay type, Jan-Sep by close month. Same-store, INEOS excluded. GMC Prescott body shop labor types excluded. Customer-pay labor sale / total labor sale (customer pay + warranty + internal). Top and bottom five stores by change in Customer Pay Share of Labor Sale, Jan-Sep 2026 vs 2025. Moving now: Jul-Sep 2026 vs Jan-Mar 2026, each store against itself; the group moved −0.3 pts on the same basis, so part of every store's change is seasonal. Green bar at the right of a row: the store is on both the top five vs last year and the top five moving now.Conversation starter: each top store says one thing they started doing; each bottom store says what got in the way and what they would try. The room trades ideas. Moving now: ask the top three what they started this year.</a:t>
+              <a:t>Takeaway with the store call-outs (off the slide): Ask Mazda, VW Henderson and Acura what changed. Ask LR Reno, Hyundai Prescott and Toyota Henderson what got in the way. Ask Lexus, Acura and Chevy GMC Bullhead what they started this year.Source: Qlik - Closed Repair Orders. Labor sale by pay type, Jan-Sep by close month. Same-store, INEOS excluded. GMC Prescott body shop labor types excluded. Customer-pay labor sale / total labor sale (customer pay + warranty + internal). Top and bottom five stores by change in Customer Pay Share of Labor Sale, Jan-Sep 2026 vs 2025. Moving now: Jul-Sep 2026 vs Jan-Mar 2026, each store against itself; the group moved −0.3 pts on the same basis, so part of every store's change is seasonal. Green bar at the right of a row: the store is on both the top five vs last year and the top five moving now.Conversation starter: each top store says one thing they started doing; each bottom store says what got in the way and what they would try. The room trades ideas. Moving now: ask the top three what they started this year.</a:t>
             </a:r>
             <a:endParaRPr lang="en-US" dirty="0"/>
           </a:p>
@@ -2971,7 +2971,7 @@
           <a:p>
             <a:r>
               <a:rPr lang="en-US" dirty="0"/>
-              <a:t>Takeaway (off the slide): GMC Prescott can't classify 63.5% of its customer-pay labor from the description; Honda Henderson only 4.2%. Vague op code descriptions hide what the shop sells.Source: Qlik - Closed Repair Orders. Customer-pay labor sale by op code description, Jan-Sep. Same-store, INEOS excluded. GMC Prescott body shop labor types excluded. Share of CP labor sale whose op code description matches neither the maintenance nor the repair rules, Jan-Sep 2026. Lower is better: green at or below the group, red above. Maintenance = descriptions naming oil and filter, rotation, brake pads, rotors and brake service, scheduled/interval/mileage service, OEM care plans, alignment, balance, fluid exchanges and flushes, fuel induction, transmission/differential/transfer case/coolant service, spark plugs, filters, wipers, multi-point inspection, timing belt, BG and refresh services, smog/emissions inspection, fluid services, tune-ups, tire promotions (buy 3 get 1), CVT, EGR, 4x4, AWD, intermediate and transmission services, and any coolant replacement or change. Repair = repair, replace, R&amp;R, diagnosis, leak, noise, inoperative, check engine, warning light, struts, shocks, alternator, starter, water pump, reseal, gasket, calibration, overhaul, engine light, drive belt, belt and hose kit. Descriptions that are only a placeholder (exactly MISC, DEFAULT, STANDARD, GENERAL, GENERAL REPAIR, CUSTOMER STATES, GENERAL CONCERN, ADD DESCRIPTION, TELL US MORE and similar) are left unclassified; a placeholder followed by real detail is classified by that detail.</a:t>
+              <a:t>Takeaway with the store call-outs (off the slide): GMC Prescott can't classify 63.5% of its customer-pay labor from the description; Honda Henderson only 4.2%. Vague op code descriptions hide what the shop sells.Source: Qlik - Closed Repair Orders. Customer-pay labor sale by op code description, Jan-Sep. Same-store, INEOS excluded. GMC Prescott body shop labor types excluded. Share of CP labor sale whose op code description matches neither the maintenance nor the repair rules, Jan-Sep 2026. Lower is better: green at or below the group, red above. Maintenance = descriptions naming oil and filter, rotation, brake pads, rotors and brake service, scheduled/interval/mileage service, OEM care plans, alignment, balance, fluid exchanges and flushes, fuel induction, transmission/differential/transfer case/coolant service, spark plugs, filters, wipers, multi-point inspection, timing belt, BG and refresh services, smog/emissions inspection, fluid services, tune-ups, tire promotions (buy 3 get 1), CVT, EGR, 4x4, AWD, intermediate and transmission services, and any coolant replacement or change. Repair = repair, replace, R&amp;R, diagnosis, leak, noise, inoperative, check engine, warning light, struts, shocks, alternator, starter, water pump, reseal, gasket, calibration, overhaul, engine light, drive belt, belt and hose kit. Descriptions that are only a placeholder (exactly MISC, DEFAULT, STANDARD, GENERAL, GENERAL REPAIR, CUSTOMER STATES, GENERAL CONCERN, ADD DESCRIPTION, TELL US MORE and similar) are left unclassified; a placeholder followed by real detail is classified by that detail.</a:t>
             </a:r>
             <a:endParaRPr lang="en-US" dirty="0"/>
           </a:p>
@@ -3600,7 +3600,7 @@
         <p:spPr>
           <a:xfrm>
             <a:off x="457200" y="1207008"/>
-            <a:ext cx="11274552" cy="5148072"/>
+            <a:ext cx="11274552" cy="4782312"/>
           </a:xfrm>
           <a:prstGeom prst="rect">
             <a:avLst/>
@@ -4048,7 +4048,7 @@
         <p:spPr>
           <a:xfrm>
             <a:off x="658368" y="1828800"/>
-            <a:ext cx="2103120" cy="262487"/>
+            <a:ext cx="2103120" cy="240971"/>
           </a:xfrm>
           <a:prstGeom prst="rect">
             <a:avLst/>
@@ -4086,8 +4086,8 @@
         </p:nvSpPr>
         <p:spPr>
           <a:xfrm>
-            <a:off x="2807208" y="1860298"/>
-            <a:ext cx="2219218" cy="199490"/>
+            <a:off x="2807208" y="1857717"/>
+            <a:ext cx="2219218" cy="183138"/>
           </a:xfrm>
           <a:prstGeom prst="rect">
             <a:avLst/>
@@ -4111,8 +4111,8 @@
         </p:nvSpPr>
         <p:spPr>
           <a:xfrm>
-            <a:off x="2807208" y="1860298"/>
-            <a:ext cx="2219218" cy="199490"/>
+            <a:off x="2807208" y="1857717"/>
+            <a:ext cx="2219218" cy="183138"/>
           </a:xfrm>
           <a:prstGeom prst="rect">
             <a:avLst/>
@@ -4150,8 +4150,8 @@
         </p:nvSpPr>
         <p:spPr>
           <a:xfrm>
-            <a:off x="5026426" y="1860298"/>
-            <a:ext cx="252542" cy="199490"/>
+            <a:off x="5026426" y="1857717"/>
+            <a:ext cx="252542" cy="183138"/>
           </a:xfrm>
           <a:prstGeom prst="rect">
             <a:avLst/>
@@ -4175,8 +4175,8 @@
         </p:nvSpPr>
         <p:spPr>
           <a:xfrm>
-            <a:off x="5026426" y="1860298"/>
-            <a:ext cx="252542" cy="199490"/>
+            <a:off x="5026426" y="1857717"/>
+            <a:ext cx="252542" cy="183138"/>
           </a:xfrm>
           <a:prstGeom prst="rect">
             <a:avLst/>
@@ -4214,8 +4214,8 @@
         </p:nvSpPr>
         <p:spPr>
           <a:xfrm>
-            <a:off x="5278968" y="1860298"/>
-            <a:ext cx="682920" cy="199490"/>
+            <a:off x="5278968" y="1857717"/>
+            <a:ext cx="682920" cy="183138"/>
           </a:xfrm>
           <a:prstGeom prst="rect">
             <a:avLst/>
@@ -4239,8 +4239,8 @@
         </p:nvSpPr>
         <p:spPr>
           <a:xfrm>
-            <a:off x="5278968" y="1860298"/>
-            <a:ext cx="682920" cy="199490"/>
+            <a:off x="5278968" y="1857717"/>
+            <a:ext cx="682920" cy="183138"/>
           </a:xfrm>
           <a:prstGeom prst="rect">
             <a:avLst/>
@@ -4278,8 +4278,8 @@
         </p:nvSpPr>
         <p:spPr>
           <a:xfrm>
-            <a:off x="658368" y="2091287"/>
-            <a:ext cx="2103120" cy="262487"/>
+            <a:off x="658368" y="2069771"/>
+            <a:ext cx="2103120" cy="240971"/>
           </a:xfrm>
           <a:prstGeom prst="rect">
             <a:avLst/>
@@ -4317,8 +4317,8 @@
         </p:nvSpPr>
         <p:spPr>
           <a:xfrm>
-            <a:off x="2807208" y="2122785"/>
-            <a:ext cx="2060840" cy="199490"/>
+            <a:off x="2807208" y="2098688"/>
+            <a:ext cx="2060840" cy="183138"/>
           </a:xfrm>
           <a:prstGeom prst="rect">
             <a:avLst/>
@@ -4342,8 +4342,8 @@
         </p:nvSpPr>
         <p:spPr>
           <a:xfrm>
-            <a:off x="2807208" y="2122785"/>
-            <a:ext cx="2060840" cy="199490"/>
+            <a:off x="2807208" y="2098688"/>
+            <a:ext cx="2060840" cy="183138"/>
           </a:xfrm>
           <a:prstGeom prst="rect">
             <a:avLst/>
@@ -4381,8 +4381,8 @@
         </p:nvSpPr>
         <p:spPr>
           <a:xfrm>
-            <a:off x="4868048" y="2122785"/>
-            <a:ext cx="489573" cy="199490"/>
+            <a:off x="4868048" y="2098688"/>
+            <a:ext cx="489573" cy="183138"/>
           </a:xfrm>
           <a:prstGeom prst="rect">
             <a:avLst/>
@@ -4406,8 +4406,8 @@
         </p:nvSpPr>
         <p:spPr>
           <a:xfrm>
-            <a:off x="4868048" y="2122785"/>
-            <a:ext cx="489573" cy="199490"/>
+            <a:off x="4868048" y="2098688"/>
+            <a:ext cx="489573" cy="183138"/>
           </a:xfrm>
           <a:prstGeom prst="rect">
             <a:avLst/>
@@ -4445,8 +4445,8 @@
         </p:nvSpPr>
         <p:spPr>
           <a:xfrm>
-            <a:off x="5357621" y="2122785"/>
-            <a:ext cx="604267" cy="199490"/>
+            <a:off x="5357621" y="2098688"/>
+            <a:ext cx="604267" cy="183138"/>
           </a:xfrm>
           <a:prstGeom prst="rect">
             <a:avLst/>
@@ -4470,8 +4470,8 @@
         </p:nvSpPr>
         <p:spPr>
           <a:xfrm>
-            <a:off x="5357621" y="2122785"/>
-            <a:ext cx="604267" cy="199490"/>
+            <a:off x="5357621" y="2098688"/>
+            <a:ext cx="604267" cy="183138"/>
           </a:xfrm>
           <a:prstGeom prst="rect">
             <a:avLst/>
@@ -4509,8 +4509,8 @@
         </p:nvSpPr>
         <p:spPr>
           <a:xfrm>
-            <a:off x="658368" y="2353773"/>
-            <a:ext cx="2103120" cy="262487"/>
+            <a:off x="658368" y="2310743"/>
+            <a:ext cx="2103120" cy="240971"/>
           </a:xfrm>
           <a:prstGeom prst="rect">
             <a:avLst/>
@@ -4548,8 +4548,8 @@
         </p:nvSpPr>
         <p:spPr>
           <a:xfrm>
-            <a:off x="2807208" y="2385272"/>
-            <a:ext cx="2054762" cy="199490"/>
+            <a:off x="2807208" y="2339659"/>
+            <a:ext cx="2054762" cy="183138"/>
           </a:xfrm>
           <a:prstGeom prst="rect">
             <a:avLst/>
@@ -4573,8 +4573,8 @@
         </p:nvSpPr>
         <p:spPr>
           <a:xfrm>
-            <a:off x="2807208" y="2385272"/>
-            <a:ext cx="2054762" cy="199490"/>
+            <a:off x="2807208" y="2339659"/>
+            <a:ext cx="2054762" cy="183138"/>
           </a:xfrm>
           <a:prstGeom prst="rect">
             <a:avLst/>
@@ -4612,8 +4612,8 @@
         </p:nvSpPr>
         <p:spPr>
           <a:xfrm>
-            <a:off x="4861970" y="2385272"/>
-            <a:ext cx="352121" cy="199490"/>
+            <a:off x="4861970" y="2339659"/>
+            <a:ext cx="352121" cy="183138"/>
           </a:xfrm>
           <a:prstGeom prst="rect">
             <a:avLst/>
@@ -4637,8 +4637,8 @@
         </p:nvSpPr>
         <p:spPr>
           <a:xfrm>
-            <a:off x="4861970" y="2385272"/>
-            <a:ext cx="352121" cy="199490"/>
+            <a:off x="4861970" y="2339659"/>
+            <a:ext cx="352121" cy="183138"/>
           </a:xfrm>
           <a:prstGeom prst="rect">
             <a:avLst/>
@@ -4676,8 +4676,8 @@
         </p:nvSpPr>
         <p:spPr>
           <a:xfrm>
-            <a:off x="5214091" y="2385272"/>
-            <a:ext cx="747797" cy="199490"/>
+            <a:off x="5214091" y="2339659"/>
+            <a:ext cx="747797" cy="183138"/>
           </a:xfrm>
           <a:prstGeom prst="rect">
             <a:avLst/>
@@ -4701,8 +4701,8 @@
         </p:nvSpPr>
         <p:spPr>
           <a:xfrm>
-            <a:off x="5214091" y="2385272"/>
-            <a:ext cx="747797" cy="199490"/>
+            <a:off x="5214091" y="2339659"/>
+            <a:ext cx="747797" cy="183138"/>
           </a:xfrm>
           <a:prstGeom prst="rect">
             <a:avLst/>
@@ -4740,8 +4740,8 @@
         </p:nvSpPr>
         <p:spPr>
           <a:xfrm>
-            <a:off x="658368" y="2616260"/>
-            <a:ext cx="2103120" cy="262487"/>
+            <a:off x="658368" y="2551714"/>
+            <a:ext cx="2103120" cy="240971"/>
           </a:xfrm>
           <a:prstGeom prst="rect">
             <a:avLst/>
@@ -4779,8 +4779,8 @@
         </p:nvSpPr>
         <p:spPr>
           <a:xfrm>
-            <a:off x="2807208" y="2647758"/>
-            <a:ext cx="2053161" cy="199490"/>
+            <a:off x="2807208" y="2580630"/>
+            <a:ext cx="2053161" cy="183138"/>
           </a:xfrm>
           <a:prstGeom prst="rect">
             <a:avLst/>
@@ -4804,8 +4804,8 @@
         </p:nvSpPr>
         <p:spPr>
           <a:xfrm>
-            <a:off x="2807208" y="2647758"/>
-            <a:ext cx="2053161" cy="199490"/>
+            <a:off x="2807208" y="2580630"/>
+            <a:ext cx="2053161" cy="183138"/>
           </a:xfrm>
           <a:prstGeom prst="rect">
             <a:avLst/>
@@ -4843,8 +4843,8 @@
         </p:nvSpPr>
         <p:spPr>
           <a:xfrm>
-            <a:off x="4860369" y="2647758"/>
-            <a:ext cx="375876" cy="199490"/>
+            <a:off x="4860369" y="2580630"/>
+            <a:ext cx="375876" cy="183138"/>
           </a:xfrm>
           <a:prstGeom prst="rect">
             <a:avLst/>
@@ -4868,8 +4868,8 @@
         </p:nvSpPr>
         <p:spPr>
           <a:xfrm>
-            <a:off x="4860369" y="2647758"/>
-            <a:ext cx="375876" cy="199490"/>
+            <a:off x="4860369" y="2580630"/>
+            <a:ext cx="375876" cy="183138"/>
           </a:xfrm>
           <a:prstGeom prst="rect">
             <a:avLst/>
@@ -4907,8 +4907,8 @@
         </p:nvSpPr>
         <p:spPr>
           <a:xfrm>
-            <a:off x="5236245" y="2647758"/>
-            <a:ext cx="725643" cy="199490"/>
+            <a:off x="5236245" y="2580630"/>
+            <a:ext cx="725643" cy="183138"/>
           </a:xfrm>
           <a:prstGeom prst="rect">
             <a:avLst/>
@@ -4932,8 +4932,8 @@
         </p:nvSpPr>
         <p:spPr>
           <a:xfrm>
-            <a:off x="5236245" y="2647758"/>
-            <a:ext cx="725643" cy="199490"/>
+            <a:off x="5236245" y="2580630"/>
+            <a:ext cx="725643" cy="183138"/>
           </a:xfrm>
           <a:prstGeom prst="rect">
             <a:avLst/>
@@ -4971,8 +4971,8 @@
         </p:nvSpPr>
         <p:spPr>
           <a:xfrm>
-            <a:off x="658368" y="2878746"/>
-            <a:ext cx="2103120" cy="262487"/>
+            <a:off x="658368" y="2792685"/>
+            <a:ext cx="2103120" cy="240971"/>
           </a:xfrm>
           <a:prstGeom prst="rect">
             <a:avLst/>
@@ -5010,8 +5010,8 @@
         </p:nvSpPr>
         <p:spPr>
           <a:xfrm>
-            <a:off x="2807208" y="2910245"/>
-            <a:ext cx="2046848" cy="199490"/>
+            <a:off x="2807208" y="2821602"/>
+            <a:ext cx="2046848" cy="183138"/>
           </a:xfrm>
           <a:prstGeom prst="rect">
             <a:avLst/>
@@ -5035,8 +5035,8 @@
         </p:nvSpPr>
         <p:spPr>
           <a:xfrm>
-            <a:off x="2807208" y="2910245"/>
-            <a:ext cx="2046848" cy="199490"/>
+            <a:off x="2807208" y="2821602"/>
+            <a:ext cx="2046848" cy="183138"/>
           </a:xfrm>
           <a:prstGeom prst="rect">
             <a:avLst/>
@@ -5074,8 +5074,8 @@
         </p:nvSpPr>
         <p:spPr>
           <a:xfrm>
-            <a:off x="4854056" y="2910245"/>
-            <a:ext cx="793865" cy="199490"/>
+            <a:off x="4854056" y="2821602"/>
+            <a:ext cx="793865" cy="183138"/>
           </a:xfrm>
           <a:prstGeom prst="rect">
             <a:avLst/>
@@ -5099,8 +5099,8 @@
         </p:nvSpPr>
         <p:spPr>
           <a:xfrm>
-            <a:off x="4854056" y="2910245"/>
-            <a:ext cx="793865" cy="199490"/>
+            <a:off x="4854056" y="2821602"/>
+            <a:ext cx="793865" cy="183138"/>
           </a:xfrm>
           <a:prstGeom prst="rect">
             <a:avLst/>
@@ -5138,8 +5138,8 @@
         </p:nvSpPr>
         <p:spPr>
           <a:xfrm>
-            <a:off x="5647921" y="2910245"/>
-            <a:ext cx="313967" cy="199490"/>
+            <a:off x="5647921" y="2821602"/>
+            <a:ext cx="313967" cy="183138"/>
           </a:xfrm>
           <a:prstGeom prst="rect">
             <a:avLst/>
@@ -5163,8 +5163,8 @@
         </p:nvSpPr>
         <p:spPr>
           <a:xfrm>
-            <a:off x="5647921" y="2910245"/>
-            <a:ext cx="313967" cy="199490"/>
+            <a:off x="5647921" y="2821602"/>
+            <a:ext cx="313967" cy="183138"/>
           </a:xfrm>
           <a:prstGeom prst="rect">
             <a:avLst/>
@@ -5202,8 +5202,8 @@
         </p:nvSpPr>
         <p:spPr>
           <a:xfrm>
-            <a:off x="658368" y="3141233"/>
-            <a:ext cx="2103120" cy="262487"/>
+            <a:off x="658368" y="3033656"/>
+            <a:ext cx="2103120" cy="240971"/>
           </a:xfrm>
           <a:prstGeom prst="rect">
             <a:avLst/>
@@ -5241,8 +5241,8 @@
         </p:nvSpPr>
         <p:spPr>
           <a:xfrm>
-            <a:off x="2807208" y="3172731"/>
-            <a:ext cx="1985155" cy="199490"/>
+            <a:off x="2807208" y="3062573"/>
+            <a:ext cx="1985155" cy="183138"/>
           </a:xfrm>
           <a:prstGeom prst="rect">
             <a:avLst/>
@@ -5266,8 +5266,8 @@
         </p:nvSpPr>
         <p:spPr>
           <a:xfrm>
-            <a:off x="2807208" y="3172731"/>
-            <a:ext cx="1985155" cy="199490"/>
+            <a:off x="2807208" y="3062573"/>
+            <a:ext cx="1985155" cy="183138"/>
           </a:xfrm>
           <a:prstGeom prst="rect">
             <a:avLst/>
@@ -5305,8 +5305,8 @@
         </p:nvSpPr>
         <p:spPr>
           <a:xfrm>
-            <a:off x="4792363" y="3172731"/>
-            <a:ext cx="729180" cy="199490"/>
+            <a:off x="4792363" y="3062573"/>
+            <a:ext cx="729180" cy="183138"/>
           </a:xfrm>
           <a:prstGeom prst="rect">
             <a:avLst/>
@@ -5330,8 +5330,8 @@
         </p:nvSpPr>
         <p:spPr>
           <a:xfrm>
-            <a:off x="4792363" y="3172731"/>
-            <a:ext cx="729180" cy="199490"/>
+            <a:off x="4792363" y="3062573"/>
+            <a:ext cx="729180" cy="183138"/>
           </a:xfrm>
           <a:prstGeom prst="rect">
             <a:avLst/>
@@ -5369,8 +5369,8 @@
         </p:nvSpPr>
         <p:spPr>
           <a:xfrm>
-            <a:off x="5521542" y="3172731"/>
-            <a:ext cx="440346" cy="199490"/>
+            <a:off x="5521542" y="3062573"/>
+            <a:ext cx="440346" cy="183138"/>
           </a:xfrm>
           <a:prstGeom prst="rect">
             <a:avLst/>
@@ -5394,8 +5394,8 @@
         </p:nvSpPr>
         <p:spPr>
           <a:xfrm>
-            <a:off x="5521542" y="3172731"/>
-            <a:ext cx="440346" cy="199490"/>
+            <a:off x="5521542" y="3062573"/>
+            <a:ext cx="440346" cy="183138"/>
           </a:xfrm>
           <a:prstGeom prst="rect">
             <a:avLst/>
@@ -5433,8 +5433,8 @@
         </p:nvSpPr>
         <p:spPr>
           <a:xfrm>
-            <a:off x="658368" y="3403720"/>
-            <a:ext cx="2103120" cy="262487"/>
+            <a:off x="658368" y="3274628"/>
+            <a:ext cx="2103120" cy="240971"/>
           </a:xfrm>
           <a:prstGeom prst="rect">
             <a:avLst/>
@@ -5472,8 +5472,8 @@
         </p:nvSpPr>
         <p:spPr>
           <a:xfrm>
-            <a:off x="2807208" y="3435218"/>
-            <a:ext cx="1940199" cy="199490"/>
+            <a:off x="2807208" y="3303544"/>
+            <a:ext cx="1940199" cy="183138"/>
           </a:xfrm>
           <a:prstGeom prst="rect">
             <a:avLst/>
@@ -5497,8 +5497,8 @@
         </p:nvSpPr>
         <p:spPr>
           <a:xfrm>
-            <a:off x="2807208" y="3435218"/>
-            <a:ext cx="1940199" cy="199490"/>
+            <a:off x="2807208" y="3303544"/>
+            <a:ext cx="1940199" cy="183138"/>
           </a:xfrm>
           <a:prstGeom prst="rect">
             <a:avLst/>
@@ -5536,8 +5536,8 @@
         </p:nvSpPr>
         <p:spPr>
           <a:xfrm>
-            <a:off x="4747407" y="3435218"/>
-            <a:ext cx="542990" cy="199490"/>
+            <a:off x="4747407" y="3303544"/>
+            <a:ext cx="542990" cy="183138"/>
           </a:xfrm>
           <a:prstGeom prst="rect">
             <a:avLst/>
@@ -5561,8 +5561,8 @@
         </p:nvSpPr>
         <p:spPr>
           <a:xfrm>
-            <a:off x="4747407" y="3435218"/>
-            <a:ext cx="542990" cy="199490"/>
+            <a:off x="4747407" y="3303544"/>
+            <a:ext cx="542990" cy="183138"/>
           </a:xfrm>
           <a:prstGeom prst="rect">
             <a:avLst/>
@@ -5600,8 +5600,8 @@
         </p:nvSpPr>
         <p:spPr>
           <a:xfrm>
-            <a:off x="5290397" y="3435218"/>
-            <a:ext cx="671491" cy="199490"/>
+            <a:off x="5290397" y="3303544"/>
+            <a:ext cx="671491" cy="183138"/>
           </a:xfrm>
           <a:prstGeom prst="rect">
             <a:avLst/>
@@ -5625,8 +5625,8 @@
         </p:nvSpPr>
         <p:spPr>
           <a:xfrm>
-            <a:off x="5290397" y="3435218"/>
-            <a:ext cx="671491" cy="199490"/>
+            <a:off x="5290397" y="3303544"/>
+            <a:ext cx="671491" cy="183138"/>
           </a:xfrm>
           <a:prstGeom prst="rect">
             <a:avLst/>
@@ -5664,8 +5664,8 @@
         </p:nvSpPr>
         <p:spPr>
           <a:xfrm>
-            <a:off x="658368" y="3666206"/>
-            <a:ext cx="2103120" cy="262487"/>
+            <a:off x="658368" y="3515599"/>
+            <a:ext cx="2103120" cy="240971"/>
           </a:xfrm>
           <a:prstGeom prst="rect">
             <a:avLst/>
@@ -5703,8 +5703,8 @@
         </p:nvSpPr>
         <p:spPr>
           <a:xfrm>
-            <a:off x="2807208" y="3697705"/>
-            <a:ext cx="1907392" cy="199490"/>
+            <a:off x="2807208" y="3544516"/>
+            <a:ext cx="1907392" cy="183138"/>
           </a:xfrm>
           <a:prstGeom prst="rect">
             <a:avLst/>
@@ -5728,8 +5728,8 @@
         </p:nvSpPr>
         <p:spPr>
           <a:xfrm>
-            <a:off x="2807208" y="3697705"/>
-            <a:ext cx="1907392" cy="199490"/>
+            <a:off x="2807208" y="3544516"/>
+            <a:ext cx="1907392" cy="183138"/>
           </a:xfrm>
           <a:prstGeom prst="rect">
             <a:avLst/>
@@ -5767,8 +5767,8 @@
         </p:nvSpPr>
         <p:spPr>
           <a:xfrm>
-            <a:off x="4714600" y="3697705"/>
-            <a:ext cx="434501" cy="199490"/>
+            <a:off x="4714600" y="3544516"/>
+            <a:ext cx="434501" cy="183138"/>
           </a:xfrm>
           <a:prstGeom prst="rect">
             <a:avLst/>
@@ -5792,8 +5792,8 @@
         </p:nvSpPr>
         <p:spPr>
           <a:xfrm>
-            <a:off x="4714600" y="3697705"/>
-            <a:ext cx="434501" cy="199490"/>
+            <a:off x="4714600" y="3544516"/>
+            <a:ext cx="434501" cy="183138"/>
           </a:xfrm>
           <a:prstGeom prst="rect">
             <a:avLst/>
@@ -5831,8 +5831,8 @@
         </p:nvSpPr>
         <p:spPr>
           <a:xfrm>
-            <a:off x="5149102" y="3697705"/>
-            <a:ext cx="812786" cy="199490"/>
+            <a:off x="5149102" y="3544516"/>
+            <a:ext cx="812786" cy="183138"/>
           </a:xfrm>
           <a:prstGeom prst="rect">
             <a:avLst/>
@@ -5856,8 +5856,8 @@
         </p:nvSpPr>
         <p:spPr>
           <a:xfrm>
-            <a:off x="5149102" y="3697705"/>
-            <a:ext cx="812786" cy="199490"/>
+            <a:off x="5149102" y="3544516"/>
+            <a:ext cx="812786" cy="183138"/>
           </a:xfrm>
           <a:prstGeom prst="rect">
             <a:avLst/>
@@ -5895,8 +5895,8 @@
         </p:nvSpPr>
         <p:spPr>
           <a:xfrm>
-            <a:off x="658368" y="3928693"/>
-            <a:ext cx="2103120" cy="262487"/>
+            <a:off x="658368" y="3756570"/>
+            <a:ext cx="2103120" cy="240971"/>
           </a:xfrm>
           <a:prstGeom prst="rect">
             <a:avLst/>
@@ -5934,8 +5934,8 @@
         </p:nvSpPr>
         <p:spPr>
           <a:xfrm>
-            <a:off x="2807208" y="3960191"/>
-            <a:ext cx="1883011" cy="199490"/>
+            <a:off x="2807208" y="3785487"/>
+            <a:ext cx="1883011" cy="183138"/>
           </a:xfrm>
           <a:prstGeom prst="rect">
             <a:avLst/>
@@ -5959,8 +5959,8 @@
         </p:nvSpPr>
         <p:spPr>
           <a:xfrm>
-            <a:off x="2807208" y="3960191"/>
-            <a:ext cx="1883011" cy="199490"/>
+            <a:off x="2807208" y="3785487"/>
+            <a:ext cx="1883011" cy="183138"/>
           </a:xfrm>
           <a:prstGeom prst="rect">
             <a:avLst/>
@@ -5998,8 +5998,8 @@
         </p:nvSpPr>
         <p:spPr>
           <a:xfrm>
-            <a:off x="4690219" y="3960191"/>
-            <a:ext cx="918142" cy="199490"/>
+            <a:off x="4690219" y="3785487"/>
+            <a:ext cx="918142" cy="183138"/>
           </a:xfrm>
           <a:prstGeom prst="rect">
             <a:avLst/>
@@ -6023,8 +6023,8 @@
         </p:nvSpPr>
         <p:spPr>
           <a:xfrm>
-            <a:off x="4690219" y="3960191"/>
-            <a:ext cx="918142" cy="199490"/>
+            <a:off x="4690219" y="3785487"/>
+            <a:ext cx="918142" cy="183138"/>
           </a:xfrm>
           <a:prstGeom prst="rect">
             <a:avLst/>
@@ -6062,8 +6062,8 @@
         </p:nvSpPr>
         <p:spPr>
           <a:xfrm>
-            <a:off x="5608361" y="3960191"/>
-            <a:ext cx="353527" cy="199490"/>
+            <a:off x="5608361" y="3785487"/>
+            <a:ext cx="353527" cy="183138"/>
           </a:xfrm>
           <a:prstGeom prst="rect">
             <a:avLst/>
@@ -6087,8 +6087,8 @@
         </p:nvSpPr>
         <p:spPr>
           <a:xfrm>
-            <a:off x="5608361" y="3960191"/>
-            <a:ext cx="353527" cy="199490"/>
+            <a:off x="5608361" y="3785487"/>
+            <a:ext cx="353527" cy="183138"/>
           </a:xfrm>
           <a:prstGeom prst="rect">
             <a:avLst/>
@@ -6126,8 +6126,8 @@
         </p:nvSpPr>
         <p:spPr>
           <a:xfrm>
-            <a:off x="658368" y="4191179"/>
-            <a:ext cx="2103120" cy="262487"/>
+            <a:off x="658368" y="3997542"/>
+            <a:ext cx="2103120" cy="240971"/>
           </a:xfrm>
           <a:prstGeom prst="rect">
             <a:avLst/>
@@ -6165,8 +6165,8 @@
         </p:nvSpPr>
         <p:spPr>
           <a:xfrm>
-            <a:off x="2807208" y="4222678"/>
-            <a:ext cx="1876032" cy="199490"/>
+            <a:off x="2807208" y="4026458"/>
+            <a:ext cx="1876032" cy="183138"/>
           </a:xfrm>
           <a:prstGeom prst="rect">
             <a:avLst/>
@@ -6190,8 +6190,8 @@
         </p:nvSpPr>
         <p:spPr>
           <a:xfrm>
-            <a:off x="2807208" y="4222678"/>
-            <a:ext cx="1876032" cy="199490"/>
+            <a:off x="2807208" y="4026458"/>
+            <a:ext cx="1876032" cy="183138"/>
           </a:xfrm>
           <a:prstGeom prst="rect">
             <a:avLst/>
@@ -6229,8 +6229,8 @@
         </p:nvSpPr>
         <p:spPr>
           <a:xfrm>
-            <a:off x="4683240" y="4222678"/>
-            <a:ext cx="744656" cy="199490"/>
+            <a:off x="4683240" y="4026458"/>
+            <a:ext cx="744656" cy="183138"/>
           </a:xfrm>
           <a:prstGeom prst="rect">
             <a:avLst/>
@@ -6254,8 +6254,8 @@
         </p:nvSpPr>
         <p:spPr>
           <a:xfrm>
-            <a:off x="4683240" y="4222678"/>
-            <a:ext cx="744656" cy="199490"/>
+            <a:off x="4683240" y="4026458"/>
+            <a:ext cx="744656" cy="183138"/>
           </a:xfrm>
           <a:prstGeom prst="rect">
             <a:avLst/>
@@ -6293,8 +6293,8 @@
         </p:nvSpPr>
         <p:spPr>
           <a:xfrm>
-            <a:off x="5427896" y="4222678"/>
-            <a:ext cx="533992" cy="199490"/>
+            <a:off x="5427896" y="4026458"/>
+            <a:ext cx="533992" cy="183138"/>
           </a:xfrm>
           <a:prstGeom prst="rect">
             <a:avLst/>
@@ -6318,8 +6318,8 @@
         </p:nvSpPr>
         <p:spPr>
           <a:xfrm>
-            <a:off x="5427896" y="4222678"/>
-            <a:ext cx="533992" cy="199490"/>
+            <a:off x="5427896" y="4026458"/>
+            <a:ext cx="533992" cy="183138"/>
           </a:xfrm>
           <a:prstGeom prst="rect">
             <a:avLst/>
@@ -6357,8 +6357,8 @@
         </p:nvSpPr>
         <p:spPr>
           <a:xfrm>
-            <a:off x="658368" y="4453666"/>
-            <a:ext cx="2103120" cy="262487"/>
+            <a:off x="658368" y="4238513"/>
+            <a:ext cx="2103120" cy="240971"/>
           </a:xfrm>
           <a:prstGeom prst="rect">
             <a:avLst/>
@@ -6396,8 +6396,8 @@
         </p:nvSpPr>
         <p:spPr>
           <a:xfrm>
-            <a:off x="2807208" y="4485164"/>
-            <a:ext cx="1874405" cy="199490"/>
+            <a:off x="2807208" y="4267429"/>
+            <a:ext cx="1874405" cy="183138"/>
           </a:xfrm>
           <a:prstGeom prst="rect">
             <a:avLst/>
@@ -6421,8 +6421,8 @@
         </p:nvSpPr>
         <p:spPr>
           <a:xfrm>
-            <a:off x="2807208" y="4485164"/>
-            <a:ext cx="1874405" cy="199490"/>
+            <a:off x="2807208" y="4267429"/>
+            <a:ext cx="1874405" cy="183138"/>
           </a:xfrm>
           <a:prstGeom prst="rect">
             <a:avLst/>
@@ -6460,8 +6460,8 @@
         </p:nvSpPr>
         <p:spPr>
           <a:xfrm>
-            <a:off x="4681613" y="4485164"/>
-            <a:ext cx="558160" cy="199490"/>
+            <a:off x="4681613" y="4267429"/>
+            <a:ext cx="558160" cy="183138"/>
           </a:xfrm>
           <a:prstGeom prst="rect">
             <a:avLst/>
@@ -6485,8 +6485,8 @@
         </p:nvSpPr>
         <p:spPr>
           <a:xfrm>
-            <a:off x="4681613" y="4485164"/>
-            <a:ext cx="558160" cy="199490"/>
+            <a:off x="4681613" y="4267429"/>
+            <a:ext cx="558160" cy="183138"/>
           </a:xfrm>
           <a:prstGeom prst="rect">
             <a:avLst/>
@@ -6524,8 +6524,8 @@
         </p:nvSpPr>
         <p:spPr>
           <a:xfrm>
-            <a:off x="5239773" y="4485164"/>
-            <a:ext cx="722115" cy="199490"/>
+            <a:off x="5239773" y="4267429"/>
+            <a:ext cx="722115" cy="183138"/>
           </a:xfrm>
           <a:prstGeom prst="rect">
             <a:avLst/>
@@ -6549,8 +6549,8 @@
         </p:nvSpPr>
         <p:spPr>
           <a:xfrm>
-            <a:off x="5239773" y="4485164"/>
-            <a:ext cx="722115" cy="199490"/>
+            <a:off x="5239773" y="4267429"/>
+            <a:ext cx="722115" cy="183138"/>
           </a:xfrm>
           <a:prstGeom prst="rect">
             <a:avLst/>
@@ -6588,8 +6588,8 @@
         </p:nvSpPr>
         <p:spPr>
           <a:xfrm>
-            <a:off x="658368" y="4716152"/>
-            <a:ext cx="2103120" cy="262487"/>
+            <a:off x="658368" y="4479484"/>
+            <a:ext cx="2103120" cy="240971"/>
           </a:xfrm>
           <a:prstGeom prst="rect">
             <a:avLst/>
@@ -6627,8 +6627,8 @@
         </p:nvSpPr>
         <p:spPr>
           <a:xfrm>
-            <a:off x="2807208" y="4747651"/>
-            <a:ext cx="1862814" cy="199490"/>
+            <a:off x="2807208" y="4508401"/>
+            <a:ext cx="1862814" cy="183138"/>
           </a:xfrm>
           <a:prstGeom prst="rect">
             <a:avLst/>
@@ -6652,8 +6652,8 @@
         </p:nvSpPr>
         <p:spPr>
           <a:xfrm>
-            <a:off x="2807208" y="4747651"/>
-            <a:ext cx="1862814" cy="199490"/>
+            <a:off x="2807208" y="4508401"/>
+            <a:ext cx="1862814" cy="183138"/>
           </a:xfrm>
           <a:prstGeom prst="rect">
             <a:avLst/>
@@ -6691,8 +6691,8 @@
         </p:nvSpPr>
         <p:spPr>
           <a:xfrm>
-            <a:off x="4670022" y="4747651"/>
-            <a:ext cx="740644" cy="199490"/>
+            <a:off x="4670022" y="4508401"/>
+            <a:ext cx="740644" cy="183138"/>
           </a:xfrm>
           <a:prstGeom prst="rect">
             <a:avLst/>
@@ -6716,8 +6716,8 @@
         </p:nvSpPr>
         <p:spPr>
           <a:xfrm>
-            <a:off x="4670022" y="4747651"/>
-            <a:ext cx="740644" cy="199490"/>
+            <a:off x="4670022" y="4508401"/>
+            <a:ext cx="740644" cy="183138"/>
           </a:xfrm>
           <a:prstGeom prst="rect">
             <a:avLst/>
@@ -6755,8 +6755,8 @@
         </p:nvSpPr>
         <p:spPr>
           <a:xfrm>
-            <a:off x="5410666" y="4747651"/>
-            <a:ext cx="551222" cy="199490"/>
+            <a:off x="5410666" y="4508401"/>
+            <a:ext cx="551222" cy="183138"/>
           </a:xfrm>
           <a:prstGeom prst="rect">
             <a:avLst/>
@@ -6780,8 +6780,8 @@
         </p:nvSpPr>
         <p:spPr>
           <a:xfrm>
-            <a:off x="5410666" y="4747651"/>
-            <a:ext cx="551222" cy="199490"/>
+            <a:off x="5410666" y="4508401"/>
+            <a:ext cx="551222" cy="183138"/>
           </a:xfrm>
           <a:prstGeom prst="rect">
             <a:avLst/>
@@ -6819,8 +6819,8 @@
         </p:nvSpPr>
         <p:spPr>
           <a:xfrm>
-            <a:off x="658368" y="4978639"/>
-            <a:ext cx="2103120" cy="262487"/>
+            <a:off x="658368" y="4720456"/>
+            <a:ext cx="2103120" cy="240971"/>
           </a:xfrm>
           <a:prstGeom prst="rect">
             <a:avLst/>
@@ -6858,8 +6858,8 @@
         </p:nvSpPr>
         <p:spPr>
           <a:xfrm>
-            <a:off x="2807208" y="5010137"/>
-            <a:ext cx="1831119" cy="199490"/>
+            <a:off x="2807208" y="4749372"/>
+            <a:ext cx="1831119" cy="183138"/>
           </a:xfrm>
           <a:prstGeom prst="rect">
             <a:avLst/>
@@ -6883,8 +6883,8 @@
         </p:nvSpPr>
         <p:spPr>
           <a:xfrm>
-            <a:off x="2807208" y="5010137"/>
-            <a:ext cx="1831119" cy="199490"/>
+            <a:off x="2807208" y="4749372"/>
+            <a:ext cx="1831119" cy="183138"/>
           </a:xfrm>
           <a:prstGeom prst="rect">
             <a:avLst/>
@@ -6922,8 +6922,8 @@
         </p:nvSpPr>
         <p:spPr>
           <a:xfrm>
-            <a:off x="4638327" y="5010137"/>
-            <a:ext cx="764127" cy="199490"/>
+            <a:off x="4638327" y="4749372"/>
+            <a:ext cx="764127" cy="183138"/>
           </a:xfrm>
           <a:prstGeom prst="rect">
             <a:avLst/>
@@ -6947,8 +6947,8 @@
         </p:nvSpPr>
         <p:spPr>
           <a:xfrm>
-            <a:off x="4638327" y="5010137"/>
-            <a:ext cx="764127" cy="199490"/>
+            <a:off x="4638327" y="4749372"/>
+            <a:ext cx="764127" cy="183138"/>
           </a:xfrm>
           <a:prstGeom prst="rect">
             <a:avLst/>
@@ -6986,8 +6986,8 @@
         </p:nvSpPr>
         <p:spPr>
           <a:xfrm>
-            <a:off x="5402455" y="5010137"/>
-            <a:ext cx="559433" cy="199490"/>
+            <a:off x="5402455" y="4749372"/>
+            <a:ext cx="559433" cy="183138"/>
           </a:xfrm>
           <a:prstGeom prst="rect">
             <a:avLst/>
@@ -7011,8 +7011,8 @@
         </p:nvSpPr>
         <p:spPr>
           <a:xfrm>
-            <a:off x="5402455" y="5010137"/>
-            <a:ext cx="559433" cy="199490"/>
+            <a:off x="5402455" y="4749372"/>
+            <a:ext cx="559433" cy="183138"/>
           </a:xfrm>
           <a:prstGeom prst="rect">
             <a:avLst/>
@@ -7050,8 +7050,8 @@
         </p:nvSpPr>
         <p:spPr>
           <a:xfrm>
-            <a:off x="658368" y="5241126"/>
-            <a:ext cx="2103120" cy="262487"/>
+            <a:off x="658368" y="4961427"/>
+            <a:ext cx="2103120" cy="240971"/>
           </a:xfrm>
           <a:prstGeom prst="rect">
             <a:avLst/>
@@ -7089,8 +7089,8 @@
         </p:nvSpPr>
         <p:spPr>
           <a:xfrm>
-            <a:off x="2807208" y="5272624"/>
-            <a:ext cx="1825486" cy="199490"/>
+            <a:off x="2807208" y="4990343"/>
+            <a:ext cx="1825486" cy="183138"/>
           </a:xfrm>
           <a:prstGeom prst="rect">
             <a:avLst/>
@@ -7114,8 +7114,8 @@
         </p:nvSpPr>
         <p:spPr>
           <a:xfrm>
-            <a:off x="2807208" y="5272624"/>
-            <a:ext cx="1825486" cy="199490"/>
+            <a:off x="2807208" y="4990343"/>
+            <a:ext cx="1825486" cy="183138"/>
           </a:xfrm>
           <a:prstGeom prst="rect">
             <a:avLst/>
@@ -7153,8 +7153,8 @@
         </p:nvSpPr>
         <p:spPr>
           <a:xfrm>
-            <a:off x="4632694" y="5272624"/>
-            <a:ext cx="426634" cy="199490"/>
+            <a:off x="4632694" y="4990343"/>
+            <a:ext cx="426634" cy="183138"/>
           </a:xfrm>
           <a:prstGeom prst="rect">
             <a:avLst/>
@@ -7178,8 +7178,8 @@
         </p:nvSpPr>
         <p:spPr>
           <a:xfrm>
-            <a:off x="4632694" y="5272624"/>
-            <a:ext cx="426634" cy="199490"/>
+            <a:off x="4632694" y="4990343"/>
+            <a:ext cx="426634" cy="183138"/>
           </a:xfrm>
           <a:prstGeom prst="rect">
             <a:avLst/>
@@ -7217,8 +7217,8 @@
         </p:nvSpPr>
         <p:spPr>
           <a:xfrm>
-            <a:off x="5059328" y="5272624"/>
-            <a:ext cx="902560" cy="199490"/>
+            <a:off x="5059328" y="4990343"/>
+            <a:ext cx="902560" cy="183138"/>
           </a:xfrm>
           <a:prstGeom prst="rect">
             <a:avLst/>
@@ -7242,8 +7242,8 @@
         </p:nvSpPr>
         <p:spPr>
           <a:xfrm>
-            <a:off x="5059328" y="5272624"/>
-            <a:ext cx="902560" cy="199490"/>
+            <a:off x="5059328" y="4990343"/>
+            <a:ext cx="902560" cy="183138"/>
           </a:xfrm>
           <a:prstGeom prst="rect">
             <a:avLst/>
@@ -7281,8 +7281,8 @@
         </p:nvSpPr>
         <p:spPr>
           <a:xfrm>
-            <a:off x="658368" y="5503612"/>
-            <a:ext cx="2103120" cy="262487"/>
+            <a:off x="658368" y="5202398"/>
+            <a:ext cx="2103120" cy="240971"/>
           </a:xfrm>
           <a:prstGeom prst="rect">
             <a:avLst/>
@@ -7320,8 +7320,8 @@
         </p:nvSpPr>
         <p:spPr>
           <a:xfrm>
-            <a:off x="2807208" y="5535111"/>
-            <a:ext cx="1807555" cy="199490"/>
+            <a:off x="2807208" y="5231315"/>
+            <a:ext cx="1807555" cy="183138"/>
           </a:xfrm>
           <a:prstGeom prst="rect">
             <a:avLst/>
@@ -7345,8 +7345,8 @@
         </p:nvSpPr>
         <p:spPr>
           <a:xfrm>
-            <a:off x="2807208" y="5535111"/>
-            <a:ext cx="1807555" cy="199490"/>
+            <a:off x="2807208" y="5231315"/>
+            <a:ext cx="1807555" cy="183138"/>
           </a:xfrm>
           <a:prstGeom prst="rect">
             <a:avLst/>
@@ -7384,8 +7384,8 @@
         </p:nvSpPr>
         <p:spPr>
           <a:xfrm>
-            <a:off x="4614763" y="5535111"/>
-            <a:ext cx="466810" cy="199490"/>
+            <a:off x="4614763" y="5231315"/>
+            <a:ext cx="466810" cy="183138"/>
           </a:xfrm>
           <a:prstGeom prst="rect">
             <a:avLst/>
@@ -7409,8 +7409,8 @@
         </p:nvSpPr>
         <p:spPr>
           <a:xfrm>
-            <a:off x="4614763" y="5535111"/>
-            <a:ext cx="466810" cy="199490"/>
+            <a:off x="4614763" y="5231315"/>
+            <a:ext cx="466810" cy="183138"/>
           </a:xfrm>
           <a:prstGeom prst="rect">
             <a:avLst/>
@@ -7448,8 +7448,8 @@
         </p:nvSpPr>
         <p:spPr>
           <a:xfrm>
-            <a:off x="5081573" y="5535111"/>
-            <a:ext cx="880315" cy="199490"/>
+            <a:off x="5081573" y="5231315"/>
+            <a:ext cx="880315" cy="183138"/>
           </a:xfrm>
           <a:prstGeom prst="rect">
             <a:avLst/>
@@ -7473,8 +7473,8 @@
         </p:nvSpPr>
         <p:spPr>
           <a:xfrm>
-            <a:off x="5081573" y="5535111"/>
-            <a:ext cx="880315" cy="199490"/>
+            <a:off x="5081573" y="5231315"/>
+            <a:ext cx="880315" cy="183138"/>
           </a:xfrm>
           <a:prstGeom prst="rect">
             <a:avLst/>
@@ -7512,8 +7512,8 @@
         </p:nvSpPr>
         <p:spPr>
           <a:xfrm>
-            <a:off x="658368" y="5766099"/>
-            <a:ext cx="2103120" cy="262487"/>
+            <a:off x="658368" y="5443369"/>
+            <a:ext cx="2103120" cy="240971"/>
           </a:xfrm>
           <a:prstGeom prst="rect">
             <a:avLst/>
@@ -7551,8 +7551,8 @@
         </p:nvSpPr>
         <p:spPr>
           <a:xfrm>
-            <a:off x="2807208" y="5797597"/>
-            <a:ext cx="1784948" cy="199490"/>
+            <a:off x="2807208" y="5472286"/>
+            <a:ext cx="1784948" cy="183138"/>
           </a:xfrm>
           <a:prstGeom prst="rect">
             <a:avLst/>
@@ -7576,8 +7576,8 @@
         </p:nvSpPr>
         <p:spPr>
           <a:xfrm>
-            <a:off x="2807208" y="5797597"/>
-            <a:ext cx="1784948" cy="199490"/>
+            <a:off x="2807208" y="5472286"/>
+            <a:ext cx="1784948" cy="183138"/>
           </a:xfrm>
           <a:prstGeom prst="rect">
             <a:avLst/>
@@ -7615,8 +7615,8 @@
         </p:nvSpPr>
         <p:spPr>
           <a:xfrm>
-            <a:off x="4592156" y="5797597"/>
-            <a:ext cx="390376" cy="199490"/>
+            <a:off x="4592156" y="5472286"/>
+            <a:ext cx="390376" cy="183138"/>
           </a:xfrm>
           <a:prstGeom prst="rect">
             <a:avLst/>
@@ -7640,8 +7640,8 @@
         </p:nvSpPr>
         <p:spPr>
           <a:xfrm>
-            <a:off x="4592156" y="5797597"/>
-            <a:ext cx="390376" cy="199490"/>
+            <a:off x="4592156" y="5472286"/>
+            <a:ext cx="390376" cy="183138"/>
           </a:xfrm>
           <a:prstGeom prst="rect">
             <a:avLst/>
@@ -7679,8 +7679,8 @@
         </p:nvSpPr>
         <p:spPr>
           <a:xfrm>
-            <a:off x="4982532" y="5797597"/>
-            <a:ext cx="979356" cy="199490"/>
+            <a:off x="4982532" y="5472286"/>
+            <a:ext cx="979356" cy="183138"/>
           </a:xfrm>
           <a:prstGeom prst="rect">
             <a:avLst/>
@@ -7704,8 +7704,8 @@
         </p:nvSpPr>
         <p:spPr>
           <a:xfrm>
-            <a:off x="4982532" y="5797597"/>
-            <a:ext cx="979356" cy="199490"/>
+            <a:off x="4982532" y="5472286"/>
+            <a:ext cx="979356" cy="183138"/>
           </a:xfrm>
           <a:prstGeom prst="rect">
             <a:avLst/>
@@ -7743,8 +7743,8 @@
         </p:nvSpPr>
         <p:spPr>
           <a:xfrm>
-            <a:off x="658368" y="6028585"/>
-            <a:ext cx="2103120" cy="262487"/>
+            <a:off x="658368" y="5684341"/>
+            <a:ext cx="2103120" cy="240971"/>
           </a:xfrm>
           <a:prstGeom prst="rect">
             <a:avLst/>
@@ -7782,8 +7782,8 @@
         </p:nvSpPr>
         <p:spPr>
           <a:xfrm>
-            <a:off x="2807208" y="6060084"/>
-            <a:ext cx="1784687" cy="199490"/>
+            <a:off x="2807208" y="5713257"/>
+            <a:ext cx="1784687" cy="183138"/>
           </a:xfrm>
           <a:prstGeom prst="rect">
             <a:avLst/>
@@ -7807,8 +7807,8 @@
         </p:nvSpPr>
         <p:spPr>
           <a:xfrm>
-            <a:off x="2807208" y="6060084"/>
-            <a:ext cx="1784687" cy="199490"/>
+            <a:off x="2807208" y="5713257"/>
+            <a:ext cx="1784687" cy="183138"/>
           </a:xfrm>
           <a:prstGeom prst="rect">
             <a:avLst/>
@@ -7846,8 +7846,8 @@
         </p:nvSpPr>
         <p:spPr>
           <a:xfrm>
-            <a:off x="4591895" y="6060084"/>
-            <a:ext cx="320373" cy="199490"/>
+            <a:off x="4591895" y="5713257"/>
+            <a:ext cx="320373" cy="183138"/>
           </a:xfrm>
           <a:prstGeom prst="rect">
             <a:avLst/>
@@ -7871,8 +7871,8 @@
         </p:nvSpPr>
         <p:spPr>
           <a:xfrm>
-            <a:off x="4591895" y="6060084"/>
-            <a:ext cx="320373" cy="199490"/>
+            <a:off x="4591895" y="5713257"/>
+            <a:ext cx="320373" cy="183138"/>
           </a:xfrm>
           <a:prstGeom prst="rect">
             <a:avLst/>
@@ -7910,8 +7910,8 @@
         </p:nvSpPr>
         <p:spPr>
           <a:xfrm>
-            <a:off x="4912268" y="6060084"/>
-            <a:ext cx="1049620" cy="199490"/>
+            <a:off x="4912268" y="5713257"/>
+            <a:ext cx="1049620" cy="183138"/>
           </a:xfrm>
           <a:prstGeom prst="rect">
             <a:avLst/>
@@ -7935,8 +7935,8 @@
         </p:nvSpPr>
         <p:spPr>
           <a:xfrm>
-            <a:off x="4912268" y="6060084"/>
-            <a:ext cx="1049620" cy="199490"/>
+            <a:off x="4912268" y="5713257"/>
+            <a:ext cx="1049620" cy="183138"/>
           </a:xfrm>
           <a:prstGeom prst="rect">
             <a:avLst/>
@@ -7975,7 +7975,7 @@
         <p:spPr>
           <a:xfrm>
             <a:off x="6208776" y="1828800"/>
-            <a:ext cx="2103120" cy="262487"/>
+            <a:ext cx="2103120" cy="240971"/>
           </a:xfrm>
           <a:prstGeom prst="rect">
             <a:avLst/>
@@ -8013,8 +8013,8 @@
         </p:nvSpPr>
         <p:spPr>
           <a:xfrm>
-            <a:off x="8357616" y="1860298"/>
-            <a:ext cx="1759183" cy="199490"/>
+            <a:off x="8357616" y="1857717"/>
+            <a:ext cx="1759183" cy="183138"/>
           </a:xfrm>
           <a:prstGeom prst="rect">
             <a:avLst/>
@@ -8038,8 +8038,8 @@
         </p:nvSpPr>
         <p:spPr>
           <a:xfrm>
-            <a:off x="8357616" y="1860298"/>
-            <a:ext cx="1759183" cy="199490"/>
+            <a:off x="8357616" y="1857717"/>
+            <a:ext cx="1759183" cy="183138"/>
           </a:xfrm>
           <a:prstGeom prst="rect">
             <a:avLst/>
@@ -8077,8 +8077,8 @@
         </p:nvSpPr>
         <p:spPr>
           <a:xfrm>
-            <a:off x="10116799" y="1860298"/>
-            <a:ext cx="978643" cy="199490"/>
+            <a:off x="10116799" y="1857717"/>
+            <a:ext cx="978643" cy="183138"/>
           </a:xfrm>
           <a:prstGeom prst="rect">
             <a:avLst/>
@@ -8102,8 +8102,8 @@
         </p:nvSpPr>
         <p:spPr>
           <a:xfrm>
-            <a:off x="10116799" y="1860298"/>
-            <a:ext cx="978643" cy="199490"/>
+            <a:off x="10116799" y="1857717"/>
+            <a:ext cx="978643" cy="183138"/>
           </a:xfrm>
           <a:prstGeom prst="rect">
             <a:avLst/>
@@ -8141,8 +8141,8 @@
         </p:nvSpPr>
         <p:spPr>
           <a:xfrm>
-            <a:off x="11095442" y="1860298"/>
-            <a:ext cx="416854" cy="199490"/>
+            <a:off x="11095442" y="1857717"/>
+            <a:ext cx="416854" cy="183138"/>
           </a:xfrm>
           <a:prstGeom prst="rect">
             <a:avLst/>
@@ -8166,8 +8166,8 @@
         </p:nvSpPr>
         <p:spPr>
           <a:xfrm>
-            <a:off x="11095442" y="1860298"/>
-            <a:ext cx="416854" cy="199490"/>
+            <a:off x="11095442" y="1857717"/>
+            <a:ext cx="416854" cy="183138"/>
           </a:xfrm>
           <a:prstGeom prst="rect">
             <a:avLst/>
@@ -8205,8 +8205,8 @@
         </p:nvSpPr>
         <p:spPr>
           <a:xfrm>
-            <a:off x="6208776" y="2091287"/>
-            <a:ext cx="2103120" cy="262487"/>
+            <a:off x="6208776" y="2069771"/>
+            <a:ext cx="2103120" cy="240971"/>
           </a:xfrm>
           <a:prstGeom prst="rect">
             <a:avLst/>
@@ -8244,8 +8244,8 @@
         </p:nvSpPr>
         <p:spPr>
           <a:xfrm>
-            <a:off x="8357616" y="2122785"/>
-            <a:ext cx="1743709" cy="199490"/>
+            <a:off x="8357616" y="2098688"/>
+            <a:ext cx="1743709" cy="183138"/>
           </a:xfrm>
           <a:prstGeom prst="rect">
             <a:avLst/>
@@ -8269,8 +8269,8 @@
         </p:nvSpPr>
         <p:spPr>
           <a:xfrm>
-            <a:off x="8357616" y="2122785"/>
-            <a:ext cx="1743709" cy="199490"/>
+            <a:off x="8357616" y="2098688"/>
+            <a:ext cx="1743709" cy="183138"/>
           </a:xfrm>
           <a:prstGeom prst="rect">
             <a:avLst/>
@@ -8308,8 +8308,8 @@
         </p:nvSpPr>
         <p:spPr>
           <a:xfrm>
-            <a:off x="10101325" y="2122785"/>
-            <a:ext cx="638330" cy="199490"/>
+            <a:off x="10101325" y="2098688"/>
+            <a:ext cx="638330" cy="183138"/>
           </a:xfrm>
           <a:prstGeom prst="rect">
             <a:avLst/>
@@ -8333,8 +8333,8 @@
         </p:nvSpPr>
         <p:spPr>
           <a:xfrm>
-            <a:off x="10101325" y="2122785"/>
-            <a:ext cx="638330" cy="199490"/>
+            <a:off x="10101325" y="2098688"/>
+            <a:ext cx="638330" cy="183138"/>
           </a:xfrm>
           <a:prstGeom prst="rect">
             <a:avLst/>
@@ -8372,8 +8372,8 @@
         </p:nvSpPr>
         <p:spPr>
           <a:xfrm>
-            <a:off x="10739655" y="2122785"/>
-            <a:ext cx="772641" cy="199490"/>
+            <a:off x="10739655" y="2098688"/>
+            <a:ext cx="772641" cy="183138"/>
           </a:xfrm>
           <a:prstGeom prst="rect">
             <a:avLst/>
@@ -8397,8 +8397,8 @@
         </p:nvSpPr>
         <p:spPr>
           <a:xfrm>
-            <a:off x="10739655" y="2122785"/>
-            <a:ext cx="772641" cy="199490"/>
+            <a:off x="10739655" y="2098688"/>
+            <a:ext cx="772641" cy="183138"/>
           </a:xfrm>
           <a:prstGeom prst="rect">
             <a:avLst/>
@@ -8436,8 +8436,8 @@
         </p:nvSpPr>
         <p:spPr>
           <a:xfrm>
-            <a:off x="6208776" y="2353773"/>
-            <a:ext cx="2103120" cy="262487"/>
+            <a:off x="6208776" y="2310743"/>
+            <a:ext cx="2103120" cy="240971"/>
           </a:xfrm>
           <a:prstGeom prst="rect">
             <a:avLst/>
@@ -8475,8 +8475,8 @@
         </p:nvSpPr>
         <p:spPr>
           <a:xfrm>
-            <a:off x="8357616" y="2385272"/>
-            <a:ext cx="1719908" cy="199490"/>
+            <a:off x="8357616" y="2339659"/>
+            <a:ext cx="1719908" cy="183138"/>
           </a:xfrm>
           <a:prstGeom prst="rect">
             <a:avLst/>
@@ -8500,8 +8500,8 @@
         </p:nvSpPr>
         <p:spPr>
           <a:xfrm>
-            <a:off x="8357616" y="2385272"/>
-            <a:ext cx="1719908" cy="199490"/>
+            <a:off x="8357616" y="2339659"/>
+            <a:ext cx="1719908" cy="183138"/>
           </a:xfrm>
           <a:prstGeom prst="rect">
             <a:avLst/>
@@ -8539,8 +8539,8 @@
         </p:nvSpPr>
         <p:spPr>
           <a:xfrm>
-            <a:off x="10077524" y="2385272"/>
-            <a:ext cx="412555" cy="199490"/>
+            <a:off x="10077524" y="2339659"/>
+            <a:ext cx="412555" cy="183138"/>
           </a:xfrm>
           <a:prstGeom prst="rect">
             <a:avLst/>
@@ -8564,8 +8564,8 @@
         </p:nvSpPr>
         <p:spPr>
           <a:xfrm>
-            <a:off x="10077524" y="2385272"/>
-            <a:ext cx="412555" cy="199490"/>
+            <a:off x="10077524" y="2339659"/>
+            <a:ext cx="412555" cy="183138"/>
           </a:xfrm>
           <a:prstGeom prst="rect">
             <a:avLst/>
@@ -8603,8 +8603,8 @@
         </p:nvSpPr>
         <p:spPr>
           <a:xfrm>
-            <a:off x="10490079" y="2385272"/>
-            <a:ext cx="1022217" cy="199490"/>
+            <a:off x="10490079" y="2339659"/>
+            <a:ext cx="1022217" cy="183138"/>
           </a:xfrm>
           <a:prstGeom prst="rect">
             <a:avLst/>
@@ -8628,8 +8628,8 @@
         </p:nvSpPr>
         <p:spPr>
           <a:xfrm>
-            <a:off x="10490079" y="2385272"/>
-            <a:ext cx="1022217" cy="199490"/>
+            <a:off x="10490079" y="2339659"/>
+            <a:ext cx="1022217" cy="183138"/>
           </a:xfrm>
           <a:prstGeom prst="rect">
             <a:avLst/>
@@ -8667,8 +8667,8 @@
         </p:nvSpPr>
         <p:spPr>
           <a:xfrm>
-            <a:off x="6208776" y="2616260"/>
-            <a:ext cx="2103120" cy="262487"/>
+            <a:off x="6208776" y="2551714"/>
+            <a:ext cx="2103120" cy="240971"/>
           </a:xfrm>
           <a:prstGeom prst="rect">
             <a:avLst/>
@@ -8706,8 +8706,8 @@
         </p:nvSpPr>
         <p:spPr>
           <a:xfrm>
-            <a:off x="8357616" y="2647758"/>
-            <a:ext cx="1601041" cy="199490"/>
+            <a:off x="8357616" y="2580630"/>
+            <a:ext cx="1601041" cy="183138"/>
           </a:xfrm>
           <a:prstGeom prst="rect">
             <a:avLst/>
@@ -8731,8 +8731,8 @@
         </p:nvSpPr>
         <p:spPr>
           <a:xfrm>
-            <a:off x="8357616" y="2647758"/>
-            <a:ext cx="1601041" cy="199490"/>
+            <a:off x="8357616" y="2580630"/>
+            <a:ext cx="1601041" cy="183138"/>
           </a:xfrm>
           <a:prstGeom prst="rect">
             <a:avLst/>
@@ -8770,8 +8770,8 @@
         </p:nvSpPr>
         <p:spPr>
           <a:xfrm>
-            <a:off x="9958657" y="2647758"/>
-            <a:ext cx="606875" cy="199490"/>
+            <a:off x="9958657" y="2580630"/>
+            <a:ext cx="606875" cy="183138"/>
           </a:xfrm>
           <a:prstGeom prst="rect">
             <a:avLst/>
@@ -8795,8 +8795,8 @@
         </p:nvSpPr>
         <p:spPr>
           <a:xfrm>
-            <a:off x="9958657" y="2647758"/>
-            <a:ext cx="606875" cy="199490"/>
+            <a:off x="9958657" y="2580630"/>
+            <a:ext cx="606875" cy="183138"/>
           </a:xfrm>
           <a:prstGeom prst="rect">
             <a:avLst/>
@@ -8834,8 +8834,8 @@
         </p:nvSpPr>
         <p:spPr>
           <a:xfrm>
-            <a:off x="10565532" y="2647758"/>
-            <a:ext cx="946764" cy="199490"/>
+            <a:off x="10565532" y="2580630"/>
+            <a:ext cx="946764" cy="183138"/>
           </a:xfrm>
           <a:prstGeom prst="rect">
             <a:avLst/>
@@ -8859,8 +8859,8 @@
         </p:nvSpPr>
         <p:spPr>
           <a:xfrm>
-            <a:off x="10565532" y="2647758"/>
-            <a:ext cx="946764" cy="199490"/>
+            <a:off x="10565532" y="2580630"/>
+            <a:ext cx="946764" cy="183138"/>
           </a:xfrm>
           <a:prstGeom prst="rect">
             <a:avLst/>
@@ -8898,8 +8898,8 @@
         </p:nvSpPr>
         <p:spPr>
           <a:xfrm>
-            <a:off x="6208776" y="2878746"/>
-            <a:ext cx="2103120" cy="262487"/>
+            <a:off x="6208776" y="2792685"/>
+            <a:ext cx="2103120" cy="240971"/>
           </a:xfrm>
           <a:prstGeom prst="rect">
             <a:avLst/>
@@ -8937,8 +8937,8 @@
         </p:nvSpPr>
         <p:spPr>
           <a:xfrm>
-            <a:off x="8357616" y="2910245"/>
-            <a:ext cx="1536222" cy="199490"/>
+            <a:off x="8357616" y="2821602"/>
+            <a:ext cx="1536222" cy="183138"/>
           </a:xfrm>
           <a:prstGeom prst="rect">
             <a:avLst/>
@@ -8962,8 +8962,8 @@
         </p:nvSpPr>
         <p:spPr>
           <a:xfrm>
-            <a:off x="8357616" y="2910245"/>
-            <a:ext cx="1536222" cy="199490"/>
+            <a:off x="8357616" y="2821602"/>
+            <a:ext cx="1536222" cy="183138"/>
           </a:xfrm>
           <a:prstGeom prst="rect">
             <a:avLst/>
@@ -9001,8 +9001,8 @@
         </p:nvSpPr>
         <p:spPr>
           <a:xfrm>
-            <a:off x="9893838" y="2910245"/>
-            <a:ext cx="488153" cy="199490"/>
+            <a:off x="9893838" y="2821602"/>
+            <a:ext cx="488153" cy="183138"/>
           </a:xfrm>
           <a:prstGeom prst="rect">
             <a:avLst/>
@@ -9026,8 +9026,8 @@
         </p:nvSpPr>
         <p:spPr>
           <a:xfrm>
-            <a:off x="9893838" y="2910245"/>
-            <a:ext cx="488153" cy="199490"/>
+            <a:off x="9893838" y="2821602"/>
+            <a:ext cx="488153" cy="183138"/>
           </a:xfrm>
           <a:prstGeom prst="rect">
             <a:avLst/>
@@ -9065,8 +9065,8 @@
         </p:nvSpPr>
         <p:spPr>
           <a:xfrm>
-            <a:off x="10381990" y="2910245"/>
-            <a:ext cx="1130306" cy="199490"/>
+            <a:off x="10381990" y="2821602"/>
+            <a:ext cx="1130306" cy="183138"/>
           </a:xfrm>
           <a:prstGeom prst="rect">
             <a:avLst/>
@@ -9090,8 +9090,8 @@
         </p:nvSpPr>
         <p:spPr>
           <a:xfrm>
-            <a:off x="10381990" y="2910245"/>
-            <a:ext cx="1130306" cy="199490"/>
+            <a:off x="10381990" y="2821602"/>
+            <a:ext cx="1130306" cy="183138"/>
           </a:xfrm>
           <a:prstGeom prst="rect">
             <a:avLst/>
@@ -9129,8 +9129,8 @@
         </p:nvSpPr>
         <p:spPr>
           <a:xfrm>
-            <a:off x="6208776" y="3141233"/>
-            <a:ext cx="2103120" cy="262487"/>
+            <a:off x="6208776" y="3033656"/>
+            <a:ext cx="2103120" cy="240971"/>
           </a:xfrm>
           <a:prstGeom prst="rect">
             <a:avLst/>
@@ -9168,8 +9168,8 @@
         </p:nvSpPr>
         <p:spPr>
           <a:xfrm>
-            <a:off x="8357616" y="3172731"/>
-            <a:ext cx="1513638" cy="199490"/>
+            <a:off x="8357616" y="3062573"/>
+            <a:ext cx="1513638" cy="183138"/>
           </a:xfrm>
           <a:prstGeom prst="rect">
             <a:avLst/>
@@ -9193,8 +9193,8 @@
         </p:nvSpPr>
         <p:spPr>
           <a:xfrm>
-            <a:off x="8357616" y="3172731"/>
-            <a:ext cx="1513638" cy="199490"/>
+            <a:off x="8357616" y="3062573"/>
+            <a:ext cx="1513638" cy="183138"/>
           </a:xfrm>
           <a:prstGeom prst="rect">
             <a:avLst/>
@@ -9232,8 +9232,8 @@
         </p:nvSpPr>
         <p:spPr>
           <a:xfrm>
-            <a:off x="9871254" y="3172731"/>
-            <a:ext cx="727538" cy="199490"/>
+            <a:off x="9871254" y="3062573"/>
+            <a:ext cx="727538" cy="183138"/>
           </a:xfrm>
           <a:prstGeom prst="rect">
             <a:avLst/>
@@ -9257,8 +9257,8 @@
         </p:nvSpPr>
         <p:spPr>
           <a:xfrm>
-            <a:off x="9871254" y="3172731"/>
-            <a:ext cx="727538" cy="199490"/>
+            <a:off x="9871254" y="3062573"/>
+            <a:ext cx="727538" cy="183138"/>
           </a:xfrm>
           <a:prstGeom prst="rect">
             <a:avLst/>
@@ -9296,8 +9296,8 @@
         </p:nvSpPr>
         <p:spPr>
           <a:xfrm>
-            <a:off x="10598793" y="3172731"/>
-            <a:ext cx="913503" cy="199490"/>
+            <a:off x="10598793" y="3062573"/>
+            <a:ext cx="913503" cy="183138"/>
           </a:xfrm>
           <a:prstGeom prst="rect">
             <a:avLst/>
@@ -9321,8 +9321,8 @@
         </p:nvSpPr>
         <p:spPr>
           <a:xfrm>
-            <a:off x="10598793" y="3172731"/>
-            <a:ext cx="913503" cy="199490"/>
+            <a:off x="10598793" y="3062573"/>
+            <a:ext cx="913503" cy="183138"/>
           </a:xfrm>
           <a:prstGeom prst="rect">
             <a:avLst/>
@@ -9360,8 +9360,8 @@
         </p:nvSpPr>
         <p:spPr>
           <a:xfrm>
-            <a:off x="6208776" y="3403720"/>
-            <a:ext cx="2103120" cy="262487"/>
+            <a:off x="6208776" y="3274628"/>
+            <a:ext cx="2103120" cy="240971"/>
           </a:xfrm>
           <a:prstGeom prst="rect">
             <a:avLst/>
@@ -9399,8 +9399,8 @@
         </p:nvSpPr>
         <p:spPr>
           <a:xfrm>
-            <a:off x="8357616" y="3435218"/>
-            <a:ext cx="1487709" cy="199490"/>
+            <a:off x="8357616" y="3303544"/>
+            <a:ext cx="1487709" cy="183138"/>
           </a:xfrm>
           <a:prstGeom prst="rect">
             <a:avLst/>
@@ -9424,8 +9424,8 @@
         </p:nvSpPr>
         <p:spPr>
           <a:xfrm>
-            <a:off x="8357616" y="3435218"/>
-            <a:ext cx="1487709" cy="199490"/>
+            <a:off x="8357616" y="3303544"/>
+            <a:ext cx="1487709" cy="183138"/>
           </a:xfrm>
           <a:prstGeom prst="rect">
             <a:avLst/>
@@ -9463,8 +9463,8 @@
         </p:nvSpPr>
         <p:spPr>
           <a:xfrm>
-            <a:off x="9845325" y="3435218"/>
-            <a:ext cx="1263575" cy="199490"/>
+            <a:off x="9845325" y="3303544"/>
+            <a:ext cx="1263575" cy="183138"/>
           </a:xfrm>
           <a:prstGeom prst="rect">
             <a:avLst/>
@@ -9488,8 +9488,8 @@
         </p:nvSpPr>
         <p:spPr>
           <a:xfrm>
-            <a:off x="9845325" y="3435218"/>
-            <a:ext cx="1263575" cy="199490"/>
+            <a:off x="9845325" y="3303544"/>
+            <a:ext cx="1263575" cy="183138"/>
           </a:xfrm>
           <a:prstGeom prst="rect">
             <a:avLst/>
@@ -9527,8 +9527,8 @@
         </p:nvSpPr>
         <p:spPr>
           <a:xfrm>
-            <a:off x="11108900" y="3435218"/>
-            <a:ext cx="403396" cy="199490"/>
+            <a:off x="11108900" y="3303544"/>
+            <a:ext cx="403396" cy="183138"/>
           </a:xfrm>
           <a:prstGeom prst="rect">
             <a:avLst/>
@@ -9552,8 +9552,8 @@
         </p:nvSpPr>
         <p:spPr>
           <a:xfrm>
-            <a:off x="11108900" y="3435218"/>
-            <a:ext cx="403396" cy="199490"/>
+            <a:off x="11108900" y="3303544"/>
+            <a:ext cx="403396" cy="183138"/>
           </a:xfrm>
           <a:prstGeom prst="rect">
             <a:avLst/>
@@ -9591,8 +9591,8 @@
         </p:nvSpPr>
         <p:spPr>
           <a:xfrm>
-            <a:off x="6208776" y="3666206"/>
-            <a:ext cx="2103120" cy="262487"/>
+            <a:off x="6208776" y="3515599"/>
+            <a:ext cx="2103120" cy="240971"/>
           </a:xfrm>
           <a:prstGeom prst="rect">
             <a:avLst/>
@@ -9630,8 +9630,8 @@
         </p:nvSpPr>
         <p:spPr>
           <a:xfrm>
-            <a:off x="8357616" y="3697705"/>
-            <a:ext cx="1483116" cy="199490"/>
+            <a:off x="8357616" y="3544516"/>
+            <a:ext cx="1483116" cy="183138"/>
           </a:xfrm>
           <a:prstGeom prst="rect">
             <a:avLst/>
@@ -9655,8 +9655,8 @@
         </p:nvSpPr>
         <p:spPr>
           <a:xfrm>
-            <a:off x="8357616" y="3697705"/>
-            <a:ext cx="1483116" cy="199490"/>
+            <a:off x="8357616" y="3544516"/>
+            <a:ext cx="1483116" cy="183138"/>
           </a:xfrm>
           <a:prstGeom prst="rect">
             <a:avLst/>
@@ -9694,8 +9694,8 @@
         </p:nvSpPr>
         <p:spPr>
           <a:xfrm>
-            <a:off x="9840732" y="3697705"/>
-            <a:ext cx="885736" cy="199490"/>
+            <a:off x="9840732" y="3544516"/>
+            <a:ext cx="885736" cy="183138"/>
           </a:xfrm>
           <a:prstGeom prst="rect">
             <a:avLst/>
@@ -9719,8 +9719,8 @@
         </p:nvSpPr>
         <p:spPr>
           <a:xfrm>
-            <a:off x="9840732" y="3697705"/>
-            <a:ext cx="885736" cy="199490"/>
+            <a:off x="9840732" y="3544516"/>
+            <a:ext cx="885736" cy="183138"/>
           </a:xfrm>
           <a:prstGeom prst="rect">
             <a:avLst/>
@@ -9758,8 +9758,8 @@
         </p:nvSpPr>
         <p:spPr>
           <a:xfrm>
-            <a:off x="10726468" y="3697705"/>
-            <a:ext cx="785828" cy="199490"/>
+            <a:off x="10726468" y="3544516"/>
+            <a:ext cx="785828" cy="183138"/>
           </a:xfrm>
           <a:prstGeom prst="rect">
             <a:avLst/>
@@ -9783,8 +9783,8 @@
         </p:nvSpPr>
         <p:spPr>
           <a:xfrm>
-            <a:off x="10726468" y="3697705"/>
-            <a:ext cx="785828" cy="199490"/>
+            <a:off x="10726468" y="3544516"/>
+            <a:ext cx="785828" cy="183138"/>
           </a:xfrm>
           <a:prstGeom prst="rect">
             <a:avLst/>
@@ -9822,8 +9822,8 @@
         </p:nvSpPr>
         <p:spPr>
           <a:xfrm>
-            <a:off x="6208776" y="3928693"/>
-            <a:ext cx="2103120" cy="262487"/>
+            <a:off x="6208776" y="3756570"/>
+            <a:ext cx="2103120" cy="240971"/>
           </a:xfrm>
           <a:prstGeom prst="rect">
             <a:avLst/>
@@ -9861,8 +9861,8 @@
         </p:nvSpPr>
         <p:spPr>
           <a:xfrm>
-            <a:off x="8357616" y="3960191"/>
-            <a:ext cx="1429900" cy="199490"/>
+            <a:off x="8357616" y="3785487"/>
+            <a:ext cx="1429900" cy="183138"/>
           </a:xfrm>
           <a:prstGeom prst="rect">
             <a:avLst/>
@@ -9886,8 +9886,8 @@
         </p:nvSpPr>
         <p:spPr>
           <a:xfrm>
-            <a:off x="8357616" y="3960191"/>
-            <a:ext cx="1429900" cy="199490"/>
+            <a:off x="8357616" y="3785487"/>
+            <a:ext cx="1429900" cy="183138"/>
           </a:xfrm>
           <a:prstGeom prst="rect">
             <a:avLst/>
@@ -9925,8 +9925,8 @@
         </p:nvSpPr>
         <p:spPr>
           <a:xfrm>
-            <a:off x="9787516" y="3960191"/>
-            <a:ext cx="450296" cy="199490"/>
+            <a:off x="9787516" y="3785487"/>
+            <a:ext cx="450296" cy="183138"/>
           </a:xfrm>
           <a:prstGeom prst="rect">
             <a:avLst/>
@@ -9950,8 +9950,8 @@
         </p:nvSpPr>
         <p:spPr>
           <a:xfrm>
-            <a:off x="9787516" y="3960191"/>
-            <a:ext cx="450296" cy="199490"/>
+            <a:off x="9787516" y="3785487"/>
+            <a:ext cx="450296" cy="183138"/>
           </a:xfrm>
           <a:prstGeom prst="rect">
             <a:avLst/>
@@ -9989,8 +9989,8 @@
         </p:nvSpPr>
         <p:spPr>
           <a:xfrm>
-            <a:off x="10237812" y="3960191"/>
-            <a:ext cx="1274484" cy="199490"/>
+            <a:off x="10237812" y="3785487"/>
+            <a:ext cx="1274484" cy="183138"/>
           </a:xfrm>
           <a:prstGeom prst="rect">
             <a:avLst/>
@@ -10014,8 +10014,8 @@
         </p:nvSpPr>
         <p:spPr>
           <a:xfrm>
-            <a:off x="10237812" y="3960191"/>
-            <a:ext cx="1274484" cy="199490"/>
+            <a:off x="10237812" y="3785487"/>
+            <a:ext cx="1274484" cy="183138"/>
           </a:xfrm>
           <a:prstGeom prst="rect">
             <a:avLst/>
@@ -10053,8 +10053,8 @@
         </p:nvSpPr>
         <p:spPr>
           <a:xfrm>
-            <a:off x="6208776" y="4191179"/>
-            <a:ext cx="2103120" cy="262487"/>
+            <a:off x="6208776" y="3997542"/>
+            <a:ext cx="2103120" cy="240971"/>
           </a:xfrm>
           <a:prstGeom prst="rect">
             <a:avLst/>
@@ -10092,8 +10092,8 @@
         </p:nvSpPr>
         <p:spPr>
           <a:xfrm>
-            <a:off x="8357616" y="4222678"/>
-            <a:ext cx="1407663" cy="199490"/>
+            <a:off x="8357616" y="4026458"/>
+            <a:ext cx="1407663" cy="183138"/>
           </a:xfrm>
           <a:prstGeom prst="rect">
             <a:avLst/>
@@ -10117,8 +10117,8 @@
         </p:nvSpPr>
         <p:spPr>
           <a:xfrm>
-            <a:off x="8357616" y="4222678"/>
-            <a:ext cx="1407663" cy="199490"/>
+            <a:off x="8357616" y="4026458"/>
+            <a:ext cx="1407663" cy="183138"/>
           </a:xfrm>
           <a:prstGeom prst="rect">
             <a:avLst/>
@@ -10156,8 +10156,8 @@
         </p:nvSpPr>
         <p:spPr>
           <a:xfrm>
-            <a:off x="9765279" y="4222678"/>
-            <a:ext cx="1184133" cy="199490"/>
+            <a:off x="9765279" y="4026458"/>
+            <a:ext cx="1184133" cy="183138"/>
           </a:xfrm>
           <a:prstGeom prst="rect">
             <a:avLst/>
@@ -10181,8 +10181,8 @@
         </p:nvSpPr>
         <p:spPr>
           <a:xfrm>
-            <a:off x="9765279" y="4222678"/>
-            <a:ext cx="1184133" cy="199490"/>
+            <a:off x="9765279" y="4026458"/>
+            <a:ext cx="1184133" cy="183138"/>
           </a:xfrm>
           <a:prstGeom prst="rect">
             <a:avLst/>
@@ -10220,8 +10220,8 @@
         </p:nvSpPr>
         <p:spPr>
           <a:xfrm>
-            <a:off x="10949412" y="4222678"/>
-            <a:ext cx="562884" cy="199490"/>
+            <a:off x="10949412" y="4026458"/>
+            <a:ext cx="562884" cy="183138"/>
           </a:xfrm>
           <a:prstGeom prst="rect">
             <a:avLst/>
@@ -10245,8 +10245,8 @@
         </p:nvSpPr>
         <p:spPr>
           <a:xfrm>
-            <a:off x="10949412" y="4222678"/>
-            <a:ext cx="562884" cy="199490"/>
+            <a:off x="10949412" y="4026458"/>
+            <a:ext cx="562884" cy="183138"/>
           </a:xfrm>
           <a:prstGeom prst="rect">
             <a:avLst/>
@@ -10284,8 +10284,8 @@
         </p:nvSpPr>
         <p:spPr>
           <a:xfrm>
-            <a:off x="6208776" y="4453666"/>
-            <a:ext cx="2103120" cy="262487"/>
+            <a:off x="6208776" y="4238513"/>
+            <a:ext cx="2103120" cy="240971"/>
           </a:xfrm>
           <a:prstGeom prst="rect">
             <a:avLst/>
@@ -10323,8 +10323,8 @@
         </p:nvSpPr>
         <p:spPr>
           <a:xfrm>
-            <a:off x="8357616" y="4485164"/>
-            <a:ext cx="1272315" cy="199490"/>
+            <a:off x="8357616" y="4267429"/>
+            <a:ext cx="1272315" cy="183138"/>
           </a:xfrm>
           <a:prstGeom prst="rect">
             <a:avLst/>
@@ -10348,8 +10348,8 @@
         </p:nvSpPr>
         <p:spPr>
           <a:xfrm>
-            <a:off x="8357616" y="4485164"/>
-            <a:ext cx="1272315" cy="199490"/>
+            <a:off x="8357616" y="4267429"/>
+            <a:ext cx="1272315" cy="183138"/>
           </a:xfrm>
           <a:prstGeom prst="rect">
             <a:avLst/>
@@ -10387,8 +10387,8 @@
         </p:nvSpPr>
         <p:spPr>
           <a:xfrm>
-            <a:off x="9629931" y="4485164"/>
-            <a:ext cx="1101342" cy="199490"/>
+            <a:off x="9629931" y="4267429"/>
+            <a:ext cx="1101342" cy="183138"/>
           </a:xfrm>
           <a:prstGeom prst="rect">
             <a:avLst/>
@@ -10412,8 +10412,8 @@
         </p:nvSpPr>
         <p:spPr>
           <a:xfrm>
-            <a:off x="9629931" y="4485164"/>
-            <a:ext cx="1101342" cy="199490"/>
+            <a:off x="9629931" y="4267429"/>
+            <a:ext cx="1101342" cy="183138"/>
           </a:xfrm>
           <a:prstGeom prst="rect">
             <a:avLst/>
@@ -10451,8 +10451,8 @@
         </p:nvSpPr>
         <p:spPr>
           <a:xfrm>
-            <a:off x="10731273" y="4485164"/>
-            <a:ext cx="781023" cy="199490"/>
+            <a:off x="10731273" y="4267429"/>
+            <a:ext cx="781023" cy="183138"/>
           </a:xfrm>
           <a:prstGeom prst="rect">
             <a:avLst/>
@@ -10476,8 +10476,8 @@
         </p:nvSpPr>
         <p:spPr>
           <a:xfrm>
-            <a:off x="10731273" y="4485164"/>
-            <a:ext cx="781023" cy="199490"/>
+            <a:off x="10731273" y="4267429"/>
+            <a:ext cx="781023" cy="183138"/>
           </a:xfrm>
           <a:prstGeom prst="rect">
             <a:avLst/>
@@ -10515,8 +10515,8 @@
         </p:nvSpPr>
         <p:spPr>
           <a:xfrm>
-            <a:off x="6208776" y="4716152"/>
-            <a:ext cx="2103120" cy="262487"/>
+            <a:off x="6208776" y="4479484"/>
+            <a:ext cx="2103120" cy="240971"/>
           </a:xfrm>
           <a:prstGeom prst="rect">
             <a:avLst/>
@@ -10554,8 +10554,8 @@
         </p:nvSpPr>
         <p:spPr>
           <a:xfrm>
-            <a:off x="8357616" y="4747651"/>
-            <a:ext cx="1260841" cy="199490"/>
+            <a:off x="8357616" y="4508401"/>
+            <a:ext cx="1260841" cy="183138"/>
           </a:xfrm>
           <a:prstGeom prst="rect">
             <a:avLst/>
@@ -10579,8 +10579,8 @@
         </p:nvSpPr>
         <p:spPr>
           <a:xfrm>
-            <a:off x="8357616" y="4747651"/>
-            <a:ext cx="1260841" cy="199490"/>
+            <a:off x="8357616" y="4508401"/>
+            <a:ext cx="1260841" cy="183138"/>
           </a:xfrm>
           <a:prstGeom prst="rect">
             <a:avLst/>
@@ -10618,8 +10618,8 @@
         </p:nvSpPr>
         <p:spPr>
           <a:xfrm>
-            <a:off x="9618457" y="4747651"/>
-            <a:ext cx="1210006" cy="199490"/>
+            <a:off x="9618457" y="4508401"/>
+            <a:ext cx="1210006" cy="183138"/>
           </a:xfrm>
           <a:prstGeom prst="rect">
             <a:avLst/>
@@ -10643,8 +10643,8 @@
         </p:nvSpPr>
         <p:spPr>
           <a:xfrm>
-            <a:off x="9618457" y="4747651"/>
-            <a:ext cx="1210006" cy="199490"/>
+            <a:off x="9618457" y="4508401"/>
+            <a:ext cx="1210006" cy="183138"/>
           </a:xfrm>
           <a:prstGeom prst="rect">
             <a:avLst/>
@@ -10682,8 +10682,8 @@
         </p:nvSpPr>
         <p:spPr>
           <a:xfrm>
-            <a:off x="10828463" y="4747651"/>
-            <a:ext cx="683833" cy="199490"/>
+            <a:off x="10828463" y="4508401"/>
+            <a:ext cx="683833" cy="183138"/>
           </a:xfrm>
           <a:prstGeom prst="rect">
             <a:avLst/>
@@ -10707,8 +10707,8 @@
         </p:nvSpPr>
         <p:spPr>
           <a:xfrm>
-            <a:off x="10828463" y="4747651"/>
-            <a:ext cx="683833" cy="199490"/>
+            <a:off x="10828463" y="4508401"/>
+            <a:ext cx="683833" cy="183138"/>
           </a:xfrm>
           <a:prstGeom prst="rect">
             <a:avLst/>
@@ -10746,8 +10746,8 @@
         </p:nvSpPr>
         <p:spPr>
           <a:xfrm>
-            <a:off x="6208776" y="4978639"/>
-            <a:ext cx="2103120" cy="262487"/>
+            <a:off x="6208776" y="4720456"/>
+            <a:ext cx="2103120" cy="240971"/>
           </a:xfrm>
           <a:prstGeom prst="rect">
             <a:avLst/>
@@ -10785,8 +10785,8 @@
         </p:nvSpPr>
         <p:spPr>
           <a:xfrm>
-            <a:off x="8357616" y="5010137"/>
-            <a:ext cx="1237324" cy="199490"/>
+            <a:off x="8357616" y="4749372"/>
+            <a:ext cx="1237324" cy="183138"/>
           </a:xfrm>
           <a:prstGeom prst="rect">
             <a:avLst/>
@@ -10810,8 +10810,8 @@
         </p:nvSpPr>
         <p:spPr>
           <a:xfrm>
-            <a:off x="8357616" y="5010137"/>
-            <a:ext cx="1237324" cy="199490"/>
+            <a:off x="8357616" y="4749372"/>
+            <a:ext cx="1237324" cy="183138"/>
           </a:xfrm>
           <a:prstGeom prst="rect">
             <a:avLst/>
@@ -10849,8 +10849,8 @@
         </p:nvSpPr>
         <p:spPr>
           <a:xfrm>
-            <a:off x="9594940" y="5010137"/>
-            <a:ext cx="995080" cy="199490"/>
+            <a:off x="9594940" y="4749372"/>
+            <a:ext cx="995080" cy="183138"/>
           </a:xfrm>
           <a:prstGeom prst="rect">
             <a:avLst/>
@@ -10874,8 +10874,8 @@
         </p:nvSpPr>
         <p:spPr>
           <a:xfrm>
-            <a:off x="9594940" y="5010137"/>
-            <a:ext cx="995080" cy="199490"/>
+            <a:off x="9594940" y="4749372"/>
+            <a:ext cx="995080" cy="183138"/>
           </a:xfrm>
           <a:prstGeom prst="rect">
             <a:avLst/>
@@ -10913,8 +10913,8 @@
         </p:nvSpPr>
         <p:spPr>
           <a:xfrm>
-            <a:off x="10590020" y="5010137"/>
-            <a:ext cx="922276" cy="199490"/>
+            <a:off x="10590020" y="4749372"/>
+            <a:ext cx="922276" cy="183138"/>
           </a:xfrm>
           <a:prstGeom prst="rect">
             <a:avLst/>
@@ -10938,8 +10938,8 @@
         </p:nvSpPr>
         <p:spPr>
           <a:xfrm>
-            <a:off x="10590020" y="5010137"/>
-            <a:ext cx="922276" cy="199490"/>
+            <a:off x="10590020" y="4749372"/>
+            <a:ext cx="922276" cy="183138"/>
           </a:xfrm>
           <a:prstGeom prst="rect">
             <a:avLst/>
@@ -10977,8 +10977,8 @@
         </p:nvSpPr>
         <p:spPr>
           <a:xfrm>
-            <a:off x="6208776" y="5241126"/>
-            <a:ext cx="2103120" cy="262487"/>
+            <a:off x="6208776" y="4961427"/>
+            <a:ext cx="2103120" cy="240971"/>
           </a:xfrm>
           <a:prstGeom prst="rect">
             <a:avLst/>
@@ -11016,8 +11016,8 @@
         </p:nvSpPr>
         <p:spPr>
           <a:xfrm>
-            <a:off x="8357616" y="5272624"/>
-            <a:ext cx="1075368" cy="199490"/>
+            <a:off x="8357616" y="4990343"/>
+            <a:ext cx="1075368" cy="183138"/>
           </a:xfrm>
           <a:prstGeom prst="rect">
             <a:avLst/>
@@ -11041,8 +11041,8 @@
         </p:nvSpPr>
         <p:spPr>
           <a:xfrm>
-            <a:off x="8357616" y="5272624"/>
-            <a:ext cx="1075368" cy="199490"/>
+            <a:off x="8357616" y="4990343"/>
+            <a:ext cx="1075368" cy="183138"/>
           </a:xfrm>
           <a:prstGeom prst="rect">
             <a:avLst/>
@@ -11080,8 +11080,8 @@
         </p:nvSpPr>
         <p:spPr>
           <a:xfrm>
-            <a:off x="9432984" y="5272624"/>
-            <a:ext cx="1647182" cy="199490"/>
+            <a:off x="9432984" y="4990343"/>
+            <a:ext cx="1647182" cy="183138"/>
           </a:xfrm>
           <a:prstGeom prst="rect">
             <a:avLst/>
@@ -11105,8 +11105,8 @@
         </p:nvSpPr>
         <p:spPr>
           <a:xfrm>
-            <a:off x="9432984" y="5272624"/>
-            <a:ext cx="1647182" cy="199490"/>
+            <a:off x="9432984" y="4990343"/>
+            <a:ext cx="1647182" cy="183138"/>
           </a:xfrm>
           <a:prstGeom prst="rect">
             <a:avLst/>
@@ -11144,8 +11144,8 @@
         </p:nvSpPr>
         <p:spPr>
           <a:xfrm>
-            <a:off x="11080165" y="5272624"/>
-            <a:ext cx="432131" cy="199490"/>
+            <a:off x="11080165" y="4990343"/>
+            <a:ext cx="432131" cy="183138"/>
           </a:xfrm>
           <a:prstGeom prst="rect">
             <a:avLst/>
@@ -11169,8 +11169,8 @@
         </p:nvSpPr>
         <p:spPr>
           <a:xfrm>
-            <a:off x="11080165" y="5272624"/>
-            <a:ext cx="432131" cy="199490"/>
+            <a:off x="11080165" y="4990343"/>
+            <a:ext cx="432131" cy="183138"/>
           </a:xfrm>
           <a:prstGeom prst="rect">
             <a:avLst/>
@@ -11208,8 +11208,8 @@
         </p:nvSpPr>
         <p:spPr>
           <a:xfrm>
-            <a:off x="6208776" y="5503612"/>
-            <a:ext cx="2103120" cy="262487"/>
+            <a:off x="6208776" y="5202398"/>
+            <a:ext cx="2103120" cy="240971"/>
           </a:xfrm>
           <a:prstGeom prst="rect">
             <a:avLst/>
@@ -11247,8 +11247,8 @@
         </p:nvSpPr>
         <p:spPr>
           <a:xfrm>
-            <a:off x="8357616" y="5535111"/>
-            <a:ext cx="898846" cy="199490"/>
+            <a:off x="8357616" y="5231315"/>
+            <a:ext cx="898846" cy="183138"/>
           </a:xfrm>
           <a:prstGeom prst="rect">
             <a:avLst/>
@@ -11272,8 +11272,8 @@
         </p:nvSpPr>
         <p:spPr>
           <a:xfrm>
-            <a:off x="8357616" y="5535111"/>
-            <a:ext cx="898846" cy="199490"/>
+            <a:off x="8357616" y="5231315"/>
+            <a:ext cx="898846" cy="183138"/>
           </a:xfrm>
           <a:prstGeom prst="rect">
             <a:avLst/>
@@ -11311,8 +11311,8 @@
         </p:nvSpPr>
         <p:spPr>
           <a:xfrm>
-            <a:off x="9256462" y="5535111"/>
-            <a:ext cx="1126586" cy="199490"/>
+            <a:off x="9256462" y="5231315"/>
+            <a:ext cx="1126586" cy="183138"/>
           </a:xfrm>
           <a:prstGeom prst="rect">
             <a:avLst/>
@@ -11336,8 +11336,8 @@
         </p:nvSpPr>
         <p:spPr>
           <a:xfrm>
-            <a:off x="9256462" y="5535111"/>
-            <a:ext cx="1126586" cy="199490"/>
+            <a:off x="9256462" y="5231315"/>
+            <a:ext cx="1126586" cy="183138"/>
           </a:xfrm>
           <a:prstGeom prst="rect">
             <a:avLst/>
@@ -11375,8 +11375,8 @@
         </p:nvSpPr>
         <p:spPr>
           <a:xfrm>
-            <a:off x="10383048" y="5535111"/>
-            <a:ext cx="1129248" cy="199490"/>
+            <a:off x="10383048" y="5231315"/>
+            <a:ext cx="1129248" cy="183138"/>
           </a:xfrm>
           <a:prstGeom prst="rect">
             <a:avLst/>
@@ -11400,8 +11400,8 @@
         </p:nvSpPr>
         <p:spPr>
           <a:xfrm>
-            <a:off x="10383048" y="5535111"/>
-            <a:ext cx="1129248" cy="199490"/>
+            <a:off x="10383048" y="5231315"/>
+            <a:ext cx="1129248" cy="183138"/>
           </a:xfrm>
           <a:prstGeom prst="rect">
             <a:avLst/>
@@ -11439,8 +11439,8 @@
         </p:nvSpPr>
         <p:spPr>
           <a:xfrm>
-            <a:off x="6208776" y="5766099"/>
-            <a:ext cx="2103120" cy="262487"/>
+            <a:off x="6208776" y="5443369"/>
+            <a:ext cx="2103120" cy="240971"/>
           </a:xfrm>
           <a:prstGeom prst="rect">
             <a:avLst/>
@@ -11478,8 +11478,8 @@
         </p:nvSpPr>
         <p:spPr>
           <a:xfrm>
-            <a:off x="8357616" y="5797597"/>
-            <a:ext cx="880673" cy="199490"/>
+            <a:off x="8357616" y="5472286"/>
+            <a:ext cx="880673" cy="183138"/>
           </a:xfrm>
           <a:prstGeom prst="rect">
             <a:avLst/>
@@ -11503,8 +11503,8 @@
         </p:nvSpPr>
         <p:spPr>
           <a:xfrm>
-            <a:off x="8357616" y="5797597"/>
-            <a:ext cx="880673" cy="199490"/>
+            <a:off x="8357616" y="5472286"/>
+            <a:ext cx="880673" cy="183138"/>
           </a:xfrm>
           <a:prstGeom prst="rect">
             <a:avLst/>
@@ -11542,8 +11542,8 @@
         </p:nvSpPr>
         <p:spPr>
           <a:xfrm>
-            <a:off x="9238289" y="5797597"/>
-            <a:ext cx="1619914" cy="199490"/>
+            <a:off x="9238289" y="5472286"/>
+            <a:ext cx="1619914" cy="183138"/>
           </a:xfrm>
           <a:prstGeom prst="rect">
             <a:avLst/>
@@ -11567,8 +11567,8 @@
         </p:nvSpPr>
         <p:spPr>
           <a:xfrm>
-            <a:off x="9238289" y="5797597"/>
-            <a:ext cx="1619914" cy="199490"/>
+            <a:off x="9238289" y="5472286"/>
+            <a:ext cx="1619914" cy="183138"/>
           </a:xfrm>
           <a:prstGeom prst="rect">
             <a:avLst/>
@@ -11606,8 +11606,8 @@
         </p:nvSpPr>
         <p:spPr>
           <a:xfrm>
-            <a:off x="10858202" y="5797597"/>
-            <a:ext cx="654094" cy="199490"/>
+            <a:off x="10858202" y="5472286"/>
+            <a:ext cx="654094" cy="183138"/>
           </a:xfrm>
           <a:prstGeom prst="rect">
             <a:avLst/>
@@ -11631,8 +11631,8 @@
         </p:nvSpPr>
         <p:spPr>
           <a:xfrm>
-            <a:off x="10858202" y="5797597"/>
-            <a:ext cx="654094" cy="199490"/>
+            <a:off x="10858202" y="5472286"/>
+            <a:ext cx="654094" cy="183138"/>
           </a:xfrm>
           <a:prstGeom prst="rect">
             <a:avLst/>
@@ -11659,6 +11659,65 @@
               <a:t>21</a:t>
             </a:r>
             <a:endParaRPr lang="en-US" sz="1300" dirty="0"/>
+          </a:p>
+        </p:txBody>
+      </p:sp>
+      <p:sp>
+        <p:nvSpPr>
+          <p:cNvPr id="252" name="Shape 249"/>
+          <p:cNvSpPr/>
+          <p:nvPr/>
+        </p:nvSpPr>
+        <p:spPr>
+          <a:xfrm>
+            <a:off x="457200" y="6126480"/>
+            <a:ext cx="11274552" cy="371856"/>
+          </a:xfrm>
+          <a:prstGeom prst="rect">
+            <a:avLst/>
+          </a:prstGeom>
+          <a:solidFill>
+            <a:srgbClr val="EDF4FA"/>
+          </a:solidFill>
+          <a:ln/>
+        </p:spPr>
+      </p:sp>
+      <p:sp>
+        <p:nvSpPr>
+          <p:cNvPr id="253" name="Text 250"/>
+          <p:cNvSpPr txBox="1"/>
+          <p:nvPr/>
+        </p:nvSpPr>
+        <p:spPr>
+          <a:xfrm>
+            <a:off x="658368" y="6144768"/>
+            <a:ext cx="10927080" cy="335280"/>
+          </a:xfrm>
+          <a:prstGeom prst="rect">
+            <a:avLst/>
+          </a:prstGeom>
+          <a:noFill/>
+          <a:ln/>
+        </p:spPr>
+        <p:txBody>
+          <a:bodyPr wrap="square" lIns="0" tIns="0" rIns="0" bIns="0" rtlCol="0" anchor="ctr"/>
+          <a:lstStyle/>
+          <a:p>
+            <a:pPr indent="0" marL="0">
+              <a:buNone/>
+            </a:pPr>
+            <a:r>
+              <a:rPr lang="en-US" sz="1600" b="1" dirty="0">
+                <a:solidFill>
+                  <a:srgbClr val="0B2C4A"/>
+                </a:solidFill>
+                <a:latin typeface="Inter" pitchFamily="34" charset="0"/>
+                <a:ea typeface="Inter" pitchFamily="34" charset="-122"/>
+                <a:cs typeface="Inter" pitchFamily="34" charset="-120"/>
+              </a:rPr>
+              <a:t>Customer pay is 52.5% of labor sale (52.8% in 2025), warranty 23.8%, internal 23.7%.</a:t>
+            </a:r>
+            <a:endParaRPr lang="en-US" sz="1600" dirty="0"/>
           </a:p>
         </p:txBody>
       </p:sp>
@@ -12655,7 +12714,7 @@
         <p:spPr>
           <a:xfrm>
             <a:off x="457200" y="1207008"/>
-            <a:ext cx="11274552" cy="5148072"/>
+            <a:ext cx="11274552" cy="4782312"/>
           </a:xfrm>
           <a:prstGeom prst="rect">
             <a:avLst/>
@@ -12832,7 +12891,7 @@
         <p:spPr>
           <a:xfrm>
             <a:off x="658368" y="1847088"/>
-            <a:ext cx="310896" cy="261411"/>
+            <a:ext cx="310896" cy="239896"/>
           </a:xfrm>
           <a:prstGeom prst="rect">
             <a:avLst/>
@@ -12871,7 +12930,7 @@
         <p:spPr>
           <a:xfrm>
             <a:off x="1014984" y="1847088"/>
-            <a:ext cx="1920240" cy="261411"/>
+            <a:ext cx="1920240" cy="239896"/>
           </a:xfrm>
           <a:prstGeom prst="rect">
             <a:avLst/>
@@ -12909,8 +12968,8 @@
         </p:nvSpPr>
         <p:spPr>
           <a:xfrm>
-            <a:off x="3785616" y="1917669"/>
-            <a:ext cx="777240" cy="120249"/>
+            <a:off x="3785616" y="1911860"/>
+            <a:ext cx="777240" cy="110352"/>
           </a:xfrm>
           <a:prstGeom prst="rect">
             <a:avLst/>
@@ -12930,7 +12989,7 @@
         <p:spPr>
           <a:xfrm>
             <a:off x="4617720" y="1847088"/>
-            <a:ext cx="1234440" cy="261411"/>
+            <a:ext cx="1234440" cy="239896"/>
           </a:xfrm>
           <a:prstGeom prst="rect">
             <a:avLst/>
@@ -12968,8 +13027,8 @@
         </p:nvSpPr>
         <p:spPr>
           <a:xfrm>
-            <a:off x="658368" y="2108499"/>
-            <a:ext cx="310896" cy="261411"/>
+            <a:off x="658368" y="2086984"/>
+            <a:ext cx="310896" cy="239896"/>
           </a:xfrm>
           <a:prstGeom prst="rect">
             <a:avLst/>
@@ -13007,8 +13066,8 @@
         </p:nvSpPr>
         <p:spPr>
           <a:xfrm>
-            <a:off x="1014984" y="2108499"/>
-            <a:ext cx="1920240" cy="261411"/>
+            <a:off x="1014984" y="2086984"/>
+            <a:ext cx="1920240" cy="239896"/>
           </a:xfrm>
           <a:prstGeom prst="rect">
             <a:avLst/>
@@ -13046,8 +13105,8 @@
         </p:nvSpPr>
         <p:spPr>
           <a:xfrm>
-            <a:off x="3785616" y="2179080"/>
-            <a:ext cx="701821" cy="120249"/>
+            <a:off x="3785616" y="2151755"/>
+            <a:ext cx="701821" cy="110352"/>
           </a:xfrm>
           <a:prstGeom prst="rect">
             <a:avLst/>
@@ -13066,8 +13125,8 @@
         </p:nvSpPr>
         <p:spPr>
           <a:xfrm>
-            <a:off x="4617720" y="2108499"/>
-            <a:ext cx="1234440" cy="261411"/>
+            <a:off x="4617720" y="2086984"/>
+            <a:ext cx="1234440" cy="239896"/>
           </a:xfrm>
           <a:prstGeom prst="rect">
             <a:avLst/>
@@ -13105,8 +13164,8 @@
         </p:nvSpPr>
         <p:spPr>
           <a:xfrm>
-            <a:off x="658368" y="2369910"/>
-            <a:ext cx="310896" cy="261411"/>
+            <a:off x="658368" y="2326879"/>
+            <a:ext cx="310896" cy="239896"/>
           </a:xfrm>
           <a:prstGeom prst="rect">
             <a:avLst/>
@@ -13144,8 +13203,8 @@
         </p:nvSpPr>
         <p:spPr>
           <a:xfrm>
-            <a:off x="1014984" y="2369910"/>
-            <a:ext cx="1920240" cy="261411"/>
+            <a:off x="1014984" y="2326879"/>
+            <a:ext cx="1920240" cy="239896"/>
           </a:xfrm>
           <a:prstGeom prst="rect">
             <a:avLst/>
@@ -13183,8 +13242,8 @@
         </p:nvSpPr>
         <p:spPr>
           <a:xfrm>
-            <a:off x="3785616" y="2440491"/>
-            <a:ext cx="687455" cy="120249"/>
+            <a:off x="3785616" y="2391651"/>
+            <a:ext cx="687455" cy="110352"/>
           </a:xfrm>
           <a:prstGeom prst="rect">
             <a:avLst/>
@@ -13203,8 +13262,8 @@
         </p:nvSpPr>
         <p:spPr>
           <a:xfrm>
-            <a:off x="4617720" y="2369910"/>
-            <a:ext cx="1234440" cy="261411"/>
+            <a:off x="4617720" y="2326879"/>
+            <a:ext cx="1234440" cy="239896"/>
           </a:xfrm>
           <a:prstGeom prst="rect">
             <a:avLst/>
@@ -13242,8 +13301,8 @@
         </p:nvSpPr>
         <p:spPr>
           <a:xfrm>
-            <a:off x="658368" y="2631320"/>
-            <a:ext cx="310896" cy="261411"/>
+            <a:off x="658368" y="2566775"/>
+            <a:ext cx="310896" cy="239896"/>
           </a:xfrm>
           <a:prstGeom prst="rect">
             <a:avLst/>
@@ -13281,8 +13340,8 @@
         </p:nvSpPr>
         <p:spPr>
           <a:xfrm>
-            <a:off x="1014984" y="2631320"/>
-            <a:ext cx="1920240" cy="261411"/>
+            <a:off x="1014984" y="2566775"/>
+            <a:ext cx="1920240" cy="239896"/>
           </a:xfrm>
           <a:prstGeom prst="rect">
             <a:avLst/>
@@ -13320,8 +13379,8 @@
         </p:nvSpPr>
         <p:spPr>
           <a:xfrm>
-            <a:off x="3785616" y="2701901"/>
-            <a:ext cx="667785" cy="120249"/>
+            <a:off x="3785616" y="2631546"/>
+            <a:ext cx="667785" cy="110352"/>
           </a:xfrm>
           <a:prstGeom prst="rect">
             <a:avLst/>
@@ -13340,8 +13399,8 @@
         </p:nvSpPr>
         <p:spPr>
           <a:xfrm>
-            <a:off x="4617720" y="2631320"/>
-            <a:ext cx="1234440" cy="261411"/>
+            <a:off x="4617720" y="2566775"/>
+            <a:ext cx="1234440" cy="239896"/>
           </a:xfrm>
           <a:prstGeom prst="rect">
             <a:avLst/>
@@ -13379,8 +13438,8 @@
         </p:nvSpPr>
         <p:spPr>
           <a:xfrm>
-            <a:off x="658368" y="2892731"/>
-            <a:ext cx="310896" cy="261411"/>
+            <a:off x="658368" y="2806670"/>
+            <a:ext cx="310896" cy="239896"/>
           </a:xfrm>
           <a:prstGeom prst="rect">
             <a:avLst/>
@@ -13418,8 +13477,8 @@
         </p:nvSpPr>
         <p:spPr>
           <a:xfrm>
-            <a:off x="1014984" y="2892731"/>
-            <a:ext cx="1920240" cy="261411"/>
+            <a:off x="1014984" y="2806670"/>
+            <a:ext cx="1920240" cy="239896"/>
           </a:xfrm>
           <a:prstGeom prst="rect">
             <a:avLst/>
@@ -13457,8 +13516,8 @@
         </p:nvSpPr>
         <p:spPr>
           <a:xfrm>
-            <a:off x="3785616" y="2963312"/>
-            <a:ext cx="642759" cy="120249"/>
+            <a:off x="3785616" y="2871442"/>
+            <a:ext cx="642759" cy="110352"/>
           </a:xfrm>
           <a:prstGeom prst="rect">
             <a:avLst/>
@@ -13477,8 +13536,8 @@
         </p:nvSpPr>
         <p:spPr>
           <a:xfrm>
-            <a:off x="4617720" y="2892731"/>
-            <a:ext cx="1234440" cy="261411"/>
+            <a:off x="4617720" y="2806670"/>
+            <a:ext cx="1234440" cy="239896"/>
           </a:xfrm>
           <a:prstGeom prst="rect">
             <a:avLst/>
@@ -13516,8 +13575,8 @@
         </p:nvSpPr>
         <p:spPr>
           <a:xfrm>
-            <a:off x="658368" y="3154142"/>
-            <a:ext cx="310896" cy="261411"/>
+            <a:off x="658368" y="3046566"/>
+            <a:ext cx="310896" cy="239896"/>
           </a:xfrm>
           <a:prstGeom prst="rect">
             <a:avLst/>
@@ -13555,8 +13614,8 @@
         </p:nvSpPr>
         <p:spPr>
           <a:xfrm>
-            <a:off x="1014984" y="3154142"/>
-            <a:ext cx="1920240" cy="261411"/>
+            <a:off x="1014984" y="3046566"/>
+            <a:ext cx="1920240" cy="239896"/>
           </a:xfrm>
           <a:prstGeom prst="rect">
             <a:avLst/>
@@ -13594,8 +13653,8 @@
         </p:nvSpPr>
         <p:spPr>
           <a:xfrm>
-            <a:off x="3785616" y="3224723"/>
-            <a:ext cx="457956" cy="120249"/>
+            <a:off x="3785616" y="3111337"/>
+            <a:ext cx="457956" cy="110352"/>
           </a:xfrm>
           <a:prstGeom prst="rect">
             <a:avLst/>
@@ -13614,8 +13673,8 @@
         </p:nvSpPr>
         <p:spPr>
           <a:xfrm>
-            <a:off x="4617720" y="3154142"/>
-            <a:ext cx="1234440" cy="261411"/>
+            <a:off x="4617720" y="3046566"/>
+            <a:ext cx="1234440" cy="239896"/>
           </a:xfrm>
           <a:prstGeom prst="rect">
             <a:avLst/>
@@ -13653,8 +13712,8 @@
         </p:nvSpPr>
         <p:spPr>
           <a:xfrm>
-            <a:off x="658368" y="3415553"/>
-            <a:ext cx="310896" cy="261411"/>
+            <a:off x="658368" y="3286461"/>
+            <a:ext cx="310896" cy="239896"/>
           </a:xfrm>
           <a:prstGeom prst="rect">
             <a:avLst/>
@@ -13692,8 +13751,8 @@
         </p:nvSpPr>
         <p:spPr>
           <a:xfrm>
-            <a:off x="1014984" y="3415553"/>
-            <a:ext cx="1920240" cy="261411"/>
+            <a:off x="1014984" y="3286461"/>
+            <a:ext cx="1920240" cy="239896"/>
           </a:xfrm>
           <a:prstGeom prst="rect">
             <a:avLst/>
@@ -13731,8 +13790,8 @@
         </p:nvSpPr>
         <p:spPr>
           <a:xfrm>
-            <a:off x="3785616" y="3486134"/>
-            <a:ext cx="385898" cy="120249"/>
+            <a:off x="3785616" y="3351233"/>
+            <a:ext cx="385898" cy="110352"/>
           </a:xfrm>
           <a:prstGeom prst="rect">
             <a:avLst/>
@@ -13751,8 +13810,8 @@
         </p:nvSpPr>
         <p:spPr>
           <a:xfrm>
-            <a:off x="4617720" y="3415553"/>
-            <a:ext cx="1234440" cy="261411"/>
+            <a:off x="4617720" y="3286461"/>
+            <a:ext cx="1234440" cy="239896"/>
           </a:xfrm>
           <a:prstGeom prst="rect">
             <a:avLst/>
@@ -13790,8 +13849,8 @@
         </p:nvSpPr>
         <p:spPr>
           <a:xfrm>
-            <a:off x="658368" y="3676964"/>
-            <a:ext cx="310896" cy="261411"/>
+            <a:off x="658368" y="3526357"/>
+            <a:ext cx="310896" cy="239896"/>
           </a:xfrm>
           <a:prstGeom prst="rect">
             <a:avLst/>
@@ -13829,8 +13888,8 @@
         </p:nvSpPr>
         <p:spPr>
           <a:xfrm>
-            <a:off x="1014984" y="3676964"/>
-            <a:ext cx="1920240" cy="261411"/>
+            <a:off x="1014984" y="3526357"/>
+            <a:ext cx="1920240" cy="239896"/>
           </a:xfrm>
           <a:prstGeom prst="rect">
             <a:avLst/>
@@ -13868,8 +13927,8 @@
         </p:nvSpPr>
         <p:spPr>
           <a:xfrm>
-            <a:off x="3785616" y="3747545"/>
-            <a:ext cx="311681" cy="120249"/>
+            <a:off x="3785616" y="3591128"/>
+            <a:ext cx="311681" cy="110352"/>
           </a:xfrm>
           <a:prstGeom prst="rect">
             <a:avLst/>
@@ -13888,8 +13947,8 @@
         </p:nvSpPr>
         <p:spPr>
           <a:xfrm>
-            <a:off x="4617720" y="3676964"/>
-            <a:ext cx="1234440" cy="261411"/>
+            <a:off x="4617720" y="3526357"/>
+            <a:ext cx="1234440" cy="239896"/>
           </a:xfrm>
           <a:prstGeom prst="rect">
             <a:avLst/>
@@ -13927,8 +13986,8 @@
         </p:nvSpPr>
         <p:spPr>
           <a:xfrm>
-            <a:off x="658368" y="3938375"/>
-            <a:ext cx="310896" cy="261411"/>
+            <a:off x="658368" y="3766252"/>
+            <a:ext cx="310896" cy="239896"/>
           </a:xfrm>
           <a:prstGeom prst="rect">
             <a:avLst/>
@@ -13966,8 +14025,8 @@
         </p:nvSpPr>
         <p:spPr>
           <a:xfrm>
-            <a:off x="1014984" y="3938375"/>
-            <a:ext cx="1920240" cy="261411"/>
+            <a:off x="1014984" y="3766252"/>
+            <a:ext cx="1920240" cy="239896"/>
           </a:xfrm>
           <a:prstGeom prst="rect">
             <a:avLst/>
@@ -14005,8 +14064,8 @@
         </p:nvSpPr>
         <p:spPr>
           <a:xfrm>
-            <a:off x="3785616" y="4008956"/>
-            <a:ext cx="305606" cy="120249"/>
+            <a:off x="3785616" y="3831024"/>
+            <a:ext cx="305606" cy="110352"/>
           </a:xfrm>
           <a:prstGeom prst="rect">
             <a:avLst/>
@@ -14025,8 +14084,8 @@
         </p:nvSpPr>
         <p:spPr>
           <a:xfrm>
-            <a:off x="4617720" y="3938375"/>
-            <a:ext cx="1234440" cy="261411"/>
+            <a:off x="4617720" y="3766252"/>
+            <a:ext cx="1234440" cy="239896"/>
           </a:xfrm>
           <a:prstGeom prst="rect">
             <a:avLst/>
@@ -14064,8 +14123,8 @@
         </p:nvSpPr>
         <p:spPr>
           <a:xfrm>
-            <a:off x="658368" y="4199785"/>
-            <a:ext cx="310896" cy="261411"/>
+            <a:off x="658368" y="4006148"/>
+            <a:ext cx="310896" cy="239896"/>
           </a:xfrm>
           <a:prstGeom prst="rect">
             <a:avLst/>
@@ -14103,8 +14162,8 @@
         </p:nvSpPr>
         <p:spPr>
           <a:xfrm>
-            <a:off x="1014984" y="4199785"/>
-            <a:ext cx="1920240" cy="261411"/>
+            <a:off x="1014984" y="4006148"/>
+            <a:ext cx="1920240" cy="239896"/>
           </a:xfrm>
           <a:prstGeom prst="rect">
             <a:avLst/>
@@ -14142,8 +14201,8 @@
         </p:nvSpPr>
         <p:spPr>
           <a:xfrm>
-            <a:off x="3785616" y="4270366"/>
-            <a:ext cx="284145" cy="120249"/>
+            <a:off x="3785616" y="4070920"/>
+            <a:ext cx="284145" cy="110352"/>
           </a:xfrm>
           <a:prstGeom prst="rect">
             <a:avLst/>
@@ -14162,8 +14221,8 @@
         </p:nvSpPr>
         <p:spPr>
           <a:xfrm>
-            <a:off x="4617720" y="4199785"/>
-            <a:ext cx="1234440" cy="261411"/>
+            <a:off x="4617720" y="4006148"/>
+            <a:ext cx="1234440" cy="239896"/>
           </a:xfrm>
           <a:prstGeom prst="rect">
             <a:avLst/>
@@ -14201,8 +14260,8 @@
         </p:nvSpPr>
         <p:spPr>
           <a:xfrm>
-            <a:off x="658368" y="4461196"/>
-            <a:ext cx="310896" cy="261411"/>
+            <a:off x="658368" y="4246043"/>
+            <a:ext cx="310896" cy="239896"/>
           </a:xfrm>
           <a:prstGeom prst="rect">
             <a:avLst/>
@@ -14240,8 +14299,8 @@
         </p:nvSpPr>
         <p:spPr>
           <a:xfrm>
-            <a:off x="1014984" y="4461196"/>
-            <a:ext cx="1920240" cy="261411"/>
+            <a:off x="1014984" y="4246043"/>
+            <a:ext cx="1920240" cy="239896"/>
           </a:xfrm>
           <a:prstGeom prst="rect">
             <a:avLst/>
@@ -14279,8 +14338,8 @@
         </p:nvSpPr>
         <p:spPr>
           <a:xfrm>
-            <a:off x="3785616" y="4531777"/>
-            <a:ext cx="231565" cy="120249"/>
+            <a:off x="3785616" y="4310815"/>
+            <a:ext cx="231565" cy="110352"/>
           </a:xfrm>
           <a:prstGeom prst="rect">
             <a:avLst/>
@@ -14299,8 +14358,8 @@
         </p:nvSpPr>
         <p:spPr>
           <a:xfrm>
-            <a:off x="4617720" y="4461196"/>
-            <a:ext cx="1234440" cy="261411"/>
+            <a:off x="4617720" y="4246043"/>
+            <a:ext cx="1234440" cy="239896"/>
           </a:xfrm>
           <a:prstGeom prst="rect">
             <a:avLst/>
@@ -14338,8 +14397,8 @@
         </p:nvSpPr>
         <p:spPr>
           <a:xfrm>
-            <a:off x="658368" y="4722607"/>
-            <a:ext cx="310896" cy="261411"/>
+            <a:off x="658368" y="4485939"/>
+            <a:ext cx="310896" cy="239896"/>
           </a:xfrm>
           <a:prstGeom prst="rect">
             <a:avLst/>
@@ -14377,8 +14436,8 @@
         </p:nvSpPr>
         <p:spPr>
           <a:xfrm>
-            <a:off x="1014984" y="4722607"/>
-            <a:ext cx="1920240" cy="261411"/>
+            <a:off x="1014984" y="4485939"/>
+            <a:ext cx="1920240" cy="239896"/>
           </a:xfrm>
           <a:prstGeom prst="rect">
             <a:avLst/>
@@ -14416,8 +14475,8 @@
         </p:nvSpPr>
         <p:spPr>
           <a:xfrm>
-            <a:off x="3785616" y="4793188"/>
-            <a:ext cx="181969" cy="120249"/>
+            <a:off x="3785616" y="4550711"/>
+            <a:ext cx="181969" cy="110352"/>
           </a:xfrm>
           <a:prstGeom prst="rect">
             <a:avLst/>
@@ -14436,8 +14495,8 @@
         </p:nvSpPr>
         <p:spPr>
           <a:xfrm>
-            <a:off x="4617720" y="4722607"/>
-            <a:ext cx="1234440" cy="261411"/>
+            <a:off x="4617720" y="4485939"/>
+            <a:ext cx="1234440" cy="239896"/>
           </a:xfrm>
           <a:prstGeom prst="rect">
             <a:avLst/>
@@ -14475,8 +14534,8 @@
         </p:nvSpPr>
         <p:spPr>
           <a:xfrm>
-            <a:off x="658368" y="4984018"/>
-            <a:ext cx="310896" cy="261411"/>
+            <a:off x="658368" y="4725834"/>
+            <a:ext cx="310896" cy="239896"/>
           </a:xfrm>
           <a:prstGeom prst="rect">
             <a:avLst/>
@@ -14514,8 +14573,8 @@
         </p:nvSpPr>
         <p:spPr>
           <a:xfrm>
-            <a:off x="1014984" y="4984018"/>
-            <a:ext cx="1920240" cy="261411"/>
+            <a:off x="1014984" y="4725834"/>
+            <a:ext cx="1920240" cy="239896"/>
           </a:xfrm>
           <a:prstGeom prst="rect">
             <a:avLst/>
@@ -14553,8 +14612,8 @@
         </p:nvSpPr>
         <p:spPr>
           <a:xfrm>
-            <a:off x="3785616" y="5054599"/>
-            <a:ext cx="175356" cy="120249"/>
+            <a:off x="3785616" y="4790606"/>
+            <a:ext cx="175356" cy="110352"/>
           </a:xfrm>
           <a:prstGeom prst="rect">
             <a:avLst/>
@@ -14573,8 +14632,8 @@
         </p:nvSpPr>
         <p:spPr>
           <a:xfrm>
-            <a:off x="4617720" y="4984018"/>
-            <a:ext cx="1234440" cy="261411"/>
+            <a:off x="4617720" y="4725834"/>
+            <a:ext cx="1234440" cy="239896"/>
           </a:xfrm>
           <a:prstGeom prst="rect">
             <a:avLst/>
@@ -14612,8 +14671,8 @@
         </p:nvSpPr>
         <p:spPr>
           <a:xfrm>
-            <a:off x="658368" y="5245429"/>
-            <a:ext cx="310896" cy="261411"/>
+            <a:off x="658368" y="4965730"/>
+            <a:ext cx="310896" cy="239896"/>
           </a:xfrm>
           <a:prstGeom prst="rect">
             <a:avLst/>
@@ -14651,8 +14710,8 @@
         </p:nvSpPr>
         <p:spPr>
           <a:xfrm>
-            <a:off x="1014984" y="5245429"/>
-            <a:ext cx="1920240" cy="261411"/>
+            <a:off x="1014984" y="4965730"/>
+            <a:ext cx="1920240" cy="239896"/>
           </a:xfrm>
           <a:prstGeom prst="rect">
             <a:avLst/>
@@ -14690,8 +14749,8 @@
         </p:nvSpPr>
         <p:spPr>
           <a:xfrm>
-            <a:off x="3785616" y="5316010"/>
-            <a:ext cx="92081" cy="120249"/>
+            <a:off x="3785616" y="5030502"/>
+            <a:ext cx="92081" cy="110352"/>
           </a:xfrm>
           <a:prstGeom prst="rect">
             <a:avLst/>
@@ -14710,8 +14769,8 @@
         </p:nvSpPr>
         <p:spPr>
           <a:xfrm>
-            <a:off x="4617720" y="5245429"/>
-            <a:ext cx="1234440" cy="261411"/>
+            <a:off x="4617720" y="4965730"/>
+            <a:ext cx="1234440" cy="239896"/>
           </a:xfrm>
           <a:prstGeom prst="rect">
             <a:avLst/>
@@ -14749,8 +14808,8 @@
         </p:nvSpPr>
         <p:spPr>
           <a:xfrm>
-            <a:off x="658368" y="5506840"/>
-            <a:ext cx="310896" cy="261411"/>
+            <a:off x="658368" y="5205625"/>
+            <a:ext cx="310896" cy="239896"/>
           </a:xfrm>
           <a:prstGeom prst="rect">
             <a:avLst/>
@@ -14788,8 +14847,8 @@
         </p:nvSpPr>
         <p:spPr>
           <a:xfrm>
-            <a:off x="1014984" y="5506840"/>
-            <a:ext cx="1920240" cy="261411"/>
+            <a:off x="1014984" y="5205625"/>
+            <a:ext cx="1920240" cy="239896"/>
           </a:xfrm>
           <a:prstGeom prst="rect">
             <a:avLst/>
@@ -14827,8 +14886,8 @@
         </p:nvSpPr>
         <p:spPr>
           <a:xfrm>
-            <a:off x="3785616" y="5577420"/>
-            <a:ext cx="74077" cy="120249"/>
+            <a:off x="3785616" y="5270397"/>
+            <a:ext cx="74077" cy="110352"/>
           </a:xfrm>
           <a:prstGeom prst="rect">
             <a:avLst/>
@@ -14847,8 +14906,8 @@
         </p:nvSpPr>
         <p:spPr>
           <a:xfrm>
-            <a:off x="4617720" y="5506840"/>
-            <a:ext cx="1234440" cy="261411"/>
+            <a:off x="4617720" y="5205625"/>
+            <a:ext cx="1234440" cy="239896"/>
           </a:xfrm>
           <a:prstGeom prst="rect">
             <a:avLst/>
@@ -14886,8 +14945,8 @@
         </p:nvSpPr>
         <p:spPr>
           <a:xfrm>
-            <a:off x="658368" y="5768250"/>
-            <a:ext cx="310896" cy="261411"/>
+            <a:off x="658368" y="5445521"/>
+            <a:ext cx="310896" cy="239896"/>
           </a:xfrm>
           <a:prstGeom prst="rect">
             <a:avLst/>
@@ -14925,8 +14984,8 @@
         </p:nvSpPr>
         <p:spPr>
           <a:xfrm>
-            <a:off x="1014984" y="5768250"/>
-            <a:ext cx="1920240" cy="261411"/>
+            <a:off x="1014984" y="5445521"/>
+            <a:ext cx="1920240" cy="239896"/>
           </a:xfrm>
           <a:prstGeom prst="rect">
             <a:avLst/>
@@ -14964,8 +15023,8 @@
         </p:nvSpPr>
         <p:spPr>
           <a:xfrm>
-            <a:off x="3785616" y="5838831"/>
-            <a:ext cx="54365" cy="120249"/>
+            <a:off x="3785616" y="5510293"/>
+            <a:ext cx="54365" cy="110352"/>
           </a:xfrm>
           <a:prstGeom prst="rect">
             <a:avLst/>
@@ -14984,8 +15043,8 @@
         </p:nvSpPr>
         <p:spPr>
           <a:xfrm>
-            <a:off x="4617720" y="5768250"/>
-            <a:ext cx="1234440" cy="261411"/>
+            <a:off x="4617720" y="5445521"/>
+            <a:ext cx="1234440" cy="239896"/>
           </a:xfrm>
           <a:prstGeom prst="rect">
             <a:avLst/>
@@ -15023,8 +15082,8 @@
         </p:nvSpPr>
         <p:spPr>
           <a:xfrm>
-            <a:off x="658368" y="6029661"/>
-            <a:ext cx="310896" cy="261411"/>
+            <a:off x="658368" y="5685416"/>
+            <a:ext cx="310896" cy="239896"/>
           </a:xfrm>
           <a:prstGeom prst="rect">
             <a:avLst/>
@@ -15062,8 +15121,8 @@
         </p:nvSpPr>
         <p:spPr>
           <a:xfrm>
-            <a:off x="1014984" y="6029661"/>
-            <a:ext cx="1920240" cy="261411"/>
+            <a:off x="1014984" y="5685416"/>
+            <a:ext cx="1920240" cy="239896"/>
           </a:xfrm>
           <a:prstGeom prst="rect">
             <a:avLst/>
@@ -15101,8 +15160,8 @@
         </p:nvSpPr>
         <p:spPr>
           <a:xfrm>
-            <a:off x="3785616" y="6100242"/>
-            <a:ext cx="16625" cy="120249"/>
+            <a:off x="3785616" y="5750188"/>
+            <a:ext cx="16625" cy="110352"/>
           </a:xfrm>
           <a:prstGeom prst="rect">
             <a:avLst/>
@@ -15121,8 +15180,8 @@
         </p:nvSpPr>
         <p:spPr>
           <a:xfrm>
-            <a:off x="4617720" y="6029661"/>
-            <a:ext cx="1234440" cy="261411"/>
+            <a:off x="4617720" y="5685416"/>
+            <a:ext cx="1234440" cy="239896"/>
           </a:xfrm>
           <a:prstGeom prst="rect">
             <a:avLst/>
@@ -15161,7 +15220,7 @@
         <p:spPr>
           <a:xfrm>
             <a:off x="6208776" y="1847088"/>
-            <a:ext cx="310896" cy="261411"/>
+            <a:ext cx="310896" cy="239896"/>
           </a:xfrm>
           <a:prstGeom prst="rect">
             <a:avLst/>
@@ -15200,7 +15259,7 @@
         <p:spPr>
           <a:xfrm>
             <a:off x="6565392" y="1847088"/>
-            <a:ext cx="1920240" cy="261411"/>
+            <a:ext cx="1920240" cy="239896"/>
           </a:xfrm>
           <a:prstGeom prst="rect">
             <a:avLst/>
@@ -15238,8 +15297,8 @@
         </p:nvSpPr>
         <p:spPr>
           <a:xfrm>
-            <a:off x="9336024" y="1917669"/>
-            <a:ext cx="12802" cy="120249"/>
+            <a:off x="9336024" y="1911860"/>
+            <a:ext cx="12802" cy="110352"/>
           </a:xfrm>
           <a:prstGeom prst="rect">
             <a:avLst/>
@@ -15259,7 +15318,7 @@
         <p:spPr>
           <a:xfrm>
             <a:off x="10168128" y="1847088"/>
-            <a:ext cx="1234440" cy="261411"/>
+            <a:ext cx="1234440" cy="239896"/>
           </a:xfrm>
           <a:prstGeom prst="rect">
             <a:avLst/>
@@ -15297,8 +15356,8 @@
         </p:nvSpPr>
         <p:spPr>
           <a:xfrm>
-            <a:off x="6208776" y="2108499"/>
-            <a:ext cx="310896" cy="261411"/>
+            <a:off x="6208776" y="2086984"/>
+            <a:ext cx="310896" cy="239896"/>
           </a:xfrm>
           <a:prstGeom prst="rect">
             <a:avLst/>
@@ -15336,8 +15395,8 @@
         </p:nvSpPr>
         <p:spPr>
           <a:xfrm>
-            <a:off x="6565392" y="2108499"/>
-            <a:ext cx="1920240" cy="261411"/>
+            <a:off x="6565392" y="2086984"/>
+            <a:ext cx="1920240" cy="239896"/>
           </a:xfrm>
           <a:prstGeom prst="rect">
             <a:avLst/>
@@ -15375,8 +15434,8 @@
         </p:nvSpPr>
         <p:spPr>
           <a:xfrm>
-            <a:off x="9336024" y="2179080"/>
-            <a:ext cx="12802" cy="120249"/>
+            <a:off x="9336024" y="2151755"/>
+            <a:ext cx="12802" cy="110352"/>
           </a:xfrm>
           <a:prstGeom prst="rect">
             <a:avLst/>
@@ -15395,8 +15454,8 @@
         </p:nvSpPr>
         <p:spPr>
           <a:xfrm>
-            <a:off x="10168128" y="2108499"/>
-            <a:ext cx="1234440" cy="261411"/>
+            <a:off x="10168128" y="2086984"/>
+            <a:ext cx="1234440" cy="239896"/>
           </a:xfrm>
           <a:prstGeom prst="rect">
             <a:avLst/>
@@ -15434,8 +15493,8 @@
         </p:nvSpPr>
         <p:spPr>
           <a:xfrm>
-            <a:off x="6208776" y="2369910"/>
-            <a:ext cx="310896" cy="261411"/>
+            <a:off x="6208776" y="2326879"/>
+            <a:ext cx="310896" cy="239896"/>
           </a:xfrm>
           <a:prstGeom prst="rect">
             <a:avLst/>
@@ -15473,8 +15532,8 @@
         </p:nvSpPr>
         <p:spPr>
           <a:xfrm>
-            <a:off x="6565392" y="2369910"/>
-            <a:ext cx="1920240" cy="261411"/>
+            <a:off x="6565392" y="2326879"/>
+            <a:ext cx="1920240" cy="239896"/>
           </a:xfrm>
           <a:prstGeom prst="rect">
             <a:avLst/>
@@ -15512,8 +15571,8 @@
         </p:nvSpPr>
         <p:spPr>
           <a:xfrm>
-            <a:off x="9331272" y="2440491"/>
-            <a:ext cx="12802" cy="120249"/>
+            <a:off x="9331272" y="2391651"/>
+            <a:ext cx="12802" cy="110352"/>
           </a:xfrm>
           <a:prstGeom prst="rect">
             <a:avLst/>
@@ -15532,8 +15591,8 @@
         </p:nvSpPr>
         <p:spPr>
           <a:xfrm>
-            <a:off x="10168128" y="2369910"/>
-            <a:ext cx="1234440" cy="261411"/>
+            <a:off x="10168128" y="2326879"/>
+            <a:ext cx="1234440" cy="239896"/>
           </a:xfrm>
           <a:prstGeom prst="rect">
             <a:avLst/>
@@ -15571,8 +15630,8 @@
         </p:nvSpPr>
         <p:spPr>
           <a:xfrm>
-            <a:off x="6208776" y="2631320"/>
-            <a:ext cx="310896" cy="261411"/>
+            <a:off x="6208776" y="2566775"/>
+            <a:ext cx="310896" cy="239896"/>
           </a:xfrm>
           <a:prstGeom prst="rect">
             <a:avLst/>
@@ -15610,8 +15669,8 @@
         </p:nvSpPr>
         <p:spPr>
           <a:xfrm>
-            <a:off x="6565392" y="2631320"/>
-            <a:ext cx="1920240" cy="261411"/>
+            <a:off x="6565392" y="2566775"/>
+            <a:ext cx="1920240" cy="239896"/>
           </a:xfrm>
           <a:prstGeom prst="rect">
             <a:avLst/>
@@ -15649,8 +15708,8 @@
         </p:nvSpPr>
         <p:spPr>
           <a:xfrm>
-            <a:off x="9318561" y="2701901"/>
-            <a:ext cx="17463" cy="120249"/>
+            <a:off x="9318561" y="2631546"/>
+            <a:ext cx="17463" cy="110352"/>
           </a:xfrm>
           <a:prstGeom prst="rect">
             <a:avLst/>
@@ -15669,8 +15728,8 @@
         </p:nvSpPr>
         <p:spPr>
           <a:xfrm>
-            <a:off x="10168128" y="2631320"/>
-            <a:ext cx="1234440" cy="261411"/>
+            <a:off x="10168128" y="2566775"/>
+            <a:ext cx="1234440" cy="239896"/>
           </a:xfrm>
           <a:prstGeom prst="rect">
             <a:avLst/>
@@ -15708,8 +15767,8 @@
         </p:nvSpPr>
         <p:spPr>
           <a:xfrm>
-            <a:off x="6208776" y="2892731"/>
-            <a:ext cx="310896" cy="261411"/>
+            <a:off x="6208776" y="2806670"/>
+            <a:ext cx="310896" cy="239896"/>
           </a:xfrm>
           <a:prstGeom prst="rect">
             <a:avLst/>
@@ -15747,8 +15806,8 @@
         </p:nvSpPr>
         <p:spPr>
           <a:xfrm>
-            <a:off x="6565392" y="2892731"/>
-            <a:ext cx="1920240" cy="261411"/>
+            <a:off x="6565392" y="2806670"/>
+            <a:ext cx="1920240" cy="239896"/>
           </a:xfrm>
           <a:prstGeom prst="rect">
             <a:avLst/>
@@ -15786,8 +15845,8 @@
         </p:nvSpPr>
         <p:spPr>
           <a:xfrm>
-            <a:off x="9312447" y="2963312"/>
-            <a:ext cx="23577" cy="120249"/>
+            <a:off x="9312447" y="2871442"/>
+            <a:ext cx="23577" cy="110352"/>
           </a:xfrm>
           <a:prstGeom prst="rect">
             <a:avLst/>
@@ -15806,8 +15865,8 @@
         </p:nvSpPr>
         <p:spPr>
           <a:xfrm>
-            <a:off x="10168128" y="2892731"/>
-            <a:ext cx="1234440" cy="261411"/>
+            <a:off x="10168128" y="2806670"/>
+            <a:ext cx="1234440" cy="239896"/>
           </a:xfrm>
           <a:prstGeom prst="rect">
             <a:avLst/>
@@ -15845,8 +15904,8 @@
         </p:nvSpPr>
         <p:spPr>
           <a:xfrm>
-            <a:off x="6208776" y="3154142"/>
-            <a:ext cx="310896" cy="261411"/>
+            <a:off x="6208776" y="3046566"/>
+            <a:ext cx="310896" cy="239896"/>
           </a:xfrm>
           <a:prstGeom prst="rect">
             <a:avLst/>
@@ -15884,8 +15943,8 @@
         </p:nvSpPr>
         <p:spPr>
           <a:xfrm>
-            <a:off x="6565392" y="3154142"/>
-            <a:ext cx="1920240" cy="261411"/>
+            <a:off x="6565392" y="3046566"/>
+            <a:ext cx="1920240" cy="239896"/>
           </a:xfrm>
           <a:prstGeom prst="rect">
             <a:avLst/>
@@ -15923,8 +15982,8 @@
         </p:nvSpPr>
         <p:spPr>
           <a:xfrm>
-            <a:off x="9255154" y="3224723"/>
-            <a:ext cx="80870" cy="120249"/>
+            <a:off x="9255154" y="3111337"/>
+            <a:ext cx="80870" cy="110352"/>
           </a:xfrm>
           <a:prstGeom prst="rect">
             <a:avLst/>
@@ -15943,8 +16002,8 @@
         </p:nvSpPr>
         <p:spPr>
           <a:xfrm>
-            <a:off x="10168128" y="3154142"/>
-            <a:ext cx="1234440" cy="261411"/>
+            <a:off x="10168128" y="3046566"/>
+            <a:ext cx="1234440" cy="239896"/>
           </a:xfrm>
           <a:prstGeom prst="rect">
             <a:avLst/>
@@ -15982,8 +16041,8 @@
         </p:nvSpPr>
         <p:spPr>
           <a:xfrm>
-            <a:off x="6208776" y="3415553"/>
-            <a:ext cx="310896" cy="261411"/>
+            <a:off x="6208776" y="3286461"/>
+            <a:ext cx="310896" cy="239896"/>
           </a:xfrm>
           <a:prstGeom prst="rect">
             <a:avLst/>
@@ -16021,8 +16080,8 @@
         </p:nvSpPr>
         <p:spPr>
           <a:xfrm>
-            <a:off x="6565392" y="3415553"/>
-            <a:ext cx="1920240" cy="261411"/>
+            <a:off x="6565392" y="3286461"/>
+            <a:ext cx="1920240" cy="239896"/>
           </a:xfrm>
           <a:prstGeom prst="rect">
             <a:avLst/>
@@ -16060,8 +16119,8 @@
         </p:nvSpPr>
         <p:spPr>
           <a:xfrm>
-            <a:off x="9239288" y="3486134"/>
-            <a:ext cx="96736" cy="120249"/>
+            <a:off x="9239288" y="3351233"/>
+            <a:ext cx="96736" cy="110352"/>
           </a:xfrm>
           <a:prstGeom prst="rect">
             <a:avLst/>
@@ -16080,8 +16139,8 @@
         </p:nvSpPr>
         <p:spPr>
           <a:xfrm>
-            <a:off x="10168128" y="3415553"/>
-            <a:ext cx="1234440" cy="261411"/>
+            <a:off x="10168128" y="3286461"/>
+            <a:ext cx="1234440" cy="239896"/>
           </a:xfrm>
           <a:prstGeom prst="rect">
             <a:avLst/>
@@ -16119,8 +16178,8 @@
         </p:nvSpPr>
         <p:spPr>
           <a:xfrm>
-            <a:off x="6208776" y="3676964"/>
-            <a:ext cx="310896" cy="261411"/>
+            <a:off x="6208776" y="3526357"/>
+            <a:ext cx="310896" cy="239896"/>
           </a:xfrm>
           <a:prstGeom prst="rect">
             <a:avLst/>
@@ -16158,8 +16217,8 @@
         </p:nvSpPr>
         <p:spPr>
           <a:xfrm>
-            <a:off x="6565392" y="3676964"/>
-            <a:ext cx="1920240" cy="261411"/>
+            <a:off x="6565392" y="3526357"/>
+            <a:ext cx="1920240" cy="239896"/>
           </a:xfrm>
           <a:prstGeom prst="rect">
             <a:avLst/>
@@ -16197,8 +16256,8 @@
         </p:nvSpPr>
         <p:spPr>
           <a:xfrm>
-            <a:off x="9234185" y="3747545"/>
-            <a:ext cx="101839" cy="120249"/>
+            <a:off x="9234185" y="3591128"/>
+            <a:ext cx="101839" cy="110352"/>
           </a:xfrm>
           <a:prstGeom prst="rect">
             <a:avLst/>
@@ -16217,8 +16276,8 @@
         </p:nvSpPr>
         <p:spPr>
           <a:xfrm>
-            <a:off x="10168128" y="3676964"/>
-            <a:ext cx="1234440" cy="261411"/>
+            <a:off x="10168128" y="3526357"/>
+            <a:ext cx="1234440" cy="239896"/>
           </a:xfrm>
           <a:prstGeom prst="rect">
             <a:avLst/>
@@ -16256,8 +16315,8 @@
         </p:nvSpPr>
         <p:spPr>
           <a:xfrm>
-            <a:off x="6208776" y="3938375"/>
-            <a:ext cx="310896" cy="261411"/>
+            <a:off x="6208776" y="3766252"/>
+            <a:ext cx="310896" cy="239896"/>
           </a:xfrm>
           <a:prstGeom prst="rect">
             <a:avLst/>
@@ -16295,8 +16354,8 @@
         </p:nvSpPr>
         <p:spPr>
           <a:xfrm>
-            <a:off x="6565392" y="3938375"/>
-            <a:ext cx="1920240" cy="261411"/>
+            <a:off x="6565392" y="3766252"/>
+            <a:ext cx="1920240" cy="239896"/>
           </a:xfrm>
           <a:prstGeom prst="rect">
             <a:avLst/>
@@ -16334,8 +16393,8 @@
         </p:nvSpPr>
         <p:spPr>
           <a:xfrm>
-            <a:off x="9169807" y="4008956"/>
-            <a:ext cx="166217" cy="120249"/>
+            <a:off x="9169807" y="3831024"/>
+            <a:ext cx="166217" cy="110352"/>
           </a:xfrm>
           <a:prstGeom prst="rect">
             <a:avLst/>
@@ -16354,8 +16413,8 @@
         </p:nvSpPr>
         <p:spPr>
           <a:xfrm>
-            <a:off x="10168128" y="3938375"/>
-            <a:ext cx="1234440" cy="261411"/>
+            <a:off x="10168128" y="3766252"/>
+            <a:ext cx="1234440" cy="239896"/>
           </a:xfrm>
           <a:prstGeom prst="rect">
             <a:avLst/>
@@ -16393,8 +16452,8 @@
         </p:nvSpPr>
         <p:spPr>
           <a:xfrm>
-            <a:off x="6208776" y="4199785"/>
-            <a:ext cx="310896" cy="261411"/>
+            <a:off x="6208776" y="4006148"/>
+            <a:ext cx="310896" cy="239896"/>
           </a:xfrm>
           <a:prstGeom prst="rect">
             <a:avLst/>
@@ -16432,8 +16491,8 @@
         </p:nvSpPr>
         <p:spPr>
           <a:xfrm>
-            <a:off x="6565392" y="4199785"/>
-            <a:ext cx="1920240" cy="261411"/>
+            <a:off x="6565392" y="4006148"/>
+            <a:ext cx="1920240" cy="239896"/>
           </a:xfrm>
           <a:prstGeom prst="rect">
             <a:avLst/>
@@ -16471,8 +16530,8 @@
         </p:nvSpPr>
         <p:spPr>
           <a:xfrm>
-            <a:off x="9092399" y="4270366"/>
-            <a:ext cx="243625" cy="120249"/>
+            <a:off x="9092399" y="4070920"/>
+            <a:ext cx="243625" cy="110352"/>
           </a:xfrm>
           <a:prstGeom prst="rect">
             <a:avLst/>
@@ -16491,8 +16550,8 @@
         </p:nvSpPr>
         <p:spPr>
           <a:xfrm>
-            <a:off x="10168128" y="4199785"/>
-            <a:ext cx="1234440" cy="261411"/>
+            <a:off x="10168128" y="4006148"/>
+            <a:ext cx="1234440" cy="239896"/>
           </a:xfrm>
           <a:prstGeom prst="rect">
             <a:avLst/>
@@ -16530,8 +16589,8 @@
         </p:nvSpPr>
         <p:spPr>
           <a:xfrm>
-            <a:off x="6208776" y="4461196"/>
-            <a:ext cx="310896" cy="261411"/>
+            <a:off x="6208776" y="4246043"/>
+            <a:ext cx="310896" cy="239896"/>
           </a:xfrm>
           <a:prstGeom prst="rect">
             <a:avLst/>
@@ -16569,8 +16628,8 @@
         </p:nvSpPr>
         <p:spPr>
           <a:xfrm>
-            <a:off x="6565392" y="4461196"/>
-            <a:ext cx="1920240" cy="261411"/>
+            <a:off x="6565392" y="4246043"/>
+            <a:ext cx="1920240" cy="239896"/>
           </a:xfrm>
           <a:prstGeom prst="rect">
             <a:avLst/>
@@ -16608,8 +16667,8 @@
         </p:nvSpPr>
         <p:spPr>
           <a:xfrm>
-            <a:off x="9057340" y="4531777"/>
-            <a:ext cx="278684" cy="120249"/>
+            <a:off x="9057340" y="4310815"/>
+            <a:ext cx="278684" cy="110352"/>
           </a:xfrm>
           <a:prstGeom prst="rect">
             <a:avLst/>
@@ -16628,8 +16687,8 @@
         </p:nvSpPr>
         <p:spPr>
           <a:xfrm>
-            <a:off x="10168128" y="4461196"/>
-            <a:ext cx="1234440" cy="261411"/>
+            <a:off x="10168128" y="4246043"/>
+            <a:ext cx="1234440" cy="239896"/>
           </a:xfrm>
           <a:prstGeom prst="rect">
             <a:avLst/>
@@ -16667,8 +16726,8 @@
         </p:nvSpPr>
         <p:spPr>
           <a:xfrm>
-            <a:off x="6208776" y="4722607"/>
-            <a:ext cx="310896" cy="261411"/>
+            <a:off x="6208776" y="4485939"/>
+            <a:ext cx="310896" cy="239896"/>
           </a:xfrm>
           <a:prstGeom prst="rect">
             <a:avLst/>
@@ -16706,8 +16765,8 @@
         </p:nvSpPr>
         <p:spPr>
           <a:xfrm>
-            <a:off x="6565392" y="4722607"/>
-            <a:ext cx="1920240" cy="261411"/>
+            <a:off x="6565392" y="4485939"/>
+            <a:ext cx="1920240" cy="239896"/>
           </a:xfrm>
           <a:prstGeom prst="rect">
             <a:avLst/>
@@ -16745,8 +16804,8 @@
         </p:nvSpPr>
         <p:spPr>
           <a:xfrm>
-            <a:off x="9043690" y="4793188"/>
-            <a:ext cx="292334" cy="120249"/>
+            <a:off x="9043690" y="4550711"/>
+            <a:ext cx="292334" cy="110352"/>
           </a:xfrm>
           <a:prstGeom prst="rect">
             <a:avLst/>
@@ -16765,8 +16824,8 @@
         </p:nvSpPr>
         <p:spPr>
           <a:xfrm>
-            <a:off x="10168128" y="4722607"/>
-            <a:ext cx="1234440" cy="261411"/>
+            <a:off x="10168128" y="4485939"/>
+            <a:ext cx="1234440" cy="239896"/>
           </a:xfrm>
           <a:prstGeom prst="rect">
             <a:avLst/>
@@ -16804,8 +16863,8 @@
         </p:nvSpPr>
         <p:spPr>
           <a:xfrm>
-            <a:off x="6208776" y="4984018"/>
-            <a:ext cx="310896" cy="261411"/>
+            <a:off x="6208776" y="4725834"/>
+            <a:ext cx="310896" cy="239896"/>
           </a:xfrm>
           <a:prstGeom prst="rect">
             <a:avLst/>
@@ -16843,8 +16902,8 @@
         </p:nvSpPr>
         <p:spPr>
           <a:xfrm>
-            <a:off x="6565392" y="4984018"/>
-            <a:ext cx="1920240" cy="261411"/>
+            <a:off x="6565392" y="4725834"/>
+            <a:ext cx="1920240" cy="239896"/>
           </a:xfrm>
           <a:prstGeom prst="rect">
             <a:avLst/>
@@ -16882,8 +16941,8 @@
         </p:nvSpPr>
         <p:spPr>
           <a:xfrm>
-            <a:off x="8923753" y="5054599"/>
-            <a:ext cx="412271" cy="120249"/>
+            <a:off x="8923753" y="4790606"/>
+            <a:ext cx="412271" cy="110352"/>
           </a:xfrm>
           <a:prstGeom prst="rect">
             <a:avLst/>
@@ -16902,8 +16961,8 @@
         </p:nvSpPr>
         <p:spPr>
           <a:xfrm>
-            <a:off x="10168128" y="4984018"/>
-            <a:ext cx="1234440" cy="261411"/>
+            <a:off x="10168128" y="4725834"/>
+            <a:ext cx="1234440" cy="239896"/>
           </a:xfrm>
           <a:prstGeom prst="rect">
             <a:avLst/>
@@ -16941,8 +17000,8 @@
         </p:nvSpPr>
         <p:spPr>
           <a:xfrm>
-            <a:off x="6208776" y="5245429"/>
-            <a:ext cx="310896" cy="261411"/>
+            <a:off x="6208776" y="4965730"/>
+            <a:ext cx="310896" cy="239896"/>
           </a:xfrm>
           <a:prstGeom prst="rect">
             <a:avLst/>
@@ -16980,8 +17039,8 @@
         </p:nvSpPr>
         <p:spPr>
           <a:xfrm>
-            <a:off x="6565392" y="5245429"/>
-            <a:ext cx="1920240" cy="261411"/>
+            <a:off x="6565392" y="4965730"/>
+            <a:ext cx="1920240" cy="239896"/>
           </a:xfrm>
           <a:prstGeom prst="rect">
             <a:avLst/>
@@ -17019,8 +17078,8 @@
         </p:nvSpPr>
         <p:spPr>
           <a:xfrm>
-            <a:off x="8868856" y="5316010"/>
-            <a:ext cx="467168" cy="120249"/>
+            <a:off x="8868856" y="5030502"/>
+            <a:ext cx="467168" cy="110352"/>
           </a:xfrm>
           <a:prstGeom prst="rect">
             <a:avLst/>
@@ -17039,8 +17098,8 @@
         </p:nvSpPr>
         <p:spPr>
           <a:xfrm>
-            <a:off x="10168128" y="5245429"/>
-            <a:ext cx="1234440" cy="261411"/>
+            <a:off x="10168128" y="4965730"/>
+            <a:ext cx="1234440" cy="239896"/>
           </a:xfrm>
           <a:prstGeom prst="rect">
             <a:avLst/>
@@ -17078,8 +17137,8 @@
         </p:nvSpPr>
         <p:spPr>
           <a:xfrm>
-            <a:off x="6208776" y="5506840"/>
-            <a:ext cx="310896" cy="261411"/>
+            <a:off x="6208776" y="5205625"/>
+            <a:ext cx="310896" cy="239896"/>
           </a:xfrm>
           <a:prstGeom prst="rect">
             <a:avLst/>
@@ -17117,8 +17176,8 @@
         </p:nvSpPr>
         <p:spPr>
           <a:xfrm>
-            <a:off x="6565392" y="5506840"/>
-            <a:ext cx="1920240" cy="261411"/>
+            <a:off x="6565392" y="5205625"/>
+            <a:ext cx="1920240" cy="239896"/>
           </a:xfrm>
           <a:prstGeom prst="rect">
             <a:avLst/>
@@ -17156,8 +17215,8 @@
         </p:nvSpPr>
         <p:spPr>
           <a:xfrm>
-            <a:off x="8843092" y="5577420"/>
-            <a:ext cx="492932" cy="120249"/>
+            <a:off x="8843092" y="5270397"/>
+            <a:ext cx="492932" cy="110352"/>
           </a:xfrm>
           <a:prstGeom prst="rect">
             <a:avLst/>
@@ -17176,8 +17235,8 @@
         </p:nvSpPr>
         <p:spPr>
           <a:xfrm>
-            <a:off x="10168128" y="5506840"/>
-            <a:ext cx="1234440" cy="261411"/>
+            <a:off x="10168128" y="5205625"/>
+            <a:ext cx="1234440" cy="239896"/>
           </a:xfrm>
           <a:prstGeom prst="rect">
             <a:avLst/>
@@ -17215,8 +17274,8 @@
         </p:nvSpPr>
         <p:spPr>
           <a:xfrm>
-            <a:off x="6208776" y="5768250"/>
-            <a:ext cx="310896" cy="261411"/>
+            <a:off x="6208776" y="5445521"/>
+            <a:ext cx="310896" cy="239896"/>
           </a:xfrm>
           <a:prstGeom prst="rect">
             <a:avLst/>
@@ -17254,8 +17313,8 @@
         </p:nvSpPr>
         <p:spPr>
           <a:xfrm>
-            <a:off x="6565392" y="5768250"/>
-            <a:ext cx="1920240" cy="261411"/>
+            <a:off x="6565392" y="5445521"/>
+            <a:ext cx="1920240" cy="239896"/>
           </a:xfrm>
           <a:prstGeom prst="rect">
             <a:avLst/>
@@ -17293,8 +17352,8 @@
         </p:nvSpPr>
         <p:spPr>
           <a:xfrm>
-            <a:off x="8752645" y="5838831"/>
-            <a:ext cx="583379" cy="120249"/>
+            <a:off x="8752645" y="5510293"/>
+            <a:ext cx="583379" cy="110352"/>
           </a:xfrm>
           <a:prstGeom prst="rect">
             <a:avLst/>
@@ -17313,8 +17372,8 @@
         </p:nvSpPr>
         <p:spPr>
           <a:xfrm>
-            <a:off x="10168128" y="5768250"/>
-            <a:ext cx="1234440" cy="261411"/>
+            <a:off x="10168128" y="5445521"/>
+            <a:ext cx="1234440" cy="239896"/>
           </a:xfrm>
           <a:prstGeom prst="rect">
             <a:avLst/>
@@ -17353,7 +17412,7 @@
         <p:spPr>
           <a:xfrm>
             <a:off x="3780130" y="1847088"/>
-            <a:ext cx="10973" cy="4443984"/>
+            <a:ext cx="10973" cy="4078224"/>
           </a:xfrm>
           <a:prstGeom prst="rect">
             <a:avLst/>
@@ -17373,7 +17432,7 @@
         <p:spPr>
           <a:xfrm>
             <a:off x="9330538" y="1847088"/>
-            <a:ext cx="10973" cy="4443984"/>
+            <a:ext cx="10973" cy="4078224"/>
           </a:xfrm>
           <a:prstGeom prst="rect">
             <a:avLst/>
@@ -17393,7 +17452,7 @@
         <p:spPr>
           <a:xfrm>
             <a:off x="6085332" y="1847088"/>
-            <a:ext cx="10973" cy="4443984"/>
+            <a:ext cx="10973" cy="4078224"/>
           </a:xfrm>
           <a:prstGeom prst="rect">
             <a:avLst/>
@@ -17403,6 +17462,65 @@
           </a:solidFill>
           <a:ln/>
         </p:spPr>
+      </p:sp>
+      <p:sp>
+        <p:nvSpPr>
+          <p:cNvPr id="147" name="Shape 144"/>
+          <p:cNvSpPr/>
+          <p:nvPr/>
+        </p:nvSpPr>
+        <p:spPr>
+          <a:xfrm>
+            <a:off x="457200" y="6126480"/>
+            <a:ext cx="11274552" cy="371856"/>
+          </a:xfrm>
+          <a:prstGeom prst="rect">
+            <a:avLst/>
+          </a:prstGeom>
+          <a:solidFill>
+            <a:srgbClr val="FBEBEA"/>
+          </a:solidFill>
+          <a:ln/>
+        </p:spPr>
+      </p:sp>
+      <p:sp>
+        <p:nvSpPr>
+          <p:cNvPr id="148" name="Text 145"/>
+          <p:cNvSpPr txBox="1"/>
+          <p:nvPr/>
+        </p:nvSpPr>
+        <p:spPr>
+          <a:xfrm>
+            <a:off x="658368" y="6144768"/>
+            <a:ext cx="10927080" cy="335280"/>
+          </a:xfrm>
+          <a:prstGeom prst="rect">
+            <a:avLst/>
+          </a:prstGeom>
+          <a:noFill/>
+          <a:ln/>
+        </p:spPr>
+        <p:txBody>
+          <a:bodyPr wrap="square" lIns="0" tIns="0" rIns="0" bIns="0" rtlCol="0" anchor="ctr"/>
+          <a:lstStyle/>
+          <a:p>
+            <a:pPr indent="0" marL="0">
+              <a:buNone/>
+            </a:pPr>
+            <a:r>
+              <a:rPr lang="en-US" sz="1600" b="1" dirty="0">
+                <a:solidFill>
+                  <a:srgbClr val="A82B26"/>
+                </a:solidFill>
+                <a:latin typeface="Inter" pitchFamily="34" charset="0"/>
+                <a:ea typeface="Inter" pitchFamily="34" charset="-122"/>
+                <a:cs typeface="Inter" pitchFamily="34" charset="-120"/>
+              </a:rPr>
+              <a:t>19 of 33 stores raised customer-pay share. 14 declined.</a:t>
+            </a:r>
+            <a:endParaRPr lang="en-US" sz="1600" dirty="0"/>
+          </a:p>
+        </p:txBody>
       </p:sp>
     </p:spTree>
   </p:cSld>
@@ -28666,7 +28784,7 @@
         <p:spPr>
           <a:xfrm>
             <a:off x="457200" y="1207008"/>
-            <a:ext cx="11274552" cy="5148072"/>
+            <a:ext cx="11274552" cy="4782312"/>
           </a:xfrm>
           <a:prstGeom prst="rect">
             <a:avLst/>
@@ -28843,7 +28961,7 @@
         <p:spPr>
           <a:xfrm>
             <a:off x="658368" y="1847088"/>
-            <a:ext cx="310896" cy="261411"/>
+            <a:ext cx="310896" cy="239896"/>
           </a:xfrm>
           <a:prstGeom prst="rect">
             <a:avLst/>
@@ -28882,7 +29000,7 @@
         <p:spPr>
           <a:xfrm>
             <a:off x="1014984" y="1847088"/>
-            <a:ext cx="1920240" cy="261411"/>
+            <a:ext cx="1920240" cy="239896"/>
           </a:xfrm>
           <a:prstGeom prst="rect">
             <a:avLst/>
@@ -28920,8 +29038,8 @@
         </p:nvSpPr>
         <p:spPr>
           <a:xfrm>
-            <a:off x="3008376" y="1912441"/>
-            <a:ext cx="111888" cy="130705"/>
+            <a:off x="3008376" y="1907062"/>
+            <a:ext cx="111888" cy="119948"/>
           </a:xfrm>
           <a:prstGeom prst="rect">
             <a:avLst/>
@@ -28941,7 +29059,7 @@
         <p:spPr>
           <a:xfrm>
             <a:off x="4754880" y="1847088"/>
-            <a:ext cx="1143000" cy="261411"/>
+            <a:ext cx="1143000" cy="239896"/>
           </a:xfrm>
           <a:prstGeom prst="rect">
             <a:avLst/>
@@ -28979,8 +29097,8 @@
         </p:nvSpPr>
         <p:spPr>
           <a:xfrm>
-            <a:off x="658368" y="2108499"/>
-            <a:ext cx="310896" cy="261411"/>
+            <a:off x="658368" y="2086984"/>
+            <a:ext cx="310896" cy="239896"/>
           </a:xfrm>
           <a:prstGeom prst="rect">
             <a:avLst/>
@@ -29018,8 +29136,8 @@
         </p:nvSpPr>
         <p:spPr>
           <a:xfrm>
-            <a:off x="1014984" y="2108499"/>
-            <a:ext cx="1920240" cy="261411"/>
+            <a:off x="1014984" y="2086984"/>
+            <a:ext cx="1920240" cy="239896"/>
           </a:xfrm>
           <a:prstGeom prst="rect">
             <a:avLst/>
@@ -29057,8 +29175,8 @@
         </p:nvSpPr>
         <p:spPr>
           <a:xfrm>
-            <a:off x="3008376" y="2173852"/>
-            <a:ext cx="122544" cy="130705"/>
+            <a:off x="3008376" y="2146957"/>
+            <a:ext cx="122544" cy="119948"/>
           </a:xfrm>
           <a:prstGeom prst="rect">
             <a:avLst/>
@@ -29077,8 +29195,8 @@
         </p:nvSpPr>
         <p:spPr>
           <a:xfrm>
-            <a:off x="4754880" y="2108499"/>
-            <a:ext cx="1143000" cy="261411"/>
+            <a:off x="4754880" y="2086984"/>
+            <a:ext cx="1143000" cy="239896"/>
           </a:xfrm>
           <a:prstGeom prst="rect">
             <a:avLst/>
@@ -29116,8 +29234,8 @@
         </p:nvSpPr>
         <p:spPr>
           <a:xfrm>
-            <a:off x="658368" y="2369910"/>
-            <a:ext cx="310896" cy="261411"/>
+            <a:off x="658368" y="2326879"/>
+            <a:ext cx="310896" cy="239896"/>
           </a:xfrm>
           <a:prstGeom prst="rect">
             <a:avLst/>
@@ -29155,8 +29273,8 @@
         </p:nvSpPr>
         <p:spPr>
           <a:xfrm>
-            <a:off x="1014984" y="2369910"/>
-            <a:ext cx="1920240" cy="261411"/>
+            <a:off x="1014984" y="2326879"/>
+            <a:ext cx="1920240" cy="239896"/>
           </a:xfrm>
           <a:prstGeom prst="rect">
             <a:avLst/>
@@ -29194,8 +29312,8 @@
         </p:nvSpPr>
         <p:spPr>
           <a:xfrm>
-            <a:off x="3008376" y="2435262"/>
-            <a:ext cx="146520" cy="130705"/>
+            <a:off x="3008376" y="2386853"/>
+            <a:ext cx="146520" cy="119948"/>
           </a:xfrm>
           <a:prstGeom prst="rect">
             <a:avLst/>
@@ -29214,8 +29332,8 @@
         </p:nvSpPr>
         <p:spPr>
           <a:xfrm>
-            <a:off x="4754880" y="2369910"/>
-            <a:ext cx="1143000" cy="261411"/>
+            <a:off x="4754880" y="2326879"/>
+            <a:ext cx="1143000" cy="239896"/>
           </a:xfrm>
           <a:prstGeom prst="rect">
             <a:avLst/>
@@ -29253,8 +29371,8 @@
         </p:nvSpPr>
         <p:spPr>
           <a:xfrm>
-            <a:off x="658368" y="2631320"/>
-            <a:ext cx="310896" cy="261411"/>
+            <a:off x="658368" y="2566775"/>
+            <a:ext cx="310896" cy="239896"/>
           </a:xfrm>
           <a:prstGeom prst="rect">
             <a:avLst/>
@@ -29292,8 +29410,8 @@
         </p:nvSpPr>
         <p:spPr>
           <a:xfrm>
-            <a:off x="1014984" y="2631320"/>
-            <a:ext cx="1920240" cy="261411"/>
+            <a:off x="1014984" y="2566775"/>
+            <a:ext cx="1920240" cy="239896"/>
           </a:xfrm>
           <a:prstGeom prst="rect">
             <a:avLst/>
@@ -29331,8 +29449,8 @@
         </p:nvSpPr>
         <p:spPr>
           <a:xfrm>
-            <a:off x="3008376" y="2696673"/>
-            <a:ext cx="194472" cy="130705"/>
+            <a:off x="3008376" y="2626748"/>
+            <a:ext cx="194472" cy="119948"/>
           </a:xfrm>
           <a:prstGeom prst="rect">
             <a:avLst/>
@@ -29351,8 +29469,8 @@
         </p:nvSpPr>
         <p:spPr>
           <a:xfrm>
-            <a:off x="4754880" y="2631320"/>
-            <a:ext cx="1143000" cy="261411"/>
+            <a:off x="4754880" y="2566775"/>
+            <a:ext cx="1143000" cy="239896"/>
           </a:xfrm>
           <a:prstGeom prst="rect">
             <a:avLst/>
@@ -29390,8 +29508,8 @@
         </p:nvSpPr>
         <p:spPr>
           <a:xfrm>
-            <a:off x="658368" y="2892731"/>
-            <a:ext cx="310896" cy="261411"/>
+            <a:off x="658368" y="2806670"/>
+            <a:ext cx="310896" cy="239896"/>
           </a:xfrm>
           <a:prstGeom prst="rect">
             <a:avLst/>
@@ -29429,8 +29547,8 @@
         </p:nvSpPr>
         <p:spPr>
           <a:xfrm>
-            <a:off x="1014984" y="2892731"/>
-            <a:ext cx="1920240" cy="261411"/>
+            <a:off x="1014984" y="2806670"/>
+            <a:ext cx="1920240" cy="239896"/>
           </a:xfrm>
           <a:prstGeom prst="rect">
             <a:avLst/>
@@ -29468,8 +29586,8 @@
         </p:nvSpPr>
         <p:spPr>
           <a:xfrm>
-            <a:off x="3008376" y="2958084"/>
-            <a:ext cx="205128" cy="130705"/>
+            <a:off x="3008376" y="2866644"/>
+            <a:ext cx="205128" cy="119948"/>
           </a:xfrm>
           <a:prstGeom prst="rect">
             <a:avLst/>
@@ -29488,8 +29606,8 @@
         </p:nvSpPr>
         <p:spPr>
           <a:xfrm>
-            <a:off x="4754880" y="2892731"/>
-            <a:ext cx="1143000" cy="261411"/>
+            <a:off x="4754880" y="2806670"/>
+            <a:ext cx="1143000" cy="239896"/>
           </a:xfrm>
           <a:prstGeom prst="rect">
             <a:avLst/>
@@ -29527,8 +29645,8 @@
         </p:nvSpPr>
         <p:spPr>
           <a:xfrm>
-            <a:off x="658368" y="3154142"/>
-            <a:ext cx="310896" cy="261411"/>
+            <a:off x="658368" y="3046566"/>
+            <a:ext cx="310896" cy="239896"/>
           </a:xfrm>
           <a:prstGeom prst="rect">
             <a:avLst/>
@@ -29566,8 +29684,8 @@
         </p:nvSpPr>
         <p:spPr>
           <a:xfrm>
-            <a:off x="1014984" y="3154142"/>
-            <a:ext cx="1920240" cy="261411"/>
+            <a:off x="1014984" y="3046566"/>
+            <a:ext cx="1920240" cy="239896"/>
           </a:xfrm>
           <a:prstGeom prst="rect">
             <a:avLst/>
@@ -29605,8 +29723,8 @@
         </p:nvSpPr>
         <p:spPr>
           <a:xfrm>
-            <a:off x="3008376" y="3219495"/>
-            <a:ext cx="215784" cy="130705"/>
+            <a:off x="3008376" y="3106540"/>
+            <a:ext cx="215784" cy="119948"/>
           </a:xfrm>
           <a:prstGeom prst="rect">
             <a:avLst/>
@@ -29625,8 +29743,8 @@
         </p:nvSpPr>
         <p:spPr>
           <a:xfrm>
-            <a:off x="4754880" y="3154142"/>
-            <a:ext cx="1143000" cy="261411"/>
+            <a:off x="4754880" y="3046566"/>
+            <a:ext cx="1143000" cy="239896"/>
           </a:xfrm>
           <a:prstGeom prst="rect">
             <a:avLst/>
@@ -29664,8 +29782,8 @@
         </p:nvSpPr>
         <p:spPr>
           <a:xfrm>
-            <a:off x="658368" y="3415553"/>
-            <a:ext cx="310896" cy="261411"/>
+            <a:off x="658368" y="3286461"/>
+            <a:ext cx="310896" cy="239896"/>
           </a:xfrm>
           <a:prstGeom prst="rect">
             <a:avLst/>
@@ -29703,8 +29821,8 @@
         </p:nvSpPr>
         <p:spPr>
           <a:xfrm>
-            <a:off x="1014984" y="3415553"/>
-            <a:ext cx="1920240" cy="261411"/>
+            <a:off x="1014984" y="3286461"/>
+            <a:ext cx="1920240" cy="239896"/>
           </a:xfrm>
           <a:prstGeom prst="rect">
             <a:avLst/>
@@ -29742,8 +29860,8 @@
         </p:nvSpPr>
         <p:spPr>
           <a:xfrm>
-            <a:off x="3008376" y="3480906"/>
-            <a:ext cx="239760" cy="130705"/>
+            <a:off x="3008376" y="3346435"/>
+            <a:ext cx="239760" cy="119948"/>
           </a:xfrm>
           <a:prstGeom prst="rect">
             <a:avLst/>
@@ -29762,8 +29880,8 @@
         </p:nvSpPr>
         <p:spPr>
           <a:xfrm>
-            <a:off x="4754880" y="3415553"/>
-            <a:ext cx="1143000" cy="261411"/>
+            <a:off x="4754880" y="3286461"/>
+            <a:ext cx="1143000" cy="239896"/>
           </a:xfrm>
           <a:prstGeom prst="rect">
             <a:avLst/>
@@ -29801,8 +29919,8 @@
         </p:nvSpPr>
         <p:spPr>
           <a:xfrm>
-            <a:off x="658368" y="3676964"/>
-            <a:ext cx="310896" cy="261411"/>
+            <a:off x="658368" y="3526357"/>
+            <a:ext cx="310896" cy="239896"/>
           </a:xfrm>
           <a:prstGeom prst="rect">
             <a:avLst/>
@@ -29840,8 +29958,8 @@
         </p:nvSpPr>
         <p:spPr>
           <a:xfrm>
-            <a:off x="1014984" y="3676964"/>
-            <a:ext cx="1920240" cy="261411"/>
+            <a:off x="1014984" y="3526357"/>
+            <a:ext cx="1920240" cy="239896"/>
           </a:xfrm>
           <a:prstGeom prst="rect">
             <a:avLst/>
@@ -29879,8 +29997,8 @@
         </p:nvSpPr>
         <p:spPr>
           <a:xfrm>
-            <a:off x="3008376" y="3742316"/>
-            <a:ext cx="245088" cy="130705"/>
+            <a:off x="3008376" y="3586331"/>
+            <a:ext cx="245088" cy="119948"/>
           </a:xfrm>
           <a:prstGeom prst="rect">
             <a:avLst/>
@@ -29899,8 +30017,8 @@
         </p:nvSpPr>
         <p:spPr>
           <a:xfrm>
-            <a:off x="4754880" y="3676964"/>
-            <a:ext cx="1143000" cy="261411"/>
+            <a:off x="4754880" y="3526357"/>
+            <a:ext cx="1143000" cy="239896"/>
           </a:xfrm>
           <a:prstGeom prst="rect">
             <a:avLst/>
@@ -29938,8 +30056,8 @@
         </p:nvSpPr>
         <p:spPr>
           <a:xfrm>
-            <a:off x="658368" y="3938375"/>
-            <a:ext cx="310896" cy="261411"/>
+            <a:off x="658368" y="3766252"/>
+            <a:ext cx="310896" cy="239896"/>
           </a:xfrm>
           <a:prstGeom prst="rect">
             <a:avLst/>
@@ -29977,8 +30095,8 @@
         </p:nvSpPr>
         <p:spPr>
           <a:xfrm>
-            <a:off x="1014984" y="3938375"/>
-            <a:ext cx="1920240" cy="261411"/>
+            <a:off x="1014984" y="3766252"/>
+            <a:ext cx="1920240" cy="239896"/>
           </a:xfrm>
           <a:prstGeom prst="rect">
             <a:avLst/>
@@ -30016,8 +30134,8 @@
         </p:nvSpPr>
         <p:spPr>
           <a:xfrm>
-            <a:off x="3008376" y="4003727"/>
-            <a:ext cx="253080" cy="130705"/>
+            <a:off x="3008376" y="3826226"/>
+            <a:ext cx="253080" cy="119948"/>
           </a:xfrm>
           <a:prstGeom prst="rect">
             <a:avLst/>
@@ -30036,8 +30154,8 @@
         </p:nvSpPr>
         <p:spPr>
           <a:xfrm>
-            <a:off x="4754880" y="3938375"/>
-            <a:ext cx="1143000" cy="261411"/>
+            <a:off x="4754880" y="3766252"/>
+            <a:ext cx="1143000" cy="239896"/>
           </a:xfrm>
           <a:prstGeom prst="rect">
             <a:avLst/>
@@ -30075,8 +30193,8 @@
         </p:nvSpPr>
         <p:spPr>
           <a:xfrm>
-            <a:off x="658368" y="4199785"/>
-            <a:ext cx="310896" cy="261411"/>
+            <a:off x="658368" y="4006148"/>
+            <a:ext cx="310896" cy="239896"/>
           </a:xfrm>
           <a:prstGeom prst="rect">
             <a:avLst/>
@@ -30114,8 +30232,8 @@
         </p:nvSpPr>
         <p:spPr>
           <a:xfrm>
-            <a:off x="1014984" y="4199785"/>
-            <a:ext cx="1920240" cy="261411"/>
+            <a:off x="1014984" y="4006148"/>
+            <a:ext cx="1920240" cy="239896"/>
           </a:xfrm>
           <a:prstGeom prst="rect">
             <a:avLst/>
@@ -30153,8 +30271,8 @@
         </p:nvSpPr>
         <p:spPr>
           <a:xfrm>
-            <a:off x="3008376" y="4265138"/>
-            <a:ext cx="266400" cy="130705"/>
+            <a:off x="3008376" y="4066122"/>
+            <a:ext cx="266400" cy="119948"/>
           </a:xfrm>
           <a:prstGeom prst="rect">
             <a:avLst/>
@@ -30173,8 +30291,8 @@
         </p:nvSpPr>
         <p:spPr>
           <a:xfrm>
-            <a:off x="4754880" y="4199785"/>
-            <a:ext cx="1143000" cy="261411"/>
+            <a:off x="4754880" y="4006148"/>
+            <a:ext cx="1143000" cy="239896"/>
           </a:xfrm>
           <a:prstGeom prst="rect">
             <a:avLst/>
@@ -30212,8 +30330,8 @@
         </p:nvSpPr>
         <p:spPr>
           <a:xfrm>
-            <a:off x="658368" y="4461196"/>
-            <a:ext cx="310896" cy="261411"/>
+            <a:off x="658368" y="4246043"/>
+            <a:ext cx="310896" cy="239896"/>
           </a:xfrm>
           <a:prstGeom prst="rect">
             <a:avLst/>
@@ -30251,8 +30369,8 @@
         </p:nvSpPr>
         <p:spPr>
           <a:xfrm>
-            <a:off x="1014984" y="4461196"/>
-            <a:ext cx="1920240" cy="261411"/>
+            <a:off x="1014984" y="4246043"/>
+            <a:ext cx="1920240" cy="239896"/>
           </a:xfrm>
           <a:prstGeom prst="rect">
             <a:avLst/>
@@ -30290,8 +30408,8 @@
         </p:nvSpPr>
         <p:spPr>
           <a:xfrm>
-            <a:off x="3008376" y="4526549"/>
-            <a:ext cx="290376" cy="130705"/>
+            <a:off x="3008376" y="4306017"/>
+            <a:ext cx="290376" cy="119948"/>
           </a:xfrm>
           <a:prstGeom prst="rect">
             <a:avLst/>
@@ -30310,8 +30428,8 @@
         </p:nvSpPr>
         <p:spPr>
           <a:xfrm>
-            <a:off x="4754880" y="4461196"/>
-            <a:ext cx="1143000" cy="261411"/>
+            <a:off x="4754880" y="4246043"/>
+            <a:ext cx="1143000" cy="239896"/>
           </a:xfrm>
           <a:prstGeom prst="rect">
             <a:avLst/>
@@ -30349,8 +30467,8 @@
         </p:nvSpPr>
         <p:spPr>
           <a:xfrm>
-            <a:off x="658368" y="4722607"/>
-            <a:ext cx="310896" cy="261411"/>
+            <a:off x="658368" y="4485939"/>
+            <a:ext cx="310896" cy="239896"/>
           </a:xfrm>
           <a:prstGeom prst="rect">
             <a:avLst/>
@@ -30388,8 +30506,8 @@
         </p:nvSpPr>
         <p:spPr>
           <a:xfrm>
-            <a:off x="1014984" y="4722607"/>
-            <a:ext cx="1920240" cy="261411"/>
+            <a:off x="1014984" y="4485939"/>
+            <a:ext cx="1920240" cy="239896"/>
           </a:xfrm>
           <a:prstGeom prst="rect">
             <a:avLst/>
@@ -30427,8 +30545,8 @@
         </p:nvSpPr>
         <p:spPr>
           <a:xfrm>
-            <a:off x="3008376" y="4787960"/>
-            <a:ext cx="295704" cy="130705"/>
+            <a:off x="3008376" y="4545913"/>
+            <a:ext cx="295704" cy="119948"/>
           </a:xfrm>
           <a:prstGeom prst="rect">
             <a:avLst/>
@@ -30447,8 +30565,8 @@
         </p:nvSpPr>
         <p:spPr>
           <a:xfrm>
-            <a:off x="4754880" y="4722607"/>
-            <a:ext cx="1143000" cy="261411"/>
+            <a:off x="4754880" y="4485939"/>
+            <a:ext cx="1143000" cy="239896"/>
           </a:xfrm>
           <a:prstGeom prst="rect">
             <a:avLst/>
@@ -30486,8 +30604,8 @@
         </p:nvSpPr>
         <p:spPr>
           <a:xfrm>
-            <a:off x="658368" y="4984018"/>
-            <a:ext cx="310896" cy="261411"/>
+            <a:off x="658368" y="4725834"/>
+            <a:ext cx="310896" cy="239896"/>
           </a:xfrm>
           <a:prstGeom prst="rect">
             <a:avLst/>
@@ -30525,8 +30643,8 @@
         </p:nvSpPr>
         <p:spPr>
           <a:xfrm>
-            <a:off x="1014984" y="4984018"/>
-            <a:ext cx="1920240" cy="261411"/>
+            <a:off x="1014984" y="4725834"/>
+            <a:ext cx="1920240" cy="239896"/>
           </a:xfrm>
           <a:prstGeom prst="rect">
             <a:avLst/>
@@ -30564,8 +30682,8 @@
         </p:nvSpPr>
         <p:spPr>
           <a:xfrm>
-            <a:off x="3008376" y="5049371"/>
-            <a:ext cx="330336" cy="130705"/>
+            <a:off x="3008376" y="4785808"/>
+            <a:ext cx="330336" cy="119948"/>
           </a:xfrm>
           <a:prstGeom prst="rect">
             <a:avLst/>
@@ -30584,8 +30702,8 @@
         </p:nvSpPr>
         <p:spPr>
           <a:xfrm>
-            <a:off x="4754880" y="4984018"/>
-            <a:ext cx="1143000" cy="261411"/>
+            <a:off x="4754880" y="4725834"/>
+            <a:ext cx="1143000" cy="239896"/>
           </a:xfrm>
           <a:prstGeom prst="rect">
             <a:avLst/>
@@ -30623,8 +30741,8 @@
         </p:nvSpPr>
         <p:spPr>
           <a:xfrm>
-            <a:off x="658368" y="5245429"/>
-            <a:ext cx="310896" cy="261411"/>
+            <a:off x="658368" y="4965730"/>
+            <a:ext cx="310896" cy="239896"/>
           </a:xfrm>
           <a:prstGeom prst="rect">
             <a:avLst/>
@@ -30662,8 +30780,8 @@
         </p:nvSpPr>
         <p:spPr>
           <a:xfrm>
-            <a:off x="1014984" y="5245429"/>
-            <a:ext cx="1920240" cy="261411"/>
+            <a:off x="1014984" y="4965730"/>
+            <a:ext cx="1920240" cy="239896"/>
           </a:xfrm>
           <a:prstGeom prst="rect">
             <a:avLst/>
@@ -30701,8 +30819,8 @@
         </p:nvSpPr>
         <p:spPr>
           <a:xfrm>
-            <a:off x="3008376" y="5310781"/>
-            <a:ext cx="335664" cy="130705"/>
+            <a:off x="3008376" y="5025704"/>
+            <a:ext cx="335664" cy="119948"/>
           </a:xfrm>
           <a:prstGeom prst="rect">
             <a:avLst/>
@@ -30721,8 +30839,8 @@
         </p:nvSpPr>
         <p:spPr>
           <a:xfrm>
-            <a:off x="4754880" y="5245429"/>
-            <a:ext cx="1143000" cy="261411"/>
+            <a:off x="4754880" y="4965730"/>
+            <a:ext cx="1143000" cy="239896"/>
           </a:xfrm>
           <a:prstGeom prst="rect">
             <a:avLst/>
@@ -30760,8 +30878,8 @@
         </p:nvSpPr>
         <p:spPr>
           <a:xfrm>
-            <a:off x="658368" y="5506840"/>
-            <a:ext cx="310896" cy="261411"/>
+            <a:off x="658368" y="5205625"/>
+            <a:ext cx="310896" cy="239896"/>
           </a:xfrm>
           <a:prstGeom prst="rect">
             <a:avLst/>
@@ -30799,8 +30917,8 @@
         </p:nvSpPr>
         <p:spPr>
           <a:xfrm>
-            <a:off x="1014984" y="5506840"/>
-            <a:ext cx="1920240" cy="261411"/>
+            <a:off x="1014984" y="5205625"/>
+            <a:ext cx="1920240" cy="239896"/>
           </a:xfrm>
           <a:prstGeom prst="rect">
             <a:avLst/>
@@ -30838,8 +30956,8 @@
         </p:nvSpPr>
         <p:spPr>
           <a:xfrm>
-            <a:off x="3008376" y="5572192"/>
-            <a:ext cx="362304" cy="130705"/>
+            <a:off x="3008376" y="5265599"/>
+            <a:ext cx="362304" cy="119948"/>
           </a:xfrm>
           <a:prstGeom prst="rect">
             <a:avLst/>
@@ -30858,8 +30976,8 @@
         </p:nvSpPr>
         <p:spPr>
           <a:xfrm>
-            <a:off x="4754880" y="5506840"/>
-            <a:ext cx="1143000" cy="261411"/>
+            <a:off x="4754880" y="5205625"/>
+            <a:ext cx="1143000" cy="239896"/>
           </a:xfrm>
           <a:prstGeom prst="rect">
             <a:avLst/>
@@ -30897,8 +31015,8 @@
         </p:nvSpPr>
         <p:spPr>
           <a:xfrm>
-            <a:off x="658368" y="5768250"/>
-            <a:ext cx="310896" cy="261411"/>
+            <a:off x="658368" y="5445521"/>
+            <a:ext cx="310896" cy="239896"/>
           </a:xfrm>
           <a:prstGeom prst="rect">
             <a:avLst/>
@@ -30936,8 +31054,8 @@
         </p:nvSpPr>
         <p:spPr>
           <a:xfrm>
-            <a:off x="1014984" y="5768250"/>
-            <a:ext cx="1920240" cy="261411"/>
+            <a:off x="1014984" y="5445521"/>
+            <a:ext cx="1920240" cy="239896"/>
           </a:xfrm>
           <a:prstGeom prst="rect">
             <a:avLst/>
@@ -30975,8 +31093,8 @@
         </p:nvSpPr>
         <p:spPr>
           <a:xfrm>
-            <a:off x="3008376" y="5833603"/>
-            <a:ext cx="383616" cy="130705"/>
+            <a:off x="3008376" y="5505495"/>
+            <a:ext cx="383616" cy="119948"/>
           </a:xfrm>
           <a:prstGeom prst="rect">
             <a:avLst/>
@@ -30995,8 +31113,8 @@
         </p:nvSpPr>
         <p:spPr>
           <a:xfrm>
-            <a:off x="4754880" y="5768250"/>
-            <a:ext cx="1143000" cy="261411"/>
+            <a:off x="4754880" y="5445521"/>
+            <a:ext cx="1143000" cy="239896"/>
           </a:xfrm>
           <a:prstGeom prst="rect">
             <a:avLst/>
@@ -31034,8 +31152,8 @@
         </p:nvSpPr>
         <p:spPr>
           <a:xfrm>
-            <a:off x="658368" y="6029661"/>
-            <a:ext cx="310896" cy="261411"/>
+            <a:off x="658368" y="5685416"/>
+            <a:ext cx="310896" cy="239896"/>
           </a:xfrm>
           <a:prstGeom prst="rect">
             <a:avLst/>
@@ -31073,8 +31191,8 @@
         </p:nvSpPr>
         <p:spPr>
           <a:xfrm>
-            <a:off x="1014984" y="6029661"/>
-            <a:ext cx="1920240" cy="261411"/>
+            <a:off x="1014984" y="5685416"/>
+            <a:ext cx="1920240" cy="239896"/>
           </a:xfrm>
           <a:prstGeom prst="rect">
             <a:avLst/>
@@ -31112,8 +31230,8 @@
         </p:nvSpPr>
         <p:spPr>
           <a:xfrm>
-            <a:off x="3008376" y="6095014"/>
-            <a:ext cx="383616" cy="130705"/>
+            <a:off x="3008376" y="5745390"/>
+            <a:ext cx="383616" cy="119948"/>
           </a:xfrm>
           <a:prstGeom prst="rect">
             <a:avLst/>
@@ -31132,8 +31250,8 @@
         </p:nvSpPr>
         <p:spPr>
           <a:xfrm>
-            <a:off x="4754880" y="6029661"/>
-            <a:ext cx="1143000" cy="261411"/>
+            <a:off x="4754880" y="5685416"/>
+            <a:ext cx="1143000" cy="239896"/>
           </a:xfrm>
           <a:prstGeom prst="rect">
             <a:avLst/>
@@ -31172,7 +31290,7 @@
         <p:spPr>
           <a:xfrm>
             <a:off x="6208776" y="1847088"/>
-            <a:ext cx="310896" cy="261411"/>
+            <a:ext cx="310896" cy="239896"/>
           </a:xfrm>
           <a:prstGeom prst="rect">
             <a:avLst/>
@@ -31211,7 +31329,7 @@
         <p:spPr>
           <a:xfrm>
             <a:off x="6565392" y="1847088"/>
-            <a:ext cx="1920240" cy="261411"/>
+            <a:ext cx="1920240" cy="239896"/>
           </a:xfrm>
           <a:prstGeom prst="rect">
             <a:avLst/>
@@ -31249,8 +31367,8 @@
         </p:nvSpPr>
         <p:spPr>
           <a:xfrm>
-            <a:off x="8558784" y="1912441"/>
-            <a:ext cx="394272" cy="130705"/>
+            <a:off x="8558784" y="1907062"/>
+            <a:ext cx="394272" cy="119948"/>
           </a:xfrm>
           <a:prstGeom prst="rect">
             <a:avLst/>
@@ -31270,7 +31388,7 @@
         <p:spPr>
           <a:xfrm>
             <a:off x="10305288" y="1847088"/>
-            <a:ext cx="1143000" cy="261411"/>
+            <a:ext cx="1143000" cy="239896"/>
           </a:xfrm>
           <a:prstGeom prst="rect">
             <a:avLst/>
@@ -31308,8 +31426,8 @@
         </p:nvSpPr>
         <p:spPr>
           <a:xfrm>
-            <a:off x="6208776" y="2108499"/>
-            <a:ext cx="310896" cy="261411"/>
+            <a:off x="6208776" y="2086984"/>
+            <a:ext cx="310896" cy="239896"/>
           </a:xfrm>
           <a:prstGeom prst="rect">
             <a:avLst/>
@@ -31347,8 +31465,8 @@
         </p:nvSpPr>
         <p:spPr>
           <a:xfrm>
-            <a:off x="6565392" y="2108499"/>
-            <a:ext cx="1920240" cy="261411"/>
+            <a:off x="6565392" y="2086984"/>
+            <a:ext cx="1920240" cy="239896"/>
           </a:xfrm>
           <a:prstGeom prst="rect">
             <a:avLst/>
@@ -31386,8 +31504,8 @@
         </p:nvSpPr>
         <p:spPr>
           <a:xfrm>
-            <a:off x="8558784" y="2173852"/>
-            <a:ext cx="407592" cy="130705"/>
+            <a:off x="8558784" y="2146957"/>
+            <a:ext cx="407592" cy="119948"/>
           </a:xfrm>
           <a:prstGeom prst="rect">
             <a:avLst/>
@@ -31406,8 +31524,8 @@
         </p:nvSpPr>
         <p:spPr>
           <a:xfrm>
-            <a:off x="10305288" y="2108499"/>
-            <a:ext cx="1143000" cy="261411"/>
+            <a:off x="10305288" y="2086984"/>
+            <a:ext cx="1143000" cy="239896"/>
           </a:xfrm>
           <a:prstGeom prst="rect">
             <a:avLst/>
@@ -31445,8 +31563,8 @@
         </p:nvSpPr>
         <p:spPr>
           <a:xfrm>
-            <a:off x="6208776" y="2369910"/>
-            <a:ext cx="310896" cy="261411"/>
+            <a:off x="6208776" y="2326879"/>
+            <a:ext cx="310896" cy="239896"/>
           </a:xfrm>
           <a:prstGeom prst="rect">
             <a:avLst/>
@@ -31484,8 +31602,8 @@
         </p:nvSpPr>
         <p:spPr>
           <a:xfrm>
-            <a:off x="6565392" y="2369910"/>
-            <a:ext cx="1920240" cy="261411"/>
+            <a:off x="6565392" y="2326879"/>
+            <a:ext cx="1920240" cy="239896"/>
           </a:xfrm>
           <a:prstGeom prst="rect">
             <a:avLst/>
@@ -31523,8 +31641,8 @@
         </p:nvSpPr>
         <p:spPr>
           <a:xfrm>
-            <a:off x="8558784" y="2435262"/>
-            <a:ext cx="476856" cy="130705"/>
+            <a:off x="8558784" y="2386853"/>
+            <a:ext cx="476856" cy="119948"/>
           </a:xfrm>
           <a:prstGeom prst="rect">
             <a:avLst/>
@@ -31543,8 +31661,8 @@
         </p:nvSpPr>
         <p:spPr>
           <a:xfrm>
-            <a:off x="10305288" y="2369910"/>
-            <a:ext cx="1143000" cy="261411"/>
+            <a:off x="10305288" y="2326879"/>
+            <a:ext cx="1143000" cy="239896"/>
           </a:xfrm>
           <a:prstGeom prst="rect">
             <a:avLst/>
@@ -31582,8 +31700,8 @@
         </p:nvSpPr>
         <p:spPr>
           <a:xfrm>
-            <a:off x="6208776" y="2631320"/>
-            <a:ext cx="310896" cy="261411"/>
+            <a:off x="6208776" y="2566775"/>
+            <a:ext cx="310896" cy="239896"/>
           </a:xfrm>
           <a:prstGeom prst="rect">
             <a:avLst/>
@@ -31621,8 +31739,8 @@
         </p:nvSpPr>
         <p:spPr>
           <a:xfrm>
-            <a:off x="6565392" y="2631320"/>
-            <a:ext cx="1920240" cy="261411"/>
+            <a:off x="6565392" y="2566775"/>
+            <a:ext cx="1920240" cy="239896"/>
           </a:xfrm>
           <a:prstGeom prst="rect">
             <a:avLst/>
@@ -31660,8 +31778,8 @@
         </p:nvSpPr>
         <p:spPr>
           <a:xfrm>
-            <a:off x="8558784" y="2696673"/>
-            <a:ext cx="514152" cy="130705"/>
+            <a:off x="8558784" y="2626748"/>
+            <a:ext cx="514152" cy="119948"/>
           </a:xfrm>
           <a:prstGeom prst="rect">
             <a:avLst/>
@@ -31680,8 +31798,8 @@
         </p:nvSpPr>
         <p:spPr>
           <a:xfrm>
-            <a:off x="10305288" y="2631320"/>
-            <a:ext cx="1143000" cy="261411"/>
+            <a:off x="10305288" y="2566775"/>
+            <a:ext cx="1143000" cy="239896"/>
           </a:xfrm>
           <a:prstGeom prst="rect">
             <a:avLst/>
@@ -31719,8 +31837,8 @@
         </p:nvSpPr>
         <p:spPr>
           <a:xfrm>
-            <a:off x="6208776" y="2892731"/>
-            <a:ext cx="310896" cy="261411"/>
+            <a:off x="6208776" y="2806670"/>
+            <a:ext cx="310896" cy="239896"/>
           </a:xfrm>
           <a:prstGeom prst="rect">
             <a:avLst/>
@@ -31758,8 +31876,8 @@
         </p:nvSpPr>
         <p:spPr>
           <a:xfrm>
-            <a:off x="6565392" y="2892731"/>
-            <a:ext cx="1920240" cy="261411"/>
+            <a:off x="6565392" y="2806670"/>
+            <a:ext cx="1920240" cy="239896"/>
           </a:xfrm>
           <a:prstGeom prst="rect">
             <a:avLst/>
@@ -31797,8 +31915,8 @@
         </p:nvSpPr>
         <p:spPr>
           <a:xfrm>
-            <a:off x="8558784" y="2958084"/>
-            <a:ext cx="514152" cy="130705"/>
+            <a:off x="8558784" y="2866644"/>
+            <a:ext cx="514152" cy="119948"/>
           </a:xfrm>
           <a:prstGeom prst="rect">
             <a:avLst/>
@@ -31817,8 +31935,8 @@
         </p:nvSpPr>
         <p:spPr>
           <a:xfrm>
-            <a:off x="10305288" y="2892731"/>
-            <a:ext cx="1143000" cy="261411"/>
+            <a:off x="10305288" y="2806670"/>
+            <a:ext cx="1143000" cy="239896"/>
           </a:xfrm>
           <a:prstGeom prst="rect">
             <a:avLst/>
@@ -31856,8 +31974,8 @@
         </p:nvSpPr>
         <p:spPr>
           <a:xfrm>
-            <a:off x="6208776" y="3154142"/>
-            <a:ext cx="310896" cy="261411"/>
+            <a:off x="6208776" y="3046566"/>
+            <a:ext cx="310896" cy="239896"/>
           </a:xfrm>
           <a:prstGeom prst="rect">
             <a:avLst/>
@@ -31895,8 +32013,8 @@
         </p:nvSpPr>
         <p:spPr>
           <a:xfrm>
-            <a:off x="6565392" y="3154142"/>
-            <a:ext cx="1920240" cy="261411"/>
+            <a:off x="6565392" y="3046566"/>
+            <a:ext cx="1920240" cy="239896"/>
           </a:xfrm>
           <a:prstGeom prst="rect">
             <a:avLst/>
@@ -31934,8 +32052,8 @@
         </p:nvSpPr>
         <p:spPr>
           <a:xfrm>
-            <a:off x="8558784" y="3219495"/>
-            <a:ext cx="626040" cy="130705"/>
+            <a:off x="8558784" y="3106540"/>
+            <a:ext cx="626040" cy="119948"/>
           </a:xfrm>
           <a:prstGeom prst="rect">
             <a:avLst/>
@@ -31954,8 +32072,8 @@
         </p:nvSpPr>
         <p:spPr>
           <a:xfrm>
-            <a:off x="10305288" y="3154142"/>
-            <a:ext cx="1143000" cy="261411"/>
+            <a:off x="10305288" y="3046566"/>
+            <a:ext cx="1143000" cy="239896"/>
           </a:xfrm>
           <a:prstGeom prst="rect">
             <a:avLst/>
@@ -31993,8 +32111,8 @@
         </p:nvSpPr>
         <p:spPr>
           <a:xfrm>
-            <a:off x="6208776" y="3415553"/>
-            <a:ext cx="310896" cy="261411"/>
+            <a:off x="6208776" y="3286461"/>
+            <a:ext cx="310896" cy="239896"/>
           </a:xfrm>
           <a:prstGeom prst="rect">
             <a:avLst/>
@@ -32032,8 +32150,8 @@
         </p:nvSpPr>
         <p:spPr>
           <a:xfrm>
-            <a:off x="6565392" y="3415553"/>
-            <a:ext cx="1920240" cy="261411"/>
+            <a:off x="6565392" y="3286461"/>
+            <a:ext cx="1920240" cy="239896"/>
           </a:xfrm>
           <a:prstGeom prst="rect">
             <a:avLst/>
@@ -32071,8 +32189,8 @@
         </p:nvSpPr>
         <p:spPr>
           <a:xfrm>
-            <a:off x="8558784" y="3480906"/>
-            <a:ext cx="673992" cy="130705"/>
+            <a:off x="8558784" y="3346435"/>
+            <a:ext cx="673992" cy="119948"/>
           </a:xfrm>
           <a:prstGeom prst="rect">
             <a:avLst/>
@@ -32091,8 +32209,8 @@
         </p:nvSpPr>
         <p:spPr>
           <a:xfrm>
-            <a:off x="10305288" y="3415553"/>
-            <a:ext cx="1143000" cy="261411"/>
+            <a:off x="10305288" y="3286461"/>
+            <a:ext cx="1143000" cy="239896"/>
           </a:xfrm>
           <a:prstGeom prst="rect">
             <a:avLst/>
@@ -32130,8 +32248,8 @@
         </p:nvSpPr>
         <p:spPr>
           <a:xfrm>
-            <a:off x="6208776" y="3676964"/>
-            <a:ext cx="310896" cy="261411"/>
+            <a:off x="6208776" y="3526357"/>
+            <a:ext cx="310896" cy="239896"/>
           </a:xfrm>
           <a:prstGeom prst="rect">
             <a:avLst/>
@@ -32169,8 +32287,8 @@
         </p:nvSpPr>
         <p:spPr>
           <a:xfrm>
-            <a:off x="6565392" y="3676964"/>
-            <a:ext cx="1920240" cy="261411"/>
+            <a:off x="6565392" y="3526357"/>
+            <a:ext cx="1920240" cy="239896"/>
           </a:xfrm>
           <a:prstGeom prst="rect">
             <a:avLst/>
@@ -32208,8 +32326,8 @@
         </p:nvSpPr>
         <p:spPr>
           <a:xfrm>
-            <a:off x="8558784" y="3742316"/>
-            <a:ext cx="719280" cy="130705"/>
+            <a:off x="8558784" y="3586331"/>
+            <a:ext cx="719280" cy="119948"/>
           </a:xfrm>
           <a:prstGeom prst="rect">
             <a:avLst/>
@@ -32228,8 +32346,8 @@
         </p:nvSpPr>
         <p:spPr>
           <a:xfrm>
-            <a:off x="10305288" y="3676964"/>
-            <a:ext cx="1143000" cy="261411"/>
+            <a:off x="10305288" y="3526357"/>
+            <a:ext cx="1143000" cy="239896"/>
           </a:xfrm>
           <a:prstGeom prst="rect">
             <a:avLst/>
@@ -32267,8 +32385,8 @@
         </p:nvSpPr>
         <p:spPr>
           <a:xfrm>
-            <a:off x="6208776" y="3938375"/>
-            <a:ext cx="310896" cy="261411"/>
+            <a:off x="6208776" y="3766252"/>
+            <a:ext cx="310896" cy="239896"/>
           </a:xfrm>
           <a:prstGeom prst="rect">
             <a:avLst/>
@@ -32306,8 +32424,8 @@
         </p:nvSpPr>
         <p:spPr>
           <a:xfrm>
-            <a:off x="6565392" y="3938375"/>
-            <a:ext cx="1920240" cy="261411"/>
+            <a:off x="6565392" y="3766252"/>
+            <a:ext cx="1920240" cy="239896"/>
           </a:xfrm>
           <a:prstGeom prst="rect">
             <a:avLst/>
@@ -32345,8 +32463,8 @@
         </p:nvSpPr>
         <p:spPr>
           <a:xfrm>
-            <a:off x="8558784" y="4003727"/>
-            <a:ext cx="721944" cy="130705"/>
+            <a:off x="8558784" y="3826226"/>
+            <a:ext cx="721944" cy="119948"/>
           </a:xfrm>
           <a:prstGeom prst="rect">
             <a:avLst/>
@@ -32365,8 +32483,8 @@
         </p:nvSpPr>
         <p:spPr>
           <a:xfrm>
-            <a:off x="10305288" y="3938375"/>
-            <a:ext cx="1143000" cy="261411"/>
+            <a:off x="10305288" y="3766252"/>
+            <a:ext cx="1143000" cy="239896"/>
           </a:xfrm>
           <a:prstGeom prst="rect">
             <a:avLst/>
@@ -32404,8 +32522,8 @@
         </p:nvSpPr>
         <p:spPr>
           <a:xfrm>
-            <a:off x="6208776" y="4199785"/>
-            <a:ext cx="310896" cy="261411"/>
+            <a:off x="6208776" y="4006148"/>
+            <a:ext cx="310896" cy="239896"/>
           </a:xfrm>
           <a:prstGeom prst="rect">
             <a:avLst/>
@@ -32443,8 +32561,8 @@
         </p:nvSpPr>
         <p:spPr>
           <a:xfrm>
-            <a:off x="6565392" y="4199785"/>
-            <a:ext cx="1920240" cy="261411"/>
+            <a:off x="6565392" y="4006148"/>
+            <a:ext cx="1920240" cy="239896"/>
           </a:xfrm>
           <a:prstGeom prst="rect">
             <a:avLst/>
@@ -32482,8 +32600,8 @@
         </p:nvSpPr>
         <p:spPr>
           <a:xfrm>
-            <a:off x="8558784" y="4265138"/>
-            <a:ext cx="753912" cy="130705"/>
+            <a:off x="8558784" y="4066122"/>
+            <a:ext cx="753912" cy="119948"/>
           </a:xfrm>
           <a:prstGeom prst="rect">
             <a:avLst/>
@@ -32502,8 +32620,8 @@
         </p:nvSpPr>
         <p:spPr>
           <a:xfrm>
-            <a:off x="10305288" y="4199785"/>
-            <a:ext cx="1143000" cy="261411"/>
+            <a:off x="10305288" y="4006148"/>
+            <a:ext cx="1143000" cy="239896"/>
           </a:xfrm>
           <a:prstGeom prst="rect">
             <a:avLst/>
@@ -32541,8 +32659,8 @@
         </p:nvSpPr>
         <p:spPr>
           <a:xfrm>
-            <a:off x="6208776" y="4461196"/>
-            <a:ext cx="310896" cy="261411"/>
+            <a:off x="6208776" y="4246043"/>
+            <a:ext cx="310896" cy="239896"/>
           </a:xfrm>
           <a:prstGeom prst="rect">
             <a:avLst/>
@@ -32580,8 +32698,8 @@
         </p:nvSpPr>
         <p:spPr>
           <a:xfrm>
-            <a:off x="6565392" y="4461196"/>
-            <a:ext cx="1920240" cy="261411"/>
+            <a:off x="6565392" y="4246043"/>
+            <a:ext cx="1920240" cy="239896"/>
           </a:xfrm>
           <a:prstGeom prst="rect">
             <a:avLst/>
@@ -32619,8 +32737,8 @@
         </p:nvSpPr>
         <p:spPr>
           <a:xfrm>
-            <a:off x="8558784" y="4526549"/>
-            <a:ext cx="772560" cy="130705"/>
+            <a:off x="8558784" y="4306017"/>
+            <a:ext cx="772560" cy="119948"/>
           </a:xfrm>
           <a:prstGeom prst="rect">
             <a:avLst/>
@@ -32639,8 +32757,8 @@
         </p:nvSpPr>
         <p:spPr>
           <a:xfrm>
-            <a:off x="10305288" y="4461196"/>
-            <a:ext cx="1143000" cy="261411"/>
+            <a:off x="10305288" y="4246043"/>
+            <a:ext cx="1143000" cy="239896"/>
           </a:xfrm>
           <a:prstGeom prst="rect">
             <a:avLst/>
@@ -32678,8 +32796,8 @@
         </p:nvSpPr>
         <p:spPr>
           <a:xfrm>
-            <a:off x="6208776" y="4722607"/>
-            <a:ext cx="310896" cy="261411"/>
+            <a:off x="6208776" y="4485939"/>
+            <a:ext cx="310896" cy="239896"/>
           </a:xfrm>
           <a:prstGeom prst="rect">
             <a:avLst/>
@@ -32717,8 +32835,8 @@
         </p:nvSpPr>
         <p:spPr>
           <a:xfrm>
-            <a:off x="6565392" y="4722607"/>
-            <a:ext cx="1920240" cy="261411"/>
+            <a:off x="6565392" y="4485939"/>
+            <a:ext cx="1920240" cy="239896"/>
           </a:xfrm>
           <a:prstGeom prst="rect">
             <a:avLst/>
@@ -32756,8 +32874,8 @@
         </p:nvSpPr>
         <p:spPr>
           <a:xfrm>
-            <a:off x="8558784" y="4787960"/>
-            <a:ext cx="1014984" cy="130705"/>
+            <a:off x="8558784" y="4545913"/>
+            <a:ext cx="1014984" cy="119948"/>
           </a:xfrm>
           <a:prstGeom prst="rect">
             <a:avLst/>
@@ -32776,8 +32894,8 @@
         </p:nvSpPr>
         <p:spPr>
           <a:xfrm>
-            <a:off x="10305288" y="4722607"/>
-            <a:ext cx="1143000" cy="261411"/>
+            <a:off x="10305288" y="4485939"/>
+            <a:ext cx="1143000" cy="239896"/>
           </a:xfrm>
           <a:prstGeom prst="rect">
             <a:avLst/>
@@ -32815,8 +32933,8 @@
         </p:nvSpPr>
         <p:spPr>
           <a:xfrm>
-            <a:off x="6208776" y="4984018"/>
-            <a:ext cx="310896" cy="261411"/>
+            <a:off x="6208776" y="4725834"/>
+            <a:ext cx="310896" cy="239896"/>
           </a:xfrm>
           <a:prstGeom prst="rect">
             <a:avLst/>
@@ -32854,8 +32972,8 @@
         </p:nvSpPr>
         <p:spPr>
           <a:xfrm>
-            <a:off x="6565392" y="4984018"/>
-            <a:ext cx="1920240" cy="261411"/>
+            <a:off x="6565392" y="4725834"/>
+            <a:ext cx="1920240" cy="239896"/>
           </a:xfrm>
           <a:prstGeom prst="rect">
             <a:avLst/>
@@ -32893,8 +33011,8 @@
         </p:nvSpPr>
         <p:spPr>
           <a:xfrm>
-            <a:off x="8558784" y="5049371"/>
-            <a:ext cx="1046952" cy="130705"/>
+            <a:off x="8558784" y="4785808"/>
+            <a:ext cx="1046952" cy="119948"/>
           </a:xfrm>
           <a:prstGeom prst="rect">
             <a:avLst/>
@@ -32913,8 +33031,8 @@
         </p:nvSpPr>
         <p:spPr>
           <a:xfrm>
-            <a:off x="10305288" y="4984018"/>
-            <a:ext cx="1143000" cy="261411"/>
+            <a:off x="10305288" y="4725834"/>
+            <a:ext cx="1143000" cy="239896"/>
           </a:xfrm>
           <a:prstGeom prst="rect">
             <a:avLst/>
@@ -32952,8 +33070,8 @@
         </p:nvSpPr>
         <p:spPr>
           <a:xfrm>
-            <a:off x="6208776" y="5245429"/>
-            <a:ext cx="310896" cy="261411"/>
+            <a:off x="6208776" y="4965730"/>
+            <a:ext cx="310896" cy="239896"/>
           </a:xfrm>
           <a:prstGeom prst="rect">
             <a:avLst/>
@@ -32991,8 +33109,8 @@
         </p:nvSpPr>
         <p:spPr>
           <a:xfrm>
-            <a:off x="6565392" y="5245429"/>
-            <a:ext cx="1920240" cy="261411"/>
+            <a:off x="6565392" y="4965730"/>
+            <a:ext cx="1920240" cy="239896"/>
           </a:xfrm>
           <a:prstGeom prst="rect">
             <a:avLst/>
@@ -33030,8 +33148,8 @@
         </p:nvSpPr>
         <p:spPr>
           <a:xfrm>
-            <a:off x="8558784" y="5310781"/>
-            <a:ext cx="1201464" cy="130705"/>
+            <a:off x="8558784" y="5025704"/>
+            <a:ext cx="1201464" cy="119948"/>
           </a:xfrm>
           <a:prstGeom prst="rect">
             <a:avLst/>
@@ -33050,8 +33168,8 @@
         </p:nvSpPr>
         <p:spPr>
           <a:xfrm>
-            <a:off x="10305288" y="5245429"/>
-            <a:ext cx="1143000" cy="261411"/>
+            <a:off x="10305288" y="4965730"/>
+            <a:ext cx="1143000" cy="239896"/>
           </a:xfrm>
           <a:prstGeom prst="rect">
             <a:avLst/>
@@ -33089,8 +33207,8 @@
         </p:nvSpPr>
         <p:spPr>
           <a:xfrm>
-            <a:off x="6208776" y="5506840"/>
-            <a:ext cx="310896" cy="261411"/>
+            <a:off x="6208776" y="5205625"/>
+            <a:ext cx="310896" cy="239896"/>
           </a:xfrm>
           <a:prstGeom prst="rect">
             <a:avLst/>
@@ -33128,8 +33246,8 @@
         </p:nvSpPr>
         <p:spPr>
           <a:xfrm>
-            <a:off x="6565392" y="5506840"/>
-            <a:ext cx="1920240" cy="261411"/>
+            <a:off x="6565392" y="5205625"/>
+            <a:ext cx="1920240" cy="239896"/>
           </a:xfrm>
           <a:prstGeom prst="rect">
             <a:avLst/>
@@ -33167,8 +33285,8 @@
         </p:nvSpPr>
         <p:spPr>
           <a:xfrm>
-            <a:off x="8558784" y="5572192"/>
-            <a:ext cx="1379952" cy="130705"/>
+            <a:off x="8558784" y="5265599"/>
+            <a:ext cx="1379952" cy="119948"/>
           </a:xfrm>
           <a:prstGeom prst="rect">
             <a:avLst/>
@@ -33187,8 +33305,8 @@
         </p:nvSpPr>
         <p:spPr>
           <a:xfrm>
-            <a:off x="10305288" y="5506840"/>
-            <a:ext cx="1143000" cy="261411"/>
+            <a:off x="10305288" y="5205625"/>
+            <a:ext cx="1143000" cy="239896"/>
           </a:xfrm>
           <a:prstGeom prst="rect">
             <a:avLst/>
@@ -33226,8 +33344,8 @@
         </p:nvSpPr>
         <p:spPr>
           <a:xfrm>
-            <a:off x="6208776" y="5768250"/>
-            <a:ext cx="310896" cy="261411"/>
+            <a:off x="6208776" y="5445521"/>
+            <a:ext cx="310896" cy="239896"/>
           </a:xfrm>
           <a:prstGeom prst="rect">
             <a:avLst/>
@@ -33265,8 +33383,8 @@
         </p:nvSpPr>
         <p:spPr>
           <a:xfrm>
-            <a:off x="6565392" y="5768250"/>
-            <a:ext cx="1920240" cy="261411"/>
+            <a:off x="6565392" y="5445521"/>
+            <a:ext cx="1920240" cy="239896"/>
           </a:xfrm>
           <a:prstGeom prst="rect">
             <a:avLst/>
@@ -33304,8 +33422,8 @@
         </p:nvSpPr>
         <p:spPr>
           <a:xfrm>
-            <a:off x="8558784" y="5833603"/>
-            <a:ext cx="1691640" cy="130705"/>
+            <a:off x="8558784" y="5505495"/>
+            <a:ext cx="1691640" cy="119948"/>
           </a:xfrm>
           <a:prstGeom prst="rect">
             <a:avLst/>
@@ -33324,8 +33442,8 @@
         </p:nvSpPr>
         <p:spPr>
           <a:xfrm>
-            <a:off x="10305288" y="5768250"/>
-            <a:ext cx="1143000" cy="261411"/>
+            <a:off x="10305288" y="5445521"/>
+            <a:ext cx="1143000" cy="239896"/>
           </a:xfrm>
           <a:prstGeom prst="rect">
             <a:avLst/>
@@ -33364,7 +33482,7 @@
         <p:spPr>
           <a:xfrm>
             <a:off x="3405989" y="1847088"/>
-            <a:ext cx="14630" cy="4443984"/>
+            <a:ext cx="14630" cy="4078224"/>
           </a:xfrm>
           <a:prstGeom prst="rect">
             <a:avLst/>
@@ -33384,7 +33502,7 @@
         <p:spPr>
           <a:xfrm>
             <a:off x="8956397" y="1847088"/>
-            <a:ext cx="14630" cy="4443984"/>
+            <a:ext cx="14630" cy="4078224"/>
           </a:xfrm>
           <a:prstGeom prst="rect">
             <a:avLst/>
@@ -33404,7 +33522,7 @@
         <p:spPr>
           <a:xfrm>
             <a:off x="6085332" y="1847088"/>
-            <a:ext cx="10973" cy="4443984"/>
+            <a:ext cx="10973" cy="4078224"/>
           </a:xfrm>
           <a:prstGeom prst="rect">
             <a:avLst/>
@@ -33414,6 +33532,65 @@
           </a:solidFill>
           <a:ln/>
         </p:spPr>
+      </p:sp>
+      <p:sp>
+        <p:nvSpPr>
+          <p:cNvPr id="147" name="Shape 144"/>
+          <p:cNvSpPr/>
+          <p:nvPr/>
+        </p:nvSpPr>
+        <p:spPr>
+          <a:xfrm>
+            <a:off x="457200" y="6126480"/>
+            <a:ext cx="11274552" cy="371856"/>
+          </a:xfrm>
+          <a:prstGeom prst="rect">
+            <a:avLst/>
+          </a:prstGeom>
+          <a:solidFill>
+            <a:srgbClr val="EDF4FA"/>
+          </a:solidFill>
+          <a:ln/>
+        </p:spPr>
+      </p:sp>
+      <p:sp>
+        <p:nvSpPr>
+          <p:cNvPr id="148" name="Text 145"/>
+          <p:cNvSpPr txBox="1"/>
+          <p:nvPr/>
+        </p:nvSpPr>
+        <p:spPr>
+          <a:xfrm>
+            <a:off x="658368" y="6144768"/>
+            <a:ext cx="10927080" cy="335280"/>
+          </a:xfrm>
+          <a:prstGeom prst="rect">
+            <a:avLst/>
+          </a:prstGeom>
+          <a:noFill/>
+          <a:ln/>
+        </p:spPr>
+        <p:txBody>
+          <a:bodyPr wrap="square" lIns="0" tIns="0" rIns="0" bIns="0" rtlCol="0" anchor="ctr"/>
+          <a:lstStyle/>
+          <a:p>
+            <a:pPr indent="0" marL="0">
+              <a:buNone/>
+            </a:pPr>
+            <a:r>
+              <a:rPr lang="en-US" sz="1600" b="1" dirty="0">
+                <a:solidFill>
+                  <a:srgbClr val="0B2C4A"/>
+                </a:solidFill>
+                <a:latin typeface="Inter" pitchFamily="34" charset="0"/>
+                <a:ea typeface="Inter" pitchFamily="34" charset="-122"/>
+                <a:cs typeface="Inter" pitchFamily="34" charset="-120"/>
+              </a:rPr>
+              <a:t>Vague op code descriptions hide what the shop sells.</a:t>
+            </a:r>
+            <a:endParaRPr lang="en-US" sz="1600" dirty="0"/>
+          </a:p>
+        </p:txBody>
       </p:sp>
     </p:spTree>
   </p:cSld>

--- a/day2-deck/decks/Labor Mix - House Style.pptx
+++ b/day2-deck/decks/Labor Mix - House Style.pptx
@@ -19246,7 +19246,27 @@
       </p:sp>
       <p:sp>
         <p:nvSpPr>
-          <p:cNvPr id="42" name="Text 40"/>
+          <p:cNvPr id="42" name="Shape 40"/>
+          <p:cNvSpPr/>
+          <p:nvPr/>
+        </p:nvSpPr>
+        <p:spPr>
+          <a:xfrm>
+            <a:off x="7775448" y="4625035"/>
+            <a:ext cx="64008" cy="755294"/>
+          </a:xfrm>
+          <a:prstGeom prst="rect">
+            <a:avLst/>
+          </a:prstGeom>
+          <a:solidFill>
+            <a:srgbClr val="2587C5"/>
+          </a:solidFill>
+          <a:ln/>
+        </p:spPr>
+      </p:sp>
+      <p:sp>
+        <p:nvSpPr>
+          <p:cNvPr id="43" name="Text 41"/>
           <p:cNvSpPr txBox="1"/>
           <p:nvPr/>
         </p:nvSpPr>
@@ -19285,7 +19305,7 @@
       </p:sp>
       <p:sp>
         <p:nvSpPr>
-          <p:cNvPr id="43" name="Text 41"/>
+          <p:cNvPr id="44" name="Text 42"/>
           <p:cNvSpPr txBox="1"/>
           <p:nvPr/>
         </p:nvSpPr>
@@ -19364,7 +19384,7 @@
       </p:sp>
       <p:sp>
         <p:nvSpPr>
-          <p:cNvPr id="44" name="Text 42"/>
+          <p:cNvPr id="45" name="Text 43"/>
           <p:cNvSpPr txBox="1"/>
           <p:nvPr/>
         </p:nvSpPr>
@@ -19403,7 +19423,7 @@
       </p:sp>
       <p:sp>
         <p:nvSpPr>
-          <p:cNvPr id="45" name="Shape 43"/>
+          <p:cNvPr id="46" name="Shape 44"/>
           <p:cNvSpPr/>
           <p:nvPr/>
         </p:nvSpPr>
@@ -19423,7 +19443,7 @@
       </p:sp>
       <p:sp>
         <p:nvSpPr>
-          <p:cNvPr id="46" name="Text 44"/>
+          <p:cNvPr id="47" name="Text 45"/>
           <p:cNvSpPr txBox="1"/>
           <p:nvPr/>
         </p:nvSpPr>
@@ -19462,7 +19482,7 @@
       </p:sp>
       <p:sp>
         <p:nvSpPr>
-          <p:cNvPr id="47" name="Text 45"/>
+          <p:cNvPr id="48" name="Text 46"/>
           <p:cNvSpPr txBox="1"/>
           <p:nvPr/>
         </p:nvSpPr>
@@ -19541,7 +19561,7 @@
       </p:sp>
       <p:sp>
         <p:nvSpPr>
-          <p:cNvPr id="48" name="Text 46"/>
+          <p:cNvPr id="49" name="Text 47"/>
           <p:cNvSpPr txBox="1"/>
           <p:nvPr/>
         </p:nvSpPr>
@@ -19580,7 +19600,7 @@
       </p:sp>
       <p:sp>
         <p:nvSpPr>
-          <p:cNvPr id="49" name="Shape 47"/>
+          <p:cNvPr id="50" name="Shape 48"/>
           <p:cNvSpPr/>
           <p:nvPr/>
         </p:nvSpPr>
@@ -19600,7 +19620,7 @@
       </p:sp>
       <p:sp>
         <p:nvSpPr>
-          <p:cNvPr id="50" name="Text 48"/>
+          <p:cNvPr id="51" name="Text 49"/>
           <p:cNvSpPr txBox="1"/>
           <p:nvPr/>
         </p:nvSpPr>
@@ -19639,7 +19659,7 @@
       </p:sp>
       <p:sp>
         <p:nvSpPr>
-          <p:cNvPr id="51" name="Text 49"/>
+          <p:cNvPr id="52" name="Text 50"/>
           <p:cNvSpPr txBox="1"/>
           <p:nvPr/>
         </p:nvSpPr>
@@ -19678,7 +19698,7 @@
       </p:sp>
       <p:sp>
         <p:nvSpPr>
-          <p:cNvPr id="52" name="Shape 50"/>
+          <p:cNvPr id="53" name="Shape 51"/>
           <p:cNvSpPr/>
           <p:nvPr/>
         </p:nvSpPr>
@@ -19698,7 +19718,7 @@
       </p:sp>
       <p:sp>
         <p:nvSpPr>
-          <p:cNvPr id="53" name="Text 51"/>
+          <p:cNvPr id="54" name="Text 52"/>
           <p:cNvSpPr txBox="1"/>
           <p:nvPr/>
         </p:nvSpPr>
@@ -19737,7 +19757,7 @@
       </p:sp>
       <p:sp>
         <p:nvSpPr>
-          <p:cNvPr id="54" name="Text 52"/>
+          <p:cNvPr id="55" name="Text 53"/>
           <p:cNvSpPr txBox="1"/>
           <p:nvPr/>
         </p:nvSpPr>
@@ -19816,7 +19836,7 @@
       </p:sp>
       <p:sp>
         <p:nvSpPr>
-          <p:cNvPr id="55" name="Text 53"/>
+          <p:cNvPr id="56" name="Text 54"/>
           <p:cNvSpPr txBox="1"/>
           <p:nvPr/>
         </p:nvSpPr>
@@ -19855,7 +19875,7 @@
       </p:sp>
       <p:sp>
         <p:nvSpPr>
-          <p:cNvPr id="56" name="Shape 54"/>
+          <p:cNvPr id="57" name="Shape 55"/>
           <p:cNvSpPr/>
           <p:nvPr/>
         </p:nvSpPr>
@@ -19875,7 +19895,7 @@
       </p:sp>
       <p:sp>
         <p:nvSpPr>
-          <p:cNvPr id="57" name="Text 55"/>
+          <p:cNvPr id="58" name="Text 56"/>
           <p:cNvSpPr txBox="1"/>
           <p:nvPr/>
         </p:nvSpPr>
@@ -19914,7 +19934,7 @@
       </p:sp>
       <p:sp>
         <p:nvSpPr>
-          <p:cNvPr id="58" name="Text 56"/>
+          <p:cNvPr id="59" name="Text 57"/>
           <p:cNvSpPr txBox="1"/>
           <p:nvPr/>
         </p:nvSpPr>
@@ -19993,7 +20013,7 @@
       </p:sp>
       <p:sp>
         <p:nvSpPr>
-          <p:cNvPr id="59" name="Text 57"/>
+          <p:cNvPr id="60" name="Text 58"/>
           <p:cNvSpPr txBox="1"/>
           <p:nvPr/>
         </p:nvSpPr>
@@ -20032,7 +20052,7 @@
       </p:sp>
       <p:sp>
         <p:nvSpPr>
-          <p:cNvPr id="60" name="Shape 58"/>
+          <p:cNvPr id="61" name="Shape 59"/>
           <p:cNvSpPr/>
           <p:nvPr/>
         </p:nvSpPr>
@@ -20052,7 +20072,7 @@
       </p:sp>
       <p:sp>
         <p:nvSpPr>
-          <p:cNvPr id="61" name="Text 59"/>
+          <p:cNvPr id="62" name="Text 60"/>
           <p:cNvSpPr txBox="1"/>
           <p:nvPr/>
         </p:nvSpPr>
@@ -20091,7 +20111,7 @@
       </p:sp>
       <p:sp>
         <p:nvSpPr>
-          <p:cNvPr id="62" name="Text 60"/>
+          <p:cNvPr id="63" name="Text 61"/>
           <p:cNvSpPr txBox="1"/>
           <p:nvPr/>
         </p:nvSpPr>
@@ -20170,7 +20190,7 @@
       </p:sp>
       <p:sp>
         <p:nvSpPr>
-          <p:cNvPr id="63" name="Text 61"/>
+          <p:cNvPr id="64" name="Text 62"/>
           <p:cNvSpPr txBox="1"/>
           <p:nvPr/>
         </p:nvSpPr>
@@ -20209,7 +20229,7 @@
       </p:sp>
       <p:sp>
         <p:nvSpPr>
-          <p:cNvPr id="64" name="Text 62"/>
+          <p:cNvPr id="65" name="Text 63"/>
           <p:cNvSpPr txBox="1"/>
           <p:nvPr/>
         </p:nvSpPr>
@@ -20248,7 +20268,7 @@
       </p:sp>
       <p:sp>
         <p:nvSpPr>
-          <p:cNvPr id="65" name="Text 63"/>
+          <p:cNvPr id="66" name="Text 64"/>
           <p:cNvSpPr txBox="1"/>
           <p:nvPr/>
         </p:nvSpPr>
@@ -20327,7 +20347,7 @@
       </p:sp>
       <p:sp>
         <p:nvSpPr>
-          <p:cNvPr id="66" name="Text 64"/>
+          <p:cNvPr id="67" name="Text 65"/>
           <p:cNvSpPr txBox="1"/>
           <p:nvPr/>
         </p:nvSpPr>
@@ -20366,7 +20386,7 @@
       </p:sp>
       <p:sp>
         <p:nvSpPr>
-          <p:cNvPr id="67" name="Shape 65"/>
+          <p:cNvPr id="68" name="Shape 66"/>
           <p:cNvSpPr/>
           <p:nvPr/>
         </p:nvSpPr>
@@ -20386,7 +20406,27 @@
       </p:sp>
       <p:sp>
         <p:nvSpPr>
-          <p:cNvPr id="68" name="Text 66"/>
+          <p:cNvPr id="69" name="Shape 67"/>
+          <p:cNvSpPr/>
+          <p:nvPr/>
+        </p:nvSpPr>
+        <p:spPr>
+          <a:xfrm>
+            <a:off x="11466576" y="5453482"/>
+            <a:ext cx="64008" cy="755294"/>
+          </a:xfrm>
+          <a:prstGeom prst="rect">
+            <a:avLst/>
+          </a:prstGeom>
+          <a:solidFill>
+            <a:srgbClr val="2587C5"/>
+          </a:solidFill>
+          <a:ln/>
+        </p:spPr>
+      </p:sp>
+      <p:sp>
+        <p:nvSpPr>
+          <p:cNvPr id="70" name="Text 68"/>
           <p:cNvSpPr txBox="1"/>
           <p:nvPr/>
         </p:nvSpPr>
@@ -20425,7 +20465,7 @@
       </p:sp>
       <p:sp>
         <p:nvSpPr>
-          <p:cNvPr id="69" name="Text 67"/>
+          <p:cNvPr id="71" name="Text 69"/>
           <p:cNvSpPr txBox="1"/>
           <p:nvPr/>
         </p:nvSpPr>
@@ -20504,7 +20544,7 @@
       </p:sp>
       <p:sp>
         <p:nvSpPr>
-          <p:cNvPr id="70" name="Text 68"/>
+          <p:cNvPr id="72" name="Text 70"/>
           <p:cNvSpPr txBox="1"/>
           <p:nvPr/>
         </p:nvSpPr>

--- a/day2-deck/decks/Labor Mix - House Style.pptx
+++ b/day2-deck/decks/Labor Mix - House Style.pptx
@@ -19690,7 +19690,7 @@
                 <a:ea typeface="Inter" pitchFamily="34" charset="-122"/>
                 <a:cs typeface="Inter" pitchFamily="34" charset="-120"/>
               </a:rPr>
-              <a:t>Jul–Sep vs Jan–Mar this year</a:t>
+              <a:t>Q3 vs Q1, this year</a:t>
             </a:r>
             <a:endParaRPr lang="en-US" sz="1200" dirty="0"/>
           </a:p>

--- a/day2-deck/decks/Labor Mix - House Style.pptx
+++ b/day2-deck/decks/Labor Mix - House Style.pptx
@@ -13106,7 +13106,7 @@
         <p:spPr>
           <a:xfrm>
             <a:off x="3785616" y="2151755"/>
-            <a:ext cx="701821" cy="110352"/>
+            <a:ext cx="705273" cy="110352"/>
           </a:xfrm>
           <a:prstGeom prst="rect">
             <a:avLst/>
@@ -13150,7 +13150,7 @@
                 <a:ea typeface="Inter" pitchFamily="34" charset="-122"/>
                 <a:cs typeface="Inter" pitchFamily="34" charset="-120"/>
               </a:rPr>
-              <a:t>+9.7 pts</a:t>
+              <a:t>+9.8 pts</a:t>
             </a:r>
             <a:endParaRPr lang="en-US" sz="1200" dirty="0"/>
           </a:p>
@@ -13243,7 +13243,7 @@
         <p:spPr>
           <a:xfrm>
             <a:off x="3785616" y="2391651"/>
-            <a:ext cx="687455" cy="110352"/>
+            <a:ext cx="683683" cy="110352"/>
           </a:xfrm>
           <a:prstGeom prst="rect">
             <a:avLst/>
@@ -13380,7 +13380,7 @@
         <p:spPr>
           <a:xfrm>
             <a:off x="3785616" y="2631546"/>
-            <a:ext cx="667785" cy="110352"/>
+            <a:ext cx="662093" cy="110352"/>
           </a:xfrm>
           <a:prstGeom prst="rect">
             <a:avLst/>
@@ -13424,7 +13424,7 @@
                 <a:ea typeface="Inter" pitchFamily="34" charset="-122"/>
                 <a:cs typeface="Inter" pitchFamily="34" charset="-120"/>
               </a:rPr>
-              <a:t>+9.3 pts</a:t>
+              <a:t>+9.2 pts</a:t>
             </a:r>
             <a:endParaRPr lang="en-US" sz="1200" dirty="0"/>
           </a:p>
@@ -13517,7 +13517,7 @@
         <p:spPr>
           <a:xfrm>
             <a:off x="3785616" y="2871442"/>
-            <a:ext cx="642759" cy="110352"/>
+            <a:ext cx="647700" cy="110352"/>
           </a:xfrm>
           <a:prstGeom prst="rect">
             <a:avLst/>
@@ -13561,7 +13561,7 @@
                 <a:ea typeface="Inter" pitchFamily="34" charset="-122"/>
                 <a:cs typeface="Inter" pitchFamily="34" charset="-120"/>
               </a:rPr>
-              <a:t>+8.9 pts</a:t>
+              <a:t>+9.0 pts</a:t>
             </a:r>
             <a:endParaRPr lang="en-US" sz="1200" dirty="0"/>
           </a:p>
@@ -13654,7 +13654,7 @@
         <p:spPr>
           <a:xfrm>
             <a:off x="3785616" y="3111337"/>
-            <a:ext cx="457956" cy="110352"/>
+            <a:ext cx="460587" cy="110352"/>
           </a:xfrm>
           <a:prstGeom prst="rect">
             <a:avLst/>
@@ -13791,7 +13791,7 @@
         <p:spPr>
           <a:xfrm>
             <a:off x="3785616" y="3351233"/>
-            <a:ext cx="385898" cy="110352"/>
+            <a:ext cx="388620" cy="110352"/>
           </a:xfrm>
           <a:prstGeom prst="rect">
             <a:avLst/>
@@ -13928,7 +13928,7 @@
         <p:spPr>
           <a:xfrm>
             <a:off x="3785616" y="3591128"/>
-            <a:ext cx="311681" cy="110352"/>
+            <a:ext cx="316653" cy="110352"/>
           </a:xfrm>
           <a:prstGeom prst="rect">
             <a:avLst/>
@@ -13972,7 +13972,7 @@
                 <a:ea typeface="Inter" pitchFamily="34" charset="-122"/>
                 <a:cs typeface="Inter" pitchFamily="34" charset="-120"/>
               </a:rPr>
-              <a:t>+4.3 pts</a:t>
+              <a:t>+4.4 pts</a:t>
             </a:r>
             <a:endParaRPr lang="en-US" sz="1200" dirty="0"/>
           </a:p>
@@ -14065,7 +14065,7 @@
         <p:spPr>
           <a:xfrm>
             <a:off x="3785616" y="3831024"/>
-            <a:ext cx="305606" cy="110352"/>
+            <a:ext cx="302260" cy="110352"/>
           </a:xfrm>
           <a:prstGeom prst="rect">
             <a:avLst/>
@@ -14202,7 +14202,7 @@
         <p:spPr>
           <a:xfrm>
             <a:off x="3785616" y="4070920"/>
-            <a:ext cx="284145" cy="110352"/>
+            <a:ext cx="280670" cy="110352"/>
           </a:xfrm>
           <a:prstGeom prst="rect">
             <a:avLst/>
@@ -14339,7 +14339,7 @@
         <p:spPr>
           <a:xfrm>
             <a:off x="3785616" y="4310815"/>
-            <a:ext cx="231565" cy="110352"/>
+            <a:ext cx="230293" cy="110352"/>
           </a:xfrm>
           <a:prstGeom prst="rect">
             <a:avLst/>
@@ -14476,7 +14476,7 @@
         <p:spPr>
           <a:xfrm>
             <a:off x="3785616" y="4550711"/>
-            <a:ext cx="181969" cy="110352"/>
+            <a:ext cx="179917" cy="110352"/>
           </a:xfrm>
           <a:prstGeom prst="rect">
             <a:avLst/>
@@ -14613,7 +14613,7 @@
         <p:spPr>
           <a:xfrm>
             <a:off x="3785616" y="4790606"/>
-            <a:ext cx="175356" cy="110352"/>
+            <a:ext cx="172720" cy="110352"/>
           </a:xfrm>
           <a:prstGeom prst="rect">
             <a:avLst/>
@@ -14750,7 +14750,7 @@
         <p:spPr>
           <a:xfrm>
             <a:off x="3785616" y="5030502"/>
-            <a:ext cx="92081" cy="110352"/>
+            <a:ext cx="93557" cy="110352"/>
           </a:xfrm>
           <a:prstGeom prst="rect">
             <a:avLst/>
@@ -14887,7 +14887,7 @@
         <p:spPr>
           <a:xfrm>
             <a:off x="3785616" y="5270397"/>
-            <a:ext cx="74077" cy="110352"/>
+            <a:ext cx="71967" cy="110352"/>
           </a:xfrm>
           <a:prstGeom prst="rect">
             <a:avLst/>
@@ -15024,7 +15024,7 @@
         <p:spPr>
           <a:xfrm>
             <a:off x="3785616" y="5510293"/>
-            <a:ext cx="54365" cy="110352"/>
+            <a:ext cx="50377" cy="110352"/>
           </a:xfrm>
           <a:prstGeom prst="rect">
             <a:avLst/>
@@ -15068,7 +15068,7 @@
                 <a:ea typeface="Inter" pitchFamily="34" charset="-122"/>
                 <a:cs typeface="Inter" pitchFamily="34" charset="-120"/>
               </a:rPr>
-              <a:t>+0.8 pts</a:t>
+              <a:t>+0.7 pts</a:t>
             </a:r>
             <a:endParaRPr lang="en-US" sz="1200" dirty="0"/>
           </a:p>
@@ -15161,7 +15161,7 @@
         <p:spPr>
           <a:xfrm>
             <a:off x="3785616" y="5750188"/>
-            <a:ext cx="16625" cy="110352"/>
+            <a:ext cx="21590" cy="110352"/>
           </a:xfrm>
           <a:prstGeom prst="rect">
             <a:avLst/>
@@ -15205,7 +15205,7 @@
                 <a:ea typeface="Inter" pitchFamily="34" charset="-122"/>
                 <a:cs typeface="Inter" pitchFamily="34" charset="-120"/>
               </a:rPr>
-              <a:t>+0.2 pts</a:t>
+              <a:t>+0.3 pts</a:t>
             </a:r>
             <a:endParaRPr lang="en-US" sz="1200" dirty="0"/>
           </a:p>
@@ -15571,7 +15571,7 @@
         </p:nvSpPr>
         <p:spPr>
           <a:xfrm>
-            <a:off x="9331272" y="2391651"/>
+            <a:off x="9328827" y="2391651"/>
             <a:ext cx="12802" cy="110352"/>
           </a:xfrm>
           <a:prstGeom prst="rect">
@@ -15708,8 +15708,8 @@
         </p:nvSpPr>
         <p:spPr>
           <a:xfrm>
-            <a:off x="9318561" y="2631546"/>
-            <a:ext cx="17463" cy="110352"/>
+            <a:off x="9321631" y="2631546"/>
+            <a:ext cx="14393" cy="110352"/>
           </a:xfrm>
           <a:prstGeom prst="rect">
             <a:avLst/>
@@ -15845,8 +15845,8 @@
         </p:nvSpPr>
         <p:spPr>
           <a:xfrm>
-            <a:off x="9312447" y="2871442"/>
-            <a:ext cx="23577" cy="110352"/>
+            <a:off x="9314434" y="2871442"/>
+            <a:ext cx="21590" cy="110352"/>
           </a:xfrm>
           <a:prstGeom prst="rect">
             <a:avLst/>
@@ -15982,8 +15982,8 @@
         </p:nvSpPr>
         <p:spPr>
           <a:xfrm>
-            <a:off x="9255154" y="3111337"/>
-            <a:ext cx="80870" cy="110352"/>
+            <a:off x="9249664" y="3111337"/>
+            <a:ext cx="86360" cy="110352"/>
           </a:xfrm>
           <a:prstGeom prst="rect">
             <a:avLst/>
@@ -16027,7 +16027,7 @@
                 <a:ea typeface="Inter" pitchFamily="34" charset="-122"/>
                 <a:cs typeface="Inter" pitchFamily="34" charset="-120"/>
               </a:rPr>
-              <a:t>−1.1 pts</a:t>
+              <a:t>−1.2 pts</a:t>
             </a:r>
             <a:endParaRPr lang="en-US" sz="1200" dirty="0"/>
           </a:p>
@@ -16119,8 +16119,8 @@
         </p:nvSpPr>
         <p:spPr>
           <a:xfrm>
-            <a:off x="9239288" y="3351233"/>
-            <a:ext cx="96736" cy="110352"/>
+            <a:off x="9235271" y="3351233"/>
+            <a:ext cx="100753" cy="110352"/>
           </a:xfrm>
           <a:prstGeom prst="rect">
             <a:avLst/>
@@ -16164,7 +16164,7 @@
                 <a:ea typeface="Inter" pitchFamily="34" charset="-122"/>
                 <a:cs typeface="Inter" pitchFamily="34" charset="-120"/>
               </a:rPr>
-              <a:t>−1.3 pts</a:t>
+              <a:t>−1.4 pts</a:t>
             </a:r>
             <a:endParaRPr lang="en-US" sz="1200" dirty="0"/>
           </a:p>
@@ -16256,8 +16256,8 @@
         </p:nvSpPr>
         <p:spPr>
           <a:xfrm>
-            <a:off x="9234185" y="3591128"/>
-            <a:ext cx="101839" cy="110352"/>
+            <a:off x="9235271" y="3591128"/>
+            <a:ext cx="100753" cy="110352"/>
           </a:xfrm>
           <a:prstGeom prst="rect">
             <a:avLst/>
@@ -16393,8 +16393,8 @@
         </p:nvSpPr>
         <p:spPr>
           <a:xfrm>
-            <a:off x="9169807" y="3831024"/>
-            <a:ext cx="166217" cy="110352"/>
+            <a:off x="9170501" y="3831024"/>
+            <a:ext cx="165523" cy="110352"/>
           </a:xfrm>
           <a:prstGeom prst="rect">
             <a:avLst/>
@@ -16530,8 +16530,8 @@
         </p:nvSpPr>
         <p:spPr>
           <a:xfrm>
-            <a:off x="9092399" y="4070920"/>
-            <a:ext cx="243625" cy="110352"/>
+            <a:off x="9098534" y="4070920"/>
+            <a:ext cx="237490" cy="110352"/>
           </a:xfrm>
           <a:prstGeom prst="rect">
             <a:avLst/>
@@ -16575,7 +16575,7 @@
                 <a:ea typeface="Inter" pitchFamily="34" charset="-122"/>
                 <a:cs typeface="Inter" pitchFamily="34" charset="-120"/>
               </a:rPr>
-              <a:t>−3.4 pts</a:t>
+              <a:t>−3.3 pts</a:t>
             </a:r>
             <a:endParaRPr lang="en-US" sz="1200" dirty="0"/>
           </a:p>
@@ -16667,8 +16667,8 @@
         </p:nvSpPr>
         <p:spPr>
           <a:xfrm>
-            <a:off x="9057340" y="4310815"/>
-            <a:ext cx="278684" cy="110352"/>
+            <a:off x="9055354" y="4310815"/>
+            <a:ext cx="280670" cy="110352"/>
           </a:xfrm>
           <a:prstGeom prst="rect">
             <a:avLst/>
@@ -16804,8 +16804,8 @@
         </p:nvSpPr>
         <p:spPr>
           <a:xfrm>
-            <a:off x="9043690" y="4550711"/>
-            <a:ext cx="292334" cy="110352"/>
+            <a:off x="9040961" y="4550711"/>
+            <a:ext cx="295063" cy="110352"/>
           </a:xfrm>
           <a:prstGeom prst="rect">
             <a:avLst/>
@@ -16941,8 +16941,8 @@
         </p:nvSpPr>
         <p:spPr>
           <a:xfrm>
-            <a:off x="8923753" y="4790606"/>
-            <a:ext cx="412271" cy="110352"/>
+            <a:off x="8925814" y="4790606"/>
+            <a:ext cx="410210" cy="110352"/>
           </a:xfrm>
           <a:prstGeom prst="rect">
             <a:avLst/>
@@ -17078,8 +17078,8 @@
         </p:nvSpPr>
         <p:spPr>
           <a:xfrm>
-            <a:off x="8868856" y="5030502"/>
-            <a:ext cx="467168" cy="110352"/>
+            <a:off x="8868241" y="5030502"/>
+            <a:ext cx="467783" cy="110352"/>
           </a:xfrm>
           <a:prstGeom prst="rect">
             <a:avLst/>
@@ -17215,8 +17215,8 @@
         </p:nvSpPr>
         <p:spPr>
           <a:xfrm>
-            <a:off x="8843092" y="5270397"/>
-            <a:ext cx="492932" cy="110352"/>
+            <a:off x="8846651" y="5270397"/>
+            <a:ext cx="489373" cy="110352"/>
           </a:xfrm>
           <a:prstGeom prst="rect">
             <a:avLst/>
@@ -17352,8 +17352,8 @@
         </p:nvSpPr>
         <p:spPr>
           <a:xfrm>
-            <a:off x="8752645" y="5510293"/>
-            <a:ext cx="583379" cy="110352"/>
+            <a:off x="8753094" y="5510293"/>
+            <a:ext cx="582930" cy="110352"/>
           </a:xfrm>
           <a:prstGeom prst="rect">
             <a:avLst/>
@@ -18098,7 +18098,7 @@
                 <a:ea typeface="Inter" pitchFamily="34" charset="-122"/>
                 <a:cs typeface="Inter" pitchFamily="34" charset="-120"/>
               </a:rPr>
-              <a:t>+9.7 pts</a:t>
+              <a:t>+9.8 pts</a:t>
             </a:r>
             <a:endParaRPr lang="en-US" sz="1600" dirty="0"/>
           </a:p>
@@ -18452,7 +18452,7 @@
                 <a:ea typeface="Inter" pitchFamily="34" charset="-122"/>
                 <a:cs typeface="Inter" pitchFamily="34" charset="-120"/>
               </a:rPr>
-              <a:t>+9.3 pts</a:t>
+              <a:t>+9.2 pts</a:t>
             </a:r>
             <a:endParaRPr lang="en-US" sz="1600" dirty="0"/>
           </a:p>
@@ -18629,7 +18629,7 @@
                 <a:ea typeface="Inter" pitchFamily="34" charset="-122"/>
                 <a:cs typeface="Inter" pitchFamily="34" charset="-120"/>
               </a:rPr>
-              <a:t>+8.9 pts</a:t>
+              <a:t>+9.0 pts</a:t>
             </a:r>
             <a:endParaRPr lang="en-US" sz="1600" dirty="0"/>
           </a:p>
@@ -19867,7 +19867,7 @@
                 <a:ea typeface="Inter" pitchFamily="34" charset="-122"/>
                 <a:cs typeface="Inter" pitchFamily="34" charset="-120"/>
               </a:rPr>
-              <a:t>+8.9 pts</a:t>
+              <a:t>+8.8 pts</a:t>
             </a:r>
             <a:endParaRPr lang="en-US" sz="1600" dirty="0"/>
           </a:p>

--- a/day2-deck/decks/Labor Mix - House Style.pptx
+++ b/day2-deck/decks/Labor Mix - House Style.pptx
@@ -2762,7 +2762,7 @@
           <a:p>
             <a:r>
               <a:rPr lang="en-US" dirty="0"/>
-              <a:t>Takeaway with the store call-outs (off the slide): Ask Mazda, VW Henderson and Acura what changed. Ask LR Reno, Hyundai Prescott and Toyota Henderson what got in the way. Ask Lexus, Acura and Chevy GMC Bullhead what they started this year.Source: Qlik - Closed Repair Orders. Labor sale by pay type, Jan-Sep by close month. Same-store, INEOS excluded. GMC Prescott body shop labor types excluded. Customer-pay labor sale / total labor sale (customer pay + warranty + internal). Top and bottom five stores by change in Customer Pay Share of Labor Sale, Jan-Sep 2026 vs 2025. Moving now: Jul-Sep 2026 vs Jan-Mar 2026, each store against itself; the group moved −0.3 pts on the same basis, so part of every store's change is seasonal. Green bar at the right of a row: the store is on both the top five vs last year and the top five moving now.Conversation starter: each top store says one thing they started doing; each bottom store says what got in the way and what they would try. The room trades ideas. Moving now: ask the top three what they started this year.</a:t>
+              <a:t>Takeaway with the store call-outs (off the slide): Ask Mazda, VW Henderson and Acura what changed. Ask LR Reno, Hyundai Prescott and Toyota Henderson what got in the way. Ask Lexus, Acura and Chevy GMC Bullhead what they started this year.Source: Qlik - Closed Repair Orders. Labor sale by pay type, Jan-Sep by close month. Same-store, INEOS excluded. GMC Prescott body shop labor types excluded. Customer-pay labor sale / total labor sale (customer pay + warranty + internal). Top and bottom five stores by change in Customer Pay Share of Labor Sale, Jan-Sep 2026 vs 2025. Moving now: Jul-Sep 2026 vs Jan-Mar 2026, each store against itself; the group moved −0.3 pts on the same basis, so part of every store's change is seasonal. Green bar at the right of a row: the store is on both the top five vs last year and the top five moving now. Blue bar: a turnaround, on the bottom five vs last year and the top five moving now.Conversation starter: each top store says one thing they started doing; each bottom store says what got in the way and what they would try. The room trades ideas. Moving now: ask the top three what they started this year.</a:t>
             </a:r>
             <a:endParaRPr lang="en-US" dirty="0"/>
           </a:p>

--- a/day2-deck/decks/Labor Mix - House Style.pptx
+++ b/day2-deck/decks/Labor Mix - House Style.pptx
@@ -2762,7 +2762,7 @@
           <a:p>
             <a:r>
               <a:rPr lang="en-US" dirty="0"/>
-              <a:t>Takeaway with the store call-outs (off the slide): Ask Mazda, VW Henderson and Acura what changed. Ask LR Reno, Hyundai Prescott and Toyota Henderson what got in the way. Ask Lexus, Acura and Chevy GMC Bullhead what they started this year.Source: Qlik - Closed Repair Orders. Labor sale by pay type, Jan-Sep by close month. Same-store, INEOS excluded. GMC Prescott body shop labor types excluded. Customer-pay labor sale / total labor sale (customer pay + warranty + internal). Top and bottom five stores by change in Customer Pay Share of Labor Sale, Jan-Sep 2026 vs 2025. Moving now: Jul-Sep 2026 vs Jan-Mar 2026, each store against itself; the group moved −0.3 pts on the same basis, so part of every store's change is seasonal. Green bar at the right of a row: the store is on both the top five vs last year and the top five moving now. Blue bar: a turnaround, on the bottom five vs last year and the top five moving now.Conversation starter: each top store says one thing they started doing; each bottom store says what got in the way and what they would try. The room trades ideas. Moving now: ask the top three what they started this year.</a:t>
+              <a:t>Takeaway with the store call-outs (off the slide): Ask Mazda, VW Henderson and Acura what changed. Ask LR Reno, Hyundai Prescott and Toyota Henderson what got in the way. Ask Lexus, Acura and Chevy GMC Bullhead what they started this year.Source: Qlik - Closed Repair Orders. Labor sale by pay type, Jan-Sep by close month. Same-store, INEOS excluded. GMC Prescott body shop labor types excluded. Customer-pay labor sale / total labor sale (customer pay + warranty + internal). Top and bottom three stores by change in Customer Pay Share of Labor Sale, Jan-Sep 2026 vs 2025. Moving now: Jul-Sep 2026 vs Jan-Mar 2026, each store against itself; the group moved −0.3 pts on the same basis, so part of every store's change is seasonal. Green bar at the right of a row: the store is on both the top three vs last year and the top three moving now. Blue bar: a turnaround, on the bottom three vs last year and the top three moving now.Conversation starter: each top store says one thing they started doing; each bottom store says what got in the way and what they would try. The room trades ideas. Moving now: ask the top three what they started this year.</a:t>
             </a:r>
             <a:endParaRPr lang="en-US" dirty="0"/>
           </a:p>
@@ -17725,7 +17725,7 @@
                 <a:ea typeface="Inter" pitchFamily="34" charset="-122"/>
                 <a:cs typeface="Inter" pitchFamily="34" charset="-120"/>
               </a:rPr>
-              <a:t>TOP 5 VS LAST YEAR</a:t>
+              <a:t>TOP 3 VS LAST YEAR</a:t>
             </a:r>
             <a:endParaRPr lang="en-US" sz="1500" dirty="0"/>
           </a:p>
@@ -17779,7 +17779,7 @@
         <p:spPr>
           <a:xfrm>
             <a:off x="658368" y="2103120"/>
-            <a:ext cx="3489960" cy="828446"/>
+            <a:ext cx="3489960" cy="1380744"/>
           </a:xfrm>
           <a:prstGeom prst="rect">
             <a:avLst/>
@@ -17799,7 +17799,7 @@
         <p:spPr>
           <a:xfrm>
             <a:off x="749808" y="2103120"/>
-            <a:ext cx="365760" cy="828446"/>
+            <a:ext cx="365760" cy="1380744"/>
           </a:xfrm>
           <a:prstGeom prst="rect">
             <a:avLst/>
@@ -17815,7 +17815,7 @@
               <a:buNone/>
             </a:pPr>
             <a:r>
-              <a:rPr lang="en-US" sz="1500" b="1" dirty="0">
+              <a:rPr lang="en-US" sz="2000" b="1" dirty="0">
                 <a:solidFill>
                   <a:srgbClr val="0B2C4A"/>
                 </a:solidFill>
@@ -17825,7 +17825,7 @@
               </a:rPr>
               <a:t>1</a:t>
             </a:r>
-            <a:endParaRPr lang="en-US" sz="1500" dirty="0"/>
+            <a:endParaRPr lang="en-US" sz="2000" dirty="0"/>
           </a:p>
         </p:txBody>
       </p:sp>
@@ -17837,8 +17837,8 @@
         </p:nvSpPr>
         <p:spPr>
           <a:xfrm>
-            <a:off x="1097280" y="2103120"/>
-            <a:ext cx="1825752" cy="828446"/>
+            <a:off x="1161288" y="2103120"/>
+            <a:ext cx="1917192" cy="1380744"/>
           </a:xfrm>
           <a:prstGeom prst="rect">
             <a:avLst/>
@@ -17857,7 +17857,7 @@
               <a:buNone/>
             </a:pPr>
             <a:r>
-              <a:rPr lang="en-US" sz="1400" b="1" dirty="0">
+              <a:rPr lang="en-US" sz="1700" b="1" dirty="0">
                 <a:solidFill>
                   <a:srgbClr val="1A1A1A"/>
                 </a:solidFill>
@@ -17867,7 +17867,7 @@
               </a:rPr>
               <a:t>Mazda</a:t>
             </a:r>
-            <a:endParaRPr lang="en-US" sz="1400" dirty="0"/>
+            <a:endParaRPr lang="en-US" sz="1700" dirty="0"/>
           </a:p>
           <a:p>
             <a:pPr indent="0" marL="0">
@@ -17877,7 +17877,7 @@
               <a:buNone/>
             </a:pPr>
             <a:r>
-              <a:rPr lang="en-US" sz="1200" dirty="0">
+              <a:rPr lang="en-US" sz="1400" dirty="0">
                 <a:solidFill>
                   <a:srgbClr val="595959"/>
                 </a:solidFill>
@@ -17894,7 +17894,7 @@
               <a:buNone/>
             </a:pPr>
             <a:r>
-              <a:rPr lang="en-US" sz="1200" b="1" dirty="0">
+              <a:rPr lang="en-US" sz="1400" b="1" dirty="0">
                 <a:solidFill>
                   <a:srgbClr val="0B7A4A"/>
                 </a:solidFill>
@@ -17904,7 +17904,7 @@
               </a:rPr>
               <a:t>56.6%</a:t>
             </a:r>
-            <a:endParaRPr lang="en-US" sz="1400" dirty="0"/>
+            <a:endParaRPr lang="en-US" sz="1700" dirty="0"/>
           </a:p>
         </p:txBody>
       </p:sp>
@@ -17916,8 +17916,8 @@
         </p:nvSpPr>
         <p:spPr>
           <a:xfrm>
-            <a:off x="2941320" y="2103120"/>
-            <a:ext cx="1115568" cy="828446"/>
+            <a:off x="3124200" y="2103120"/>
+            <a:ext cx="932688" cy="1380744"/>
           </a:xfrm>
           <a:prstGeom prst="rect">
             <a:avLst/>
@@ -17933,7 +17933,7 @@
               <a:buNone/>
             </a:pPr>
             <a:r>
-              <a:rPr lang="en-US" sz="1600" b="1" dirty="0">
+              <a:rPr lang="en-US" sz="1800" b="1" dirty="0">
                 <a:solidFill>
                   <a:srgbClr val="0B7A4A"/>
                 </a:solidFill>
@@ -17943,7 +17943,7 @@
               </a:rPr>
               <a:t>+10.8 pts</a:t>
             </a:r>
-            <a:endParaRPr lang="en-US" sz="1600" dirty="0"/>
+            <a:endParaRPr lang="en-US" sz="1800" dirty="0"/>
           </a:p>
         </p:txBody>
       </p:sp>
@@ -17955,8 +17955,8 @@
         </p:nvSpPr>
         <p:spPr>
           <a:xfrm>
-            <a:off x="749808" y="2931566"/>
-            <a:ext cx="365760" cy="828446"/>
+            <a:off x="749808" y="3483864"/>
+            <a:ext cx="365760" cy="1380744"/>
           </a:xfrm>
           <a:prstGeom prst="rect">
             <a:avLst/>
@@ -17972,7 +17972,7 @@
               <a:buNone/>
             </a:pPr>
             <a:r>
-              <a:rPr lang="en-US" sz="1500" b="1" dirty="0">
+              <a:rPr lang="en-US" sz="2000" b="1" dirty="0">
                 <a:solidFill>
                   <a:srgbClr val="0B2C4A"/>
                 </a:solidFill>
@@ -17982,7 +17982,7 @@
               </a:rPr>
               <a:t>2</a:t>
             </a:r>
-            <a:endParaRPr lang="en-US" sz="1500" dirty="0"/>
+            <a:endParaRPr lang="en-US" sz="2000" dirty="0"/>
           </a:p>
         </p:txBody>
       </p:sp>
@@ -17994,8 +17994,8 @@
         </p:nvSpPr>
         <p:spPr>
           <a:xfrm>
-            <a:off x="1097280" y="2931566"/>
-            <a:ext cx="1825752" cy="828446"/>
+            <a:off x="1161288" y="3483864"/>
+            <a:ext cx="1917192" cy="1380744"/>
           </a:xfrm>
           <a:prstGeom prst="rect">
             <a:avLst/>
@@ -18014,7 +18014,7 @@
               <a:buNone/>
             </a:pPr>
             <a:r>
-              <a:rPr lang="en-US" sz="1400" b="1" dirty="0">
+              <a:rPr lang="en-US" sz="1700" b="1" dirty="0">
                 <a:solidFill>
                   <a:srgbClr val="1A1A1A"/>
                 </a:solidFill>
@@ -18024,7 +18024,7 @@
               </a:rPr>
               <a:t>VW Henderson</a:t>
             </a:r>
-            <a:endParaRPr lang="en-US" sz="1400" dirty="0"/>
+            <a:endParaRPr lang="en-US" sz="1700" dirty="0"/>
           </a:p>
           <a:p>
             <a:pPr indent="0" marL="0">
@@ -18034,7 +18034,7 @@
               <a:buNone/>
             </a:pPr>
             <a:r>
-              <a:rPr lang="en-US" sz="1200" dirty="0">
+              <a:rPr lang="en-US" sz="1400" dirty="0">
                 <a:solidFill>
                   <a:srgbClr val="595959"/>
                 </a:solidFill>
@@ -18051,7 +18051,7 @@
               <a:buNone/>
             </a:pPr>
             <a:r>
-              <a:rPr lang="en-US" sz="1200" b="1" dirty="0">
+              <a:rPr lang="en-US" sz="1400" b="1" dirty="0">
                 <a:solidFill>
                   <a:srgbClr val="0B7A4A"/>
                 </a:solidFill>
@@ -18061,7 +18061,7 @@
               </a:rPr>
               <a:t>47.2%</a:t>
             </a:r>
-            <a:endParaRPr lang="en-US" sz="1400" dirty="0"/>
+            <a:endParaRPr lang="en-US" sz="1700" dirty="0"/>
           </a:p>
         </p:txBody>
       </p:sp>
@@ -18073,8 +18073,8 @@
         </p:nvSpPr>
         <p:spPr>
           <a:xfrm>
-            <a:off x="2941320" y="2931566"/>
-            <a:ext cx="1115568" cy="828446"/>
+            <a:off x="3124200" y="3483864"/>
+            <a:ext cx="932688" cy="1380744"/>
           </a:xfrm>
           <a:prstGeom prst="rect">
             <a:avLst/>
@@ -18090,7 +18090,7 @@
               <a:buNone/>
             </a:pPr>
             <a:r>
-              <a:rPr lang="en-US" sz="1600" b="1" dirty="0">
+              <a:rPr lang="en-US" sz="1800" b="1" dirty="0">
                 <a:solidFill>
                   <a:srgbClr val="0B7A4A"/>
                 </a:solidFill>
@@ -18100,7 +18100,7 @@
               </a:rPr>
               <a:t>+9.8 pts</a:t>
             </a:r>
-            <a:endParaRPr lang="en-US" sz="1600" dirty="0"/>
+            <a:endParaRPr lang="en-US" sz="1800" dirty="0"/>
           </a:p>
         </p:txBody>
       </p:sp>
@@ -18112,8 +18112,8 @@
         </p:nvSpPr>
         <p:spPr>
           <a:xfrm>
-            <a:off x="658368" y="3760013"/>
-            <a:ext cx="3489960" cy="828446"/>
+            <a:off x="658368" y="4864608"/>
+            <a:ext cx="3489960" cy="1380744"/>
           </a:xfrm>
           <a:prstGeom prst="rect">
             <a:avLst/>
@@ -18132,8 +18132,8 @@
         </p:nvSpPr>
         <p:spPr>
           <a:xfrm>
-            <a:off x="4084320" y="3796589"/>
-            <a:ext cx="64008" cy="755294"/>
+            <a:off x="4084320" y="4901184"/>
+            <a:ext cx="64008" cy="1307592"/>
           </a:xfrm>
           <a:prstGeom prst="rect">
             <a:avLst/>
@@ -18152,8 +18152,8 @@
         </p:nvSpPr>
         <p:spPr>
           <a:xfrm>
-            <a:off x="749808" y="3760013"/>
-            <a:ext cx="365760" cy="828446"/>
+            <a:off x="749808" y="4864608"/>
+            <a:ext cx="365760" cy="1380744"/>
           </a:xfrm>
           <a:prstGeom prst="rect">
             <a:avLst/>
@@ -18169,7 +18169,7 @@
               <a:buNone/>
             </a:pPr>
             <a:r>
-              <a:rPr lang="en-US" sz="1500" b="1" dirty="0">
+              <a:rPr lang="en-US" sz="2000" b="1" dirty="0">
                 <a:solidFill>
                   <a:srgbClr val="0B2C4A"/>
                 </a:solidFill>
@@ -18179,7 +18179,7 @@
               </a:rPr>
               <a:t>3</a:t>
             </a:r>
-            <a:endParaRPr lang="en-US" sz="1500" dirty="0"/>
+            <a:endParaRPr lang="en-US" sz="2000" dirty="0"/>
           </a:p>
         </p:txBody>
       </p:sp>
@@ -18191,8 +18191,8 @@
         </p:nvSpPr>
         <p:spPr>
           <a:xfrm>
-            <a:off x="1097280" y="3760013"/>
-            <a:ext cx="1825752" cy="828446"/>
+            <a:off x="1161288" y="4864608"/>
+            <a:ext cx="1917192" cy="1380744"/>
           </a:xfrm>
           <a:prstGeom prst="rect">
             <a:avLst/>
@@ -18211,7 +18211,7 @@
               <a:buNone/>
             </a:pPr>
             <a:r>
-              <a:rPr lang="en-US" sz="1400" b="1" dirty="0">
+              <a:rPr lang="en-US" sz="1700" b="1" dirty="0">
                 <a:solidFill>
                   <a:srgbClr val="1A1A1A"/>
                 </a:solidFill>
@@ -18221,7 +18221,7 @@
               </a:rPr>
               <a:t>Acura</a:t>
             </a:r>
-            <a:endParaRPr lang="en-US" sz="1400" dirty="0"/>
+            <a:endParaRPr lang="en-US" sz="1700" dirty="0"/>
           </a:p>
           <a:p>
             <a:pPr indent="0" marL="0">
@@ -18231,7 +18231,7 @@
               <a:buNone/>
             </a:pPr>
             <a:r>
-              <a:rPr lang="en-US" sz="1200" dirty="0">
+              <a:rPr lang="en-US" sz="1400" dirty="0">
                 <a:solidFill>
                   <a:srgbClr val="595959"/>
                 </a:solidFill>
@@ -18248,7 +18248,7 @@
               <a:buNone/>
             </a:pPr>
             <a:r>
-              <a:rPr lang="en-US" sz="1200" b="1" dirty="0">
+              <a:rPr lang="en-US" sz="1400" b="1" dirty="0">
                 <a:solidFill>
                   <a:srgbClr val="0B7A4A"/>
                 </a:solidFill>
@@ -18258,7 +18258,7 @@
               </a:rPr>
               <a:t>48.7%</a:t>
             </a:r>
-            <a:endParaRPr lang="en-US" sz="1400" dirty="0"/>
+            <a:endParaRPr lang="en-US" sz="1700" dirty="0"/>
           </a:p>
         </p:txBody>
       </p:sp>
@@ -18270,8 +18270,8 @@
         </p:nvSpPr>
         <p:spPr>
           <a:xfrm>
-            <a:off x="2941320" y="3760013"/>
-            <a:ext cx="1115568" cy="828446"/>
+            <a:off x="3124200" y="4864608"/>
+            <a:ext cx="932688" cy="1380744"/>
           </a:xfrm>
           <a:prstGeom prst="rect">
             <a:avLst/>
@@ -18287,7 +18287,7 @@
               <a:buNone/>
             </a:pPr>
             <a:r>
-              <a:rPr lang="en-US" sz="1600" b="1" dirty="0">
+              <a:rPr lang="en-US" sz="1800" b="1" dirty="0">
                 <a:solidFill>
                   <a:srgbClr val="0B7A4A"/>
                 </a:solidFill>
@@ -18297,20 +18297,40 @@
               </a:rPr>
               <a:t>+9.5 pts</a:t>
             </a:r>
-            <a:endParaRPr lang="en-US" sz="1600" dirty="0"/>
-          </a:p>
-        </p:txBody>
-      </p:sp>
-      <p:sp>
-        <p:nvSpPr>
-          <p:cNvPr id="21" name="Text 19"/>
-          <p:cNvSpPr txBox="1"/>
-          <p:nvPr/>
-        </p:nvSpPr>
-        <p:spPr>
-          <a:xfrm>
-            <a:off x="749808" y="4588459"/>
-            <a:ext cx="365760" cy="828446"/>
+            <a:endParaRPr lang="en-US" sz="1800" dirty="0"/>
+          </a:p>
+        </p:txBody>
+      </p:sp>
+      <p:sp>
+        <p:nvSpPr>
+          <p:cNvPr id="21" name="Shape 19"/>
+          <p:cNvSpPr/>
+          <p:nvPr/>
+        </p:nvSpPr>
+        <p:spPr>
+          <a:xfrm>
+            <a:off x="4349496" y="1371600"/>
+            <a:ext cx="3489960" cy="45720"/>
+          </a:xfrm>
+          <a:prstGeom prst="rect">
+            <a:avLst/>
+          </a:prstGeom>
+          <a:solidFill>
+            <a:srgbClr val="C2352F"/>
+          </a:solidFill>
+          <a:ln/>
+        </p:spPr>
+      </p:sp>
+      <p:sp>
+        <p:nvSpPr>
+          <p:cNvPr id="22" name="Text 20"/>
+          <p:cNvSpPr txBox="1"/>
+          <p:nvPr/>
+        </p:nvSpPr>
+        <p:spPr>
+          <a:xfrm>
+            <a:off x="4440936" y="1444752"/>
+            <a:ext cx="3307080" cy="274320"/>
           </a:xfrm>
           <a:prstGeom prst="rect">
             <a:avLst/>
@@ -18326,7 +18346,105 @@
               <a:buNone/>
             </a:pPr>
             <a:r>
-              <a:rPr lang="en-US" sz="1500" b="1" dirty="0">
+              <a:rPr lang="en-US" sz="1500" b="1" spc="100" kern="0" dirty="0">
+                <a:solidFill>
+                  <a:srgbClr val="A82B26"/>
+                </a:solidFill>
+                <a:latin typeface="Inter" pitchFamily="34" charset="0"/>
+                <a:ea typeface="Inter" pitchFamily="34" charset="-122"/>
+                <a:cs typeface="Inter" pitchFamily="34" charset="-120"/>
+              </a:rPr>
+              <a:t>BOTTOM 3 VS LAST YEAR</a:t>
+            </a:r>
+            <a:endParaRPr lang="en-US" sz="1500" dirty="0"/>
+          </a:p>
+        </p:txBody>
+      </p:sp>
+      <p:sp>
+        <p:nvSpPr>
+          <p:cNvPr id="23" name="Text 21"/>
+          <p:cNvSpPr txBox="1"/>
+          <p:nvPr/>
+        </p:nvSpPr>
+        <p:spPr>
+          <a:xfrm>
+            <a:off x="4440936" y="1737360"/>
+            <a:ext cx="3307080" cy="274320"/>
+          </a:xfrm>
+          <a:prstGeom prst="rect">
+            <a:avLst/>
+          </a:prstGeom>
+          <a:noFill/>
+          <a:ln/>
+        </p:spPr>
+        <p:txBody>
+          <a:bodyPr wrap="square" lIns="0" tIns="0" rIns="0" bIns="0" rtlCol="0" anchor="ctr"/>
+          <a:lstStyle/>
+          <a:p>
+            <a:pPr indent="0" marL="0">
+              <a:buNone/>
+            </a:pPr>
+            <a:r>
+              <a:rPr lang="en-US" sz="1200" dirty="0">
+                <a:solidFill>
+                  <a:srgbClr val="595959"/>
+                </a:solidFill>
+                <a:latin typeface="Inter" pitchFamily="34" charset="0"/>
+                <a:ea typeface="Inter" pitchFamily="34" charset="-122"/>
+                <a:cs typeface="Inter" pitchFamily="34" charset="-120"/>
+              </a:rPr>
+              <a:t>Jan–Sep, this year vs last</a:t>
+            </a:r>
+            <a:endParaRPr lang="en-US" sz="1200" dirty="0"/>
+          </a:p>
+        </p:txBody>
+      </p:sp>
+      <p:sp>
+        <p:nvSpPr>
+          <p:cNvPr id="24" name="Shape 22"/>
+          <p:cNvSpPr/>
+          <p:nvPr/>
+        </p:nvSpPr>
+        <p:spPr>
+          <a:xfrm>
+            <a:off x="4349496" y="2103120"/>
+            <a:ext cx="3489960" cy="1380744"/>
+          </a:xfrm>
+          <a:prstGeom prst="rect">
+            <a:avLst/>
+          </a:prstGeom>
+          <a:solidFill>
+            <a:srgbClr val="F7F7F7"/>
+          </a:solidFill>
+          <a:ln/>
+        </p:spPr>
+      </p:sp>
+      <p:sp>
+        <p:nvSpPr>
+          <p:cNvPr id="25" name="Text 23"/>
+          <p:cNvSpPr txBox="1"/>
+          <p:nvPr/>
+        </p:nvSpPr>
+        <p:spPr>
+          <a:xfrm>
+            <a:off x="4440936" y="2103120"/>
+            <a:ext cx="365760" cy="1380744"/>
+          </a:xfrm>
+          <a:prstGeom prst="rect">
+            <a:avLst/>
+          </a:prstGeom>
+          <a:noFill/>
+          <a:ln/>
+        </p:spPr>
+        <p:txBody>
+          <a:bodyPr wrap="square" lIns="0" tIns="0" rIns="0" bIns="0" rtlCol="0" anchor="ctr"/>
+          <a:lstStyle/>
+          <a:p>
+            <a:pPr indent="0" marL="0">
+              <a:buNone/>
+            </a:pPr>
+            <a:r>
+              <a:rPr lang="en-US" sz="2000" b="1" dirty="0">
                 <a:solidFill>
                   <a:srgbClr val="0B2C4A"/>
                 </a:solidFill>
@@ -18334,22 +18452,22 @@
                 <a:ea typeface="Inter" pitchFamily="34" charset="-122"/>
                 <a:cs typeface="Inter" pitchFamily="34" charset="-120"/>
               </a:rPr>
-              <a:t>4</a:t>
-            </a:r>
-            <a:endParaRPr lang="en-US" sz="1500" dirty="0"/>
-          </a:p>
-        </p:txBody>
-      </p:sp>
-      <p:sp>
-        <p:nvSpPr>
-          <p:cNvPr id="22" name="Text 20"/>
-          <p:cNvSpPr txBox="1"/>
-          <p:nvPr/>
-        </p:nvSpPr>
-        <p:spPr>
-          <a:xfrm>
-            <a:off x="1097280" y="4588459"/>
-            <a:ext cx="1825752" cy="828446"/>
+              <a:t>33</a:t>
+            </a:r>
+            <a:endParaRPr lang="en-US" sz="2000" dirty="0"/>
+          </a:p>
+        </p:txBody>
+      </p:sp>
+      <p:sp>
+        <p:nvSpPr>
+          <p:cNvPr id="26" name="Text 24"/>
+          <p:cNvSpPr txBox="1"/>
+          <p:nvPr/>
+        </p:nvSpPr>
+        <p:spPr>
+          <a:xfrm>
+            <a:off x="4852416" y="2103120"/>
+            <a:ext cx="1917192" cy="1380744"/>
           </a:xfrm>
           <a:prstGeom prst="rect">
             <a:avLst/>
@@ -18368,7 +18486,7 @@
               <a:buNone/>
             </a:pPr>
             <a:r>
-              <a:rPr lang="en-US" sz="1400" b="1" dirty="0">
+              <a:rPr lang="en-US" sz="1700" b="1" dirty="0">
                 <a:solidFill>
                   <a:srgbClr val="1A1A1A"/>
                 </a:solidFill>
@@ -18376,9 +18494,9 @@
                 <a:ea typeface="Inter" pitchFamily="34" charset="-122"/>
                 <a:cs typeface="Inter" pitchFamily="34" charset="-120"/>
               </a:rPr>
-              <a:t>Subaru St George</a:t>
-            </a:r>
-            <a:endParaRPr lang="en-US" sz="1400" dirty="0"/>
+              <a:t>LR Reno</a:t>
+            </a:r>
+            <a:endParaRPr lang="en-US" sz="1700" dirty="0"/>
           </a:p>
           <a:p>
             <a:pPr indent="0" marL="0">
@@ -18388,7 +18506,7 @@
               <a:buNone/>
             </a:pPr>
             <a:r>
-              <a:rPr lang="en-US" sz="1200" dirty="0">
+              <a:rPr lang="en-US" sz="1400" dirty="0">
                 <a:solidFill>
                   <a:srgbClr val="595959"/>
                 </a:solidFill>
@@ -18396,7 +18514,7 @@
                 <a:ea typeface="Inter" pitchFamily="34" charset="-122"/>
                 <a:cs typeface="Inter" pitchFamily="34" charset="-120"/>
               </a:rPr>
-              <a:t>49.8%  →  </a:t>
+              <a:t>69.6%  →  </a:t>
             </a:r>
             <a:pPr indent="0" marL="0">
               <a:spcAft>
@@ -18405,30 +18523,30 @@
               <a:buNone/>
             </a:pPr>
             <a:r>
-              <a:rPr lang="en-US" sz="1200" b="1" dirty="0">
-                <a:solidFill>
-                  <a:srgbClr val="0B7A4A"/>
-                </a:solidFill>
-                <a:latin typeface="Inter" pitchFamily="34" charset="0"/>
-                <a:ea typeface="Inter" pitchFamily="34" charset="-122"/>
-                <a:cs typeface="Inter" pitchFamily="34" charset="-120"/>
-              </a:rPr>
-              <a:t>59.0%</a:t>
-            </a:r>
-            <a:endParaRPr lang="en-US" sz="1400" dirty="0"/>
-          </a:p>
-        </p:txBody>
-      </p:sp>
-      <p:sp>
-        <p:nvSpPr>
-          <p:cNvPr id="23" name="Text 21"/>
-          <p:cNvSpPr txBox="1"/>
-          <p:nvPr/>
-        </p:nvSpPr>
-        <p:spPr>
-          <a:xfrm>
-            <a:off x="2941320" y="4588459"/>
-            <a:ext cx="1115568" cy="828446"/>
+              <a:rPr lang="en-US" sz="1400" b="1" dirty="0">
+                <a:solidFill>
+                  <a:srgbClr val="A82B26"/>
+                </a:solidFill>
+                <a:latin typeface="Inter" pitchFamily="34" charset="0"/>
+                <a:ea typeface="Inter" pitchFamily="34" charset="-122"/>
+                <a:cs typeface="Inter" pitchFamily="34" charset="-120"/>
+              </a:rPr>
+              <a:t>61.5%</a:t>
+            </a:r>
+            <a:endParaRPr lang="en-US" sz="1700" dirty="0"/>
+          </a:p>
+        </p:txBody>
+      </p:sp>
+      <p:sp>
+        <p:nvSpPr>
+          <p:cNvPr id="27" name="Text 25"/>
+          <p:cNvSpPr txBox="1"/>
+          <p:nvPr/>
+        </p:nvSpPr>
+        <p:spPr>
+          <a:xfrm>
+            <a:off x="6815328" y="2103120"/>
+            <a:ext cx="932688" cy="1380744"/>
           </a:xfrm>
           <a:prstGeom prst="rect">
             <a:avLst/>
@@ -18444,50 +18562,30 @@
               <a:buNone/>
             </a:pPr>
             <a:r>
-              <a:rPr lang="en-US" sz="1600" b="1" dirty="0">
-                <a:solidFill>
-                  <a:srgbClr val="0B7A4A"/>
-                </a:solidFill>
-                <a:latin typeface="Inter" pitchFamily="34" charset="0"/>
-                <a:ea typeface="Inter" pitchFamily="34" charset="-122"/>
-                <a:cs typeface="Inter" pitchFamily="34" charset="-120"/>
-              </a:rPr>
-              <a:t>+9.2 pts</a:t>
-            </a:r>
-            <a:endParaRPr lang="en-US" sz="1600" dirty="0"/>
-          </a:p>
-        </p:txBody>
-      </p:sp>
-      <p:sp>
-        <p:nvSpPr>
-          <p:cNvPr id="24" name="Shape 22"/>
-          <p:cNvSpPr/>
-          <p:nvPr/>
-        </p:nvSpPr>
-        <p:spPr>
-          <a:xfrm>
-            <a:off x="658368" y="5416906"/>
-            <a:ext cx="3489960" cy="828446"/>
-          </a:xfrm>
-          <a:prstGeom prst="rect">
-            <a:avLst/>
-          </a:prstGeom>
-          <a:solidFill>
-            <a:srgbClr val="F7F7F7"/>
-          </a:solidFill>
-          <a:ln/>
-        </p:spPr>
-      </p:sp>
-      <p:sp>
-        <p:nvSpPr>
-          <p:cNvPr id="25" name="Text 23"/>
-          <p:cNvSpPr txBox="1"/>
-          <p:nvPr/>
-        </p:nvSpPr>
-        <p:spPr>
-          <a:xfrm>
-            <a:off x="749808" y="5416906"/>
-            <a:ext cx="365760" cy="828446"/>
+              <a:rPr lang="en-US" sz="1800" b="1" dirty="0">
+                <a:solidFill>
+                  <a:srgbClr val="A82B26"/>
+                </a:solidFill>
+                <a:latin typeface="Inter" pitchFamily="34" charset="0"/>
+                <a:ea typeface="Inter" pitchFamily="34" charset="-122"/>
+                <a:cs typeface="Inter" pitchFamily="34" charset="-120"/>
+              </a:rPr>
+              <a:t>−8.1 pts</a:t>
+            </a:r>
+            <a:endParaRPr lang="en-US" sz="1800" dirty="0"/>
+          </a:p>
+        </p:txBody>
+      </p:sp>
+      <p:sp>
+        <p:nvSpPr>
+          <p:cNvPr id="28" name="Text 26"/>
+          <p:cNvSpPr txBox="1"/>
+          <p:nvPr/>
+        </p:nvSpPr>
+        <p:spPr>
+          <a:xfrm>
+            <a:off x="4440936" y="3483864"/>
+            <a:ext cx="365760" cy="1380744"/>
           </a:xfrm>
           <a:prstGeom prst="rect">
             <a:avLst/>
@@ -18503,7 +18601,7 @@
               <a:buNone/>
             </a:pPr>
             <a:r>
-              <a:rPr lang="en-US" sz="1500" b="1" dirty="0">
+              <a:rPr lang="en-US" sz="2000" b="1" dirty="0">
                 <a:solidFill>
                   <a:srgbClr val="0B2C4A"/>
                 </a:solidFill>
@@ -18511,22 +18609,22 @@
                 <a:ea typeface="Inter" pitchFamily="34" charset="-122"/>
                 <a:cs typeface="Inter" pitchFamily="34" charset="-120"/>
               </a:rPr>
-              <a:t>5</a:t>
-            </a:r>
-            <a:endParaRPr lang="en-US" sz="1500" dirty="0"/>
-          </a:p>
-        </p:txBody>
-      </p:sp>
-      <p:sp>
-        <p:nvSpPr>
-          <p:cNvPr id="26" name="Text 24"/>
-          <p:cNvSpPr txBox="1"/>
-          <p:nvPr/>
-        </p:nvSpPr>
-        <p:spPr>
-          <a:xfrm>
-            <a:off x="1097280" y="5416906"/>
-            <a:ext cx="1825752" cy="828446"/>
+              <a:t>32</a:t>
+            </a:r>
+            <a:endParaRPr lang="en-US" sz="2000" dirty="0"/>
+          </a:p>
+        </p:txBody>
+      </p:sp>
+      <p:sp>
+        <p:nvSpPr>
+          <p:cNvPr id="29" name="Text 27"/>
+          <p:cNvSpPr txBox="1"/>
+          <p:nvPr/>
+        </p:nvSpPr>
+        <p:spPr>
+          <a:xfrm>
+            <a:off x="4852416" y="3483864"/>
+            <a:ext cx="1917192" cy="1380744"/>
           </a:xfrm>
           <a:prstGeom prst="rect">
             <a:avLst/>
@@ -18545,7 +18643,7 @@
               <a:buNone/>
             </a:pPr>
             <a:r>
-              <a:rPr lang="en-US" sz="1400" b="1" dirty="0">
+              <a:rPr lang="en-US" sz="1700" b="1" dirty="0">
                 <a:solidFill>
                   <a:srgbClr val="1A1A1A"/>
                 </a:solidFill>
@@ -18553,9 +18651,9 @@
                 <a:ea typeface="Inter" pitchFamily="34" charset="-122"/>
                 <a:cs typeface="Inter" pitchFamily="34" charset="-120"/>
               </a:rPr>
-              <a:t>Subaru Prescott</a:t>
-            </a:r>
-            <a:endParaRPr lang="en-US" sz="1400" dirty="0"/>
+              <a:t>Hyundai Prescott</a:t>
+            </a:r>
+            <a:endParaRPr lang="en-US" sz="1700" dirty="0"/>
           </a:p>
           <a:p>
             <a:pPr indent="0" marL="0">
@@ -18565,7 +18663,7 @@
               <a:buNone/>
             </a:pPr>
             <a:r>
-              <a:rPr lang="en-US" sz="1200" dirty="0">
+              <a:rPr lang="en-US" sz="1400" dirty="0">
                 <a:solidFill>
                   <a:srgbClr val="595959"/>
                 </a:solidFill>
@@ -18573,7 +18671,7 @@
                 <a:ea typeface="Inter" pitchFamily="34" charset="-122"/>
                 <a:cs typeface="Inter" pitchFamily="34" charset="-120"/>
               </a:rPr>
-              <a:t>41.8%  →  </a:t>
+              <a:t>35.3%  →  </a:t>
             </a:r>
             <a:pPr indent="0" marL="0">
               <a:spcAft>
@@ -18582,30 +18680,30 @@
               <a:buNone/>
             </a:pPr>
             <a:r>
-              <a:rPr lang="en-US" sz="1200" b="1" dirty="0">
-                <a:solidFill>
-                  <a:srgbClr val="0B7A4A"/>
-                </a:solidFill>
-                <a:latin typeface="Inter" pitchFamily="34" charset="0"/>
-                <a:ea typeface="Inter" pitchFamily="34" charset="-122"/>
-                <a:cs typeface="Inter" pitchFamily="34" charset="-120"/>
-              </a:rPr>
-              <a:t>50.8%</a:t>
-            </a:r>
-            <a:endParaRPr lang="en-US" sz="1400" dirty="0"/>
-          </a:p>
-        </p:txBody>
-      </p:sp>
-      <p:sp>
-        <p:nvSpPr>
-          <p:cNvPr id="27" name="Text 25"/>
-          <p:cNvSpPr txBox="1"/>
-          <p:nvPr/>
-        </p:nvSpPr>
-        <p:spPr>
-          <a:xfrm>
-            <a:off x="2941320" y="5416906"/>
-            <a:ext cx="1115568" cy="828446"/>
+              <a:rPr lang="en-US" sz="1400" b="1" dirty="0">
+                <a:solidFill>
+                  <a:srgbClr val="A82B26"/>
+                </a:solidFill>
+                <a:latin typeface="Inter" pitchFamily="34" charset="0"/>
+                <a:ea typeface="Inter" pitchFamily="34" charset="-122"/>
+                <a:cs typeface="Inter" pitchFamily="34" charset="-120"/>
+              </a:rPr>
+              <a:t>28.5%</a:t>
+            </a:r>
+            <a:endParaRPr lang="en-US" sz="1700" dirty="0"/>
+          </a:p>
+        </p:txBody>
+      </p:sp>
+      <p:sp>
+        <p:nvSpPr>
+          <p:cNvPr id="30" name="Text 28"/>
+          <p:cNvSpPr txBox="1"/>
+          <p:nvPr/>
+        </p:nvSpPr>
+        <p:spPr>
+          <a:xfrm>
+            <a:off x="6815328" y="3483864"/>
+            <a:ext cx="932688" cy="1380744"/>
           </a:xfrm>
           <a:prstGeom prst="rect">
             <a:avLst/>
@@ -18621,66 +18719,7 @@
               <a:buNone/>
             </a:pPr>
             <a:r>
-              <a:rPr lang="en-US" sz="1600" b="1" dirty="0">
-                <a:solidFill>
-                  <a:srgbClr val="0B7A4A"/>
-                </a:solidFill>
-                <a:latin typeface="Inter" pitchFamily="34" charset="0"/>
-                <a:ea typeface="Inter" pitchFamily="34" charset="-122"/>
-                <a:cs typeface="Inter" pitchFamily="34" charset="-120"/>
-              </a:rPr>
-              <a:t>+9.0 pts</a:t>
-            </a:r>
-            <a:endParaRPr lang="en-US" sz="1600" dirty="0"/>
-          </a:p>
-        </p:txBody>
-      </p:sp>
-      <p:sp>
-        <p:nvSpPr>
-          <p:cNvPr id="28" name="Shape 26"/>
-          <p:cNvSpPr/>
-          <p:nvPr/>
-        </p:nvSpPr>
-        <p:spPr>
-          <a:xfrm>
-            <a:off x="4349496" y="1371600"/>
-            <a:ext cx="3489960" cy="45720"/>
-          </a:xfrm>
-          <a:prstGeom prst="rect">
-            <a:avLst/>
-          </a:prstGeom>
-          <a:solidFill>
-            <a:srgbClr val="C2352F"/>
-          </a:solidFill>
-          <a:ln/>
-        </p:spPr>
-      </p:sp>
-      <p:sp>
-        <p:nvSpPr>
-          <p:cNvPr id="29" name="Text 27"/>
-          <p:cNvSpPr txBox="1"/>
-          <p:nvPr/>
-        </p:nvSpPr>
-        <p:spPr>
-          <a:xfrm>
-            <a:off x="4440936" y="1444752"/>
-            <a:ext cx="3307080" cy="274320"/>
-          </a:xfrm>
-          <a:prstGeom prst="rect">
-            <a:avLst/>
-          </a:prstGeom>
-          <a:noFill/>
-          <a:ln/>
-        </p:spPr>
-        <p:txBody>
-          <a:bodyPr wrap="square" lIns="0" tIns="0" rIns="0" bIns="0" rtlCol="0" anchor="ctr"/>
-          <a:lstStyle/>
-          <a:p>
-            <a:pPr indent="0" marL="0">
-              <a:buNone/>
-            </a:pPr>
-            <a:r>
-              <a:rPr lang="en-US" sz="1500" b="1" spc="100" kern="0" dirty="0">
+              <a:rPr lang="en-US" sz="1800" b="1" dirty="0">
                 <a:solidFill>
                   <a:srgbClr val="A82B26"/>
                 </a:solidFill>
@@ -18688,48 +18727,9 @@
                 <a:ea typeface="Inter" pitchFamily="34" charset="-122"/>
                 <a:cs typeface="Inter" pitchFamily="34" charset="-120"/>
               </a:rPr>
-              <a:t>BOTTOM 5 VS LAST YEAR</a:t>
-            </a:r>
-            <a:endParaRPr lang="en-US" sz="1500" dirty="0"/>
-          </a:p>
-        </p:txBody>
-      </p:sp>
-      <p:sp>
-        <p:nvSpPr>
-          <p:cNvPr id="30" name="Text 28"/>
-          <p:cNvSpPr txBox="1"/>
-          <p:nvPr/>
-        </p:nvSpPr>
-        <p:spPr>
-          <a:xfrm>
-            <a:off x="4440936" y="1737360"/>
-            <a:ext cx="3307080" cy="274320"/>
-          </a:xfrm>
-          <a:prstGeom prst="rect">
-            <a:avLst/>
-          </a:prstGeom>
-          <a:noFill/>
-          <a:ln/>
-        </p:spPr>
-        <p:txBody>
-          <a:bodyPr wrap="square" lIns="0" tIns="0" rIns="0" bIns="0" rtlCol="0" anchor="ctr"/>
-          <a:lstStyle/>
-          <a:p>
-            <a:pPr indent="0" marL="0">
-              <a:buNone/>
-            </a:pPr>
-            <a:r>
-              <a:rPr lang="en-US" sz="1200" dirty="0">
-                <a:solidFill>
-                  <a:srgbClr val="595959"/>
-                </a:solidFill>
-                <a:latin typeface="Inter" pitchFamily="34" charset="0"/>
-                <a:ea typeface="Inter" pitchFamily="34" charset="-122"/>
-                <a:cs typeface="Inter" pitchFamily="34" charset="-120"/>
-              </a:rPr>
-              <a:t>Jan–Sep, this year vs last</a:t>
-            </a:r>
-            <a:endParaRPr lang="en-US" sz="1200" dirty="0"/>
+              <a:t>−6.8 pts</a:t>
+            </a:r>
+            <a:endParaRPr lang="en-US" sz="1800" dirty="0"/>
           </a:p>
         </p:txBody>
       </p:sp>
@@ -18741,8 +18741,8 @@
         </p:nvSpPr>
         <p:spPr>
           <a:xfrm>
-            <a:off x="4349496" y="2103120"/>
-            <a:ext cx="3489960" cy="828446"/>
+            <a:off x="4349496" y="4864608"/>
+            <a:ext cx="3489960" cy="1380744"/>
           </a:xfrm>
           <a:prstGeom prst="rect">
             <a:avLst/>
@@ -18761,8 +18761,8 @@
         </p:nvSpPr>
         <p:spPr>
           <a:xfrm>
-            <a:off x="4440936" y="2103120"/>
-            <a:ext cx="365760" cy="828446"/>
+            <a:off x="4440936" y="4864608"/>
+            <a:ext cx="365760" cy="1380744"/>
           </a:xfrm>
           <a:prstGeom prst="rect">
             <a:avLst/>
@@ -18778,7 +18778,7 @@
               <a:buNone/>
             </a:pPr>
             <a:r>
-              <a:rPr lang="en-US" sz="1500" b="1" dirty="0">
+              <a:rPr lang="en-US" sz="2000" b="1" dirty="0">
                 <a:solidFill>
                   <a:srgbClr val="0B2C4A"/>
                 </a:solidFill>
@@ -18786,9 +18786,9 @@
                 <a:ea typeface="Inter" pitchFamily="34" charset="-122"/>
                 <a:cs typeface="Inter" pitchFamily="34" charset="-120"/>
               </a:rPr>
-              <a:t>33</a:t>
-            </a:r>
-            <a:endParaRPr lang="en-US" sz="1500" dirty="0"/>
+              <a:t>31</a:t>
+            </a:r>
+            <a:endParaRPr lang="en-US" sz="2000" dirty="0"/>
           </a:p>
         </p:txBody>
       </p:sp>
@@ -18800,8 +18800,8 @@
         </p:nvSpPr>
         <p:spPr>
           <a:xfrm>
-            <a:off x="4788408" y="2103120"/>
-            <a:ext cx="1825752" cy="828446"/>
+            <a:off x="4852416" y="4864608"/>
+            <a:ext cx="1917192" cy="1380744"/>
           </a:xfrm>
           <a:prstGeom prst="rect">
             <a:avLst/>
@@ -18820,7 +18820,7 @@
               <a:buNone/>
             </a:pPr>
             <a:r>
-              <a:rPr lang="en-US" sz="1400" b="1" dirty="0">
+              <a:rPr lang="en-US" sz="1700" b="1" dirty="0">
                 <a:solidFill>
                   <a:srgbClr val="1A1A1A"/>
                 </a:solidFill>
@@ -18828,9 +18828,9 @@
                 <a:ea typeface="Inter" pitchFamily="34" charset="-122"/>
                 <a:cs typeface="Inter" pitchFamily="34" charset="-120"/>
               </a:rPr>
-              <a:t>LR Reno</a:t>
-            </a:r>
-            <a:endParaRPr lang="en-US" sz="1400" dirty="0"/>
+              <a:t>Toyota Henderson</a:t>
+            </a:r>
+            <a:endParaRPr lang="en-US" sz="1700" dirty="0"/>
           </a:p>
           <a:p>
             <a:pPr indent="0" marL="0">
@@ -18840,7 +18840,7 @@
               <a:buNone/>
             </a:pPr>
             <a:r>
-              <a:rPr lang="en-US" sz="1200" dirty="0">
+              <a:rPr lang="en-US" sz="1400" dirty="0">
                 <a:solidFill>
                   <a:srgbClr val="595959"/>
                 </a:solidFill>
@@ -18848,7 +18848,7 @@
                 <a:ea typeface="Inter" pitchFamily="34" charset="-122"/>
                 <a:cs typeface="Inter" pitchFamily="34" charset="-120"/>
               </a:rPr>
-              <a:t>69.6%  →  </a:t>
+              <a:t>63.8%  →  </a:t>
             </a:r>
             <a:pPr indent="0" marL="0">
               <a:spcAft>
@@ -18857,7 +18857,7 @@
               <a:buNone/>
             </a:pPr>
             <a:r>
-              <a:rPr lang="en-US" sz="1200" b="1" dirty="0">
+              <a:rPr lang="en-US" sz="1400" b="1" dirty="0">
                 <a:solidFill>
                   <a:srgbClr val="A82B26"/>
                 </a:solidFill>
@@ -18865,9 +18865,9 @@
                 <a:ea typeface="Inter" pitchFamily="34" charset="-122"/>
                 <a:cs typeface="Inter" pitchFamily="34" charset="-120"/>
               </a:rPr>
-              <a:t>61.5%</a:t>
-            </a:r>
-            <a:endParaRPr lang="en-US" sz="1400" dirty="0"/>
+              <a:t>57.3%</a:t>
+            </a:r>
+            <a:endParaRPr lang="en-US" sz="1700" dirty="0"/>
           </a:p>
         </p:txBody>
       </p:sp>
@@ -18879,8 +18879,8 @@
         </p:nvSpPr>
         <p:spPr>
           <a:xfrm>
-            <a:off x="6632448" y="2103120"/>
-            <a:ext cx="1115568" cy="828446"/>
+            <a:off x="6815328" y="4864608"/>
+            <a:ext cx="932688" cy="1380744"/>
           </a:xfrm>
           <a:prstGeom prst="rect">
             <a:avLst/>
@@ -18896,7 +18896,7 @@
               <a:buNone/>
             </a:pPr>
             <a:r>
-              <a:rPr lang="en-US" sz="1600" b="1" dirty="0">
+              <a:rPr lang="en-US" sz="1800" b="1" dirty="0">
                 <a:solidFill>
                   <a:srgbClr val="A82B26"/>
                 </a:solidFill>
@@ -18904,22 +18904,42 @@
                 <a:ea typeface="Inter" pitchFamily="34" charset="-122"/>
                 <a:cs typeface="Inter" pitchFamily="34" charset="-120"/>
               </a:rPr>
-              <a:t>−8.1 pts</a:t>
-            </a:r>
-            <a:endParaRPr lang="en-US" sz="1600" dirty="0"/>
-          </a:p>
-        </p:txBody>
-      </p:sp>
-      <p:sp>
-        <p:nvSpPr>
-          <p:cNvPr id="35" name="Text 33"/>
-          <p:cNvSpPr txBox="1"/>
-          <p:nvPr/>
-        </p:nvSpPr>
-        <p:spPr>
-          <a:xfrm>
-            <a:off x="4440936" y="2931566"/>
-            <a:ext cx="365760" cy="828446"/>
+              <a:t>−6.5 pts</a:t>
+            </a:r>
+            <a:endParaRPr lang="en-US" sz="1800" dirty="0"/>
+          </a:p>
+        </p:txBody>
+      </p:sp>
+      <p:sp>
+        <p:nvSpPr>
+          <p:cNvPr id="35" name="Shape 33"/>
+          <p:cNvSpPr/>
+          <p:nvPr/>
+        </p:nvSpPr>
+        <p:spPr>
+          <a:xfrm>
+            <a:off x="8040624" y="1371600"/>
+            <a:ext cx="3489960" cy="45720"/>
+          </a:xfrm>
+          <a:prstGeom prst="rect">
+            <a:avLst/>
+          </a:prstGeom>
+          <a:solidFill>
+            <a:srgbClr val="2587C5"/>
+          </a:solidFill>
+          <a:ln/>
+        </p:spPr>
+      </p:sp>
+      <p:sp>
+        <p:nvSpPr>
+          <p:cNvPr id="36" name="Text 34"/>
+          <p:cNvSpPr txBox="1"/>
+          <p:nvPr/>
+        </p:nvSpPr>
+        <p:spPr>
+          <a:xfrm>
+            <a:off x="8132064" y="1444752"/>
+            <a:ext cx="3307080" cy="274320"/>
           </a:xfrm>
           <a:prstGeom prst="rect">
             <a:avLst/>
@@ -18935,7 +18955,7 @@
               <a:buNone/>
             </a:pPr>
             <a:r>
-              <a:rPr lang="en-US" sz="1500" b="1" dirty="0">
+              <a:rPr lang="en-US" sz="1500" b="1" spc="100" kern="0" dirty="0">
                 <a:solidFill>
                   <a:srgbClr val="0B2C4A"/>
                 </a:solidFill>
@@ -18943,7 +18963,7 @@
                 <a:ea typeface="Inter" pitchFamily="34" charset="-122"/>
                 <a:cs typeface="Inter" pitchFamily="34" charset="-120"/>
               </a:rPr>
-              <a:t>32</a:t>
+              <a:t>TOP 3 MOVING NOW</a:t>
             </a:r>
             <a:endParaRPr lang="en-US" sz="1500" dirty="0"/>
           </a:p>
@@ -18951,14 +18971,112 @@
       </p:sp>
       <p:sp>
         <p:nvSpPr>
-          <p:cNvPr id="36" name="Text 34"/>
-          <p:cNvSpPr txBox="1"/>
-          <p:nvPr/>
-        </p:nvSpPr>
-        <p:spPr>
-          <a:xfrm>
-            <a:off x="4788408" y="2931566"/>
-            <a:ext cx="1825752" cy="828446"/>
+          <p:cNvPr id="37" name="Text 35"/>
+          <p:cNvSpPr txBox="1"/>
+          <p:nvPr/>
+        </p:nvSpPr>
+        <p:spPr>
+          <a:xfrm>
+            <a:off x="8132064" y="1737360"/>
+            <a:ext cx="3307080" cy="274320"/>
+          </a:xfrm>
+          <a:prstGeom prst="rect">
+            <a:avLst/>
+          </a:prstGeom>
+          <a:noFill/>
+          <a:ln/>
+        </p:spPr>
+        <p:txBody>
+          <a:bodyPr wrap="square" lIns="0" tIns="0" rIns="0" bIns="0" rtlCol="0" anchor="ctr"/>
+          <a:lstStyle/>
+          <a:p>
+            <a:pPr indent="0" marL="0">
+              <a:buNone/>
+            </a:pPr>
+            <a:r>
+              <a:rPr lang="en-US" sz="1200" dirty="0">
+                <a:solidFill>
+                  <a:srgbClr val="595959"/>
+                </a:solidFill>
+                <a:latin typeface="Inter" pitchFamily="34" charset="0"/>
+                <a:ea typeface="Inter" pitchFamily="34" charset="-122"/>
+                <a:cs typeface="Inter" pitchFamily="34" charset="-120"/>
+              </a:rPr>
+              <a:t>Q3 vs Q1, this year</a:t>
+            </a:r>
+            <a:endParaRPr lang="en-US" sz="1200" dirty="0"/>
+          </a:p>
+        </p:txBody>
+      </p:sp>
+      <p:sp>
+        <p:nvSpPr>
+          <p:cNvPr id="38" name="Shape 36"/>
+          <p:cNvSpPr/>
+          <p:nvPr/>
+        </p:nvSpPr>
+        <p:spPr>
+          <a:xfrm>
+            <a:off x="8040624" y="2103120"/>
+            <a:ext cx="3489960" cy="1380744"/>
+          </a:xfrm>
+          <a:prstGeom prst="rect">
+            <a:avLst/>
+          </a:prstGeom>
+          <a:solidFill>
+            <a:srgbClr val="F7F7F7"/>
+          </a:solidFill>
+          <a:ln/>
+        </p:spPr>
+      </p:sp>
+      <p:sp>
+        <p:nvSpPr>
+          <p:cNvPr id="39" name="Text 37"/>
+          <p:cNvSpPr txBox="1"/>
+          <p:nvPr/>
+        </p:nvSpPr>
+        <p:spPr>
+          <a:xfrm>
+            <a:off x="8132064" y="2103120"/>
+            <a:ext cx="365760" cy="1380744"/>
+          </a:xfrm>
+          <a:prstGeom prst="rect">
+            <a:avLst/>
+          </a:prstGeom>
+          <a:noFill/>
+          <a:ln/>
+        </p:spPr>
+        <p:txBody>
+          <a:bodyPr wrap="square" lIns="0" tIns="0" rIns="0" bIns="0" rtlCol="0" anchor="ctr"/>
+          <a:lstStyle/>
+          <a:p>
+            <a:pPr indent="0" marL="0">
+              <a:buNone/>
+            </a:pPr>
+            <a:r>
+              <a:rPr lang="en-US" sz="2000" b="1" dirty="0">
+                <a:solidFill>
+                  <a:srgbClr val="0B2C4A"/>
+                </a:solidFill>
+                <a:latin typeface="Inter" pitchFamily="34" charset="0"/>
+                <a:ea typeface="Inter" pitchFamily="34" charset="-122"/>
+                <a:cs typeface="Inter" pitchFamily="34" charset="-120"/>
+              </a:rPr>
+              <a:t>1</a:t>
+            </a:r>
+            <a:endParaRPr lang="en-US" sz="2000" dirty="0"/>
+          </a:p>
+        </p:txBody>
+      </p:sp>
+      <p:sp>
+        <p:nvSpPr>
+          <p:cNvPr id="40" name="Text 38"/>
+          <p:cNvSpPr txBox="1"/>
+          <p:nvPr/>
+        </p:nvSpPr>
+        <p:spPr>
+          <a:xfrm>
+            <a:off x="8543544" y="2103120"/>
+            <a:ext cx="1917192" cy="1380744"/>
           </a:xfrm>
           <a:prstGeom prst="rect">
             <a:avLst/>
@@ -18977,7 +19095,7 @@
               <a:buNone/>
             </a:pPr>
             <a:r>
-              <a:rPr lang="en-US" sz="1400" b="1" dirty="0">
+              <a:rPr lang="en-US" sz="1700" b="1" dirty="0">
                 <a:solidFill>
                   <a:srgbClr val="1A1A1A"/>
                 </a:solidFill>
@@ -18985,9 +19103,9 @@
                 <a:ea typeface="Inter" pitchFamily="34" charset="-122"/>
                 <a:cs typeface="Inter" pitchFamily="34" charset="-120"/>
               </a:rPr>
-              <a:t>Hyundai Prescott</a:t>
-            </a:r>
-            <a:endParaRPr lang="en-US" sz="1400" dirty="0"/>
+              <a:t>Lexus</a:t>
+            </a:r>
+            <a:endParaRPr lang="en-US" sz="1700" dirty="0"/>
           </a:p>
           <a:p>
             <a:pPr indent="0" marL="0">
@@ -18997,7 +19115,7 @@
               <a:buNone/>
             </a:pPr>
             <a:r>
-              <a:rPr lang="en-US" sz="1200" dirty="0">
+              <a:rPr lang="en-US" sz="1400" dirty="0">
                 <a:solidFill>
                   <a:srgbClr val="595959"/>
                 </a:solidFill>
@@ -19005,7 +19123,7 @@
                 <a:ea typeface="Inter" pitchFamily="34" charset="-122"/>
                 <a:cs typeface="Inter" pitchFamily="34" charset="-120"/>
               </a:rPr>
-              <a:t>35.3%  →  </a:t>
+              <a:t>48.9%  →  </a:t>
             </a:r>
             <a:pPr indent="0" marL="0">
               <a:spcAft>
@@ -19014,30 +19132,30 @@
               <a:buNone/>
             </a:pPr>
             <a:r>
-              <a:rPr lang="en-US" sz="1200" b="1" dirty="0">
-                <a:solidFill>
-                  <a:srgbClr val="A82B26"/>
-                </a:solidFill>
-                <a:latin typeface="Inter" pitchFamily="34" charset="0"/>
-                <a:ea typeface="Inter" pitchFamily="34" charset="-122"/>
-                <a:cs typeface="Inter" pitchFamily="34" charset="-120"/>
-              </a:rPr>
-              <a:t>28.5%</a:t>
-            </a:r>
-            <a:endParaRPr lang="en-US" sz="1400" dirty="0"/>
-          </a:p>
-        </p:txBody>
-      </p:sp>
-      <p:sp>
-        <p:nvSpPr>
-          <p:cNvPr id="37" name="Text 35"/>
-          <p:cNvSpPr txBox="1"/>
-          <p:nvPr/>
-        </p:nvSpPr>
-        <p:spPr>
-          <a:xfrm>
-            <a:off x="6632448" y="2931566"/>
-            <a:ext cx="1115568" cy="828446"/>
+              <a:rPr lang="en-US" sz="1400" b="1" dirty="0">
+                <a:solidFill>
+                  <a:srgbClr val="0B7A4A"/>
+                </a:solidFill>
+                <a:latin typeface="Inter" pitchFamily="34" charset="0"/>
+                <a:ea typeface="Inter" pitchFamily="34" charset="-122"/>
+                <a:cs typeface="Inter" pitchFamily="34" charset="-120"/>
+              </a:rPr>
+              <a:t>57.7%</a:t>
+            </a:r>
+            <a:endParaRPr lang="en-US" sz="1700" dirty="0"/>
+          </a:p>
+        </p:txBody>
+      </p:sp>
+      <p:sp>
+        <p:nvSpPr>
+          <p:cNvPr id="41" name="Text 39"/>
+          <p:cNvSpPr txBox="1"/>
+          <p:nvPr/>
+        </p:nvSpPr>
+        <p:spPr>
+          <a:xfrm>
+            <a:off x="10506456" y="2103120"/>
+            <a:ext cx="932688" cy="1380744"/>
           </a:xfrm>
           <a:prstGeom prst="rect">
             <a:avLst/>
@@ -19053,50 +19171,50 @@
               <a:buNone/>
             </a:pPr>
             <a:r>
-              <a:rPr lang="en-US" sz="1600" b="1" dirty="0">
-                <a:solidFill>
-                  <a:srgbClr val="A82B26"/>
-                </a:solidFill>
-                <a:latin typeface="Inter" pitchFamily="34" charset="0"/>
-                <a:ea typeface="Inter" pitchFamily="34" charset="-122"/>
-                <a:cs typeface="Inter" pitchFamily="34" charset="-120"/>
-              </a:rPr>
-              <a:t>−6.8 pts</a:t>
-            </a:r>
-            <a:endParaRPr lang="en-US" sz="1600" dirty="0"/>
-          </a:p>
-        </p:txBody>
-      </p:sp>
-      <p:sp>
-        <p:nvSpPr>
-          <p:cNvPr id="38" name="Shape 36"/>
+              <a:rPr lang="en-US" sz="1800" b="1" dirty="0">
+                <a:solidFill>
+                  <a:srgbClr val="0B7A4A"/>
+                </a:solidFill>
+                <a:latin typeface="Inter" pitchFamily="34" charset="0"/>
+                <a:ea typeface="Inter" pitchFamily="34" charset="-122"/>
+                <a:cs typeface="Inter" pitchFamily="34" charset="-120"/>
+              </a:rPr>
+              <a:t>+8.8 pts</a:t>
+            </a:r>
+            <a:endParaRPr lang="en-US" sz="1800" dirty="0"/>
+          </a:p>
+        </p:txBody>
+      </p:sp>
+      <p:sp>
+        <p:nvSpPr>
+          <p:cNvPr id="42" name="Shape 40"/>
           <p:cNvSpPr/>
           <p:nvPr/>
         </p:nvSpPr>
         <p:spPr>
           <a:xfrm>
-            <a:off x="4349496" y="3760013"/>
-            <a:ext cx="3489960" cy="828446"/>
-          </a:xfrm>
-          <a:prstGeom prst="rect">
-            <a:avLst/>
-          </a:prstGeom>
-          <a:solidFill>
-            <a:srgbClr val="F7F7F7"/>
-          </a:solidFill>
-          <a:ln/>
-        </p:spPr>
-      </p:sp>
-      <p:sp>
-        <p:nvSpPr>
-          <p:cNvPr id="39" name="Text 37"/>
-          <p:cNvSpPr txBox="1"/>
-          <p:nvPr/>
-        </p:nvSpPr>
-        <p:spPr>
-          <a:xfrm>
-            <a:off x="4440936" y="3760013"/>
-            <a:ext cx="365760" cy="828446"/>
+            <a:off x="11466576" y="3520440"/>
+            <a:ext cx="64008" cy="1307592"/>
+          </a:xfrm>
+          <a:prstGeom prst="rect">
+            <a:avLst/>
+          </a:prstGeom>
+          <a:solidFill>
+            <a:srgbClr val="12A566"/>
+          </a:solidFill>
+          <a:ln/>
+        </p:spPr>
+      </p:sp>
+      <p:sp>
+        <p:nvSpPr>
+          <p:cNvPr id="43" name="Text 41"/>
+          <p:cNvSpPr txBox="1"/>
+          <p:nvPr/>
+        </p:nvSpPr>
+        <p:spPr>
+          <a:xfrm>
+            <a:off x="8132064" y="3483864"/>
+            <a:ext cx="365760" cy="1380744"/>
           </a:xfrm>
           <a:prstGeom prst="rect">
             <a:avLst/>
@@ -19112,7 +19230,7 @@
               <a:buNone/>
             </a:pPr>
             <a:r>
-              <a:rPr lang="en-US" sz="1500" b="1" dirty="0">
+              <a:rPr lang="en-US" sz="2000" b="1" dirty="0">
                 <a:solidFill>
                   <a:srgbClr val="0B2C4A"/>
                 </a:solidFill>
@@ -19120,22 +19238,22 @@
                 <a:ea typeface="Inter" pitchFamily="34" charset="-122"/>
                 <a:cs typeface="Inter" pitchFamily="34" charset="-120"/>
               </a:rPr>
-              <a:t>31</a:t>
-            </a:r>
-            <a:endParaRPr lang="en-US" sz="1500" dirty="0"/>
-          </a:p>
-        </p:txBody>
-      </p:sp>
-      <p:sp>
-        <p:nvSpPr>
-          <p:cNvPr id="40" name="Text 38"/>
-          <p:cNvSpPr txBox="1"/>
-          <p:nvPr/>
-        </p:nvSpPr>
-        <p:spPr>
-          <a:xfrm>
-            <a:off x="4788408" y="3760013"/>
-            <a:ext cx="1825752" cy="828446"/>
+              <a:t>2</a:t>
+            </a:r>
+            <a:endParaRPr lang="en-US" sz="2000" dirty="0"/>
+          </a:p>
+        </p:txBody>
+      </p:sp>
+      <p:sp>
+        <p:nvSpPr>
+          <p:cNvPr id="44" name="Text 42"/>
+          <p:cNvSpPr txBox="1"/>
+          <p:nvPr/>
+        </p:nvSpPr>
+        <p:spPr>
+          <a:xfrm>
+            <a:off x="8543544" y="3483864"/>
+            <a:ext cx="1917192" cy="1380744"/>
           </a:xfrm>
           <a:prstGeom prst="rect">
             <a:avLst/>
@@ -19154,7 +19272,7 @@
               <a:buNone/>
             </a:pPr>
             <a:r>
-              <a:rPr lang="en-US" sz="1400" b="1" dirty="0">
+              <a:rPr lang="en-US" sz="1700" b="1" dirty="0">
                 <a:solidFill>
                   <a:srgbClr val="1A1A1A"/>
                 </a:solidFill>
@@ -19162,9 +19280,9 @@
                 <a:ea typeface="Inter" pitchFamily="34" charset="-122"/>
                 <a:cs typeface="Inter" pitchFamily="34" charset="-120"/>
               </a:rPr>
-              <a:t>Toyota Henderson</a:t>
-            </a:r>
-            <a:endParaRPr lang="en-US" sz="1400" dirty="0"/>
+              <a:t>Acura</a:t>
+            </a:r>
+            <a:endParaRPr lang="en-US" sz="1700" dirty="0"/>
           </a:p>
           <a:p>
             <a:pPr indent="0" marL="0">
@@ -19174,7 +19292,7 @@
               <a:buNone/>
             </a:pPr>
             <a:r>
-              <a:rPr lang="en-US" sz="1200" dirty="0">
+              <a:rPr lang="en-US" sz="1400" dirty="0">
                 <a:solidFill>
                   <a:srgbClr val="595959"/>
                 </a:solidFill>
@@ -19182,7 +19300,7 @@
                 <a:ea typeface="Inter" pitchFamily="34" charset="-122"/>
                 <a:cs typeface="Inter" pitchFamily="34" charset="-120"/>
               </a:rPr>
-              <a:t>63.8%  →  </a:t>
+              <a:t>45.7%  →  </a:t>
             </a:r>
             <a:pPr indent="0" marL="0">
               <a:spcAft>
@@ -19191,30 +19309,30 @@
               <a:buNone/>
             </a:pPr>
             <a:r>
-              <a:rPr lang="en-US" sz="1200" b="1" dirty="0">
-                <a:solidFill>
-                  <a:srgbClr val="A82B26"/>
-                </a:solidFill>
-                <a:latin typeface="Inter" pitchFamily="34" charset="0"/>
-                <a:ea typeface="Inter" pitchFamily="34" charset="-122"/>
-                <a:cs typeface="Inter" pitchFamily="34" charset="-120"/>
-              </a:rPr>
-              <a:t>57.3%</a:t>
-            </a:r>
-            <a:endParaRPr lang="en-US" sz="1400" dirty="0"/>
-          </a:p>
-        </p:txBody>
-      </p:sp>
-      <p:sp>
-        <p:nvSpPr>
-          <p:cNvPr id="41" name="Text 39"/>
-          <p:cNvSpPr txBox="1"/>
-          <p:nvPr/>
-        </p:nvSpPr>
-        <p:spPr>
-          <a:xfrm>
-            <a:off x="6632448" y="3760013"/>
-            <a:ext cx="1115568" cy="828446"/>
+              <a:rPr lang="en-US" sz="1400" b="1" dirty="0">
+                <a:solidFill>
+                  <a:srgbClr val="0B7A4A"/>
+                </a:solidFill>
+                <a:latin typeface="Inter" pitchFamily="34" charset="0"/>
+                <a:ea typeface="Inter" pitchFamily="34" charset="-122"/>
+                <a:cs typeface="Inter" pitchFamily="34" charset="-120"/>
+              </a:rPr>
+              <a:t>52.5%</a:t>
+            </a:r>
+            <a:endParaRPr lang="en-US" sz="1700" dirty="0"/>
+          </a:p>
+        </p:txBody>
+      </p:sp>
+      <p:sp>
+        <p:nvSpPr>
+          <p:cNvPr id="45" name="Text 43"/>
+          <p:cNvSpPr txBox="1"/>
+          <p:nvPr/>
+        </p:nvSpPr>
+        <p:spPr>
+          <a:xfrm>
+            <a:off x="10506456" y="3483864"/>
+            <a:ext cx="932688" cy="1380744"/>
           </a:xfrm>
           <a:prstGeom prst="rect">
             <a:avLst/>
@@ -19230,50 +19348,50 @@
               <a:buNone/>
             </a:pPr>
             <a:r>
-              <a:rPr lang="en-US" sz="1600" b="1" dirty="0">
-                <a:solidFill>
-                  <a:srgbClr val="A82B26"/>
-                </a:solidFill>
-                <a:latin typeface="Inter" pitchFamily="34" charset="0"/>
-                <a:ea typeface="Inter" pitchFamily="34" charset="-122"/>
-                <a:cs typeface="Inter" pitchFamily="34" charset="-120"/>
-              </a:rPr>
-              <a:t>−6.5 pts</a:t>
-            </a:r>
-            <a:endParaRPr lang="en-US" sz="1600" dirty="0"/>
-          </a:p>
-        </p:txBody>
-      </p:sp>
-      <p:sp>
-        <p:nvSpPr>
-          <p:cNvPr id="42" name="Shape 40"/>
+              <a:rPr lang="en-US" sz="1800" b="1" dirty="0">
+                <a:solidFill>
+                  <a:srgbClr val="0B7A4A"/>
+                </a:solidFill>
+                <a:latin typeface="Inter" pitchFamily="34" charset="0"/>
+                <a:ea typeface="Inter" pitchFamily="34" charset="-122"/>
+                <a:cs typeface="Inter" pitchFamily="34" charset="-120"/>
+              </a:rPr>
+              <a:t>+6.8 pts</a:t>
+            </a:r>
+            <a:endParaRPr lang="en-US" sz="1800" dirty="0"/>
+          </a:p>
+        </p:txBody>
+      </p:sp>
+      <p:sp>
+        <p:nvSpPr>
+          <p:cNvPr id="46" name="Shape 44"/>
           <p:cNvSpPr/>
           <p:nvPr/>
         </p:nvSpPr>
         <p:spPr>
           <a:xfrm>
-            <a:off x="7775448" y="4625035"/>
-            <a:ext cx="64008" cy="755294"/>
-          </a:xfrm>
-          <a:prstGeom prst="rect">
-            <a:avLst/>
-          </a:prstGeom>
-          <a:solidFill>
-            <a:srgbClr val="2587C5"/>
-          </a:solidFill>
-          <a:ln/>
-        </p:spPr>
-      </p:sp>
-      <p:sp>
-        <p:nvSpPr>
-          <p:cNvPr id="43" name="Text 41"/>
-          <p:cNvSpPr txBox="1"/>
-          <p:nvPr/>
-        </p:nvSpPr>
-        <p:spPr>
-          <a:xfrm>
-            <a:off x="4440936" y="4588459"/>
-            <a:ext cx="365760" cy="828446"/>
+            <a:off x="8040624" y="4864608"/>
+            <a:ext cx="3489960" cy="1380744"/>
+          </a:xfrm>
+          <a:prstGeom prst="rect">
+            <a:avLst/>
+          </a:prstGeom>
+          <a:solidFill>
+            <a:srgbClr val="F7F7F7"/>
+          </a:solidFill>
+          <a:ln/>
+        </p:spPr>
+      </p:sp>
+      <p:sp>
+        <p:nvSpPr>
+          <p:cNvPr id="47" name="Text 45"/>
+          <p:cNvSpPr txBox="1"/>
+          <p:nvPr/>
+        </p:nvSpPr>
+        <p:spPr>
+          <a:xfrm>
+            <a:off x="8132064" y="4864608"/>
+            <a:ext cx="365760" cy="1380744"/>
           </a:xfrm>
           <a:prstGeom prst="rect">
             <a:avLst/>
@@ -19289,7 +19407,7 @@
               <a:buNone/>
             </a:pPr>
             <a:r>
-              <a:rPr lang="en-US" sz="1500" b="1" dirty="0">
+              <a:rPr lang="en-US" sz="2000" b="1" dirty="0">
                 <a:solidFill>
                   <a:srgbClr val="0B2C4A"/>
                 </a:solidFill>
@@ -19297,22 +19415,22 @@
                 <a:ea typeface="Inter" pitchFamily="34" charset="-122"/>
                 <a:cs typeface="Inter" pitchFamily="34" charset="-120"/>
               </a:rPr>
-              <a:t>30</a:t>
-            </a:r>
-            <a:endParaRPr lang="en-US" sz="1500" dirty="0"/>
-          </a:p>
-        </p:txBody>
-      </p:sp>
-      <p:sp>
-        <p:nvSpPr>
-          <p:cNvPr id="44" name="Text 42"/>
-          <p:cNvSpPr txBox="1"/>
-          <p:nvPr/>
-        </p:nvSpPr>
-        <p:spPr>
-          <a:xfrm>
-            <a:off x="4788408" y="4588459"/>
-            <a:ext cx="1825752" cy="828446"/>
+              <a:t>3</a:t>
+            </a:r>
+            <a:endParaRPr lang="en-US" sz="2000" dirty="0"/>
+          </a:p>
+        </p:txBody>
+      </p:sp>
+      <p:sp>
+        <p:nvSpPr>
+          <p:cNvPr id="48" name="Text 46"/>
+          <p:cNvSpPr txBox="1"/>
+          <p:nvPr/>
+        </p:nvSpPr>
+        <p:spPr>
+          <a:xfrm>
+            <a:off x="8543544" y="4864608"/>
+            <a:ext cx="1917192" cy="1380744"/>
           </a:xfrm>
           <a:prstGeom prst="rect">
             <a:avLst/>
@@ -19331,7 +19449,7 @@
               <a:buNone/>
             </a:pPr>
             <a:r>
-              <a:rPr lang="en-US" sz="1400" b="1" dirty="0">
+              <a:rPr lang="en-US" sz="1700" b="1" dirty="0">
                 <a:solidFill>
                   <a:srgbClr val="1A1A1A"/>
                 </a:solidFill>
@@ -19339,9 +19457,9 @@
                 <a:ea typeface="Inter" pitchFamily="34" charset="-122"/>
                 <a:cs typeface="Inter" pitchFamily="34" charset="-120"/>
               </a:rPr>
-              <a:t>Audi Henderson</a:t>
-            </a:r>
-            <a:endParaRPr lang="en-US" sz="1400" dirty="0"/>
+              <a:t>Chevy GMC Bullhead</a:t>
+            </a:r>
+            <a:endParaRPr lang="en-US" sz="1700" dirty="0"/>
           </a:p>
           <a:p>
             <a:pPr indent="0" marL="0">
@@ -19351,7 +19469,7 @@
               <a:buNone/>
             </a:pPr>
             <a:r>
-              <a:rPr lang="en-US" sz="1200" dirty="0">
+              <a:rPr lang="en-US" sz="1400" dirty="0">
                 <a:solidFill>
                   <a:srgbClr val="595959"/>
                 </a:solidFill>
@@ -19359,7 +19477,7 @@
                 <a:ea typeface="Inter" pitchFamily="34" charset="-122"/>
                 <a:cs typeface="Inter" pitchFamily="34" charset="-120"/>
               </a:rPr>
-              <a:t>39.8%  →  </a:t>
+              <a:t>42.2%  →  </a:t>
             </a:r>
             <a:pPr indent="0" marL="0">
               <a:spcAft>
@@ -19368,30 +19486,30 @@
               <a:buNone/>
             </a:pPr>
             <a:r>
-              <a:rPr lang="en-US" sz="1200" b="1" dirty="0">
-                <a:solidFill>
-                  <a:srgbClr val="A82B26"/>
-                </a:solidFill>
-                <a:latin typeface="Inter" pitchFamily="34" charset="0"/>
-                <a:ea typeface="Inter" pitchFamily="34" charset="-122"/>
-                <a:cs typeface="Inter" pitchFamily="34" charset="-120"/>
-              </a:rPr>
-              <a:t>34.1%</a:t>
-            </a:r>
-            <a:endParaRPr lang="en-US" sz="1400" dirty="0"/>
-          </a:p>
-        </p:txBody>
-      </p:sp>
-      <p:sp>
-        <p:nvSpPr>
-          <p:cNvPr id="45" name="Text 43"/>
-          <p:cNvSpPr txBox="1"/>
-          <p:nvPr/>
-        </p:nvSpPr>
-        <p:spPr>
-          <a:xfrm>
-            <a:off x="6632448" y="4588459"/>
-            <a:ext cx="1115568" cy="828446"/>
+              <a:rPr lang="en-US" sz="1400" b="1" dirty="0">
+                <a:solidFill>
+                  <a:srgbClr val="0B7A4A"/>
+                </a:solidFill>
+                <a:latin typeface="Inter" pitchFamily="34" charset="0"/>
+                <a:ea typeface="Inter" pitchFamily="34" charset="-122"/>
+                <a:cs typeface="Inter" pitchFamily="34" charset="-120"/>
+              </a:rPr>
+              <a:t>48.3%</a:t>
+            </a:r>
+            <a:endParaRPr lang="en-US" sz="1700" dirty="0"/>
+          </a:p>
+        </p:txBody>
+      </p:sp>
+      <p:sp>
+        <p:nvSpPr>
+          <p:cNvPr id="49" name="Text 47"/>
+          <p:cNvSpPr txBox="1"/>
+          <p:nvPr/>
+        </p:nvSpPr>
+        <p:spPr>
+          <a:xfrm>
+            <a:off x="10506456" y="4864608"/>
+            <a:ext cx="932688" cy="1380744"/>
           </a:xfrm>
           <a:prstGeom prst="rect">
             <a:avLst/>
@@ -19407,420 +19525,7 @@
               <a:buNone/>
             </a:pPr>
             <a:r>
-              <a:rPr lang="en-US" sz="1600" b="1" dirty="0">
-                <a:solidFill>
-                  <a:srgbClr val="A82B26"/>
-                </a:solidFill>
-                <a:latin typeface="Inter" pitchFamily="34" charset="0"/>
-                <a:ea typeface="Inter" pitchFamily="34" charset="-122"/>
-                <a:cs typeface="Inter" pitchFamily="34" charset="-120"/>
-              </a:rPr>
-              <a:t>−5.7 pts</a:t>
-            </a:r>
-            <a:endParaRPr lang="en-US" sz="1600" dirty="0"/>
-          </a:p>
-        </p:txBody>
-      </p:sp>
-      <p:sp>
-        <p:nvSpPr>
-          <p:cNvPr id="46" name="Shape 44"/>
-          <p:cNvSpPr/>
-          <p:nvPr/>
-        </p:nvSpPr>
-        <p:spPr>
-          <a:xfrm>
-            <a:off x="4349496" y="5416906"/>
-            <a:ext cx="3489960" cy="828446"/>
-          </a:xfrm>
-          <a:prstGeom prst="rect">
-            <a:avLst/>
-          </a:prstGeom>
-          <a:solidFill>
-            <a:srgbClr val="F7F7F7"/>
-          </a:solidFill>
-          <a:ln/>
-        </p:spPr>
-      </p:sp>
-      <p:sp>
-        <p:nvSpPr>
-          <p:cNvPr id="47" name="Text 45"/>
-          <p:cNvSpPr txBox="1"/>
-          <p:nvPr/>
-        </p:nvSpPr>
-        <p:spPr>
-          <a:xfrm>
-            <a:off x="4440936" y="5416906"/>
-            <a:ext cx="365760" cy="828446"/>
-          </a:xfrm>
-          <a:prstGeom prst="rect">
-            <a:avLst/>
-          </a:prstGeom>
-          <a:noFill/>
-          <a:ln/>
-        </p:spPr>
-        <p:txBody>
-          <a:bodyPr wrap="square" lIns="0" tIns="0" rIns="0" bIns="0" rtlCol="0" anchor="ctr"/>
-          <a:lstStyle/>
-          <a:p>
-            <a:pPr indent="0" marL="0">
-              <a:buNone/>
-            </a:pPr>
-            <a:r>
-              <a:rPr lang="en-US" sz="1500" b="1" dirty="0">
-                <a:solidFill>
-                  <a:srgbClr val="0B2C4A"/>
-                </a:solidFill>
-                <a:latin typeface="Inter" pitchFamily="34" charset="0"/>
-                <a:ea typeface="Inter" pitchFamily="34" charset="-122"/>
-                <a:cs typeface="Inter" pitchFamily="34" charset="-120"/>
-              </a:rPr>
-              <a:t>29</a:t>
-            </a:r>
-            <a:endParaRPr lang="en-US" sz="1500" dirty="0"/>
-          </a:p>
-        </p:txBody>
-      </p:sp>
-      <p:sp>
-        <p:nvSpPr>
-          <p:cNvPr id="48" name="Text 46"/>
-          <p:cNvSpPr txBox="1"/>
-          <p:nvPr/>
-        </p:nvSpPr>
-        <p:spPr>
-          <a:xfrm>
-            <a:off x="4788408" y="5416906"/>
-            <a:ext cx="1825752" cy="828446"/>
-          </a:xfrm>
-          <a:prstGeom prst="rect">
-            <a:avLst/>
-          </a:prstGeom>
-          <a:noFill/>
-          <a:ln/>
-        </p:spPr>
-        <p:txBody>
-          <a:bodyPr wrap="square" lIns="0" tIns="0" rIns="0" bIns="0" rtlCol="0" anchor="ctr"/>
-          <a:lstStyle/>
-          <a:p>
-            <a:pPr indent="0" marL="0">
-              <a:spcAft>
-                <a:spcPts val="200"/>
-              </a:spcAft>
-              <a:buNone/>
-            </a:pPr>
-            <a:r>
-              <a:rPr lang="en-US" sz="1400" b="1" dirty="0">
-                <a:solidFill>
-                  <a:srgbClr val="1A1A1A"/>
-                </a:solidFill>
-                <a:latin typeface="Inter" pitchFamily="34" charset="0"/>
-                <a:ea typeface="Inter" pitchFamily="34" charset="-122"/>
-                <a:cs typeface="Inter" pitchFamily="34" charset="-120"/>
-              </a:rPr>
-              <a:t>Cadillac</a:t>
-            </a:r>
-            <a:endParaRPr lang="en-US" sz="1400" dirty="0"/>
-          </a:p>
-          <a:p>
-            <a:pPr indent="0" marL="0">
-              <a:spcAft>
-                <a:spcPts val="200"/>
-              </a:spcAft>
-              <a:buNone/>
-            </a:pPr>
-            <a:r>
-              <a:rPr lang="en-US" sz="1200" dirty="0">
-                <a:solidFill>
-                  <a:srgbClr val="595959"/>
-                </a:solidFill>
-                <a:latin typeface="Inter" pitchFamily="34" charset="0"/>
-                <a:ea typeface="Inter" pitchFamily="34" charset="-122"/>
-                <a:cs typeface="Inter" pitchFamily="34" charset="-120"/>
-              </a:rPr>
-              <a:t>32.0%  →  </a:t>
-            </a:r>
-            <a:pPr indent="0" marL="0">
-              <a:spcAft>
-                <a:spcPts val="200"/>
-              </a:spcAft>
-              <a:buNone/>
-            </a:pPr>
-            <a:r>
-              <a:rPr lang="en-US" sz="1200" b="1" dirty="0">
-                <a:solidFill>
-                  <a:srgbClr val="A82B26"/>
-                </a:solidFill>
-                <a:latin typeface="Inter" pitchFamily="34" charset="0"/>
-                <a:ea typeface="Inter" pitchFamily="34" charset="-122"/>
-                <a:cs typeface="Inter" pitchFamily="34" charset="-120"/>
-              </a:rPr>
-              <a:t>27.9%</a:t>
-            </a:r>
-            <a:endParaRPr lang="en-US" sz="1400" dirty="0"/>
-          </a:p>
-        </p:txBody>
-      </p:sp>
-      <p:sp>
-        <p:nvSpPr>
-          <p:cNvPr id="49" name="Text 47"/>
-          <p:cNvSpPr txBox="1"/>
-          <p:nvPr/>
-        </p:nvSpPr>
-        <p:spPr>
-          <a:xfrm>
-            <a:off x="6632448" y="5416906"/>
-            <a:ext cx="1115568" cy="828446"/>
-          </a:xfrm>
-          <a:prstGeom prst="rect">
-            <a:avLst/>
-          </a:prstGeom>
-          <a:noFill/>
-          <a:ln/>
-        </p:spPr>
-        <p:txBody>
-          <a:bodyPr wrap="square" lIns="0" tIns="0" rIns="0" bIns="0" rtlCol="0" anchor="ctr"/>
-          <a:lstStyle/>
-          <a:p>
-            <a:pPr algn="r" indent="0" marL="0">
-              <a:buNone/>
-            </a:pPr>
-            <a:r>
-              <a:rPr lang="en-US" sz="1600" b="1" dirty="0">
-                <a:solidFill>
-                  <a:srgbClr val="A82B26"/>
-                </a:solidFill>
-                <a:latin typeface="Inter" pitchFamily="34" charset="0"/>
-                <a:ea typeface="Inter" pitchFamily="34" charset="-122"/>
-                <a:cs typeface="Inter" pitchFamily="34" charset="-120"/>
-              </a:rPr>
-              <a:t>−4.1 pts</a:t>
-            </a:r>
-            <a:endParaRPr lang="en-US" sz="1600" dirty="0"/>
-          </a:p>
-        </p:txBody>
-      </p:sp>
-      <p:sp>
-        <p:nvSpPr>
-          <p:cNvPr id="50" name="Shape 48"/>
-          <p:cNvSpPr/>
-          <p:nvPr/>
-        </p:nvSpPr>
-        <p:spPr>
-          <a:xfrm>
-            <a:off x="8040624" y="1371600"/>
-            <a:ext cx="3489960" cy="45720"/>
-          </a:xfrm>
-          <a:prstGeom prst="rect">
-            <a:avLst/>
-          </a:prstGeom>
-          <a:solidFill>
-            <a:srgbClr val="2587C5"/>
-          </a:solidFill>
-          <a:ln/>
-        </p:spPr>
-      </p:sp>
-      <p:sp>
-        <p:nvSpPr>
-          <p:cNvPr id="51" name="Text 49"/>
-          <p:cNvSpPr txBox="1"/>
-          <p:nvPr/>
-        </p:nvSpPr>
-        <p:spPr>
-          <a:xfrm>
-            <a:off x="8132064" y="1444752"/>
-            <a:ext cx="3307080" cy="274320"/>
-          </a:xfrm>
-          <a:prstGeom prst="rect">
-            <a:avLst/>
-          </a:prstGeom>
-          <a:noFill/>
-          <a:ln/>
-        </p:spPr>
-        <p:txBody>
-          <a:bodyPr wrap="square" lIns="0" tIns="0" rIns="0" bIns="0" rtlCol="0" anchor="ctr"/>
-          <a:lstStyle/>
-          <a:p>
-            <a:pPr indent="0" marL="0">
-              <a:buNone/>
-            </a:pPr>
-            <a:r>
-              <a:rPr lang="en-US" sz="1500" b="1" spc="100" kern="0" dirty="0">
-                <a:solidFill>
-                  <a:srgbClr val="0B2C4A"/>
-                </a:solidFill>
-                <a:latin typeface="Inter" pitchFamily="34" charset="0"/>
-                <a:ea typeface="Inter" pitchFamily="34" charset="-122"/>
-                <a:cs typeface="Inter" pitchFamily="34" charset="-120"/>
-              </a:rPr>
-              <a:t>TOP 5 MOVING NOW</a:t>
-            </a:r>
-            <a:endParaRPr lang="en-US" sz="1500" dirty="0"/>
-          </a:p>
-        </p:txBody>
-      </p:sp>
-      <p:sp>
-        <p:nvSpPr>
-          <p:cNvPr id="52" name="Text 50"/>
-          <p:cNvSpPr txBox="1"/>
-          <p:nvPr/>
-        </p:nvSpPr>
-        <p:spPr>
-          <a:xfrm>
-            <a:off x="8132064" y="1737360"/>
-            <a:ext cx="3307080" cy="274320"/>
-          </a:xfrm>
-          <a:prstGeom prst="rect">
-            <a:avLst/>
-          </a:prstGeom>
-          <a:noFill/>
-          <a:ln/>
-        </p:spPr>
-        <p:txBody>
-          <a:bodyPr wrap="square" lIns="0" tIns="0" rIns="0" bIns="0" rtlCol="0" anchor="ctr"/>
-          <a:lstStyle/>
-          <a:p>
-            <a:pPr indent="0" marL="0">
-              <a:buNone/>
-            </a:pPr>
-            <a:r>
-              <a:rPr lang="en-US" sz="1200" dirty="0">
-                <a:solidFill>
-                  <a:srgbClr val="595959"/>
-                </a:solidFill>
-                <a:latin typeface="Inter" pitchFamily="34" charset="0"/>
-                <a:ea typeface="Inter" pitchFamily="34" charset="-122"/>
-                <a:cs typeface="Inter" pitchFamily="34" charset="-120"/>
-              </a:rPr>
-              <a:t>Q3 vs Q1, this year</a:t>
-            </a:r>
-            <a:endParaRPr lang="en-US" sz="1200" dirty="0"/>
-          </a:p>
-        </p:txBody>
-      </p:sp>
-      <p:sp>
-        <p:nvSpPr>
-          <p:cNvPr id="53" name="Shape 51"/>
-          <p:cNvSpPr/>
-          <p:nvPr/>
-        </p:nvSpPr>
-        <p:spPr>
-          <a:xfrm>
-            <a:off x="8040624" y="2103120"/>
-            <a:ext cx="3489960" cy="828446"/>
-          </a:xfrm>
-          <a:prstGeom prst="rect">
-            <a:avLst/>
-          </a:prstGeom>
-          <a:solidFill>
-            <a:srgbClr val="F7F7F7"/>
-          </a:solidFill>
-          <a:ln/>
-        </p:spPr>
-      </p:sp>
-      <p:sp>
-        <p:nvSpPr>
-          <p:cNvPr id="54" name="Text 52"/>
-          <p:cNvSpPr txBox="1"/>
-          <p:nvPr/>
-        </p:nvSpPr>
-        <p:spPr>
-          <a:xfrm>
-            <a:off x="8132064" y="2103120"/>
-            <a:ext cx="365760" cy="828446"/>
-          </a:xfrm>
-          <a:prstGeom prst="rect">
-            <a:avLst/>
-          </a:prstGeom>
-          <a:noFill/>
-          <a:ln/>
-        </p:spPr>
-        <p:txBody>
-          <a:bodyPr wrap="square" lIns="0" tIns="0" rIns="0" bIns="0" rtlCol="0" anchor="ctr"/>
-          <a:lstStyle/>
-          <a:p>
-            <a:pPr indent="0" marL="0">
-              <a:buNone/>
-            </a:pPr>
-            <a:r>
-              <a:rPr lang="en-US" sz="1500" b="1" dirty="0">
-                <a:solidFill>
-                  <a:srgbClr val="0B2C4A"/>
-                </a:solidFill>
-                <a:latin typeface="Inter" pitchFamily="34" charset="0"/>
-                <a:ea typeface="Inter" pitchFamily="34" charset="-122"/>
-                <a:cs typeface="Inter" pitchFamily="34" charset="-120"/>
-              </a:rPr>
-              <a:t>1</a:t>
-            </a:r>
-            <a:endParaRPr lang="en-US" sz="1500" dirty="0"/>
-          </a:p>
-        </p:txBody>
-      </p:sp>
-      <p:sp>
-        <p:nvSpPr>
-          <p:cNvPr id="55" name="Text 53"/>
-          <p:cNvSpPr txBox="1"/>
-          <p:nvPr/>
-        </p:nvSpPr>
-        <p:spPr>
-          <a:xfrm>
-            <a:off x="8479536" y="2103120"/>
-            <a:ext cx="1825752" cy="828446"/>
-          </a:xfrm>
-          <a:prstGeom prst="rect">
-            <a:avLst/>
-          </a:prstGeom>
-          <a:noFill/>
-          <a:ln/>
-        </p:spPr>
-        <p:txBody>
-          <a:bodyPr wrap="square" lIns="0" tIns="0" rIns="0" bIns="0" rtlCol="0" anchor="ctr"/>
-          <a:lstStyle/>
-          <a:p>
-            <a:pPr indent="0" marL="0">
-              <a:spcAft>
-                <a:spcPts val="200"/>
-              </a:spcAft>
-              <a:buNone/>
-            </a:pPr>
-            <a:r>
-              <a:rPr lang="en-US" sz="1400" b="1" dirty="0">
-                <a:solidFill>
-                  <a:srgbClr val="1A1A1A"/>
-                </a:solidFill>
-                <a:latin typeface="Inter" pitchFamily="34" charset="0"/>
-                <a:ea typeface="Inter" pitchFamily="34" charset="-122"/>
-                <a:cs typeface="Inter" pitchFamily="34" charset="-120"/>
-              </a:rPr>
-              <a:t>Lexus</a:t>
-            </a:r>
-            <a:endParaRPr lang="en-US" sz="1400" dirty="0"/>
-          </a:p>
-          <a:p>
-            <a:pPr indent="0" marL="0">
-              <a:spcAft>
-                <a:spcPts val="200"/>
-              </a:spcAft>
-              <a:buNone/>
-            </a:pPr>
-            <a:r>
-              <a:rPr lang="en-US" sz="1200" dirty="0">
-                <a:solidFill>
-                  <a:srgbClr val="595959"/>
-                </a:solidFill>
-                <a:latin typeface="Inter" pitchFamily="34" charset="0"/>
-                <a:ea typeface="Inter" pitchFamily="34" charset="-122"/>
-                <a:cs typeface="Inter" pitchFamily="34" charset="-120"/>
-              </a:rPr>
-              <a:t>48.9%  →  </a:t>
-            </a:r>
-            <a:pPr indent="0" marL="0">
-              <a:spcAft>
-                <a:spcPts val="200"/>
-              </a:spcAft>
-              <a:buNone/>
-            </a:pPr>
-            <a:r>
-              <a:rPr lang="en-US" sz="1200" b="1" dirty="0">
+              <a:rPr lang="en-US" sz="1800" b="1" dirty="0">
                 <a:solidFill>
                   <a:srgbClr val="0B7A4A"/>
                 </a:solidFill>
@@ -19828,756 +19533,9 @@
                 <a:ea typeface="Inter" pitchFamily="34" charset="-122"/>
                 <a:cs typeface="Inter" pitchFamily="34" charset="-120"/>
               </a:rPr>
-              <a:t>57.7%</a:t>
-            </a:r>
-            <a:endParaRPr lang="en-US" sz="1400" dirty="0"/>
-          </a:p>
-        </p:txBody>
-      </p:sp>
-      <p:sp>
-        <p:nvSpPr>
-          <p:cNvPr id="56" name="Text 54"/>
-          <p:cNvSpPr txBox="1"/>
-          <p:nvPr/>
-        </p:nvSpPr>
-        <p:spPr>
-          <a:xfrm>
-            <a:off x="10323576" y="2103120"/>
-            <a:ext cx="1115568" cy="828446"/>
-          </a:xfrm>
-          <a:prstGeom prst="rect">
-            <a:avLst/>
-          </a:prstGeom>
-          <a:noFill/>
-          <a:ln/>
-        </p:spPr>
-        <p:txBody>
-          <a:bodyPr wrap="square" lIns="0" tIns="0" rIns="0" bIns="0" rtlCol="0" anchor="ctr"/>
-          <a:lstStyle/>
-          <a:p>
-            <a:pPr algn="r" indent="0" marL="0">
-              <a:buNone/>
-            </a:pPr>
-            <a:r>
-              <a:rPr lang="en-US" sz="1600" b="1" dirty="0">
-                <a:solidFill>
-                  <a:srgbClr val="0B7A4A"/>
-                </a:solidFill>
-                <a:latin typeface="Inter" pitchFamily="34" charset="0"/>
-                <a:ea typeface="Inter" pitchFamily="34" charset="-122"/>
-                <a:cs typeface="Inter" pitchFamily="34" charset="-120"/>
-              </a:rPr>
-              <a:t>+8.8 pts</a:t>
-            </a:r>
-            <a:endParaRPr lang="en-US" sz="1600" dirty="0"/>
-          </a:p>
-        </p:txBody>
-      </p:sp>
-      <p:sp>
-        <p:nvSpPr>
-          <p:cNvPr id="57" name="Shape 55"/>
-          <p:cNvSpPr/>
-          <p:nvPr/>
-        </p:nvSpPr>
-        <p:spPr>
-          <a:xfrm>
-            <a:off x="11466576" y="2968142"/>
-            <a:ext cx="64008" cy="755294"/>
-          </a:xfrm>
-          <a:prstGeom prst="rect">
-            <a:avLst/>
-          </a:prstGeom>
-          <a:solidFill>
-            <a:srgbClr val="12A566"/>
-          </a:solidFill>
-          <a:ln/>
-        </p:spPr>
-      </p:sp>
-      <p:sp>
-        <p:nvSpPr>
-          <p:cNvPr id="58" name="Text 56"/>
-          <p:cNvSpPr txBox="1"/>
-          <p:nvPr/>
-        </p:nvSpPr>
-        <p:spPr>
-          <a:xfrm>
-            <a:off x="8132064" y="2931566"/>
-            <a:ext cx="365760" cy="828446"/>
-          </a:xfrm>
-          <a:prstGeom prst="rect">
-            <a:avLst/>
-          </a:prstGeom>
-          <a:noFill/>
-          <a:ln/>
-        </p:spPr>
-        <p:txBody>
-          <a:bodyPr wrap="square" lIns="0" tIns="0" rIns="0" bIns="0" rtlCol="0" anchor="ctr"/>
-          <a:lstStyle/>
-          <a:p>
-            <a:pPr indent="0" marL="0">
-              <a:buNone/>
-            </a:pPr>
-            <a:r>
-              <a:rPr lang="en-US" sz="1500" b="1" dirty="0">
-                <a:solidFill>
-                  <a:srgbClr val="0B2C4A"/>
-                </a:solidFill>
-                <a:latin typeface="Inter" pitchFamily="34" charset="0"/>
-                <a:ea typeface="Inter" pitchFamily="34" charset="-122"/>
-                <a:cs typeface="Inter" pitchFamily="34" charset="-120"/>
-              </a:rPr>
-              <a:t>2</a:t>
-            </a:r>
-            <a:endParaRPr lang="en-US" sz="1500" dirty="0"/>
-          </a:p>
-        </p:txBody>
-      </p:sp>
-      <p:sp>
-        <p:nvSpPr>
-          <p:cNvPr id="59" name="Text 57"/>
-          <p:cNvSpPr txBox="1"/>
-          <p:nvPr/>
-        </p:nvSpPr>
-        <p:spPr>
-          <a:xfrm>
-            <a:off x="8479536" y="2931566"/>
-            <a:ext cx="1825752" cy="828446"/>
-          </a:xfrm>
-          <a:prstGeom prst="rect">
-            <a:avLst/>
-          </a:prstGeom>
-          <a:noFill/>
-          <a:ln/>
-        </p:spPr>
-        <p:txBody>
-          <a:bodyPr wrap="square" lIns="0" tIns="0" rIns="0" bIns="0" rtlCol="0" anchor="ctr"/>
-          <a:lstStyle/>
-          <a:p>
-            <a:pPr indent="0" marL="0">
-              <a:spcAft>
-                <a:spcPts val="200"/>
-              </a:spcAft>
-              <a:buNone/>
-            </a:pPr>
-            <a:r>
-              <a:rPr lang="en-US" sz="1400" b="1" dirty="0">
-                <a:solidFill>
-                  <a:srgbClr val="1A1A1A"/>
-                </a:solidFill>
-                <a:latin typeface="Inter" pitchFamily="34" charset="0"/>
-                <a:ea typeface="Inter" pitchFamily="34" charset="-122"/>
-                <a:cs typeface="Inter" pitchFamily="34" charset="-120"/>
-              </a:rPr>
-              <a:t>Acura</a:t>
-            </a:r>
-            <a:endParaRPr lang="en-US" sz="1400" dirty="0"/>
-          </a:p>
-          <a:p>
-            <a:pPr indent="0" marL="0">
-              <a:spcAft>
-                <a:spcPts val="200"/>
-              </a:spcAft>
-              <a:buNone/>
-            </a:pPr>
-            <a:r>
-              <a:rPr lang="en-US" sz="1200" dirty="0">
-                <a:solidFill>
-                  <a:srgbClr val="595959"/>
-                </a:solidFill>
-                <a:latin typeface="Inter" pitchFamily="34" charset="0"/>
-                <a:ea typeface="Inter" pitchFamily="34" charset="-122"/>
-                <a:cs typeface="Inter" pitchFamily="34" charset="-120"/>
-              </a:rPr>
-              <a:t>45.7%  →  </a:t>
-            </a:r>
-            <a:pPr indent="0" marL="0">
-              <a:spcAft>
-                <a:spcPts val="200"/>
-              </a:spcAft>
-              <a:buNone/>
-            </a:pPr>
-            <a:r>
-              <a:rPr lang="en-US" sz="1200" b="1" dirty="0">
-                <a:solidFill>
-                  <a:srgbClr val="0B7A4A"/>
-                </a:solidFill>
-                <a:latin typeface="Inter" pitchFamily="34" charset="0"/>
-                <a:ea typeface="Inter" pitchFamily="34" charset="-122"/>
-                <a:cs typeface="Inter" pitchFamily="34" charset="-120"/>
-              </a:rPr>
-              <a:t>52.5%</a:t>
-            </a:r>
-            <a:endParaRPr lang="en-US" sz="1400" dirty="0"/>
-          </a:p>
-        </p:txBody>
-      </p:sp>
-      <p:sp>
-        <p:nvSpPr>
-          <p:cNvPr id="60" name="Text 58"/>
-          <p:cNvSpPr txBox="1"/>
-          <p:nvPr/>
-        </p:nvSpPr>
-        <p:spPr>
-          <a:xfrm>
-            <a:off x="10323576" y="2931566"/>
-            <a:ext cx="1115568" cy="828446"/>
-          </a:xfrm>
-          <a:prstGeom prst="rect">
-            <a:avLst/>
-          </a:prstGeom>
-          <a:noFill/>
-          <a:ln/>
-        </p:spPr>
-        <p:txBody>
-          <a:bodyPr wrap="square" lIns="0" tIns="0" rIns="0" bIns="0" rtlCol="0" anchor="ctr"/>
-          <a:lstStyle/>
-          <a:p>
-            <a:pPr algn="r" indent="0" marL="0">
-              <a:buNone/>
-            </a:pPr>
-            <a:r>
-              <a:rPr lang="en-US" sz="1600" b="1" dirty="0">
-                <a:solidFill>
-                  <a:srgbClr val="0B7A4A"/>
-                </a:solidFill>
-                <a:latin typeface="Inter" pitchFamily="34" charset="0"/>
-                <a:ea typeface="Inter" pitchFamily="34" charset="-122"/>
-                <a:cs typeface="Inter" pitchFamily="34" charset="-120"/>
-              </a:rPr>
-              <a:t>+6.8 pts</a:t>
-            </a:r>
-            <a:endParaRPr lang="en-US" sz="1600" dirty="0"/>
-          </a:p>
-        </p:txBody>
-      </p:sp>
-      <p:sp>
-        <p:nvSpPr>
-          <p:cNvPr id="61" name="Shape 59"/>
-          <p:cNvSpPr/>
-          <p:nvPr/>
-        </p:nvSpPr>
-        <p:spPr>
-          <a:xfrm>
-            <a:off x="8040624" y="3760013"/>
-            <a:ext cx="3489960" cy="828446"/>
-          </a:xfrm>
-          <a:prstGeom prst="rect">
-            <a:avLst/>
-          </a:prstGeom>
-          <a:solidFill>
-            <a:srgbClr val="F7F7F7"/>
-          </a:solidFill>
-          <a:ln/>
-        </p:spPr>
-      </p:sp>
-      <p:sp>
-        <p:nvSpPr>
-          <p:cNvPr id="62" name="Text 60"/>
-          <p:cNvSpPr txBox="1"/>
-          <p:nvPr/>
-        </p:nvSpPr>
-        <p:spPr>
-          <a:xfrm>
-            <a:off x="8132064" y="3760013"/>
-            <a:ext cx="365760" cy="828446"/>
-          </a:xfrm>
-          <a:prstGeom prst="rect">
-            <a:avLst/>
-          </a:prstGeom>
-          <a:noFill/>
-          <a:ln/>
-        </p:spPr>
-        <p:txBody>
-          <a:bodyPr wrap="square" lIns="0" tIns="0" rIns="0" bIns="0" rtlCol="0" anchor="ctr"/>
-          <a:lstStyle/>
-          <a:p>
-            <a:pPr indent="0" marL="0">
-              <a:buNone/>
-            </a:pPr>
-            <a:r>
-              <a:rPr lang="en-US" sz="1500" b="1" dirty="0">
-                <a:solidFill>
-                  <a:srgbClr val="0B2C4A"/>
-                </a:solidFill>
-                <a:latin typeface="Inter" pitchFamily="34" charset="0"/>
-                <a:ea typeface="Inter" pitchFamily="34" charset="-122"/>
-                <a:cs typeface="Inter" pitchFamily="34" charset="-120"/>
-              </a:rPr>
-              <a:t>3</a:t>
-            </a:r>
-            <a:endParaRPr lang="en-US" sz="1500" dirty="0"/>
-          </a:p>
-        </p:txBody>
-      </p:sp>
-      <p:sp>
-        <p:nvSpPr>
-          <p:cNvPr id="63" name="Text 61"/>
-          <p:cNvSpPr txBox="1"/>
-          <p:nvPr/>
-        </p:nvSpPr>
-        <p:spPr>
-          <a:xfrm>
-            <a:off x="8479536" y="3760013"/>
-            <a:ext cx="1825752" cy="828446"/>
-          </a:xfrm>
-          <a:prstGeom prst="rect">
-            <a:avLst/>
-          </a:prstGeom>
-          <a:noFill/>
-          <a:ln/>
-        </p:spPr>
-        <p:txBody>
-          <a:bodyPr wrap="square" lIns="0" tIns="0" rIns="0" bIns="0" rtlCol="0" anchor="ctr"/>
-          <a:lstStyle/>
-          <a:p>
-            <a:pPr indent="0" marL="0">
-              <a:spcAft>
-                <a:spcPts val="200"/>
-              </a:spcAft>
-              <a:buNone/>
-            </a:pPr>
-            <a:r>
-              <a:rPr lang="en-US" sz="1400" b="1" dirty="0">
-                <a:solidFill>
-                  <a:srgbClr val="1A1A1A"/>
-                </a:solidFill>
-                <a:latin typeface="Inter" pitchFamily="34" charset="0"/>
-                <a:ea typeface="Inter" pitchFamily="34" charset="-122"/>
-                <a:cs typeface="Inter" pitchFamily="34" charset="-120"/>
-              </a:rPr>
-              <a:t>Chevy GMC Bullhead</a:t>
-            </a:r>
-            <a:endParaRPr lang="en-US" sz="1400" dirty="0"/>
-          </a:p>
-          <a:p>
-            <a:pPr indent="0" marL="0">
-              <a:spcAft>
-                <a:spcPts val="200"/>
-              </a:spcAft>
-              <a:buNone/>
-            </a:pPr>
-            <a:r>
-              <a:rPr lang="en-US" sz="1200" dirty="0">
-                <a:solidFill>
-                  <a:srgbClr val="595959"/>
-                </a:solidFill>
-                <a:latin typeface="Inter" pitchFamily="34" charset="0"/>
-                <a:ea typeface="Inter" pitchFamily="34" charset="-122"/>
-                <a:cs typeface="Inter" pitchFamily="34" charset="-120"/>
-              </a:rPr>
-              <a:t>42.2%  →  </a:t>
-            </a:r>
-            <a:pPr indent="0" marL="0">
-              <a:spcAft>
-                <a:spcPts val="200"/>
-              </a:spcAft>
-              <a:buNone/>
-            </a:pPr>
-            <a:r>
-              <a:rPr lang="en-US" sz="1200" b="1" dirty="0">
-                <a:solidFill>
-                  <a:srgbClr val="0B7A4A"/>
-                </a:solidFill>
-                <a:latin typeface="Inter" pitchFamily="34" charset="0"/>
-                <a:ea typeface="Inter" pitchFamily="34" charset="-122"/>
-                <a:cs typeface="Inter" pitchFamily="34" charset="-120"/>
-              </a:rPr>
-              <a:t>48.3%</a:t>
-            </a:r>
-            <a:endParaRPr lang="en-US" sz="1400" dirty="0"/>
-          </a:p>
-        </p:txBody>
-      </p:sp>
-      <p:sp>
-        <p:nvSpPr>
-          <p:cNvPr id="64" name="Text 62"/>
-          <p:cNvSpPr txBox="1"/>
-          <p:nvPr/>
-        </p:nvSpPr>
-        <p:spPr>
-          <a:xfrm>
-            <a:off x="10323576" y="3760013"/>
-            <a:ext cx="1115568" cy="828446"/>
-          </a:xfrm>
-          <a:prstGeom prst="rect">
-            <a:avLst/>
-          </a:prstGeom>
-          <a:noFill/>
-          <a:ln/>
-        </p:spPr>
-        <p:txBody>
-          <a:bodyPr wrap="square" lIns="0" tIns="0" rIns="0" bIns="0" rtlCol="0" anchor="ctr"/>
-          <a:lstStyle/>
-          <a:p>
-            <a:pPr algn="r" indent="0" marL="0">
-              <a:buNone/>
-            </a:pPr>
-            <a:r>
-              <a:rPr lang="en-US" sz="1600" b="1" dirty="0">
-                <a:solidFill>
-                  <a:srgbClr val="0B7A4A"/>
-                </a:solidFill>
-                <a:latin typeface="Inter" pitchFamily="34" charset="0"/>
-                <a:ea typeface="Inter" pitchFamily="34" charset="-122"/>
-                <a:cs typeface="Inter" pitchFamily="34" charset="-120"/>
-              </a:rPr>
               <a:t>+6.1 pts</a:t>
             </a:r>
-            <a:endParaRPr lang="en-US" sz="1600" dirty="0"/>
-          </a:p>
-        </p:txBody>
-      </p:sp>
-      <p:sp>
-        <p:nvSpPr>
-          <p:cNvPr id="65" name="Text 63"/>
-          <p:cNvSpPr txBox="1"/>
-          <p:nvPr/>
-        </p:nvSpPr>
-        <p:spPr>
-          <a:xfrm>
-            <a:off x="8132064" y="4588459"/>
-            <a:ext cx="365760" cy="828446"/>
-          </a:xfrm>
-          <a:prstGeom prst="rect">
-            <a:avLst/>
-          </a:prstGeom>
-          <a:noFill/>
-          <a:ln/>
-        </p:spPr>
-        <p:txBody>
-          <a:bodyPr wrap="square" lIns="0" tIns="0" rIns="0" bIns="0" rtlCol="0" anchor="ctr"/>
-          <a:lstStyle/>
-          <a:p>
-            <a:pPr indent="0" marL="0">
-              <a:buNone/>
-            </a:pPr>
-            <a:r>
-              <a:rPr lang="en-US" sz="1500" b="1" dirty="0">
-                <a:solidFill>
-                  <a:srgbClr val="0B2C4A"/>
-                </a:solidFill>
-                <a:latin typeface="Inter" pitchFamily="34" charset="0"/>
-                <a:ea typeface="Inter" pitchFamily="34" charset="-122"/>
-                <a:cs typeface="Inter" pitchFamily="34" charset="-120"/>
-              </a:rPr>
-              <a:t>4</a:t>
-            </a:r>
-            <a:endParaRPr lang="en-US" sz="1500" dirty="0"/>
-          </a:p>
-        </p:txBody>
-      </p:sp>
-      <p:sp>
-        <p:nvSpPr>
-          <p:cNvPr id="66" name="Text 64"/>
-          <p:cNvSpPr txBox="1"/>
-          <p:nvPr/>
-        </p:nvSpPr>
-        <p:spPr>
-          <a:xfrm>
-            <a:off x="8479536" y="4588459"/>
-            <a:ext cx="1825752" cy="828446"/>
-          </a:xfrm>
-          <a:prstGeom prst="rect">
-            <a:avLst/>
-          </a:prstGeom>
-          <a:noFill/>
-          <a:ln/>
-        </p:spPr>
-        <p:txBody>
-          <a:bodyPr wrap="square" lIns="0" tIns="0" rIns="0" bIns="0" rtlCol="0" anchor="ctr"/>
-          <a:lstStyle/>
-          <a:p>
-            <a:pPr indent="0" marL="0">
-              <a:spcAft>
-                <a:spcPts val="200"/>
-              </a:spcAft>
-              <a:buNone/>
-            </a:pPr>
-            <a:r>
-              <a:rPr lang="en-US" sz="1400" b="1" dirty="0">
-                <a:solidFill>
-                  <a:srgbClr val="1A1A1A"/>
-                </a:solidFill>
-                <a:latin typeface="Inter" pitchFamily="34" charset="0"/>
-                <a:ea typeface="Inter" pitchFamily="34" charset="-122"/>
-                <a:cs typeface="Inter" pitchFamily="34" charset="-120"/>
-              </a:rPr>
-              <a:t>GMC Prescott</a:t>
-            </a:r>
-            <a:endParaRPr lang="en-US" sz="1400" dirty="0"/>
-          </a:p>
-          <a:p>
-            <a:pPr indent="0" marL="0">
-              <a:spcAft>
-                <a:spcPts val="200"/>
-              </a:spcAft>
-              <a:buNone/>
-            </a:pPr>
-            <a:r>
-              <a:rPr lang="en-US" sz="1200" dirty="0">
-                <a:solidFill>
-                  <a:srgbClr val="595959"/>
-                </a:solidFill>
-                <a:latin typeface="Inter" pitchFamily="34" charset="0"/>
-                <a:ea typeface="Inter" pitchFamily="34" charset="-122"/>
-                <a:cs typeface="Inter" pitchFamily="34" charset="-120"/>
-              </a:rPr>
-              <a:t>45.7%  →  </a:t>
-            </a:r>
-            <a:pPr indent="0" marL="0">
-              <a:spcAft>
-                <a:spcPts val="200"/>
-              </a:spcAft>
-              <a:buNone/>
-            </a:pPr>
-            <a:r>
-              <a:rPr lang="en-US" sz="1200" b="1" dirty="0">
-                <a:solidFill>
-                  <a:srgbClr val="0B7A4A"/>
-                </a:solidFill>
-                <a:latin typeface="Inter" pitchFamily="34" charset="0"/>
-                <a:ea typeface="Inter" pitchFamily="34" charset="-122"/>
-                <a:cs typeface="Inter" pitchFamily="34" charset="-120"/>
-              </a:rPr>
-              <a:t>51.5%</a:t>
-            </a:r>
-            <a:endParaRPr lang="en-US" sz="1400" dirty="0"/>
-          </a:p>
-        </p:txBody>
-      </p:sp>
-      <p:sp>
-        <p:nvSpPr>
-          <p:cNvPr id="67" name="Text 65"/>
-          <p:cNvSpPr txBox="1"/>
-          <p:nvPr/>
-        </p:nvSpPr>
-        <p:spPr>
-          <a:xfrm>
-            <a:off x="10323576" y="4588459"/>
-            <a:ext cx="1115568" cy="828446"/>
-          </a:xfrm>
-          <a:prstGeom prst="rect">
-            <a:avLst/>
-          </a:prstGeom>
-          <a:noFill/>
-          <a:ln/>
-        </p:spPr>
-        <p:txBody>
-          <a:bodyPr wrap="square" lIns="0" tIns="0" rIns="0" bIns="0" rtlCol="0" anchor="ctr"/>
-          <a:lstStyle/>
-          <a:p>
-            <a:pPr algn="r" indent="0" marL="0">
-              <a:buNone/>
-            </a:pPr>
-            <a:r>
-              <a:rPr lang="en-US" sz="1600" b="1" dirty="0">
-                <a:solidFill>
-                  <a:srgbClr val="0B7A4A"/>
-                </a:solidFill>
-                <a:latin typeface="Inter" pitchFamily="34" charset="0"/>
-                <a:ea typeface="Inter" pitchFamily="34" charset="-122"/>
-                <a:cs typeface="Inter" pitchFamily="34" charset="-120"/>
-              </a:rPr>
-              <a:t>+5.8 pts</a:t>
-            </a:r>
-            <a:endParaRPr lang="en-US" sz="1600" dirty="0"/>
-          </a:p>
-        </p:txBody>
-      </p:sp>
-      <p:sp>
-        <p:nvSpPr>
-          <p:cNvPr id="68" name="Shape 66"/>
-          <p:cNvSpPr/>
-          <p:nvPr/>
-        </p:nvSpPr>
-        <p:spPr>
-          <a:xfrm>
-            <a:off x="8040624" y="5416906"/>
-            <a:ext cx="3489960" cy="828446"/>
-          </a:xfrm>
-          <a:prstGeom prst="rect">
-            <a:avLst/>
-          </a:prstGeom>
-          <a:solidFill>
-            <a:srgbClr val="F7F7F7"/>
-          </a:solidFill>
-          <a:ln/>
-        </p:spPr>
-      </p:sp>
-      <p:sp>
-        <p:nvSpPr>
-          <p:cNvPr id="69" name="Shape 67"/>
-          <p:cNvSpPr/>
-          <p:nvPr/>
-        </p:nvSpPr>
-        <p:spPr>
-          <a:xfrm>
-            <a:off x="11466576" y="5453482"/>
-            <a:ext cx="64008" cy="755294"/>
-          </a:xfrm>
-          <a:prstGeom prst="rect">
-            <a:avLst/>
-          </a:prstGeom>
-          <a:solidFill>
-            <a:srgbClr val="2587C5"/>
-          </a:solidFill>
-          <a:ln/>
-        </p:spPr>
-      </p:sp>
-      <p:sp>
-        <p:nvSpPr>
-          <p:cNvPr id="70" name="Text 68"/>
-          <p:cNvSpPr txBox="1"/>
-          <p:nvPr/>
-        </p:nvSpPr>
-        <p:spPr>
-          <a:xfrm>
-            <a:off x="8132064" y="5416906"/>
-            <a:ext cx="365760" cy="828446"/>
-          </a:xfrm>
-          <a:prstGeom prst="rect">
-            <a:avLst/>
-          </a:prstGeom>
-          <a:noFill/>
-          <a:ln/>
-        </p:spPr>
-        <p:txBody>
-          <a:bodyPr wrap="square" lIns="0" tIns="0" rIns="0" bIns="0" rtlCol="0" anchor="ctr"/>
-          <a:lstStyle/>
-          <a:p>
-            <a:pPr indent="0" marL="0">
-              <a:buNone/>
-            </a:pPr>
-            <a:r>
-              <a:rPr lang="en-US" sz="1500" b="1" dirty="0">
-                <a:solidFill>
-                  <a:srgbClr val="0B2C4A"/>
-                </a:solidFill>
-                <a:latin typeface="Inter" pitchFamily="34" charset="0"/>
-                <a:ea typeface="Inter" pitchFamily="34" charset="-122"/>
-                <a:cs typeface="Inter" pitchFamily="34" charset="-120"/>
-              </a:rPr>
-              <a:t>5</a:t>
-            </a:r>
-            <a:endParaRPr lang="en-US" sz="1500" dirty="0"/>
-          </a:p>
-        </p:txBody>
-      </p:sp>
-      <p:sp>
-        <p:nvSpPr>
-          <p:cNvPr id="71" name="Text 69"/>
-          <p:cNvSpPr txBox="1"/>
-          <p:nvPr/>
-        </p:nvSpPr>
-        <p:spPr>
-          <a:xfrm>
-            <a:off x="8479536" y="5416906"/>
-            <a:ext cx="1825752" cy="828446"/>
-          </a:xfrm>
-          <a:prstGeom prst="rect">
-            <a:avLst/>
-          </a:prstGeom>
-          <a:noFill/>
-          <a:ln/>
-        </p:spPr>
-        <p:txBody>
-          <a:bodyPr wrap="square" lIns="0" tIns="0" rIns="0" bIns="0" rtlCol="0" anchor="ctr"/>
-          <a:lstStyle/>
-          <a:p>
-            <a:pPr indent="0" marL="0">
-              <a:spcAft>
-                <a:spcPts val="200"/>
-              </a:spcAft>
-              <a:buNone/>
-            </a:pPr>
-            <a:r>
-              <a:rPr lang="en-US" sz="1400" b="1" dirty="0">
-                <a:solidFill>
-                  <a:srgbClr val="1A1A1A"/>
-                </a:solidFill>
-                <a:latin typeface="Inter" pitchFamily="34" charset="0"/>
-                <a:ea typeface="Inter" pitchFamily="34" charset="-122"/>
-                <a:cs typeface="Inter" pitchFamily="34" charset="-120"/>
-              </a:rPr>
-              <a:t>Audi Henderson</a:t>
-            </a:r>
-            <a:endParaRPr lang="en-US" sz="1400" dirty="0"/>
-          </a:p>
-          <a:p>
-            <a:pPr indent="0" marL="0">
-              <a:spcAft>
-                <a:spcPts val="200"/>
-              </a:spcAft>
-              <a:buNone/>
-            </a:pPr>
-            <a:r>
-              <a:rPr lang="en-US" sz="1200" dirty="0">
-                <a:solidFill>
-                  <a:srgbClr val="595959"/>
-                </a:solidFill>
-                <a:latin typeface="Inter" pitchFamily="34" charset="0"/>
-                <a:ea typeface="Inter" pitchFamily="34" charset="-122"/>
-                <a:cs typeface="Inter" pitchFamily="34" charset="-120"/>
-              </a:rPr>
-              <a:t>31.3%  →  </a:t>
-            </a:r>
-            <a:pPr indent="0" marL="0">
-              <a:spcAft>
-                <a:spcPts val="200"/>
-              </a:spcAft>
-              <a:buNone/>
-            </a:pPr>
-            <a:r>
-              <a:rPr lang="en-US" sz="1200" b="1" dirty="0">
-                <a:solidFill>
-                  <a:srgbClr val="0B7A4A"/>
-                </a:solidFill>
-                <a:latin typeface="Inter" pitchFamily="34" charset="0"/>
-                <a:ea typeface="Inter" pitchFamily="34" charset="-122"/>
-                <a:cs typeface="Inter" pitchFamily="34" charset="-120"/>
-              </a:rPr>
-              <a:t>36.9%</a:t>
-            </a:r>
-            <a:endParaRPr lang="en-US" sz="1400" dirty="0"/>
-          </a:p>
-        </p:txBody>
-      </p:sp>
-      <p:sp>
-        <p:nvSpPr>
-          <p:cNvPr id="72" name="Text 70"/>
-          <p:cNvSpPr txBox="1"/>
-          <p:nvPr/>
-        </p:nvSpPr>
-        <p:spPr>
-          <a:xfrm>
-            <a:off x="10323576" y="5416906"/>
-            <a:ext cx="1115568" cy="828446"/>
-          </a:xfrm>
-          <a:prstGeom prst="rect">
-            <a:avLst/>
-          </a:prstGeom>
-          <a:noFill/>
-          <a:ln/>
-        </p:spPr>
-        <p:txBody>
-          <a:bodyPr wrap="square" lIns="0" tIns="0" rIns="0" bIns="0" rtlCol="0" anchor="ctr"/>
-          <a:lstStyle/>
-          <a:p>
-            <a:pPr algn="r" indent="0" marL="0">
-              <a:buNone/>
-            </a:pPr>
-            <a:r>
-              <a:rPr lang="en-US" sz="1600" b="1" dirty="0">
-                <a:solidFill>
-                  <a:srgbClr val="0B7A4A"/>
-                </a:solidFill>
-                <a:latin typeface="Inter" pitchFamily="34" charset="0"/>
-                <a:ea typeface="Inter" pitchFamily="34" charset="-122"/>
-                <a:cs typeface="Inter" pitchFamily="34" charset="-120"/>
-              </a:rPr>
-              <a:t>+5.6 pts</a:t>
-            </a:r>
-            <a:endParaRPr lang="en-US" sz="1600" dirty="0"/>
+            <a:endParaRPr lang="en-US" sz="1800" dirty="0"/>
           </a:p>
         </p:txBody>
       </p:sp>
